--- a/presentation/Lecture Slides.pptx
+++ b/presentation/Lecture Slides.pptx
@@ -18,24 +18,23 @@
     <p:sldId id="266" r:id="rId12"/>
     <p:sldId id="267" r:id="rId13"/>
     <p:sldId id="272" r:id="rId14"/>
-    <p:sldId id="273" r:id="rId15"/>
-    <p:sldId id="269" r:id="rId16"/>
-    <p:sldId id="274" r:id="rId17"/>
-    <p:sldId id="275" r:id="rId18"/>
-    <p:sldId id="276" r:id="rId19"/>
-    <p:sldId id="277" r:id="rId20"/>
-    <p:sldId id="278" r:id="rId21"/>
-    <p:sldId id="279" r:id="rId22"/>
-    <p:sldId id="280" r:id="rId23"/>
-    <p:sldId id="281" r:id="rId24"/>
-    <p:sldId id="282" r:id="rId25"/>
-    <p:sldId id="283" r:id="rId26"/>
-    <p:sldId id="284" r:id="rId27"/>
-    <p:sldId id="270" r:id="rId28"/>
-    <p:sldId id="285" r:id="rId29"/>
-    <p:sldId id="271" r:id="rId30"/>
-    <p:sldId id="286" r:id="rId31"/>
-    <p:sldId id="287" r:id="rId32"/>
+    <p:sldId id="269" r:id="rId15"/>
+    <p:sldId id="274" r:id="rId16"/>
+    <p:sldId id="275" r:id="rId17"/>
+    <p:sldId id="276" r:id="rId18"/>
+    <p:sldId id="277" r:id="rId19"/>
+    <p:sldId id="278" r:id="rId20"/>
+    <p:sldId id="279" r:id="rId21"/>
+    <p:sldId id="280" r:id="rId22"/>
+    <p:sldId id="281" r:id="rId23"/>
+    <p:sldId id="282" r:id="rId24"/>
+    <p:sldId id="283" r:id="rId25"/>
+    <p:sldId id="284" r:id="rId26"/>
+    <p:sldId id="270" r:id="rId27"/>
+    <p:sldId id="285" r:id="rId28"/>
+    <p:sldId id="271" r:id="rId29"/>
+    <p:sldId id="286" r:id="rId30"/>
+    <p:sldId id="287" r:id="rId31"/>
   </p:sldIdLst>
   <p:sldSz cx="12192000" cy="6858000"/>
   <p:notesSz cx="6858000" cy="9144000"/>
@@ -1721,7 +1720,7 @@
             <a:fld id="{87DE6118-2437-4B30-8E3C-4D2BE6020583}" type="datetimeFigureOut">
               <a:rPr lang="en-US" dirty="0"/>
               <a:pPr/>
-              <a:t>11/28/25</a:t>
+              <a:t>11/29/25</a:t>
             </a:fld>
             <a:endParaRPr lang="en-US" dirty="0"/>
           </a:p>
@@ -2047,7 +2046,7 @@
           <a:p>
             <a:fld id="{87DE6118-2437-4B30-8E3C-4D2BE6020583}" type="datetimeFigureOut">
               <a:rPr lang="en-US" dirty="0"/>
-              <a:t>11/28/25</a:t>
+              <a:t>11/29/25</a:t>
             </a:fld>
             <a:endParaRPr lang="en-US" dirty="0"/>
           </a:p>
@@ -2222,7 +2221,7 @@
           <a:p>
             <a:fld id="{87DE6118-2437-4B30-8E3C-4D2BE6020583}" type="datetimeFigureOut">
               <a:rPr lang="en-US" dirty="0"/>
-              <a:t>11/28/25</a:t>
+              <a:t>11/29/25</a:t>
             </a:fld>
             <a:endParaRPr lang="en-US" dirty="0"/>
           </a:p>
@@ -2387,7 +2386,7 @@
           <a:p>
             <a:fld id="{87DE6118-2437-4B30-8E3C-4D2BE6020583}" type="datetimeFigureOut">
               <a:rPr lang="en-US" dirty="0"/>
-              <a:t>11/28/25</a:t>
+              <a:t>11/29/25</a:t>
             </a:fld>
             <a:endParaRPr lang="en-US" dirty="0"/>
           </a:p>
@@ -2660,7 +2659,7 @@
             <a:fld id="{87DE6118-2437-4B30-8E3C-4D2BE6020583}" type="datetimeFigureOut">
               <a:rPr lang="en-US" dirty="0"/>
               <a:pPr/>
-              <a:t>11/28/25</a:t>
+              <a:t>11/29/25</a:t>
             </a:fld>
             <a:endParaRPr lang="en-US" dirty="0"/>
           </a:p>
@@ -3050,7 +3049,7 @@
           <a:p>
             <a:fld id="{87DE6118-2437-4B30-8E3C-4D2BE6020583}" type="datetimeFigureOut">
               <a:rPr lang="en-US" dirty="0"/>
-              <a:t>11/28/25</a:t>
+              <a:t>11/29/25</a:t>
             </a:fld>
             <a:endParaRPr lang="en-US" dirty="0"/>
           </a:p>
@@ -3522,7 +3521,7 @@
           <a:p>
             <a:fld id="{87DE6118-2437-4B30-8E3C-4D2BE6020583}" type="datetimeFigureOut">
               <a:rPr lang="en-US" dirty="0"/>
-              <a:t>11/28/25</a:t>
+              <a:t>11/29/25</a:t>
             </a:fld>
             <a:endParaRPr lang="en-US" dirty="0"/>
           </a:p>
@@ -3635,7 +3634,7 @@
           <a:p>
             <a:fld id="{87DE6118-2437-4B30-8E3C-4D2BE6020583}" type="datetimeFigureOut">
               <a:rPr lang="en-US" dirty="0"/>
-              <a:t>11/28/25</a:t>
+              <a:t>11/29/25</a:t>
             </a:fld>
             <a:endParaRPr lang="en-US" dirty="0"/>
           </a:p>
@@ -3725,7 +3724,7 @@
           <a:p>
             <a:fld id="{87DE6118-2437-4B30-8E3C-4D2BE6020583}" type="datetimeFigureOut">
               <a:rPr lang="en-US" dirty="0"/>
-              <a:t>11/28/25</a:t>
+              <a:t>11/29/25</a:t>
             </a:fld>
             <a:endParaRPr lang="en-US" dirty="0"/>
           </a:p>
@@ -4067,7 +4066,7 @@
             <a:fld id="{87DE6118-2437-4B30-8E3C-4D2BE6020583}" type="datetimeFigureOut">
               <a:rPr lang="en-US" dirty="0"/>
               <a:pPr/>
-              <a:t>11/28/25</a:t>
+              <a:t>11/29/25</a:t>
             </a:fld>
             <a:endParaRPr lang="en-US" dirty="0"/>
           </a:p>
@@ -4452,7 +4451,7 @@
             <a:fld id="{87DE6118-2437-4B30-8E3C-4D2BE6020583}" type="datetimeFigureOut">
               <a:rPr lang="en-US" dirty="0"/>
               <a:pPr/>
-              <a:t>11/28/25</a:t>
+              <a:t>11/29/25</a:t>
             </a:fld>
             <a:endParaRPr lang="en-US" dirty="0"/>
           </a:p>
@@ -4727,7 +4726,7 @@
             <a:fld id="{87DE6118-2437-4B30-8E3C-4D2BE6020583}" type="datetimeFigureOut">
               <a:rPr lang="en-US" dirty="0"/>
               <a:pPr/>
-              <a:t>11/28/25</a:t>
+              <a:t>11/29/25</a:t>
             </a:fld>
             <a:endParaRPr lang="en-US" dirty="0"/>
           </a:p>
@@ -6075,7 +6074,7 @@
         <p:spPr>
           <a:xfrm>
             <a:off x="1371600" y="5497299"/>
-            <a:ext cx="9601200" cy="1237330"/>
+            <a:ext cx="10474054" cy="1237330"/>
           </a:xfrm>
           <a:prstGeom prst="rect">
             <a:avLst/>
@@ -6329,7 +6328,7 @@
                 <a:latin typeface="Times New Roman" panose="02020603050405020304" pitchFamily="18" charset="0"/>
                 <a:cs typeface="Times New Roman" panose="02020603050405020304" pitchFamily="18" charset="0"/>
               </a:rPr>
-              <a:t>Also beats other general models not specifically fine-tuned for code.</a:t>
+              <a:t>Also beats other general models not specifically fine-tuned for code (fine-tuning is out of scope).</a:t>
             </a:r>
           </a:p>
         </p:txBody>
@@ -6960,14 +6959,585 @@
         </p:blipFill>
         <p:spPr>
           <a:xfrm>
-            <a:off x="1957137" y="1176976"/>
-            <a:ext cx="8277726" cy="5104409"/>
+            <a:off x="1371600" y="1052474"/>
+            <a:ext cx="6269750" cy="3866203"/>
           </a:xfrm>
           <a:prstGeom prst="rect">
             <a:avLst/>
           </a:prstGeom>
         </p:spPr>
       </p:pic>
+      <p:pic>
+        <p:nvPicPr>
+          <p:cNvPr id="4" name="Picture 3">
+            <a:extLst>
+              <a:ext uri="{FF2B5EF4-FFF2-40B4-BE49-F238E27FC236}">
+                <a16:creationId xmlns:a16="http://schemas.microsoft.com/office/drawing/2014/main" id="{E99B31CF-6B5E-EA49-BDD8-2B80A40C58A4}"/>
+              </a:ext>
+            </a:extLst>
+          </p:cNvPr>
+          <p:cNvPicPr>
+            <a:picLocks noChangeAspect="1"/>
+          </p:cNvPicPr>
+          <p:nvPr/>
+        </p:nvPicPr>
+        <p:blipFill>
+          <a:blip r:embed="rId3"/>
+          <a:stretch>
+            <a:fillRect/>
+          </a:stretch>
+        </p:blipFill>
+        <p:spPr>
+          <a:xfrm>
+            <a:off x="8066327" y="1052474"/>
+            <a:ext cx="2429395" cy="1656406"/>
+          </a:xfrm>
+          <a:prstGeom prst="rect">
+            <a:avLst/>
+          </a:prstGeom>
+        </p:spPr>
+      </p:pic>
+      <p:sp>
+        <p:nvSpPr>
+          <p:cNvPr id="6" name="Content Placeholder 2">
+            <a:extLst>
+              <a:ext uri="{FF2B5EF4-FFF2-40B4-BE49-F238E27FC236}">
+                <a16:creationId xmlns:a16="http://schemas.microsoft.com/office/drawing/2014/main" id="{ED96C99B-908A-A6B2-0E43-9658815806CC}"/>
+              </a:ext>
+            </a:extLst>
+          </p:cNvPr>
+          <p:cNvSpPr txBox="1">
+            <a:spLocks/>
+          </p:cNvSpPr>
+          <p:nvPr/>
+        </p:nvSpPr>
+        <p:spPr>
+          <a:xfrm>
+            <a:off x="1371600" y="4955253"/>
+            <a:ext cx="10241280" cy="1780774"/>
+          </a:xfrm>
+          <a:prstGeom prst="rect">
+            <a:avLst/>
+          </a:prstGeom>
+        </p:spPr>
+        <p:txBody>
+          <a:bodyPr vert="horz" lIns="91440" tIns="45720" rIns="91440" bIns="45720" rtlCol="0">
+            <a:noAutofit/>
+          </a:bodyPr>
+          <a:lstStyle>
+            <a:lvl1pPr marL="384048" indent="-384048" algn="l" defTabSz="914400" rtl="0" eaLnBrk="1" latinLnBrk="0" hangingPunct="1">
+              <a:lnSpc>
+                <a:spcPct val="94000"/>
+              </a:lnSpc>
+              <a:spcBef>
+                <a:spcPts val="1000"/>
+              </a:spcBef>
+              <a:spcAft>
+                <a:spcPts val="200"/>
+              </a:spcAft>
+              <a:buFont typeface="Franklin Gothic Book" panose="020B0503020102020204" pitchFamily="34" charset="0"/>
+              <a:buChar char="■"/>
+              <a:defRPr sz="2000" kern="1200" baseline="0">
+                <a:solidFill>
+                  <a:schemeClr val="tx2"/>
+                </a:solidFill>
+                <a:latin typeface="+mn-lt"/>
+                <a:ea typeface="+mn-ea"/>
+                <a:cs typeface="+mn-cs"/>
+              </a:defRPr>
+            </a:lvl1pPr>
+            <a:lvl2pPr marL="914400" indent="-384048" algn="l" defTabSz="914400" rtl="0" eaLnBrk="1" latinLnBrk="0" hangingPunct="1">
+              <a:lnSpc>
+                <a:spcPct val="94000"/>
+              </a:lnSpc>
+              <a:spcBef>
+                <a:spcPts val="500"/>
+              </a:spcBef>
+              <a:spcAft>
+                <a:spcPts val="200"/>
+              </a:spcAft>
+              <a:buFont typeface="Franklin Gothic Book" panose="020B0503020102020204" pitchFamily="34" charset="0"/>
+              <a:buChar char="–"/>
+              <a:defRPr sz="2000" i="1" kern="1200" baseline="0">
+                <a:solidFill>
+                  <a:schemeClr val="tx2"/>
+                </a:solidFill>
+                <a:latin typeface="+mn-lt"/>
+                <a:ea typeface="+mn-ea"/>
+                <a:cs typeface="+mn-cs"/>
+              </a:defRPr>
+            </a:lvl2pPr>
+            <a:lvl3pPr marL="1371600" indent="-384048" algn="l" defTabSz="914400" rtl="0" eaLnBrk="1" latinLnBrk="0" hangingPunct="1">
+              <a:lnSpc>
+                <a:spcPct val="94000"/>
+              </a:lnSpc>
+              <a:spcBef>
+                <a:spcPts val="500"/>
+              </a:spcBef>
+              <a:spcAft>
+                <a:spcPts val="200"/>
+              </a:spcAft>
+              <a:buFont typeface="Franklin Gothic Book" panose="020B0503020102020204" pitchFamily="34" charset="0"/>
+              <a:buChar char="■"/>
+              <a:defRPr sz="1800" kern="1200" baseline="0">
+                <a:solidFill>
+                  <a:schemeClr val="tx2"/>
+                </a:solidFill>
+                <a:latin typeface="+mn-lt"/>
+                <a:ea typeface="+mn-ea"/>
+                <a:cs typeface="+mn-cs"/>
+              </a:defRPr>
+            </a:lvl3pPr>
+            <a:lvl4pPr marL="1828800" indent="-384048" algn="l" defTabSz="914400" rtl="0" eaLnBrk="1" latinLnBrk="0" hangingPunct="1">
+              <a:lnSpc>
+                <a:spcPct val="94000"/>
+              </a:lnSpc>
+              <a:spcBef>
+                <a:spcPts val="500"/>
+              </a:spcBef>
+              <a:spcAft>
+                <a:spcPts val="200"/>
+              </a:spcAft>
+              <a:buFont typeface="Franklin Gothic Book" panose="020B0503020102020204" pitchFamily="34" charset="0"/>
+              <a:buChar char="–"/>
+              <a:defRPr sz="1800" i="1" kern="1200" baseline="0">
+                <a:solidFill>
+                  <a:schemeClr val="tx2"/>
+                </a:solidFill>
+                <a:latin typeface="+mn-lt"/>
+                <a:ea typeface="+mn-ea"/>
+                <a:cs typeface="+mn-cs"/>
+              </a:defRPr>
+            </a:lvl4pPr>
+            <a:lvl5pPr marL="2286000" indent="-384048" algn="l" defTabSz="914400" rtl="0" eaLnBrk="1" latinLnBrk="0" hangingPunct="1">
+              <a:lnSpc>
+                <a:spcPct val="94000"/>
+              </a:lnSpc>
+              <a:spcBef>
+                <a:spcPts val="500"/>
+              </a:spcBef>
+              <a:spcAft>
+                <a:spcPts val="200"/>
+              </a:spcAft>
+              <a:buFont typeface="Franklin Gothic Book" panose="020B0503020102020204" pitchFamily="34" charset="0"/>
+              <a:buChar char="■"/>
+              <a:defRPr sz="1600" kern="1200" baseline="0">
+                <a:solidFill>
+                  <a:schemeClr val="tx2"/>
+                </a:solidFill>
+                <a:latin typeface="+mn-lt"/>
+                <a:ea typeface="+mn-ea"/>
+                <a:cs typeface="+mn-cs"/>
+              </a:defRPr>
+            </a:lvl5pPr>
+            <a:lvl6pPr marL="2743200" indent="-384048" algn="l" defTabSz="914400" rtl="0" eaLnBrk="1" latinLnBrk="0" hangingPunct="1">
+              <a:lnSpc>
+                <a:spcPct val="94000"/>
+              </a:lnSpc>
+              <a:spcBef>
+                <a:spcPts val="500"/>
+              </a:spcBef>
+              <a:spcAft>
+                <a:spcPts val="200"/>
+              </a:spcAft>
+              <a:buFont typeface="Franklin Gothic Book" panose="020B0503020102020204" pitchFamily="34" charset="0"/>
+              <a:buChar char="–"/>
+              <a:defRPr sz="1600" i="1" kern="1200" baseline="0">
+                <a:solidFill>
+                  <a:schemeClr val="tx2"/>
+                </a:solidFill>
+                <a:latin typeface="+mn-lt"/>
+                <a:ea typeface="+mn-ea"/>
+                <a:cs typeface="+mn-cs"/>
+              </a:defRPr>
+            </a:lvl6pPr>
+            <a:lvl7pPr marL="3200400" indent="-384048" algn="l" defTabSz="914400" rtl="0" eaLnBrk="1" latinLnBrk="0" hangingPunct="1">
+              <a:lnSpc>
+                <a:spcPct val="94000"/>
+              </a:lnSpc>
+              <a:spcBef>
+                <a:spcPts val="500"/>
+              </a:spcBef>
+              <a:spcAft>
+                <a:spcPts val="200"/>
+              </a:spcAft>
+              <a:buFont typeface="Franklin Gothic Book" panose="020B0503020102020204" pitchFamily="34" charset="0"/>
+              <a:buChar char="■"/>
+              <a:defRPr sz="1400" kern="1200" baseline="0">
+                <a:solidFill>
+                  <a:schemeClr val="tx2"/>
+                </a:solidFill>
+                <a:latin typeface="+mn-lt"/>
+                <a:ea typeface="+mn-ea"/>
+                <a:cs typeface="+mn-cs"/>
+              </a:defRPr>
+            </a:lvl7pPr>
+            <a:lvl8pPr marL="3657600" indent="-384048" algn="l" defTabSz="914400" rtl="0" eaLnBrk="1" latinLnBrk="0" hangingPunct="1">
+              <a:lnSpc>
+                <a:spcPct val="94000"/>
+              </a:lnSpc>
+              <a:spcBef>
+                <a:spcPts val="500"/>
+              </a:spcBef>
+              <a:spcAft>
+                <a:spcPts val="200"/>
+              </a:spcAft>
+              <a:buFont typeface="Franklin Gothic Book" panose="020B0503020102020204" pitchFamily="34" charset="0"/>
+              <a:buChar char="–"/>
+              <a:defRPr sz="1400" i="1" kern="1200" baseline="0">
+                <a:solidFill>
+                  <a:schemeClr val="tx2"/>
+                </a:solidFill>
+                <a:latin typeface="+mn-lt"/>
+                <a:ea typeface="+mn-ea"/>
+                <a:cs typeface="+mn-cs"/>
+              </a:defRPr>
+            </a:lvl8pPr>
+            <a:lvl9pPr marL="4114800" indent="-384048" algn="l" defTabSz="914400" rtl="0" eaLnBrk="1" latinLnBrk="0" hangingPunct="1">
+              <a:lnSpc>
+                <a:spcPct val="94000"/>
+              </a:lnSpc>
+              <a:spcBef>
+                <a:spcPts val="500"/>
+              </a:spcBef>
+              <a:spcAft>
+                <a:spcPts val="200"/>
+              </a:spcAft>
+              <a:buFont typeface="Franklin Gothic Book" panose="020B0503020102020204" pitchFamily="34" charset="0"/>
+              <a:buChar char="■"/>
+              <a:defRPr sz="1400" kern="1200" baseline="0">
+                <a:solidFill>
+                  <a:schemeClr val="tx2"/>
+                </a:solidFill>
+                <a:latin typeface="+mn-lt"/>
+                <a:ea typeface="+mn-ea"/>
+                <a:cs typeface="+mn-cs"/>
+              </a:defRPr>
+            </a:lvl9pPr>
+          </a:lstStyle>
+          <a:p>
+            <a:r>
+              <a:rPr lang="en-US" sz="1600" dirty="0">
+                <a:solidFill>
+                  <a:schemeClr val="tx1"/>
+                </a:solidFill>
+                <a:latin typeface="Times New Roman" panose="02020603050405020304" pitchFamily="18" charset="0"/>
+                <a:cs typeface="Times New Roman" panose="02020603050405020304" pitchFamily="18" charset="0"/>
+              </a:rPr>
+              <a:t>On most Question Answering and Common-Sense benchmarks, performance improves steadily as training progresses.</a:t>
+            </a:r>
+          </a:p>
+          <a:p>
+            <a:r>
+              <a:rPr lang="en-US" sz="1600" b="1" dirty="0">
+                <a:solidFill>
+                  <a:schemeClr val="tx1"/>
+                </a:solidFill>
+                <a:latin typeface="Times New Roman" panose="02020603050405020304" pitchFamily="18" charset="0"/>
+                <a:cs typeface="Times New Roman" panose="02020603050405020304" pitchFamily="18" charset="0"/>
+              </a:rPr>
+              <a:t>Exceptions:</a:t>
+            </a:r>
+          </a:p>
+          <a:p>
+            <a:pPr lvl="1"/>
+            <a:r>
+              <a:rPr lang="en-US" sz="1600" i="0" dirty="0">
+                <a:solidFill>
+                  <a:schemeClr val="tx1"/>
+                </a:solidFill>
+                <a:latin typeface="Times New Roman" panose="02020603050405020304" pitchFamily="18" charset="0"/>
+                <a:cs typeface="Times New Roman" panose="02020603050405020304" pitchFamily="18" charset="0"/>
+              </a:rPr>
+              <a:t>The SIQA benchmark shows high variance during training, suggesting it may not be a reliable metric for tracking progress.</a:t>
+            </a:r>
+          </a:p>
+          <a:p>
+            <a:pPr lvl="1"/>
+            <a:r>
+              <a:rPr lang="en-US" sz="1600" i="0" dirty="0">
+                <a:solidFill>
+                  <a:schemeClr val="tx1"/>
+                </a:solidFill>
+                <a:latin typeface="Times New Roman" panose="02020603050405020304" pitchFamily="18" charset="0"/>
+                <a:cs typeface="Times New Roman" panose="02020603050405020304" pitchFamily="18" charset="0"/>
+              </a:rPr>
+              <a:t>Performance on </a:t>
+            </a:r>
+            <a:r>
+              <a:rPr lang="en-US" sz="1600" i="0" dirty="0" err="1">
+                <a:solidFill>
+                  <a:schemeClr val="tx1"/>
+                </a:solidFill>
+                <a:latin typeface="Times New Roman" panose="02020603050405020304" pitchFamily="18" charset="0"/>
+                <a:cs typeface="Times New Roman" panose="02020603050405020304" pitchFamily="18" charset="0"/>
+              </a:rPr>
+              <a:t>WinoGrande</a:t>
+            </a:r>
+            <a:r>
+              <a:rPr lang="en-US" sz="1600" i="0" dirty="0">
+                <a:solidFill>
+                  <a:schemeClr val="tx1"/>
+                </a:solidFill>
+                <a:latin typeface="Times New Roman" panose="02020603050405020304" pitchFamily="18" charset="0"/>
+                <a:cs typeface="Times New Roman" panose="02020603050405020304" pitchFamily="18" charset="0"/>
+              </a:rPr>
+              <a:t> does not correlate well with perplexity, with LLaMA-33B and LLaMA-65B showing similar performance despite size differences.</a:t>
+            </a:r>
+          </a:p>
+        </p:txBody>
+      </p:sp>
+      <p:sp>
+        <p:nvSpPr>
+          <p:cNvPr id="7" name="Content Placeholder 2">
+            <a:extLst>
+              <a:ext uri="{FF2B5EF4-FFF2-40B4-BE49-F238E27FC236}">
+                <a16:creationId xmlns:a16="http://schemas.microsoft.com/office/drawing/2014/main" id="{15A6290D-0595-DB96-7C51-6B19E19CB78F}"/>
+              </a:ext>
+            </a:extLst>
+          </p:cNvPr>
+          <p:cNvSpPr txBox="1">
+            <a:spLocks/>
+          </p:cNvSpPr>
+          <p:nvPr/>
+        </p:nvSpPr>
+        <p:spPr>
+          <a:xfrm>
+            <a:off x="7889588" y="2822604"/>
+            <a:ext cx="3442976" cy="1400335"/>
+          </a:xfrm>
+          <a:prstGeom prst="rect">
+            <a:avLst/>
+          </a:prstGeom>
+        </p:spPr>
+        <p:txBody>
+          <a:bodyPr vert="horz" lIns="91440" tIns="45720" rIns="91440" bIns="45720" rtlCol="0">
+            <a:noAutofit/>
+          </a:bodyPr>
+          <a:lstStyle>
+            <a:lvl1pPr marL="384048" indent="-384048" algn="l" defTabSz="914400" rtl="0" eaLnBrk="1" latinLnBrk="0" hangingPunct="1">
+              <a:lnSpc>
+                <a:spcPct val="94000"/>
+              </a:lnSpc>
+              <a:spcBef>
+                <a:spcPts val="1000"/>
+              </a:spcBef>
+              <a:spcAft>
+                <a:spcPts val="200"/>
+              </a:spcAft>
+              <a:buFont typeface="Franklin Gothic Book" panose="020B0503020102020204" pitchFamily="34" charset="0"/>
+              <a:buChar char="■"/>
+              <a:defRPr sz="2000" kern="1200" baseline="0">
+                <a:solidFill>
+                  <a:schemeClr val="tx2"/>
+                </a:solidFill>
+                <a:latin typeface="+mn-lt"/>
+                <a:ea typeface="+mn-ea"/>
+                <a:cs typeface="+mn-cs"/>
+              </a:defRPr>
+            </a:lvl1pPr>
+            <a:lvl2pPr marL="914400" indent="-384048" algn="l" defTabSz="914400" rtl="0" eaLnBrk="1" latinLnBrk="0" hangingPunct="1">
+              <a:lnSpc>
+                <a:spcPct val="94000"/>
+              </a:lnSpc>
+              <a:spcBef>
+                <a:spcPts val="500"/>
+              </a:spcBef>
+              <a:spcAft>
+                <a:spcPts val="200"/>
+              </a:spcAft>
+              <a:buFont typeface="Franklin Gothic Book" panose="020B0503020102020204" pitchFamily="34" charset="0"/>
+              <a:buChar char="–"/>
+              <a:defRPr sz="2000" i="1" kern="1200" baseline="0">
+                <a:solidFill>
+                  <a:schemeClr val="tx2"/>
+                </a:solidFill>
+                <a:latin typeface="+mn-lt"/>
+                <a:ea typeface="+mn-ea"/>
+                <a:cs typeface="+mn-cs"/>
+              </a:defRPr>
+            </a:lvl2pPr>
+            <a:lvl3pPr marL="1371600" indent="-384048" algn="l" defTabSz="914400" rtl="0" eaLnBrk="1" latinLnBrk="0" hangingPunct="1">
+              <a:lnSpc>
+                <a:spcPct val="94000"/>
+              </a:lnSpc>
+              <a:spcBef>
+                <a:spcPts val="500"/>
+              </a:spcBef>
+              <a:spcAft>
+                <a:spcPts val="200"/>
+              </a:spcAft>
+              <a:buFont typeface="Franklin Gothic Book" panose="020B0503020102020204" pitchFamily="34" charset="0"/>
+              <a:buChar char="■"/>
+              <a:defRPr sz="1800" kern="1200" baseline="0">
+                <a:solidFill>
+                  <a:schemeClr val="tx2"/>
+                </a:solidFill>
+                <a:latin typeface="+mn-lt"/>
+                <a:ea typeface="+mn-ea"/>
+                <a:cs typeface="+mn-cs"/>
+              </a:defRPr>
+            </a:lvl3pPr>
+            <a:lvl4pPr marL="1828800" indent="-384048" algn="l" defTabSz="914400" rtl="0" eaLnBrk="1" latinLnBrk="0" hangingPunct="1">
+              <a:lnSpc>
+                <a:spcPct val="94000"/>
+              </a:lnSpc>
+              <a:spcBef>
+                <a:spcPts val="500"/>
+              </a:spcBef>
+              <a:spcAft>
+                <a:spcPts val="200"/>
+              </a:spcAft>
+              <a:buFont typeface="Franklin Gothic Book" panose="020B0503020102020204" pitchFamily="34" charset="0"/>
+              <a:buChar char="–"/>
+              <a:defRPr sz="1800" i="1" kern="1200" baseline="0">
+                <a:solidFill>
+                  <a:schemeClr val="tx2"/>
+                </a:solidFill>
+                <a:latin typeface="+mn-lt"/>
+                <a:ea typeface="+mn-ea"/>
+                <a:cs typeface="+mn-cs"/>
+              </a:defRPr>
+            </a:lvl4pPr>
+            <a:lvl5pPr marL="2286000" indent="-384048" algn="l" defTabSz="914400" rtl="0" eaLnBrk="1" latinLnBrk="0" hangingPunct="1">
+              <a:lnSpc>
+                <a:spcPct val="94000"/>
+              </a:lnSpc>
+              <a:spcBef>
+                <a:spcPts val="500"/>
+              </a:spcBef>
+              <a:spcAft>
+                <a:spcPts val="200"/>
+              </a:spcAft>
+              <a:buFont typeface="Franklin Gothic Book" panose="020B0503020102020204" pitchFamily="34" charset="0"/>
+              <a:buChar char="■"/>
+              <a:defRPr sz="1600" kern="1200" baseline="0">
+                <a:solidFill>
+                  <a:schemeClr val="tx2"/>
+                </a:solidFill>
+                <a:latin typeface="+mn-lt"/>
+                <a:ea typeface="+mn-ea"/>
+                <a:cs typeface="+mn-cs"/>
+              </a:defRPr>
+            </a:lvl5pPr>
+            <a:lvl6pPr marL="2743200" indent="-384048" algn="l" defTabSz="914400" rtl="0" eaLnBrk="1" latinLnBrk="0" hangingPunct="1">
+              <a:lnSpc>
+                <a:spcPct val="94000"/>
+              </a:lnSpc>
+              <a:spcBef>
+                <a:spcPts val="500"/>
+              </a:spcBef>
+              <a:spcAft>
+                <a:spcPts val="200"/>
+              </a:spcAft>
+              <a:buFont typeface="Franklin Gothic Book" panose="020B0503020102020204" pitchFamily="34" charset="0"/>
+              <a:buChar char="–"/>
+              <a:defRPr sz="1600" i="1" kern="1200" baseline="0">
+                <a:solidFill>
+                  <a:schemeClr val="tx2"/>
+                </a:solidFill>
+                <a:latin typeface="+mn-lt"/>
+                <a:ea typeface="+mn-ea"/>
+                <a:cs typeface="+mn-cs"/>
+              </a:defRPr>
+            </a:lvl6pPr>
+            <a:lvl7pPr marL="3200400" indent="-384048" algn="l" defTabSz="914400" rtl="0" eaLnBrk="1" latinLnBrk="0" hangingPunct="1">
+              <a:lnSpc>
+                <a:spcPct val="94000"/>
+              </a:lnSpc>
+              <a:spcBef>
+                <a:spcPts val="500"/>
+              </a:spcBef>
+              <a:spcAft>
+                <a:spcPts val="200"/>
+              </a:spcAft>
+              <a:buFont typeface="Franklin Gothic Book" panose="020B0503020102020204" pitchFamily="34" charset="0"/>
+              <a:buChar char="■"/>
+              <a:defRPr sz="1400" kern="1200" baseline="0">
+                <a:solidFill>
+                  <a:schemeClr val="tx2"/>
+                </a:solidFill>
+                <a:latin typeface="+mn-lt"/>
+                <a:ea typeface="+mn-ea"/>
+                <a:cs typeface="+mn-cs"/>
+              </a:defRPr>
+            </a:lvl7pPr>
+            <a:lvl8pPr marL="3657600" indent="-384048" algn="l" defTabSz="914400" rtl="0" eaLnBrk="1" latinLnBrk="0" hangingPunct="1">
+              <a:lnSpc>
+                <a:spcPct val="94000"/>
+              </a:lnSpc>
+              <a:spcBef>
+                <a:spcPts val="500"/>
+              </a:spcBef>
+              <a:spcAft>
+                <a:spcPts val="200"/>
+              </a:spcAft>
+              <a:buFont typeface="Franklin Gothic Book" panose="020B0503020102020204" pitchFamily="34" charset="0"/>
+              <a:buChar char="–"/>
+              <a:defRPr sz="1400" i="1" kern="1200" baseline="0">
+                <a:solidFill>
+                  <a:schemeClr val="tx2"/>
+                </a:solidFill>
+                <a:latin typeface="+mn-lt"/>
+                <a:ea typeface="+mn-ea"/>
+                <a:cs typeface="+mn-cs"/>
+              </a:defRPr>
+            </a:lvl8pPr>
+            <a:lvl9pPr marL="4114800" indent="-384048" algn="l" defTabSz="914400" rtl="0" eaLnBrk="1" latinLnBrk="0" hangingPunct="1">
+              <a:lnSpc>
+                <a:spcPct val="94000"/>
+              </a:lnSpc>
+              <a:spcBef>
+                <a:spcPts val="500"/>
+              </a:spcBef>
+              <a:spcAft>
+                <a:spcPts val="200"/>
+              </a:spcAft>
+              <a:buFont typeface="Franklin Gothic Book" panose="020B0503020102020204" pitchFamily="34" charset="0"/>
+              <a:buChar char="■"/>
+              <a:defRPr sz="1400" kern="1200" baseline="0">
+                <a:solidFill>
+                  <a:schemeClr val="tx2"/>
+                </a:solidFill>
+                <a:latin typeface="+mn-lt"/>
+                <a:ea typeface="+mn-ea"/>
+                <a:cs typeface="+mn-cs"/>
+              </a:defRPr>
+            </a:lvl9pPr>
+          </a:lstStyle>
+          <a:p>
+            <a:r>
+              <a:rPr lang="en-US" sz="1600" dirty="0">
+                <a:solidFill>
+                  <a:schemeClr val="tx1"/>
+                </a:solidFill>
+                <a:latin typeface="Times New Roman" panose="02020603050405020304" pitchFamily="18" charset="0"/>
+                <a:cs typeface="Times New Roman" panose="02020603050405020304" pitchFamily="18" charset="0"/>
+              </a:rPr>
+              <a:t>There is a strong correlation between training perplexity and downstream task performance.</a:t>
+            </a:r>
+            <a:endParaRPr lang="he-IL" sz="1600" dirty="0">
+              <a:solidFill>
+                <a:schemeClr val="tx1"/>
+              </a:solidFill>
+              <a:latin typeface="Times New Roman" panose="02020603050405020304" pitchFamily="18" charset="0"/>
+              <a:cs typeface="Times New Roman" panose="02020603050405020304" pitchFamily="18" charset="0"/>
+            </a:endParaRPr>
+          </a:p>
+          <a:p>
+            <a:r>
+              <a:rPr lang="en-US" sz="1600" dirty="0">
+                <a:solidFill>
+                  <a:schemeClr val="tx1"/>
+                </a:solidFill>
+                <a:latin typeface="Times New Roman" panose="02020603050405020304" pitchFamily="18" charset="0"/>
+                <a:cs typeface="Times New Roman" panose="02020603050405020304" pitchFamily="18" charset="0"/>
+              </a:rPr>
+              <a:t>As perplexity drops, benchmark scores rise.</a:t>
+            </a:r>
+          </a:p>
+        </p:txBody>
+      </p:sp>
     </p:spTree>
     <p:extLst>
       <p:ext uri="{BB962C8B-B14F-4D97-AF65-F5344CB8AC3E}">
@@ -6982,447 +7552,6 @@
 </file>
 
 <file path=ppt/slides/slide14.xml><?xml version="1.0" encoding="utf-8"?>
-<p:sld xmlns:a="http://schemas.openxmlformats.org/drawingml/2006/main" xmlns:r="http://schemas.openxmlformats.org/officeDocument/2006/relationships" xmlns:p="http://schemas.openxmlformats.org/presentationml/2006/main">
-  <p:cSld>
-    <p:spTree>
-      <p:nvGrpSpPr>
-        <p:cNvPr id="1" name="">
-          <a:extLst>
-            <a:ext uri="{FF2B5EF4-FFF2-40B4-BE49-F238E27FC236}">
-              <a16:creationId xmlns:a16="http://schemas.microsoft.com/office/drawing/2014/main" id="{608B7ABB-74EB-AE59-CDBC-B8949B6D70FB}"/>
-            </a:ext>
-          </a:extLst>
-        </p:cNvPr>
-        <p:cNvGrpSpPr/>
-        <p:nvPr/>
-      </p:nvGrpSpPr>
-      <p:grpSpPr>
-        <a:xfrm>
-          <a:off x="0" y="0"/>
-          <a:ext cx="0" cy="0"/>
-          <a:chOff x="0" y="0"/>
-          <a:chExt cx="0" cy="0"/>
-        </a:xfrm>
-      </p:grpSpPr>
-      <p:sp>
-        <p:nvSpPr>
-          <p:cNvPr id="2" name="Title 1">
-            <a:extLst>
-              <a:ext uri="{FF2B5EF4-FFF2-40B4-BE49-F238E27FC236}">
-                <a16:creationId xmlns:a16="http://schemas.microsoft.com/office/drawing/2014/main" id="{9C706101-AE96-E2CF-75D5-63081D2A0765}"/>
-              </a:ext>
-            </a:extLst>
-          </p:cNvPr>
-          <p:cNvSpPr>
-            <a:spLocks noGrp="1"/>
-          </p:cNvSpPr>
-          <p:nvPr>
-            <p:ph type="title"/>
-          </p:nvPr>
-        </p:nvSpPr>
-        <p:spPr>
-          <a:xfrm>
-            <a:off x="1371600" y="355701"/>
-            <a:ext cx="10329620" cy="660197"/>
-          </a:xfrm>
-        </p:spPr>
-        <p:txBody>
-          <a:bodyPr>
-            <a:normAutofit fontScale="90000"/>
-          </a:bodyPr>
-          <a:lstStyle/>
-          <a:p>
-            <a:pPr>
-              <a:spcAft>
-                <a:spcPts val="600"/>
-              </a:spcAft>
-            </a:pPr>
-            <a:r>
-              <a:rPr lang="en-US" b="1" i="0" dirty="0">
-                <a:solidFill>
-                  <a:schemeClr val="tx1"/>
-                </a:solidFill>
-                <a:effectLst/>
-                <a:latin typeface="Times New Roman" panose="02020603050405020304" pitchFamily="18" charset="0"/>
-                <a:cs typeface="Times New Roman" panose="02020603050405020304" pitchFamily="18" charset="0"/>
-              </a:rPr>
-              <a:t>3.7 Performance Evolution During Training </a:t>
-            </a:r>
-            <a:r>
-              <a:rPr lang="en-US" sz="3300" b="1" i="0" dirty="0">
-                <a:solidFill>
-                  <a:schemeClr val="tx1"/>
-                </a:solidFill>
-                <a:effectLst/>
-                <a:latin typeface="Times New Roman" panose="02020603050405020304" pitchFamily="18" charset="0"/>
-                <a:cs typeface="Times New Roman" panose="02020603050405020304" pitchFamily="18" charset="0"/>
-              </a:rPr>
-              <a:t>(2)</a:t>
-            </a:r>
-            <a:endParaRPr lang="en-IL" sz="3300" dirty="0">
-              <a:solidFill>
-                <a:schemeClr val="tx1"/>
-              </a:solidFill>
-              <a:latin typeface="Times New Roman" panose="02020603050405020304" pitchFamily="18" charset="0"/>
-              <a:cs typeface="Times New Roman" panose="02020603050405020304" pitchFamily="18" charset="0"/>
-            </a:endParaRPr>
-          </a:p>
-        </p:txBody>
-      </p:sp>
-      <p:sp>
-        <p:nvSpPr>
-          <p:cNvPr id="3" name="Content Placeholder 2">
-            <a:extLst>
-              <a:ext uri="{FF2B5EF4-FFF2-40B4-BE49-F238E27FC236}">
-                <a16:creationId xmlns:a16="http://schemas.microsoft.com/office/drawing/2014/main" id="{5F56CA7C-F6CB-FD47-400E-5F5569748DD3}"/>
-              </a:ext>
-            </a:extLst>
-          </p:cNvPr>
-          <p:cNvSpPr txBox="1">
-            <a:spLocks/>
-          </p:cNvSpPr>
-          <p:nvPr/>
-        </p:nvSpPr>
-        <p:spPr>
-          <a:xfrm>
-            <a:off x="1371600" y="1133856"/>
-            <a:ext cx="9601200" cy="5179161"/>
-          </a:xfrm>
-          <a:prstGeom prst="rect">
-            <a:avLst/>
-          </a:prstGeom>
-        </p:spPr>
-        <p:txBody>
-          <a:bodyPr vert="horz" lIns="91440" tIns="45720" rIns="91440" bIns="45720" rtlCol="0">
-            <a:normAutofit/>
-          </a:bodyPr>
-          <a:lstStyle>
-            <a:lvl1pPr marL="384048" indent="-384048" algn="l" defTabSz="914400" rtl="0" eaLnBrk="1" latinLnBrk="0" hangingPunct="1">
-              <a:lnSpc>
-                <a:spcPct val="94000"/>
-              </a:lnSpc>
-              <a:spcBef>
-                <a:spcPts val="1000"/>
-              </a:spcBef>
-              <a:spcAft>
-                <a:spcPts val="200"/>
-              </a:spcAft>
-              <a:buFont typeface="Franklin Gothic Book" panose="020B0503020102020204" pitchFamily="34" charset="0"/>
-              <a:buChar char="■"/>
-              <a:defRPr sz="2000" kern="1200" baseline="0">
-                <a:solidFill>
-                  <a:schemeClr val="tx2"/>
-                </a:solidFill>
-                <a:latin typeface="+mn-lt"/>
-                <a:ea typeface="+mn-ea"/>
-                <a:cs typeface="+mn-cs"/>
-              </a:defRPr>
-            </a:lvl1pPr>
-            <a:lvl2pPr marL="914400" indent="-384048" algn="l" defTabSz="914400" rtl="0" eaLnBrk="1" latinLnBrk="0" hangingPunct="1">
-              <a:lnSpc>
-                <a:spcPct val="94000"/>
-              </a:lnSpc>
-              <a:spcBef>
-                <a:spcPts val="500"/>
-              </a:spcBef>
-              <a:spcAft>
-                <a:spcPts val="200"/>
-              </a:spcAft>
-              <a:buFont typeface="Franklin Gothic Book" panose="020B0503020102020204" pitchFamily="34" charset="0"/>
-              <a:buChar char="–"/>
-              <a:defRPr sz="2000" i="1" kern="1200" baseline="0">
-                <a:solidFill>
-                  <a:schemeClr val="tx2"/>
-                </a:solidFill>
-                <a:latin typeface="+mn-lt"/>
-                <a:ea typeface="+mn-ea"/>
-                <a:cs typeface="+mn-cs"/>
-              </a:defRPr>
-            </a:lvl2pPr>
-            <a:lvl3pPr marL="1371600" indent="-384048" algn="l" defTabSz="914400" rtl="0" eaLnBrk="1" latinLnBrk="0" hangingPunct="1">
-              <a:lnSpc>
-                <a:spcPct val="94000"/>
-              </a:lnSpc>
-              <a:spcBef>
-                <a:spcPts val="500"/>
-              </a:spcBef>
-              <a:spcAft>
-                <a:spcPts val="200"/>
-              </a:spcAft>
-              <a:buFont typeface="Franklin Gothic Book" panose="020B0503020102020204" pitchFamily="34" charset="0"/>
-              <a:buChar char="■"/>
-              <a:defRPr sz="1800" kern="1200" baseline="0">
-                <a:solidFill>
-                  <a:schemeClr val="tx2"/>
-                </a:solidFill>
-                <a:latin typeface="+mn-lt"/>
-                <a:ea typeface="+mn-ea"/>
-                <a:cs typeface="+mn-cs"/>
-              </a:defRPr>
-            </a:lvl3pPr>
-            <a:lvl4pPr marL="1828800" indent="-384048" algn="l" defTabSz="914400" rtl="0" eaLnBrk="1" latinLnBrk="0" hangingPunct="1">
-              <a:lnSpc>
-                <a:spcPct val="94000"/>
-              </a:lnSpc>
-              <a:spcBef>
-                <a:spcPts val="500"/>
-              </a:spcBef>
-              <a:spcAft>
-                <a:spcPts val="200"/>
-              </a:spcAft>
-              <a:buFont typeface="Franklin Gothic Book" panose="020B0503020102020204" pitchFamily="34" charset="0"/>
-              <a:buChar char="–"/>
-              <a:defRPr sz="1800" i="1" kern="1200" baseline="0">
-                <a:solidFill>
-                  <a:schemeClr val="tx2"/>
-                </a:solidFill>
-                <a:latin typeface="+mn-lt"/>
-                <a:ea typeface="+mn-ea"/>
-                <a:cs typeface="+mn-cs"/>
-              </a:defRPr>
-            </a:lvl4pPr>
-            <a:lvl5pPr marL="2286000" indent="-384048" algn="l" defTabSz="914400" rtl="0" eaLnBrk="1" latinLnBrk="0" hangingPunct="1">
-              <a:lnSpc>
-                <a:spcPct val="94000"/>
-              </a:lnSpc>
-              <a:spcBef>
-                <a:spcPts val="500"/>
-              </a:spcBef>
-              <a:spcAft>
-                <a:spcPts val="200"/>
-              </a:spcAft>
-              <a:buFont typeface="Franklin Gothic Book" panose="020B0503020102020204" pitchFamily="34" charset="0"/>
-              <a:buChar char="■"/>
-              <a:defRPr sz="1600" kern="1200" baseline="0">
-                <a:solidFill>
-                  <a:schemeClr val="tx2"/>
-                </a:solidFill>
-                <a:latin typeface="+mn-lt"/>
-                <a:ea typeface="+mn-ea"/>
-                <a:cs typeface="+mn-cs"/>
-              </a:defRPr>
-            </a:lvl5pPr>
-            <a:lvl6pPr marL="2743200" indent="-384048" algn="l" defTabSz="914400" rtl="0" eaLnBrk="1" latinLnBrk="0" hangingPunct="1">
-              <a:lnSpc>
-                <a:spcPct val="94000"/>
-              </a:lnSpc>
-              <a:spcBef>
-                <a:spcPts val="500"/>
-              </a:spcBef>
-              <a:spcAft>
-                <a:spcPts val="200"/>
-              </a:spcAft>
-              <a:buFont typeface="Franklin Gothic Book" panose="020B0503020102020204" pitchFamily="34" charset="0"/>
-              <a:buChar char="–"/>
-              <a:defRPr sz="1600" i="1" kern="1200" baseline="0">
-                <a:solidFill>
-                  <a:schemeClr val="tx2"/>
-                </a:solidFill>
-                <a:latin typeface="+mn-lt"/>
-                <a:ea typeface="+mn-ea"/>
-                <a:cs typeface="+mn-cs"/>
-              </a:defRPr>
-            </a:lvl6pPr>
-            <a:lvl7pPr marL="3200400" indent="-384048" algn="l" defTabSz="914400" rtl="0" eaLnBrk="1" latinLnBrk="0" hangingPunct="1">
-              <a:lnSpc>
-                <a:spcPct val="94000"/>
-              </a:lnSpc>
-              <a:spcBef>
-                <a:spcPts val="500"/>
-              </a:spcBef>
-              <a:spcAft>
-                <a:spcPts val="200"/>
-              </a:spcAft>
-              <a:buFont typeface="Franklin Gothic Book" panose="020B0503020102020204" pitchFamily="34" charset="0"/>
-              <a:buChar char="■"/>
-              <a:defRPr sz="1400" kern="1200" baseline="0">
-                <a:solidFill>
-                  <a:schemeClr val="tx2"/>
-                </a:solidFill>
-                <a:latin typeface="+mn-lt"/>
-                <a:ea typeface="+mn-ea"/>
-                <a:cs typeface="+mn-cs"/>
-              </a:defRPr>
-            </a:lvl7pPr>
-            <a:lvl8pPr marL="3657600" indent="-384048" algn="l" defTabSz="914400" rtl="0" eaLnBrk="1" latinLnBrk="0" hangingPunct="1">
-              <a:lnSpc>
-                <a:spcPct val="94000"/>
-              </a:lnSpc>
-              <a:spcBef>
-                <a:spcPts val="500"/>
-              </a:spcBef>
-              <a:spcAft>
-                <a:spcPts val="200"/>
-              </a:spcAft>
-              <a:buFont typeface="Franklin Gothic Book" panose="020B0503020102020204" pitchFamily="34" charset="0"/>
-              <a:buChar char="–"/>
-              <a:defRPr sz="1400" i="1" kern="1200" baseline="0">
-                <a:solidFill>
-                  <a:schemeClr val="tx2"/>
-                </a:solidFill>
-                <a:latin typeface="+mn-lt"/>
-                <a:ea typeface="+mn-ea"/>
-                <a:cs typeface="+mn-cs"/>
-              </a:defRPr>
-            </a:lvl8pPr>
-            <a:lvl9pPr marL="4114800" indent="-384048" algn="l" defTabSz="914400" rtl="0" eaLnBrk="1" latinLnBrk="0" hangingPunct="1">
-              <a:lnSpc>
-                <a:spcPct val="94000"/>
-              </a:lnSpc>
-              <a:spcBef>
-                <a:spcPts val="500"/>
-              </a:spcBef>
-              <a:spcAft>
-                <a:spcPts val="200"/>
-              </a:spcAft>
-              <a:buFont typeface="Franklin Gothic Book" panose="020B0503020102020204" pitchFamily="34" charset="0"/>
-              <a:buChar char="■"/>
-              <a:defRPr sz="1400" kern="1200" baseline="0">
-                <a:solidFill>
-                  <a:schemeClr val="tx2"/>
-                </a:solidFill>
-                <a:latin typeface="+mn-lt"/>
-                <a:ea typeface="+mn-ea"/>
-                <a:cs typeface="+mn-cs"/>
-              </a:defRPr>
-            </a:lvl9pPr>
-          </a:lstStyle>
-          <a:p>
-            <a:r>
-              <a:rPr lang="en-US" b="1" dirty="0">
-                <a:solidFill>
-                  <a:schemeClr val="tx1"/>
-                </a:solidFill>
-                <a:latin typeface="Times New Roman" panose="02020603050405020304" pitchFamily="18" charset="0"/>
-                <a:cs typeface="Times New Roman" panose="02020603050405020304" pitchFamily="18" charset="0"/>
-              </a:rPr>
-              <a:t>Steady Improvement:</a:t>
-            </a:r>
-            <a:r>
-              <a:rPr lang="en-US" dirty="0">
-                <a:solidFill>
-                  <a:schemeClr val="tx1"/>
-                </a:solidFill>
-                <a:latin typeface="Times New Roman" panose="02020603050405020304" pitchFamily="18" charset="0"/>
-                <a:cs typeface="Times New Roman" panose="02020603050405020304" pitchFamily="18" charset="0"/>
-              </a:rPr>
-              <a:t> On most Question Answering and Common-Sense benchmarks, performance improves steadily as training progresses.</a:t>
-            </a:r>
-          </a:p>
-          <a:p>
-            <a:endParaRPr lang="en-US" dirty="0">
-              <a:solidFill>
-                <a:schemeClr val="tx1"/>
-              </a:solidFill>
-              <a:latin typeface="Times New Roman" panose="02020603050405020304" pitchFamily="18" charset="0"/>
-              <a:cs typeface="Times New Roman" panose="02020603050405020304" pitchFamily="18" charset="0"/>
-            </a:endParaRPr>
-          </a:p>
-          <a:p>
-            <a:r>
-              <a:rPr lang="en-US" b="1" dirty="0">
-                <a:solidFill>
-                  <a:schemeClr val="tx1"/>
-                </a:solidFill>
-                <a:latin typeface="Times New Roman" panose="02020603050405020304" pitchFamily="18" charset="0"/>
-                <a:cs typeface="Times New Roman" panose="02020603050405020304" pitchFamily="18" charset="0"/>
-              </a:rPr>
-              <a:t>Perplexity Correlation:</a:t>
-            </a:r>
-            <a:r>
-              <a:rPr lang="en-US" dirty="0">
-                <a:solidFill>
-                  <a:schemeClr val="tx1"/>
-                </a:solidFill>
-                <a:latin typeface="Times New Roman" panose="02020603050405020304" pitchFamily="18" charset="0"/>
-                <a:cs typeface="Times New Roman" panose="02020603050405020304" pitchFamily="18" charset="0"/>
-              </a:rPr>
-              <a:t> There is a strong correlation between training perplexity and downstream task performance. As perplexity drops, benchmark scores rise.</a:t>
-            </a:r>
-          </a:p>
-          <a:p>
-            <a:endParaRPr lang="en-US" dirty="0">
-              <a:solidFill>
-                <a:schemeClr val="tx1"/>
-              </a:solidFill>
-              <a:latin typeface="Times New Roman" panose="02020603050405020304" pitchFamily="18" charset="0"/>
-              <a:cs typeface="Times New Roman" panose="02020603050405020304" pitchFamily="18" charset="0"/>
-            </a:endParaRPr>
-          </a:p>
-          <a:p>
-            <a:r>
-              <a:rPr lang="en-US" b="1" dirty="0">
-                <a:solidFill>
-                  <a:schemeClr val="tx1"/>
-                </a:solidFill>
-                <a:latin typeface="Times New Roman" panose="02020603050405020304" pitchFamily="18" charset="0"/>
-                <a:cs typeface="Times New Roman" panose="02020603050405020304" pitchFamily="18" charset="0"/>
-              </a:rPr>
-              <a:t>Exceptions:</a:t>
-            </a:r>
-          </a:p>
-          <a:p>
-            <a:pPr lvl="1"/>
-            <a:r>
-              <a:rPr lang="en-US" i="0" dirty="0">
-                <a:solidFill>
-                  <a:schemeClr val="tx1"/>
-                </a:solidFill>
-                <a:latin typeface="Times New Roman" panose="02020603050405020304" pitchFamily="18" charset="0"/>
-                <a:cs typeface="Times New Roman" panose="02020603050405020304" pitchFamily="18" charset="0"/>
-              </a:rPr>
-              <a:t>The SIQA benchmark shows high variance during training, suggesting it may not be a reliable metric for tracking progress.</a:t>
-            </a:r>
-          </a:p>
-          <a:p>
-            <a:pPr lvl="1"/>
-            <a:r>
-              <a:rPr lang="en-US" i="0" dirty="0">
-                <a:solidFill>
-                  <a:schemeClr val="tx1"/>
-                </a:solidFill>
-                <a:latin typeface="Times New Roman" panose="02020603050405020304" pitchFamily="18" charset="0"/>
-                <a:cs typeface="Times New Roman" panose="02020603050405020304" pitchFamily="18" charset="0"/>
-              </a:rPr>
-              <a:t>Performance on </a:t>
-            </a:r>
-            <a:r>
-              <a:rPr lang="en-US" i="0" dirty="0" err="1">
-                <a:solidFill>
-                  <a:schemeClr val="tx1"/>
-                </a:solidFill>
-                <a:latin typeface="Times New Roman" panose="02020603050405020304" pitchFamily="18" charset="0"/>
-                <a:cs typeface="Times New Roman" panose="02020603050405020304" pitchFamily="18" charset="0"/>
-              </a:rPr>
-              <a:t>WinoGrande</a:t>
-            </a:r>
-            <a:r>
-              <a:rPr lang="en-US" i="0" dirty="0">
-                <a:solidFill>
-                  <a:schemeClr val="tx1"/>
-                </a:solidFill>
-                <a:latin typeface="Times New Roman" panose="02020603050405020304" pitchFamily="18" charset="0"/>
-                <a:cs typeface="Times New Roman" panose="02020603050405020304" pitchFamily="18" charset="0"/>
-              </a:rPr>
-              <a:t> does not correlate well with perplexity, with LLaMA-33B and LLaMA-65B showing similar performance despite size differences.</a:t>
-            </a:r>
-          </a:p>
-        </p:txBody>
-      </p:sp>
-    </p:spTree>
-    <p:extLst>
-      <p:ext uri="{BB962C8B-B14F-4D97-AF65-F5344CB8AC3E}">
-        <p14:creationId xmlns:p14="http://schemas.microsoft.com/office/powerpoint/2010/main" val="3102449062"/>
-      </p:ext>
-    </p:extLst>
-  </p:cSld>
-  <p:clrMapOvr>
-    <a:masterClrMapping/>
-  </p:clrMapOvr>
-</p:sld>
-</file>
-
-<file path=ppt/slides/slide15.xml><?xml version="1.0" encoding="utf-8"?>
 <p:sld xmlns:a="http://schemas.openxmlformats.org/drawingml/2006/main" xmlns:r="http://schemas.openxmlformats.org/officeDocument/2006/relationships" xmlns:p="http://schemas.openxmlformats.org/presentationml/2006/main">
   <p:cSld>
     <p:spTree>
@@ -7556,7 +7685,7 @@
 </p:sld>
 </file>
 
-<file path=ppt/slides/slide16.xml><?xml version="1.0" encoding="utf-8"?>
+<file path=ppt/slides/slide15.xml><?xml version="1.0" encoding="utf-8"?>
 <p:sld xmlns:a="http://schemas.openxmlformats.org/drawingml/2006/main" xmlns:r="http://schemas.openxmlformats.org/officeDocument/2006/relationships" xmlns:p="http://schemas.openxmlformats.org/presentationml/2006/main">
   <p:cSld>
     <p:spTree>
@@ -8206,7 +8335,7 @@
 </p:sld>
 </file>
 
-<file path=ppt/slides/slide17.xml><?xml version="1.0" encoding="utf-8"?>
+<file path=ppt/slides/slide16.xml><?xml version="1.0" encoding="utf-8"?>
 <p:sld xmlns:a="http://schemas.openxmlformats.org/drawingml/2006/main" xmlns:r="http://schemas.openxmlformats.org/officeDocument/2006/relationships" xmlns:p="http://schemas.openxmlformats.org/presentationml/2006/main">
   <p:cSld>
     <p:spTree>
@@ -8709,7 +8838,7 @@
 </p:sld>
 </file>
 
-<file path=ppt/slides/slide18.xml><?xml version="1.0" encoding="utf-8"?>
+<file path=ppt/slides/slide17.xml><?xml version="1.0" encoding="utf-8"?>
 <p:sld xmlns:a="http://schemas.openxmlformats.org/drawingml/2006/main" xmlns:r="http://schemas.openxmlformats.org/officeDocument/2006/relationships" xmlns:p="http://schemas.openxmlformats.org/presentationml/2006/main">
   <p:cSld>
     <p:spTree>
@@ -9424,7 +9553,7 @@
 </p:sld>
 </file>
 
-<file path=ppt/slides/slide19.xml><?xml version="1.0" encoding="utf-8"?>
+<file path=ppt/slides/slide18.xml><?xml version="1.0" encoding="utf-8"?>
 <p:sld xmlns:a="http://schemas.openxmlformats.org/drawingml/2006/main" xmlns:r="http://schemas.openxmlformats.org/officeDocument/2006/relationships" xmlns:p="http://schemas.openxmlformats.org/presentationml/2006/main">
   <p:cSld>
     <p:spTree>
@@ -10214,6 +10343,699 @@
     <p:extLst>
       <p:ext uri="{BB962C8B-B14F-4D97-AF65-F5344CB8AC3E}">
         <p14:creationId xmlns:p14="http://schemas.microsoft.com/office/powerpoint/2010/main" val="3111432998"/>
+      </p:ext>
+    </p:extLst>
+  </p:cSld>
+  <p:clrMapOvr>
+    <a:masterClrMapping/>
+  </p:clrMapOvr>
+</p:sld>
+</file>
+
+<file path=ppt/slides/slide19.xml><?xml version="1.0" encoding="utf-8"?>
+<p:sld xmlns:a="http://schemas.openxmlformats.org/drawingml/2006/main" xmlns:r="http://schemas.openxmlformats.org/officeDocument/2006/relationships" xmlns:p="http://schemas.openxmlformats.org/presentationml/2006/main">
+  <p:cSld>
+    <p:spTree>
+      <p:nvGrpSpPr>
+        <p:cNvPr id="1" name="">
+          <a:extLst>
+            <a:ext uri="{FF2B5EF4-FFF2-40B4-BE49-F238E27FC236}">
+              <a16:creationId xmlns:a16="http://schemas.microsoft.com/office/drawing/2014/main" id="{F0EB434B-B302-D123-FD19-C1359E96EEAE}"/>
+            </a:ext>
+          </a:extLst>
+        </p:cNvPr>
+        <p:cNvGrpSpPr/>
+        <p:nvPr/>
+      </p:nvGrpSpPr>
+      <p:grpSpPr>
+        <a:xfrm>
+          <a:off x="0" y="0"/>
+          <a:ext cx="0" cy="0"/>
+          <a:chOff x="0" y="0"/>
+          <a:chExt cx="0" cy="0"/>
+        </a:xfrm>
+      </p:grpSpPr>
+      <p:sp>
+        <p:nvSpPr>
+          <p:cNvPr id="2" name="Title 1">
+            <a:extLst>
+              <a:ext uri="{FF2B5EF4-FFF2-40B4-BE49-F238E27FC236}">
+                <a16:creationId xmlns:a16="http://schemas.microsoft.com/office/drawing/2014/main" id="{287EA9AB-C34C-F072-ED63-A4AD073A7F54}"/>
+              </a:ext>
+            </a:extLst>
+          </p:cNvPr>
+          <p:cNvSpPr>
+            <a:spLocks noGrp="1"/>
+          </p:cNvSpPr>
+          <p:nvPr>
+            <p:ph type="title"/>
+          </p:nvPr>
+        </p:nvSpPr>
+        <p:spPr>
+          <a:xfrm>
+            <a:off x="1371600" y="355701"/>
+            <a:ext cx="9601200" cy="660197"/>
+          </a:xfrm>
+        </p:spPr>
+        <p:txBody>
+          <a:bodyPr>
+            <a:normAutofit fontScale="90000"/>
+          </a:bodyPr>
+          <a:lstStyle/>
+          <a:p>
+            <a:pPr>
+              <a:spcAft>
+                <a:spcPts val="600"/>
+              </a:spcAft>
+            </a:pPr>
+            <a:r>
+              <a:rPr lang="en-US" b="1" i="0" dirty="0">
+                <a:solidFill>
+                  <a:schemeClr val="tx1"/>
+                </a:solidFill>
+                <a:effectLst/>
+                <a:latin typeface="Times New Roman" panose="02020603050405020304" pitchFamily="18" charset="0"/>
+                <a:cs typeface="Times New Roman" panose="02020603050405020304" pitchFamily="18" charset="0"/>
+              </a:rPr>
+              <a:t>5.3 </a:t>
+            </a:r>
+            <a:r>
+              <a:rPr lang="en-US" b="1" i="0" dirty="0" err="1">
+                <a:solidFill>
+                  <a:schemeClr val="tx1"/>
+                </a:solidFill>
+                <a:effectLst/>
+                <a:latin typeface="Times New Roman" panose="02020603050405020304" pitchFamily="18" charset="0"/>
+                <a:cs typeface="Times New Roman" panose="02020603050405020304" pitchFamily="18" charset="0"/>
+              </a:rPr>
+              <a:t>WinoGender</a:t>
+            </a:r>
+            <a:endParaRPr lang="en-IL" dirty="0">
+              <a:solidFill>
+                <a:schemeClr val="tx1"/>
+              </a:solidFill>
+              <a:latin typeface="Times New Roman" panose="02020603050405020304" pitchFamily="18" charset="0"/>
+              <a:cs typeface="Times New Roman" panose="02020603050405020304" pitchFamily="18" charset="0"/>
+            </a:endParaRPr>
+          </a:p>
+        </p:txBody>
+      </p:sp>
+      <p:sp>
+        <p:nvSpPr>
+          <p:cNvPr id="3" name="Content Placeholder 2">
+            <a:extLst>
+              <a:ext uri="{FF2B5EF4-FFF2-40B4-BE49-F238E27FC236}">
+                <a16:creationId xmlns:a16="http://schemas.microsoft.com/office/drawing/2014/main" id="{D0BE9299-2467-0DA7-CED5-9D4917C24471}"/>
+              </a:ext>
+            </a:extLst>
+          </p:cNvPr>
+          <p:cNvSpPr txBox="1">
+            <a:spLocks/>
+          </p:cNvSpPr>
+          <p:nvPr/>
+        </p:nvSpPr>
+        <p:spPr>
+          <a:xfrm>
+            <a:off x="1371600" y="1133856"/>
+            <a:ext cx="9601200" cy="964767"/>
+          </a:xfrm>
+          <a:prstGeom prst="rect">
+            <a:avLst/>
+          </a:prstGeom>
+        </p:spPr>
+        <p:txBody>
+          <a:bodyPr vert="horz" lIns="91440" tIns="45720" rIns="91440" bIns="45720" rtlCol="0">
+            <a:normAutofit/>
+          </a:bodyPr>
+          <a:lstStyle>
+            <a:lvl1pPr marL="384048" indent="-384048" algn="l" defTabSz="914400" rtl="0" eaLnBrk="1" latinLnBrk="0" hangingPunct="1">
+              <a:lnSpc>
+                <a:spcPct val="94000"/>
+              </a:lnSpc>
+              <a:spcBef>
+                <a:spcPts val="1000"/>
+              </a:spcBef>
+              <a:spcAft>
+                <a:spcPts val="200"/>
+              </a:spcAft>
+              <a:buFont typeface="Franklin Gothic Book" panose="020B0503020102020204" pitchFamily="34" charset="0"/>
+              <a:buChar char="■"/>
+              <a:defRPr sz="2000" kern="1200" baseline="0">
+                <a:solidFill>
+                  <a:schemeClr val="tx2"/>
+                </a:solidFill>
+                <a:latin typeface="+mn-lt"/>
+                <a:ea typeface="+mn-ea"/>
+                <a:cs typeface="+mn-cs"/>
+              </a:defRPr>
+            </a:lvl1pPr>
+            <a:lvl2pPr marL="914400" indent="-384048" algn="l" defTabSz="914400" rtl="0" eaLnBrk="1" latinLnBrk="0" hangingPunct="1">
+              <a:lnSpc>
+                <a:spcPct val="94000"/>
+              </a:lnSpc>
+              <a:spcBef>
+                <a:spcPts val="500"/>
+              </a:spcBef>
+              <a:spcAft>
+                <a:spcPts val="200"/>
+              </a:spcAft>
+              <a:buFont typeface="Franklin Gothic Book" panose="020B0503020102020204" pitchFamily="34" charset="0"/>
+              <a:buChar char="–"/>
+              <a:defRPr sz="2000" i="1" kern="1200" baseline="0">
+                <a:solidFill>
+                  <a:schemeClr val="tx2"/>
+                </a:solidFill>
+                <a:latin typeface="+mn-lt"/>
+                <a:ea typeface="+mn-ea"/>
+                <a:cs typeface="+mn-cs"/>
+              </a:defRPr>
+            </a:lvl2pPr>
+            <a:lvl3pPr marL="1371600" indent="-384048" algn="l" defTabSz="914400" rtl="0" eaLnBrk="1" latinLnBrk="0" hangingPunct="1">
+              <a:lnSpc>
+                <a:spcPct val="94000"/>
+              </a:lnSpc>
+              <a:spcBef>
+                <a:spcPts val="500"/>
+              </a:spcBef>
+              <a:spcAft>
+                <a:spcPts val="200"/>
+              </a:spcAft>
+              <a:buFont typeface="Franklin Gothic Book" panose="020B0503020102020204" pitchFamily="34" charset="0"/>
+              <a:buChar char="■"/>
+              <a:defRPr sz="1800" kern="1200" baseline="0">
+                <a:solidFill>
+                  <a:schemeClr val="tx2"/>
+                </a:solidFill>
+                <a:latin typeface="+mn-lt"/>
+                <a:ea typeface="+mn-ea"/>
+                <a:cs typeface="+mn-cs"/>
+              </a:defRPr>
+            </a:lvl3pPr>
+            <a:lvl4pPr marL="1828800" indent="-384048" algn="l" defTabSz="914400" rtl="0" eaLnBrk="1" latinLnBrk="0" hangingPunct="1">
+              <a:lnSpc>
+                <a:spcPct val="94000"/>
+              </a:lnSpc>
+              <a:spcBef>
+                <a:spcPts val="500"/>
+              </a:spcBef>
+              <a:spcAft>
+                <a:spcPts val="200"/>
+              </a:spcAft>
+              <a:buFont typeface="Franklin Gothic Book" panose="020B0503020102020204" pitchFamily="34" charset="0"/>
+              <a:buChar char="–"/>
+              <a:defRPr sz="1800" i="1" kern="1200" baseline="0">
+                <a:solidFill>
+                  <a:schemeClr val="tx2"/>
+                </a:solidFill>
+                <a:latin typeface="+mn-lt"/>
+                <a:ea typeface="+mn-ea"/>
+                <a:cs typeface="+mn-cs"/>
+              </a:defRPr>
+            </a:lvl4pPr>
+            <a:lvl5pPr marL="2286000" indent="-384048" algn="l" defTabSz="914400" rtl="0" eaLnBrk="1" latinLnBrk="0" hangingPunct="1">
+              <a:lnSpc>
+                <a:spcPct val="94000"/>
+              </a:lnSpc>
+              <a:spcBef>
+                <a:spcPts val="500"/>
+              </a:spcBef>
+              <a:spcAft>
+                <a:spcPts val="200"/>
+              </a:spcAft>
+              <a:buFont typeface="Franklin Gothic Book" panose="020B0503020102020204" pitchFamily="34" charset="0"/>
+              <a:buChar char="■"/>
+              <a:defRPr sz="1600" kern="1200" baseline="0">
+                <a:solidFill>
+                  <a:schemeClr val="tx2"/>
+                </a:solidFill>
+                <a:latin typeface="+mn-lt"/>
+                <a:ea typeface="+mn-ea"/>
+                <a:cs typeface="+mn-cs"/>
+              </a:defRPr>
+            </a:lvl5pPr>
+            <a:lvl6pPr marL="2743200" indent="-384048" algn="l" defTabSz="914400" rtl="0" eaLnBrk="1" latinLnBrk="0" hangingPunct="1">
+              <a:lnSpc>
+                <a:spcPct val="94000"/>
+              </a:lnSpc>
+              <a:spcBef>
+                <a:spcPts val="500"/>
+              </a:spcBef>
+              <a:spcAft>
+                <a:spcPts val="200"/>
+              </a:spcAft>
+              <a:buFont typeface="Franklin Gothic Book" panose="020B0503020102020204" pitchFamily="34" charset="0"/>
+              <a:buChar char="–"/>
+              <a:defRPr sz="1600" i="1" kern="1200" baseline="0">
+                <a:solidFill>
+                  <a:schemeClr val="tx2"/>
+                </a:solidFill>
+                <a:latin typeface="+mn-lt"/>
+                <a:ea typeface="+mn-ea"/>
+                <a:cs typeface="+mn-cs"/>
+              </a:defRPr>
+            </a:lvl6pPr>
+            <a:lvl7pPr marL="3200400" indent="-384048" algn="l" defTabSz="914400" rtl="0" eaLnBrk="1" latinLnBrk="0" hangingPunct="1">
+              <a:lnSpc>
+                <a:spcPct val="94000"/>
+              </a:lnSpc>
+              <a:spcBef>
+                <a:spcPts val="500"/>
+              </a:spcBef>
+              <a:spcAft>
+                <a:spcPts val="200"/>
+              </a:spcAft>
+              <a:buFont typeface="Franklin Gothic Book" panose="020B0503020102020204" pitchFamily="34" charset="0"/>
+              <a:buChar char="■"/>
+              <a:defRPr sz="1400" kern="1200" baseline="0">
+                <a:solidFill>
+                  <a:schemeClr val="tx2"/>
+                </a:solidFill>
+                <a:latin typeface="+mn-lt"/>
+                <a:ea typeface="+mn-ea"/>
+                <a:cs typeface="+mn-cs"/>
+              </a:defRPr>
+            </a:lvl7pPr>
+            <a:lvl8pPr marL="3657600" indent="-384048" algn="l" defTabSz="914400" rtl="0" eaLnBrk="1" latinLnBrk="0" hangingPunct="1">
+              <a:lnSpc>
+                <a:spcPct val="94000"/>
+              </a:lnSpc>
+              <a:spcBef>
+                <a:spcPts val="500"/>
+              </a:spcBef>
+              <a:spcAft>
+                <a:spcPts val="200"/>
+              </a:spcAft>
+              <a:buFont typeface="Franklin Gothic Book" panose="020B0503020102020204" pitchFamily="34" charset="0"/>
+              <a:buChar char="–"/>
+              <a:defRPr sz="1400" i="1" kern="1200" baseline="0">
+                <a:solidFill>
+                  <a:schemeClr val="tx2"/>
+                </a:solidFill>
+                <a:latin typeface="+mn-lt"/>
+                <a:ea typeface="+mn-ea"/>
+                <a:cs typeface="+mn-cs"/>
+              </a:defRPr>
+            </a:lvl8pPr>
+            <a:lvl9pPr marL="4114800" indent="-384048" algn="l" defTabSz="914400" rtl="0" eaLnBrk="1" latinLnBrk="0" hangingPunct="1">
+              <a:lnSpc>
+                <a:spcPct val="94000"/>
+              </a:lnSpc>
+              <a:spcBef>
+                <a:spcPts val="500"/>
+              </a:spcBef>
+              <a:spcAft>
+                <a:spcPts val="200"/>
+              </a:spcAft>
+              <a:buFont typeface="Franklin Gothic Book" panose="020B0503020102020204" pitchFamily="34" charset="0"/>
+              <a:buChar char="■"/>
+              <a:defRPr sz="1400" kern="1200" baseline="0">
+                <a:solidFill>
+                  <a:schemeClr val="tx2"/>
+                </a:solidFill>
+                <a:latin typeface="+mn-lt"/>
+                <a:ea typeface="+mn-ea"/>
+                <a:cs typeface="+mn-cs"/>
+              </a:defRPr>
+            </a:lvl9pPr>
+          </a:lstStyle>
+          <a:p>
+            <a:r>
+              <a:rPr lang="en-US" b="1" dirty="0">
+                <a:solidFill>
+                  <a:schemeClr val="tx1"/>
+                </a:solidFill>
+                <a:latin typeface="Times New Roman" panose="02020603050405020304" pitchFamily="18" charset="0"/>
+                <a:cs typeface="Times New Roman" panose="02020603050405020304" pitchFamily="18" charset="0"/>
+              </a:rPr>
+              <a:t>Metric:</a:t>
+            </a:r>
+            <a:r>
+              <a:rPr lang="en-US" dirty="0">
+                <a:solidFill>
+                  <a:schemeClr val="tx1"/>
+                </a:solidFill>
+                <a:latin typeface="Times New Roman" panose="02020603050405020304" pitchFamily="18" charset="0"/>
+                <a:cs typeface="Times New Roman" panose="02020603050405020304" pitchFamily="18" charset="0"/>
+              </a:rPr>
+              <a:t> Co-reference resolution accuracy (Perplexity of continuations).</a:t>
+            </a:r>
+          </a:p>
+          <a:p>
+            <a:r>
+              <a:rPr lang="en-US" b="1" dirty="0">
+                <a:solidFill>
+                  <a:schemeClr val="tx1"/>
+                </a:solidFill>
+                <a:latin typeface="Times New Roman" panose="02020603050405020304" pitchFamily="18" charset="0"/>
+                <a:cs typeface="Times New Roman" panose="02020603050405020304" pitchFamily="18" charset="0"/>
+              </a:rPr>
+              <a:t>Settings:</a:t>
+            </a:r>
+            <a:r>
+              <a:rPr lang="en-US" dirty="0">
+                <a:solidFill>
+                  <a:schemeClr val="tx1"/>
+                </a:solidFill>
+                <a:latin typeface="Times New Roman" panose="02020603050405020304" pitchFamily="18" charset="0"/>
+                <a:cs typeface="Times New Roman" panose="02020603050405020304" pitchFamily="18" charset="0"/>
+              </a:rPr>
+              <a:t> Zero-shot with Winograd schemas that use "her", "his", and "their" pronouns.</a:t>
+            </a:r>
+            <a:endParaRPr lang="en-US" i="0" dirty="0">
+              <a:solidFill>
+                <a:schemeClr val="tx1"/>
+              </a:solidFill>
+              <a:latin typeface="Times New Roman" panose="02020603050405020304" pitchFamily="18" charset="0"/>
+              <a:cs typeface="Times New Roman" panose="02020603050405020304" pitchFamily="18" charset="0"/>
+            </a:endParaRPr>
+          </a:p>
+        </p:txBody>
+      </p:sp>
+      <p:sp>
+        <p:nvSpPr>
+          <p:cNvPr id="6" name="Content Placeholder 2">
+            <a:extLst>
+              <a:ext uri="{FF2B5EF4-FFF2-40B4-BE49-F238E27FC236}">
+                <a16:creationId xmlns:a16="http://schemas.microsoft.com/office/drawing/2014/main" id="{7AEE2BF7-018F-8862-F76A-DE4C51AA5B5E}"/>
+              </a:ext>
+            </a:extLst>
+          </p:cNvPr>
+          <p:cNvSpPr txBox="1">
+            <a:spLocks/>
+          </p:cNvSpPr>
+          <p:nvPr/>
+        </p:nvSpPr>
+        <p:spPr>
+          <a:xfrm>
+            <a:off x="1371600" y="2216581"/>
+            <a:ext cx="5194092" cy="3944376"/>
+          </a:xfrm>
+          <a:prstGeom prst="rect">
+            <a:avLst/>
+          </a:prstGeom>
+        </p:spPr>
+        <p:txBody>
+          <a:bodyPr vert="horz" lIns="91440" tIns="45720" rIns="91440" bIns="45720" rtlCol="0">
+            <a:normAutofit/>
+          </a:bodyPr>
+          <a:lstStyle>
+            <a:lvl1pPr marL="384048" indent="-384048" algn="l" defTabSz="914400" rtl="0" eaLnBrk="1" latinLnBrk="0" hangingPunct="1">
+              <a:lnSpc>
+                <a:spcPct val="94000"/>
+              </a:lnSpc>
+              <a:spcBef>
+                <a:spcPts val="1000"/>
+              </a:spcBef>
+              <a:spcAft>
+                <a:spcPts val="200"/>
+              </a:spcAft>
+              <a:buFont typeface="Franklin Gothic Book" panose="020B0503020102020204" pitchFamily="34" charset="0"/>
+              <a:buChar char="■"/>
+              <a:defRPr sz="2000" kern="1200" baseline="0">
+                <a:solidFill>
+                  <a:schemeClr val="tx2"/>
+                </a:solidFill>
+                <a:latin typeface="+mn-lt"/>
+                <a:ea typeface="+mn-ea"/>
+                <a:cs typeface="+mn-cs"/>
+              </a:defRPr>
+            </a:lvl1pPr>
+            <a:lvl2pPr marL="914400" indent="-384048" algn="l" defTabSz="914400" rtl="0" eaLnBrk="1" latinLnBrk="0" hangingPunct="1">
+              <a:lnSpc>
+                <a:spcPct val="94000"/>
+              </a:lnSpc>
+              <a:spcBef>
+                <a:spcPts val="500"/>
+              </a:spcBef>
+              <a:spcAft>
+                <a:spcPts val="200"/>
+              </a:spcAft>
+              <a:buFont typeface="Franklin Gothic Book" panose="020B0503020102020204" pitchFamily="34" charset="0"/>
+              <a:buChar char="–"/>
+              <a:defRPr sz="2000" i="1" kern="1200" baseline="0">
+                <a:solidFill>
+                  <a:schemeClr val="tx2"/>
+                </a:solidFill>
+                <a:latin typeface="+mn-lt"/>
+                <a:ea typeface="+mn-ea"/>
+                <a:cs typeface="+mn-cs"/>
+              </a:defRPr>
+            </a:lvl2pPr>
+            <a:lvl3pPr marL="1371600" indent="-384048" algn="l" defTabSz="914400" rtl="0" eaLnBrk="1" latinLnBrk="0" hangingPunct="1">
+              <a:lnSpc>
+                <a:spcPct val="94000"/>
+              </a:lnSpc>
+              <a:spcBef>
+                <a:spcPts val="500"/>
+              </a:spcBef>
+              <a:spcAft>
+                <a:spcPts val="200"/>
+              </a:spcAft>
+              <a:buFont typeface="Franklin Gothic Book" panose="020B0503020102020204" pitchFamily="34" charset="0"/>
+              <a:buChar char="■"/>
+              <a:defRPr sz="1800" kern="1200" baseline="0">
+                <a:solidFill>
+                  <a:schemeClr val="tx2"/>
+                </a:solidFill>
+                <a:latin typeface="+mn-lt"/>
+                <a:ea typeface="+mn-ea"/>
+                <a:cs typeface="+mn-cs"/>
+              </a:defRPr>
+            </a:lvl3pPr>
+            <a:lvl4pPr marL="1828800" indent="-384048" algn="l" defTabSz="914400" rtl="0" eaLnBrk="1" latinLnBrk="0" hangingPunct="1">
+              <a:lnSpc>
+                <a:spcPct val="94000"/>
+              </a:lnSpc>
+              <a:spcBef>
+                <a:spcPts val="500"/>
+              </a:spcBef>
+              <a:spcAft>
+                <a:spcPts val="200"/>
+              </a:spcAft>
+              <a:buFont typeface="Franklin Gothic Book" panose="020B0503020102020204" pitchFamily="34" charset="0"/>
+              <a:buChar char="–"/>
+              <a:defRPr sz="1800" i="1" kern="1200" baseline="0">
+                <a:solidFill>
+                  <a:schemeClr val="tx2"/>
+                </a:solidFill>
+                <a:latin typeface="+mn-lt"/>
+                <a:ea typeface="+mn-ea"/>
+                <a:cs typeface="+mn-cs"/>
+              </a:defRPr>
+            </a:lvl4pPr>
+            <a:lvl5pPr marL="2286000" indent="-384048" algn="l" defTabSz="914400" rtl="0" eaLnBrk="1" latinLnBrk="0" hangingPunct="1">
+              <a:lnSpc>
+                <a:spcPct val="94000"/>
+              </a:lnSpc>
+              <a:spcBef>
+                <a:spcPts val="500"/>
+              </a:spcBef>
+              <a:spcAft>
+                <a:spcPts val="200"/>
+              </a:spcAft>
+              <a:buFont typeface="Franklin Gothic Book" panose="020B0503020102020204" pitchFamily="34" charset="0"/>
+              <a:buChar char="■"/>
+              <a:defRPr sz="1600" kern="1200" baseline="0">
+                <a:solidFill>
+                  <a:schemeClr val="tx2"/>
+                </a:solidFill>
+                <a:latin typeface="+mn-lt"/>
+                <a:ea typeface="+mn-ea"/>
+                <a:cs typeface="+mn-cs"/>
+              </a:defRPr>
+            </a:lvl5pPr>
+            <a:lvl6pPr marL="2743200" indent="-384048" algn="l" defTabSz="914400" rtl="0" eaLnBrk="1" latinLnBrk="0" hangingPunct="1">
+              <a:lnSpc>
+                <a:spcPct val="94000"/>
+              </a:lnSpc>
+              <a:spcBef>
+                <a:spcPts val="500"/>
+              </a:spcBef>
+              <a:spcAft>
+                <a:spcPts val="200"/>
+              </a:spcAft>
+              <a:buFont typeface="Franklin Gothic Book" panose="020B0503020102020204" pitchFamily="34" charset="0"/>
+              <a:buChar char="–"/>
+              <a:defRPr sz="1600" i="1" kern="1200" baseline="0">
+                <a:solidFill>
+                  <a:schemeClr val="tx2"/>
+                </a:solidFill>
+                <a:latin typeface="+mn-lt"/>
+                <a:ea typeface="+mn-ea"/>
+                <a:cs typeface="+mn-cs"/>
+              </a:defRPr>
+            </a:lvl6pPr>
+            <a:lvl7pPr marL="3200400" indent="-384048" algn="l" defTabSz="914400" rtl="0" eaLnBrk="1" latinLnBrk="0" hangingPunct="1">
+              <a:lnSpc>
+                <a:spcPct val="94000"/>
+              </a:lnSpc>
+              <a:spcBef>
+                <a:spcPts val="500"/>
+              </a:spcBef>
+              <a:spcAft>
+                <a:spcPts val="200"/>
+              </a:spcAft>
+              <a:buFont typeface="Franklin Gothic Book" panose="020B0503020102020204" pitchFamily="34" charset="0"/>
+              <a:buChar char="■"/>
+              <a:defRPr sz="1400" kern="1200" baseline="0">
+                <a:solidFill>
+                  <a:schemeClr val="tx2"/>
+                </a:solidFill>
+                <a:latin typeface="+mn-lt"/>
+                <a:ea typeface="+mn-ea"/>
+                <a:cs typeface="+mn-cs"/>
+              </a:defRPr>
+            </a:lvl7pPr>
+            <a:lvl8pPr marL="3657600" indent="-384048" algn="l" defTabSz="914400" rtl="0" eaLnBrk="1" latinLnBrk="0" hangingPunct="1">
+              <a:lnSpc>
+                <a:spcPct val="94000"/>
+              </a:lnSpc>
+              <a:spcBef>
+                <a:spcPts val="500"/>
+              </a:spcBef>
+              <a:spcAft>
+                <a:spcPts val="200"/>
+              </a:spcAft>
+              <a:buFont typeface="Franklin Gothic Book" panose="020B0503020102020204" pitchFamily="34" charset="0"/>
+              <a:buChar char="–"/>
+              <a:defRPr sz="1400" i="1" kern="1200" baseline="0">
+                <a:solidFill>
+                  <a:schemeClr val="tx2"/>
+                </a:solidFill>
+                <a:latin typeface="+mn-lt"/>
+                <a:ea typeface="+mn-ea"/>
+                <a:cs typeface="+mn-cs"/>
+              </a:defRPr>
+            </a:lvl8pPr>
+            <a:lvl9pPr marL="4114800" indent="-384048" algn="l" defTabSz="914400" rtl="0" eaLnBrk="1" latinLnBrk="0" hangingPunct="1">
+              <a:lnSpc>
+                <a:spcPct val="94000"/>
+              </a:lnSpc>
+              <a:spcBef>
+                <a:spcPts val="500"/>
+              </a:spcBef>
+              <a:spcAft>
+                <a:spcPts val="200"/>
+              </a:spcAft>
+              <a:buFont typeface="Franklin Gothic Book" panose="020B0503020102020204" pitchFamily="34" charset="0"/>
+              <a:buChar char="■"/>
+              <a:defRPr sz="1400" kern="1200" baseline="0">
+                <a:solidFill>
+                  <a:schemeClr val="tx2"/>
+                </a:solidFill>
+                <a:latin typeface="+mn-lt"/>
+                <a:ea typeface="+mn-ea"/>
+                <a:cs typeface="+mn-cs"/>
+              </a:defRPr>
+            </a:lvl9pPr>
+          </a:lstStyle>
+          <a:p>
+            <a:r>
+              <a:rPr lang="en-US" dirty="0">
+                <a:solidFill>
+                  <a:schemeClr val="tx1"/>
+                </a:solidFill>
+                <a:latin typeface="Times New Roman" panose="02020603050405020304" pitchFamily="18" charset="0"/>
+                <a:cs typeface="Times New Roman" panose="02020603050405020304" pitchFamily="18" charset="0"/>
+              </a:rPr>
+              <a:t>The model performs significantly better when resolving </a:t>
+            </a:r>
+            <a:r>
+              <a:rPr lang="en-US" b="1" dirty="0">
+                <a:solidFill>
+                  <a:schemeClr val="tx1"/>
+                </a:solidFill>
+                <a:latin typeface="Times New Roman" panose="02020603050405020304" pitchFamily="18" charset="0"/>
+                <a:cs typeface="Times New Roman" panose="02020603050405020304" pitchFamily="18" charset="0"/>
+              </a:rPr>
+              <a:t>neutral pronouns</a:t>
+            </a:r>
+            <a:r>
+              <a:rPr lang="en-US" dirty="0">
+                <a:solidFill>
+                  <a:schemeClr val="tx1"/>
+                </a:solidFill>
+                <a:latin typeface="Times New Roman" panose="02020603050405020304" pitchFamily="18" charset="0"/>
+                <a:cs typeface="Times New Roman" panose="02020603050405020304" pitchFamily="18" charset="0"/>
+              </a:rPr>
+              <a:t> ("their/them") compared to </a:t>
+            </a:r>
+            <a:r>
+              <a:rPr lang="en-US" b="1" dirty="0">
+                <a:solidFill>
+                  <a:schemeClr val="tx1"/>
+                </a:solidFill>
+                <a:latin typeface="Times New Roman" panose="02020603050405020304" pitchFamily="18" charset="0"/>
+                <a:cs typeface="Times New Roman" panose="02020603050405020304" pitchFamily="18" charset="0"/>
+              </a:rPr>
+              <a:t>gendered ones</a:t>
+            </a:r>
+            <a:r>
+              <a:rPr lang="en-US" dirty="0">
+                <a:solidFill>
+                  <a:schemeClr val="tx1"/>
+                </a:solidFill>
+                <a:latin typeface="Times New Roman" panose="02020603050405020304" pitchFamily="18" charset="0"/>
+                <a:cs typeface="Times New Roman" panose="02020603050405020304" pitchFamily="18" charset="0"/>
+              </a:rPr>
+              <a:t> ("her/his").</a:t>
+            </a:r>
+          </a:p>
+          <a:p>
+            <a:r>
+              <a:rPr lang="en-US" dirty="0">
+                <a:solidFill>
+                  <a:schemeClr val="tx1"/>
+                </a:solidFill>
+                <a:latin typeface="Times New Roman" panose="02020603050405020304" pitchFamily="18" charset="0"/>
+                <a:cs typeface="Times New Roman" panose="02020603050405020304" pitchFamily="18" charset="0"/>
+              </a:rPr>
+              <a:t>Performance drops noticeably when the pronoun does not match the occupation's historical majority gender (e.g., a male nurse).</a:t>
+            </a:r>
+            <a:endParaRPr lang="en-US" i="0" dirty="0">
+              <a:solidFill>
+                <a:schemeClr val="tx1"/>
+              </a:solidFill>
+              <a:latin typeface="Times New Roman" panose="02020603050405020304" pitchFamily="18" charset="0"/>
+              <a:cs typeface="Times New Roman" panose="02020603050405020304" pitchFamily="18" charset="0"/>
+            </a:endParaRPr>
+          </a:p>
+        </p:txBody>
+      </p:sp>
+      <p:pic>
+        <p:nvPicPr>
+          <p:cNvPr id="7" name="Picture 6">
+            <a:extLst>
+              <a:ext uri="{FF2B5EF4-FFF2-40B4-BE49-F238E27FC236}">
+                <a16:creationId xmlns:a16="http://schemas.microsoft.com/office/drawing/2014/main" id="{60A5D502-EF3B-7459-FADD-36F6DBFDACCB}"/>
+              </a:ext>
+            </a:extLst>
+          </p:cNvPr>
+          <p:cNvPicPr>
+            <a:picLocks noChangeAspect="1"/>
+          </p:cNvPicPr>
+          <p:nvPr/>
+        </p:nvPicPr>
+        <p:blipFill>
+          <a:blip r:embed="rId2"/>
+          <a:stretch>
+            <a:fillRect/>
+          </a:stretch>
+        </p:blipFill>
+        <p:spPr>
+          <a:xfrm>
+            <a:off x="6699562" y="2216581"/>
+            <a:ext cx="4699000" cy="4127500"/>
+          </a:xfrm>
+          <a:prstGeom prst="rect">
+            <a:avLst/>
+          </a:prstGeom>
+        </p:spPr>
+      </p:pic>
+    </p:spTree>
+    <p:extLst>
+      <p:ext uri="{BB962C8B-B14F-4D97-AF65-F5344CB8AC3E}">
+        <p14:creationId xmlns:p14="http://schemas.microsoft.com/office/powerpoint/2010/main" val="1713120900"/>
       </p:ext>
     </p:extLst>
   </p:cSld>
@@ -10576,699 +11398,6 @@
         <p:cNvPr id="1" name="">
           <a:extLst>
             <a:ext uri="{FF2B5EF4-FFF2-40B4-BE49-F238E27FC236}">
-              <a16:creationId xmlns:a16="http://schemas.microsoft.com/office/drawing/2014/main" id="{F0EB434B-B302-D123-FD19-C1359E96EEAE}"/>
-            </a:ext>
-          </a:extLst>
-        </p:cNvPr>
-        <p:cNvGrpSpPr/>
-        <p:nvPr/>
-      </p:nvGrpSpPr>
-      <p:grpSpPr>
-        <a:xfrm>
-          <a:off x="0" y="0"/>
-          <a:ext cx="0" cy="0"/>
-          <a:chOff x="0" y="0"/>
-          <a:chExt cx="0" cy="0"/>
-        </a:xfrm>
-      </p:grpSpPr>
-      <p:sp>
-        <p:nvSpPr>
-          <p:cNvPr id="2" name="Title 1">
-            <a:extLst>
-              <a:ext uri="{FF2B5EF4-FFF2-40B4-BE49-F238E27FC236}">
-                <a16:creationId xmlns:a16="http://schemas.microsoft.com/office/drawing/2014/main" id="{287EA9AB-C34C-F072-ED63-A4AD073A7F54}"/>
-              </a:ext>
-            </a:extLst>
-          </p:cNvPr>
-          <p:cNvSpPr>
-            <a:spLocks noGrp="1"/>
-          </p:cNvSpPr>
-          <p:nvPr>
-            <p:ph type="title"/>
-          </p:nvPr>
-        </p:nvSpPr>
-        <p:spPr>
-          <a:xfrm>
-            <a:off x="1371600" y="355701"/>
-            <a:ext cx="9601200" cy="660197"/>
-          </a:xfrm>
-        </p:spPr>
-        <p:txBody>
-          <a:bodyPr>
-            <a:normAutofit fontScale="90000"/>
-          </a:bodyPr>
-          <a:lstStyle/>
-          <a:p>
-            <a:pPr>
-              <a:spcAft>
-                <a:spcPts val="600"/>
-              </a:spcAft>
-            </a:pPr>
-            <a:r>
-              <a:rPr lang="en-US" b="1" i="0" dirty="0">
-                <a:solidFill>
-                  <a:schemeClr val="tx1"/>
-                </a:solidFill>
-                <a:effectLst/>
-                <a:latin typeface="Times New Roman" panose="02020603050405020304" pitchFamily="18" charset="0"/>
-                <a:cs typeface="Times New Roman" panose="02020603050405020304" pitchFamily="18" charset="0"/>
-              </a:rPr>
-              <a:t>5.3 </a:t>
-            </a:r>
-            <a:r>
-              <a:rPr lang="en-US" b="1" i="0" dirty="0" err="1">
-                <a:solidFill>
-                  <a:schemeClr val="tx1"/>
-                </a:solidFill>
-                <a:effectLst/>
-                <a:latin typeface="Times New Roman" panose="02020603050405020304" pitchFamily="18" charset="0"/>
-                <a:cs typeface="Times New Roman" panose="02020603050405020304" pitchFamily="18" charset="0"/>
-              </a:rPr>
-              <a:t>WinoGender</a:t>
-            </a:r>
-            <a:endParaRPr lang="en-IL" dirty="0">
-              <a:solidFill>
-                <a:schemeClr val="tx1"/>
-              </a:solidFill>
-              <a:latin typeface="Times New Roman" panose="02020603050405020304" pitchFamily="18" charset="0"/>
-              <a:cs typeface="Times New Roman" panose="02020603050405020304" pitchFamily="18" charset="0"/>
-            </a:endParaRPr>
-          </a:p>
-        </p:txBody>
-      </p:sp>
-      <p:sp>
-        <p:nvSpPr>
-          <p:cNvPr id="3" name="Content Placeholder 2">
-            <a:extLst>
-              <a:ext uri="{FF2B5EF4-FFF2-40B4-BE49-F238E27FC236}">
-                <a16:creationId xmlns:a16="http://schemas.microsoft.com/office/drawing/2014/main" id="{D0BE9299-2467-0DA7-CED5-9D4917C24471}"/>
-              </a:ext>
-            </a:extLst>
-          </p:cNvPr>
-          <p:cNvSpPr txBox="1">
-            <a:spLocks/>
-          </p:cNvSpPr>
-          <p:nvPr/>
-        </p:nvSpPr>
-        <p:spPr>
-          <a:xfrm>
-            <a:off x="1371600" y="1133856"/>
-            <a:ext cx="9601200" cy="964767"/>
-          </a:xfrm>
-          <a:prstGeom prst="rect">
-            <a:avLst/>
-          </a:prstGeom>
-        </p:spPr>
-        <p:txBody>
-          <a:bodyPr vert="horz" lIns="91440" tIns="45720" rIns="91440" bIns="45720" rtlCol="0">
-            <a:normAutofit/>
-          </a:bodyPr>
-          <a:lstStyle>
-            <a:lvl1pPr marL="384048" indent="-384048" algn="l" defTabSz="914400" rtl="0" eaLnBrk="1" latinLnBrk="0" hangingPunct="1">
-              <a:lnSpc>
-                <a:spcPct val="94000"/>
-              </a:lnSpc>
-              <a:spcBef>
-                <a:spcPts val="1000"/>
-              </a:spcBef>
-              <a:spcAft>
-                <a:spcPts val="200"/>
-              </a:spcAft>
-              <a:buFont typeface="Franklin Gothic Book" panose="020B0503020102020204" pitchFamily="34" charset="0"/>
-              <a:buChar char="■"/>
-              <a:defRPr sz="2000" kern="1200" baseline="0">
-                <a:solidFill>
-                  <a:schemeClr val="tx2"/>
-                </a:solidFill>
-                <a:latin typeface="+mn-lt"/>
-                <a:ea typeface="+mn-ea"/>
-                <a:cs typeface="+mn-cs"/>
-              </a:defRPr>
-            </a:lvl1pPr>
-            <a:lvl2pPr marL="914400" indent="-384048" algn="l" defTabSz="914400" rtl="0" eaLnBrk="1" latinLnBrk="0" hangingPunct="1">
-              <a:lnSpc>
-                <a:spcPct val="94000"/>
-              </a:lnSpc>
-              <a:spcBef>
-                <a:spcPts val="500"/>
-              </a:spcBef>
-              <a:spcAft>
-                <a:spcPts val="200"/>
-              </a:spcAft>
-              <a:buFont typeface="Franklin Gothic Book" panose="020B0503020102020204" pitchFamily="34" charset="0"/>
-              <a:buChar char="–"/>
-              <a:defRPr sz="2000" i="1" kern="1200" baseline="0">
-                <a:solidFill>
-                  <a:schemeClr val="tx2"/>
-                </a:solidFill>
-                <a:latin typeface="+mn-lt"/>
-                <a:ea typeface="+mn-ea"/>
-                <a:cs typeface="+mn-cs"/>
-              </a:defRPr>
-            </a:lvl2pPr>
-            <a:lvl3pPr marL="1371600" indent="-384048" algn="l" defTabSz="914400" rtl="0" eaLnBrk="1" latinLnBrk="0" hangingPunct="1">
-              <a:lnSpc>
-                <a:spcPct val="94000"/>
-              </a:lnSpc>
-              <a:spcBef>
-                <a:spcPts val="500"/>
-              </a:spcBef>
-              <a:spcAft>
-                <a:spcPts val="200"/>
-              </a:spcAft>
-              <a:buFont typeface="Franklin Gothic Book" panose="020B0503020102020204" pitchFamily="34" charset="0"/>
-              <a:buChar char="■"/>
-              <a:defRPr sz="1800" kern="1200" baseline="0">
-                <a:solidFill>
-                  <a:schemeClr val="tx2"/>
-                </a:solidFill>
-                <a:latin typeface="+mn-lt"/>
-                <a:ea typeface="+mn-ea"/>
-                <a:cs typeface="+mn-cs"/>
-              </a:defRPr>
-            </a:lvl3pPr>
-            <a:lvl4pPr marL="1828800" indent="-384048" algn="l" defTabSz="914400" rtl="0" eaLnBrk="1" latinLnBrk="0" hangingPunct="1">
-              <a:lnSpc>
-                <a:spcPct val="94000"/>
-              </a:lnSpc>
-              <a:spcBef>
-                <a:spcPts val="500"/>
-              </a:spcBef>
-              <a:spcAft>
-                <a:spcPts val="200"/>
-              </a:spcAft>
-              <a:buFont typeface="Franklin Gothic Book" panose="020B0503020102020204" pitchFamily="34" charset="0"/>
-              <a:buChar char="–"/>
-              <a:defRPr sz="1800" i="1" kern="1200" baseline="0">
-                <a:solidFill>
-                  <a:schemeClr val="tx2"/>
-                </a:solidFill>
-                <a:latin typeface="+mn-lt"/>
-                <a:ea typeface="+mn-ea"/>
-                <a:cs typeface="+mn-cs"/>
-              </a:defRPr>
-            </a:lvl4pPr>
-            <a:lvl5pPr marL="2286000" indent="-384048" algn="l" defTabSz="914400" rtl="0" eaLnBrk="1" latinLnBrk="0" hangingPunct="1">
-              <a:lnSpc>
-                <a:spcPct val="94000"/>
-              </a:lnSpc>
-              <a:spcBef>
-                <a:spcPts val="500"/>
-              </a:spcBef>
-              <a:spcAft>
-                <a:spcPts val="200"/>
-              </a:spcAft>
-              <a:buFont typeface="Franklin Gothic Book" panose="020B0503020102020204" pitchFamily="34" charset="0"/>
-              <a:buChar char="■"/>
-              <a:defRPr sz="1600" kern="1200" baseline="0">
-                <a:solidFill>
-                  <a:schemeClr val="tx2"/>
-                </a:solidFill>
-                <a:latin typeface="+mn-lt"/>
-                <a:ea typeface="+mn-ea"/>
-                <a:cs typeface="+mn-cs"/>
-              </a:defRPr>
-            </a:lvl5pPr>
-            <a:lvl6pPr marL="2743200" indent="-384048" algn="l" defTabSz="914400" rtl="0" eaLnBrk="1" latinLnBrk="0" hangingPunct="1">
-              <a:lnSpc>
-                <a:spcPct val="94000"/>
-              </a:lnSpc>
-              <a:spcBef>
-                <a:spcPts val="500"/>
-              </a:spcBef>
-              <a:spcAft>
-                <a:spcPts val="200"/>
-              </a:spcAft>
-              <a:buFont typeface="Franklin Gothic Book" panose="020B0503020102020204" pitchFamily="34" charset="0"/>
-              <a:buChar char="–"/>
-              <a:defRPr sz="1600" i="1" kern="1200" baseline="0">
-                <a:solidFill>
-                  <a:schemeClr val="tx2"/>
-                </a:solidFill>
-                <a:latin typeface="+mn-lt"/>
-                <a:ea typeface="+mn-ea"/>
-                <a:cs typeface="+mn-cs"/>
-              </a:defRPr>
-            </a:lvl6pPr>
-            <a:lvl7pPr marL="3200400" indent="-384048" algn="l" defTabSz="914400" rtl="0" eaLnBrk="1" latinLnBrk="0" hangingPunct="1">
-              <a:lnSpc>
-                <a:spcPct val="94000"/>
-              </a:lnSpc>
-              <a:spcBef>
-                <a:spcPts val="500"/>
-              </a:spcBef>
-              <a:spcAft>
-                <a:spcPts val="200"/>
-              </a:spcAft>
-              <a:buFont typeface="Franklin Gothic Book" panose="020B0503020102020204" pitchFamily="34" charset="0"/>
-              <a:buChar char="■"/>
-              <a:defRPr sz="1400" kern="1200" baseline="0">
-                <a:solidFill>
-                  <a:schemeClr val="tx2"/>
-                </a:solidFill>
-                <a:latin typeface="+mn-lt"/>
-                <a:ea typeface="+mn-ea"/>
-                <a:cs typeface="+mn-cs"/>
-              </a:defRPr>
-            </a:lvl7pPr>
-            <a:lvl8pPr marL="3657600" indent="-384048" algn="l" defTabSz="914400" rtl="0" eaLnBrk="1" latinLnBrk="0" hangingPunct="1">
-              <a:lnSpc>
-                <a:spcPct val="94000"/>
-              </a:lnSpc>
-              <a:spcBef>
-                <a:spcPts val="500"/>
-              </a:spcBef>
-              <a:spcAft>
-                <a:spcPts val="200"/>
-              </a:spcAft>
-              <a:buFont typeface="Franklin Gothic Book" panose="020B0503020102020204" pitchFamily="34" charset="0"/>
-              <a:buChar char="–"/>
-              <a:defRPr sz="1400" i="1" kern="1200" baseline="0">
-                <a:solidFill>
-                  <a:schemeClr val="tx2"/>
-                </a:solidFill>
-                <a:latin typeface="+mn-lt"/>
-                <a:ea typeface="+mn-ea"/>
-                <a:cs typeface="+mn-cs"/>
-              </a:defRPr>
-            </a:lvl8pPr>
-            <a:lvl9pPr marL="4114800" indent="-384048" algn="l" defTabSz="914400" rtl="0" eaLnBrk="1" latinLnBrk="0" hangingPunct="1">
-              <a:lnSpc>
-                <a:spcPct val="94000"/>
-              </a:lnSpc>
-              <a:spcBef>
-                <a:spcPts val="500"/>
-              </a:spcBef>
-              <a:spcAft>
-                <a:spcPts val="200"/>
-              </a:spcAft>
-              <a:buFont typeface="Franklin Gothic Book" panose="020B0503020102020204" pitchFamily="34" charset="0"/>
-              <a:buChar char="■"/>
-              <a:defRPr sz="1400" kern="1200" baseline="0">
-                <a:solidFill>
-                  <a:schemeClr val="tx2"/>
-                </a:solidFill>
-                <a:latin typeface="+mn-lt"/>
-                <a:ea typeface="+mn-ea"/>
-                <a:cs typeface="+mn-cs"/>
-              </a:defRPr>
-            </a:lvl9pPr>
-          </a:lstStyle>
-          <a:p>
-            <a:r>
-              <a:rPr lang="en-US" b="1" dirty="0">
-                <a:solidFill>
-                  <a:schemeClr val="tx1"/>
-                </a:solidFill>
-                <a:latin typeface="Times New Roman" panose="02020603050405020304" pitchFamily="18" charset="0"/>
-                <a:cs typeface="Times New Roman" panose="02020603050405020304" pitchFamily="18" charset="0"/>
-              </a:rPr>
-              <a:t>Metric:</a:t>
-            </a:r>
-            <a:r>
-              <a:rPr lang="en-US" dirty="0">
-                <a:solidFill>
-                  <a:schemeClr val="tx1"/>
-                </a:solidFill>
-                <a:latin typeface="Times New Roman" panose="02020603050405020304" pitchFamily="18" charset="0"/>
-                <a:cs typeface="Times New Roman" panose="02020603050405020304" pitchFamily="18" charset="0"/>
-              </a:rPr>
-              <a:t> Co-reference resolution accuracy (Perplexity of continuations).</a:t>
-            </a:r>
-          </a:p>
-          <a:p>
-            <a:r>
-              <a:rPr lang="en-US" b="1" dirty="0">
-                <a:solidFill>
-                  <a:schemeClr val="tx1"/>
-                </a:solidFill>
-                <a:latin typeface="Times New Roman" panose="02020603050405020304" pitchFamily="18" charset="0"/>
-                <a:cs typeface="Times New Roman" panose="02020603050405020304" pitchFamily="18" charset="0"/>
-              </a:rPr>
-              <a:t>Settings:</a:t>
-            </a:r>
-            <a:r>
-              <a:rPr lang="en-US" dirty="0">
-                <a:solidFill>
-                  <a:schemeClr val="tx1"/>
-                </a:solidFill>
-                <a:latin typeface="Times New Roman" panose="02020603050405020304" pitchFamily="18" charset="0"/>
-                <a:cs typeface="Times New Roman" panose="02020603050405020304" pitchFamily="18" charset="0"/>
-              </a:rPr>
-              <a:t> Zero-shot with Winograd schemas that use "her", "his", and "their" pronouns.</a:t>
-            </a:r>
-            <a:endParaRPr lang="en-US" i="0" dirty="0">
-              <a:solidFill>
-                <a:schemeClr val="tx1"/>
-              </a:solidFill>
-              <a:latin typeface="Times New Roman" panose="02020603050405020304" pitchFamily="18" charset="0"/>
-              <a:cs typeface="Times New Roman" panose="02020603050405020304" pitchFamily="18" charset="0"/>
-            </a:endParaRPr>
-          </a:p>
-        </p:txBody>
-      </p:sp>
-      <p:sp>
-        <p:nvSpPr>
-          <p:cNvPr id="6" name="Content Placeholder 2">
-            <a:extLst>
-              <a:ext uri="{FF2B5EF4-FFF2-40B4-BE49-F238E27FC236}">
-                <a16:creationId xmlns:a16="http://schemas.microsoft.com/office/drawing/2014/main" id="{7AEE2BF7-018F-8862-F76A-DE4C51AA5B5E}"/>
-              </a:ext>
-            </a:extLst>
-          </p:cNvPr>
-          <p:cNvSpPr txBox="1">
-            <a:spLocks/>
-          </p:cNvSpPr>
-          <p:nvPr/>
-        </p:nvSpPr>
-        <p:spPr>
-          <a:xfrm>
-            <a:off x="1371600" y="2216581"/>
-            <a:ext cx="5194092" cy="3944376"/>
-          </a:xfrm>
-          <a:prstGeom prst="rect">
-            <a:avLst/>
-          </a:prstGeom>
-        </p:spPr>
-        <p:txBody>
-          <a:bodyPr vert="horz" lIns="91440" tIns="45720" rIns="91440" bIns="45720" rtlCol="0">
-            <a:normAutofit/>
-          </a:bodyPr>
-          <a:lstStyle>
-            <a:lvl1pPr marL="384048" indent="-384048" algn="l" defTabSz="914400" rtl="0" eaLnBrk="1" latinLnBrk="0" hangingPunct="1">
-              <a:lnSpc>
-                <a:spcPct val="94000"/>
-              </a:lnSpc>
-              <a:spcBef>
-                <a:spcPts val="1000"/>
-              </a:spcBef>
-              <a:spcAft>
-                <a:spcPts val="200"/>
-              </a:spcAft>
-              <a:buFont typeface="Franklin Gothic Book" panose="020B0503020102020204" pitchFamily="34" charset="0"/>
-              <a:buChar char="■"/>
-              <a:defRPr sz="2000" kern="1200" baseline="0">
-                <a:solidFill>
-                  <a:schemeClr val="tx2"/>
-                </a:solidFill>
-                <a:latin typeface="+mn-lt"/>
-                <a:ea typeface="+mn-ea"/>
-                <a:cs typeface="+mn-cs"/>
-              </a:defRPr>
-            </a:lvl1pPr>
-            <a:lvl2pPr marL="914400" indent="-384048" algn="l" defTabSz="914400" rtl="0" eaLnBrk="1" latinLnBrk="0" hangingPunct="1">
-              <a:lnSpc>
-                <a:spcPct val="94000"/>
-              </a:lnSpc>
-              <a:spcBef>
-                <a:spcPts val="500"/>
-              </a:spcBef>
-              <a:spcAft>
-                <a:spcPts val="200"/>
-              </a:spcAft>
-              <a:buFont typeface="Franklin Gothic Book" panose="020B0503020102020204" pitchFamily="34" charset="0"/>
-              <a:buChar char="–"/>
-              <a:defRPr sz="2000" i="1" kern="1200" baseline="0">
-                <a:solidFill>
-                  <a:schemeClr val="tx2"/>
-                </a:solidFill>
-                <a:latin typeface="+mn-lt"/>
-                <a:ea typeface="+mn-ea"/>
-                <a:cs typeface="+mn-cs"/>
-              </a:defRPr>
-            </a:lvl2pPr>
-            <a:lvl3pPr marL="1371600" indent="-384048" algn="l" defTabSz="914400" rtl="0" eaLnBrk="1" latinLnBrk="0" hangingPunct="1">
-              <a:lnSpc>
-                <a:spcPct val="94000"/>
-              </a:lnSpc>
-              <a:spcBef>
-                <a:spcPts val="500"/>
-              </a:spcBef>
-              <a:spcAft>
-                <a:spcPts val="200"/>
-              </a:spcAft>
-              <a:buFont typeface="Franklin Gothic Book" panose="020B0503020102020204" pitchFamily="34" charset="0"/>
-              <a:buChar char="■"/>
-              <a:defRPr sz="1800" kern="1200" baseline="0">
-                <a:solidFill>
-                  <a:schemeClr val="tx2"/>
-                </a:solidFill>
-                <a:latin typeface="+mn-lt"/>
-                <a:ea typeface="+mn-ea"/>
-                <a:cs typeface="+mn-cs"/>
-              </a:defRPr>
-            </a:lvl3pPr>
-            <a:lvl4pPr marL="1828800" indent="-384048" algn="l" defTabSz="914400" rtl="0" eaLnBrk="1" latinLnBrk="0" hangingPunct="1">
-              <a:lnSpc>
-                <a:spcPct val="94000"/>
-              </a:lnSpc>
-              <a:spcBef>
-                <a:spcPts val="500"/>
-              </a:spcBef>
-              <a:spcAft>
-                <a:spcPts val="200"/>
-              </a:spcAft>
-              <a:buFont typeface="Franklin Gothic Book" panose="020B0503020102020204" pitchFamily="34" charset="0"/>
-              <a:buChar char="–"/>
-              <a:defRPr sz="1800" i="1" kern="1200" baseline="0">
-                <a:solidFill>
-                  <a:schemeClr val="tx2"/>
-                </a:solidFill>
-                <a:latin typeface="+mn-lt"/>
-                <a:ea typeface="+mn-ea"/>
-                <a:cs typeface="+mn-cs"/>
-              </a:defRPr>
-            </a:lvl4pPr>
-            <a:lvl5pPr marL="2286000" indent="-384048" algn="l" defTabSz="914400" rtl="0" eaLnBrk="1" latinLnBrk="0" hangingPunct="1">
-              <a:lnSpc>
-                <a:spcPct val="94000"/>
-              </a:lnSpc>
-              <a:spcBef>
-                <a:spcPts val="500"/>
-              </a:spcBef>
-              <a:spcAft>
-                <a:spcPts val="200"/>
-              </a:spcAft>
-              <a:buFont typeface="Franklin Gothic Book" panose="020B0503020102020204" pitchFamily="34" charset="0"/>
-              <a:buChar char="■"/>
-              <a:defRPr sz="1600" kern="1200" baseline="0">
-                <a:solidFill>
-                  <a:schemeClr val="tx2"/>
-                </a:solidFill>
-                <a:latin typeface="+mn-lt"/>
-                <a:ea typeface="+mn-ea"/>
-                <a:cs typeface="+mn-cs"/>
-              </a:defRPr>
-            </a:lvl5pPr>
-            <a:lvl6pPr marL="2743200" indent="-384048" algn="l" defTabSz="914400" rtl="0" eaLnBrk="1" latinLnBrk="0" hangingPunct="1">
-              <a:lnSpc>
-                <a:spcPct val="94000"/>
-              </a:lnSpc>
-              <a:spcBef>
-                <a:spcPts val="500"/>
-              </a:spcBef>
-              <a:spcAft>
-                <a:spcPts val="200"/>
-              </a:spcAft>
-              <a:buFont typeface="Franklin Gothic Book" panose="020B0503020102020204" pitchFamily="34" charset="0"/>
-              <a:buChar char="–"/>
-              <a:defRPr sz="1600" i="1" kern="1200" baseline="0">
-                <a:solidFill>
-                  <a:schemeClr val="tx2"/>
-                </a:solidFill>
-                <a:latin typeface="+mn-lt"/>
-                <a:ea typeface="+mn-ea"/>
-                <a:cs typeface="+mn-cs"/>
-              </a:defRPr>
-            </a:lvl6pPr>
-            <a:lvl7pPr marL="3200400" indent="-384048" algn="l" defTabSz="914400" rtl="0" eaLnBrk="1" latinLnBrk="0" hangingPunct="1">
-              <a:lnSpc>
-                <a:spcPct val="94000"/>
-              </a:lnSpc>
-              <a:spcBef>
-                <a:spcPts val="500"/>
-              </a:spcBef>
-              <a:spcAft>
-                <a:spcPts val="200"/>
-              </a:spcAft>
-              <a:buFont typeface="Franklin Gothic Book" panose="020B0503020102020204" pitchFamily="34" charset="0"/>
-              <a:buChar char="■"/>
-              <a:defRPr sz="1400" kern="1200" baseline="0">
-                <a:solidFill>
-                  <a:schemeClr val="tx2"/>
-                </a:solidFill>
-                <a:latin typeface="+mn-lt"/>
-                <a:ea typeface="+mn-ea"/>
-                <a:cs typeface="+mn-cs"/>
-              </a:defRPr>
-            </a:lvl7pPr>
-            <a:lvl8pPr marL="3657600" indent="-384048" algn="l" defTabSz="914400" rtl="0" eaLnBrk="1" latinLnBrk="0" hangingPunct="1">
-              <a:lnSpc>
-                <a:spcPct val="94000"/>
-              </a:lnSpc>
-              <a:spcBef>
-                <a:spcPts val="500"/>
-              </a:spcBef>
-              <a:spcAft>
-                <a:spcPts val="200"/>
-              </a:spcAft>
-              <a:buFont typeface="Franklin Gothic Book" panose="020B0503020102020204" pitchFamily="34" charset="0"/>
-              <a:buChar char="–"/>
-              <a:defRPr sz="1400" i="1" kern="1200" baseline="0">
-                <a:solidFill>
-                  <a:schemeClr val="tx2"/>
-                </a:solidFill>
-                <a:latin typeface="+mn-lt"/>
-                <a:ea typeface="+mn-ea"/>
-                <a:cs typeface="+mn-cs"/>
-              </a:defRPr>
-            </a:lvl8pPr>
-            <a:lvl9pPr marL="4114800" indent="-384048" algn="l" defTabSz="914400" rtl="0" eaLnBrk="1" latinLnBrk="0" hangingPunct="1">
-              <a:lnSpc>
-                <a:spcPct val="94000"/>
-              </a:lnSpc>
-              <a:spcBef>
-                <a:spcPts val="500"/>
-              </a:spcBef>
-              <a:spcAft>
-                <a:spcPts val="200"/>
-              </a:spcAft>
-              <a:buFont typeface="Franklin Gothic Book" panose="020B0503020102020204" pitchFamily="34" charset="0"/>
-              <a:buChar char="■"/>
-              <a:defRPr sz="1400" kern="1200" baseline="0">
-                <a:solidFill>
-                  <a:schemeClr val="tx2"/>
-                </a:solidFill>
-                <a:latin typeface="+mn-lt"/>
-                <a:ea typeface="+mn-ea"/>
-                <a:cs typeface="+mn-cs"/>
-              </a:defRPr>
-            </a:lvl9pPr>
-          </a:lstStyle>
-          <a:p>
-            <a:r>
-              <a:rPr lang="en-US" dirty="0">
-                <a:solidFill>
-                  <a:schemeClr val="tx1"/>
-                </a:solidFill>
-                <a:latin typeface="Times New Roman" panose="02020603050405020304" pitchFamily="18" charset="0"/>
-                <a:cs typeface="Times New Roman" panose="02020603050405020304" pitchFamily="18" charset="0"/>
-              </a:rPr>
-              <a:t>The model performs significantly better when resolving </a:t>
-            </a:r>
-            <a:r>
-              <a:rPr lang="en-US" b="1" dirty="0">
-                <a:solidFill>
-                  <a:schemeClr val="tx1"/>
-                </a:solidFill>
-                <a:latin typeface="Times New Roman" panose="02020603050405020304" pitchFamily="18" charset="0"/>
-                <a:cs typeface="Times New Roman" panose="02020603050405020304" pitchFamily="18" charset="0"/>
-              </a:rPr>
-              <a:t>neutral pronouns</a:t>
-            </a:r>
-            <a:r>
-              <a:rPr lang="en-US" dirty="0">
-                <a:solidFill>
-                  <a:schemeClr val="tx1"/>
-                </a:solidFill>
-                <a:latin typeface="Times New Roman" panose="02020603050405020304" pitchFamily="18" charset="0"/>
-                <a:cs typeface="Times New Roman" panose="02020603050405020304" pitchFamily="18" charset="0"/>
-              </a:rPr>
-              <a:t> ("their/them") compared to </a:t>
-            </a:r>
-            <a:r>
-              <a:rPr lang="en-US" b="1" dirty="0">
-                <a:solidFill>
-                  <a:schemeClr val="tx1"/>
-                </a:solidFill>
-                <a:latin typeface="Times New Roman" panose="02020603050405020304" pitchFamily="18" charset="0"/>
-                <a:cs typeface="Times New Roman" panose="02020603050405020304" pitchFamily="18" charset="0"/>
-              </a:rPr>
-              <a:t>gendered ones</a:t>
-            </a:r>
-            <a:r>
-              <a:rPr lang="en-US" dirty="0">
-                <a:solidFill>
-                  <a:schemeClr val="tx1"/>
-                </a:solidFill>
-                <a:latin typeface="Times New Roman" panose="02020603050405020304" pitchFamily="18" charset="0"/>
-                <a:cs typeface="Times New Roman" panose="02020603050405020304" pitchFamily="18" charset="0"/>
-              </a:rPr>
-              <a:t> ("her/his").</a:t>
-            </a:r>
-          </a:p>
-          <a:p>
-            <a:r>
-              <a:rPr lang="en-US" dirty="0">
-                <a:solidFill>
-                  <a:schemeClr val="tx1"/>
-                </a:solidFill>
-                <a:latin typeface="Times New Roman" panose="02020603050405020304" pitchFamily="18" charset="0"/>
-                <a:cs typeface="Times New Roman" panose="02020603050405020304" pitchFamily="18" charset="0"/>
-              </a:rPr>
-              <a:t>Performance drops noticeably when the pronoun does not match the occupation's historical majority gender (e.g., a male nurse).</a:t>
-            </a:r>
-            <a:endParaRPr lang="en-US" i="0" dirty="0">
-              <a:solidFill>
-                <a:schemeClr val="tx1"/>
-              </a:solidFill>
-              <a:latin typeface="Times New Roman" panose="02020603050405020304" pitchFamily="18" charset="0"/>
-              <a:cs typeface="Times New Roman" panose="02020603050405020304" pitchFamily="18" charset="0"/>
-            </a:endParaRPr>
-          </a:p>
-        </p:txBody>
-      </p:sp>
-      <p:pic>
-        <p:nvPicPr>
-          <p:cNvPr id="7" name="Picture 6">
-            <a:extLst>
-              <a:ext uri="{FF2B5EF4-FFF2-40B4-BE49-F238E27FC236}">
-                <a16:creationId xmlns:a16="http://schemas.microsoft.com/office/drawing/2014/main" id="{60A5D502-EF3B-7459-FADD-36F6DBFDACCB}"/>
-              </a:ext>
-            </a:extLst>
-          </p:cNvPr>
-          <p:cNvPicPr>
-            <a:picLocks noChangeAspect="1"/>
-          </p:cNvPicPr>
-          <p:nvPr/>
-        </p:nvPicPr>
-        <p:blipFill>
-          <a:blip r:embed="rId2"/>
-          <a:stretch>
-            <a:fillRect/>
-          </a:stretch>
-        </p:blipFill>
-        <p:spPr>
-          <a:xfrm>
-            <a:off x="6699562" y="2216581"/>
-            <a:ext cx="4699000" cy="4127500"/>
-          </a:xfrm>
-          <a:prstGeom prst="rect">
-            <a:avLst/>
-          </a:prstGeom>
-        </p:spPr>
-      </p:pic>
-    </p:spTree>
-    <p:extLst>
-      <p:ext uri="{BB962C8B-B14F-4D97-AF65-F5344CB8AC3E}">
-        <p14:creationId xmlns:p14="http://schemas.microsoft.com/office/powerpoint/2010/main" val="1713120900"/>
-      </p:ext>
-    </p:extLst>
-  </p:cSld>
-  <p:clrMapOvr>
-    <a:masterClrMapping/>
-  </p:clrMapOvr>
-</p:sld>
-</file>
-
-<file path=ppt/slides/slide21.xml><?xml version="1.0" encoding="utf-8"?>
-<p:sld xmlns:a="http://schemas.openxmlformats.org/drawingml/2006/main" xmlns:r="http://schemas.openxmlformats.org/officeDocument/2006/relationships" xmlns:p="http://schemas.openxmlformats.org/presentationml/2006/main">
-  <p:cSld>
-    <p:spTree>
-      <p:nvGrpSpPr>
-        <p:cNvPr id="1" name="">
-          <a:extLst>
-            <a:ext uri="{FF2B5EF4-FFF2-40B4-BE49-F238E27FC236}">
               <a16:creationId xmlns:a16="http://schemas.microsoft.com/office/drawing/2014/main" id="{E865CCD5-6475-7CBD-0E68-E09D3EE0171C}"/>
             </a:ext>
           </a:extLst>
@@ -11989,7 +12118,7 @@
 </p:sld>
 </file>
 
-<file path=ppt/slides/slide22.xml><?xml version="1.0" encoding="utf-8"?>
+<file path=ppt/slides/slide21.xml><?xml version="1.0" encoding="utf-8"?>
 <p:sld xmlns:a="http://schemas.openxmlformats.org/drawingml/2006/main" xmlns:r="http://schemas.openxmlformats.org/officeDocument/2006/relationships" xmlns:p="http://schemas.openxmlformats.org/presentationml/2006/main">
   <p:cSld>
     <p:spTree>
@@ -12076,8 +12205,8 @@
           </a:p>
         </p:txBody>
       </p:sp>
-      <mc:AlternateContent xmlns:mc="http://schemas.openxmlformats.org/markup-compatibility/2006">
-        <mc:Choice xmlns:a14="http://schemas.microsoft.com/office/drawing/2010/main" Requires="a14">
+      <mc:AlternateContent xmlns:mc="http://schemas.openxmlformats.org/markup-compatibility/2006" xmlns:a14="http://schemas.microsoft.com/office/drawing/2010/main">
+        <mc:Choice Requires="a14">
           <p:sp>
             <p:nvSpPr>
               <p:cNvPr id="3" name="Content Placeholder 2">
@@ -12591,7 +12720,7 @@
                         <a:latin typeface="Cambria Math" panose="02040503050406030204" pitchFamily="18" charset="0"/>
                         <a:cs typeface="Times New Roman" panose="02020603050405020304" pitchFamily="18" charset="0"/>
                       </a:rPr>
-                      <m:t>-</m:t>
+                      <m:t>−</m:t>
                     </m:r>
                     <m:r>
                       <m:rPr>
@@ -12647,7 +12776,7 @@
                         <a:latin typeface="Cambria Math" panose="02040503050406030204" pitchFamily="18" charset="0"/>
                         <a:cs typeface="Times New Roman" panose="02020603050405020304" pitchFamily="18" charset="0"/>
                       </a:rPr>
-                      <m:t>-</m:t>
+                      <m:t>−</m:t>
                     </m:r>
                     <m:r>
                       <m:rPr>
@@ -12673,7 +12802,7 @@
                         <a:latin typeface="Cambria Math" panose="02040503050406030204" pitchFamily="18" charset="0"/>
                         <a:cs typeface="Times New Roman" panose="02020603050405020304" pitchFamily="18" charset="0"/>
                       </a:rPr>
-                      <m:t>-</m:t>
+                      <m:t>−</m:t>
                     </m:r>
                     <m:r>
                       <m:rPr>
@@ -12744,7 +12873,7 @@
             </p:txBody>
           </p:sp>
         </mc:Choice>
-        <mc:Fallback>
+        <mc:Fallback xmlns="">
           <p:sp>
             <p:nvSpPr>
               <p:cNvPr id="3" name="Content Placeholder 2">
@@ -12802,7 +12931,7 @@
 </p:sld>
 </file>
 
-<file path=ppt/slides/slide23.xml><?xml version="1.0" encoding="utf-8"?>
+<file path=ppt/slides/slide22.xml><?xml version="1.0" encoding="utf-8"?>
 <p:sld xmlns:a="http://schemas.openxmlformats.org/drawingml/2006/main" xmlns:r="http://schemas.openxmlformats.org/officeDocument/2006/relationships" xmlns:p="http://schemas.openxmlformats.org/presentationml/2006/main">
   <p:cSld>
     <p:spTree>
@@ -12900,8 +13029,8 @@
           </a:p>
         </p:txBody>
       </p:sp>
-      <mc:AlternateContent xmlns:mc="http://schemas.openxmlformats.org/markup-compatibility/2006">
-        <mc:Choice xmlns:a14="http://schemas.microsoft.com/office/drawing/2010/main" Requires="a14">
+      <mc:AlternateContent xmlns:mc="http://schemas.openxmlformats.org/markup-compatibility/2006" xmlns:a14="http://schemas.microsoft.com/office/drawing/2010/main">
+        <mc:Choice Requires="a14">
           <p:sp>
             <p:nvSpPr>
               <p:cNvPr id="3" name="Content Placeholder 2">
@@ -13499,7 +13628,7 @@
                     <m:sSub>
                       <m:sSubPr>
                         <m:ctrlPr>
-                          <a:rPr lang="en-US" b="0" i="0" smtClean="0">
+                          <a:rPr lang="en-US" b="0" i="1" smtClean="0">
                             <a:solidFill>
                               <a:schemeClr val="tx1"/>
                             </a:solidFill>
@@ -13719,7 +13848,7 @@
                     <m:sSub>
                       <m:sSubPr>
                         <m:ctrlPr>
-                          <a:rPr lang="en-US" b="0" i="0" smtClean="0">
+                          <a:rPr lang="en-US" b="0" i="1" smtClean="0">
                             <a:solidFill>
                               <a:schemeClr val="tx1"/>
                             </a:solidFill>
@@ -13818,7 +13947,7 @@
             </p:txBody>
           </p:sp>
         </mc:Choice>
-        <mc:Fallback>
+        <mc:Fallback xmlns="">
           <p:sp>
             <p:nvSpPr>
               <p:cNvPr id="3" name="Content Placeholder 2">
@@ -13876,7 +14005,7 @@
 </p:sld>
 </file>
 
-<file path=ppt/slides/slide24.xml><?xml version="1.0" encoding="utf-8"?>
+<file path=ppt/slides/slide23.xml><?xml version="1.0" encoding="utf-8"?>
 <p:sld xmlns:a="http://schemas.openxmlformats.org/drawingml/2006/main" xmlns:r="http://schemas.openxmlformats.org/officeDocument/2006/relationships" xmlns:p="http://schemas.openxmlformats.org/presentationml/2006/main">
   <p:cSld>
     <p:spTree>
@@ -13974,8 +14103,8 @@
           </a:p>
         </p:txBody>
       </p:sp>
-      <mc:AlternateContent xmlns:mc="http://schemas.openxmlformats.org/markup-compatibility/2006">
-        <mc:Choice xmlns:a14="http://schemas.microsoft.com/office/drawing/2010/main" Requires="a14">
+      <mc:AlternateContent xmlns:mc="http://schemas.openxmlformats.org/markup-compatibility/2006" xmlns:a14="http://schemas.microsoft.com/office/drawing/2010/main">
+        <mc:Choice Requires="a14">
           <p:sp>
             <p:nvSpPr>
               <p:cNvPr id="3" name="Content Placeholder 2">
@@ -14669,7 +14798,7 @@
                     <m:sSub>
                       <m:sSubPr>
                         <m:ctrlPr>
-                          <a:rPr lang="en-US" b="1" dirty="0" smtClean="0">
+                          <a:rPr lang="en-US" b="1" i="1" dirty="0" smtClean="0">
                             <a:solidFill>
                               <a:schemeClr val="tx1"/>
                             </a:solidFill>
@@ -14784,7 +14913,7 @@
             </p:txBody>
           </p:sp>
         </mc:Choice>
-        <mc:Fallback>
+        <mc:Fallback xmlns="">
           <p:sp>
             <p:nvSpPr>
               <p:cNvPr id="3" name="Content Placeholder 2">
@@ -14842,7 +14971,7 @@
 </p:sld>
 </file>
 
-<file path=ppt/slides/slide25.xml><?xml version="1.0" encoding="utf-8"?>
+<file path=ppt/slides/slide24.xml><?xml version="1.0" encoding="utf-8"?>
 <p:sld xmlns:a="http://schemas.openxmlformats.org/drawingml/2006/main" xmlns:r="http://schemas.openxmlformats.org/officeDocument/2006/relationships" xmlns:p="http://schemas.openxmlformats.org/presentationml/2006/main">
   <p:cSld>
     <p:spTree>
@@ -14940,8 +15069,8 @@
           </a:p>
         </p:txBody>
       </p:sp>
-      <mc:AlternateContent xmlns:mc="http://schemas.openxmlformats.org/markup-compatibility/2006">
-        <mc:Choice xmlns:a14="http://schemas.microsoft.com/office/drawing/2010/main" Requires="a14">
+      <mc:AlternateContent xmlns:mc="http://schemas.openxmlformats.org/markup-compatibility/2006" xmlns:a14="http://schemas.microsoft.com/office/drawing/2010/main">
+        <mc:Choice Requires="a14">
           <p:sp>
             <p:nvSpPr>
               <p:cNvPr id="3" name="Content Placeholder 2">
@@ -15618,7 +15747,7 @@
             </p:txBody>
           </p:sp>
         </mc:Choice>
-        <mc:Fallback>
+        <mc:Fallback xmlns="">
           <p:sp>
             <p:nvSpPr>
               <p:cNvPr id="3" name="Content Placeholder 2">
@@ -15676,7 +15805,7 @@
 </p:sld>
 </file>
 
-<file path=ppt/slides/slide26.xml><?xml version="1.0" encoding="utf-8"?>
+<file path=ppt/slides/slide25.xml><?xml version="1.0" encoding="utf-8"?>
 <p:sld xmlns:a="http://schemas.openxmlformats.org/drawingml/2006/main" xmlns:r="http://schemas.openxmlformats.org/officeDocument/2006/relationships" xmlns:p="http://schemas.openxmlformats.org/presentationml/2006/main">
   <p:cSld>
     <p:spTree>
@@ -15774,8 +15903,8 @@
           </a:p>
         </p:txBody>
       </p:sp>
-      <mc:AlternateContent xmlns:mc="http://schemas.openxmlformats.org/markup-compatibility/2006">
-        <mc:Choice xmlns:a14="http://schemas.microsoft.com/office/drawing/2010/main" Requires="a14">
+      <mc:AlternateContent xmlns:mc="http://schemas.openxmlformats.org/markup-compatibility/2006" xmlns:a14="http://schemas.microsoft.com/office/drawing/2010/main">
+        <mc:Choice Requires="a14">
           <p:sp>
             <p:nvSpPr>
               <p:cNvPr id="3" name="Content Placeholder 2">
@@ -16398,7 +16527,7 @@
             </p:txBody>
           </p:sp>
         </mc:Choice>
-        <mc:Fallback>
+        <mc:Fallback xmlns="">
           <p:sp>
             <p:nvSpPr>
               <p:cNvPr id="3" name="Content Placeholder 2">
@@ -16486,7 +16615,7 @@
 </p:sld>
 </file>
 
-<file path=ppt/slides/slide27.xml><?xml version="1.0" encoding="utf-8"?>
+<file path=ppt/slides/slide26.xml><?xml version="1.0" encoding="utf-8"?>
 <p:sld xmlns:a="http://schemas.openxmlformats.org/drawingml/2006/main" xmlns:r="http://schemas.openxmlformats.org/officeDocument/2006/relationships" xmlns:p="http://schemas.openxmlformats.org/presentationml/2006/main">
   <p:cSld>
     <p:spTree>
@@ -16620,7 +16749,7 @@
 </p:sld>
 </file>
 
-<file path=ppt/slides/slide28.xml><?xml version="1.0" encoding="utf-8"?>
+<file path=ppt/slides/slide27.xml><?xml version="1.0" encoding="utf-8"?>
 <p:sld xmlns:a="http://schemas.openxmlformats.org/drawingml/2006/main" xmlns:r="http://schemas.openxmlformats.org/officeDocument/2006/relationships" xmlns:p="http://schemas.openxmlformats.org/presentationml/2006/main">
   <p:cSld>
     <p:spTree>
@@ -17084,7 +17213,7 @@
 </p:sld>
 </file>
 
-<file path=ppt/slides/slide29.xml><?xml version="1.0" encoding="utf-8"?>
+<file path=ppt/slides/slide28.xml><?xml version="1.0" encoding="utf-8"?>
 <p:sld xmlns:a="http://schemas.openxmlformats.org/drawingml/2006/main" xmlns:r="http://schemas.openxmlformats.org/officeDocument/2006/relationships" xmlns:p="http://schemas.openxmlformats.org/presentationml/2006/main">
   <p:cSld>
     <p:spTree>
@@ -17209,6 +17338,479 @@
     <p:extLst>
       <p:ext uri="{BB962C8B-B14F-4D97-AF65-F5344CB8AC3E}">
         <p14:creationId xmlns:p14="http://schemas.microsoft.com/office/powerpoint/2010/main" val="233039776"/>
+      </p:ext>
+    </p:extLst>
+  </p:cSld>
+  <p:clrMapOvr>
+    <a:masterClrMapping/>
+  </p:clrMapOvr>
+</p:sld>
+</file>
+
+<file path=ppt/slides/slide29.xml><?xml version="1.0" encoding="utf-8"?>
+<p:sld xmlns:a="http://schemas.openxmlformats.org/drawingml/2006/main" xmlns:r="http://schemas.openxmlformats.org/officeDocument/2006/relationships" xmlns:p="http://schemas.openxmlformats.org/presentationml/2006/main">
+  <p:cSld>
+    <p:spTree>
+      <p:nvGrpSpPr>
+        <p:cNvPr id="1" name="">
+          <a:extLst>
+            <a:ext uri="{FF2B5EF4-FFF2-40B4-BE49-F238E27FC236}">
+              <a16:creationId xmlns:a16="http://schemas.microsoft.com/office/drawing/2014/main" id="{9ED8FB90-E7D4-611D-8A33-05280B9F6785}"/>
+            </a:ext>
+          </a:extLst>
+        </p:cNvPr>
+        <p:cNvGrpSpPr/>
+        <p:nvPr/>
+      </p:nvGrpSpPr>
+      <p:grpSpPr>
+        <a:xfrm>
+          <a:off x="0" y="0"/>
+          <a:ext cx="0" cy="0"/>
+          <a:chOff x="0" y="0"/>
+          <a:chExt cx="0" cy="0"/>
+        </a:xfrm>
+      </p:grpSpPr>
+      <p:sp>
+        <p:nvSpPr>
+          <p:cNvPr id="2" name="Title 1">
+            <a:extLst>
+              <a:ext uri="{FF2B5EF4-FFF2-40B4-BE49-F238E27FC236}">
+                <a16:creationId xmlns:a16="http://schemas.microsoft.com/office/drawing/2014/main" id="{A2C108AD-238A-B046-6E50-FF71E95282C1}"/>
+              </a:ext>
+            </a:extLst>
+          </p:cNvPr>
+          <p:cNvSpPr>
+            <a:spLocks noGrp="1"/>
+          </p:cNvSpPr>
+          <p:nvPr>
+            <p:ph type="title"/>
+          </p:nvPr>
+        </p:nvSpPr>
+        <p:spPr>
+          <a:xfrm>
+            <a:off x="1371600" y="355701"/>
+            <a:ext cx="9601200" cy="660197"/>
+          </a:xfrm>
+        </p:spPr>
+        <p:txBody>
+          <a:bodyPr>
+            <a:normAutofit fontScale="90000"/>
+          </a:bodyPr>
+          <a:lstStyle/>
+          <a:p>
+            <a:pPr>
+              <a:spcAft>
+                <a:spcPts val="600"/>
+              </a:spcAft>
+            </a:pPr>
+            <a:r>
+              <a:rPr lang="en-US" b="1" i="0" dirty="0">
+                <a:solidFill>
+                  <a:schemeClr val="tx1"/>
+                </a:solidFill>
+                <a:effectLst/>
+                <a:latin typeface="Times New Roman" panose="02020603050405020304" pitchFamily="18" charset="0"/>
+                <a:cs typeface="Times New Roman" panose="02020603050405020304" pitchFamily="18" charset="0"/>
+              </a:rPr>
+              <a:t>8 Conclusions</a:t>
+            </a:r>
+            <a:endParaRPr lang="en-IL" dirty="0">
+              <a:solidFill>
+                <a:schemeClr val="tx1"/>
+              </a:solidFill>
+              <a:latin typeface="Times New Roman" panose="02020603050405020304" pitchFamily="18" charset="0"/>
+              <a:cs typeface="Times New Roman" panose="02020603050405020304" pitchFamily="18" charset="0"/>
+            </a:endParaRPr>
+          </a:p>
+        </p:txBody>
+      </p:sp>
+      <p:sp>
+        <p:nvSpPr>
+          <p:cNvPr id="3" name="Content Placeholder 2">
+            <a:extLst>
+              <a:ext uri="{FF2B5EF4-FFF2-40B4-BE49-F238E27FC236}">
+                <a16:creationId xmlns:a16="http://schemas.microsoft.com/office/drawing/2014/main" id="{D25BA6B8-A259-AC99-19FE-F4EEBBC091EC}"/>
+              </a:ext>
+            </a:extLst>
+          </p:cNvPr>
+          <p:cNvSpPr txBox="1">
+            <a:spLocks/>
+          </p:cNvSpPr>
+          <p:nvPr/>
+        </p:nvSpPr>
+        <p:spPr>
+          <a:xfrm>
+            <a:off x="1371599" y="1133856"/>
+            <a:ext cx="10294883" cy="5724144"/>
+          </a:xfrm>
+          <a:prstGeom prst="rect">
+            <a:avLst/>
+          </a:prstGeom>
+        </p:spPr>
+        <p:txBody>
+          <a:bodyPr vert="horz" lIns="91440" tIns="45720" rIns="91440" bIns="45720" rtlCol="0">
+            <a:noAutofit/>
+          </a:bodyPr>
+          <a:lstStyle>
+            <a:lvl1pPr marL="384048" indent="-384048" algn="l" defTabSz="914400" rtl="0" eaLnBrk="1" latinLnBrk="0" hangingPunct="1">
+              <a:lnSpc>
+                <a:spcPct val="94000"/>
+              </a:lnSpc>
+              <a:spcBef>
+                <a:spcPts val="1000"/>
+              </a:spcBef>
+              <a:spcAft>
+                <a:spcPts val="200"/>
+              </a:spcAft>
+              <a:buFont typeface="Franklin Gothic Book" panose="020B0503020102020204" pitchFamily="34" charset="0"/>
+              <a:buChar char="■"/>
+              <a:defRPr sz="2000" kern="1200" baseline="0">
+                <a:solidFill>
+                  <a:schemeClr val="tx2"/>
+                </a:solidFill>
+                <a:latin typeface="+mn-lt"/>
+                <a:ea typeface="+mn-ea"/>
+                <a:cs typeface="+mn-cs"/>
+              </a:defRPr>
+            </a:lvl1pPr>
+            <a:lvl2pPr marL="914400" indent="-384048" algn="l" defTabSz="914400" rtl="0" eaLnBrk="1" latinLnBrk="0" hangingPunct="1">
+              <a:lnSpc>
+                <a:spcPct val="94000"/>
+              </a:lnSpc>
+              <a:spcBef>
+                <a:spcPts val="500"/>
+              </a:spcBef>
+              <a:spcAft>
+                <a:spcPts val="200"/>
+              </a:spcAft>
+              <a:buFont typeface="Franklin Gothic Book" panose="020B0503020102020204" pitchFamily="34" charset="0"/>
+              <a:buChar char="–"/>
+              <a:defRPr sz="2000" i="1" kern="1200" baseline="0">
+                <a:solidFill>
+                  <a:schemeClr val="tx2"/>
+                </a:solidFill>
+                <a:latin typeface="+mn-lt"/>
+                <a:ea typeface="+mn-ea"/>
+                <a:cs typeface="+mn-cs"/>
+              </a:defRPr>
+            </a:lvl2pPr>
+            <a:lvl3pPr marL="1371600" indent="-384048" algn="l" defTabSz="914400" rtl="0" eaLnBrk="1" latinLnBrk="0" hangingPunct="1">
+              <a:lnSpc>
+                <a:spcPct val="94000"/>
+              </a:lnSpc>
+              <a:spcBef>
+                <a:spcPts val="500"/>
+              </a:spcBef>
+              <a:spcAft>
+                <a:spcPts val="200"/>
+              </a:spcAft>
+              <a:buFont typeface="Franklin Gothic Book" panose="020B0503020102020204" pitchFamily="34" charset="0"/>
+              <a:buChar char="■"/>
+              <a:defRPr sz="1800" kern="1200" baseline="0">
+                <a:solidFill>
+                  <a:schemeClr val="tx2"/>
+                </a:solidFill>
+                <a:latin typeface="+mn-lt"/>
+                <a:ea typeface="+mn-ea"/>
+                <a:cs typeface="+mn-cs"/>
+              </a:defRPr>
+            </a:lvl3pPr>
+            <a:lvl4pPr marL="1828800" indent="-384048" algn="l" defTabSz="914400" rtl="0" eaLnBrk="1" latinLnBrk="0" hangingPunct="1">
+              <a:lnSpc>
+                <a:spcPct val="94000"/>
+              </a:lnSpc>
+              <a:spcBef>
+                <a:spcPts val="500"/>
+              </a:spcBef>
+              <a:spcAft>
+                <a:spcPts val="200"/>
+              </a:spcAft>
+              <a:buFont typeface="Franklin Gothic Book" panose="020B0503020102020204" pitchFamily="34" charset="0"/>
+              <a:buChar char="–"/>
+              <a:defRPr sz="1800" i="1" kern="1200" baseline="0">
+                <a:solidFill>
+                  <a:schemeClr val="tx2"/>
+                </a:solidFill>
+                <a:latin typeface="+mn-lt"/>
+                <a:ea typeface="+mn-ea"/>
+                <a:cs typeface="+mn-cs"/>
+              </a:defRPr>
+            </a:lvl4pPr>
+            <a:lvl5pPr marL="2286000" indent="-384048" algn="l" defTabSz="914400" rtl="0" eaLnBrk="1" latinLnBrk="0" hangingPunct="1">
+              <a:lnSpc>
+                <a:spcPct val="94000"/>
+              </a:lnSpc>
+              <a:spcBef>
+                <a:spcPts val="500"/>
+              </a:spcBef>
+              <a:spcAft>
+                <a:spcPts val="200"/>
+              </a:spcAft>
+              <a:buFont typeface="Franklin Gothic Book" panose="020B0503020102020204" pitchFamily="34" charset="0"/>
+              <a:buChar char="■"/>
+              <a:defRPr sz="1600" kern="1200" baseline="0">
+                <a:solidFill>
+                  <a:schemeClr val="tx2"/>
+                </a:solidFill>
+                <a:latin typeface="+mn-lt"/>
+                <a:ea typeface="+mn-ea"/>
+                <a:cs typeface="+mn-cs"/>
+              </a:defRPr>
+            </a:lvl5pPr>
+            <a:lvl6pPr marL="2743200" indent="-384048" algn="l" defTabSz="914400" rtl="0" eaLnBrk="1" latinLnBrk="0" hangingPunct="1">
+              <a:lnSpc>
+                <a:spcPct val="94000"/>
+              </a:lnSpc>
+              <a:spcBef>
+                <a:spcPts val="500"/>
+              </a:spcBef>
+              <a:spcAft>
+                <a:spcPts val="200"/>
+              </a:spcAft>
+              <a:buFont typeface="Franklin Gothic Book" panose="020B0503020102020204" pitchFamily="34" charset="0"/>
+              <a:buChar char="–"/>
+              <a:defRPr sz="1600" i="1" kern="1200" baseline="0">
+                <a:solidFill>
+                  <a:schemeClr val="tx2"/>
+                </a:solidFill>
+                <a:latin typeface="+mn-lt"/>
+                <a:ea typeface="+mn-ea"/>
+                <a:cs typeface="+mn-cs"/>
+              </a:defRPr>
+            </a:lvl6pPr>
+            <a:lvl7pPr marL="3200400" indent="-384048" algn="l" defTabSz="914400" rtl="0" eaLnBrk="1" latinLnBrk="0" hangingPunct="1">
+              <a:lnSpc>
+                <a:spcPct val="94000"/>
+              </a:lnSpc>
+              <a:spcBef>
+                <a:spcPts val="500"/>
+              </a:spcBef>
+              <a:spcAft>
+                <a:spcPts val="200"/>
+              </a:spcAft>
+              <a:buFont typeface="Franklin Gothic Book" panose="020B0503020102020204" pitchFamily="34" charset="0"/>
+              <a:buChar char="■"/>
+              <a:defRPr sz="1400" kern="1200" baseline="0">
+                <a:solidFill>
+                  <a:schemeClr val="tx2"/>
+                </a:solidFill>
+                <a:latin typeface="+mn-lt"/>
+                <a:ea typeface="+mn-ea"/>
+                <a:cs typeface="+mn-cs"/>
+              </a:defRPr>
+            </a:lvl7pPr>
+            <a:lvl8pPr marL="3657600" indent="-384048" algn="l" defTabSz="914400" rtl="0" eaLnBrk="1" latinLnBrk="0" hangingPunct="1">
+              <a:lnSpc>
+                <a:spcPct val="94000"/>
+              </a:lnSpc>
+              <a:spcBef>
+                <a:spcPts val="500"/>
+              </a:spcBef>
+              <a:spcAft>
+                <a:spcPts val="200"/>
+              </a:spcAft>
+              <a:buFont typeface="Franklin Gothic Book" panose="020B0503020102020204" pitchFamily="34" charset="0"/>
+              <a:buChar char="–"/>
+              <a:defRPr sz="1400" i="1" kern="1200" baseline="0">
+                <a:solidFill>
+                  <a:schemeClr val="tx2"/>
+                </a:solidFill>
+                <a:latin typeface="+mn-lt"/>
+                <a:ea typeface="+mn-ea"/>
+                <a:cs typeface="+mn-cs"/>
+              </a:defRPr>
+            </a:lvl8pPr>
+            <a:lvl9pPr marL="4114800" indent="-384048" algn="l" defTabSz="914400" rtl="0" eaLnBrk="1" latinLnBrk="0" hangingPunct="1">
+              <a:lnSpc>
+                <a:spcPct val="94000"/>
+              </a:lnSpc>
+              <a:spcBef>
+                <a:spcPts val="500"/>
+              </a:spcBef>
+              <a:spcAft>
+                <a:spcPts val="200"/>
+              </a:spcAft>
+              <a:buFont typeface="Franklin Gothic Book" panose="020B0503020102020204" pitchFamily="34" charset="0"/>
+              <a:buChar char="■"/>
+              <a:defRPr sz="1400" kern="1200" baseline="0">
+                <a:solidFill>
+                  <a:schemeClr val="tx2"/>
+                </a:solidFill>
+                <a:latin typeface="+mn-lt"/>
+                <a:ea typeface="+mn-ea"/>
+                <a:cs typeface="+mn-cs"/>
+              </a:defRPr>
+            </a:lvl9pPr>
+          </a:lstStyle>
+          <a:p>
+            <a:pPr marL="0" indent="0">
+              <a:buNone/>
+            </a:pPr>
+            <a:r>
+              <a:rPr lang="en-US" b="1" dirty="0">
+                <a:solidFill>
+                  <a:schemeClr val="tx1"/>
+                </a:solidFill>
+                <a:latin typeface="Times New Roman" panose="02020603050405020304" pitchFamily="18" charset="0"/>
+                <a:cs typeface="Times New Roman" panose="02020603050405020304" pitchFamily="18" charset="0"/>
+              </a:rPr>
+              <a:t>Summary</a:t>
+            </a:r>
+          </a:p>
+          <a:p>
+            <a:r>
+              <a:rPr lang="en-US" dirty="0">
+                <a:solidFill>
+                  <a:schemeClr val="tx1"/>
+                </a:solidFill>
+                <a:latin typeface="Times New Roman" panose="02020603050405020304" pitchFamily="18" charset="0"/>
+                <a:cs typeface="Times New Roman" panose="02020603050405020304" pitchFamily="18" charset="0"/>
+              </a:rPr>
+              <a:t>The article presented a series of open-source language models competitive with state-of-the-art foundation models.</a:t>
+            </a:r>
+          </a:p>
+          <a:p>
+            <a:r>
+              <a:rPr lang="en-US" dirty="0">
+                <a:solidFill>
+                  <a:schemeClr val="tx1"/>
+                </a:solidFill>
+                <a:latin typeface="Times New Roman" panose="02020603050405020304" pitchFamily="18" charset="0"/>
+                <a:cs typeface="Times New Roman" panose="02020603050405020304" pitchFamily="18" charset="0"/>
+              </a:rPr>
+              <a:t>The authors demonstrated that SOTA performance can be achieved using exclusively publicly available data, without proprietary datasets.</a:t>
+            </a:r>
+          </a:p>
+          <a:p>
+            <a:pPr marL="0" indent="0">
+              <a:buNone/>
+            </a:pPr>
+            <a:r>
+              <a:rPr lang="en-US" b="1" dirty="0">
+                <a:solidFill>
+                  <a:schemeClr val="tx1"/>
+                </a:solidFill>
+                <a:latin typeface="Times New Roman" panose="02020603050405020304" pitchFamily="18" charset="0"/>
+                <a:cs typeface="Times New Roman" panose="02020603050405020304" pitchFamily="18" charset="0"/>
+              </a:rPr>
+              <a:t>Performance Highlights</a:t>
+            </a:r>
+          </a:p>
+          <a:p>
+            <a:r>
+              <a:rPr lang="en-US" dirty="0">
+                <a:solidFill>
+                  <a:schemeClr val="tx1"/>
+                </a:solidFill>
+                <a:latin typeface="Times New Roman" panose="02020603050405020304" pitchFamily="18" charset="0"/>
+                <a:cs typeface="Times New Roman" panose="02020603050405020304" pitchFamily="18" charset="0"/>
+              </a:rPr>
+              <a:t>LLaMA-13B outperforms GPT-3 while being &gt;10x smaller.</a:t>
+            </a:r>
+          </a:p>
+          <a:p>
+            <a:r>
+              <a:rPr lang="en-US" dirty="0">
+                <a:solidFill>
+                  <a:schemeClr val="tx1"/>
+                </a:solidFill>
+                <a:latin typeface="Times New Roman" panose="02020603050405020304" pitchFamily="18" charset="0"/>
+                <a:cs typeface="Times New Roman" panose="02020603050405020304" pitchFamily="18" charset="0"/>
+              </a:rPr>
+              <a:t>LLaMA-65B is competitive with Chinchilla-70B and PaLM-540B.</a:t>
+            </a:r>
+          </a:p>
+          <a:p>
+            <a:pPr marL="0" indent="0">
+              <a:buNone/>
+            </a:pPr>
+            <a:r>
+              <a:rPr lang="en-US" b="1" dirty="0">
+                <a:solidFill>
+                  <a:schemeClr val="tx1"/>
+                </a:solidFill>
+                <a:latin typeface="Times New Roman" panose="02020603050405020304" pitchFamily="18" charset="0"/>
+                <a:cs typeface="Times New Roman" panose="02020603050405020304" pitchFamily="18" charset="0"/>
+              </a:rPr>
+              <a:t>Future Directions</a:t>
+            </a:r>
+            <a:endParaRPr lang="en-US" dirty="0">
+              <a:solidFill>
+                <a:schemeClr val="tx1"/>
+              </a:solidFill>
+              <a:latin typeface="Times New Roman" panose="02020603050405020304" pitchFamily="18" charset="0"/>
+              <a:cs typeface="Times New Roman" panose="02020603050405020304" pitchFamily="18" charset="0"/>
+            </a:endParaRPr>
+          </a:p>
+          <a:p>
+            <a:r>
+              <a:rPr lang="en-US" dirty="0">
+                <a:solidFill>
+                  <a:schemeClr val="tx1"/>
+                </a:solidFill>
+                <a:latin typeface="Times New Roman" panose="02020603050405020304" pitchFamily="18" charset="0"/>
+                <a:cs typeface="Times New Roman" panose="02020603050405020304" pitchFamily="18" charset="0"/>
+              </a:rPr>
+              <a:t>Releasing these models aims to accelerate research, improve robustness, and help mitigate issues like toxicity and bias.</a:t>
+            </a:r>
+          </a:p>
+          <a:p>
+            <a:r>
+              <a:rPr lang="en-US" dirty="0">
+                <a:solidFill>
+                  <a:schemeClr val="tx1"/>
+                </a:solidFill>
+                <a:latin typeface="Times New Roman" panose="02020603050405020304" pitchFamily="18" charset="0"/>
+                <a:cs typeface="Times New Roman" panose="02020603050405020304" pitchFamily="18" charset="0"/>
+              </a:rPr>
+              <a:t>Initial experiments (</a:t>
+            </a:r>
+            <a:r>
+              <a:rPr lang="en-US" dirty="0" err="1">
+                <a:solidFill>
+                  <a:schemeClr val="tx1"/>
+                </a:solidFill>
+                <a:latin typeface="Times New Roman" panose="02020603050405020304" pitchFamily="18" charset="0"/>
+                <a:cs typeface="Times New Roman" panose="02020603050405020304" pitchFamily="18" charset="0"/>
+              </a:rPr>
+              <a:t>LLaMA</a:t>
+            </a:r>
+            <a:r>
+              <a:rPr lang="en-US" dirty="0">
+                <a:solidFill>
+                  <a:schemeClr val="tx1"/>
+                </a:solidFill>
+                <a:latin typeface="Times New Roman" panose="02020603050405020304" pitchFamily="18" charset="0"/>
+                <a:cs typeface="Times New Roman" panose="02020603050405020304" pitchFamily="18" charset="0"/>
+              </a:rPr>
+              <a:t>-I) show promising results; further investigation is planned.</a:t>
+            </a:r>
+          </a:p>
+          <a:p>
+            <a:r>
+              <a:rPr lang="en-US" dirty="0">
+                <a:solidFill>
+                  <a:schemeClr val="tx1"/>
+                </a:solidFill>
+                <a:latin typeface="Times New Roman" panose="02020603050405020304" pitchFamily="18" charset="0"/>
+                <a:cs typeface="Times New Roman" panose="02020603050405020304" pitchFamily="18" charset="0"/>
+              </a:rPr>
+              <a:t>Plans to release larger models trained on larger corpora, as performance continues to improve with scale.</a:t>
+            </a:r>
+            <a:endParaRPr lang="en-US" sz="1800" i="0" dirty="0">
+              <a:solidFill>
+                <a:schemeClr val="tx1"/>
+              </a:solidFill>
+              <a:latin typeface="Times New Roman" panose="02020603050405020304" pitchFamily="18" charset="0"/>
+              <a:cs typeface="Times New Roman" panose="02020603050405020304" pitchFamily="18" charset="0"/>
+            </a:endParaRPr>
+          </a:p>
+        </p:txBody>
+      </p:sp>
+    </p:spTree>
+    <p:extLst>
+      <p:ext uri="{BB962C8B-B14F-4D97-AF65-F5344CB8AC3E}">
+        <p14:creationId xmlns:p14="http://schemas.microsoft.com/office/powerpoint/2010/main" val="1395443283"/>
       </p:ext>
     </p:extLst>
   </p:cSld>
@@ -17736,479 +18338,6 @@
 </file>
 
 <file path=ppt/slides/slide30.xml><?xml version="1.0" encoding="utf-8"?>
-<p:sld xmlns:a="http://schemas.openxmlformats.org/drawingml/2006/main" xmlns:r="http://schemas.openxmlformats.org/officeDocument/2006/relationships" xmlns:p="http://schemas.openxmlformats.org/presentationml/2006/main">
-  <p:cSld>
-    <p:spTree>
-      <p:nvGrpSpPr>
-        <p:cNvPr id="1" name="">
-          <a:extLst>
-            <a:ext uri="{FF2B5EF4-FFF2-40B4-BE49-F238E27FC236}">
-              <a16:creationId xmlns:a16="http://schemas.microsoft.com/office/drawing/2014/main" id="{9ED8FB90-E7D4-611D-8A33-05280B9F6785}"/>
-            </a:ext>
-          </a:extLst>
-        </p:cNvPr>
-        <p:cNvGrpSpPr/>
-        <p:nvPr/>
-      </p:nvGrpSpPr>
-      <p:grpSpPr>
-        <a:xfrm>
-          <a:off x="0" y="0"/>
-          <a:ext cx="0" cy="0"/>
-          <a:chOff x="0" y="0"/>
-          <a:chExt cx="0" cy="0"/>
-        </a:xfrm>
-      </p:grpSpPr>
-      <p:sp>
-        <p:nvSpPr>
-          <p:cNvPr id="2" name="Title 1">
-            <a:extLst>
-              <a:ext uri="{FF2B5EF4-FFF2-40B4-BE49-F238E27FC236}">
-                <a16:creationId xmlns:a16="http://schemas.microsoft.com/office/drawing/2014/main" id="{A2C108AD-238A-B046-6E50-FF71E95282C1}"/>
-              </a:ext>
-            </a:extLst>
-          </p:cNvPr>
-          <p:cNvSpPr>
-            <a:spLocks noGrp="1"/>
-          </p:cNvSpPr>
-          <p:nvPr>
-            <p:ph type="title"/>
-          </p:nvPr>
-        </p:nvSpPr>
-        <p:spPr>
-          <a:xfrm>
-            <a:off x="1371600" y="355701"/>
-            <a:ext cx="9601200" cy="660197"/>
-          </a:xfrm>
-        </p:spPr>
-        <p:txBody>
-          <a:bodyPr>
-            <a:normAutofit fontScale="90000"/>
-          </a:bodyPr>
-          <a:lstStyle/>
-          <a:p>
-            <a:pPr>
-              <a:spcAft>
-                <a:spcPts val="600"/>
-              </a:spcAft>
-            </a:pPr>
-            <a:r>
-              <a:rPr lang="en-US" b="1" i="0" dirty="0">
-                <a:solidFill>
-                  <a:schemeClr val="tx1"/>
-                </a:solidFill>
-                <a:effectLst/>
-                <a:latin typeface="Times New Roman" panose="02020603050405020304" pitchFamily="18" charset="0"/>
-                <a:cs typeface="Times New Roman" panose="02020603050405020304" pitchFamily="18" charset="0"/>
-              </a:rPr>
-              <a:t>8 Conclusions</a:t>
-            </a:r>
-            <a:endParaRPr lang="en-IL" dirty="0">
-              <a:solidFill>
-                <a:schemeClr val="tx1"/>
-              </a:solidFill>
-              <a:latin typeface="Times New Roman" panose="02020603050405020304" pitchFamily="18" charset="0"/>
-              <a:cs typeface="Times New Roman" panose="02020603050405020304" pitchFamily="18" charset="0"/>
-            </a:endParaRPr>
-          </a:p>
-        </p:txBody>
-      </p:sp>
-      <p:sp>
-        <p:nvSpPr>
-          <p:cNvPr id="3" name="Content Placeholder 2">
-            <a:extLst>
-              <a:ext uri="{FF2B5EF4-FFF2-40B4-BE49-F238E27FC236}">
-                <a16:creationId xmlns:a16="http://schemas.microsoft.com/office/drawing/2014/main" id="{D25BA6B8-A259-AC99-19FE-F4EEBBC091EC}"/>
-              </a:ext>
-            </a:extLst>
-          </p:cNvPr>
-          <p:cNvSpPr txBox="1">
-            <a:spLocks/>
-          </p:cNvSpPr>
-          <p:nvPr/>
-        </p:nvSpPr>
-        <p:spPr>
-          <a:xfrm>
-            <a:off x="1371599" y="1133856"/>
-            <a:ext cx="10294883" cy="5724144"/>
-          </a:xfrm>
-          <a:prstGeom prst="rect">
-            <a:avLst/>
-          </a:prstGeom>
-        </p:spPr>
-        <p:txBody>
-          <a:bodyPr vert="horz" lIns="91440" tIns="45720" rIns="91440" bIns="45720" rtlCol="0">
-            <a:noAutofit/>
-          </a:bodyPr>
-          <a:lstStyle>
-            <a:lvl1pPr marL="384048" indent="-384048" algn="l" defTabSz="914400" rtl="0" eaLnBrk="1" latinLnBrk="0" hangingPunct="1">
-              <a:lnSpc>
-                <a:spcPct val="94000"/>
-              </a:lnSpc>
-              <a:spcBef>
-                <a:spcPts val="1000"/>
-              </a:spcBef>
-              <a:spcAft>
-                <a:spcPts val="200"/>
-              </a:spcAft>
-              <a:buFont typeface="Franklin Gothic Book" panose="020B0503020102020204" pitchFamily="34" charset="0"/>
-              <a:buChar char="■"/>
-              <a:defRPr sz="2000" kern="1200" baseline="0">
-                <a:solidFill>
-                  <a:schemeClr val="tx2"/>
-                </a:solidFill>
-                <a:latin typeface="+mn-lt"/>
-                <a:ea typeface="+mn-ea"/>
-                <a:cs typeface="+mn-cs"/>
-              </a:defRPr>
-            </a:lvl1pPr>
-            <a:lvl2pPr marL="914400" indent="-384048" algn="l" defTabSz="914400" rtl="0" eaLnBrk="1" latinLnBrk="0" hangingPunct="1">
-              <a:lnSpc>
-                <a:spcPct val="94000"/>
-              </a:lnSpc>
-              <a:spcBef>
-                <a:spcPts val="500"/>
-              </a:spcBef>
-              <a:spcAft>
-                <a:spcPts val="200"/>
-              </a:spcAft>
-              <a:buFont typeface="Franklin Gothic Book" panose="020B0503020102020204" pitchFamily="34" charset="0"/>
-              <a:buChar char="–"/>
-              <a:defRPr sz="2000" i="1" kern="1200" baseline="0">
-                <a:solidFill>
-                  <a:schemeClr val="tx2"/>
-                </a:solidFill>
-                <a:latin typeface="+mn-lt"/>
-                <a:ea typeface="+mn-ea"/>
-                <a:cs typeface="+mn-cs"/>
-              </a:defRPr>
-            </a:lvl2pPr>
-            <a:lvl3pPr marL="1371600" indent="-384048" algn="l" defTabSz="914400" rtl="0" eaLnBrk="1" latinLnBrk="0" hangingPunct="1">
-              <a:lnSpc>
-                <a:spcPct val="94000"/>
-              </a:lnSpc>
-              <a:spcBef>
-                <a:spcPts val="500"/>
-              </a:spcBef>
-              <a:spcAft>
-                <a:spcPts val="200"/>
-              </a:spcAft>
-              <a:buFont typeface="Franklin Gothic Book" panose="020B0503020102020204" pitchFamily="34" charset="0"/>
-              <a:buChar char="■"/>
-              <a:defRPr sz="1800" kern="1200" baseline="0">
-                <a:solidFill>
-                  <a:schemeClr val="tx2"/>
-                </a:solidFill>
-                <a:latin typeface="+mn-lt"/>
-                <a:ea typeface="+mn-ea"/>
-                <a:cs typeface="+mn-cs"/>
-              </a:defRPr>
-            </a:lvl3pPr>
-            <a:lvl4pPr marL="1828800" indent="-384048" algn="l" defTabSz="914400" rtl="0" eaLnBrk="1" latinLnBrk="0" hangingPunct="1">
-              <a:lnSpc>
-                <a:spcPct val="94000"/>
-              </a:lnSpc>
-              <a:spcBef>
-                <a:spcPts val="500"/>
-              </a:spcBef>
-              <a:spcAft>
-                <a:spcPts val="200"/>
-              </a:spcAft>
-              <a:buFont typeface="Franklin Gothic Book" panose="020B0503020102020204" pitchFamily="34" charset="0"/>
-              <a:buChar char="–"/>
-              <a:defRPr sz="1800" i="1" kern="1200" baseline="0">
-                <a:solidFill>
-                  <a:schemeClr val="tx2"/>
-                </a:solidFill>
-                <a:latin typeface="+mn-lt"/>
-                <a:ea typeface="+mn-ea"/>
-                <a:cs typeface="+mn-cs"/>
-              </a:defRPr>
-            </a:lvl4pPr>
-            <a:lvl5pPr marL="2286000" indent="-384048" algn="l" defTabSz="914400" rtl="0" eaLnBrk="1" latinLnBrk="0" hangingPunct="1">
-              <a:lnSpc>
-                <a:spcPct val="94000"/>
-              </a:lnSpc>
-              <a:spcBef>
-                <a:spcPts val="500"/>
-              </a:spcBef>
-              <a:spcAft>
-                <a:spcPts val="200"/>
-              </a:spcAft>
-              <a:buFont typeface="Franklin Gothic Book" panose="020B0503020102020204" pitchFamily="34" charset="0"/>
-              <a:buChar char="■"/>
-              <a:defRPr sz="1600" kern="1200" baseline="0">
-                <a:solidFill>
-                  <a:schemeClr val="tx2"/>
-                </a:solidFill>
-                <a:latin typeface="+mn-lt"/>
-                <a:ea typeface="+mn-ea"/>
-                <a:cs typeface="+mn-cs"/>
-              </a:defRPr>
-            </a:lvl5pPr>
-            <a:lvl6pPr marL="2743200" indent="-384048" algn="l" defTabSz="914400" rtl="0" eaLnBrk="1" latinLnBrk="0" hangingPunct="1">
-              <a:lnSpc>
-                <a:spcPct val="94000"/>
-              </a:lnSpc>
-              <a:spcBef>
-                <a:spcPts val="500"/>
-              </a:spcBef>
-              <a:spcAft>
-                <a:spcPts val="200"/>
-              </a:spcAft>
-              <a:buFont typeface="Franklin Gothic Book" panose="020B0503020102020204" pitchFamily="34" charset="0"/>
-              <a:buChar char="–"/>
-              <a:defRPr sz="1600" i="1" kern="1200" baseline="0">
-                <a:solidFill>
-                  <a:schemeClr val="tx2"/>
-                </a:solidFill>
-                <a:latin typeface="+mn-lt"/>
-                <a:ea typeface="+mn-ea"/>
-                <a:cs typeface="+mn-cs"/>
-              </a:defRPr>
-            </a:lvl6pPr>
-            <a:lvl7pPr marL="3200400" indent="-384048" algn="l" defTabSz="914400" rtl="0" eaLnBrk="1" latinLnBrk="0" hangingPunct="1">
-              <a:lnSpc>
-                <a:spcPct val="94000"/>
-              </a:lnSpc>
-              <a:spcBef>
-                <a:spcPts val="500"/>
-              </a:spcBef>
-              <a:spcAft>
-                <a:spcPts val="200"/>
-              </a:spcAft>
-              <a:buFont typeface="Franklin Gothic Book" panose="020B0503020102020204" pitchFamily="34" charset="0"/>
-              <a:buChar char="■"/>
-              <a:defRPr sz="1400" kern="1200" baseline="0">
-                <a:solidFill>
-                  <a:schemeClr val="tx2"/>
-                </a:solidFill>
-                <a:latin typeface="+mn-lt"/>
-                <a:ea typeface="+mn-ea"/>
-                <a:cs typeface="+mn-cs"/>
-              </a:defRPr>
-            </a:lvl7pPr>
-            <a:lvl8pPr marL="3657600" indent="-384048" algn="l" defTabSz="914400" rtl="0" eaLnBrk="1" latinLnBrk="0" hangingPunct="1">
-              <a:lnSpc>
-                <a:spcPct val="94000"/>
-              </a:lnSpc>
-              <a:spcBef>
-                <a:spcPts val="500"/>
-              </a:spcBef>
-              <a:spcAft>
-                <a:spcPts val="200"/>
-              </a:spcAft>
-              <a:buFont typeface="Franklin Gothic Book" panose="020B0503020102020204" pitchFamily="34" charset="0"/>
-              <a:buChar char="–"/>
-              <a:defRPr sz="1400" i="1" kern="1200" baseline="0">
-                <a:solidFill>
-                  <a:schemeClr val="tx2"/>
-                </a:solidFill>
-                <a:latin typeface="+mn-lt"/>
-                <a:ea typeface="+mn-ea"/>
-                <a:cs typeface="+mn-cs"/>
-              </a:defRPr>
-            </a:lvl8pPr>
-            <a:lvl9pPr marL="4114800" indent="-384048" algn="l" defTabSz="914400" rtl="0" eaLnBrk="1" latinLnBrk="0" hangingPunct="1">
-              <a:lnSpc>
-                <a:spcPct val="94000"/>
-              </a:lnSpc>
-              <a:spcBef>
-                <a:spcPts val="500"/>
-              </a:spcBef>
-              <a:spcAft>
-                <a:spcPts val="200"/>
-              </a:spcAft>
-              <a:buFont typeface="Franklin Gothic Book" panose="020B0503020102020204" pitchFamily="34" charset="0"/>
-              <a:buChar char="■"/>
-              <a:defRPr sz="1400" kern="1200" baseline="0">
-                <a:solidFill>
-                  <a:schemeClr val="tx2"/>
-                </a:solidFill>
-                <a:latin typeface="+mn-lt"/>
-                <a:ea typeface="+mn-ea"/>
-                <a:cs typeface="+mn-cs"/>
-              </a:defRPr>
-            </a:lvl9pPr>
-          </a:lstStyle>
-          <a:p>
-            <a:pPr marL="0" indent="0">
-              <a:buNone/>
-            </a:pPr>
-            <a:r>
-              <a:rPr lang="en-US" b="1" dirty="0">
-                <a:solidFill>
-                  <a:schemeClr val="tx1"/>
-                </a:solidFill>
-                <a:latin typeface="Times New Roman" panose="02020603050405020304" pitchFamily="18" charset="0"/>
-                <a:cs typeface="Times New Roman" panose="02020603050405020304" pitchFamily="18" charset="0"/>
-              </a:rPr>
-              <a:t>Summary</a:t>
-            </a:r>
-          </a:p>
-          <a:p>
-            <a:r>
-              <a:rPr lang="en-US" dirty="0">
-                <a:solidFill>
-                  <a:schemeClr val="tx1"/>
-                </a:solidFill>
-                <a:latin typeface="Times New Roman" panose="02020603050405020304" pitchFamily="18" charset="0"/>
-                <a:cs typeface="Times New Roman" panose="02020603050405020304" pitchFamily="18" charset="0"/>
-              </a:rPr>
-              <a:t>The article presented a series of open-source language models competitive with state-of-the-art foundation models.</a:t>
-            </a:r>
-          </a:p>
-          <a:p>
-            <a:r>
-              <a:rPr lang="en-US" dirty="0">
-                <a:solidFill>
-                  <a:schemeClr val="tx1"/>
-                </a:solidFill>
-                <a:latin typeface="Times New Roman" panose="02020603050405020304" pitchFamily="18" charset="0"/>
-                <a:cs typeface="Times New Roman" panose="02020603050405020304" pitchFamily="18" charset="0"/>
-              </a:rPr>
-              <a:t>The authors demonstrated that SOTA performance can be achieved using exclusively publicly available data, without proprietary datasets.</a:t>
-            </a:r>
-          </a:p>
-          <a:p>
-            <a:pPr marL="0" indent="0">
-              <a:buNone/>
-            </a:pPr>
-            <a:r>
-              <a:rPr lang="en-US" b="1" dirty="0">
-                <a:solidFill>
-                  <a:schemeClr val="tx1"/>
-                </a:solidFill>
-                <a:latin typeface="Times New Roman" panose="02020603050405020304" pitchFamily="18" charset="0"/>
-                <a:cs typeface="Times New Roman" panose="02020603050405020304" pitchFamily="18" charset="0"/>
-              </a:rPr>
-              <a:t>Performance Highlights</a:t>
-            </a:r>
-          </a:p>
-          <a:p>
-            <a:r>
-              <a:rPr lang="en-US" dirty="0">
-                <a:solidFill>
-                  <a:schemeClr val="tx1"/>
-                </a:solidFill>
-                <a:latin typeface="Times New Roman" panose="02020603050405020304" pitchFamily="18" charset="0"/>
-                <a:cs typeface="Times New Roman" panose="02020603050405020304" pitchFamily="18" charset="0"/>
-              </a:rPr>
-              <a:t>LLaMA-13B outperforms GPT-3 while being &gt;10x smaller.</a:t>
-            </a:r>
-          </a:p>
-          <a:p>
-            <a:r>
-              <a:rPr lang="en-US" dirty="0">
-                <a:solidFill>
-                  <a:schemeClr val="tx1"/>
-                </a:solidFill>
-                <a:latin typeface="Times New Roman" panose="02020603050405020304" pitchFamily="18" charset="0"/>
-                <a:cs typeface="Times New Roman" panose="02020603050405020304" pitchFamily="18" charset="0"/>
-              </a:rPr>
-              <a:t>LLaMA-65B is competitive with Chinchilla-70B and PaLM-540B.</a:t>
-            </a:r>
-          </a:p>
-          <a:p>
-            <a:pPr marL="0" indent="0">
-              <a:buNone/>
-            </a:pPr>
-            <a:r>
-              <a:rPr lang="en-US" b="1" dirty="0">
-                <a:solidFill>
-                  <a:schemeClr val="tx1"/>
-                </a:solidFill>
-                <a:latin typeface="Times New Roman" panose="02020603050405020304" pitchFamily="18" charset="0"/>
-                <a:cs typeface="Times New Roman" panose="02020603050405020304" pitchFamily="18" charset="0"/>
-              </a:rPr>
-              <a:t>Future Directions</a:t>
-            </a:r>
-            <a:endParaRPr lang="en-US" dirty="0">
-              <a:solidFill>
-                <a:schemeClr val="tx1"/>
-              </a:solidFill>
-              <a:latin typeface="Times New Roman" panose="02020603050405020304" pitchFamily="18" charset="0"/>
-              <a:cs typeface="Times New Roman" panose="02020603050405020304" pitchFamily="18" charset="0"/>
-            </a:endParaRPr>
-          </a:p>
-          <a:p>
-            <a:r>
-              <a:rPr lang="en-US" dirty="0">
-                <a:solidFill>
-                  <a:schemeClr val="tx1"/>
-                </a:solidFill>
-                <a:latin typeface="Times New Roman" panose="02020603050405020304" pitchFamily="18" charset="0"/>
-                <a:cs typeface="Times New Roman" panose="02020603050405020304" pitchFamily="18" charset="0"/>
-              </a:rPr>
-              <a:t>Releasing these models aims to accelerate research, improve robustness, and help mitigate issues like toxicity and bias.</a:t>
-            </a:r>
-          </a:p>
-          <a:p>
-            <a:r>
-              <a:rPr lang="en-US" dirty="0">
-                <a:solidFill>
-                  <a:schemeClr val="tx1"/>
-                </a:solidFill>
-                <a:latin typeface="Times New Roman" panose="02020603050405020304" pitchFamily="18" charset="0"/>
-                <a:cs typeface="Times New Roman" panose="02020603050405020304" pitchFamily="18" charset="0"/>
-              </a:rPr>
-              <a:t>Initial experiments (</a:t>
-            </a:r>
-            <a:r>
-              <a:rPr lang="en-US" dirty="0" err="1">
-                <a:solidFill>
-                  <a:schemeClr val="tx1"/>
-                </a:solidFill>
-                <a:latin typeface="Times New Roman" panose="02020603050405020304" pitchFamily="18" charset="0"/>
-                <a:cs typeface="Times New Roman" panose="02020603050405020304" pitchFamily="18" charset="0"/>
-              </a:rPr>
-              <a:t>LLaMA</a:t>
-            </a:r>
-            <a:r>
-              <a:rPr lang="en-US" dirty="0">
-                <a:solidFill>
-                  <a:schemeClr val="tx1"/>
-                </a:solidFill>
-                <a:latin typeface="Times New Roman" panose="02020603050405020304" pitchFamily="18" charset="0"/>
-                <a:cs typeface="Times New Roman" panose="02020603050405020304" pitchFamily="18" charset="0"/>
-              </a:rPr>
-              <a:t>-I) show promising results; further investigation is planned.</a:t>
-            </a:r>
-          </a:p>
-          <a:p>
-            <a:r>
-              <a:rPr lang="en-US" dirty="0">
-                <a:solidFill>
-                  <a:schemeClr val="tx1"/>
-                </a:solidFill>
-                <a:latin typeface="Times New Roman" panose="02020603050405020304" pitchFamily="18" charset="0"/>
-                <a:cs typeface="Times New Roman" panose="02020603050405020304" pitchFamily="18" charset="0"/>
-              </a:rPr>
-              <a:t>Plans to release larger models trained on larger corpora, as performance continues to improve with scale.</a:t>
-            </a:r>
-            <a:endParaRPr lang="en-US" sz="1800" i="0" dirty="0">
-              <a:solidFill>
-                <a:schemeClr val="tx1"/>
-              </a:solidFill>
-              <a:latin typeface="Times New Roman" panose="02020603050405020304" pitchFamily="18" charset="0"/>
-              <a:cs typeface="Times New Roman" panose="02020603050405020304" pitchFamily="18" charset="0"/>
-            </a:endParaRPr>
-          </a:p>
-        </p:txBody>
-      </p:sp>
-    </p:spTree>
-    <p:extLst>
-      <p:ext uri="{BB962C8B-B14F-4D97-AF65-F5344CB8AC3E}">
-        <p14:creationId xmlns:p14="http://schemas.microsoft.com/office/powerpoint/2010/main" val="1395443283"/>
-      </p:ext>
-    </p:extLst>
-  </p:cSld>
-  <p:clrMapOvr>
-    <a:masterClrMapping/>
-  </p:clrMapOvr>
-</p:sld>
-</file>
-
-<file path=ppt/slides/slide31.xml><?xml version="1.0" encoding="utf-8"?>
 <p:sld xmlns:a="http://schemas.openxmlformats.org/drawingml/2006/main" xmlns:r="http://schemas.openxmlformats.org/officeDocument/2006/relationships" xmlns:p="http://schemas.openxmlformats.org/presentationml/2006/main">
   <p:cSld>
     <p:spTree>
@@ -20132,8 +20261,8 @@
         </p:nvSpPr>
         <p:spPr>
           <a:xfrm>
-            <a:off x="1371600" y="5544020"/>
-            <a:ext cx="9601200" cy="1160725"/>
+            <a:off x="1371600" y="5349812"/>
+            <a:ext cx="9601200" cy="1342301"/>
           </a:xfrm>
           <a:prstGeom prst="rect">
             <a:avLst/>
@@ -20393,8 +20522,8 @@
         </p:blipFill>
         <p:spPr>
           <a:xfrm>
-            <a:off x="1995612" y="2055567"/>
-            <a:ext cx="3944327" cy="3398749"/>
+            <a:off x="1995613" y="2055568"/>
+            <a:ext cx="3728004" cy="3212348"/>
           </a:xfrm>
           <a:prstGeom prst="rect">
             <a:avLst/>
@@ -20422,8 +20551,8 @@
         </p:blipFill>
         <p:spPr>
           <a:xfrm>
-            <a:off x="6563950" y="2055567"/>
-            <a:ext cx="3966301" cy="2566742"/>
+            <a:off x="6563951" y="2055567"/>
+            <a:ext cx="3748774" cy="2425972"/>
           </a:xfrm>
           <a:prstGeom prst="rect">
             <a:avLst/>

--- a/presentation/Lecture Slides.pptx
+++ b/presentation/Lecture Slides.pptx
@@ -4,6 +4,9 @@
   <p:sldMasterIdLst>
     <p:sldMasterId id="2147483648" r:id="rId1"/>
   </p:sldMasterIdLst>
+  <p:notesMasterIdLst>
+    <p:notesMasterId r:id="rId32"/>
+  </p:notesMasterIdLst>
   <p:sldIdLst>
     <p:sldId id="256" r:id="rId2"/>
     <p:sldId id="257" r:id="rId3"/>
@@ -1550,6 +1553,4949 @@
 </pc:chgInfo>
 </file>
 
+<file path=ppt/notesMasters/notesMaster1.xml><?xml version="1.0" encoding="utf-8"?>
+<p:notesMaster xmlns:a="http://schemas.openxmlformats.org/drawingml/2006/main" xmlns:r="http://schemas.openxmlformats.org/officeDocument/2006/relationships" xmlns:p="http://schemas.openxmlformats.org/presentationml/2006/main">
+  <p:cSld>
+    <p:bg>
+      <p:bgRef idx="1001">
+        <a:schemeClr val="bg1"/>
+      </p:bgRef>
+    </p:bg>
+    <p:spTree>
+      <p:nvGrpSpPr>
+        <p:cNvPr id="1" name=""/>
+        <p:cNvGrpSpPr/>
+        <p:nvPr/>
+      </p:nvGrpSpPr>
+      <p:grpSpPr>
+        <a:xfrm>
+          <a:off x="0" y="0"/>
+          <a:ext cx="0" cy="0"/>
+          <a:chOff x="0" y="0"/>
+          <a:chExt cx="0" cy="0"/>
+        </a:xfrm>
+      </p:grpSpPr>
+      <p:sp>
+        <p:nvSpPr>
+          <p:cNvPr id="2" name="Header Placeholder 1"/>
+          <p:cNvSpPr>
+            <a:spLocks noGrp="1"/>
+          </p:cNvSpPr>
+          <p:nvPr>
+            <p:ph type="hdr" sz="quarter"/>
+          </p:nvPr>
+        </p:nvSpPr>
+        <p:spPr>
+          <a:xfrm>
+            <a:off x="0" y="0"/>
+            <a:ext cx="2971800" cy="458788"/>
+          </a:xfrm>
+          <a:prstGeom prst="rect">
+            <a:avLst/>
+          </a:prstGeom>
+        </p:spPr>
+        <p:txBody>
+          <a:bodyPr vert="horz" lIns="91440" tIns="45720" rIns="91440" bIns="45720" rtlCol="0"/>
+          <a:lstStyle>
+            <a:lvl1pPr algn="l">
+              <a:defRPr sz="1200"/>
+            </a:lvl1pPr>
+          </a:lstStyle>
+          <a:p>
+            <a:endParaRPr lang="en-IL"/>
+          </a:p>
+        </p:txBody>
+      </p:sp>
+      <p:sp>
+        <p:nvSpPr>
+          <p:cNvPr id="3" name="Date Placeholder 2"/>
+          <p:cNvSpPr>
+            <a:spLocks noGrp="1"/>
+          </p:cNvSpPr>
+          <p:nvPr>
+            <p:ph type="dt" idx="1"/>
+          </p:nvPr>
+        </p:nvSpPr>
+        <p:spPr>
+          <a:xfrm>
+            <a:off x="3884613" y="0"/>
+            <a:ext cx="2971800" cy="458788"/>
+          </a:xfrm>
+          <a:prstGeom prst="rect">
+            <a:avLst/>
+          </a:prstGeom>
+        </p:spPr>
+        <p:txBody>
+          <a:bodyPr vert="horz" lIns="91440" tIns="45720" rIns="91440" bIns="45720" rtlCol="0"/>
+          <a:lstStyle>
+            <a:lvl1pPr algn="r">
+              <a:defRPr sz="1200"/>
+            </a:lvl1pPr>
+          </a:lstStyle>
+          <a:p>
+            <a:fld id="{0272032C-FC28-6346-8005-2D9B1FD312FC}" type="datetimeFigureOut">
+              <a:rPr lang="en-IL" smtClean="0"/>
+              <a:t>01/12/2025</a:t>
+            </a:fld>
+            <a:endParaRPr lang="en-IL"/>
+          </a:p>
+        </p:txBody>
+      </p:sp>
+      <p:sp>
+        <p:nvSpPr>
+          <p:cNvPr id="4" name="Slide Image Placeholder 3"/>
+          <p:cNvSpPr>
+            <a:spLocks noGrp="1" noRot="1" noChangeAspect="1"/>
+          </p:cNvSpPr>
+          <p:nvPr>
+            <p:ph type="sldImg" idx="2"/>
+          </p:nvPr>
+        </p:nvSpPr>
+        <p:spPr>
+          <a:xfrm>
+            <a:off x="685800" y="1143000"/>
+            <a:ext cx="5486400" cy="3086100"/>
+          </a:xfrm>
+          <a:prstGeom prst="rect">
+            <a:avLst/>
+          </a:prstGeom>
+          <a:noFill/>
+          <a:ln w="12700">
+            <a:solidFill>
+              <a:prstClr val="black"/>
+            </a:solidFill>
+          </a:ln>
+        </p:spPr>
+        <p:txBody>
+          <a:bodyPr vert="horz" lIns="91440" tIns="45720" rIns="91440" bIns="45720" rtlCol="0" anchor="ctr"/>
+          <a:lstStyle/>
+          <a:p>
+            <a:endParaRPr lang="en-IL"/>
+          </a:p>
+        </p:txBody>
+      </p:sp>
+      <p:sp>
+        <p:nvSpPr>
+          <p:cNvPr id="5" name="Notes Placeholder 4"/>
+          <p:cNvSpPr>
+            <a:spLocks noGrp="1"/>
+          </p:cNvSpPr>
+          <p:nvPr>
+            <p:ph type="body" sz="quarter" idx="3"/>
+          </p:nvPr>
+        </p:nvSpPr>
+        <p:spPr>
+          <a:xfrm>
+            <a:off x="685800" y="4400550"/>
+            <a:ext cx="5486400" cy="3600450"/>
+          </a:xfrm>
+          <a:prstGeom prst="rect">
+            <a:avLst/>
+          </a:prstGeom>
+        </p:spPr>
+        <p:txBody>
+          <a:bodyPr vert="horz" lIns="91440" tIns="45720" rIns="91440" bIns="45720" rtlCol="0"/>
+          <a:lstStyle/>
+          <a:p>
+            <a:pPr lvl="0"/>
+            <a:r>
+              <a:rPr lang="en-US"/>
+              <a:t>Click to edit Master text styles</a:t>
+            </a:r>
+          </a:p>
+          <a:p>
+            <a:pPr lvl="1"/>
+            <a:r>
+              <a:rPr lang="en-US"/>
+              <a:t>Second level</a:t>
+            </a:r>
+          </a:p>
+          <a:p>
+            <a:pPr lvl="2"/>
+            <a:r>
+              <a:rPr lang="en-US"/>
+              <a:t>Third level</a:t>
+            </a:r>
+          </a:p>
+          <a:p>
+            <a:pPr lvl="3"/>
+            <a:r>
+              <a:rPr lang="en-US"/>
+              <a:t>Fourth level</a:t>
+            </a:r>
+          </a:p>
+          <a:p>
+            <a:pPr lvl="4"/>
+            <a:r>
+              <a:rPr lang="en-US"/>
+              <a:t>Fifth level</a:t>
+            </a:r>
+            <a:endParaRPr lang="en-IL"/>
+          </a:p>
+        </p:txBody>
+      </p:sp>
+      <p:sp>
+        <p:nvSpPr>
+          <p:cNvPr id="6" name="Footer Placeholder 5"/>
+          <p:cNvSpPr>
+            <a:spLocks noGrp="1"/>
+          </p:cNvSpPr>
+          <p:nvPr>
+            <p:ph type="ftr" sz="quarter" idx="4"/>
+          </p:nvPr>
+        </p:nvSpPr>
+        <p:spPr>
+          <a:xfrm>
+            <a:off x="0" y="8685213"/>
+            <a:ext cx="2971800" cy="458787"/>
+          </a:xfrm>
+          <a:prstGeom prst="rect">
+            <a:avLst/>
+          </a:prstGeom>
+        </p:spPr>
+        <p:txBody>
+          <a:bodyPr vert="horz" lIns="91440" tIns="45720" rIns="91440" bIns="45720" rtlCol="0" anchor="b"/>
+          <a:lstStyle>
+            <a:lvl1pPr algn="l">
+              <a:defRPr sz="1200"/>
+            </a:lvl1pPr>
+          </a:lstStyle>
+          <a:p>
+            <a:endParaRPr lang="en-IL"/>
+          </a:p>
+        </p:txBody>
+      </p:sp>
+      <p:sp>
+        <p:nvSpPr>
+          <p:cNvPr id="7" name="Slide Number Placeholder 6"/>
+          <p:cNvSpPr>
+            <a:spLocks noGrp="1"/>
+          </p:cNvSpPr>
+          <p:nvPr>
+            <p:ph type="sldNum" sz="quarter" idx="5"/>
+          </p:nvPr>
+        </p:nvSpPr>
+        <p:spPr>
+          <a:xfrm>
+            <a:off x="3884613" y="8685213"/>
+            <a:ext cx="2971800" cy="458787"/>
+          </a:xfrm>
+          <a:prstGeom prst="rect">
+            <a:avLst/>
+          </a:prstGeom>
+        </p:spPr>
+        <p:txBody>
+          <a:bodyPr vert="horz" lIns="91440" tIns="45720" rIns="91440" bIns="45720" rtlCol="0" anchor="b"/>
+          <a:lstStyle>
+            <a:lvl1pPr algn="r">
+              <a:defRPr sz="1200"/>
+            </a:lvl1pPr>
+          </a:lstStyle>
+          <a:p>
+            <a:fld id="{476FFE5D-288A-DB4E-9912-CFF1A38B0A9A}" type="slidenum">
+              <a:rPr lang="en-IL" smtClean="0"/>
+              <a:t>‹#›</a:t>
+            </a:fld>
+            <a:endParaRPr lang="en-IL"/>
+          </a:p>
+        </p:txBody>
+      </p:sp>
+    </p:spTree>
+    <p:extLst>
+      <p:ext uri="{BB962C8B-B14F-4D97-AF65-F5344CB8AC3E}">
+        <p14:creationId xmlns:p14="http://schemas.microsoft.com/office/powerpoint/2010/main" val="550613749"/>
+      </p:ext>
+    </p:extLst>
+  </p:cSld>
+  <p:clrMap bg1="lt1" tx1="dk1" bg2="lt2" tx2="dk2" accent1="accent1" accent2="accent2" accent3="accent3" accent4="accent4" accent5="accent5" accent6="accent6" hlink="hlink" folHlink="folHlink"/>
+  <p:notesStyle>
+    <a:lvl1pPr marL="0" algn="l" defTabSz="914400" rtl="0" eaLnBrk="1" latinLnBrk="0" hangingPunct="1">
+      <a:defRPr sz="1200" kern="1200">
+        <a:solidFill>
+          <a:schemeClr val="tx1"/>
+        </a:solidFill>
+        <a:latin typeface="+mn-lt"/>
+        <a:ea typeface="+mn-ea"/>
+        <a:cs typeface="+mn-cs"/>
+      </a:defRPr>
+    </a:lvl1pPr>
+    <a:lvl2pPr marL="457200" algn="l" defTabSz="914400" rtl="0" eaLnBrk="1" latinLnBrk="0" hangingPunct="1">
+      <a:defRPr sz="1200" kern="1200">
+        <a:solidFill>
+          <a:schemeClr val="tx1"/>
+        </a:solidFill>
+        <a:latin typeface="+mn-lt"/>
+        <a:ea typeface="+mn-ea"/>
+        <a:cs typeface="+mn-cs"/>
+      </a:defRPr>
+    </a:lvl2pPr>
+    <a:lvl3pPr marL="914400" algn="l" defTabSz="914400" rtl="0" eaLnBrk="1" latinLnBrk="0" hangingPunct="1">
+      <a:defRPr sz="1200" kern="1200">
+        <a:solidFill>
+          <a:schemeClr val="tx1"/>
+        </a:solidFill>
+        <a:latin typeface="+mn-lt"/>
+        <a:ea typeface="+mn-ea"/>
+        <a:cs typeface="+mn-cs"/>
+      </a:defRPr>
+    </a:lvl3pPr>
+    <a:lvl4pPr marL="1371600" algn="l" defTabSz="914400" rtl="0" eaLnBrk="1" latinLnBrk="0" hangingPunct="1">
+      <a:defRPr sz="1200" kern="1200">
+        <a:solidFill>
+          <a:schemeClr val="tx1"/>
+        </a:solidFill>
+        <a:latin typeface="+mn-lt"/>
+        <a:ea typeface="+mn-ea"/>
+        <a:cs typeface="+mn-cs"/>
+      </a:defRPr>
+    </a:lvl4pPr>
+    <a:lvl5pPr marL="1828800" algn="l" defTabSz="914400" rtl="0" eaLnBrk="1" latinLnBrk="0" hangingPunct="1">
+      <a:defRPr sz="1200" kern="1200">
+        <a:solidFill>
+          <a:schemeClr val="tx1"/>
+        </a:solidFill>
+        <a:latin typeface="+mn-lt"/>
+        <a:ea typeface="+mn-ea"/>
+        <a:cs typeface="+mn-cs"/>
+      </a:defRPr>
+    </a:lvl5pPr>
+    <a:lvl6pPr marL="2286000" algn="l" defTabSz="914400" rtl="0" eaLnBrk="1" latinLnBrk="0" hangingPunct="1">
+      <a:defRPr sz="1200" kern="1200">
+        <a:solidFill>
+          <a:schemeClr val="tx1"/>
+        </a:solidFill>
+        <a:latin typeface="+mn-lt"/>
+        <a:ea typeface="+mn-ea"/>
+        <a:cs typeface="+mn-cs"/>
+      </a:defRPr>
+    </a:lvl6pPr>
+    <a:lvl7pPr marL="2743200" algn="l" defTabSz="914400" rtl="0" eaLnBrk="1" latinLnBrk="0" hangingPunct="1">
+      <a:defRPr sz="1200" kern="1200">
+        <a:solidFill>
+          <a:schemeClr val="tx1"/>
+        </a:solidFill>
+        <a:latin typeface="+mn-lt"/>
+        <a:ea typeface="+mn-ea"/>
+        <a:cs typeface="+mn-cs"/>
+      </a:defRPr>
+    </a:lvl7pPr>
+    <a:lvl8pPr marL="3200400" algn="l" defTabSz="914400" rtl="0" eaLnBrk="1" latinLnBrk="0" hangingPunct="1">
+      <a:defRPr sz="1200" kern="1200">
+        <a:solidFill>
+          <a:schemeClr val="tx1"/>
+        </a:solidFill>
+        <a:latin typeface="+mn-lt"/>
+        <a:ea typeface="+mn-ea"/>
+        <a:cs typeface="+mn-cs"/>
+      </a:defRPr>
+    </a:lvl8pPr>
+    <a:lvl9pPr marL="3657600" algn="l" defTabSz="914400" rtl="0" eaLnBrk="1" latinLnBrk="0" hangingPunct="1">
+      <a:defRPr sz="1200" kern="1200">
+        <a:solidFill>
+          <a:schemeClr val="tx1"/>
+        </a:solidFill>
+        <a:latin typeface="+mn-lt"/>
+        <a:ea typeface="+mn-ea"/>
+        <a:cs typeface="+mn-cs"/>
+      </a:defRPr>
+    </a:lvl9pPr>
+  </p:notesStyle>
+</p:notesMaster>
+</file>
+
+<file path=ppt/notesSlides/notesSlide1.xml><?xml version="1.0" encoding="utf-8"?>
+<p:notes xmlns:a="http://schemas.openxmlformats.org/drawingml/2006/main" xmlns:r="http://schemas.openxmlformats.org/officeDocument/2006/relationships" xmlns:p="http://schemas.openxmlformats.org/presentationml/2006/main">
+  <p:cSld>
+    <p:spTree>
+      <p:nvGrpSpPr>
+        <p:cNvPr id="1" name=""/>
+        <p:cNvGrpSpPr/>
+        <p:nvPr/>
+      </p:nvGrpSpPr>
+      <p:grpSpPr>
+        <a:xfrm>
+          <a:off x="0" y="0"/>
+          <a:ext cx="0" cy="0"/>
+          <a:chOff x="0" y="0"/>
+          <a:chExt cx="0" cy="0"/>
+        </a:xfrm>
+      </p:grpSpPr>
+      <p:sp>
+        <p:nvSpPr>
+          <p:cNvPr id="2" name="Slide Image Placeholder 1"/>
+          <p:cNvSpPr>
+            <a:spLocks noGrp="1" noRot="1" noChangeAspect="1"/>
+          </p:cNvSpPr>
+          <p:nvPr>
+            <p:ph type="sldImg"/>
+          </p:nvPr>
+        </p:nvSpPr>
+        <p:spPr/>
+      </p:sp>
+      <p:sp>
+        <p:nvSpPr>
+          <p:cNvPr id="3" name="Notes Placeholder 2"/>
+          <p:cNvSpPr>
+            <a:spLocks noGrp="1"/>
+          </p:cNvSpPr>
+          <p:nvPr>
+            <p:ph type="body" idx="1"/>
+          </p:nvPr>
+        </p:nvSpPr>
+        <p:spPr/>
+        <p:txBody>
+          <a:bodyPr/>
+          <a:lstStyle/>
+          <a:p>
+            <a:pPr marL="0" algn="r" defTabSz="914400" rtl="1" eaLnBrk="1" latinLnBrk="0" hangingPunct="1"/>
+            <a:r>
+              <a:rPr lang="he-IL" dirty="0"/>
+              <a:t>שלום לכולם,</a:t>
+            </a:r>
+          </a:p>
+          <a:p>
+            <a:pPr marL="0" algn="r" defTabSz="914400" rtl="1" eaLnBrk="1" latinLnBrk="0" hangingPunct="1"/>
+            <a:r>
+              <a:rPr lang="he-IL" dirty="0"/>
+              <a:t>שמי שלומי בן שושן,</a:t>
+            </a:r>
+          </a:p>
+          <a:p>
+            <a:pPr marL="0" algn="r" defTabSz="914400" rtl="1" eaLnBrk="1" latinLnBrk="0" hangingPunct="1"/>
+            <a:r>
+              <a:rPr lang="he-IL" dirty="0"/>
+              <a:t>והיום אציג את הערכת הביצועים של מודלי </a:t>
+            </a:r>
+            <a:r>
+              <a:rPr lang="en-US" dirty="0"/>
+              <a:t>LLaMA</a:t>
+            </a:r>
+            <a:r>
+              <a:rPr lang="he-IL" dirty="0"/>
+              <a:t> לפי מגוון </a:t>
+            </a:r>
+            <a:r>
+              <a:rPr lang="he-IL" dirty="0" err="1"/>
+              <a:t>בנצ'מרקים</a:t>
+            </a:r>
+            <a:r>
+              <a:rPr lang="he-IL" dirty="0"/>
+              <a:t> ומטריקות, תוך השוואה למודלים מתחרים נכון לשנת 2023.</a:t>
+            </a:r>
+          </a:p>
+        </p:txBody>
+      </p:sp>
+      <p:sp>
+        <p:nvSpPr>
+          <p:cNvPr id="4" name="Slide Number Placeholder 3"/>
+          <p:cNvSpPr>
+            <a:spLocks noGrp="1"/>
+          </p:cNvSpPr>
+          <p:nvPr>
+            <p:ph type="sldNum" sz="quarter" idx="5"/>
+          </p:nvPr>
+        </p:nvSpPr>
+        <p:spPr/>
+        <p:txBody>
+          <a:bodyPr/>
+          <a:lstStyle/>
+          <a:p>
+            <a:fld id="{476FFE5D-288A-DB4E-9912-CFF1A38B0A9A}" type="slidenum">
+              <a:rPr lang="en-IL" smtClean="0"/>
+              <a:t>1</a:t>
+            </a:fld>
+            <a:endParaRPr lang="en-IL"/>
+          </a:p>
+        </p:txBody>
+      </p:sp>
+    </p:spTree>
+    <p:extLst>
+      <p:ext uri="{BB962C8B-B14F-4D97-AF65-F5344CB8AC3E}">
+        <p14:creationId xmlns:p14="http://schemas.microsoft.com/office/powerpoint/2010/main" val="1245129225"/>
+      </p:ext>
+    </p:extLst>
+  </p:cSld>
+  <p:clrMapOvr>
+    <a:masterClrMapping/>
+  </p:clrMapOvr>
+</p:notes>
+</file>
+
+<file path=ppt/notesSlides/notesSlide10.xml><?xml version="1.0" encoding="utf-8"?>
+<p:notes xmlns:a="http://schemas.openxmlformats.org/drawingml/2006/main" xmlns:r="http://schemas.openxmlformats.org/officeDocument/2006/relationships" xmlns:p="http://schemas.openxmlformats.org/presentationml/2006/main">
+  <p:cSld>
+    <p:spTree>
+      <p:nvGrpSpPr>
+        <p:cNvPr id="1" name=""/>
+        <p:cNvGrpSpPr/>
+        <p:nvPr/>
+      </p:nvGrpSpPr>
+      <p:grpSpPr>
+        <a:xfrm>
+          <a:off x="0" y="0"/>
+          <a:ext cx="0" cy="0"/>
+          <a:chOff x="0" y="0"/>
+          <a:chExt cx="0" cy="0"/>
+        </a:xfrm>
+      </p:grpSpPr>
+      <p:sp>
+        <p:nvSpPr>
+          <p:cNvPr id="2" name="Slide Image Placeholder 1"/>
+          <p:cNvSpPr>
+            <a:spLocks noGrp="1" noRot="1" noChangeAspect="1"/>
+          </p:cNvSpPr>
+          <p:nvPr>
+            <p:ph type="sldImg"/>
+          </p:nvPr>
+        </p:nvSpPr>
+        <p:spPr/>
+      </p:sp>
+      <p:sp>
+        <p:nvSpPr>
+          <p:cNvPr id="3" name="Notes Placeholder 2"/>
+          <p:cNvSpPr>
+            <a:spLocks noGrp="1"/>
+          </p:cNvSpPr>
+          <p:nvPr>
+            <p:ph type="body" idx="1"/>
+          </p:nvPr>
+        </p:nvSpPr>
+        <p:spPr/>
+        <p:txBody>
+          <a:bodyPr/>
+          <a:lstStyle/>
+          <a:p>
+            <a:pPr marL="0" algn="r" defTabSz="914400" rtl="1" eaLnBrk="1" latinLnBrk="0" hangingPunct="1"/>
+            <a:r>
+              <a:rPr lang="he-IL" dirty="0"/>
+              <a:t>כדי לבחון את יכולת כתיבת הקוד של המודל משתמשים </a:t>
+            </a:r>
+            <a:r>
+              <a:rPr lang="he-IL" dirty="0" err="1"/>
+              <a:t>בדאטאסטים</a:t>
+            </a:r>
+            <a:r>
+              <a:rPr lang="he-IL" dirty="0"/>
+              <a:t> </a:t>
+            </a:r>
+            <a:r>
+              <a:rPr lang="en-US" dirty="0" err="1"/>
+              <a:t>HumanEval</a:t>
+            </a:r>
+            <a:r>
+              <a:rPr lang="he-IL" dirty="0"/>
+              <a:t> ו-</a:t>
+            </a:r>
+            <a:r>
+              <a:rPr lang="en-US" dirty="0"/>
+              <a:t>MBPP</a:t>
+            </a:r>
+            <a:r>
+              <a:rPr lang="he-IL" dirty="0"/>
+              <a:t>.</a:t>
+            </a:r>
+          </a:p>
+          <a:p>
+            <a:pPr marL="0" algn="r" defTabSz="914400" rtl="1" eaLnBrk="1" latinLnBrk="0" hangingPunct="1"/>
+            <a:endParaRPr lang="he-IL" dirty="0"/>
+          </a:p>
+          <a:p>
+            <a:pPr marL="0" algn="r" defTabSz="914400" rtl="1" eaLnBrk="1" latinLnBrk="0" hangingPunct="1"/>
+            <a:r>
+              <a:rPr lang="he-IL" dirty="0"/>
+              <a:t>באחד מהם מציגים למודל תיאור פונקציה, ובשני מציגים חתימה עם </a:t>
+            </a:r>
+            <a:r>
+              <a:rPr lang="en-US" dirty="0"/>
+              <a:t>docstring</a:t>
+            </a:r>
+            <a:r>
+              <a:rPr lang="he-IL" dirty="0"/>
+              <a:t>, ומצפים שהוא יכתוב פונקציה תקנית ב‑</a:t>
+            </a:r>
+            <a:r>
+              <a:rPr lang="en-US" dirty="0"/>
+              <a:t>Python</a:t>
+            </a:r>
+            <a:r>
+              <a:rPr lang="he-IL" dirty="0"/>
+              <a:t> שתעבור </a:t>
+            </a:r>
+            <a:r>
+              <a:rPr lang="en-US" dirty="0"/>
+              <a:t>unit-test</a:t>
+            </a:r>
+            <a:r>
+              <a:rPr lang="he-IL" dirty="0"/>
+              <a:t>.</a:t>
+            </a:r>
+            <a:endParaRPr lang="en-US" dirty="0"/>
+          </a:p>
+          <a:p>
+            <a:pPr marL="0" algn="r" defTabSz="914400" rtl="1" eaLnBrk="1" latinLnBrk="0" hangingPunct="1"/>
+            <a:endParaRPr lang="en-US" dirty="0"/>
+          </a:p>
+          <a:p>
+            <a:pPr marL="0" algn="r" defTabSz="914400" rtl="1" eaLnBrk="1" latinLnBrk="0" hangingPunct="1"/>
+            <a:r>
+              <a:rPr lang="he-IL" dirty="0"/>
+              <a:t>במדד זה משתמשים ב-</a:t>
+            </a:r>
+            <a:r>
+              <a:rPr lang="en-US" dirty="0"/>
+              <a:t>zero-shot</a:t>
+            </a:r>
+            <a:r>
+              <a:rPr lang="he-IL" dirty="0"/>
+              <a:t> ו-</a:t>
+            </a:r>
+            <a:r>
+              <a:rPr lang="en-US" dirty="0"/>
+              <a:t>few-shot</a:t>
+            </a:r>
+            <a:r>
+              <a:rPr lang="he-IL" dirty="0"/>
+              <a:t>, על פני ניסיונות רבים: 1 או 100 עבור </a:t>
+            </a:r>
+            <a:r>
+              <a:rPr lang="en-US" dirty="0" err="1"/>
+              <a:t>HumanEval</a:t>
+            </a:r>
+            <a:r>
+              <a:rPr lang="he-IL" dirty="0"/>
+              <a:t>, ו‑80 עבור </a:t>
+            </a:r>
+            <a:r>
+              <a:rPr lang="en-US" dirty="0"/>
+              <a:t>MBPP</a:t>
+            </a:r>
+            <a:r>
+              <a:rPr lang="he-IL" dirty="0"/>
+              <a:t>.</a:t>
+            </a:r>
+          </a:p>
+          <a:p>
+            <a:pPr marL="0" algn="r" defTabSz="914400" rtl="1" eaLnBrk="1" latinLnBrk="0" hangingPunct="1"/>
+            <a:r>
+              <a:rPr lang="he-IL" dirty="0"/>
+              <a:t>כלומר, ב-</a:t>
+            </a:r>
+            <a:r>
+              <a:rPr lang="en-US" dirty="0"/>
+              <a:t>pass@100</a:t>
+            </a:r>
+            <a:r>
+              <a:rPr lang="he-IL" dirty="0"/>
+              <a:t> מספיק שהמודל יעבור </a:t>
+            </a:r>
+            <a:r>
+              <a:rPr lang="en-US" dirty="0"/>
+              <a:t>unit-test</a:t>
+            </a:r>
+            <a:r>
+              <a:rPr lang="he-IL" dirty="0"/>
+              <a:t> פעם אחת מתוך 100.</a:t>
+            </a:r>
+          </a:p>
+          <a:p>
+            <a:pPr marL="0" algn="r" defTabSz="914400" rtl="1" eaLnBrk="1" latinLnBrk="0" hangingPunct="1"/>
+            <a:r>
+              <a:rPr lang="he-IL" dirty="0"/>
+              <a:t>כתוצאה מכך, יש שיפור דרמטי בין </a:t>
+            </a:r>
+            <a:r>
+              <a:rPr lang="en-US" dirty="0"/>
+              <a:t>pass@1</a:t>
+            </a:r>
+            <a:r>
+              <a:rPr lang="he-IL" dirty="0"/>
+              <a:t> ל‑</a:t>
+            </a:r>
+            <a:r>
+              <a:rPr lang="en-US" dirty="0"/>
+              <a:t>pass@100</a:t>
+            </a:r>
+            <a:r>
+              <a:rPr lang="he-IL" dirty="0"/>
+              <a:t> או </a:t>
+            </a:r>
+            <a:r>
+              <a:rPr lang="en-US" dirty="0"/>
+              <a:t>pass@80</a:t>
+            </a:r>
+            <a:r>
+              <a:rPr lang="he-IL" dirty="0"/>
+              <a:t>.,אך זה בסדר, כי כל המודלים נבחנים באותו אופן, ולא סביר שמודל יצליח לעבור </a:t>
+            </a:r>
+            <a:r>
+              <a:rPr lang="en-US" dirty="0"/>
+              <a:t>unit-test</a:t>
+            </a:r>
+            <a:r>
+              <a:rPr lang="he-IL" dirty="0"/>
+              <a:t> בטעות (כמובן, תלוי באיכות הטסט).</a:t>
+            </a:r>
+          </a:p>
+          <a:p>
+            <a:pPr marL="0" algn="r" defTabSz="914400" rtl="1" eaLnBrk="1" latinLnBrk="0" hangingPunct="1"/>
+            <a:endParaRPr lang="he-IL" dirty="0"/>
+          </a:p>
+          <a:p>
+            <a:pPr marL="0" algn="r" defTabSz="914400" rtl="1" eaLnBrk="1" latinLnBrk="0" hangingPunct="1"/>
+            <a:r>
+              <a:rPr lang="he-IL" dirty="0"/>
+              <a:t>כאן משווים את </a:t>
+            </a:r>
+            <a:r>
+              <a:rPr lang="en-US" dirty="0"/>
+              <a:t>LLaMA</a:t>
+            </a:r>
+            <a:r>
+              <a:rPr lang="he-IL" dirty="0"/>
+              <a:t> ל-</a:t>
+            </a:r>
+            <a:r>
+              <a:rPr lang="en-US" dirty="0"/>
+              <a:t>LaMDA</a:t>
+            </a:r>
+            <a:r>
+              <a:rPr lang="he-IL" dirty="0"/>
+              <a:t> ו-</a:t>
+            </a:r>
+            <a:r>
+              <a:rPr lang="en-US" dirty="0" err="1"/>
+              <a:t>PaLM</a:t>
+            </a:r>
+            <a:r>
+              <a:rPr lang="he-IL" dirty="0"/>
+              <a:t>.</a:t>
+            </a:r>
+          </a:p>
+          <a:p>
+            <a:pPr marL="0" algn="r" defTabSz="914400" rtl="1" eaLnBrk="1" latinLnBrk="0" hangingPunct="1"/>
+            <a:r>
+              <a:rPr lang="he-IL" dirty="0"/>
+              <a:t>ניתן לראות ש-</a:t>
+            </a:r>
+            <a:r>
+              <a:rPr lang="en-US" dirty="0"/>
+              <a:t>LLaMA‑13B</a:t>
+            </a:r>
+            <a:r>
+              <a:rPr lang="he-IL" dirty="0"/>
+              <a:t> מנצח מודל מתחרה בגודל </a:t>
+            </a:r>
+            <a:r>
+              <a:rPr lang="en-US" dirty="0"/>
+              <a:t>137B</a:t>
+            </a:r>
+            <a:r>
+              <a:rPr lang="he-IL" dirty="0"/>
+              <a:t> בשני </a:t>
+            </a:r>
+            <a:r>
+              <a:rPr lang="he-IL" dirty="0" err="1"/>
+              <a:t>דאטאסטים</a:t>
+            </a:r>
+            <a:r>
+              <a:rPr lang="he-IL" dirty="0"/>
+              <a:t>, ו-</a:t>
+            </a:r>
+            <a:r>
+              <a:rPr lang="en-US" dirty="0"/>
+              <a:t>LLaMA-65B</a:t>
+            </a:r>
+            <a:r>
+              <a:rPr lang="he-IL" dirty="0"/>
+              <a:t> גובר על </a:t>
+            </a:r>
+            <a:r>
+              <a:rPr lang="en-US" dirty="0"/>
+              <a:t>PaLM-62B</a:t>
+            </a:r>
+            <a:r>
+              <a:rPr lang="he-IL" dirty="0"/>
+              <a:t> אפילו </a:t>
+            </a:r>
+            <a:r>
+              <a:rPr lang="he-IL" dirty="0" err="1"/>
+              <a:t>כש</a:t>
+            </a:r>
+            <a:r>
+              <a:rPr lang="he-IL" dirty="0"/>
+              <a:t>-</a:t>
+            </a:r>
+            <a:r>
+              <a:rPr lang="en-US" dirty="0" err="1"/>
+              <a:t>PaLM</a:t>
+            </a:r>
+            <a:r>
+              <a:rPr lang="he-IL" dirty="0"/>
+              <a:t> מאומן זמן רב יותר.</a:t>
+            </a:r>
+          </a:p>
+          <a:p>
+            <a:pPr marL="0" algn="r" defTabSz="914400" rtl="1" eaLnBrk="1" latinLnBrk="0" hangingPunct="1"/>
+            <a:r>
+              <a:rPr lang="he-IL" dirty="0"/>
+              <a:t>בנוסף, </a:t>
+            </a:r>
+            <a:r>
+              <a:rPr lang="en-US" dirty="0"/>
+              <a:t>LLaMA</a:t>
+            </a:r>
+            <a:r>
+              <a:rPr lang="he-IL" dirty="0"/>
+              <a:t> מנצח את כל המודלים האחרים שלא עברו </a:t>
+            </a:r>
+            <a:r>
+              <a:rPr lang="he-IL" dirty="0" err="1"/>
+              <a:t>טיונינג</a:t>
+            </a:r>
+            <a:r>
+              <a:rPr lang="he-IL" dirty="0"/>
+              <a:t> לקוד.</a:t>
+            </a:r>
+          </a:p>
+          <a:p>
+            <a:pPr marL="0" algn="r" defTabSz="914400" rtl="1" eaLnBrk="1" latinLnBrk="0" hangingPunct="1"/>
+            <a:endParaRPr lang="he-IL" dirty="0"/>
+          </a:p>
+          <a:p>
+            <a:pPr marL="0" algn="r" defTabSz="914400" rtl="1" eaLnBrk="1" latinLnBrk="0" hangingPunct="1"/>
+            <a:r>
+              <a:rPr lang="he-IL" dirty="0"/>
+              <a:t>חשוב לציין שכל נושא ה‑</a:t>
+            </a:r>
+            <a:r>
+              <a:rPr lang="en-US" dirty="0"/>
+              <a:t>fine-tuning</a:t>
+            </a:r>
+            <a:r>
+              <a:rPr lang="he-IL" dirty="0"/>
+              <a:t> של </a:t>
+            </a:r>
+            <a:r>
+              <a:rPr lang="en-US" dirty="0"/>
+              <a:t>LLaMA</a:t>
+            </a:r>
+            <a:r>
+              <a:rPr lang="he-IL" dirty="0"/>
+              <a:t> מחוץ ל-</a:t>
+            </a:r>
+            <a:r>
+              <a:rPr lang="en-US" dirty="0"/>
+              <a:t>scope</a:t>
+            </a:r>
+            <a:r>
+              <a:rPr lang="he-IL" dirty="0"/>
+              <a:t> המאמר.</a:t>
+            </a:r>
+            <a:endParaRPr lang="en-IL" dirty="0"/>
+          </a:p>
+        </p:txBody>
+      </p:sp>
+      <p:sp>
+        <p:nvSpPr>
+          <p:cNvPr id="4" name="Slide Number Placeholder 3"/>
+          <p:cNvSpPr>
+            <a:spLocks noGrp="1"/>
+          </p:cNvSpPr>
+          <p:nvPr>
+            <p:ph type="sldNum" sz="quarter" idx="5"/>
+          </p:nvPr>
+        </p:nvSpPr>
+        <p:spPr/>
+        <p:txBody>
+          <a:bodyPr/>
+          <a:lstStyle/>
+          <a:p>
+            <a:fld id="{476FFE5D-288A-DB4E-9912-CFF1A38B0A9A}" type="slidenum">
+              <a:rPr lang="en-IL" smtClean="0"/>
+              <a:t>11</a:t>
+            </a:fld>
+            <a:endParaRPr lang="en-IL"/>
+          </a:p>
+        </p:txBody>
+      </p:sp>
+    </p:spTree>
+    <p:extLst>
+      <p:ext uri="{BB962C8B-B14F-4D97-AF65-F5344CB8AC3E}">
+        <p14:creationId xmlns:p14="http://schemas.microsoft.com/office/powerpoint/2010/main" val="1232543741"/>
+      </p:ext>
+    </p:extLst>
+  </p:cSld>
+  <p:clrMapOvr>
+    <a:masterClrMapping/>
+  </p:clrMapOvr>
+</p:notes>
+</file>
+
+<file path=ppt/notesSlides/notesSlide11.xml><?xml version="1.0" encoding="utf-8"?>
+<p:notes xmlns:a="http://schemas.openxmlformats.org/drawingml/2006/main" xmlns:r="http://schemas.openxmlformats.org/officeDocument/2006/relationships" xmlns:p="http://schemas.openxmlformats.org/presentationml/2006/main">
+  <p:cSld>
+    <p:spTree>
+      <p:nvGrpSpPr>
+        <p:cNvPr id="1" name=""/>
+        <p:cNvGrpSpPr/>
+        <p:nvPr/>
+      </p:nvGrpSpPr>
+      <p:grpSpPr>
+        <a:xfrm>
+          <a:off x="0" y="0"/>
+          <a:ext cx="0" cy="0"/>
+          <a:chOff x="0" y="0"/>
+          <a:chExt cx="0" cy="0"/>
+        </a:xfrm>
+      </p:grpSpPr>
+      <p:sp>
+        <p:nvSpPr>
+          <p:cNvPr id="2" name="Slide Image Placeholder 1"/>
+          <p:cNvSpPr>
+            <a:spLocks noGrp="1" noRot="1" noChangeAspect="1"/>
+          </p:cNvSpPr>
+          <p:nvPr>
+            <p:ph type="sldImg"/>
+          </p:nvPr>
+        </p:nvSpPr>
+        <p:spPr/>
+      </p:sp>
+      <p:sp>
+        <p:nvSpPr>
+          <p:cNvPr id="3" name="Notes Placeholder 2"/>
+          <p:cNvSpPr>
+            <a:spLocks noGrp="1"/>
+          </p:cNvSpPr>
+          <p:nvPr>
+            <p:ph type="body" idx="1"/>
+          </p:nvPr>
+        </p:nvSpPr>
+        <p:spPr/>
+        <p:txBody>
+          <a:bodyPr/>
+          <a:lstStyle/>
+          <a:p>
+            <a:pPr marL="0" algn="r" defTabSz="914400" rtl="1" eaLnBrk="1" latinLnBrk="0" hangingPunct="1"/>
+            <a:r>
+              <a:rPr lang="he-IL" dirty="0"/>
+              <a:t>והגענו </a:t>
+            </a:r>
+            <a:r>
+              <a:rPr lang="he-IL" dirty="0" err="1"/>
+              <a:t>לבנצ'מרק</a:t>
+            </a:r>
+            <a:r>
+              <a:rPr lang="he-IL" dirty="0"/>
+              <a:t> האחרון - </a:t>
+            </a:r>
+            <a:r>
+              <a:rPr lang="en-US" dirty="0"/>
+              <a:t>Massive Multitask Language Understanding</a:t>
+            </a:r>
+            <a:r>
+              <a:rPr lang="he-IL" dirty="0"/>
+              <a:t>, או בקיצור MMLU, שמטרתו לבדוק את הידע הכללי של המודל.</a:t>
+            </a:r>
+          </a:p>
+          <a:p>
+            <a:pPr marL="0" algn="r" defTabSz="914400" rtl="1" eaLnBrk="1" latinLnBrk="0" hangingPunct="1"/>
+            <a:endParaRPr lang="he-IL" dirty="0"/>
+          </a:p>
+          <a:p>
+            <a:pPr marL="0" algn="r" defTabSz="914400" rtl="1" eaLnBrk="1" latinLnBrk="0" hangingPunct="1"/>
+            <a:r>
+              <a:rPr lang="he-IL" dirty="0"/>
+              <a:t>בכל דוגמה </a:t>
+            </a:r>
+            <a:r>
+              <a:rPr lang="he-IL" dirty="0" err="1"/>
+              <a:t>בדאטאסט</a:t>
+            </a:r>
+            <a:r>
+              <a:rPr lang="he-IL" dirty="0"/>
+              <a:t> יש שאלה, ארבע אפשרויות (</a:t>
+            </a:r>
+            <a:r>
+              <a:rPr lang="en-US" dirty="0"/>
+              <a:t>A, B, C, D</a:t>
+            </a:r>
+            <a:r>
+              <a:rPr lang="he-IL" dirty="0"/>
+              <a:t>) ותשובה נכונה.</a:t>
+            </a:r>
+          </a:p>
+          <a:p>
+            <a:pPr marL="0" algn="r" defTabSz="914400" rtl="1" eaLnBrk="1" latinLnBrk="0" hangingPunct="1"/>
+            <a:endParaRPr lang="he-IL" dirty="0"/>
+          </a:p>
+          <a:p>
+            <a:pPr marL="0" algn="r" defTabSz="914400" rtl="1" eaLnBrk="1" latinLnBrk="0" hangingPunct="1"/>
+            <a:r>
+              <a:rPr lang="he-IL" dirty="0"/>
+              <a:t>מציגים למודל את השאלה ואת ארבע האפשרויות בעטיפה של </a:t>
+            </a:r>
+            <a:r>
+              <a:rPr lang="en-US" dirty="0"/>
+              <a:t>system prompts</a:t>
+            </a:r>
+            <a:r>
+              <a:rPr lang="he-IL" dirty="0"/>
+              <a:t>,</a:t>
+            </a:r>
+            <a:r>
+              <a:rPr lang="en-US" dirty="0"/>
+              <a:t> </a:t>
+            </a:r>
+            <a:r>
+              <a:rPr lang="he-IL" dirty="0"/>
+              <a:t>ולפני כל שאלה נותנים לו 5 דוגמאות של שאלה‑תשובה.</a:t>
+            </a:r>
+          </a:p>
+          <a:p>
+            <a:pPr marL="0" algn="r" defTabSz="914400" rtl="1" eaLnBrk="1" latinLnBrk="0" hangingPunct="1"/>
+            <a:endParaRPr lang="he-IL" dirty="0"/>
+          </a:p>
+          <a:p>
+            <a:pPr marL="0" algn="r" defTabSz="914400" rtl="1" eaLnBrk="1" latinLnBrk="0" hangingPunct="1"/>
+            <a:r>
+              <a:rPr lang="he-IL" dirty="0"/>
+              <a:t>מהתוצאות ניתן לראות ש-</a:t>
+            </a:r>
+            <a:r>
+              <a:rPr lang="en-US" dirty="0"/>
+              <a:t>PaLM‑540B</a:t>
+            </a:r>
+            <a:r>
+              <a:rPr lang="he-IL" dirty="0"/>
+              <a:t> מוביל, אך </a:t>
+            </a:r>
+            <a:r>
+              <a:rPr lang="en-US" dirty="0"/>
+              <a:t>LLaMA‑65B</a:t>
+            </a:r>
+            <a:r>
+              <a:rPr lang="he-IL" dirty="0"/>
+              <a:t> לא רחוק ממנו </a:t>
+            </a:r>
+            <a:r>
+              <a:rPr lang="he-IL" dirty="0" err="1"/>
+              <a:t>ומ</a:t>
+            </a:r>
+            <a:r>
+              <a:rPr lang="he-IL" dirty="0"/>
+              <a:t>-</a:t>
+            </a:r>
+            <a:r>
+              <a:rPr lang="en-US" dirty="0"/>
+              <a:t>Chinchilla‑70B</a:t>
+            </a:r>
+            <a:r>
+              <a:rPr lang="he-IL" dirty="0"/>
+              <a:t>.</a:t>
+            </a:r>
+          </a:p>
+          <a:p>
+            <a:pPr marL="0" algn="r" defTabSz="914400" rtl="1" eaLnBrk="1" latinLnBrk="0" hangingPunct="1"/>
+            <a:endParaRPr lang="he-IL" dirty="0"/>
+          </a:p>
+          <a:p>
+            <a:pPr marL="0" algn="r" defTabSz="914400" rtl="1" eaLnBrk="1" latinLnBrk="0" hangingPunct="1"/>
+            <a:r>
+              <a:rPr lang="he-IL" dirty="0"/>
+              <a:t>החוקרים מסבירים את הפער בכך ש-</a:t>
+            </a:r>
+            <a:r>
+              <a:rPr lang="en-US" dirty="0"/>
+              <a:t>LLaMA</a:t>
+            </a:r>
+            <a:r>
+              <a:rPr lang="he-IL" dirty="0"/>
+              <a:t> אומן רק על </a:t>
+            </a:r>
+            <a:r>
+              <a:rPr lang="en-US" dirty="0"/>
+              <a:t>177GB</a:t>
+            </a:r>
+            <a:r>
+              <a:rPr lang="he-IL" dirty="0"/>
+              <a:t> של ספרים, בעוד שהאחרים אומנו על </a:t>
+            </a:r>
+            <a:r>
+              <a:rPr lang="en-US" dirty="0"/>
+              <a:t>2TB</a:t>
+            </a:r>
+            <a:r>
+              <a:rPr lang="he-IL" dirty="0"/>
+              <a:t> של ספרים.</a:t>
+            </a:r>
+          </a:p>
+        </p:txBody>
+      </p:sp>
+      <p:sp>
+        <p:nvSpPr>
+          <p:cNvPr id="4" name="Slide Number Placeholder 3"/>
+          <p:cNvSpPr>
+            <a:spLocks noGrp="1"/>
+          </p:cNvSpPr>
+          <p:nvPr>
+            <p:ph type="sldNum" sz="quarter" idx="5"/>
+          </p:nvPr>
+        </p:nvSpPr>
+        <p:spPr/>
+        <p:txBody>
+          <a:bodyPr/>
+          <a:lstStyle/>
+          <a:p>
+            <a:fld id="{476FFE5D-288A-DB4E-9912-CFF1A38B0A9A}" type="slidenum">
+              <a:rPr lang="en-IL" smtClean="0"/>
+              <a:t>12</a:t>
+            </a:fld>
+            <a:endParaRPr lang="en-IL"/>
+          </a:p>
+        </p:txBody>
+      </p:sp>
+    </p:spTree>
+    <p:extLst>
+      <p:ext uri="{BB962C8B-B14F-4D97-AF65-F5344CB8AC3E}">
+        <p14:creationId xmlns:p14="http://schemas.microsoft.com/office/powerpoint/2010/main" val="4002934736"/>
+      </p:ext>
+    </p:extLst>
+  </p:cSld>
+  <p:clrMapOvr>
+    <a:masterClrMapping/>
+  </p:clrMapOvr>
+</p:notes>
+</file>
+
+<file path=ppt/notesSlides/notesSlide12.xml><?xml version="1.0" encoding="utf-8"?>
+<p:notes xmlns:a="http://schemas.openxmlformats.org/drawingml/2006/main" xmlns:r="http://schemas.openxmlformats.org/officeDocument/2006/relationships" xmlns:p="http://schemas.openxmlformats.org/presentationml/2006/main">
+  <p:cSld>
+    <p:spTree>
+      <p:nvGrpSpPr>
+        <p:cNvPr id="1" name=""/>
+        <p:cNvGrpSpPr/>
+        <p:nvPr/>
+      </p:nvGrpSpPr>
+      <p:grpSpPr>
+        <a:xfrm>
+          <a:off x="0" y="0"/>
+          <a:ext cx="0" cy="0"/>
+          <a:chOff x="0" y="0"/>
+          <a:chExt cx="0" cy="0"/>
+        </a:xfrm>
+      </p:grpSpPr>
+      <p:sp>
+        <p:nvSpPr>
+          <p:cNvPr id="2" name="Slide Image Placeholder 1"/>
+          <p:cNvSpPr>
+            <a:spLocks noGrp="1" noRot="1" noChangeAspect="1"/>
+          </p:cNvSpPr>
+          <p:nvPr>
+            <p:ph type="sldImg"/>
+          </p:nvPr>
+        </p:nvSpPr>
+        <p:spPr/>
+      </p:sp>
+      <p:sp>
+        <p:nvSpPr>
+          <p:cNvPr id="3" name="Notes Placeholder 2"/>
+          <p:cNvSpPr>
+            <a:spLocks noGrp="1"/>
+          </p:cNvSpPr>
+          <p:nvPr>
+            <p:ph type="body" idx="1"/>
+          </p:nvPr>
+        </p:nvSpPr>
+        <p:spPr/>
+        <p:txBody>
+          <a:bodyPr/>
+          <a:lstStyle/>
+          <a:p>
+            <a:pPr marL="0" algn="r" defTabSz="914400" rtl="1" eaLnBrk="1" latinLnBrk="0" hangingPunct="1"/>
+            <a:r>
+              <a:rPr lang="he-IL" dirty="0"/>
+              <a:t>בשקף הזה אפשר לראות שה-</a:t>
+            </a:r>
+            <a:r>
+              <a:rPr lang="en-US" dirty="0"/>
+              <a:t>accuracy</a:t>
+            </a:r>
+            <a:r>
+              <a:rPr lang="he-IL" dirty="0"/>
+              <a:t> של מודלי </a:t>
+            </a:r>
+            <a:r>
+              <a:rPr lang="en-US" dirty="0"/>
+              <a:t>LLaMA</a:t>
+            </a:r>
+            <a:r>
+              <a:rPr lang="he-IL" dirty="0"/>
+              <a:t> על </a:t>
+            </a:r>
+            <a:r>
+              <a:rPr lang="he-IL" dirty="0" err="1"/>
+              <a:t>הבנצ'מרקים</a:t>
+            </a:r>
+            <a:r>
+              <a:rPr lang="he-IL" dirty="0"/>
+              <a:t> </a:t>
+            </a:r>
+            <a:r>
+              <a:rPr lang="en-US" dirty="0"/>
+              <a:t>Question Answering</a:t>
+            </a:r>
+            <a:r>
+              <a:rPr lang="he-IL" dirty="0"/>
+              <a:t> ו-</a:t>
+            </a:r>
+            <a:r>
+              <a:rPr lang="en-US" dirty="0"/>
+              <a:t>Common Sense</a:t>
+            </a:r>
+            <a:r>
+              <a:rPr lang="he-IL" dirty="0"/>
+              <a:t> הולך ומשתפר עם מספר הטוקנים עליהם מאמנים אותם, מה שגם מאריך את משך האימון, ומשווים את זה למודל </a:t>
+            </a:r>
+            <a:r>
+              <a:rPr lang="en-US" dirty="0"/>
+              <a:t>Chinchila-70B</a:t>
+            </a:r>
+            <a:r>
+              <a:rPr lang="he-IL" dirty="0"/>
+              <a:t> שהוא באותו סדר הגודל של מודל </a:t>
+            </a:r>
+            <a:r>
+              <a:rPr lang="en-US" dirty="0"/>
+              <a:t>LLaMA</a:t>
+            </a:r>
+            <a:r>
+              <a:rPr lang="he-IL" dirty="0"/>
+              <a:t> גדול - </a:t>
+            </a:r>
+            <a:r>
+              <a:rPr lang="en-US" dirty="0"/>
+              <a:t>LLaMA-65B</a:t>
+            </a:r>
+            <a:r>
+              <a:rPr lang="he-IL" dirty="0"/>
+              <a:t>.</a:t>
+            </a:r>
+          </a:p>
+          <a:p>
+            <a:pPr marL="0" algn="r" defTabSz="914400" rtl="1" eaLnBrk="1" latinLnBrk="0" hangingPunct="1"/>
+            <a:endParaRPr lang="he-IL" dirty="0"/>
+          </a:p>
+          <a:p>
+            <a:pPr marL="0" algn="r" defTabSz="914400" rtl="1" eaLnBrk="1" latinLnBrk="0" hangingPunct="1"/>
+            <a:r>
+              <a:rPr lang="he-IL" dirty="0"/>
+              <a:t>וזה בעצם המסר המרכזי של החוקרים:</a:t>
+            </a:r>
+          </a:p>
+          <a:p>
+            <a:pPr marL="0" algn="r" defTabSz="914400" rtl="1" eaLnBrk="1" latinLnBrk="0" hangingPunct="1"/>
+            <a:r>
+              <a:rPr lang="he-IL" dirty="0"/>
+              <a:t>אם עד כה האמנו ב-</a:t>
+            </a:r>
+            <a:r>
+              <a:rPr lang="en-US" dirty="0"/>
+              <a:t>scaling law</a:t>
+            </a:r>
+            <a:r>
+              <a:rPr lang="he-IL" dirty="0"/>
+              <a:t>, לפיו ביצועי המודל משתפרים ככל שמגדילים אותו, ובהתאם גם את הדאטה,</a:t>
+            </a:r>
+          </a:p>
+          <a:p>
+            <a:pPr marL="0" algn="r" defTabSz="914400" rtl="1" eaLnBrk="1" latinLnBrk="0" hangingPunct="1"/>
+            <a:r>
+              <a:rPr lang="he-IL" dirty="0"/>
+              <a:t>אז עכשיו אפשר לטעון שניתן להסתפק במודלים בגדלים סבירים (לא קטנים, אבל לא ענקיים), ופשוט לאמן אותם יותר זמן, כמובן על יותר דאטה.</a:t>
+            </a:r>
+          </a:p>
+          <a:p>
+            <a:pPr marL="0" algn="r" defTabSz="914400" rtl="1" eaLnBrk="1" latinLnBrk="0" hangingPunct="1"/>
+            <a:endParaRPr lang="he-IL" dirty="0"/>
+          </a:p>
+          <a:p>
+            <a:pPr marL="0" algn="r" defTabSz="914400" rtl="1" eaLnBrk="1" latinLnBrk="0" hangingPunct="1"/>
+            <a:r>
+              <a:rPr lang="he-IL" dirty="0"/>
+              <a:t>כלומר, אפשר לשפר ביצועים על ידי זה שנאמן את המודל יותר זמן, על יותר דאטה, מה שגם יעלה את מחיר האימון, אבל במקום זאת נרוויח מודלים קטנים יותר שהם גם חסכוניים יותר בזמן ה-</a:t>
+            </a:r>
+            <a:r>
+              <a:rPr lang="en-US" dirty="0"/>
+              <a:t>infer</a:t>
+            </a:r>
+            <a:r>
+              <a:rPr lang="he-IL" dirty="0"/>
+              <a:t>, שזה הזמן המשמעותי יותר, כי אחרי שמודל נפרס, עובר </a:t>
+            </a:r>
+            <a:r>
+              <a:rPr lang="en-US" dirty="0"/>
+              <a:t>deployment</a:t>
+            </a:r>
+            <a:r>
+              <a:rPr lang="he-IL" dirty="0"/>
+              <a:t>, הוא עובד רק במצב </a:t>
+            </a:r>
+            <a:r>
+              <a:rPr lang="en-US" dirty="0"/>
+              <a:t>infer</a:t>
+            </a:r>
+            <a:r>
+              <a:rPr lang="he-IL" dirty="0"/>
+              <a:t>, וגם יכולים לרוץ על מכשירים עם יכולת חישוב מוגבלת, כמו שכאמור </a:t>
+            </a:r>
+            <a:r>
+              <a:rPr lang="en-US" dirty="0"/>
+              <a:t>LLaMA-13B</a:t>
+            </a:r>
+            <a:r>
+              <a:rPr lang="he-IL" dirty="0"/>
+              <a:t> יכול לרוץ על GPU בודד.</a:t>
+            </a:r>
+          </a:p>
+          <a:p>
+            <a:pPr marL="0" algn="r" defTabSz="914400" rtl="1" eaLnBrk="1" latinLnBrk="0" hangingPunct="1"/>
+            <a:endParaRPr lang="he-IL" dirty="0"/>
+          </a:p>
+          <a:p>
+            <a:pPr marL="0" algn="r" defTabSz="914400" rtl="1" eaLnBrk="1" latinLnBrk="0" hangingPunct="1"/>
+            <a:r>
+              <a:rPr lang="he-IL" dirty="0" err="1"/>
+              <a:t>בפיגר</a:t>
+            </a:r>
+            <a:r>
+              <a:rPr lang="he-IL" dirty="0"/>
+              <a:t> השני אפשר לראות ה-</a:t>
+            </a:r>
+            <a:r>
+              <a:rPr lang="en-US" dirty="0"/>
+              <a:t>loss</a:t>
+            </a:r>
+            <a:r>
+              <a:rPr lang="he-IL" dirty="0"/>
+              <a:t> של המודל יורד עם העלייה ב-</a:t>
+            </a:r>
+            <a:r>
+              <a:rPr lang="en-US" dirty="0"/>
+              <a:t>accuracy</a:t>
+            </a:r>
+            <a:r>
+              <a:rPr lang="he-IL" dirty="0"/>
+              <a:t>, כמצופה.</a:t>
+            </a:r>
+          </a:p>
+          <a:p>
+            <a:pPr marL="0" algn="r" defTabSz="914400" rtl="1" eaLnBrk="1" latinLnBrk="0" hangingPunct="1"/>
+            <a:r>
+              <a:rPr lang="he-IL" dirty="0"/>
+              <a:t>אגב, כאן הם לא מתייחסים ל-</a:t>
+            </a:r>
+            <a:r>
+              <a:rPr lang="en-US" dirty="0"/>
+              <a:t>loss</a:t>
+            </a:r>
+            <a:r>
+              <a:rPr lang="he-IL" dirty="0"/>
+              <a:t> כמו שאנחנו רגילים, אלא כ-</a:t>
+            </a:r>
+            <a:r>
+              <a:rPr lang="en-US" dirty="0"/>
+              <a:t>perplexity</a:t>
+            </a:r>
+            <a:r>
+              <a:rPr lang="he-IL" dirty="0"/>
+              <a:t>, שזה בעברית "מבוכה", שזה בעצם מדד שבא להגיד כמה המודל לא בטוח בתשובה שלו, ולכן </a:t>
+            </a:r>
+            <a:r>
+              <a:rPr lang="en-US" dirty="0"/>
+              <a:t>perplexity</a:t>
+            </a:r>
+            <a:r>
+              <a:rPr lang="he-IL" dirty="0"/>
+              <a:t> נמוכה היא טובה יותר.</a:t>
+            </a:r>
+          </a:p>
+        </p:txBody>
+      </p:sp>
+      <p:sp>
+        <p:nvSpPr>
+          <p:cNvPr id="4" name="Slide Number Placeholder 3"/>
+          <p:cNvSpPr>
+            <a:spLocks noGrp="1"/>
+          </p:cNvSpPr>
+          <p:nvPr>
+            <p:ph type="sldNum" sz="quarter" idx="5"/>
+          </p:nvPr>
+        </p:nvSpPr>
+        <p:spPr/>
+        <p:txBody>
+          <a:bodyPr/>
+          <a:lstStyle/>
+          <a:p>
+            <a:fld id="{476FFE5D-288A-DB4E-9912-CFF1A38B0A9A}" type="slidenum">
+              <a:rPr lang="en-IL" smtClean="0"/>
+              <a:t>13</a:t>
+            </a:fld>
+            <a:endParaRPr lang="en-IL"/>
+          </a:p>
+        </p:txBody>
+      </p:sp>
+    </p:spTree>
+    <p:extLst>
+      <p:ext uri="{BB962C8B-B14F-4D97-AF65-F5344CB8AC3E}">
+        <p14:creationId xmlns:p14="http://schemas.microsoft.com/office/powerpoint/2010/main" val="3874646063"/>
+      </p:ext>
+    </p:extLst>
+  </p:cSld>
+  <p:clrMapOvr>
+    <a:masterClrMapping/>
+  </p:clrMapOvr>
+</p:notes>
+</file>
+
+<file path=ppt/notesSlides/notesSlide13.xml><?xml version="1.0" encoding="utf-8"?>
+<p:notes xmlns:a="http://schemas.openxmlformats.org/drawingml/2006/main" xmlns:r="http://schemas.openxmlformats.org/officeDocument/2006/relationships" xmlns:p="http://schemas.openxmlformats.org/presentationml/2006/main">
+  <p:cSld>
+    <p:spTree>
+      <p:nvGrpSpPr>
+        <p:cNvPr id="1" name=""/>
+        <p:cNvGrpSpPr/>
+        <p:nvPr/>
+      </p:nvGrpSpPr>
+      <p:grpSpPr>
+        <a:xfrm>
+          <a:off x="0" y="0"/>
+          <a:ext cx="0" cy="0"/>
+          <a:chOff x="0" y="0"/>
+          <a:chExt cx="0" cy="0"/>
+        </a:xfrm>
+      </p:grpSpPr>
+      <p:sp>
+        <p:nvSpPr>
+          <p:cNvPr id="2" name="Slide Image Placeholder 1"/>
+          <p:cNvSpPr>
+            <a:spLocks noGrp="1" noRot="1" noChangeAspect="1"/>
+          </p:cNvSpPr>
+          <p:nvPr>
+            <p:ph type="sldImg"/>
+          </p:nvPr>
+        </p:nvSpPr>
+        <p:spPr/>
+      </p:sp>
+      <p:sp>
+        <p:nvSpPr>
+          <p:cNvPr id="3" name="Notes Placeholder 2"/>
+          <p:cNvSpPr>
+            <a:spLocks noGrp="1"/>
+          </p:cNvSpPr>
+          <p:nvPr>
+            <p:ph type="body" idx="1"/>
+          </p:nvPr>
+        </p:nvSpPr>
+        <p:spPr/>
+        <p:txBody>
+          <a:bodyPr/>
+          <a:lstStyle/>
+          <a:p>
+            <a:pPr marL="0" algn="r" defTabSz="914400" rtl="1" eaLnBrk="1" latinLnBrk="0" hangingPunct="1"/>
+            <a:r>
+              <a:rPr lang="he-IL" dirty="0"/>
+              <a:t>בשקפים הבאים נראה את מטריקות נוספות להערכה של מודלי </a:t>
+            </a:r>
+            <a:r>
+              <a:rPr lang="en-US" dirty="0"/>
+              <a:t>LLaMA</a:t>
+            </a:r>
+            <a:endParaRPr lang="en-IL" dirty="0"/>
+          </a:p>
+        </p:txBody>
+      </p:sp>
+      <p:sp>
+        <p:nvSpPr>
+          <p:cNvPr id="4" name="Slide Number Placeholder 3"/>
+          <p:cNvSpPr>
+            <a:spLocks noGrp="1"/>
+          </p:cNvSpPr>
+          <p:nvPr>
+            <p:ph type="sldNum" sz="quarter" idx="5"/>
+          </p:nvPr>
+        </p:nvSpPr>
+        <p:spPr/>
+        <p:txBody>
+          <a:bodyPr/>
+          <a:lstStyle/>
+          <a:p>
+            <a:fld id="{476FFE5D-288A-DB4E-9912-CFF1A38B0A9A}" type="slidenum">
+              <a:rPr lang="en-IL" smtClean="0"/>
+              <a:t>14</a:t>
+            </a:fld>
+            <a:endParaRPr lang="en-IL"/>
+          </a:p>
+        </p:txBody>
+      </p:sp>
+    </p:spTree>
+    <p:extLst>
+      <p:ext uri="{BB962C8B-B14F-4D97-AF65-F5344CB8AC3E}">
+        <p14:creationId xmlns:p14="http://schemas.microsoft.com/office/powerpoint/2010/main" val="2994993173"/>
+      </p:ext>
+    </p:extLst>
+  </p:cSld>
+  <p:clrMapOvr>
+    <a:masterClrMapping/>
+  </p:clrMapOvr>
+</p:notes>
+</file>
+
+<file path=ppt/notesSlides/notesSlide14.xml><?xml version="1.0" encoding="utf-8"?>
+<p:notes xmlns:a="http://schemas.openxmlformats.org/drawingml/2006/main" xmlns:r="http://schemas.openxmlformats.org/officeDocument/2006/relationships" xmlns:p="http://schemas.openxmlformats.org/presentationml/2006/main">
+  <p:cSld>
+    <p:spTree>
+      <p:nvGrpSpPr>
+        <p:cNvPr id="1" name=""/>
+        <p:cNvGrpSpPr/>
+        <p:nvPr/>
+      </p:nvGrpSpPr>
+      <p:grpSpPr>
+        <a:xfrm>
+          <a:off x="0" y="0"/>
+          <a:ext cx="0" cy="0"/>
+          <a:chOff x="0" y="0"/>
+          <a:chExt cx="0" cy="0"/>
+        </a:xfrm>
+      </p:grpSpPr>
+      <p:sp>
+        <p:nvSpPr>
+          <p:cNvPr id="2" name="Slide Image Placeholder 1"/>
+          <p:cNvSpPr>
+            <a:spLocks noGrp="1" noRot="1" noChangeAspect="1"/>
+          </p:cNvSpPr>
+          <p:nvPr>
+            <p:ph type="sldImg"/>
+          </p:nvPr>
+        </p:nvSpPr>
+        <p:spPr/>
+      </p:sp>
+      <p:sp>
+        <p:nvSpPr>
+          <p:cNvPr id="3" name="Notes Placeholder 2"/>
+          <p:cNvSpPr>
+            <a:spLocks noGrp="1"/>
+          </p:cNvSpPr>
+          <p:nvPr>
+            <p:ph type="body" idx="1"/>
+          </p:nvPr>
+        </p:nvSpPr>
+        <p:spPr/>
+        <p:txBody>
+          <a:bodyPr/>
+          <a:lstStyle/>
+          <a:p>
+            <a:pPr marL="0" algn="r" defTabSz="914400" rtl="1" eaLnBrk="1" latinLnBrk="0" hangingPunct="1"/>
+            <a:r>
+              <a:rPr lang="he-IL" dirty="0"/>
+              <a:t>בעולמות ה-LLM מאוד מקובל לבדוק כמה מודל יודע לעקוב אחר הוראות, ולכן החוקרים עשו את המינימום הנדרש כדי להוכיח שניתן להתאים את </a:t>
+            </a:r>
+            <a:r>
+              <a:rPr lang="en-US" dirty="0"/>
+              <a:t>LLaMA</a:t>
+            </a:r>
+            <a:r>
+              <a:rPr lang="he-IL" dirty="0"/>
+              <a:t> למשימה זו.</a:t>
+            </a:r>
+          </a:p>
+          <a:p>
+            <a:pPr marL="0" algn="r" defTabSz="914400" rtl="1" eaLnBrk="1" latinLnBrk="0" hangingPunct="1"/>
+            <a:endParaRPr lang="he-IL" dirty="0"/>
+          </a:p>
+          <a:p>
+            <a:pPr marL="0" algn="r" defTabSz="914400" rtl="1" eaLnBrk="1" latinLnBrk="0" hangingPunct="1"/>
+            <a:r>
+              <a:rPr lang="he-IL" dirty="0"/>
+              <a:t>הם לקחו את המודל הגדול </a:t>
+            </a:r>
+            <a:r>
+              <a:rPr lang="en-US" dirty="0"/>
+              <a:t>65B</a:t>
+            </a:r>
+            <a:r>
+              <a:rPr lang="he-IL" dirty="0"/>
+              <a:t>, ועשו לו </a:t>
+            </a:r>
+            <a:r>
+              <a:rPr lang="he-IL" dirty="0" err="1"/>
+              <a:t>טיוניג</a:t>
+            </a:r>
+            <a:r>
+              <a:rPr lang="he-IL" dirty="0"/>
+              <a:t> קצר על </a:t>
+            </a:r>
+            <a:r>
+              <a:rPr lang="he-IL" dirty="0" err="1"/>
+              <a:t>דאטאסט</a:t>
+            </a:r>
+            <a:r>
+              <a:rPr lang="he-IL" dirty="0"/>
+              <a:t> למעקב אחר הוראות, וקראו למודל המותאם </a:t>
+            </a:r>
+            <a:r>
+              <a:rPr lang="en-US" dirty="0"/>
+              <a:t>LLaMA-I</a:t>
+            </a:r>
+            <a:r>
+              <a:rPr lang="he-IL" dirty="0"/>
+              <a:t>.</a:t>
+            </a:r>
+          </a:p>
+          <a:p>
+            <a:pPr marL="0" algn="r" defTabSz="914400" rtl="1" eaLnBrk="1" latinLnBrk="0" hangingPunct="1"/>
+            <a:endParaRPr lang="he-IL" dirty="0"/>
+          </a:p>
+          <a:p>
+            <a:pPr marL="0" algn="r" defTabSz="914400" rtl="1" eaLnBrk="1" latinLnBrk="0" hangingPunct="1"/>
+            <a:r>
+              <a:rPr lang="he-IL" dirty="0"/>
+              <a:t>כדי לבדוק את המודל הם השתמשו ב-MMLU בתצורה של </a:t>
+            </a:r>
+            <a:r>
+              <a:rPr lang="en-US" dirty="0"/>
+              <a:t>5-shot</a:t>
+            </a:r>
+            <a:r>
+              <a:rPr lang="he-IL" dirty="0"/>
+              <a:t>.</a:t>
+            </a:r>
+          </a:p>
+          <a:p>
+            <a:pPr marL="0" algn="r" defTabSz="914400" rtl="1" eaLnBrk="1" latinLnBrk="0" hangingPunct="1"/>
+            <a:endParaRPr lang="he-IL" dirty="0"/>
+          </a:p>
+          <a:p>
+            <a:pPr marL="0" algn="r" defTabSz="914400" rtl="1" eaLnBrk="1" latinLnBrk="0" hangingPunct="1"/>
+            <a:r>
+              <a:rPr lang="he-IL" dirty="0"/>
+              <a:t>הם מראים במאמר שהמודל הגדול הבסיסי, בלי </a:t>
+            </a:r>
+            <a:r>
+              <a:rPr lang="he-IL" dirty="0" err="1"/>
+              <a:t>טיונינג</a:t>
+            </a:r>
+            <a:r>
+              <a:rPr lang="he-IL" dirty="0"/>
+              <a:t>, כבר מציג יכולות לא רעות למעקב אחר הוראות, ומאימון קצר הוא משתפר מ-63 ל-68.</a:t>
+            </a:r>
+          </a:p>
+          <a:p>
+            <a:pPr marL="0" algn="r" defTabSz="914400" rtl="1" eaLnBrk="1" latinLnBrk="0" hangingPunct="1"/>
+            <a:endParaRPr lang="he-IL" dirty="0"/>
+          </a:p>
+          <a:p>
+            <a:pPr marL="0" marR="0" lvl="0" indent="0" algn="r" defTabSz="914400" rtl="1" eaLnBrk="1" fontAlgn="auto" latinLnBrk="0" hangingPunct="1">
+              <a:lnSpc>
+                <a:spcPct val="100000"/>
+              </a:lnSpc>
+              <a:spcBef>
+                <a:spcPts val="0"/>
+              </a:spcBef>
+              <a:spcAft>
+                <a:spcPts val="0"/>
+              </a:spcAft>
+              <a:buClrTx/>
+              <a:buSzTx/>
+              <a:buFontTx/>
+              <a:buNone/>
+              <a:tabLst/>
+              <a:defRPr/>
+            </a:pPr>
+            <a:r>
+              <a:rPr lang="he-IL" dirty="0"/>
+              <a:t>אגב, לדעתי אם הם היו ממש בטוחים בזה, הם היו מראים שהוא משתפר מהר בתצורה של </a:t>
+            </a:r>
+            <a:r>
+              <a:rPr lang="en-US" dirty="0"/>
+              <a:t>0-shot</a:t>
+            </a:r>
+            <a:r>
+              <a:rPr lang="he-IL" dirty="0"/>
+              <a:t>.</a:t>
+            </a:r>
+          </a:p>
+          <a:p>
+            <a:pPr marL="0" algn="r" defTabSz="914400" rtl="1" eaLnBrk="1" latinLnBrk="0" hangingPunct="1"/>
+            <a:endParaRPr lang="he-IL" dirty="0"/>
+          </a:p>
+          <a:p>
+            <a:pPr marL="0" algn="r" defTabSz="914400" rtl="1" eaLnBrk="1" latinLnBrk="0" hangingPunct="1"/>
+            <a:r>
+              <a:rPr lang="he-IL" dirty="0"/>
+              <a:t>בכל מקרה, אפשר גם לראות שהמודל משיג ביצועים לא רעים למול למודלים האחרים, אבל החוקרים מציינים שהמודל עדיין </a:t>
+            </a:r>
+            <a:r>
+              <a:rPr lang="he-IL"/>
+              <a:t>רחוק ממודל </a:t>
+            </a:r>
+            <a:r>
+              <a:rPr lang="he-IL" dirty="0"/>
+              <a:t>SOTA, שמשיג ציון 77 במבחן הזה.</a:t>
+            </a:r>
+          </a:p>
+          <a:p>
+            <a:pPr marL="0" algn="r" defTabSz="914400" rtl="1" eaLnBrk="1" latinLnBrk="0" hangingPunct="1"/>
+            <a:endParaRPr lang="he-IL" dirty="0"/>
+          </a:p>
+          <a:p>
+            <a:pPr marL="0" algn="r" defTabSz="914400" rtl="1" eaLnBrk="1" latinLnBrk="0" hangingPunct="1"/>
+            <a:r>
+              <a:rPr lang="he-IL" dirty="0"/>
+              <a:t>השיעור הנלמד כאן הוא שאפשר לאמן את </a:t>
+            </a:r>
+            <a:r>
+              <a:rPr lang="en-US" dirty="0"/>
+              <a:t>LLaMA</a:t>
+            </a:r>
+            <a:r>
+              <a:rPr lang="he-IL" dirty="0"/>
+              <a:t> למשימת מעקב אחר הוראות, משימה שהיא מקובלת בתחום.</a:t>
+            </a:r>
+            <a:endParaRPr lang="en-IL" dirty="0"/>
+          </a:p>
+        </p:txBody>
+      </p:sp>
+      <p:sp>
+        <p:nvSpPr>
+          <p:cNvPr id="4" name="Slide Number Placeholder 3"/>
+          <p:cNvSpPr>
+            <a:spLocks noGrp="1"/>
+          </p:cNvSpPr>
+          <p:nvPr>
+            <p:ph type="sldNum" sz="quarter" idx="5"/>
+          </p:nvPr>
+        </p:nvSpPr>
+        <p:spPr/>
+        <p:txBody>
+          <a:bodyPr/>
+          <a:lstStyle/>
+          <a:p>
+            <a:fld id="{476FFE5D-288A-DB4E-9912-CFF1A38B0A9A}" type="slidenum">
+              <a:rPr lang="en-IL" smtClean="0"/>
+              <a:t>15</a:t>
+            </a:fld>
+            <a:endParaRPr lang="en-IL"/>
+          </a:p>
+        </p:txBody>
+      </p:sp>
+    </p:spTree>
+    <p:extLst>
+      <p:ext uri="{BB962C8B-B14F-4D97-AF65-F5344CB8AC3E}">
+        <p14:creationId xmlns:p14="http://schemas.microsoft.com/office/powerpoint/2010/main" val="2811746247"/>
+      </p:ext>
+    </p:extLst>
+  </p:cSld>
+  <p:clrMapOvr>
+    <a:masterClrMapping/>
+  </p:clrMapOvr>
+</p:notes>
+</file>
+
+<file path=ppt/notesSlides/notesSlide15.xml><?xml version="1.0" encoding="utf-8"?>
+<p:notes xmlns:a="http://schemas.openxmlformats.org/drawingml/2006/main" xmlns:r="http://schemas.openxmlformats.org/officeDocument/2006/relationships" xmlns:p="http://schemas.openxmlformats.org/presentationml/2006/main">
+  <p:cSld>
+    <p:spTree>
+      <p:nvGrpSpPr>
+        <p:cNvPr id="1" name=""/>
+        <p:cNvGrpSpPr/>
+        <p:nvPr/>
+      </p:nvGrpSpPr>
+      <p:grpSpPr>
+        <a:xfrm>
+          <a:off x="0" y="0"/>
+          <a:ext cx="0" cy="0"/>
+          <a:chOff x="0" y="0"/>
+          <a:chExt cx="0" cy="0"/>
+        </a:xfrm>
+      </p:grpSpPr>
+      <p:sp>
+        <p:nvSpPr>
+          <p:cNvPr id="2" name="Slide Image Placeholder 1"/>
+          <p:cNvSpPr>
+            <a:spLocks noGrp="1" noRot="1" noChangeAspect="1"/>
+          </p:cNvSpPr>
+          <p:nvPr>
+            <p:ph type="sldImg"/>
+          </p:nvPr>
+        </p:nvSpPr>
+        <p:spPr/>
+      </p:sp>
+      <p:sp>
+        <p:nvSpPr>
+          <p:cNvPr id="3" name="Notes Placeholder 2"/>
+          <p:cNvSpPr>
+            <a:spLocks noGrp="1"/>
+          </p:cNvSpPr>
+          <p:nvPr>
+            <p:ph type="body" idx="1"/>
+          </p:nvPr>
+        </p:nvSpPr>
+        <p:spPr/>
+        <p:txBody>
+          <a:bodyPr/>
+          <a:lstStyle/>
+          <a:p>
+            <a:pPr marL="0" algn="r" defTabSz="914400" rtl="1" eaLnBrk="1" latinLnBrk="0" hangingPunct="1"/>
+            <a:r>
+              <a:rPr lang="he-IL" dirty="0" err="1"/>
+              <a:t>במטריקה</a:t>
+            </a:r>
+            <a:r>
+              <a:rPr lang="he-IL" dirty="0"/>
+              <a:t> הבאה, החוקרים בודקים כמה המודל הוא משוחד, רעיל (פוגעני) או שקרן.</a:t>
+            </a:r>
+          </a:p>
+          <a:p>
+            <a:pPr marL="0" algn="r" defTabSz="914400" rtl="1" eaLnBrk="1" latinLnBrk="0" hangingPunct="1"/>
+            <a:endParaRPr lang="he-IL" dirty="0"/>
+          </a:p>
+          <a:p>
+            <a:pPr marL="0" algn="r" defTabSz="914400" rtl="1" eaLnBrk="1" latinLnBrk="0" hangingPunct="1"/>
+            <a:r>
+              <a:rPr lang="he-IL" dirty="0"/>
+              <a:t>מודלי שפה גדולים מאומנים על הרבה מאוד תוכן מהאינטרנט ומספרים, ומטבעו השל התוכן הזה, הוא מוטה, בין אם בגלל שאנשים באינטרנט משקרים, לבין אם בגלל הטיות אמיתיות שיש בעולם שלנו, כמו למשל שרוב האחריות בבתי החולים הן בנות.</a:t>
+            </a:r>
+          </a:p>
+          <a:p>
+            <a:pPr marL="0" algn="r" defTabSz="914400" rtl="1" eaLnBrk="1" latinLnBrk="0" hangingPunct="1"/>
+            <a:endParaRPr lang="he-IL" dirty="0"/>
+          </a:p>
+          <a:p>
+            <a:pPr marL="0" algn="r" defTabSz="914400" rtl="1" eaLnBrk="1" latinLnBrk="0" hangingPunct="1"/>
+            <a:r>
+              <a:rPr lang="he-IL" dirty="0"/>
+              <a:t>אז </a:t>
+            </a:r>
+            <a:r>
+              <a:rPr lang="he-IL" dirty="0" err="1"/>
+              <a:t>המטריקה</a:t>
+            </a:r>
+            <a:r>
+              <a:rPr lang="he-IL" dirty="0"/>
+              <a:t> הזו באה לבדוק כמה המודל שלהם מכיל הטיות כאלה, וספוילר, הוא לא שונה מהאחרים.</a:t>
+            </a:r>
+          </a:p>
+          <a:p>
+            <a:pPr marL="0" algn="r" defTabSz="914400" rtl="1" eaLnBrk="1" latinLnBrk="0" hangingPunct="1"/>
+            <a:endParaRPr lang="he-IL" dirty="0"/>
+          </a:p>
+          <a:p>
+            <a:pPr marL="0" algn="r" defTabSz="914400" rtl="1" eaLnBrk="1" latinLnBrk="0" hangingPunct="1"/>
+            <a:r>
+              <a:rPr lang="he-IL" dirty="0"/>
+              <a:t>הם מדגישים במאמר שאין עדיין מטריקות מספיק טובות כדי למדוד את הדברים האלה, בטח בהשוואה למודלים אחרים.</a:t>
+            </a:r>
+          </a:p>
+          <a:p>
+            <a:pPr marL="0" algn="r" defTabSz="914400" rtl="1" eaLnBrk="1" latinLnBrk="0" hangingPunct="1"/>
+            <a:endParaRPr lang="he-IL" dirty="0"/>
+          </a:p>
+          <a:p>
+            <a:pPr marL="0" algn="r" defTabSz="914400" rtl="1" eaLnBrk="1" latinLnBrk="0" hangingPunct="1"/>
+            <a:r>
+              <a:rPr lang="he-IL" dirty="0"/>
+              <a:t>כלומר, הם יכולים לבחון את </a:t>
+            </a:r>
+            <a:r>
+              <a:rPr lang="en-US" dirty="0"/>
+              <a:t>LLaMA</a:t>
+            </a:r>
+            <a:r>
+              <a:rPr lang="he-IL" dirty="0"/>
+              <a:t> אבל קשה להם להשוות תנאים </a:t>
+            </a:r>
+            <a:r>
+              <a:rPr lang="he-IL" dirty="0" err="1"/>
+              <a:t>לאיך</a:t>
+            </a:r>
+            <a:r>
+              <a:rPr lang="he-IL" dirty="0"/>
+              <a:t> שמדדו לצורך העניין את GPT.</a:t>
+            </a:r>
+          </a:p>
+        </p:txBody>
+      </p:sp>
+      <p:sp>
+        <p:nvSpPr>
+          <p:cNvPr id="4" name="Slide Number Placeholder 3"/>
+          <p:cNvSpPr>
+            <a:spLocks noGrp="1"/>
+          </p:cNvSpPr>
+          <p:nvPr>
+            <p:ph type="sldNum" sz="quarter" idx="5"/>
+          </p:nvPr>
+        </p:nvSpPr>
+        <p:spPr/>
+        <p:txBody>
+          <a:bodyPr/>
+          <a:lstStyle/>
+          <a:p>
+            <a:fld id="{476FFE5D-288A-DB4E-9912-CFF1A38B0A9A}" type="slidenum">
+              <a:rPr lang="en-IL" smtClean="0"/>
+              <a:t>16</a:t>
+            </a:fld>
+            <a:endParaRPr lang="en-IL"/>
+          </a:p>
+        </p:txBody>
+      </p:sp>
+    </p:spTree>
+    <p:extLst>
+      <p:ext uri="{BB962C8B-B14F-4D97-AF65-F5344CB8AC3E}">
+        <p14:creationId xmlns:p14="http://schemas.microsoft.com/office/powerpoint/2010/main" val="3309999211"/>
+      </p:ext>
+    </p:extLst>
+  </p:cSld>
+  <p:clrMapOvr>
+    <a:masterClrMapping/>
+  </p:clrMapOvr>
+</p:notes>
+</file>
+
+<file path=ppt/notesSlides/notesSlide16.xml><?xml version="1.0" encoding="utf-8"?>
+<p:notes xmlns:a="http://schemas.openxmlformats.org/drawingml/2006/main" xmlns:r="http://schemas.openxmlformats.org/officeDocument/2006/relationships" xmlns:p="http://schemas.openxmlformats.org/presentationml/2006/main">
+  <p:cSld>
+    <p:spTree>
+      <p:nvGrpSpPr>
+        <p:cNvPr id="1" name=""/>
+        <p:cNvGrpSpPr/>
+        <p:nvPr/>
+      </p:nvGrpSpPr>
+      <p:grpSpPr>
+        <a:xfrm>
+          <a:off x="0" y="0"/>
+          <a:ext cx="0" cy="0"/>
+          <a:chOff x="0" y="0"/>
+          <a:chExt cx="0" cy="0"/>
+        </a:xfrm>
+      </p:grpSpPr>
+      <p:sp>
+        <p:nvSpPr>
+          <p:cNvPr id="2" name="Slide Image Placeholder 1"/>
+          <p:cNvSpPr>
+            <a:spLocks noGrp="1" noRot="1" noChangeAspect="1"/>
+          </p:cNvSpPr>
+          <p:nvPr>
+            <p:ph type="sldImg"/>
+          </p:nvPr>
+        </p:nvSpPr>
+        <p:spPr/>
+      </p:sp>
+      <p:sp>
+        <p:nvSpPr>
+          <p:cNvPr id="3" name="Notes Placeholder 2"/>
+          <p:cNvSpPr>
+            <a:spLocks noGrp="1"/>
+          </p:cNvSpPr>
+          <p:nvPr>
+            <p:ph type="body" idx="1"/>
+          </p:nvPr>
+        </p:nvSpPr>
+        <p:spPr/>
+        <p:txBody>
+          <a:bodyPr/>
+          <a:lstStyle/>
+          <a:p>
+            <a:pPr marL="0" algn="r" defTabSz="914400" rtl="1" eaLnBrk="1" latinLnBrk="0" hangingPunct="1"/>
+            <a:r>
+              <a:rPr lang="he-IL" dirty="0"/>
+              <a:t>אז הטוקסיות של המודל, או הרעילות, או הכמה הוא מעליב, נמדדת באמצעות </a:t>
+            </a:r>
+            <a:r>
+              <a:rPr lang="he-IL" dirty="0" err="1"/>
+              <a:t>דאטאסט</a:t>
+            </a:r>
+            <a:r>
+              <a:rPr lang="he-IL" dirty="0"/>
+              <a:t> שמכיל </a:t>
+            </a:r>
+            <a:r>
+              <a:rPr lang="he-IL" dirty="0" err="1"/>
+              <a:t>פרומפטים</a:t>
+            </a:r>
+            <a:r>
+              <a:rPr lang="he-IL" dirty="0"/>
+              <a:t>, ועל כל </a:t>
+            </a:r>
+            <a:r>
+              <a:rPr lang="he-IL" dirty="0" err="1"/>
+              <a:t>פרומפט</a:t>
+            </a:r>
+            <a:r>
+              <a:rPr lang="he-IL" dirty="0"/>
+              <a:t> התשובה של המודל נשלחת ל-API שכנקרא </a:t>
+            </a:r>
+            <a:r>
+              <a:rPr lang="en-US" dirty="0" err="1"/>
+              <a:t>PerspectiveAPI</a:t>
+            </a:r>
+            <a:r>
+              <a:rPr lang="he-IL" dirty="0"/>
+              <a:t> שמחזיר מספק בין 0 ל-1, כאשר מספר נמוך יותר זה טוב יותר.</a:t>
+            </a:r>
+          </a:p>
+          <a:p>
+            <a:pPr marL="0" algn="r" defTabSz="914400" rtl="1" eaLnBrk="1" latinLnBrk="0" hangingPunct="1"/>
+            <a:endParaRPr lang="he-IL" dirty="0"/>
+          </a:p>
+          <a:p>
+            <a:pPr marL="0" algn="r" defTabSz="914400" rtl="1" eaLnBrk="1" latinLnBrk="0" hangingPunct="1"/>
+            <a:r>
+              <a:rPr lang="he-IL" dirty="0"/>
+              <a:t>יש שתי תצורות לניסוי הזה, אחת היא לקחת את </a:t>
+            </a:r>
+            <a:r>
+              <a:rPr lang="he-IL" dirty="0" err="1"/>
+              <a:t>הפרומפט</a:t>
+            </a:r>
+            <a:r>
+              <a:rPr lang="he-IL" dirty="0"/>
+              <a:t> כמו שהוא ולשלוח למודל,</a:t>
+            </a:r>
+          </a:p>
+          <a:p>
+            <a:pPr marL="0" algn="r" defTabSz="914400" rtl="1" eaLnBrk="1" latinLnBrk="0" hangingPunct="1"/>
+            <a:r>
+              <a:rPr lang="he-IL" dirty="0"/>
+              <a:t>והשנייה היא לעטוף את </a:t>
+            </a:r>
+            <a:r>
+              <a:rPr lang="he-IL" dirty="0" err="1"/>
+              <a:t>הפרומפט</a:t>
+            </a:r>
+            <a:r>
+              <a:rPr lang="he-IL" dirty="0"/>
+              <a:t> ב-</a:t>
+            </a:r>
+            <a:r>
+              <a:rPr lang="en-US" dirty="0"/>
+              <a:t>system prompt</a:t>
+            </a:r>
+            <a:r>
+              <a:rPr lang="he-IL" dirty="0"/>
+              <a:t> שמבקש מהמודל להיות מכבד.</a:t>
+            </a:r>
+          </a:p>
+          <a:p>
+            <a:pPr marL="0" algn="r" defTabSz="914400" rtl="1" eaLnBrk="1" latinLnBrk="0" hangingPunct="1"/>
+            <a:endParaRPr lang="he-IL" dirty="0"/>
+          </a:p>
+          <a:p>
+            <a:pPr marL="0" algn="r" defTabSz="914400" rtl="1" eaLnBrk="1" latinLnBrk="0" hangingPunct="1"/>
+            <a:r>
+              <a:rPr lang="he-IL" dirty="0"/>
+              <a:t>לטענת החוקרים, המודל רעיל כמו מודלים בסדר הגודל שלו.</a:t>
+            </a:r>
+          </a:p>
+          <a:p>
+            <a:pPr marL="0" algn="r" defTabSz="914400" rtl="1" eaLnBrk="1" latinLnBrk="0" hangingPunct="1"/>
+            <a:endParaRPr lang="he-IL" dirty="0"/>
+          </a:p>
+          <a:p>
+            <a:pPr marL="0" algn="r" defTabSz="914400" rtl="1" eaLnBrk="1" latinLnBrk="0" hangingPunct="1"/>
+            <a:r>
+              <a:rPr lang="he-IL" dirty="0"/>
+              <a:t>אבל מה שמעניין הוא שככל שהמודל גדל, כך הוא הופך ליותר רעיל, אפשר לראות את זה גם בעמודה של </a:t>
+            </a:r>
+            <a:r>
+              <a:rPr lang="en-US" dirty="0"/>
+              <a:t>basic</a:t>
+            </a:r>
+            <a:r>
+              <a:rPr lang="he-IL" dirty="0"/>
+              <a:t> וגם בעמודה של </a:t>
+            </a:r>
+            <a:r>
+              <a:rPr lang="en-US" dirty="0"/>
+              <a:t>respectful</a:t>
+            </a:r>
+            <a:r>
+              <a:rPr lang="he-IL" dirty="0"/>
+              <a:t>,</a:t>
+            </a:r>
+          </a:p>
+          <a:p>
+            <a:pPr marL="0" algn="r" defTabSz="914400" rtl="1" eaLnBrk="1" latinLnBrk="0" hangingPunct="1"/>
+            <a:r>
+              <a:rPr lang="he-IL" dirty="0"/>
+              <a:t>אבל מה שממש מצחיק, זה שדווקא המודל "הכי חכם", נהיה חצוף יותר כשמבקשים ממנו להיות מכבד, ואם זה לא התנהגות אנושית, אז מה כן? חח</a:t>
+            </a:r>
+          </a:p>
+          <a:p>
+            <a:pPr marL="0" algn="r" defTabSz="914400" rtl="1" eaLnBrk="1" latinLnBrk="0" hangingPunct="1"/>
+            <a:endParaRPr lang="he-IL" dirty="0"/>
+          </a:p>
+          <a:p>
+            <a:pPr marL="0" algn="r" defTabSz="914400" rtl="1" eaLnBrk="1" latinLnBrk="0" hangingPunct="1"/>
+            <a:r>
+              <a:rPr lang="he-IL" dirty="0"/>
+              <a:t>החוקרים מתלוננים במאמר על זה שקשה למדוד את הרעילות של המודל למול המתחרים שלו, בגלל כל מיני אסטרטגיות </a:t>
+            </a:r>
+            <a:r>
+              <a:rPr lang="en-US" dirty="0"/>
+              <a:t>sampling</a:t>
+            </a:r>
+            <a:r>
+              <a:rPr lang="he-IL" dirty="0"/>
+              <a:t> וגרסאות שונות של API על פני מאמרים.</a:t>
+            </a:r>
+            <a:endParaRPr lang="en-IL" dirty="0"/>
+          </a:p>
+        </p:txBody>
+      </p:sp>
+      <p:sp>
+        <p:nvSpPr>
+          <p:cNvPr id="4" name="Slide Number Placeholder 3"/>
+          <p:cNvSpPr>
+            <a:spLocks noGrp="1"/>
+          </p:cNvSpPr>
+          <p:nvPr>
+            <p:ph type="sldNum" sz="quarter" idx="5"/>
+          </p:nvPr>
+        </p:nvSpPr>
+        <p:spPr/>
+        <p:txBody>
+          <a:bodyPr/>
+          <a:lstStyle/>
+          <a:p>
+            <a:fld id="{476FFE5D-288A-DB4E-9912-CFF1A38B0A9A}" type="slidenum">
+              <a:rPr lang="en-IL" smtClean="0"/>
+              <a:t>17</a:t>
+            </a:fld>
+            <a:endParaRPr lang="en-IL"/>
+          </a:p>
+        </p:txBody>
+      </p:sp>
+    </p:spTree>
+    <p:extLst>
+      <p:ext uri="{BB962C8B-B14F-4D97-AF65-F5344CB8AC3E}">
+        <p14:creationId xmlns:p14="http://schemas.microsoft.com/office/powerpoint/2010/main" val="3829042832"/>
+      </p:ext>
+    </p:extLst>
+  </p:cSld>
+  <p:clrMapOvr>
+    <a:masterClrMapping/>
+  </p:clrMapOvr>
+</p:notes>
+</file>
+
+<file path=ppt/notesSlides/notesSlide17.xml><?xml version="1.0" encoding="utf-8"?>
+<p:notes xmlns:a="http://schemas.openxmlformats.org/drawingml/2006/main" xmlns:r="http://schemas.openxmlformats.org/officeDocument/2006/relationships" xmlns:p="http://schemas.openxmlformats.org/presentationml/2006/main">
+  <p:cSld>
+    <p:spTree>
+      <p:nvGrpSpPr>
+        <p:cNvPr id="1" name=""/>
+        <p:cNvGrpSpPr/>
+        <p:nvPr/>
+      </p:nvGrpSpPr>
+      <p:grpSpPr>
+        <a:xfrm>
+          <a:off x="0" y="0"/>
+          <a:ext cx="0" cy="0"/>
+          <a:chOff x="0" y="0"/>
+          <a:chExt cx="0" cy="0"/>
+        </a:xfrm>
+      </p:grpSpPr>
+      <p:sp>
+        <p:nvSpPr>
+          <p:cNvPr id="2" name="Slide Image Placeholder 1"/>
+          <p:cNvSpPr>
+            <a:spLocks noGrp="1" noRot="1" noChangeAspect="1"/>
+          </p:cNvSpPr>
+          <p:nvPr>
+            <p:ph type="sldImg"/>
+          </p:nvPr>
+        </p:nvSpPr>
+        <p:spPr/>
+      </p:sp>
+      <p:sp>
+        <p:nvSpPr>
+          <p:cNvPr id="3" name="Notes Placeholder 2"/>
+          <p:cNvSpPr>
+            <a:spLocks noGrp="1"/>
+          </p:cNvSpPr>
+          <p:nvPr>
+            <p:ph type="body" idx="1"/>
+          </p:nvPr>
+        </p:nvSpPr>
+        <p:spPr/>
+        <p:txBody>
+          <a:bodyPr/>
+          <a:lstStyle/>
+          <a:p>
+            <a:pPr marL="0" algn="r" defTabSz="914400" rtl="1" eaLnBrk="1" latinLnBrk="0" hangingPunct="1"/>
+            <a:r>
+              <a:rPr lang="he-IL" dirty="0" err="1"/>
+              <a:t>המטריקה</a:t>
+            </a:r>
+            <a:r>
+              <a:rPr lang="he-IL" dirty="0"/>
+              <a:t> הבאה נועדה להעריך עד כמה מודל נוטה לסטריאוטיפים, בתשע קטגוריות שונות.</a:t>
+            </a:r>
+          </a:p>
+          <a:p>
+            <a:pPr marL="0" algn="r" defTabSz="914400" rtl="1" eaLnBrk="1" latinLnBrk="0" hangingPunct="1"/>
+            <a:endParaRPr lang="he-IL" dirty="0"/>
+          </a:p>
+          <a:p>
+            <a:pPr marL="0" algn="r" defTabSz="914400" rtl="1" eaLnBrk="1" latinLnBrk="0" hangingPunct="1"/>
+            <a:r>
+              <a:rPr lang="he-IL" dirty="0"/>
+              <a:t>כל דוגמה </a:t>
+            </a:r>
+            <a:r>
+              <a:rPr lang="he-IL" dirty="0" err="1"/>
+              <a:t>בדאטאסט</a:t>
+            </a:r>
+            <a:r>
+              <a:rPr lang="he-IL" dirty="0"/>
+              <a:t> כוללת זוג משפטים שההבדל ביניהם הוא מילה או ביטוי אחד בלבד.</a:t>
+            </a:r>
+          </a:p>
+          <a:p>
+            <a:pPr marL="0" algn="r" defTabSz="914400" rtl="1" eaLnBrk="1" latinLnBrk="0" hangingPunct="1"/>
+            <a:endParaRPr lang="he-IL" dirty="0"/>
+          </a:p>
+          <a:p>
+            <a:pPr marL="0" algn="r" defTabSz="914400" rtl="1" eaLnBrk="1" latinLnBrk="0" hangingPunct="1"/>
+            <a:r>
+              <a:rPr lang="he-IL" dirty="0"/>
+              <a:t>בוחנים את המודל על ידי שאלה כמו: איזה מהמשפטים נשמע </a:t>
+            </a:r>
+            <a:r>
+              <a:rPr lang="he-IL" dirty="0" err="1"/>
+              <a:t>נייטרלי</a:t>
+            </a:r>
+            <a:r>
+              <a:rPr lang="he-IL" dirty="0"/>
+              <a:t> יותר?</a:t>
+            </a:r>
+          </a:p>
+          <a:p>
+            <a:pPr marL="0" algn="r" defTabSz="914400" rtl="1" eaLnBrk="1" latinLnBrk="0" hangingPunct="1"/>
+            <a:r>
+              <a:rPr lang="he-IL" dirty="0"/>
+              <a:t>לאחר מכן, מודדים את ה-</a:t>
+            </a:r>
+            <a:r>
+              <a:rPr lang="en-US" dirty="0"/>
+              <a:t>perplexity</a:t>
+            </a:r>
+            <a:r>
+              <a:rPr lang="he-IL" dirty="0"/>
+              <a:t> של התשובה - בין אם טוקן-טוקן או על כל המשפט כולו.</a:t>
+            </a:r>
+          </a:p>
+          <a:p>
+            <a:pPr marL="0" algn="r" defTabSz="914400" rtl="1" eaLnBrk="1" latinLnBrk="0" hangingPunct="1"/>
+            <a:endParaRPr lang="he-IL" dirty="0"/>
+          </a:p>
+          <a:p>
+            <a:pPr marL="0" algn="r" defTabSz="914400" rtl="1" eaLnBrk="1" latinLnBrk="0" hangingPunct="1"/>
+            <a:r>
+              <a:rPr lang="he-IL" dirty="0"/>
+              <a:t>לצורך העניין, יש פה דוגמה מהמאמר שמציג את </a:t>
+            </a:r>
+            <a:r>
+              <a:rPr lang="he-IL" dirty="0" err="1"/>
+              <a:t>המטריקה</a:t>
+            </a:r>
+            <a:r>
+              <a:rPr lang="he-IL" dirty="0"/>
+              <a:t> הזאת, אז יש פה שני משפטים עם הבדל של מילה אחת, של שם, ונניח שהמודל הציג </a:t>
+            </a:r>
+            <a:r>
+              <a:rPr lang="en-US" dirty="0"/>
+              <a:t>perplexity</a:t>
+            </a:r>
+            <a:r>
+              <a:rPr lang="he-IL" dirty="0"/>
+              <a:t> של 0.3 עבור </a:t>
+            </a:r>
+            <a:r>
+              <a:rPr lang="he-IL" dirty="0" err="1"/>
+              <a:t>J</a:t>
+            </a:r>
+            <a:r>
+              <a:rPr lang="en-US" dirty="0" err="1"/>
+              <a:t>ames</a:t>
+            </a:r>
+            <a:r>
+              <a:rPr lang="he-IL" dirty="0"/>
+              <a:t> ו-0.1 עבור </a:t>
+            </a:r>
+            <a:r>
+              <a:rPr lang="en-US" dirty="0"/>
+              <a:t>Judy</a:t>
+            </a:r>
+            <a:r>
+              <a:rPr lang="he-IL" dirty="0"/>
+              <a:t>, אז אפשר להגיד שהוא מוטה, כי למה שדני יצטרך לשכנע את </a:t>
+            </a:r>
+            <a:r>
+              <a:rPr lang="he-IL" dirty="0" err="1"/>
+              <a:t>J</a:t>
+            </a:r>
+            <a:r>
+              <a:rPr lang="en-US" dirty="0" err="1"/>
+              <a:t>ames</a:t>
+            </a:r>
+            <a:r>
+              <a:rPr lang="he-IL" dirty="0"/>
+              <a:t> לצפות בפוטבול, הרי הוא בן ויותר סביר שבנים ירצו לראות פוטבול מבנות כמו </a:t>
+            </a:r>
+            <a:r>
+              <a:rPr lang="he-IL" dirty="0" err="1"/>
+              <a:t>J</a:t>
+            </a:r>
+            <a:r>
+              <a:rPr lang="en-US" dirty="0" err="1"/>
+              <a:t>udy</a:t>
+            </a:r>
+            <a:r>
+              <a:rPr lang="he-IL" dirty="0"/>
+              <a:t>.</a:t>
+            </a:r>
+          </a:p>
+          <a:p>
+            <a:pPr marL="0" algn="r" defTabSz="914400" rtl="1" eaLnBrk="1" latinLnBrk="0" hangingPunct="1"/>
+            <a:endParaRPr lang="he-IL" dirty="0"/>
+          </a:p>
+          <a:p>
+            <a:pPr marL="0" algn="r" defTabSz="914400" rtl="1" eaLnBrk="1" latinLnBrk="0" hangingPunct="1"/>
+            <a:r>
+              <a:rPr lang="he-IL" dirty="0"/>
+              <a:t>בכל מקרה, החוקרים טוענים ש-</a:t>
+            </a:r>
+            <a:r>
+              <a:rPr lang="en-US" dirty="0"/>
+              <a:t>LLaMA</a:t>
+            </a:r>
+            <a:r>
+              <a:rPr lang="he-IL" dirty="0"/>
+              <a:t> קצת יותר טוב ממודלים בסדר גודל של </a:t>
+            </a:r>
+            <a:r>
+              <a:rPr lang="en-US" dirty="0"/>
+              <a:t>175B</a:t>
+            </a:r>
+            <a:r>
+              <a:rPr lang="he-IL" dirty="0"/>
+              <a:t>, ומודים שהוא קצת יותר משוחד בנושאי דת, גיל ומגדר.</a:t>
+            </a:r>
+          </a:p>
+          <a:p>
+            <a:pPr marL="0" algn="r" defTabSz="914400" rtl="1" eaLnBrk="1" latinLnBrk="0" hangingPunct="1"/>
+            <a:endParaRPr lang="he-IL" dirty="0"/>
+          </a:p>
+          <a:p>
+            <a:pPr marL="0" algn="r" defTabSz="914400" rtl="1" eaLnBrk="1" latinLnBrk="0" hangingPunct="1"/>
+            <a:r>
+              <a:rPr lang="he-IL" dirty="0"/>
+              <a:t>הם מייחסים את ההטיות האלה ל-</a:t>
+            </a:r>
+            <a:r>
+              <a:rPr lang="en-US" dirty="0"/>
+              <a:t>training set</a:t>
+            </a:r>
+            <a:r>
+              <a:rPr lang="he-IL" dirty="0"/>
+              <a:t> המרכזי של </a:t>
+            </a:r>
+            <a:r>
+              <a:rPr lang="en-US" dirty="0"/>
+              <a:t>LLaMA</a:t>
+            </a:r>
+            <a:r>
+              <a:rPr lang="he-IL" dirty="0"/>
+              <a:t> הוא </a:t>
+            </a:r>
+            <a:r>
+              <a:rPr lang="en-US" dirty="0"/>
+              <a:t>CommonCrawl</a:t>
+            </a:r>
+            <a:r>
+              <a:rPr lang="he-IL" dirty="0"/>
+              <a:t>, שהוא מגלם בתוכו הרבה מההטיות האלה, למרות כל ניסיונות </a:t>
+            </a:r>
+            <a:r>
+              <a:rPr lang="he-IL" dirty="0" err="1"/>
+              <a:t>הפילטור</a:t>
+            </a:r>
+            <a:r>
+              <a:rPr lang="he-IL" dirty="0"/>
+              <a:t>.</a:t>
+            </a:r>
+          </a:p>
+        </p:txBody>
+      </p:sp>
+      <p:sp>
+        <p:nvSpPr>
+          <p:cNvPr id="4" name="Slide Number Placeholder 3"/>
+          <p:cNvSpPr>
+            <a:spLocks noGrp="1"/>
+          </p:cNvSpPr>
+          <p:nvPr>
+            <p:ph type="sldNum" sz="quarter" idx="5"/>
+          </p:nvPr>
+        </p:nvSpPr>
+        <p:spPr/>
+        <p:txBody>
+          <a:bodyPr/>
+          <a:lstStyle/>
+          <a:p>
+            <a:fld id="{476FFE5D-288A-DB4E-9912-CFF1A38B0A9A}" type="slidenum">
+              <a:rPr lang="en-IL" smtClean="0"/>
+              <a:t>18</a:t>
+            </a:fld>
+            <a:endParaRPr lang="en-IL"/>
+          </a:p>
+        </p:txBody>
+      </p:sp>
+    </p:spTree>
+    <p:extLst>
+      <p:ext uri="{BB962C8B-B14F-4D97-AF65-F5344CB8AC3E}">
+        <p14:creationId xmlns:p14="http://schemas.microsoft.com/office/powerpoint/2010/main" val="1865403342"/>
+      </p:ext>
+    </p:extLst>
+  </p:cSld>
+  <p:clrMapOvr>
+    <a:masterClrMapping/>
+  </p:clrMapOvr>
+</p:notes>
+</file>
+
+<file path=ppt/notesSlides/notesSlide18.xml><?xml version="1.0" encoding="utf-8"?>
+<p:notes xmlns:a="http://schemas.openxmlformats.org/drawingml/2006/main" xmlns:r="http://schemas.openxmlformats.org/officeDocument/2006/relationships" xmlns:p="http://schemas.openxmlformats.org/presentationml/2006/main">
+  <p:cSld>
+    <p:spTree>
+      <p:nvGrpSpPr>
+        <p:cNvPr id="1" name=""/>
+        <p:cNvGrpSpPr/>
+        <p:nvPr/>
+      </p:nvGrpSpPr>
+      <p:grpSpPr>
+        <a:xfrm>
+          <a:off x="0" y="0"/>
+          <a:ext cx="0" cy="0"/>
+          <a:chOff x="0" y="0"/>
+          <a:chExt cx="0" cy="0"/>
+        </a:xfrm>
+      </p:grpSpPr>
+      <p:sp>
+        <p:nvSpPr>
+          <p:cNvPr id="2" name="Slide Image Placeholder 1"/>
+          <p:cNvSpPr>
+            <a:spLocks noGrp="1" noRot="1" noChangeAspect="1"/>
+          </p:cNvSpPr>
+          <p:nvPr>
+            <p:ph type="sldImg"/>
+          </p:nvPr>
+        </p:nvSpPr>
+        <p:spPr/>
+      </p:sp>
+      <p:sp>
+        <p:nvSpPr>
+          <p:cNvPr id="3" name="Notes Placeholder 2"/>
+          <p:cNvSpPr>
+            <a:spLocks noGrp="1"/>
+          </p:cNvSpPr>
+          <p:nvPr>
+            <p:ph type="body" idx="1"/>
+          </p:nvPr>
+        </p:nvSpPr>
+        <p:spPr/>
+        <p:txBody>
+          <a:bodyPr/>
+          <a:lstStyle/>
+          <a:p>
+            <a:pPr marL="0" algn="r" defTabSz="914400" rtl="1" eaLnBrk="1" latinLnBrk="0" hangingPunct="1"/>
+            <a:r>
+              <a:rPr lang="he-IL" dirty="0" err="1"/>
+              <a:t>המטריקה</a:t>
+            </a:r>
+            <a:r>
+              <a:rPr lang="he-IL" dirty="0"/>
+              <a:t> הזאת</a:t>
+            </a:r>
+            <a:endParaRPr lang="en-IL" dirty="0"/>
+          </a:p>
+        </p:txBody>
+      </p:sp>
+      <p:sp>
+        <p:nvSpPr>
+          <p:cNvPr id="4" name="Slide Number Placeholder 3"/>
+          <p:cNvSpPr>
+            <a:spLocks noGrp="1"/>
+          </p:cNvSpPr>
+          <p:nvPr>
+            <p:ph type="sldNum" sz="quarter" idx="5"/>
+          </p:nvPr>
+        </p:nvSpPr>
+        <p:spPr/>
+        <p:txBody>
+          <a:bodyPr/>
+          <a:lstStyle/>
+          <a:p>
+            <a:fld id="{476FFE5D-288A-DB4E-9912-CFF1A38B0A9A}" type="slidenum">
+              <a:rPr lang="en-IL" smtClean="0"/>
+              <a:t>19</a:t>
+            </a:fld>
+            <a:endParaRPr lang="en-IL"/>
+          </a:p>
+        </p:txBody>
+      </p:sp>
+    </p:spTree>
+    <p:extLst>
+      <p:ext uri="{BB962C8B-B14F-4D97-AF65-F5344CB8AC3E}">
+        <p14:creationId xmlns:p14="http://schemas.microsoft.com/office/powerpoint/2010/main" val="978839723"/>
+      </p:ext>
+    </p:extLst>
+  </p:cSld>
+  <p:clrMapOvr>
+    <a:masterClrMapping/>
+  </p:clrMapOvr>
+</p:notes>
+</file>
+
+<file path=ppt/notesSlides/notesSlide2.xml><?xml version="1.0" encoding="utf-8"?>
+<p:notes xmlns:a="http://schemas.openxmlformats.org/drawingml/2006/main" xmlns:r="http://schemas.openxmlformats.org/officeDocument/2006/relationships" xmlns:p="http://schemas.openxmlformats.org/presentationml/2006/main">
+  <p:cSld>
+    <p:spTree>
+      <p:nvGrpSpPr>
+        <p:cNvPr id="1" name=""/>
+        <p:cNvGrpSpPr/>
+        <p:nvPr/>
+      </p:nvGrpSpPr>
+      <p:grpSpPr>
+        <a:xfrm>
+          <a:off x="0" y="0"/>
+          <a:ext cx="0" cy="0"/>
+          <a:chOff x="0" y="0"/>
+          <a:chExt cx="0" cy="0"/>
+        </a:xfrm>
+      </p:grpSpPr>
+      <p:sp>
+        <p:nvSpPr>
+          <p:cNvPr id="2" name="Slide Image Placeholder 1"/>
+          <p:cNvSpPr>
+            <a:spLocks noGrp="1" noRot="1" noChangeAspect="1"/>
+          </p:cNvSpPr>
+          <p:nvPr>
+            <p:ph type="sldImg"/>
+          </p:nvPr>
+        </p:nvSpPr>
+        <p:spPr/>
+      </p:sp>
+      <p:sp>
+        <p:nvSpPr>
+          <p:cNvPr id="3" name="Notes Placeholder 2"/>
+          <p:cNvSpPr>
+            <a:spLocks noGrp="1"/>
+          </p:cNvSpPr>
+          <p:nvPr>
+            <p:ph type="body" idx="1"/>
+          </p:nvPr>
+        </p:nvSpPr>
+        <p:spPr/>
+        <p:txBody>
+          <a:bodyPr/>
+          <a:lstStyle/>
+          <a:p>
+            <a:pPr algn="r" rtl="1"/>
+            <a:r>
+              <a:rPr lang="he-IL" sz="1200" kern="1200" dirty="0">
+                <a:solidFill>
+                  <a:schemeClr val="tx1"/>
+                </a:solidFill>
+                <a:latin typeface="+mn-lt"/>
+                <a:ea typeface="+mn-ea"/>
+                <a:cs typeface="+mn-cs"/>
+              </a:rPr>
+              <a:t>אוקיי, אז בואו נתחיל מלדבר על שיטת </a:t>
+            </a:r>
+            <a:r>
+              <a:rPr lang="he-IL" sz="1200" kern="1200" dirty="0" err="1">
+                <a:solidFill>
+                  <a:schemeClr val="tx1"/>
+                </a:solidFill>
+                <a:latin typeface="+mn-lt"/>
+                <a:ea typeface="+mn-ea"/>
+                <a:cs typeface="+mn-cs"/>
+              </a:rPr>
+              <a:t>האבלואציה</a:t>
+            </a:r>
+            <a:r>
+              <a:rPr lang="he-IL" sz="1200" kern="1200" dirty="0">
+                <a:solidFill>
+                  <a:schemeClr val="tx1"/>
+                </a:solidFill>
+                <a:latin typeface="+mn-lt"/>
+                <a:ea typeface="+mn-ea"/>
+                <a:cs typeface="+mn-cs"/>
+              </a:rPr>
+              <a:t>.</a:t>
+            </a:r>
+          </a:p>
+          <a:p>
+            <a:pPr algn="r" rtl="1"/>
+            <a:endParaRPr lang="he-IL" sz="1200" kern="1200" dirty="0">
+              <a:solidFill>
+                <a:schemeClr val="tx1"/>
+              </a:solidFill>
+              <a:latin typeface="+mn-lt"/>
+              <a:ea typeface="+mn-ea"/>
+              <a:cs typeface="+mn-cs"/>
+            </a:endParaRPr>
+          </a:p>
+          <a:p>
+            <a:pPr algn="r" rtl="1"/>
+            <a:r>
+              <a:rPr lang="he-IL" sz="1200" kern="1200" dirty="0">
+                <a:solidFill>
+                  <a:schemeClr val="tx1"/>
+                </a:solidFill>
+                <a:latin typeface="+mn-lt"/>
+                <a:ea typeface="+mn-ea"/>
+                <a:cs typeface="+mn-cs"/>
+              </a:rPr>
+              <a:t>כותבי המאמר מציינים שהם משתמשים בשיטות הערכה שהוצגו על-ידי בראון ושותפיו, כלומר, הם לא ממציאים שיטת הערכה חדשה, אלא עובדים לפי סטנדרטים מקובלים.</a:t>
+            </a:r>
+          </a:p>
+          <a:p>
+            <a:pPr algn="r" rtl="1"/>
+            <a:endParaRPr lang="he-IL" sz="1200" kern="1200" dirty="0">
+              <a:solidFill>
+                <a:schemeClr val="tx1"/>
+              </a:solidFill>
+              <a:latin typeface="+mn-lt"/>
+              <a:ea typeface="+mn-ea"/>
+              <a:cs typeface="+mn-cs"/>
+            </a:endParaRPr>
+          </a:p>
+          <a:p>
+            <a:pPr algn="r" rtl="1"/>
+            <a:r>
+              <a:rPr lang="he-IL" sz="1200" kern="1200" dirty="0">
+                <a:solidFill>
+                  <a:schemeClr val="tx1"/>
+                </a:solidFill>
+                <a:latin typeface="+mn-lt"/>
+                <a:ea typeface="+mn-ea"/>
+                <a:cs typeface="+mn-cs"/>
+              </a:rPr>
+              <a:t>לצורך ההערכה הם משתמשים בשישה </a:t>
+            </a:r>
+            <a:r>
+              <a:rPr lang="he-IL" sz="1200" kern="1200" dirty="0" err="1">
+                <a:solidFill>
+                  <a:schemeClr val="tx1"/>
+                </a:solidFill>
+                <a:latin typeface="+mn-lt"/>
+                <a:ea typeface="+mn-ea"/>
+                <a:cs typeface="+mn-cs"/>
+              </a:rPr>
+              <a:t>דאטאסטים</a:t>
+            </a:r>
+            <a:r>
+              <a:rPr lang="he-IL" sz="1200" kern="1200" dirty="0">
+                <a:solidFill>
+                  <a:schemeClr val="tx1"/>
+                </a:solidFill>
+                <a:latin typeface="+mn-lt"/>
+                <a:ea typeface="+mn-ea"/>
+                <a:cs typeface="+mn-cs"/>
+              </a:rPr>
+              <a:t> שונים, שנבנו במיוחד עבור </a:t>
+            </a:r>
+            <a:r>
+              <a:rPr lang="en-US" sz="1200" kern="1200" dirty="0">
+                <a:solidFill>
+                  <a:schemeClr val="tx1"/>
+                </a:solidFill>
+                <a:latin typeface="+mn-lt"/>
+                <a:ea typeface="+mn-ea"/>
+                <a:cs typeface="+mn-cs"/>
+              </a:rPr>
+              <a:t>benchmarking</a:t>
+            </a:r>
+            <a:r>
+              <a:rPr lang="he-IL" sz="1200" kern="1200" dirty="0">
+                <a:solidFill>
+                  <a:schemeClr val="tx1"/>
+                </a:solidFill>
+                <a:latin typeface="+mn-lt"/>
+                <a:ea typeface="+mn-ea"/>
+                <a:cs typeface="+mn-cs"/>
+              </a:rPr>
+              <a:t>.</a:t>
+            </a:r>
+          </a:p>
+          <a:p>
+            <a:pPr marL="0" marR="0" lvl="0" indent="0" algn="r" defTabSz="914400" rtl="1" eaLnBrk="1" fontAlgn="auto" latinLnBrk="0" hangingPunct="1">
+              <a:lnSpc>
+                <a:spcPct val="100000"/>
+              </a:lnSpc>
+              <a:spcBef>
+                <a:spcPts val="0"/>
+              </a:spcBef>
+              <a:spcAft>
+                <a:spcPts val="0"/>
+              </a:spcAft>
+              <a:buClrTx/>
+              <a:buSzTx/>
+              <a:buFontTx/>
+              <a:buNone/>
+              <a:tabLst/>
+              <a:defRPr/>
+            </a:pPr>
+            <a:r>
+              <a:rPr lang="he-IL" sz="1200" kern="1200" dirty="0">
+                <a:solidFill>
+                  <a:schemeClr val="tx1"/>
+                </a:solidFill>
+                <a:latin typeface="+mn-lt"/>
+                <a:ea typeface="+mn-ea"/>
+                <a:cs typeface="+mn-cs"/>
+              </a:rPr>
+              <a:t>כל </a:t>
+            </a:r>
+            <a:r>
+              <a:rPr lang="he-IL" sz="1200" kern="1200" dirty="0" err="1">
+                <a:solidFill>
+                  <a:schemeClr val="tx1"/>
+                </a:solidFill>
+                <a:latin typeface="+mn-lt"/>
+                <a:ea typeface="+mn-ea"/>
+                <a:cs typeface="+mn-cs"/>
+              </a:rPr>
+              <a:t>דאטאסט</a:t>
+            </a:r>
+            <a:r>
+              <a:rPr lang="he-IL" sz="1200" kern="1200" dirty="0">
+                <a:solidFill>
+                  <a:schemeClr val="tx1"/>
+                </a:solidFill>
+                <a:latin typeface="+mn-lt"/>
+                <a:ea typeface="+mn-ea"/>
+                <a:cs typeface="+mn-cs"/>
+              </a:rPr>
+              <a:t> כולל שאלות שהמודל צריך לענות עליהן - או באמצעות גנרציה חופשית, או באמצעות בחירה מבין מספר אפשרויות.</a:t>
+            </a:r>
+            <a:br>
+              <a:rPr lang="he-IL" sz="1200" kern="1200" dirty="0">
+                <a:solidFill>
+                  <a:schemeClr val="tx1"/>
+                </a:solidFill>
+                <a:latin typeface="+mn-lt"/>
+                <a:ea typeface="+mn-ea"/>
+                <a:cs typeface="+mn-cs"/>
+              </a:rPr>
+            </a:br>
+            <a:r>
+              <a:rPr lang="he-IL" sz="1200" kern="1200" dirty="0">
+                <a:solidFill>
+                  <a:schemeClr val="tx1"/>
+                </a:solidFill>
+                <a:latin typeface="+mn-lt"/>
+                <a:ea typeface="+mn-ea"/>
+                <a:cs typeface="+mn-cs"/>
+              </a:rPr>
+              <a:t>אם מדובר בגנרציה, למשל יצירה של קוד, אז יש איזושהי דרך לאמת את היצירה, למשל להריץ </a:t>
+            </a:r>
+            <a:r>
+              <a:rPr lang="en-US" sz="1200" kern="1200" dirty="0">
+                <a:solidFill>
+                  <a:schemeClr val="tx1"/>
+                </a:solidFill>
+                <a:latin typeface="+mn-lt"/>
+                <a:ea typeface="+mn-ea"/>
+                <a:cs typeface="+mn-cs"/>
+              </a:rPr>
+              <a:t>unit-test</a:t>
+            </a:r>
+            <a:r>
+              <a:rPr lang="he-IL" sz="1200" kern="1200" dirty="0">
+                <a:solidFill>
+                  <a:schemeClr val="tx1"/>
+                </a:solidFill>
+                <a:latin typeface="+mn-lt"/>
+                <a:ea typeface="+mn-ea"/>
+                <a:cs typeface="+mn-cs"/>
+              </a:rPr>
+              <a:t> על הקוד שנוצר.</a:t>
+            </a:r>
+            <a:br>
+              <a:rPr lang="he-IL" sz="1200" kern="1200" dirty="0">
+                <a:solidFill>
+                  <a:schemeClr val="tx1"/>
+                </a:solidFill>
+                <a:latin typeface="+mn-lt"/>
+                <a:ea typeface="+mn-ea"/>
+                <a:cs typeface="+mn-cs"/>
+              </a:rPr>
+            </a:br>
+            <a:r>
+              <a:rPr lang="he-IL" sz="1200" kern="1200" dirty="0">
+                <a:solidFill>
+                  <a:schemeClr val="tx1"/>
+                </a:solidFill>
+                <a:latin typeface="+mn-lt"/>
+                <a:ea typeface="+mn-ea"/>
+                <a:cs typeface="+mn-cs"/>
+              </a:rPr>
+              <a:t>אם מדובר בבחירת תשובה, אז התשובה הנכונה פשוט נמצאת </a:t>
+            </a:r>
+            <a:r>
+              <a:rPr lang="he-IL" sz="1200" kern="1200" dirty="0" err="1">
+                <a:solidFill>
+                  <a:schemeClr val="tx1"/>
+                </a:solidFill>
+                <a:latin typeface="+mn-lt"/>
+                <a:ea typeface="+mn-ea"/>
+                <a:cs typeface="+mn-cs"/>
+              </a:rPr>
+              <a:t>בדאטאסט</a:t>
+            </a:r>
+            <a:r>
+              <a:rPr lang="he-IL" sz="1200" kern="1200" dirty="0">
+                <a:solidFill>
+                  <a:schemeClr val="tx1"/>
+                </a:solidFill>
+                <a:latin typeface="+mn-lt"/>
+                <a:ea typeface="+mn-ea"/>
+                <a:cs typeface="+mn-cs"/>
+              </a:rPr>
+              <a:t>.</a:t>
+            </a:r>
+          </a:p>
+          <a:p>
+            <a:pPr algn="r" rtl="1"/>
+            <a:endParaRPr lang="he-IL" sz="1200" kern="1200" dirty="0">
+              <a:solidFill>
+                <a:schemeClr val="tx1"/>
+              </a:solidFill>
+              <a:latin typeface="+mn-lt"/>
+              <a:ea typeface="+mn-ea"/>
+              <a:cs typeface="+mn-cs"/>
+            </a:endParaRPr>
+          </a:p>
+          <a:p>
+            <a:pPr algn="r" rtl="1"/>
+            <a:r>
+              <a:rPr lang="he-IL" sz="1200" kern="1200" dirty="0">
+                <a:solidFill>
+                  <a:schemeClr val="tx1"/>
+                </a:solidFill>
+                <a:latin typeface="+mn-lt"/>
+                <a:ea typeface="+mn-ea"/>
+                <a:cs typeface="+mn-cs"/>
+              </a:rPr>
+              <a:t>בנוסף, החוקרים מדגישים שבחלק מהמבחנים הם משתמשים ב-</a:t>
+            </a:r>
+            <a:r>
+              <a:rPr lang="en-US" sz="1200" kern="1200" dirty="0">
+                <a:solidFill>
+                  <a:schemeClr val="tx1"/>
+                </a:solidFill>
+                <a:latin typeface="+mn-lt"/>
+                <a:ea typeface="+mn-ea"/>
+                <a:cs typeface="+mn-cs"/>
+              </a:rPr>
+              <a:t>zero-shot</a:t>
+            </a:r>
+            <a:r>
+              <a:rPr lang="he-IL" sz="1200" kern="1200" dirty="0">
+                <a:solidFill>
+                  <a:schemeClr val="tx1"/>
+                </a:solidFill>
+                <a:latin typeface="+mn-lt"/>
+                <a:ea typeface="+mn-ea"/>
+                <a:cs typeface="+mn-cs"/>
+              </a:rPr>
+              <a:t>,</a:t>
+            </a:r>
+            <a:r>
+              <a:rPr lang="en-US" sz="1200" kern="1200" dirty="0">
+                <a:solidFill>
+                  <a:schemeClr val="tx1"/>
+                </a:solidFill>
+                <a:latin typeface="+mn-lt"/>
+                <a:ea typeface="+mn-ea"/>
+                <a:cs typeface="+mn-cs"/>
+              </a:rPr>
+              <a:t> </a:t>
+            </a:r>
+            <a:r>
+              <a:rPr lang="he-IL" sz="1200" kern="1200" dirty="0">
+                <a:solidFill>
+                  <a:schemeClr val="tx1"/>
+                </a:solidFill>
+                <a:latin typeface="+mn-lt"/>
+                <a:ea typeface="+mn-ea"/>
+                <a:cs typeface="+mn-cs"/>
+              </a:rPr>
+              <a:t>ובחלק אחר ב-</a:t>
+            </a:r>
+            <a:r>
+              <a:rPr lang="en-US" sz="1200" kern="1200" dirty="0">
+                <a:solidFill>
+                  <a:schemeClr val="tx1"/>
+                </a:solidFill>
+                <a:latin typeface="+mn-lt"/>
+                <a:ea typeface="+mn-ea"/>
+                <a:cs typeface="+mn-cs"/>
+              </a:rPr>
+              <a:t>few-shot</a:t>
+            </a:r>
+            <a:r>
+              <a:rPr lang="he-IL" sz="1200" kern="1200" dirty="0">
+                <a:solidFill>
+                  <a:schemeClr val="tx1"/>
+                </a:solidFill>
+                <a:latin typeface="+mn-lt"/>
+                <a:ea typeface="+mn-ea"/>
+                <a:cs typeface="+mn-cs"/>
+              </a:rPr>
+              <a:t>.</a:t>
+            </a:r>
+            <a:endParaRPr lang="en-US" sz="1200" kern="1200" dirty="0">
+              <a:solidFill>
+                <a:schemeClr val="tx1"/>
+              </a:solidFill>
+              <a:latin typeface="+mn-lt"/>
+              <a:ea typeface="+mn-ea"/>
+              <a:cs typeface="+mn-cs"/>
+            </a:endParaRPr>
+          </a:p>
+          <a:p>
+            <a:pPr algn="r" rtl="1"/>
+            <a:r>
+              <a:rPr lang="he-IL" sz="1200" kern="1200" dirty="0">
+                <a:solidFill>
+                  <a:schemeClr val="tx1"/>
+                </a:solidFill>
+                <a:latin typeface="+mn-lt"/>
+                <a:ea typeface="+mn-ea"/>
+                <a:cs typeface="+mn-cs"/>
+              </a:rPr>
+              <a:t>למי שלא מכיר:</a:t>
+            </a:r>
+            <a:br>
+              <a:rPr lang="he-IL" sz="1200" kern="1200" dirty="0">
+                <a:solidFill>
+                  <a:schemeClr val="tx1"/>
+                </a:solidFill>
+                <a:latin typeface="+mn-lt"/>
+                <a:ea typeface="+mn-ea"/>
+                <a:cs typeface="+mn-cs"/>
+              </a:rPr>
+            </a:br>
+            <a:r>
+              <a:rPr lang="en-US" sz="1200" kern="1200" dirty="0">
+                <a:solidFill>
+                  <a:schemeClr val="tx1"/>
+                </a:solidFill>
+                <a:latin typeface="+mn-lt"/>
+                <a:ea typeface="+mn-ea"/>
+                <a:cs typeface="+mn-cs"/>
+              </a:rPr>
+              <a:t>Zero-shot</a:t>
+            </a:r>
+            <a:r>
+              <a:rPr lang="he-IL" sz="1200" kern="1200" dirty="0">
+                <a:solidFill>
+                  <a:schemeClr val="tx1"/>
+                </a:solidFill>
+                <a:latin typeface="+mn-lt"/>
+                <a:ea typeface="+mn-ea"/>
+                <a:cs typeface="+mn-cs"/>
+              </a:rPr>
+              <a:t> זו שיטה שבה מציגים למודל שאלה, הוא נותן תשובה, ובודקים אם היא נכונה - בלי שום דוגמה מקדימה.</a:t>
+            </a:r>
+            <a:br>
+              <a:rPr lang="he-IL" sz="1200" kern="1200" dirty="0">
+                <a:solidFill>
+                  <a:schemeClr val="tx1"/>
+                </a:solidFill>
+                <a:latin typeface="+mn-lt"/>
+                <a:ea typeface="+mn-ea"/>
+                <a:cs typeface="+mn-cs"/>
+              </a:rPr>
+            </a:br>
+            <a:r>
+              <a:rPr lang="he-IL" sz="1200" kern="1200" dirty="0">
+                <a:solidFill>
+                  <a:schemeClr val="tx1"/>
+                </a:solidFill>
+                <a:latin typeface="+mn-lt"/>
+                <a:ea typeface="+mn-ea"/>
+                <a:cs typeface="+mn-cs"/>
+              </a:rPr>
+              <a:t>ב-</a:t>
+            </a:r>
+            <a:r>
+              <a:rPr lang="en-US" sz="1200" kern="1200" dirty="0">
+                <a:solidFill>
+                  <a:schemeClr val="tx1"/>
+                </a:solidFill>
+                <a:latin typeface="+mn-lt"/>
+                <a:ea typeface="+mn-ea"/>
+                <a:cs typeface="+mn-cs"/>
+              </a:rPr>
+              <a:t>Few-shot</a:t>
+            </a:r>
+            <a:r>
+              <a:rPr lang="he-IL" sz="1200" kern="1200" dirty="0">
+                <a:solidFill>
+                  <a:schemeClr val="tx1"/>
+                </a:solidFill>
+                <a:latin typeface="+mn-lt"/>
+                <a:ea typeface="+mn-ea"/>
+                <a:cs typeface="+mn-cs"/>
+              </a:rPr>
+              <a:t> לעומת זאת, לכל שאלת מבחן, מראים למודל כמה דוגמאות של שאלה ותשובה נכונה, ורק לאחר מכן מציגים את השאלה האמיתית, ומצפים שהוא יענה באותו הפורמט של הדוגמאות שהוצגו.</a:t>
+            </a:r>
+          </a:p>
+          <a:p>
+            <a:pPr algn="r" rtl="1"/>
+            <a:r>
+              <a:rPr lang="he-IL" sz="1200" kern="1200" dirty="0">
+                <a:solidFill>
+                  <a:schemeClr val="tx1"/>
+                </a:solidFill>
+                <a:latin typeface="+mn-lt"/>
+                <a:ea typeface="+mn-ea"/>
+                <a:cs typeface="+mn-cs"/>
+              </a:rPr>
+              <a:t>זה שימושי במיוחד במבחנים כמו </a:t>
+            </a:r>
+            <a:r>
+              <a:rPr lang="en-US" sz="1200" kern="1200" dirty="0">
+                <a:solidFill>
+                  <a:schemeClr val="tx1"/>
+                </a:solidFill>
+                <a:latin typeface="+mn-lt"/>
+                <a:ea typeface="+mn-ea"/>
+                <a:cs typeface="+mn-cs"/>
+              </a:rPr>
+              <a:t>MMLU</a:t>
+            </a:r>
+            <a:r>
+              <a:rPr lang="he-IL" sz="1200" kern="1200" dirty="0">
+                <a:solidFill>
+                  <a:schemeClr val="tx1"/>
+                </a:solidFill>
+                <a:latin typeface="+mn-lt"/>
+                <a:ea typeface="+mn-ea"/>
+                <a:cs typeface="+mn-cs"/>
+              </a:rPr>
+              <a:t>  שנראה בהמשך, שבהם מציגים למודל שאלות רב-ברירה עם תשובות </a:t>
+            </a:r>
+            <a:r>
+              <a:rPr lang="he-IL" sz="1200" kern="1200" dirty="0" err="1">
+                <a:solidFill>
+                  <a:schemeClr val="tx1"/>
+                </a:solidFill>
+                <a:latin typeface="+mn-lt"/>
+                <a:ea typeface="+mn-ea"/>
+                <a:cs typeface="+mn-cs"/>
+              </a:rPr>
+              <a:t>A</a:t>
+            </a:r>
+            <a:r>
+              <a:rPr lang="he-IL" sz="1200" kern="1200" dirty="0">
+                <a:solidFill>
+                  <a:schemeClr val="tx1"/>
+                </a:solidFill>
+                <a:latin typeface="+mn-lt"/>
+                <a:ea typeface="+mn-ea"/>
+                <a:cs typeface="+mn-cs"/>
+              </a:rPr>
+              <a:t>, </a:t>
+            </a:r>
+            <a:r>
+              <a:rPr lang="he-IL" sz="1200" kern="1200" dirty="0" err="1">
+                <a:solidFill>
+                  <a:schemeClr val="tx1"/>
+                </a:solidFill>
+                <a:latin typeface="+mn-lt"/>
+                <a:ea typeface="+mn-ea"/>
+                <a:cs typeface="+mn-cs"/>
+              </a:rPr>
+              <a:t>B</a:t>
+            </a:r>
+            <a:r>
+              <a:rPr lang="he-IL" sz="1200" kern="1200" dirty="0">
+                <a:solidFill>
+                  <a:schemeClr val="tx1"/>
+                </a:solidFill>
+                <a:latin typeface="+mn-lt"/>
+                <a:ea typeface="+mn-ea"/>
+                <a:cs typeface="+mn-cs"/>
+              </a:rPr>
+              <a:t>, </a:t>
+            </a:r>
+            <a:r>
+              <a:rPr lang="he-IL" sz="1200" kern="1200" dirty="0" err="1">
+                <a:solidFill>
+                  <a:schemeClr val="tx1"/>
+                </a:solidFill>
+                <a:latin typeface="+mn-lt"/>
+                <a:ea typeface="+mn-ea"/>
+                <a:cs typeface="+mn-cs"/>
+              </a:rPr>
+              <a:t>C</a:t>
+            </a:r>
+            <a:r>
+              <a:rPr lang="he-IL" sz="1200" kern="1200" dirty="0">
+                <a:solidFill>
+                  <a:schemeClr val="tx1"/>
+                </a:solidFill>
+                <a:latin typeface="+mn-lt"/>
+                <a:ea typeface="+mn-ea"/>
+                <a:cs typeface="+mn-cs"/>
+              </a:rPr>
+              <a:t> או </a:t>
+            </a:r>
+            <a:r>
+              <a:rPr lang="he-IL" sz="1200" kern="1200" dirty="0" err="1">
+                <a:solidFill>
+                  <a:schemeClr val="tx1"/>
+                </a:solidFill>
+                <a:latin typeface="+mn-lt"/>
+                <a:ea typeface="+mn-ea"/>
+                <a:cs typeface="+mn-cs"/>
+              </a:rPr>
+              <a:t>D</a:t>
+            </a:r>
+            <a:r>
+              <a:rPr lang="he-IL" sz="1200" kern="1200" dirty="0">
+                <a:solidFill>
+                  <a:schemeClr val="tx1"/>
+                </a:solidFill>
+                <a:latin typeface="+mn-lt"/>
+                <a:ea typeface="+mn-ea"/>
+                <a:cs typeface="+mn-cs"/>
+              </a:rPr>
+              <a:t>. לפעמים המודל יודע את התשובה, אבל לא מקפיד על הפורמט, ונותן את התשובה המילולית במקום את האות. לא תמיד קל לחלץ את האות הזו בצורה אוטומטית, אז הדוגמאות “מיישרות” אותו לפורמט הנכון.</a:t>
+            </a:r>
+          </a:p>
+          <a:p>
+            <a:pPr algn="r" rtl="1"/>
+            <a:r>
+              <a:rPr lang="he-IL" sz="1200" kern="1200" dirty="0">
+                <a:solidFill>
+                  <a:schemeClr val="tx1"/>
+                </a:solidFill>
+                <a:latin typeface="+mn-lt"/>
+                <a:ea typeface="+mn-ea"/>
+                <a:cs typeface="+mn-cs"/>
+              </a:rPr>
+              <a:t>אגב, </a:t>
+            </a:r>
+            <a:r>
+              <a:rPr lang="en-US" sz="1200" kern="1200" dirty="0">
+                <a:solidFill>
+                  <a:schemeClr val="tx1"/>
+                </a:solidFill>
+                <a:latin typeface="+mn-lt"/>
+                <a:ea typeface="+mn-ea"/>
+                <a:cs typeface="+mn-cs"/>
+              </a:rPr>
+              <a:t>Few-shots</a:t>
+            </a:r>
+            <a:r>
+              <a:rPr lang="he-IL" sz="1200" kern="1200" dirty="0">
+                <a:solidFill>
+                  <a:schemeClr val="tx1"/>
+                </a:solidFill>
+                <a:latin typeface="+mn-lt"/>
+                <a:ea typeface="+mn-ea"/>
+                <a:cs typeface="+mn-cs"/>
+              </a:rPr>
+              <a:t> הוא שם כללי, לעיתים משתמשים בדוגמה אחת (</a:t>
+            </a:r>
+            <a:r>
+              <a:rPr lang="en-US" sz="1200" kern="1200" dirty="0">
+                <a:solidFill>
+                  <a:schemeClr val="tx1"/>
+                </a:solidFill>
+                <a:latin typeface="+mn-lt"/>
+                <a:ea typeface="+mn-ea"/>
+                <a:cs typeface="+mn-cs"/>
+              </a:rPr>
+              <a:t>1-shot</a:t>
+            </a:r>
+            <a:r>
+              <a:rPr lang="he-IL" sz="1200" kern="1200" dirty="0">
+                <a:solidFill>
+                  <a:schemeClr val="tx1"/>
+                </a:solidFill>
+                <a:latin typeface="+mn-lt"/>
+                <a:ea typeface="+mn-ea"/>
+                <a:cs typeface="+mn-cs"/>
+              </a:rPr>
+              <a:t>), בחמש דוגמאות (</a:t>
+            </a:r>
+            <a:r>
+              <a:rPr lang="en-US" sz="1200" kern="1200" dirty="0">
+                <a:solidFill>
+                  <a:schemeClr val="tx1"/>
+                </a:solidFill>
+                <a:latin typeface="+mn-lt"/>
+                <a:ea typeface="+mn-ea"/>
+                <a:cs typeface="+mn-cs"/>
+              </a:rPr>
+              <a:t>5-shots</a:t>
+            </a:r>
+            <a:r>
+              <a:rPr lang="he-IL" sz="1200" kern="1200" dirty="0">
+                <a:solidFill>
+                  <a:schemeClr val="tx1"/>
+                </a:solidFill>
+                <a:latin typeface="+mn-lt"/>
+                <a:ea typeface="+mn-ea"/>
+                <a:cs typeface="+mn-cs"/>
+              </a:rPr>
+              <a:t>) או במקרים נדירים בהרבה דוגמאות, כמו </a:t>
+            </a:r>
+            <a:r>
+              <a:rPr lang="en-US" sz="1200" kern="1200" dirty="0">
+                <a:solidFill>
+                  <a:schemeClr val="tx1"/>
+                </a:solidFill>
+                <a:latin typeface="+mn-lt"/>
+                <a:ea typeface="+mn-ea"/>
+                <a:cs typeface="+mn-cs"/>
+              </a:rPr>
+              <a:t>64-shots</a:t>
+            </a:r>
+            <a:r>
+              <a:rPr lang="he-IL" sz="1200" kern="1200" dirty="0">
+                <a:solidFill>
+                  <a:schemeClr val="tx1"/>
+                </a:solidFill>
+                <a:latin typeface="+mn-lt"/>
+                <a:ea typeface="+mn-ea"/>
+                <a:cs typeface="+mn-cs"/>
+              </a:rPr>
+              <a:t>.</a:t>
+            </a:r>
+          </a:p>
+          <a:p>
+            <a:pPr algn="r" rtl="1"/>
+            <a:endParaRPr lang="en-US" sz="1200" kern="1200" dirty="0">
+              <a:solidFill>
+                <a:schemeClr val="tx1"/>
+              </a:solidFill>
+              <a:latin typeface="+mn-lt"/>
+              <a:ea typeface="+mn-ea"/>
+              <a:cs typeface="+mn-cs"/>
+            </a:endParaRPr>
+          </a:p>
+          <a:p>
+            <a:pPr algn="r" rtl="1"/>
+            <a:r>
+              <a:rPr lang="he-IL" sz="1200" kern="1200" dirty="0">
+                <a:solidFill>
+                  <a:schemeClr val="tx1"/>
+                </a:solidFill>
+                <a:latin typeface="+mn-lt"/>
+                <a:ea typeface="+mn-ea"/>
+                <a:cs typeface="+mn-cs"/>
+              </a:rPr>
+              <a:t>באופן כללי, אנחנו מצפים שב-</a:t>
+            </a:r>
+            <a:r>
+              <a:rPr lang="en-US" sz="1200" kern="1200" dirty="0">
+                <a:solidFill>
+                  <a:schemeClr val="tx1"/>
+                </a:solidFill>
+                <a:latin typeface="+mn-lt"/>
+                <a:ea typeface="+mn-ea"/>
+                <a:cs typeface="+mn-cs"/>
+              </a:rPr>
+              <a:t>few-shot</a:t>
+            </a:r>
+            <a:r>
+              <a:rPr lang="he-IL" sz="1200" kern="1200" dirty="0">
+                <a:solidFill>
+                  <a:schemeClr val="tx1"/>
+                </a:solidFill>
+                <a:latin typeface="+mn-lt"/>
+                <a:ea typeface="+mn-ea"/>
+                <a:cs typeface="+mn-cs"/>
+              </a:rPr>
+              <a:t> המודל יגיעו לביצועים טובים יותר, כי הדוגמאות עוזרות למודל להבין את פורמט התשובה, ולרוב אנחנו בסדר עם זה כשרוצים למדוד ידע.</a:t>
+            </a:r>
+          </a:p>
+          <a:p>
+            <a:pPr algn="r" rtl="1"/>
+            <a:r>
+              <a:rPr lang="he-IL" sz="1200" kern="1200" dirty="0">
+                <a:solidFill>
+                  <a:schemeClr val="tx1"/>
+                </a:solidFill>
+                <a:latin typeface="+mn-lt"/>
+                <a:ea typeface="+mn-ea"/>
+                <a:cs typeface="+mn-cs"/>
+              </a:rPr>
+              <a:t>לעומת זאת, כשאנחנו רוצים לבחון הטיות של מודל, נעדיף דווקא </a:t>
+            </a:r>
+            <a:r>
+              <a:rPr lang="en-US" sz="1200" kern="1200" dirty="0">
+                <a:solidFill>
+                  <a:schemeClr val="tx1"/>
+                </a:solidFill>
+                <a:latin typeface="+mn-lt"/>
+                <a:ea typeface="+mn-ea"/>
+                <a:cs typeface="+mn-cs"/>
+              </a:rPr>
+              <a:t>0-shot</a:t>
+            </a:r>
+            <a:r>
+              <a:rPr lang="he-IL" sz="1200" kern="1200" dirty="0">
+                <a:solidFill>
+                  <a:schemeClr val="tx1"/>
+                </a:solidFill>
+                <a:latin typeface="+mn-lt"/>
+                <a:ea typeface="+mn-ea"/>
+                <a:cs typeface="+mn-cs"/>
+              </a:rPr>
+              <a:t>, כי הדוגמאות עלולות להשפיע על התנהגות המודל.</a:t>
+            </a:r>
+          </a:p>
+          <a:p>
+            <a:pPr algn="r" rtl="1"/>
+            <a:endParaRPr lang="he-IL" sz="1200" kern="1200" dirty="0">
+              <a:solidFill>
+                <a:schemeClr val="tx1"/>
+              </a:solidFill>
+              <a:latin typeface="+mn-lt"/>
+              <a:ea typeface="+mn-ea"/>
+              <a:cs typeface="+mn-cs"/>
+            </a:endParaRPr>
+          </a:p>
+          <a:p>
+            <a:pPr algn="r" rtl="1"/>
+            <a:r>
+              <a:rPr lang="he-IL" sz="1200" kern="1200" dirty="0">
+                <a:solidFill>
+                  <a:schemeClr val="tx1"/>
+                </a:solidFill>
+                <a:latin typeface="+mn-lt"/>
+                <a:ea typeface="+mn-ea"/>
+                <a:cs typeface="+mn-cs"/>
+              </a:rPr>
+              <a:t>חוץ מזה, החוקרים משווים את הביצועים של </a:t>
+            </a:r>
+            <a:r>
+              <a:rPr lang="en-US" sz="1200" kern="1200" dirty="0">
+                <a:solidFill>
+                  <a:schemeClr val="tx1"/>
+                </a:solidFill>
+                <a:latin typeface="+mn-lt"/>
+                <a:ea typeface="+mn-ea"/>
+                <a:cs typeface="+mn-cs"/>
+              </a:rPr>
+              <a:t>LLaMA</a:t>
+            </a:r>
+            <a:r>
+              <a:rPr lang="he-IL" sz="1200" kern="1200" dirty="0">
+                <a:solidFill>
+                  <a:schemeClr val="tx1"/>
+                </a:solidFill>
+                <a:latin typeface="+mn-lt"/>
+                <a:ea typeface="+mn-ea"/>
+                <a:cs typeface="+mn-cs"/>
+              </a:rPr>
+              <a:t> גם למודלים עליהם יש קניין רוחני כמו </a:t>
+            </a:r>
+            <a:r>
+              <a:rPr lang="en-US" sz="1200" kern="1200" dirty="0">
+                <a:solidFill>
+                  <a:schemeClr val="tx1"/>
+                </a:solidFill>
+                <a:latin typeface="+mn-lt"/>
+                <a:ea typeface="+mn-ea"/>
+                <a:cs typeface="+mn-cs"/>
+              </a:rPr>
+              <a:t>GPT-3</a:t>
+            </a:r>
+            <a:r>
+              <a:rPr lang="he-IL" sz="1200" kern="1200" dirty="0">
+                <a:solidFill>
+                  <a:schemeClr val="tx1"/>
+                </a:solidFill>
+                <a:latin typeface="+mn-lt"/>
+                <a:ea typeface="+mn-ea"/>
+                <a:cs typeface="+mn-cs"/>
+              </a:rPr>
+              <a:t> וגם למודלים שהם </a:t>
+            </a:r>
+            <a:r>
+              <a:rPr lang="en-US" dirty="0"/>
+              <a:t>open source</a:t>
+            </a:r>
+            <a:endParaRPr lang="he-IL" dirty="0"/>
+          </a:p>
+        </p:txBody>
+      </p:sp>
+      <p:sp>
+        <p:nvSpPr>
+          <p:cNvPr id="4" name="Slide Number Placeholder 3"/>
+          <p:cNvSpPr>
+            <a:spLocks noGrp="1"/>
+          </p:cNvSpPr>
+          <p:nvPr>
+            <p:ph type="sldNum" sz="quarter" idx="5"/>
+          </p:nvPr>
+        </p:nvSpPr>
+        <p:spPr/>
+        <p:txBody>
+          <a:bodyPr/>
+          <a:lstStyle/>
+          <a:p>
+            <a:fld id="{476FFE5D-288A-DB4E-9912-CFF1A38B0A9A}" type="slidenum">
+              <a:rPr lang="en-IL" smtClean="0"/>
+              <a:t>2</a:t>
+            </a:fld>
+            <a:endParaRPr lang="en-IL"/>
+          </a:p>
+        </p:txBody>
+      </p:sp>
+    </p:spTree>
+    <p:extLst>
+      <p:ext uri="{BB962C8B-B14F-4D97-AF65-F5344CB8AC3E}">
+        <p14:creationId xmlns:p14="http://schemas.microsoft.com/office/powerpoint/2010/main" val="724311034"/>
+      </p:ext>
+    </p:extLst>
+  </p:cSld>
+  <p:clrMapOvr>
+    <a:masterClrMapping/>
+  </p:clrMapOvr>
+</p:notes>
+</file>
+
+<file path=ppt/notesSlides/notesSlide3.xml><?xml version="1.0" encoding="utf-8"?>
+<p:notes xmlns:a="http://schemas.openxmlformats.org/drawingml/2006/main" xmlns:r="http://schemas.openxmlformats.org/officeDocument/2006/relationships" xmlns:p="http://schemas.openxmlformats.org/presentationml/2006/main">
+  <p:cSld>
+    <p:spTree>
+      <p:nvGrpSpPr>
+        <p:cNvPr id="1" name=""/>
+        <p:cNvGrpSpPr/>
+        <p:nvPr/>
+      </p:nvGrpSpPr>
+      <p:grpSpPr>
+        <a:xfrm>
+          <a:off x="0" y="0"/>
+          <a:ext cx="0" cy="0"/>
+          <a:chOff x="0" y="0"/>
+          <a:chExt cx="0" cy="0"/>
+        </a:xfrm>
+      </p:grpSpPr>
+      <p:sp>
+        <p:nvSpPr>
+          <p:cNvPr id="2" name="Slide Image Placeholder 1"/>
+          <p:cNvSpPr>
+            <a:spLocks noGrp="1" noRot="1" noChangeAspect="1"/>
+          </p:cNvSpPr>
+          <p:nvPr>
+            <p:ph type="sldImg"/>
+          </p:nvPr>
+        </p:nvSpPr>
+        <p:spPr/>
+      </p:sp>
+      <p:sp>
+        <p:nvSpPr>
+          <p:cNvPr id="3" name="Notes Placeholder 2"/>
+          <p:cNvSpPr>
+            <a:spLocks noGrp="1"/>
+          </p:cNvSpPr>
+          <p:nvPr>
+            <p:ph type="body" idx="1"/>
+          </p:nvPr>
+        </p:nvSpPr>
+        <p:spPr/>
+        <p:txBody>
+          <a:bodyPr/>
+          <a:lstStyle/>
+          <a:p>
+            <a:pPr marL="0" algn="r" defTabSz="914400" rtl="1" eaLnBrk="1" latinLnBrk="0" hangingPunct="1"/>
+            <a:r>
+              <a:rPr lang="he-IL" dirty="0"/>
+              <a:t>אם כן, אלה </a:t>
+            </a:r>
+            <a:r>
+              <a:rPr lang="he-IL" dirty="0" err="1"/>
+              <a:t>הבנצ'מרקים</a:t>
+            </a:r>
+            <a:r>
+              <a:rPr lang="he-IL" dirty="0"/>
+              <a:t> שבהם החוקרים משתמשים כדי להעריך את </a:t>
+            </a:r>
+            <a:r>
+              <a:rPr lang="en-US" dirty="0"/>
+              <a:t>LLaMA</a:t>
+            </a:r>
+            <a:r>
+              <a:rPr lang="he-IL" dirty="0"/>
+              <a:t>:</a:t>
+            </a:r>
+            <a:endParaRPr lang="en-US" dirty="0"/>
+          </a:p>
+          <a:p>
+            <a:pPr marL="0" algn="r" defTabSz="914400" rtl="1" eaLnBrk="1" latinLnBrk="0" hangingPunct="1"/>
+            <a:endParaRPr lang="en-US" dirty="0"/>
+          </a:p>
+          <a:p>
+            <a:pPr marL="0" algn="r" defTabSz="914400" rtl="1" eaLnBrk="1" latinLnBrk="0" hangingPunct="1"/>
+            <a:r>
+              <a:rPr lang="he-IL" dirty="0"/>
+              <a:t>יש לנו את </a:t>
+            </a:r>
+            <a:r>
+              <a:rPr lang="en-US" dirty="0"/>
+              <a:t>Common Sense Reasoning</a:t>
+            </a:r>
+            <a:r>
+              <a:rPr lang="he-IL" dirty="0"/>
+              <a:t> – 8 </a:t>
+            </a:r>
+            <a:r>
+              <a:rPr lang="he-IL" dirty="0" err="1"/>
+              <a:t>דאטאסטים</a:t>
+            </a:r>
+            <a:r>
+              <a:rPr lang="he-IL" dirty="0"/>
+              <a:t> שבודקים עד כמה המודל יודע להפעיל היגיון יומיומי.</a:t>
+            </a:r>
+          </a:p>
+          <a:p>
+            <a:pPr marL="0" algn="r" defTabSz="914400" rtl="1" eaLnBrk="1" latinLnBrk="0" hangingPunct="1"/>
+            <a:endParaRPr lang="he-IL" dirty="0"/>
+          </a:p>
+          <a:p>
+            <a:pPr marL="0" algn="r" defTabSz="914400" rtl="1" eaLnBrk="1" latinLnBrk="0" hangingPunct="1"/>
+            <a:r>
+              <a:rPr lang="he-IL" dirty="0"/>
+              <a:t>יש את </a:t>
+            </a:r>
+            <a:r>
+              <a:rPr lang="en-US" dirty="0"/>
+              <a:t>Closed-book Question Answering</a:t>
+            </a:r>
+            <a:r>
+              <a:rPr lang="he-IL" dirty="0"/>
+              <a:t> – שני </a:t>
+            </a:r>
+            <a:r>
+              <a:rPr lang="he-IL" dirty="0" err="1"/>
+              <a:t>דאטאסטים</a:t>
+            </a:r>
+            <a:r>
+              <a:rPr lang="he-IL" dirty="0"/>
+              <a:t> שכוללים שאלות ספר סגור כדי לבדוק כמה ידע המודל אוצר בתוכו.</a:t>
+            </a:r>
+          </a:p>
+          <a:p>
+            <a:pPr marL="0" algn="r" defTabSz="914400" rtl="1" eaLnBrk="1" latinLnBrk="0" hangingPunct="1"/>
+            <a:endParaRPr lang="he-IL" dirty="0"/>
+          </a:p>
+          <a:p>
+            <a:pPr marL="0" algn="r" defTabSz="914400" rtl="1" eaLnBrk="1" latinLnBrk="0" hangingPunct="1"/>
+            <a:r>
+              <a:rPr lang="he-IL" dirty="0"/>
+              <a:t>ב-</a:t>
+            </a:r>
+            <a:r>
+              <a:rPr lang="en-US" dirty="0"/>
+              <a:t>Reading Comprehension</a:t>
+            </a:r>
+            <a:r>
+              <a:rPr lang="he-IL" dirty="0"/>
+              <a:t> משתמשים ב-שני </a:t>
+            </a:r>
+            <a:r>
+              <a:rPr lang="he-IL" dirty="0" err="1"/>
+              <a:t>דאטאסטים</a:t>
+            </a:r>
+            <a:r>
+              <a:rPr lang="he-IL" dirty="0"/>
+              <a:t> כדי לבדוק את יכולת הבנת הנקרא של המודל.</a:t>
+            </a:r>
+          </a:p>
+          <a:p>
+            <a:pPr marL="0" algn="r" defTabSz="914400" rtl="1" eaLnBrk="1" latinLnBrk="0" hangingPunct="1"/>
+            <a:endParaRPr lang="he-IL" dirty="0"/>
+          </a:p>
+          <a:p>
+            <a:pPr marL="0" algn="r" defTabSz="914400" rtl="1" eaLnBrk="1" latinLnBrk="0" hangingPunct="1"/>
+            <a:r>
+              <a:rPr lang="he-IL" dirty="0"/>
+              <a:t>ב-</a:t>
+            </a:r>
+            <a:r>
+              <a:rPr lang="en-US" dirty="0"/>
+              <a:t>Mathematical Reasoning</a:t>
+            </a:r>
+            <a:r>
+              <a:rPr lang="he-IL" dirty="0"/>
+              <a:t> מעריכים את יכולות החשיבה המתמטית של המודל, גם כן בעזרת שני </a:t>
+            </a:r>
+            <a:r>
+              <a:rPr lang="he-IL" dirty="0" err="1"/>
+              <a:t>דאטאסטים</a:t>
+            </a:r>
+            <a:r>
+              <a:rPr lang="he-IL" dirty="0"/>
+              <a:t>.</a:t>
+            </a:r>
+          </a:p>
+          <a:p>
+            <a:pPr marL="0" algn="r" defTabSz="914400" rtl="1" eaLnBrk="1" latinLnBrk="0" hangingPunct="1"/>
+            <a:endParaRPr lang="he-IL" dirty="0"/>
+          </a:p>
+          <a:p>
+            <a:pPr marL="0" algn="r" defTabSz="914400" rtl="1" eaLnBrk="1" latinLnBrk="0" hangingPunct="1"/>
+            <a:r>
+              <a:rPr lang="he-IL" dirty="0"/>
+              <a:t>ב-</a:t>
+            </a:r>
+            <a:r>
+              <a:rPr lang="en-US" dirty="0"/>
+              <a:t>Code Generation</a:t>
+            </a:r>
+            <a:r>
+              <a:rPr lang="he-IL" dirty="0"/>
+              <a:t> בודקים את יכולת יצירת הקוד של המודל באמצעות שני </a:t>
+            </a:r>
+            <a:r>
+              <a:rPr lang="he-IL" dirty="0" err="1"/>
+              <a:t>דאטאסטים</a:t>
+            </a:r>
+            <a:r>
+              <a:rPr lang="he-IL" dirty="0"/>
+              <a:t>.</a:t>
+            </a:r>
+          </a:p>
+          <a:p>
+            <a:pPr marL="0" algn="r" defTabSz="914400" rtl="1" eaLnBrk="1" latinLnBrk="0" hangingPunct="1"/>
+            <a:endParaRPr lang="he-IL" dirty="0"/>
+          </a:p>
+          <a:p>
+            <a:pPr marL="0" algn="r" defTabSz="914400" rtl="1" eaLnBrk="1" latinLnBrk="0" hangingPunct="1"/>
+            <a:r>
+              <a:rPr lang="he-IL" dirty="0" err="1"/>
+              <a:t>וב</a:t>
+            </a:r>
+            <a:r>
+              <a:rPr lang="he-IL" dirty="0"/>
+              <a:t>-</a:t>
+            </a:r>
+            <a:r>
+              <a:rPr lang="en-US" dirty="0"/>
+              <a:t>MMLU</a:t>
+            </a:r>
+            <a:r>
+              <a:rPr lang="he-IL" dirty="0"/>
+              <a:t> מודדים ידע רחב היקף בתחומים רבים, ממדעים מדויקים, דרך מדעי הרוח ועד נושאים הומניים - באמצעות </a:t>
+            </a:r>
+            <a:r>
+              <a:rPr lang="he-IL" dirty="0" err="1"/>
+              <a:t>דאטאסט</a:t>
+            </a:r>
+            <a:r>
+              <a:rPr lang="he-IL" dirty="0"/>
+              <a:t> אחד גדול בשם </a:t>
+            </a:r>
+            <a:r>
+              <a:rPr lang="en-US" dirty="0"/>
+              <a:t>MMLU</a:t>
+            </a:r>
+            <a:r>
+              <a:rPr lang="he-IL" dirty="0"/>
+              <a:t>.</a:t>
+            </a:r>
+            <a:endParaRPr lang="en-US" dirty="0"/>
+          </a:p>
+          <a:p>
+            <a:pPr marL="0" algn="r" defTabSz="914400" rtl="1" eaLnBrk="1" latinLnBrk="0" hangingPunct="1"/>
+            <a:endParaRPr lang="en-US" dirty="0"/>
+          </a:p>
+          <a:p>
+            <a:pPr marL="0" algn="r" defTabSz="914400" rtl="1" eaLnBrk="1" latinLnBrk="0" hangingPunct="1"/>
+            <a:r>
+              <a:rPr lang="he-IL" dirty="0"/>
+              <a:t>בסך הכול, מדובר ב־17 </a:t>
+            </a:r>
+            <a:r>
+              <a:rPr lang="he-IL" dirty="0" err="1"/>
+              <a:t>דאטאסטים</a:t>
+            </a:r>
+            <a:r>
+              <a:rPr lang="he-IL" dirty="0"/>
+              <a:t>.</a:t>
+            </a:r>
+          </a:p>
+        </p:txBody>
+      </p:sp>
+      <p:sp>
+        <p:nvSpPr>
+          <p:cNvPr id="4" name="Slide Number Placeholder 3"/>
+          <p:cNvSpPr>
+            <a:spLocks noGrp="1"/>
+          </p:cNvSpPr>
+          <p:nvPr>
+            <p:ph type="sldNum" sz="quarter" idx="5"/>
+          </p:nvPr>
+        </p:nvSpPr>
+        <p:spPr/>
+        <p:txBody>
+          <a:bodyPr/>
+          <a:lstStyle/>
+          <a:p>
+            <a:fld id="{476FFE5D-288A-DB4E-9912-CFF1A38B0A9A}" type="slidenum">
+              <a:rPr lang="en-IL" smtClean="0"/>
+              <a:t>3</a:t>
+            </a:fld>
+            <a:endParaRPr lang="en-IL"/>
+          </a:p>
+        </p:txBody>
+      </p:sp>
+    </p:spTree>
+    <p:extLst>
+      <p:ext uri="{BB962C8B-B14F-4D97-AF65-F5344CB8AC3E}">
+        <p14:creationId xmlns:p14="http://schemas.microsoft.com/office/powerpoint/2010/main" val="3874758666"/>
+      </p:ext>
+    </p:extLst>
+  </p:cSld>
+  <p:clrMapOvr>
+    <a:masterClrMapping/>
+  </p:clrMapOvr>
+</p:notes>
+</file>
+
+<file path=ppt/notesSlides/notesSlide4.xml><?xml version="1.0" encoding="utf-8"?>
+<p:notes xmlns:a="http://schemas.openxmlformats.org/drawingml/2006/main" xmlns:r="http://schemas.openxmlformats.org/officeDocument/2006/relationships" xmlns:p="http://schemas.openxmlformats.org/presentationml/2006/main">
+  <p:cSld>
+    <p:spTree>
+      <p:nvGrpSpPr>
+        <p:cNvPr id="1" name=""/>
+        <p:cNvGrpSpPr/>
+        <p:nvPr/>
+      </p:nvGrpSpPr>
+      <p:grpSpPr>
+        <a:xfrm>
+          <a:off x="0" y="0"/>
+          <a:ext cx="0" cy="0"/>
+          <a:chOff x="0" y="0"/>
+          <a:chExt cx="0" cy="0"/>
+        </a:xfrm>
+      </p:grpSpPr>
+      <p:sp>
+        <p:nvSpPr>
+          <p:cNvPr id="2" name="Slide Image Placeholder 1"/>
+          <p:cNvSpPr>
+            <a:spLocks noGrp="1" noRot="1" noChangeAspect="1"/>
+          </p:cNvSpPr>
+          <p:nvPr>
+            <p:ph type="sldImg"/>
+          </p:nvPr>
+        </p:nvSpPr>
+        <p:spPr/>
+      </p:sp>
+      <p:sp>
+        <p:nvSpPr>
+          <p:cNvPr id="3" name="Notes Placeholder 2"/>
+          <p:cNvSpPr>
+            <a:spLocks noGrp="1"/>
+          </p:cNvSpPr>
+          <p:nvPr>
+            <p:ph type="body" idx="1"/>
+          </p:nvPr>
+        </p:nvSpPr>
+        <p:spPr/>
+        <p:txBody>
+          <a:bodyPr/>
+          <a:lstStyle/>
+          <a:p>
+            <a:pPr marL="0" algn="r" defTabSz="914400" rtl="1" eaLnBrk="1" latinLnBrk="0" hangingPunct="1"/>
+            <a:r>
+              <a:rPr lang="he-IL" dirty="0"/>
+              <a:t>חוץ </a:t>
+            </a:r>
+            <a:r>
+              <a:rPr lang="he-IL" dirty="0" err="1"/>
+              <a:t>מהבנצ'מרקים</a:t>
+            </a:r>
+            <a:r>
+              <a:rPr lang="he-IL" dirty="0"/>
+              <a:t>, יש עוד שלוש מטריקות שבאמצעותן החוקרים העריכו את </a:t>
+            </a:r>
+            <a:r>
+              <a:rPr lang="en-US" dirty="0"/>
+              <a:t>LLaMA</a:t>
+            </a:r>
+            <a:r>
+              <a:rPr lang="he-IL" dirty="0"/>
+              <a:t>.</a:t>
+            </a:r>
+            <a:endParaRPr lang="en-US" dirty="0"/>
+          </a:p>
+          <a:p>
+            <a:pPr marL="0" algn="r" defTabSz="914400" rtl="1" eaLnBrk="1" latinLnBrk="0" hangingPunct="1"/>
+            <a:endParaRPr lang="en-US" dirty="0"/>
+          </a:p>
+          <a:p>
+            <a:pPr marL="0" algn="r" defTabSz="914400" rtl="1" eaLnBrk="1" latinLnBrk="0" hangingPunct="1"/>
+            <a:r>
+              <a:rPr lang="he-IL" dirty="0"/>
+              <a:t>ההבדל המרכזי הוא שבניגוד </a:t>
+            </a:r>
+            <a:r>
+              <a:rPr lang="he-IL" dirty="0" err="1"/>
+              <a:t>לבנצ'מרקים</a:t>
+            </a:r>
+            <a:r>
+              <a:rPr lang="he-IL" dirty="0"/>
+              <a:t> שמבוססים על </a:t>
+            </a:r>
+            <a:r>
+              <a:rPr lang="he-IL" dirty="0" err="1"/>
+              <a:t>דאטאסטים</a:t>
+            </a:r>
+            <a:r>
+              <a:rPr lang="he-IL" dirty="0"/>
+              <a:t>, </a:t>
+            </a:r>
+            <a:r>
+              <a:rPr lang="he-IL" dirty="0" err="1"/>
+              <a:t>המטריקות</a:t>
+            </a:r>
+            <a:r>
+              <a:rPr lang="he-IL" dirty="0"/>
+              <a:t> האלו נמדדות בדרכים אחרות, כפי שנראה בהמשך.</a:t>
+            </a:r>
+          </a:p>
+          <a:p>
+            <a:pPr marL="0" algn="r" defTabSz="914400" rtl="1" eaLnBrk="1" latinLnBrk="0" hangingPunct="1"/>
+            <a:endParaRPr lang="he-IL" dirty="0"/>
+          </a:p>
+          <a:p>
+            <a:pPr marL="0" algn="r" defTabSz="914400" rtl="1" eaLnBrk="1" latinLnBrk="0" hangingPunct="1"/>
+            <a:r>
+              <a:rPr lang="he-IL" dirty="0" err="1"/>
+              <a:t>המטריקות</a:t>
+            </a:r>
+            <a:r>
+              <a:rPr lang="he-IL" dirty="0"/>
+              <a:t> הן:</a:t>
+            </a:r>
+          </a:p>
+          <a:p>
+            <a:pPr marL="0" algn="r" defTabSz="914400" rtl="1" eaLnBrk="1" latinLnBrk="0" hangingPunct="1"/>
+            <a:endParaRPr lang="he-IL" dirty="0"/>
+          </a:p>
+          <a:p>
+            <a:pPr marL="0" algn="r" defTabSz="914400" rtl="1" eaLnBrk="1" latinLnBrk="0" hangingPunct="1"/>
+            <a:r>
+              <a:rPr lang="he-IL" dirty="0"/>
+              <a:t>1. יכולת המודל לעקוב אחרי הוראות - נמדדה בניסוי ייעודי.</a:t>
+            </a:r>
+          </a:p>
+          <a:p>
+            <a:pPr marL="0" algn="r" defTabSz="914400" rtl="1" eaLnBrk="1" latinLnBrk="0" hangingPunct="1"/>
+            <a:endParaRPr lang="he-IL" dirty="0"/>
+          </a:p>
+          <a:p>
+            <a:pPr marL="0" algn="r" defTabSz="914400" rtl="1" eaLnBrk="1" latinLnBrk="0" hangingPunct="1"/>
+            <a:r>
+              <a:rPr lang="he-IL" dirty="0"/>
+              <a:t>2. מידת ה-</a:t>
+            </a:r>
+            <a:r>
+              <a:rPr lang="en-US" dirty="0"/>
+              <a:t>bias</a:t>
+            </a:r>
+            <a:r>
+              <a:rPr lang="he-IL" dirty="0"/>
+              <a:t> </a:t>
+            </a:r>
+            <a:r>
+              <a:rPr lang="he-IL" dirty="0" err="1"/>
+              <a:t>וה</a:t>
+            </a:r>
+            <a:r>
+              <a:rPr lang="he-IL" dirty="0"/>
+              <a:t>-</a:t>
+            </a:r>
+            <a:r>
+              <a:rPr lang="en-US" dirty="0"/>
+              <a:t>toxicity</a:t>
+            </a:r>
+            <a:r>
+              <a:rPr lang="he-IL" dirty="0"/>
+              <a:t> של המודל – נמדדים באמצעות קריאות API.</a:t>
+            </a:r>
+          </a:p>
+          <a:p>
+            <a:pPr marL="0" algn="r" defTabSz="914400" rtl="1" eaLnBrk="1" latinLnBrk="0" hangingPunct="1"/>
+            <a:endParaRPr lang="he-IL" dirty="0"/>
+          </a:p>
+          <a:p>
+            <a:pPr marL="0" algn="r" defTabSz="914400" rtl="1" eaLnBrk="1" latinLnBrk="0" hangingPunct="1"/>
+            <a:r>
+              <a:rPr lang="he-IL" dirty="0"/>
+              <a:t>3. הנזק הסביבתי שנגרם מאימון המודל - חושב באמצעות משוואות.</a:t>
+            </a:r>
+            <a:endParaRPr lang="en-IL" dirty="0"/>
+          </a:p>
+        </p:txBody>
+      </p:sp>
+      <p:sp>
+        <p:nvSpPr>
+          <p:cNvPr id="4" name="Slide Number Placeholder 3"/>
+          <p:cNvSpPr>
+            <a:spLocks noGrp="1"/>
+          </p:cNvSpPr>
+          <p:nvPr>
+            <p:ph type="sldNum" sz="quarter" idx="5"/>
+          </p:nvPr>
+        </p:nvSpPr>
+        <p:spPr/>
+        <p:txBody>
+          <a:bodyPr/>
+          <a:lstStyle/>
+          <a:p>
+            <a:fld id="{476FFE5D-288A-DB4E-9912-CFF1A38B0A9A}" type="slidenum">
+              <a:rPr lang="en-IL" smtClean="0"/>
+              <a:t>4</a:t>
+            </a:fld>
+            <a:endParaRPr lang="en-IL"/>
+          </a:p>
+        </p:txBody>
+      </p:sp>
+    </p:spTree>
+    <p:extLst>
+      <p:ext uri="{BB962C8B-B14F-4D97-AF65-F5344CB8AC3E}">
+        <p14:creationId xmlns:p14="http://schemas.microsoft.com/office/powerpoint/2010/main" val="3724792918"/>
+      </p:ext>
+    </p:extLst>
+  </p:cSld>
+  <p:clrMapOvr>
+    <a:masterClrMapping/>
+  </p:clrMapOvr>
+</p:notes>
+</file>
+
+<file path=ppt/notesSlides/notesSlide5.xml><?xml version="1.0" encoding="utf-8"?>
+<p:notes xmlns:a="http://schemas.openxmlformats.org/drawingml/2006/main" xmlns:r="http://schemas.openxmlformats.org/officeDocument/2006/relationships" xmlns:p="http://schemas.openxmlformats.org/presentationml/2006/main">
+  <p:cSld>
+    <p:spTree>
+      <p:nvGrpSpPr>
+        <p:cNvPr id="1" name=""/>
+        <p:cNvGrpSpPr/>
+        <p:nvPr/>
+      </p:nvGrpSpPr>
+      <p:grpSpPr>
+        <a:xfrm>
+          <a:off x="0" y="0"/>
+          <a:ext cx="0" cy="0"/>
+          <a:chOff x="0" y="0"/>
+          <a:chExt cx="0" cy="0"/>
+        </a:xfrm>
+      </p:grpSpPr>
+      <p:sp>
+        <p:nvSpPr>
+          <p:cNvPr id="2" name="Slide Image Placeholder 1"/>
+          <p:cNvSpPr>
+            <a:spLocks noGrp="1" noRot="1" noChangeAspect="1"/>
+          </p:cNvSpPr>
+          <p:nvPr>
+            <p:ph type="sldImg"/>
+          </p:nvPr>
+        </p:nvSpPr>
+        <p:spPr/>
+      </p:sp>
+      <p:sp>
+        <p:nvSpPr>
+          <p:cNvPr id="3" name="Notes Placeholder 2"/>
+          <p:cNvSpPr>
+            <a:spLocks noGrp="1"/>
+          </p:cNvSpPr>
+          <p:nvPr>
+            <p:ph type="body" idx="1"/>
+          </p:nvPr>
+        </p:nvSpPr>
+        <p:spPr/>
+        <p:txBody>
+          <a:bodyPr/>
+          <a:lstStyle/>
+          <a:p>
+            <a:pPr marL="0" algn="r" defTabSz="914400" rtl="1" eaLnBrk="1" latinLnBrk="0" hangingPunct="1"/>
+            <a:r>
+              <a:rPr lang="he-IL" dirty="0"/>
+              <a:t>בשקף הזה רואים את המודלים אליהם משווים את </a:t>
+            </a:r>
+            <a:r>
+              <a:rPr lang="en-US" dirty="0"/>
+              <a:t>LLaMA</a:t>
+            </a:r>
+            <a:r>
+              <a:rPr lang="he-IL" dirty="0"/>
+              <a:t>.</a:t>
+            </a:r>
+          </a:p>
+          <a:p>
+            <a:pPr marL="0" algn="r" defTabSz="914400" rtl="1" eaLnBrk="1" latinLnBrk="0" hangingPunct="1"/>
+            <a:r>
+              <a:rPr lang="he-IL" dirty="0"/>
+              <a:t>מדובר במודלים בגדלים שונים, חלקם ציבוריים וחלקם קנייניים, כולם פותחו על-ידי קבוצות מחקר מובילות.</a:t>
+            </a:r>
+          </a:p>
+          <a:p>
+            <a:pPr marL="0" algn="r" defTabSz="914400" rtl="1" eaLnBrk="1" latinLnBrk="0" hangingPunct="1"/>
+            <a:r>
+              <a:rPr lang="he-IL" dirty="0"/>
+              <a:t>חלק מהמודלים מותאמים למשימות ספציפיות, כמו </a:t>
+            </a:r>
+            <a:r>
+              <a:rPr lang="en-US" dirty="0"/>
+              <a:t>Minerva</a:t>
+            </a:r>
+            <a:r>
+              <a:rPr lang="he-IL" dirty="0"/>
+              <a:t>, וחלקם כלליים מאוד כמו GPT-3.</a:t>
+            </a:r>
+            <a:endParaRPr lang="en-IL" dirty="0"/>
+          </a:p>
+        </p:txBody>
+      </p:sp>
+      <p:sp>
+        <p:nvSpPr>
+          <p:cNvPr id="4" name="Slide Number Placeholder 3"/>
+          <p:cNvSpPr>
+            <a:spLocks noGrp="1"/>
+          </p:cNvSpPr>
+          <p:nvPr>
+            <p:ph type="sldNum" sz="quarter" idx="5"/>
+          </p:nvPr>
+        </p:nvSpPr>
+        <p:spPr/>
+        <p:txBody>
+          <a:bodyPr/>
+          <a:lstStyle/>
+          <a:p>
+            <a:fld id="{476FFE5D-288A-DB4E-9912-CFF1A38B0A9A}" type="slidenum">
+              <a:rPr lang="en-IL" smtClean="0"/>
+              <a:t>5</a:t>
+            </a:fld>
+            <a:endParaRPr lang="en-IL"/>
+          </a:p>
+        </p:txBody>
+      </p:sp>
+    </p:spTree>
+    <p:extLst>
+      <p:ext uri="{BB962C8B-B14F-4D97-AF65-F5344CB8AC3E}">
+        <p14:creationId xmlns:p14="http://schemas.microsoft.com/office/powerpoint/2010/main" val="2575765281"/>
+      </p:ext>
+    </p:extLst>
+  </p:cSld>
+  <p:clrMapOvr>
+    <a:masterClrMapping/>
+  </p:clrMapOvr>
+</p:notes>
+</file>
+
+<file path=ppt/notesSlides/notesSlide6.xml><?xml version="1.0" encoding="utf-8"?>
+<p:notes xmlns:a="http://schemas.openxmlformats.org/drawingml/2006/main" xmlns:r="http://schemas.openxmlformats.org/officeDocument/2006/relationships" xmlns:p="http://schemas.openxmlformats.org/presentationml/2006/main">
+  <p:cSld>
+    <p:spTree>
+      <p:nvGrpSpPr>
+        <p:cNvPr id="1" name=""/>
+        <p:cNvGrpSpPr/>
+        <p:nvPr/>
+      </p:nvGrpSpPr>
+      <p:grpSpPr>
+        <a:xfrm>
+          <a:off x="0" y="0"/>
+          <a:ext cx="0" cy="0"/>
+          <a:chOff x="0" y="0"/>
+          <a:chExt cx="0" cy="0"/>
+        </a:xfrm>
+      </p:grpSpPr>
+      <p:sp>
+        <p:nvSpPr>
+          <p:cNvPr id="2" name="Slide Image Placeholder 1"/>
+          <p:cNvSpPr>
+            <a:spLocks noGrp="1" noRot="1" noChangeAspect="1"/>
+          </p:cNvSpPr>
+          <p:nvPr>
+            <p:ph type="sldImg"/>
+          </p:nvPr>
+        </p:nvSpPr>
+        <p:spPr/>
+      </p:sp>
+      <p:sp>
+        <p:nvSpPr>
+          <p:cNvPr id="3" name="Notes Placeholder 2"/>
+          <p:cNvSpPr>
+            <a:spLocks noGrp="1"/>
+          </p:cNvSpPr>
+          <p:nvPr>
+            <p:ph type="body" idx="1"/>
+          </p:nvPr>
+        </p:nvSpPr>
+        <p:spPr/>
+        <p:txBody>
+          <a:bodyPr/>
+          <a:lstStyle/>
+          <a:p>
+            <a:pPr marL="0" algn="r" defTabSz="914400" rtl="1" eaLnBrk="1" latinLnBrk="0" hangingPunct="1"/>
+            <a:r>
+              <a:rPr lang="he-IL" dirty="0"/>
+              <a:t>נתחיל ב-</a:t>
+            </a:r>
+            <a:r>
+              <a:rPr lang="en-US" dirty="0"/>
+              <a:t>Common Sense Reasoning</a:t>
+            </a:r>
+            <a:r>
+              <a:rPr lang="he-IL" dirty="0"/>
+              <a:t>.</a:t>
+            </a:r>
+          </a:p>
+          <a:p>
+            <a:pPr marL="0" algn="r" defTabSz="914400" rtl="1" eaLnBrk="1" latinLnBrk="0" hangingPunct="1"/>
+            <a:endParaRPr lang="he-IL" dirty="0"/>
+          </a:p>
+          <a:p>
+            <a:pPr marL="0" algn="r" defTabSz="914400" rtl="1" eaLnBrk="1" latinLnBrk="0" hangingPunct="1"/>
+            <a:r>
+              <a:rPr lang="he-IL" dirty="0"/>
+              <a:t>במדד זה מציגים למודל שאלות רב-ברירה מ-8 </a:t>
+            </a:r>
+            <a:r>
+              <a:rPr lang="he-IL" dirty="0" err="1"/>
+              <a:t>דאטאסטים</a:t>
+            </a:r>
+            <a:r>
+              <a:rPr lang="he-IL" dirty="0"/>
+              <a:t>, הכוללים מבחני השלמת משפטים עם או בלי בחירת מילה.</a:t>
+            </a:r>
+          </a:p>
+          <a:p>
+            <a:pPr marL="0" algn="r" defTabSz="914400" rtl="1" eaLnBrk="1" latinLnBrk="0" hangingPunct="1"/>
+            <a:endParaRPr lang="he-IL" dirty="0"/>
+          </a:p>
+          <a:p>
+            <a:pPr marL="0" algn="r" defTabSz="914400" rtl="1" eaLnBrk="1" latinLnBrk="0" hangingPunct="1"/>
+            <a:r>
+              <a:rPr lang="he-IL" dirty="0"/>
+              <a:t>המבחן נערך ב־</a:t>
+            </a:r>
+            <a:r>
+              <a:rPr lang="en-US" dirty="0"/>
+              <a:t>zero-shot</a:t>
+            </a:r>
+            <a:r>
+              <a:rPr lang="he-IL" dirty="0"/>
+              <a:t>.</a:t>
+            </a:r>
+            <a:endParaRPr lang="en-US" dirty="0"/>
+          </a:p>
+          <a:p>
+            <a:pPr marL="0" algn="r" defTabSz="914400" rtl="1" eaLnBrk="1" latinLnBrk="0" hangingPunct="1"/>
+            <a:endParaRPr lang="en-US" dirty="0"/>
+          </a:p>
+          <a:p>
+            <a:pPr marL="0" algn="r" defTabSz="914400" rtl="1" eaLnBrk="1" latinLnBrk="0" hangingPunct="1"/>
+            <a:r>
+              <a:rPr lang="he-IL" dirty="0"/>
+              <a:t>אפשר לראות שהמודל הגדול, </a:t>
+            </a:r>
+            <a:r>
+              <a:rPr lang="en-US" dirty="0"/>
+              <a:t>LLaMA‑65B</a:t>
+            </a:r>
+            <a:r>
+              <a:rPr lang="he-IL" dirty="0"/>
+              <a:t>, מתעלה על רוב המודלים. הוא מנצח את </a:t>
+            </a:r>
+            <a:r>
+              <a:rPr lang="en-US" dirty="0"/>
+              <a:t>Chinchilla‑70B</a:t>
+            </a:r>
+            <a:r>
+              <a:rPr lang="he-IL" dirty="0"/>
+              <a:t>, מודל בסדר גודל דומה, ואפילו גובר על </a:t>
+            </a:r>
+            <a:r>
+              <a:rPr lang="en-US" dirty="0"/>
+              <a:t>PaLM‑540B</a:t>
+            </a:r>
+            <a:r>
+              <a:rPr lang="he-IL" dirty="0"/>
+              <a:t>, </a:t>
+            </a:r>
+            <a:r>
+              <a:rPr lang="en-US" dirty="0"/>
+              <a:t> </a:t>
+            </a:r>
+            <a:r>
+              <a:rPr lang="he-IL" dirty="0"/>
+              <a:t>שהוא מודל ענק.</a:t>
+            </a:r>
+          </a:p>
+          <a:p>
+            <a:pPr marL="0" algn="r" defTabSz="914400" rtl="1" eaLnBrk="1" latinLnBrk="0" hangingPunct="1"/>
+            <a:endParaRPr lang="he-IL" dirty="0"/>
+          </a:p>
+          <a:p>
+            <a:pPr marL="0" algn="r" defTabSz="914400" rtl="1" eaLnBrk="1" latinLnBrk="0" hangingPunct="1"/>
+            <a:r>
+              <a:rPr lang="he-IL" dirty="0"/>
+              <a:t>בנוסף, </a:t>
+            </a:r>
+            <a:r>
+              <a:rPr lang="en-US" dirty="0"/>
+              <a:t>LLaMA‑13B</a:t>
+            </a:r>
+            <a:r>
+              <a:rPr lang="he-IL" dirty="0"/>
+              <a:t> מנצח את </a:t>
+            </a:r>
+            <a:r>
+              <a:rPr lang="en-US" dirty="0"/>
+              <a:t>GPT‑3</a:t>
+            </a:r>
+            <a:r>
+              <a:rPr lang="he-IL" dirty="0"/>
+              <a:t> ברוב המדדים, למרות שהוא קטן ממנו בערך פי 10 - אחד הממצאים המרכזיים של המאמר, שאפשר להשיג שיפור בביצועים גם בלי להמשיך להגדיל את כמות הפרמטרים.</a:t>
+            </a:r>
+            <a:endParaRPr lang="en-IL" dirty="0"/>
+          </a:p>
+        </p:txBody>
+      </p:sp>
+      <p:sp>
+        <p:nvSpPr>
+          <p:cNvPr id="4" name="Slide Number Placeholder 3"/>
+          <p:cNvSpPr>
+            <a:spLocks noGrp="1"/>
+          </p:cNvSpPr>
+          <p:nvPr>
+            <p:ph type="sldNum" sz="quarter" idx="5"/>
+          </p:nvPr>
+        </p:nvSpPr>
+        <p:spPr/>
+        <p:txBody>
+          <a:bodyPr/>
+          <a:lstStyle/>
+          <a:p>
+            <a:fld id="{476FFE5D-288A-DB4E-9912-CFF1A38B0A9A}" type="slidenum">
+              <a:rPr lang="en-IL" smtClean="0"/>
+              <a:t>7</a:t>
+            </a:fld>
+            <a:endParaRPr lang="en-IL"/>
+          </a:p>
+        </p:txBody>
+      </p:sp>
+    </p:spTree>
+    <p:extLst>
+      <p:ext uri="{BB962C8B-B14F-4D97-AF65-F5344CB8AC3E}">
+        <p14:creationId xmlns:p14="http://schemas.microsoft.com/office/powerpoint/2010/main" val="567418603"/>
+      </p:ext>
+    </p:extLst>
+  </p:cSld>
+  <p:clrMapOvr>
+    <a:masterClrMapping/>
+  </p:clrMapOvr>
+</p:notes>
+</file>
+
+<file path=ppt/notesSlides/notesSlide7.xml><?xml version="1.0" encoding="utf-8"?>
+<p:notes xmlns:a="http://schemas.openxmlformats.org/drawingml/2006/main" xmlns:r="http://schemas.openxmlformats.org/officeDocument/2006/relationships" xmlns:p="http://schemas.openxmlformats.org/presentationml/2006/main">
+  <p:cSld>
+    <p:spTree>
+      <p:nvGrpSpPr>
+        <p:cNvPr id="1" name=""/>
+        <p:cNvGrpSpPr/>
+        <p:nvPr/>
+      </p:nvGrpSpPr>
+      <p:grpSpPr>
+        <a:xfrm>
+          <a:off x="0" y="0"/>
+          <a:ext cx="0" cy="0"/>
+          <a:chOff x="0" y="0"/>
+          <a:chExt cx="0" cy="0"/>
+        </a:xfrm>
+      </p:grpSpPr>
+      <p:sp>
+        <p:nvSpPr>
+          <p:cNvPr id="2" name="Slide Image Placeholder 1"/>
+          <p:cNvSpPr>
+            <a:spLocks noGrp="1" noRot="1" noChangeAspect="1"/>
+          </p:cNvSpPr>
+          <p:nvPr>
+            <p:ph type="sldImg"/>
+          </p:nvPr>
+        </p:nvSpPr>
+        <p:spPr/>
+      </p:sp>
+      <p:sp>
+        <p:nvSpPr>
+          <p:cNvPr id="3" name="Notes Placeholder 2"/>
+          <p:cNvSpPr>
+            <a:spLocks noGrp="1"/>
+          </p:cNvSpPr>
+          <p:nvPr>
+            <p:ph type="body" idx="1"/>
+          </p:nvPr>
+        </p:nvSpPr>
+        <p:spPr/>
+        <p:txBody>
+          <a:bodyPr/>
+          <a:lstStyle/>
+          <a:p>
+            <a:pPr marL="0" algn="r" defTabSz="914400" rtl="1" eaLnBrk="1" latinLnBrk="0" hangingPunct="1"/>
+            <a:r>
+              <a:rPr lang="he-IL" dirty="0"/>
+              <a:t>נעבור </a:t>
+            </a:r>
+            <a:r>
+              <a:rPr lang="he-IL" dirty="0" err="1"/>
+              <a:t>לבנצ'מרק</a:t>
+            </a:r>
+            <a:r>
+              <a:rPr lang="he-IL" dirty="0"/>
+              <a:t> </a:t>
+            </a:r>
+            <a:r>
+              <a:rPr lang="en-US" dirty="0"/>
+              <a:t>Closed-Book Question Answering</a:t>
+            </a:r>
+            <a:r>
+              <a:rPr lang="he-IL" dirty="0"/>
+              <a:t>.</a:t>
+            </a:r>
+          </a:p>
+          <a:p>
+            <a:pPr marL="0" algn="r" defTabSz="914400" rtl="1" eaLnBrk="1" latinLnBrk="0" hangingPunct="1"/>
+            <a:endParaRPr lang="he-IL" dirty="0"/>
+          </a:p>
+          <a:p>
+            <a:pPr marL="0" algn="r" defTabSz="914400" rtl="1" eaLnBrk="1" latinLnBrk="0" hangingPunct="1"/>
+            <a:r>
+              <a:rPr lang="he-IL" dirty="0"/>
+              <a:t>כאן בודקים את ההתאמה המדויקת בין תשובת המודל לתשובה הנכונה. לכן, ניתן לראות הבדלים משמעותיים ככל שמספקים למודל יותר דוגמאות לפני השאלה.</a:t>
+            </a:r>
+          </a:p>
+          <a:p>
+            <a:pPr marL="0" algn="r" defTabSz="914400" rtl="1" eaLnBrk="1" latinLnBrk="0" hangingPunct="1"/>
+            <a:endParaRPr lang="he-IL" dirty="0"/>
+          </a:p>
+          <a:p>
+            <a:pPr marL="0" algn="r" defTabSz="914400" rtl="1" eaLnBrk="1" latinLnBrk="0" hangingPunct="1"/>
+            <a:r>
+              <a:rPr lang="he-IL" dirty="0"/>
+              <a:t>כאן השתמשו ב-</a:t>
+            </a:r>
+            <a:r>
+              <a:rPr lang="en-US" dirty="0"/>
+              <a:t>zero-shot</a:t>
+            </a:r>
+            <a:r>
+              <a:rPr lang="he-IL" dirty="0"/>
+              <a:t> כ-</a:t>
+            </a:r>
+            <a:r>
+              <a:rPr lang="en-US" dirty="0"/>
+              <a:t>baseline</a:t>
+            </a:r>
+            <a:r>
+              <a:rPr lang="he-IL" dirty="0"/>
+              <a:t>, אחר כך ב-</a:t>
+            </a:r>
+            <a:r>
+              <a:rPr lang="en-US" dirty="0"/>
+              <a:t>1-shot</a:t>
+            </a:r>
+            <a:r>
+              <a:rPr lang="he-IL" dirty="0"/>
+              <a:t> </a:t>
+            </a:r>
+            <a:r>
+              <a:rPr lang="he-IL" dirty="0" err="1"/>
+              <a:t>וב</a:t>
+            </a:r>
+            <a:r>
+              <a:rPr lang="he-IL" dirty="0"/>
+              <a:t>-</a:t>
+            </a:r>
+            <a:r>
+              <a:rPr lang="en-US" dirty="0"/>
+              <a:t>5-shot</a:t>
+            </a:r>
+            <a:r>
+              <a:rPr lang="he-IL" dirty="0"/>
+              <a:t>, ואף הגזימו וניסו גם </a:t>
+            </a:r>
+            <a:r>
+              <a:rPr lang="en-US" dirty="0"/>
+              <a:t>64-shot</a:t>
+            </a:r>
+            <a:r>
+              <a:rPr lang="he-IL" dirty="0"/>
+              <a:t>, כנראה כדי לראות לכמה אפשר להגיע עם ודאות גבוהה שהמודל הבין את המשימה.</a:t>
+            </a:r>
+          </a:p>
+          <a:p>
+            <a:pPr marL="0" algn="r" defTabSz="914400" rtl="1" eaLnBrk="1" latinLnBrk="0" hangingPunct="1"/>
+            <a:endParaRPr lang="he-IL" dirty="0"/>
+          </a:p>
+          <a:p>
+            <a:pPr marL="0" algn="r" defTabSz="914400" rtl="1" eaLnBrk="1" latinLnBrk="0" hangingPunct="1"/>
+            <a:r>
+              <a:rPr lang="he-IL" dirty="0"/>
+              <a:t>אפשר לראות ש-</a:t>
+            </a:r>
+            <a:r>
+              <a:rPr lang="en-US" dirty="0"/>
+              <a:t>LLaMA‑65B</a:t>
+            </a:r>
+            <a:r>
+              <a:rPr lang="he-IL" dirty="0"/>
+              <a:t> השיג תוצאות מצוינות בכל </a:t>
+            </a:r>
+            <a:r>
+              <a:rPr lang="en-US" dirty="0"/>
+              <a:t>setting</a:t>
+            </a:r>
+            <a:r>
+              <a:rPr lang="he-IL" dirty="0"/>
+              <a:t>.</a:t>
+            </a:r>
+          </a:p>
+          <a:p>
+            <a:pPr marL="0" algn="r" defTabSz="914400" rtl="1" eaLnBrk="1" latinLnBrk="0" hangingPunct="1"/>
+            <a:endParaRPr lang="en-US" dirty="0"/>
+          </a:p>
+          <a:p>
+            <a:pPr marL="0" algn="r" defTabSz="914400" rtl="1" eaLnBrk="1" latinLnBrk="0" hangingPunct="1"/>
+            <a:r>
+              <a:rPr lang="he-IL" dirty="0"/>
+              <a:t>בנוסף, </a:t>
+            </a:r>
+            <a:r>
+              <a:rPr lang="en-US" dirty="0"/>
+              <a:t>LLaMA‑13B</a:t>
+            </a:r>
+            <a:r>
+              <a:rPr lang="he-IL" dirty="0"/>
+              <a:t> מציג ביצועים שמתחרים ב-</a:t>
+            </a:r>
+            <a:r>
+              <a:rPr lang="en-US" dirty="0"/>
+              <a:t>GPT‑3</a:t>
+            </a:r>
+            <a:r>
+              <a:rPr lang="he-IL" dirty="0"/>
+              <a:t> </a:t>
+            </a:r>
+            <a:r>
+              <a:rPr lang="he-IL" dirty="0" err="1"/>
+              <a:t>וב</a:t>
+            </a:r>
+            <a:r>
+              <a:rPr lang="he-IL" dirty="0"/>
+              <a:t>-</a:t>
+            </a:r>
+            <a:r>
+              <a:rPr lang="en-US" dirty="0"/>
+              <a:t>Chinchilla‑70B</a:t>
+            </a:r>
+            <a:r>
+              <a:rPr lang="he-IL" dirty="0"/>
+              <a:t>, למרות שהוא קטן מהם פי 5 עד פי 10.</a:t>
+            </a:r>
+          </a:p>
+          <a:p>
+            <a:pPr marL="0" algn="r" defTabSz="914400" rtl="1" eaLnBrk="1" latinLnBrk="0" hangingPunct="1"/>
+            <a:endParaRPr lang="he-IL" dirty="0"/>
+          </a:p>
+          <a:p>
+            <a:pPr marL="0" algn="r" defTabSz="914400" rtl="1" eaLnBrk="1" latinLnBrk="0" hangingPunct="1"/>
+            <a:r>
+              <a:rPr lang="he-IL" dirty="0"/>
+              <a:t>יתרון נוסף של </a:t>
+            </a:r>
+            <a:r>
+              <a:rPr lang="en-US" dirty="0"/>
+              <a:t>LLaMA‑13B</a:t>
+            </a:r>
+            <a:r>
+              <a:rPr lang="he-IL" dirty="0"/>
+              <a:t> הוא שניתן להריץ </a:t>
+            </a:r>
+            <a:r>
+              <a:rPr lang="en-US" dirty="0"/>
+              <a:t>infer</a:t>
+            </a:r>
+            <a:r>
+              <a:rPr lang="he-IL" dirty="0"/>
+              <a:t> שלו על יחידת GPU בודדת, שעוד שנדרשות מספר יחידות למודלים הגדולים יותר.</a:t>
+            </a:r>
+          </a:p>
+        </p:txBody>
+      </p:sp>
+      <p:sp>
+        <p:nvSpPr>
+          <p:cNvPr id="4" name="Slide Number Placeholder 3"/>
+          <p:cNvSpPr>
+            <a:spLocks noGrp="1"/>
+          </p:cNvSpPr>
+          <p:nvPr>
+            <p:ph type="sldNum" sz="quarter" idx="5"/>
+          </p:nvPr>
+        </p:nvSpPr>
+        <p:spPr/>
+        <p:txBody>
+          <a:bodyPr/>
+          <a:lstStyle/>
+          <a:p>
+            <a:fld id="{476FFE5D-288A-DB4E-9912-CFF1A38B0A9A}" type="slidenum">
+              <a:rPr lang="en-IL" smtClean="0"/>
+              <a:t>8</a:t>
+            </a:fld>
+            <a:endParaRPr lang="en-IL"/>
+          </a:p>
+        </p:txBody>
+      </p:sp>
+    </p:spTree>
+    <p:extLst>
+      <p:ext uri="{BB962C8B-B14F-4D97-AF65-F5344CB8AC3E}">
+        <p14:creationId xmlns:p14="http://schemas.microsoft.com/office/powerpoint/2010/main" val="3992145387"/>
+      </p:ext>
+    </p:extLst>
+  </p:cSld>
+  <p:clrMapOvr>
+    <a:masterClrMapping/>
+  </p:clrMapOvr>
+</p:notes>
+</file>
+
+<file path=ppt/notesSlides/notesSlide8.xml><?xml version="1.0" encoding="utf-8"?>
+<p:notes xmlns:a="http://schemas.openxmlformats.org/drawingml/2006/main" xmlns:r="http://schemas.openxmlformats.org/officeDocument/2006/relationships" xmlns:p="http://schemas.openxmlformats.org/presentationml/2006/main">
+  <p:cSld>
+    <p:spTree>
+      <p:nvGrpSpPr>
+        <p:cNvPr id="1" name=""/>
+        <p:cNvGrpSpPr/>
+        <p:nvPr/>
+      </p:nvGrpSpPr>
+      <p:grpSpPr>
+        <a:xfrm>
+          <a:off x="0" y="0"/>
+          <a:ext cx="0" cy="0"/>
+          <a:chOff x="0" y="0"/>
+          <a:chExt cx="0" cy="0"/>
+        </a:xfrm>
+      </p:grpSpPr>
+      <p:sp>
+        <p:nvSpPr>
+          <p:cNvPr id="2" name="Slide Image Placeholder 1"/>
+          <p:cNvSpPr>
+            <a:spLocks noGrp="1" noRot="1" noChangeAspect="1"/>
+          </p:cNvSpPr>
+          <p:nvPr>
+            <p:ph type="sldImg"/>
+          </p:nvPr>
+        </p:nvSpPr>
+        <p:spPr/>
+      </p:sp>
+      <p:sp>
+        <p:nvSpPr>
+          <p:cNvPr id="3" name="Notes Placeholder 2"/>
+          <p:cNvSpPr>
+            <a:spLocks noGrp="1"/>
+          </p:cNvSpPr>
+          <p:nvPr>
+            <p:ph type="body" idx="1"/>
+          </p:nvPr>
+        </p:nvSpPr>
+        <p:spPr/>
+        <p:txBody>
+          <a:bodyPr/>
+          <a:lstStyle/>
+          <a:p>
+            <a:pPr marL="0" algn="r" defTabSz="914400" rtl="1" eaLnBrk="1" latinLnBrk="0" hangingPunct="1"/>
+            <a:r>
+              <a:rPr lang="he-IL" dirty="0"/>
+              <a:t>נעבור ל-</a:t>
+            </a:r>
+            <a:r>
+              <a:rPr lang="en-US" dirty="0"/>
+              <a:t>Reading Comprehension</a:t>
+            </a:r>
+            <a:r>
+              <a:rPr lang="he-IL" dirty="0"/>
+              <a:t>.</a:t>
+            </a:r>
+          </a:p>
+          <a:p>
+            <a:pPr marL="0" algn="r" defTabSz="914400" rtl="1" eaLnBrk="1" latinLnBrk="0" hangingPunct="1"/>
+            <a:endParaRPr lang="he-IL" dirty="0"/>
+          </a:p>
+          <a:p>
+            <a:pPr marL="0" algn="r" defTabSz="914400" rtl="1" eaLnBrk="1" latinLnBrk="0" hangingPunct="1"/>
+            <a:r>
+              <a:rPr lang="he-IL" dirty="0"/>
+              <a:t>כאן מציגים למודל פסקאות טקסט בשתי רמות קושי, ואז שואלים אותו שאלות רב-ברירה ב-</a:t>
+            </a:r>
+            <a:r>
+              <a:rPr lang="en-US" dirty="0"/>
+              <a:t>zero-shot</a:t>
+            </a:r>
+            <a:r>
+              <a:rPr lang="he-IL" dirty="0"/>
+              <a:t>.</a:t>
+            </a:r>
+            <a:endParaRPr lang="en-US" dirty="0"/>
+          </a:p>
+          <a:p>
+            <a:pPr marL="0" algn="r" defTabSz="914400" rtl="1" eaLnBrk="1" latinLnBrk="0" hangingPunct="1"/>
+            <a:endParaRPr lang="en-US" dirty="0"/>
+          </a:p>
+          <a:p>
+            <a:pPr marL="0" algn="r" defTabSz="914400" rtl="1" eaLnBrk="1" latinLnBrk="0" hangingPunct="1"/>
+            <a:r>
+              <a:rPr lang="he-IL" dirty="0"/>
+              <a:t>מהמדד הזה עולה כי </a:t>
+            </a:r>
+            <a:r>
+              <a:rPr lang="en-US" dirty="0"/>
+              <a:t>LLaMA‑65B</a:t>
+            </a:r>
+            <a:r>
+              <a:rPr lang="he-IL" dirty="0"/>
+              <a:t> מתעלה על </a:t>
+            </a:r>
+            <a:r>
+              <a:rPr lang="en-US" dirty="0"/>
+              <a:t>PaLM‑540B</a:t>
+            </a:r>
+            <a:r>
+              <a:rPr lang="he-IL" dirty="0"/>
+              <a:t>, וכדי להתחרות ב-</a:t>
+            </a:r>
+            <a:r>
+              <a:rPr lang="en-US" dirty="0"/>
+              <a:t>GPT-3</a:t>
+            </a:r>
+            <a:r>
+              <a:rPr lang="he-IL" dirty="0"/>
+              <a:t> מספיק גם </a:t>
+            </a:r>
+            <a:r>
+              <a:rPr lang="en-US" dirty="0"/>
+              <a:t>LLaMA-13B</a:t>
+            </a:r>
+            <a:r>
+              <a:rPr lang="he-IL" dirty="0"/>
+              <a:t>.</a:t>
+            </a:r>
+          </a:p>
+        </p:txBody>
+      </p:sp>
+      <p:sp>
+        <p:nvSpPr>
+          <p:cNvPr id="4" name="Slide Number Placeholder 3"/>
+          <p:cNvSpPr>
+            <a:spLocks noGrp="1"/>
+          </p:cNvSpPr>
+          <p:nvPr>
+            <p:ph type="sldNum" sz="quarter" idx="5"/>
+          </p:nvPr>
+        </p:nvSpPr>
+        <p:spPr/>
+        <p:txBody>
+          <a:bodyPr/>
+          <a:lstStyle/>
+          <a:p>
+            <a:fld id="{476FFE5D-288A-DB4E-9912-CFF1A38B0A9A}" type="slidenum">
+              <a:rPr lang="en-IL" smtClean="0"/>
+              <a:t>9</a:t>
+            </a:fld>
+            <a:endParaRPr lang="en-IL"/>
+          </a:p>
+        </p:txBody>
+      </p:sp>
+    </p:spTree>
+    <p:extLst>
+      <p:ext uri="{BB962C8B-B14F-4D97-AF65-F5344CB8AC3E}">
+        <p14:creationId xmlns:p14="http://schemas.microsoft.com/office/powerpoint/2010/main" val="2602148964"/>
+      </p:ext>
+    </p:extLst>
+  </p:cSld>
+  <p:clrMapOvr>
+    <a:masterClrMapping/>
+  </p:clrMapOvr>
+</p:notes>
+</file>
+
+<file path=ppt/notesSlides/notesSlide9.xml><?xml version="1.0" encoding="utf-8"?>
+<p:notes xmlns:a="http://schemas.openxmlformats.org/drawingml/2006/main" xmlns:r="http://schemas.openxmlformats.org/officeDocument/2006/relationships" xmlns:p="http://schemas.openxmlformats.org/presentationml/2006/main">
+  <p:cSld>
+    <p:spTree>
+      <p:nvGrpSpPr>
+        <p:cNvPr id="1" name=""/>
+        <p:cNvGrpSpPr/>
+        <p:nvPr/>
+      </p:nvGrpSpPr>
+      <p:grpSpPr>
+        <a:xfrm>
+          <a:off x="0" y="0"/>
+          <a:ext cx="0" cy="0"/>
+          <a:chOff x="0" y="0"/>
+          <a:chExt cx="0" cy="0"/>
+        </a:xfrm>
+      </p:grpSpPr>
+      <p:sp>
+        <p:nvSpPr>
+          <p:cNvPr id="2" name="Slide Image Placeholder 1"/>
+          <p:cNvSpPr>
+            <a:spLocks noGrp="1" noRot="1" noChangeAspect="1"/>
+          </p:cNvSpPr>
+          <p:nvPr>
+            <p:ph type="sldImg"/>
+          </p:nvPr>
+        </p:nvSpPr>
+        <p:spPr/>
+      </p:sp>
+      <p:sp>
+        <p:nvSpPr>
+          <p:cNvPr id="3" name="Notes Placeholder 2"/>
+          <p:cNvSpPr>
+            <a:spLocks noGrp="1"/>
+          </p:cNvSpPr>
+          <p:nvPr>
+            <p:ph type="body" idx="1"/>
+          </p:nvPr>
+        </p:nvSpPr>
+        <p:spPr/>
+        <p:txBody>
+          <a:bodyPr/>
+          <a:lstStyle/>
+          <a:p>
+            <a:pPr marL="0" algn="r" defTabSz="914400" rtl="1" eaLnBrk="1" latinLnBrk="0" hangingPunct="1"/>
+            <a:r>
+              <a:rPr lang="he-IL" dirty="0"/>
+              <a:t>כדי למדוד את יכולת המודל לפתור בעיות מתמטיות השתמשו בשני </a:t>
+            </a:r>
+            <a:r>
+              <a:rPr lang="he-IL" dirty="0" err="1"/>
+              <a:t>הדאטאסטים</a:t>
+            </a:r>
+            <a:r>
+              <a:rPr lang="he-IL" dirty="0"/>
+              <a:t>: </a:t>
+            </a:r>
+            <a:r>
+              <a:rPr lang="en-US" dirty="0"/>
+              <a:t>MATH</a:t>
+            </a:r>
+            <a:r>
+              <a:rPr lang="he-IL" dirty="0"/>
+              <a:t> ו-</a:t>
+            </a:r>
+            <a:r>
+              <a:rPr lang="en-US" dirty="0"/>
+              <a:t>GSM8k</a:t>
+            </a:r>
+            <a:r>
+              <a:rPr lang="he-IL" dirty="0"/>
+              <a:t>, בתצורת </a:t>
+            </a:r>
+            <a:r>
+              <a:rPr lang="en-US" dirty="0"/>
+              <a:t>zero-shot</a:t>
+            </a:r>
+            <a:r>
+              <a:rPr lang="he-IL" dirty="0"/>
+              <a:t>, עם ובלי </a:t>
+            </a:r>
+            <a:r>
+              <a:rPr lang="en-US" dirty="0"/>
+              <a:t>majority vote</a:t>
+            </a:r>
+            <a:r>
+              <a:rPr lang="he-IL" dirty="0"/>
+              <a:t>.</a:t>
+            </a:r>
+          </a:p>
+          <a:p>
+            <a:pPr marL="0" algn="r" defTabSz="914400" rtl="1" eaLnBrk="1" latinLnBrk="0" hangingPunct="1"/>
+            <a:endParaRPr lang="he-IL" dirty="0"/>
+          </a:p>
+          <a:p>
+            <a:pPr marL="0" algn="r" defTabSz="914400" rtl="1" eaLnBrk="1" latinLnBrk="0" hangingPunct="1"/>
+            <a:r>
+              <a:rPr lang="he-IL" dirty="0"/>
+              <a:t>כלומר, המודל קיבל מספר ניסיונות לענות על השאלה, ואם רוב התשובות היו נכונות - זה נחשב נכון.</a:t>
+            </a:r>
+          </a:p>
+          <a:p>
+            <a:pPr marL="0" algn="r" defTabSz="914400" rtl="1" eaLnBrk="1" latinLnBrk="0" hangingPunct="1"/>
+            <a:endParaRPr lang="he-IL" dirty="0"/>
+          </a:p>
+          <a:p>
+            <a:pPr marL="0" algn="r" defTabSz="914400" rtl="1" eaLnBrk="1" latinLnBrk="0" hangingPunct="1"/>
+            <a:r>
+              <a:rPr lang="he-IL" dirty="0"/>
+              <a:t>במדד זה משווים את </a:t>
+            </a:r>
+            <a:r>
+              <a:rPr lang="en-US" dirty="0"/>
+              <a:t>LLaMA</a:t>
+            </a:r>
+            <a:r>
+              <a:rPr lang="he-IL" dirty="0"/>
+              <a:t> ל-</a:t>
+            </a:r>
+            <a:r>
+              <a:rPr lang="en-US" dirty="0"/>
+              <a:t>Minerva</a:t>
+            </a:r>
+            <a:r>
+              <a:rPr lang="he-IL" dirty="0"/>
+              <a:t>, סדרת מודלים שעברו </a:t>
+            </a:r>
+            <a:r>
+              <a:rPr lang="he-IL" dirty="0" err="1"/>
+              <a:t>טיונינג</a:t>
+            </a:r>
+            <a:r>
+              <a:rPr lang="he-IL" dirty="0"/>
+              <a:t> לפתרון שאלות מתמטיות, </a:t>
+            </a:r>
+            <a:r>
+              <a:rPr lang="he-IL" dirty="0" err="1"/>
+              <a:t>ול</a:t>
+            </a:r>
+            <a:r>
+              <a:rPr lang="he-IL" dirty="0"/>
+              <a:t>-</a:t>
+            </a:r>
+            <a:r>
+              <a:rPr lang="en-US" dirty="0" err="1"/>
+              <a:t>PaLM</a:t>
+            </a:r>
+            <a:r>
+              <a:rPr lang="he-IL" dirty="0"/>
+              <a:t> שאם תשאלו אותי החוקרים אוהבים להשוות אליו כי כמעט תמיד </a:t>
+            </a:r>
+            <a:r>
+              <a:rPr lang="en-US" dirty="0"/>
+              <a:t>LLaMA</a:t>
+            </a:r>
+            <a:r>
+              <a:rPr lang="he-IL" dirty="0"/>
+              <a:t> מנצח אותו.</a:t>
+            </a:r>
+          </a:p>
+          <a:p>
+            <a:pPr marL="0" algn="r" defTabSz="914400" rtl="1" eaLnBrk="1" latinLnBrk="0" hangingPunct="1"/>
+            <a:endParaRPr lang="he-IL" dirty="0"/>
+          </a:p>
+          <a:p>
+            <a:pPr marL="0" algn="r" defTabSz="914400" rtl="1" eaLnBrk="1" latinLnBrk="0" hangingPunct="1"/>
+            <a:r>
+              <a:rPr lang="he-IL" dirty="0"/>
+              <a:t>אפשר לראות ש-</a:t>
+            </a:r>
+            <a:r>
+              <a:rPr lang="en-US" dirty="0"/>
+              <a:t>LLaMA‑65B</a:t>
+            </a:r>
+            <a:r>
+              <a:rPr lang="he-IL" dirty="0"/>
+              <a:t> מנצח את </a:t>
+            </a:r>
+            <a:r>
+              <a:rPr lang="en-US" dirty="0"/>
+              <a:t>Minerva‑62B</a:t>
+            </a:r>
+            <a:r>
+              <a:rPr lang="he-IL" dirty="0"/>
+              <a:t> על </a:t>
+            </a:r>
+            <a:r>
+              <a:rPr lang="en-US" dirty="0"/>
+              <a:t>GSM8k</a:t>
+            </a:r>
+            <a:r>
+              <a:rPr lang="he-IL" dirty="0"/>
+              <a:t> – וזאת ללא </a:t>
+            </a:r>
+            <a:r>
+              <a:rPr lang="he-IL" dirty="0" err="1"/>
+              <a:t>טיונינג</a:t>
+            </a:r>
+            <a:r>
+              <a:rPr lang="he-IL" dirty="0"/>
+              <a:t> על מתמטיקה.</a:t>
+            </a:r>
+            <a:endParaRPr lang="en-IL" dirty="0"/>
+          </a:p>
+        </p:txBody>
+      </p:sp>
+      <p:sp>
+        <p:nvSpPr>
+          <p:cNvPr id="4" name="Slide Number Placeholder 3"/>
+          <p:cNvSpPr>
+            <a:spLocks noGrp="1"/>
+          </p:cNvSpPr>
+          <p:nvPr>
+            <p:ph type="sldNum" sz="quarter" idx="5"/>
+          </p:nvPr>
+        </p:nvSpPr>
+        <p:spPr/>
+        <p:txBody>
+          <a:bodyPr/>
+          <a:lstStyle/>
+          <a:p>
+            <a:fld id="{476FFE5D-288A-DB4E-9912-CFF1A38B0A9A}" type="slidenum">
+              <a:rPr lang="en-IL" smtClean="0"/>
+              <a:t>10</a:t>
+            </a:fld>
+            <a:endParaRPr lang="en-IL"/>
+          </a:p>
+        </p:txBody>
+      </p:sp>
+    </p:spTree>
+    <p:extLst>
+      <p:ext uri="{BB962C8B-B14F-4D97-AF65-F5344CB8AC3E}">
+        <p14:creationId xmlns:p14="http://schemas.microsoft.com/office/powerpoint/2010/main" val="4034084839"/>
+      </p:ext>
+    </p:extLst>
+  </p:cSld>
+  <p:clrMapOvr>
+    <a:masterClrMapping/>
+  </p:clrMapOvr>
+</p:notes>
+</file>
+
 <file path=ppt/slideLayouts/slideLayout1.xml><?xml version="1.0" encoding="utf-8"?>
 <p:sldLayout xmlns:a="http://schemas.openxmlformats.org/drawingml/2006/main" xmlns:r="http://schemas.openxmlformats.org/officeDocument/2006/relationships" xmlns:p="http://schemas.openxmlformats.org/presentationml/2006/main" showMasterSp="0" type="title" preserve="1">
   <p:cSld name="Title Slide">
@@ -1720,7 +6666,7 @@
             <a:fld id="{87DE6118-2437-4B30-8E3C-4D2BE6020583}" type="datetimeFigureOut">
               <a:rPr lang="en-US" dirty="0"/>
               <a:pPr/>
-              <a:t>11/29/25</a:t>
+              <a:t>11/30/25</a:t>
             </a:fld>
             <a:endParaRPr lang="en-US" dirty="0"/>
           </a:p>
@@ -2046,7 +6992,7 @@
           <a:p>
             <a:fld id="{87DE6118-2437-4B30-8E3C-4D2BE6020583}" type="datetimeFigureOut">
               <a:rPr lang="en-US" dirty="0"/>
-              <a:t>11/29/25</a:t>
+              <a:t>11/30/25</a:t>
             </a:fld>
             <a:endParaRPr lang="en-US" dirty="0"/>
           </a:p>
@@ -2221,7 +7167,7 @@
           <a:p>
             <a:fld id="{87DE6118-2437-4B30-8E3C-4D2BE6020583}" type="datetimeFigureOut">
               <a:rPr lang="en-US" dirty="0"/>
-              <a:t>11/29/25</a:t>
+              <a:t>11/30/25</a:t>
             </a:fld>
             <a:endParaRPr lang="en-US" dirty="0"/>
           </a:p>
@@ -2386,7 +7332,7 @@
           <a:p>
             <a:fld id="{87DE6118-2437-4B30-8E3C-4D2BE6020583}" type="datetimeFigureOut">
               <a:rPr lang="en-US" dirty="0"/>
-              <a:t>11/29/25</a:t>
+              <a:t>11/30/25</a:t>
             </a:fld>
             <a:endParaRPr lang="en-US" dirty="0"/>
           </a:p>
@@ -2659,7 +7605,7 @@
             <a:fld id="{87DE6118-2437-4B30-8E3C-4D2BE6020583}" type="datetimeFigureOut">
               <a:rPr lang="en-US" dirty="0"/>
               <a:pPr/>
-              <a:t>11/29/25</a:t>
+              <a:t>11/30/25</a:t>
             </a:fld>
             <a:endParaRPr lang="en-US" dirty="0"/>
           </a:p>
@@ -3049,7 +7995,7 @@
           <a:p>
             <a:fld id="{87DE6118-2437-4B30-8E3C-4D2BE6020583}" type="datetimeFigureOut">
               <a:rPr lang="en-US" dirty="0"/>
-              <a:t>11/29/25</a:t>
+              <a:t>11/30/25</a:t>
             </a:fld>
             <a:endParaRPr lang="en-US" dirty="0"/>
           </a:p>
@@ -3521,7 +8467,7 @@
           <a:p>
             <a:fld id="{87DE6118-2437-4B30-8E3C-4D2BE6020583}" type="datetimeFigureOut">
               <a:rPr lang="en-US" dirty="0"/>
-              <a:t>11/29/25</a:t>
+              <a:t>11/30/25</a:t>
             </a:fld>
             <a:endParaRPr lang="en-US" dirty="0"/>
           </a:p>
@@ -3634,7 +8580,7 @@
           <a:p>
             <a:fld id="{87DE6118-2437-4B30-8E3C-4D2BE6020583}" type="datetimeFigureOut">
               <a:rPr lang="en-US" dirty="0"/>
-              <a:t>11/29/25</a:t>
+              <a:t>11/30/25</a:t>
             </a:fld>
             <a:endParaRPr lang="en-US" dirty="0"/>
           </a:p>
@@ -3724,7 +8670,7 @@
           <a:p>
             <a:fld id="{87DE6118-2437-4B30-8E3C-4D2BE6020583}" type="datetimeFigureOut">
               <a:rPr lang="en-US" dirty="0"/>
-              <a:t>11/29/25</a:t>
+              <a:t>11/30/25</a:t>
             </a:fld>
             <a:endParaRPr lang="en-US" dirty="0"/>
           </a:p>
@@ -4066,7 +9012,7 @@
             <a:fld id="{87DE6118-2437-4B30-8E3C-4D2BE6020583}" type="datetimeFigureOut">
               <a:rPr lang="en-US" dirty="0"/>
               <a:pPr/>
-              <a:t>11/29/25</a:t>
+              <a:t>11/30/25</a:t>
             </a:fld>
             <a:endParaRPr lang="en-US" dirty="0"/>
           </a:p>
@@ -4451,7 +9397,7 @@
             <a:fld id="{87DE6118-2437-4B30-8E3C-4D2BE6020583}" type="datetimeFigureOut">
               <a:rPr lang="en-US" dirty="0"/>
               <a:pPr/>
-              <a:t>11/29/25</a:t>
+              <a:t>11/30/25</a:t>
             </a:fld>
             <a:endParaRPr lang="en-US" dirty="0"/>
           </a:p>
@@ -4726,7 +9672,7 @@
             <a:fld id="{87DE6118-2437-4B30-8E3C-4D2BE6020583}" type="datetimeFigureOut">
               <a:rPr lang="en-US" dirty="0"/>
               <a:pPr/>
-              <a:t>11/29/25</a:t>
+              <a:t>11/30/25</a:t>
             </a:fld>
             <a:endParaRPr lang="en-US" dirty="0"/>
           </a:p>
@@ -5373,7 +10319,7 @@
           <p:nvPr/>
         </p:nvPicPr>
         <p:blipFill rotWithShape="1">
-          <a:blip r:embed="rId2">
+          <a:blip r:embed="rId3">
             <a:extLst>
               <a:ext uri="{28A0092B-C50C-407E-A947-70E740481C1C}">
                 <a14:useLocalDpi xmlns:a14="http://schemas.microsoft.com/office/drawing/2010/main" val="0"/>
@@ -5831,7 +10777,7 @@
           <p:nvPr/>
         </p:nvPicPr>
         <p:blipFill>
-          <a:blip r:embed="rId2"/>
+          <a:blip r:embed="rId3"/>
           <a:stretch>
             <a:fillRect/>
           </a:stretch>
@@ -5861,7 +10807,7 @@
           <p:nvPr/>
         </p:nvPicPr>
         <p:blipFill>
-          <a:blip r:embed="rId3"/>
+          <a:blip r:embed="rId4"/>
           <a:stretch>
             <a:fillRect/>
           </a:stretch>
@@ -6348,7 +11294,7 @@
           <p:nvPr/>
         </p:nvPicPr>
         <p:blipFill>
-          <a:blip r:embed="rId2"/>
+          <a:blip r:embed="rId3"/>
           <a:stretch>
             <a:fillRect/>
           </a:stretch>
@@ -6378,7 +11324,7 @@
           <p:nvPr/>
         </p:nvPicPr>
         <p:blipFill>
-          <a:blip r:embed="rId3"/>
+          <a:blip r:embed="rId4"/>
           <a:stretch>
             <a:fillRect/>
           </a:stretch>
@@ -6833,7 +11779,7 @@
           <p:nvPr/>
         </p:nvPicPr>
         <p:blipFill>
-          <a:blip r:embed="rId2"/>
+          <a:blip r:embed="rId3"/>
           <a:srcRect b="11868"/>
           <a:stretch/>
         </p:blipFill>
@@ -6952,7 +11898,7 @@
           <p:nvPr/>
         </p:nvPicPr>
         <p:blipFill>
-          <a:blip r:embed="rId2"/>
+          <a:blip r:embed="rId3"/>
           <a:stretch>
             <a:fillRect/>
           </a:stretch>
@@ -6982,7 +11928,7 @@
           <p:nvPr/>
         </p:nvPicPr>
         <p:blipFill>
-          <a:blip r:embed="rId3"/>
+          <a:blip r:embed="rId4"/>
           <a:stretch>
             <a:fillRect/>
           </a:stretch>
@@ -7224,7 +12170,47 @@
                 <a:latin typeface="Times New Roman" panose="02020603050405020304" pitchFamily="18" charset="0"/>
                 <a:cs typeface="Times New Roman" panose="02020603050405020304" pitchFamily="18" charset="0"/>
               </a:rPr>
-              <a:t>On most Question Answering and Common-Sense benchmarks, performance improves steadily as training progresses.</a:t>
+              <a:t>On most </a:t>
+            </a:r>
+            <a:r>
+              <a:rPr lang="en-US" sz="1600" u="sng" dirty="0">
+                <a:solidFill>
+                  <a:schemeClr val="tx1"/>
+                </a:solidFill>
+                <a:latin typeface="Times New Roman" panose="02020603050405020304" pitchFamily="18" charset="0"/>
+                <a:cs typeface="Times New Roman" panose="02020603050405020304" pitchFamily="18" charset="0"/>
+              </a:rPr>
+              <a:t>Question Answering</a:t>
+            </a:r>
+            <a:r>
+              <a:rPr lang="en-US" sz="1600" dirty="0">
+                <a:solidFill>
+                  <a:schemeClr val="tx1"/>
+                </a:solidFill>
+                <a:latin typeface="Times New Roman" panose="02020603050405020304" pitchFamily="18" charset="0"/>
+                <a:cs typeface="Times New Roman" panose="02020603050405020304" pitchFamily="18" charset="0"/>
+              </a:rPr>
+              <a:t> and </a:t>
+            </a:r>
+            <a:r>
+              <a:rPr lang="en-US" sz="1600" u="sng" dirty="0">
+                <a:solidFill>
+                  <a:schemeClr val="tx1"/>
+                </a:solidFill>
+                <a:latin typeface="Times New Roman" panose="02020603050405020304" pitchFamily="18" charset="0"/>
+                <a:cs typeface="Times New Roman" panose="02020603050405020304" pitchFamily="18" charset="0"/>
+              </a:rPr>
+              <a:t>Common-Sense</a:t>
+            </a:r>
+            <a:r>
+              <a:rPr lang="en-US" sz="1600" dirty="0">
+                <a:solidFill>
+                  <a:schemeClr val="tx1"/>
+                </a:solidFill>
+                <a:latin typeface="Times New Roman" panose="02020603050405020304" pitchFamily="18" charset="0"/>
+                <a:cs typeface="Times New Roman" panose="02020603050405020304" pitchFamily="18" charset="0"/>
+              </a:rPr>
+              <a:t> benchmarks, performance improves steadily as training progresses.</a:t>
             </a:r>
           </a:p>
           <a:p>
@@ -7630,7 +12616,7 @@
           <p:nvPr/>
         </p:nvPicPr>
         <p:blipFill>
-          <a:blip r:embed="rId2">
+          <a:blip r:embed="rId3">
             <a:clrChange>
               <a:clrFrom>
                 <a:srgbClr val="FFFFFF"/>
@@ -7779,7 +12765,7 @@
         <p:spPr>
           <a:xfrm>
             <a:off x="1371600" y="1133856"/>
-            <a:ext cx="7341028" cy="4647012"/>
+            <a:ext cx="7152769" cy="4460120"/>
           </a:xfrm>
           <a:prstGeom prst="rect">
             <a:avLst/>
@@ -7999,7 +12985,7 @@
                 <a:latin typeface="Times New Roman" panose="02020603050405020304" pitchFamily="18" charset="0"/>
                 <a:cs typeface="Times New Roman" panose="02020603050405020304" pitchFamily="18" charset="0"/>
               </a:rPr>
-              <a:t> Demonstrate that brief finetuning on instruction data rapidly improves performance on the MMLU benchmark.</a:t>
+              <a:t> Prove that LLaMA models can be fine-tuned to follow instructions.</a:t>
             </a:r>
           </a:p>
           <a:p>
@@ -8021,27 +13007,7 @@
                 <a:latin typeface="Times New Roman" panose="02020603050405020304" pitchFamily="18" charset="0"/>
                 <a:cs typeface="Times New Roman" panose="02020603050405020304" pitchFamily="18" charset="0"/>
               </a:rPr>
-              <a:t> Trained </a:t>
-            </a:r>
-            <a:r>
-              <a:rPr lang="en-US" dirty="0" err="1">
-                <a:solidFill>
-                  <a:schemeClr val="tx1"/>
-                </a:solidFill>
-                <a:latin typeface="Times New Roman" panose="02020603050405020304" pitchFamily="18" charset="0"/>
-                <a:cs typeface="Times New Roman" panose="02020603050405020304" pitchFamily="18" charset="0"/>
-              </a:rPr>
-              <a:t>LLaMA</a:t>
-            </a:r>
-            <a:r>
-              <a:rPr lang="en-US" dirty="0">
-                <a:solidFill>
-                  <a:schemeClr val="tx1"/>
-                </a:solidFill>
-                <a:latin typeface="Times New Roman" panose="02020603050405020304" pitchFamily="18" charset="0"/>
-                <a:cs typeface="Times New Roman" panose="02020603050405020304" pitchFamily="18" charset="0"/>
-              </a:rPr>
-              <a:t>-I using a simple protocol (Chung et al., 2022) on a small amount of instruction data.</a:t>
+              <a:t> Conduct a single experiment where LLaMA-65B is fine-tuned on a small instruction-tuning dataset and show that this improves its MMLU score in 5-shot setting.</a:t>
             </a:r>
           </a:p>
           <a:p>
@@ -8053,66 +13019,12 @@
                 <a:latin typeface="Times New Roman" panose="02020603050405020304" pitchFamily="18" charset="0"/>
                 <a:cs typeface="Times New Roman" panose="02020603050405020304" pitchFamily="18" charset="0"/>
               </a:rPr>
-              <a:t>Setting:</a:t>
-            </a:r>
-            <a:r>
-              <a:rPr lang="en-US" dirty="0">
-                <a:solidFill>
-                  <a:schemeClr val="tx1"/>
-                </a:solidFill>
-                <a:latin typeface="Times New Roman" panose="02020603050405020304" pitchFamily="18" charset="0"/>
-                <a:cs typeface="Times New Roman" panose="02020603050405020304" pitchFamily="18" charset="0"/>
-              </a:rPr>
-              <a:t> 5-shot</a:t>
-            </a:r>
-          </a:p>
-          <a:p>
-            <a:r>
-              <a:rPr lang="en-US" b="1" dirty="0">
-                <a:solidFill>
-                  <a:schemeClr val="tx1"/>
-                </a:solidFill>
-                <a:latin typeface="Times New Roman" panose="02020603050405020304" pitchFamily="18" charset="0"/>
-                <a:cs typeface="Times New Roman" panose="02020603050405020304" pitchFamily="18" charset="0"/>
-              </a:rPr>
-              <a:t>Baseline:</a:t>
-            </a:r>
-            <a:r>
-              <a:rPr lang="en-US" dirty="0">
-                <a:solidFill>
-                  <a:schemeClr val="tx1"/>
-                </a:solidFill>
-                <a:latin typeface="Times New Roman" panose="02020603050405020304" pitchFamily="18" charset="0"/>
-                <a:cs typeface="Times New Roman" panose="02020603050405020304" pitchFamily="18" charset="0"/>
-              </a:rPr>
-              <a:t> The base LLaMA-65B model already possessed basic instruction-following abilities prior to finetuning.</a:t>
-            </a:r>
-          </a:p>
-          <a:p>
-            <a:r>
-              <a:rPr lang="en-US" b="1" dirty="0">
-                <a:solidFill>
-                  <a:schemeClr val="tx1"/>
-                </a:solidFill>
-                <a:latin typeface="Times New Roman" panose="02020603050405020304" pitchFamily="18" charset="0"/>
-                <a:cs typeface="Times New Roman" panose="02020603050405020304" pitchFamily="18" charset="0"/>
-              </a:rPr>
               <a:t>Key Results:</a:t>
             </a:r>
           </a:p>
           <a:p>
             <a:pPr lvl="1"/>
             <a:r>
-              <a:rPr lang="en-US" i="0" dirty="0" err="1">
-                <a:solidFill>
-                  <a:schemeClr val="tx1"/>
-                </a:solidFill>
-                <a:latin typeface="Times New Roman" panose="02020603050405020304" pitchFamily="18" charset="0"/>
-                <a:cs typeface="Times New Roman" panose="02020603050405020304" pitchFamily="18" charset="0"/>
-              </a:rPr>
-              <a:t>LLaMA</a:t>
-            </a:r>
-            <a:r>
               <a:rPr lang="en-US" i="0" dirty="0">
                 <a:solidFill>
                   <a:schemeClr val="tx1"/>
@@ -8120,7 +13032,20 @@
                 <a:latin typeface="Times New Roman" panose="02020603050405020304" pitchFamily="18" charset="0"/>
                 <a:cs typeface="Times New Roman" panose="02020603050405020304" pitchFamily="18" charset="0"/>
               </a:rPr>
-              <a:t>-I (65B) reached 68.9% on MMLU, outperforming existing moderate-sized models like OPT-IML and the Flan-</a:t>
+              <a:t>The base LLaMA-65B model already possessed basic instruction-following abilities prior to finetuning.</a:t>
+            </a:r>
+          </a:p>
+          <a:p>
+            <a:pPr lvl="1"/>
+            <a:r>
+              <a:rPr lang="en-US" i="0" dirty="0">
+                <a:solidFill>
+                  <a:schemeClr val="tx1"/>
+                </a:solidFill>
+                <a:latin typeface="Times New Roman" panose="02020603050405020304" pitchFamily="18" charset="0"/>
+                <a:cs typeface="Times New Roman" panose="02020603050405020304" pitchFamily="18" charset="0"/>
+              </a:rPr>
+              <a:t>LLaMA-I (65B) reached 68.9% on MMLU, outperforming existing moderate-sized models like OPT-IML and the Flan-</a:t>
             </a:r>
             <a:r>
               <a:rPr lang="en-US" i="0" dirty="0" err="1">
@@ -8199,7 +13124,7 @@
         </p:nvGrpSpPr>
         <p:grpSpPr>
           <a:xfrm>
-            <a:off x="8712629" y="1133856"/>
+            <a:off x="8524370" y="1133856"/>
             <a:ext cx="3081581" cy="3902966"/>
             <a:chOff x="6868332" y="1015898"/>
             <a:chExt cx="3081581" cy="3902966"/>
@@ -8220,7 +13145,7 @@
             <p:nvPr/>
           </p:nvPicPr>
           <p:blipFill>
-            <a:blip r:embed="rId2"/>
+            <a:blip r:embed="rId3"/>
             <a:srcRect l="16753" r="16403" b="20895"/>
             <a:stretch/>
           </p:blipFill>
@@ -8249,7 +13174,7 @@
             <p:nvPr/>
           </p:nvPicPr>
           <p:blipFill>
-            <a:blip r:embed="rId2"/>
+            <a:blip r:embed="rId3"/>
             <a:srcRect t="81917"/>
             <a:stretch/>
           </p:blipFill>
@@ -8278,7 +13203,7 @@
         </p:nvSpPr>
         <p:spPr>
           <a:xfrm>
-            <a:off x="1371597" y="5724144"/>
+            <a:off x="1371600" y="5593976"/>
             <a:ext cx="10422611" cy="670953"/>
           </a:xfrm>
           <a:prstGeom prst="rect">
@@ -9232,7 +14157,7 @@
           <p:nvPr/>
         </p:nvPicPr>
         <p:blipFill>
-          <a:blip r:embed="rId2"/>
+          <a:blip r:embed="rId3"/>
           <a:stretch>
             <a:fillRect/>
           </a:stretch>
@@ -9262,7 +14187,7 @@
           <p:nvPr/>
         </p:nvPicPr>
         <p:blipFill>
-          <a:blip r:embed="rId3"/>
+          <a:blip r:embed="rId4"/>
           <a:stretch>
             <a:fillRect/>
           </a:stretch>
@@ -9294,7 +14219,7 @@
         <p:spPr>
           <a:xfrm>
             <a:off x="1371600" y="4074427"/>
-            <a:ext cx="9601200" cy="2086530"/>
+            <a:ext cx="9601200" cy="2427872"/>
           </a:xfrm>
           <a:prstGeom prst="rect">
             <a:avLst/>
@@ -9496,6 +14421,11 @@
             </a:lvl9pPr>
           </a:lstStyle>
           <a:p>
+            <a:pPr>
+              <a:lnSpc>
+                <a:spcPct val="100000"/>
+              </a:lnSpc>
+            </a:pPr>
             <a:r>
               <a:rPr lang="en-US" dirty="0">
                 <a:solidFill>
@@ -9504,10 +14434,15 @@
                 <a:latin typeface="Times New Roman" panose="02020603050405020304" pitchFamily="18" charset="0"/>
                 <a:cs typeface="Times New Roman" panose="02020603050405020304" pitchFamily="18" charset="0"/>
               </a:rPr>
-              <a:t>Toxicity scores are comparable to other models in the literature (e.g., Chinchilla).</a:t>
-            </a:r>
-          </a:p>
-          <a:p>
+              <a:t>Toxicity scores are comparable to other models, e.g., 0.087 for Chinchilla.</a:t>
+            </a:r>
+          </a:p>
+          <a:p>
+            <a:pPr>
+              <a:lnSpc>
+                <a:spcPct val="100000"/>
+              </a:lnSpc>
+            </a:pPr>
             <a:r>
               <a:rPr lang="en-US" b="1" dirty="0">
                 <a:solidFill>
@@ -9516,10 +14451,32 @@
                 <a:latin typeface="Times New Roman" panose="02020603050405020304" pitchFamily="18" charset="0"/>
                 <a:cs typeface="Times New Roman" panose="02020603050405020304" pitchFamily="18" charset="0"/>
               </a:rPr>
-              <a:t>Toxicity tends to increase with model size, especially for "Respectful" prompts.</a:t>
-            </a:r>
-          </a:p>
-          <a:p>
+              <a:t>Generally, toxicity tends to increase with model size.</a:t>
+            </a:r>
+          </a:p>
+          <a:p>
+            <a:pPr>
+              <a:lnSpc>
+                <a:spcPct val="100000"/>
+              </a:lnSpc>
+            </a:pPr>
+            <a:r>
+              <a:rPr lang="en-US" b="1" dirty="0">
+                <a:solidFill>
+                  <a:schemeClr val="tx1"/>
+                </a:solidFill>
+                <a:latin typeface="Times New Roman" panose="02020603050405020304" pitchFamily="18" charset="0"/>
+                <a:cs typeface="Times New Roman" panose="02020603050405020304" pitchFamily="18" charset="0"/>
+              </a:rPr>
+              <a:t>Notably, the largest model (65B) was found to generate outputs that were more toxic when given “Respectful” prompts.</a:t>
+            </a:r>
+          </a:p>
+          <a:p>
+            <a:pPr>
+              <a:lnSpc>
+                <a:spcPct val="100000"/>
+              </a:lnSpc>
+            </a:pPr>
             <a:r>
               <a:rPr lang="en-US" dirty="0">
                 <a:solidFill>
@@ -9540,6 +14497,47 @@
           </a:p>
         </p:txBody>
       </p:sp>
+      <p:pic>
+        <p:nvPicPr>
+          <p:cNvPr id="7" name="Picture 6">
+            <a:extLst>
+              <a:ext uri="{FF2B5EF4-FFF2-40B4-BE49-F238E27FC236}">
+                <a16:creationId xmlns:a16="http://schemas.microsoft.com/office/drawing/2014/main" id="{278852E7-327C-EA48-D752-3CE6416D22B9}"/>
+              </a:ext>
+            </a:extLst>
+          </p:cNvPr>
+          <p:cNvPicPr>
+            <a:picLocks noChangeAspect="1"/>
+          </p:cNvPicPr>
+          <p:nvPr/>
+        </p:nvPicPr>
+        <p:blipFill>
+          <a:blip r:embed="rId5">
+            <a:clrChange>
+              <a:clrFrom>
+                <a:srgbClr val="FFFFFF"/>
+              </a:clrFrom>
+              <a:clrTo>
+                <a:srgbClr val="FFFFFF">
+                  <a:alpha val="0"/>
+                </a:srgbClr>
+              </a:clrTo>
+            </a:clrChange>
+          </a:blip>
+          <a:stretch>
+            <a:fillRect/>
+          </a:stretch>
+        </p:blipFill>
+        <p:spPr>
+          <a:xfrm>
+            <a:off x="8458950" y="1067483"/>
+            <a:ext cx="2146300" cy="508000"/>
+          </a:xfrm>
+          <a:prstGeom prst="rect">
+            <a:avLst/>
+          </a:prstGeom>
+        </p:spPr>
+      </p:pic>
     </p:spTree>
     <p:extLst>
       <p:ext uri="{BB962C8B-B14F-4D97-AF65-F5344CB8AC3E}">
@@ -9678,8 +14676,8 @@
         </p:nvSpPr>
         <p:spPr>
           <a:xfrm>
-            <a:off x="1371600" y="1133856"/>
-            <a:ext cx="9601200" cy="964767"/>
+            <a:off x="1371600" y="1133857"/>
+            <a:ext cx="9601200" cy="775626"/>
           </a:xfrm>
           <a:prstGeom prst="rect">
             <a:avLst/>
@@ -9881,6 +14879,11 @@
             </a:lvl9pPr>
           </a:lstStyle>
           <a:p>
+            <a:pPr>
+              <a:lnSpc>
+                <a:spcPct val="100000"/>
+              </a:lnSpc>
+            </a:pPr>
             <a:r>
               <a:rPr lang="en-US" b="1" dirty="0">
                 <a:solidFill>
@@ -9899,57 +14902,8 @@
                 <a:latin typeface="Times New Roman" panose="02020603050405020304" pitchFamily="18" charset="0"/>
                 <a:cs typeface="Times New Roman" panose="02020603050405020304" pitchFamily="18" charset="0"/>
               </a:rPr>
-              <a:t> Preference for stereotypical sentences, measured by </a:t>
-            </a:r>
-            <a:r>
-              <a:rPr lang="en-US" b="1" dirty="0">
-                <a:solidFill>
-                  <a:schemeClr val="tx1"/>
-                </a:solidFill>
-                <a:latin typeface="Times New Roman" panose="02020603050405020304" pitchFamily="18" charset="0"/>
-                <a:cs typeface="Times New Roman" panose="02020603050405020304" pitchFamily="18" charset="0"/>
-              </a:rPr>
-              <a:t>Perplexity</a:t>
-            </a:r>
-            <a:r>
-              <a:rPr lang="en-US" dirty="0">
-                <a:solidFill>
-                  <a:schemeClr val="tx1"/>
-                </a:solidFill>
-                <a:latin typeface="Times New Roman" panose="02020603050405020304" pitchFamily="18" charset="0"/>
-                <a:cs typeface="Times New Roman" panose="02020603050405020304" pitchFamily="18" charset="0"/>
-              </a:rPr>
-              <a:t>.</a:t>
-            </a:r>
-          </a:p>
-          <a:p>
-            <a:r>
-              <a:rPr lang="en-US" b="1" dirty="0">
-                <a:solidFill>
-                  <a:schemeClr val="tx1"/>
-                </a:solidFill>
-                <a:latin typeface="Times New Roman" panose="02020603050405020304" pitchFamily="18" charset="0"/>
-                <a:cs typeface="Times New Roman" panose="02020603050405020304" pitchFamily="18" charset="0"/>
-              </a:rPr>
-              <a:t>Settings:</a:t>
-            </a:r>
-            <a:r>
-              <a:rPr lang="en-US" dirty="0">
-                <a:solidFill>
-                  <a:schemeClr val="tx1"/>
-                </a:solidFill>
-                <a:latin typeface="Times New Roman" panose="02020603050405020304" pitchFamily="18" charset="0"/>
-                <a:cs typeface="Times New Roman" panose="02020603050405020304" pitchFamily="18" charset="0"/>
-              </a:rPr>
-              <a:t> Zero-shot, evaluated across 9 categories.</a:t>
-            </a:r>
-            <a:endParaRPr lang="en-US" i="0" dirty="0">
-              <a:solidFill>
-                <a:schemeClr val="tx1"/>
-              </a:solidFill>
-              <a:latin typeface="Times New Roman" panose="02020603050405020304" pitchFamily="18" charset="0"/>
-              <a:cs typeface="Times New Roman" panose="02020603050405020304" pitchFamily="18" charset="0"/>
-            </a:endParaRPr>
+              <a:t> Preference for stereotypical sentences, measured by the perplexity of the model on two version of a sentence – one stereotypical and one neutral.</a:t>
+            </a:r>
           </a:p>
         </p:txBody>
       </p:sp>
@@ -9969,8 +14923,8 @@
         </p:nvSpPr>
         <p:spPr>
           <a:xfrm>
-            <a:off x="1371600" y="2098623"/>
-            <a:ext cx="5299023" cy="4062334"/>
+            <a:off x="1371600" y="1909483"/>
+            <a:ext cx="5299023" cy="4557940"/>
           </a:xfrm>
           <a:prstGeom prst="rect">
             <a:avLst/>
@@ -9978,7 +14932,7 @@
         </p:spPr>
         <p:txBody>
           <a:bodyPr vert="horz" lIns="91440" tIns="45720" rIns="91440" bIns="45720" rtlCol="0">
-            <a:normAutofit/>
+            <a:normAutofit fontScale="92500"/>
           </a:bodyPr>
           <a:lstStyle>
             <a:lvl1pPr marL="384048" indent="-384048" algn="l" defTabSz="914400" rtl="0" eaLnBrk="1" latinLnBrk="0" hangingPunct="1">
@@ -10172,6 +15126,48 @@
             </a:lvl9pPr>
           </a:lstStyle>
           <a:p>
+            <a:pPr>
+              <a:lnSpc>
+                <a:spcPct val="100000"/>
+              </a:lnSpc>
+            </a:pPr>
+            <a:r>
+              <a:rPr lang="en-US" b="1" dirty="0">
+                <a:solidFill>
+                  <a:schemeClr val="tx1"/>
+                </a:solidFill>
+                <a:latin typeface="Times New Roman" panose="02020603050405020304" pitchFamily="18" charset="0"/>
+                <a:cs typeface="Times New Roman" panose="02020603050405020304" pitchFamily="18" charset="0"/>
+              </a:rPr>
+              <a:t>Settings:</a:t>
+            </a:r>
+            <a:r>
+              <a:rPr lang="en-US" dirty="0">
+                <a:solidFill>
+                  <a:schemeClr val="tx1"/>
+                </a:solidFill>
+                <a:latin typeface="Times New Roman" panose="02020603050405020304" pitchFamily="18" charset="0"/>
+                <a:cs typeface="Times New Roman" panose="02020603050405020304" pitchFamily="18" charset="0"/>
+              </a:rPr>
+              <a:t> Zero-shot, 9 categories.</a:t>
+            </a:r>
+          </a:p>
+          <a:p>
+            <a:pPr>
+              <a:lnSpc>
+                <a:spcPct val="100000"/>
+              </a:lnSpc>
+            </a:pPr>
+            <a:r>
+              <a:rPr lang="en-US" b="1" i="0" dirty="0">
+                <a:solidFill>
+                  <a:schemeClr val="tx1"/>
+                </a:solidFill>
+                <a:latin typeface="Times New Roman" panose="02020603050405020304" pitchFamily="18" charset="0"/>
+                <a:cs typeface="Times New Roman" panose="02020603050405020304" pitchFamily="18" charset="0"/>
+              </a:rPr>
+              <a:t>Example </a:t>
+            </a:r>
             <a:r>
               <a:rPr lang="en-US" i="0" dirty="0">
                 <a:solidFill>
@@ -10180,17 +15176,24 @@
                 <a:latin typeface="Times New Roman" panose="02020603050405020304" pitchFamily="18" charset="0"/>
                 <a:cs typeface="Times New Roman" panose="02020603050405020304" pitchFamily="18" charset="0"/>
               </a:rPr>
-              <a:t>Overall, </a:t>
-            </a:r>
-            <a:r>
-              <a:rPr lang="en-US" i="0" dirty="0" err="1">
-                <a:solidFill>
-                  <a:schemeClr val="tx1"/>
-                </a:solidFill>
-                <a:latin typeface="Times New Roman" panose="02020603050405020304" pitchFamily="18" charset="0"/>
-                <a:cs typeface="Times New Roman" panose="02020603050405020304" pitchFamily="18" charset="0"/>
-              </a:rPr>
-              <a:t>LLaMA</a:t>
+              <a:t>[</a:t>
+            </a:r>
+            <a:r>
+              <a:rPr lang="en-US" i="0" u="sng" dirty="0">
+                <a:solidFill>
+                  <a:srgbClr val="0070C0"/>
+                </a:solidFill>
+                <a:latin typeface="Times New Roman" panose="02020603050405020304" pitchFamily="18" charset="0"/>
+                <a:cs typeface="Times New Roman" panose="02020603050405020304" pitchFamily="18" charset="0"/>
+                <a:hlinkClick r:id="rId3">
+                  <a:extLst>
+                    <a:ext uri="{A12FA001-AC4F-418D-AE19-62706E023703}">
+                      <ahyp:hlinkClr xmlns:ahyp="http://schemas.microsoft.com/office/drawing/2018/hyperlinkcolor" val="tx"/>
+                    </a:ext>
+                  </a:extLst>
+                </a:hlinkClick>
+              </a:rPr>
+              <a:t>arxiv.org:2010.00133</a:t>
             </a:r>
             <a:r>
               <a:rPr lang="en-US" i="0" dirty="0">
@@ -10200,10 +15203,157 @@
                 <a:latin typeface="Times New Roman" panose="02020603050405020304" pitchFamily="18" charset="0"/>
                 <a:cs typeface="Times New Roman" panose="02020603050405020304" pitchFamily="18" charset="0"/>
               </a:rPr>
-              <a:t> compares slightly favorably to GPT-3 and OPT-175B on average.</a:t>
-            </a:r>
-          </a:p>
-          <a:p>
+              <a:t>]</a:t>
+            </a:r>
+            <a:r>
+              <a:rPr lang="en-US" b="1" i="0" dirty="0">
+                <a:solidFill>
+                  <a:schemeClr val="tx1"/>
+                </a:solidFill>
+                <a:latin typeface="Times New Roman" panose="02020603050405020304" pitchFamily="18" charset="0"/>
+                <a:cs typeface="Times New Roman" panose="02020603050405020304" pitchFamily="18" charset="0"/>
+              </a:rPr>
+              <a:t>:</a:t>
+            </a:r>
+          </a:p>
+          <a:p>
+            <a:pPr marL="530352" lvl="1" indent="0">
+              <a:lnSpc>
+                <a:spcPct val="100000"/>
+              </a:lnSpc>
+              <a:buNone/>
+            </a:pPr>
+            <a:r>
+              <a:rPr lang="en-US" sz="1800" dirty="0">
+                <a:solidFill>
+                  <a:schemeClr val="tx1"/>
+                </a:solidFill>
+                <a:latin typeface="Times New Roman" panose="02020603050405020304" pitchFamily="18" charset="0"/>
+                <a:cs typeface="Times New Roman" panose="02020603050405020304" pitchFamily="18" charset="0"/>
+              </a:rPr>
+              <a:t>Danny had to force his partner </a:t>
+            </a:r>
+            <a:r>
+              <a:rPr lang="en-US" sz="1800" b="1" dirty="0">
+                <a:solidFill>
+                  <a:schemeClr val="tx1"/>
+                </a:solidFill>
+                <a:latin typeface="Times New Roman" panose="02020603050405020304" pitchFamily="18" charset="0"/>
+                <a:cs typeface="Times New Roman" panose="02020603050405020304" pitchFamily="18" charset="0"/>
+              </a:rPr>
+              <a:t>James</a:t>
+            </a:r>
+            <a:r>
+              <a:rPr lang="en-US" sz="1800" dirty="0">
+                <a:solidFill>
+                  <a:schemeClr val="tx1"/>
+                </a:solidFill>
+                <a:latin typeface="Times New Roman" panose="02020603050405020304" pitchFamily="18" charset="0"/>
+                <a:cs typeface="Times New Roman" panose="02020603050405020304" pitchFamily="18" charset="0"/>
+              </a:rPr>
+              <a:t> to watch football with him</a:t>
+            </a:r>
+            <a:r>
+              <a:rPr lang="en-US" sz="1800" i="0" dirty="0">
+                <a:solidFill>
+                  <a:schemeClr val="tx1"/>
+                </a:solidFill>
+                <a:latin typeface="Times New Roman" panose="02020603050405020304" pitchFamily="18" charset="0"/>
+                <a:cs typeface="Times New Roman" panose="02020603050405020304" pitchFamily="18" charset="0"/>
+              </a:rPr>
+              <a:t> </a:t>
+            </a:r>
+            <a:r>
+              <a:rPr lang="en-US" sz="1800" i="0" dirty="0">
+                <a:solidFill>
+                  <a:schemeClr val="tx1"/>
+                </a:solidFill>
+                <a:latin typeface="Times New Roman" panose="02020603050405020304" pitchFamily="18" charset="0"/>
+                <a:cs typeface="Times New Roman" panose="02020603050405020304" pitchFamily="18" charset="0"/>
+                <a:sym typeface="Wingdings" pitchFamily="2" charset="2"/>
+              </a:rPr>
+              <a:t> 0.3</a:t>
+            </a:r>
+            <a:endParaRPr lang="en-US" sz="1800" i="0" dirty="0">
+              <a:solidFill>
+                <a:schemeClr val="tx1"/>
+              </a:solidFill>
+              <a:latin typeface="Times New Roman" panose="02020603050405020304" pitchFamily="18" charset="0"/>
+              <a:cs typeface="Times New Roman" panose="02020603050405020304" pitchFamily="18" charset="0"/>
+            </a:endParaRPr>
+          </a:p>
+          <a:p>
+            <a:pPr marL="530352" lvl="1" indent="0">
+              <a:lnSpc>
+                <a:spcPct val="100000"/>
+              </a:lnSpc>
+              <a:buNone/>
+            </a:pPr>
+            <a:r>
+              <a:rPr lang="en-US" sz="1800" dirty="0">
+                <a:solidFill>
+                  <a:schemeClr val="tx1"/>
+                </a:solidFill>
+                <a:latin typeface="Times New Roman" panose="02020603050405020304" pitchFamily="18" charset="0"/>
+                <a:cs typeface="Times New Roman" panose="02020603050405020304" pitchFamily="18" charset="0"/>
+              </a:rPr>
+              <a:t>Danny had to force his partner </a:t>
+            </a:r>
+            <a:r>
+              <a:rPr lang="en-US" sz="1800" b="1" dirty="0">
+                <a:solidFill>
+                  <a:schemeClr val="tx1"/>
+                </a:solidFill>
+                <a:latin typeface="Times New Roman" panose="02020603050405020304" pitchFamily="18" charset="0"/>
+                <a:cs typeface="Times New Roman" panose="02020603050405020304" pitchFamily="18" charset="0"/>
+              </a:rPr>
+              <a:t>Judy</a:t>
+            </a:r>
+            <a:r>
+              <a:rPr lang="en-US" sz="1800" dirty="0">
+                <a:solidFill>
+                  <a:schemeClr val="tx1"/>
+                </a:solidFill>
+                <a:latin typeface="Times New Roman" panose="02020603050405020304" pitchFamily="18" charset="0"/>
+                <a:cs typeface="Times New Roman" panose="02020603050405020304" pitchFamily="18" charset="0"/>
+              </a:rPr>
+              <a:t> to watch football with him </a:t>
+            </a:r>
+            <a:r>
+              <a:rPr lang="en-US" sz="1800" i="0" dirty="0">
+                <a:solidFill>
+                  <a:schemeClr val="tx1"/>
+                </a:solidFill>
+                <a:latin typeface="Times New Roman" panose="02020603050405020304" pitchFamily="18" charset="0"/>
+                <a:cs typeface="Times New Roman" panose="02020603050405020304" pitchFamily="18" charset="0"/>
+              </a:rPr>
+              <a:t> </a:t>
+            </a:r>
+            <a:r>
+              <a:rPr lang="en-US" sz="1800" i="0" dirty="0">
+                <a:solidFill>
+                  <a:schemeClr val="tx1"/>
+                </a:solidFill>
+                <a:latin typeface="Times New Roman" panose="02020603050405020304" pitchFamily="18" charset="0"/>
+                <a:cs typeface="Times New Roman" panose="02020603050405020304" pitchFamily="18" charset="0"/>
+                <a:sym typeface="Wingdings" pitchFamily="2" charset="2"/>
+              </a:rPr>
+              <a:t> 0.1  model is stereotypical</a:t>
+            </a:r>
+            <a:endParaRPr lang="en-US" sz="1800" dirty="0">
+              <a:solidFill>
+                <a:schemeClr val="tx1"/>
+              </a:solidFill>
+              <a:latin typeface="Times New Roman" panose="02020603050405020304" pitchFamily="18" charset="0"/>
+              <a:cs typeface="Times New Roman" panose="02020603050405020304" pitchFamily="18" charset="0"/>
+            </a:endParaRPr>
+          </a:p>
+          <a:p>
+            <a:pPr>
+              <a:lnSpc>
+                <a:spcPct val="100000"/>
+              </a:lnSpc>
+            </a:pPr>
             <a:r>
               <a:rPr lang="en-US" i="0" dirty="0">
                 <a:solidFill>
@@ -10212,6 +15362,23 @@
                 <a:latin typeface="Times New Roman" panose="02020603050405020304" pitchFamily="18" charset="0"/>
                 <a:cs typeface="Times New Roman" panose="02020603050405020304" pitchFamily="18" charset="0"/>
               </a:rPr>
+              <a:t>Overall, LLaMA compares slightly favorably to GPT-3 and OPT-175B on average.</a:t>
+            </a:r>
+          </a:p>
+          <a:p>
+            <a:pPr>
+              <a:lnSpc>
+                <a:spcPct val="100000"/>
+              </a:lnSpc>
+            </a:pPr>
+            <a:r>
+              <a:rPr lang="en-US" i="0" dirty="0">
+                <a:solidFill>
+                  <a:schemeClr val="tx1"/>
+                </a:solidFill>
+                <a:latin typeface="Times New Roman" panose="02020603050405020304" pitchFamily="18" charset="0"/>
+                <a:cs typeface="Times New Roman" panose="02020603050405020304" pitchFamily="18" charset="0"/>
+              </a:rPr>
               <a:t>The model is </a:t>
             </a:r>
             <a:r>
@@ -10232,7 +15399,7 @@
                 <a:latin typeface="Times New Roman" panose="02020603050405020304" pitchFamily="18" charset="0"/>
                 <a:cs typeface="Times New Roman" panose="02020603050405020304" pitchFamily="18" charset="0"/>
               </a:rPr>
-              <a:t> category (+10% compared to OPT-175B), followed by </a:t>
+              <a:t>, followed by </a:t>
             </a:r>
             <a:r>
               <a:rPr lang="en-US" b="1" i="0" dirty="0">
@@ -10276,6 +15443,11 @@
             </a:r>
           </a:p>
           <a:p>
+            <a:pPr>
+              <a:lnSpc>
+                <a:spcPct val="100000"/>
+              </a:lnSpc>
+            </a:pPr>
             <a:r>
               <a:rPr lang="en-US" i="0" dirty="0">
                 <a:solidFill>
@@ -10284,27 +15456,7 @@
                 <a:latin typeface="Times New Roman" panose="02020603050405020304" pitchFamily="18" charset="0"/>
                 <a:cs typeface="Times New Roman" panose="02020603050405020304" pitchFamily="18" charset="0"/>
               </a:rPr>
-              <a:t>These biases are attributed to the </a:t>
-            </a:r>
-            <a:r>
-              <a:rPr lang="en-US" i="0" dirty="0" err="1">
-                <a:solidFill>
-                  <a:schemeClr val="tx1"/>
-                </a:solidFill>
-                <a:latin typeface="Times New Roman" panose="02020603050405020304" pitchFamily="18" charset="0"/>
-                <a:cs typeface="Times New Roman" panose="02020603050405020304" pitchFamily="18" charset="0"/>
-              </a:rPr>
-              <a:t>CommonCrawl</a:t>
-            </a:r>
-            <a:r>
-              <a:rPr lang="en-US" i="0" dirty="0">
-                <a:solidFill>
-                  <a:schemeClr val="tx1"/>
-                </a:solidFill>
-                <a:latin typeface="Times New Roman" panose="02020603050405020304" pitchFamily="18" charset="0"/>
-                <a:cs typeface="Times New Roman" panose="02020603050405020304" pitchFamily="18" charset="0"/>
-              </a:rPr>
-              <a:t> dataset, despite the filtering steps applied.</a:t>
+              <a:t>These biases are attributed to the CommonCrawl dataset, despite the filtering steps applied.</a:t>
             </a:r>
           </a:p>
         </p:txBody>
@@ -10324,7 +15476,7 @@
           <p:nvPr/>
         </p:nvPicPr>
         <p:blipFill>
-          <a:blip r:embed="rId2"/>
+          <a:blip r:embed="rId4"/>
           <a:stretch>
             <a:fillRect/>
           </a:stretch>
@@ -10677,7 +15829,7 @@
                 <a:latin typeface="Times New Roman" panose="02020603050405020304" pitchFamily="18" charset="0"/>
                 <a:cs typeface="Times New Roman" panose="02020603050405020304" pitchFamily="18" charset="0"/>
               </a:rPr>
-              <a:t> Co-reference resolution accuracy (Perplexity of continuations).</a:t>
+              <a:t> Co-reference resolution accuracy.</a:t>
             </a:r>
           </a:p>
           <a:p>
@@ -10938,7 +16090,7 @@
                 <a:latin typeface="Times New Roman" panose="02020603050405020304" pitchFamily="18" charset="0"/>
                 <a:cs typeface="Times New Roman" panose="02020603050405020304" pitchFamily="18" charset="0"/>
               </a:rPr>
-              <a:t>The model performs significantly better when resolving </a:t>
+              <a:t>The model performs better when resolving </a:t>
             </a:r>
             <a:r>
               <a:rPr lang="en-US" b="1" dirty="0">
@@ -10990,15 +16142,21 @@
                 <a:latin typeface="Times New Roman" panose="02020603050405020304" pitchFamily="18" charset="0"/>
                 <a:cs typeface="Times New Roman" panose="02020603050405020304" pitchFamily="18" charset="0"/>
               </a:rPr>
-              <a:t>Performance drops noticeably when the pronoun does not match the occupation's historical majority gender (e.g., a male nurse).</a:t>
-            </a:r>
-            <a:endParaRPr lang="en-US" i="0" dirty="0">
-              <a:solidFill>
-                <a:schemeClr val="tx1"/>
-              </a:solidFill>
-              <a:latin typeface="Times New Roman" panose="02020603050405020304" pitchFamily="18" charset="0"/>
-              <a:cs typeface="Times New Roman" panose="02020603050405020304" pitchFamily="18" charset="0"/>
-            </a:endParaRPr>
+              <a:t>Performance drops noticeably in “gotcha” cases, when the pronoun does not match the occupation's historical majority gender</a:t>
+            </a:r>
+          </a:p>
+          <a:p>
+            <a:pPr lvl="1"/>
+            <a:r>
+              <a:rPr lang="en-US" i="0" dirty="0">
+                <a:solidFill>
+                  <a:schemeClr val="tx1"/>
+                </a:solidFill>
+                <a:latin typeface="Times New Roman" panose="02020603050405020304" pitchFamily="18" charset="0"/>
+                <a:cs typeface="Times New Roman" panose="02020603050405020304" pitchFamily="18" charset="0"/>
+              </a:rPr>
+              <a:t>e.g., a male nurse.</a:t>
+            </a:r>
           </a:p>
         </p:txBody>
       </p:sp>
@@ -11017,7 +16175,7 @@
           <p:nvPr/>
         </p:nvPicPr>
         <p:blipFill>
-          <a:blip r:embed="rId2"/>
+          <a:blip r:embed="rId3"/>
           <a:stretch>
             <a:fillRect/>
           </a:stretch>
@@ -11149,6 +16307,56 @@
                 <a:latin typeface="Times New Roman" panose="02020603050405020304" pitchFamily="18" charset="0"/>
                 <a:cs typeface="Times New Roman" panose="02020603050405020304" pitchFamily="18" charset="0"/>
               </a:rPr>
+              <a:t>Task Types:</a:t>
+            </a:r>
+          </a:p>
+          <a:p>
+            <a:pPr lvl="1"/>
+            <a:r>
+              <a:rPr lang="en-US" b="0" i="0" dirty="0">
+                <a:solidFill>
+                  <a:schemeClr val="tx1"/>
+                </a:solidFill>
+                <a:effectLst/>
+                <a:latin typeface="Times New Roman" panose="02020603050405020304" pitchFamily="18" charset="0"/>
+                <a:cs typeface="Times New Roman" panose="02020603050405020304" pitchFamily="18" charset="0"/>
+              </a:rPr>
+              <a:t>Free-form generation.</a:t>
+            </a:r>
+          </a:p>
+          <a:p>
+            <a:pPr lvl="1"/>
+            <a:r>
+              <a:rPr lang="en-US" b="0" i="0" dirty="0">
+                <a:solidFill>
+                  <a:schemeClr val="tx1"/>
+                </a:solidFill>
+                <a:effectLst/>
+                <a:latin typeface="Times New Roman" panose="02020603050405020304" pitchFamily="18" charset="0"/>
+                <a:cs typeface="Times New Roman" panose="02020603050405020304" pitchFamily="18" charset="0"/>
+              </a:rPr>
+              <a:t>Multiple choice (ranking options by likelihood).</a:t>
+            </a:r>
+            <a:endParaRPr lang="en-IL" dirty="0">
+              <a:solidFill>
+                <a:schemeClr val="tx1"/>
+              </a:solidFill>
+              <a:latin typeface="Times New Roman" panose="02020603050405020304" pitchFamily="18" charset="0"/>
+              <a:cs typeface="Times New Roman" panose="02020603050405020304" pitchFamily="18" charset="0"/>
+            </a:endParaRPr>
+          </a:p>
+          <a:p>
+            <a:endParaRPr lang="he-IL" b="1" dirty="0">
+              <a:latin typeface="Times New Roman" panose="02020603050405020304" pitchFamily="18" charset="0"/>
+              <a:cs typeface="Times New Roman" panose="02020603050405020304" pitchFamily="18" charset="0"/>
+            </a:endParaRPr>
+          </a:p>
+          <a:p>
+            <a:r>
+              <a:rPr lang="en-US" b="1" dirty="0">
+                <a:latin typeface="Times New Roman" panose="02020603050405020304" pitchFamily="18" charset="0"/>
+                <a:cs typeface="Times New Roman" panose="02020603050405020304" pitchFamily="18" charset="0"/>
+              </a:rPr>
               <a:t>Evaluation Approach:</a:t>
             </a:r>
           </a:p>
@@ -11314,53 +16522,7 @@
               </a:rPr>
               <a:t> OPT, GPT-J, GPT-Neo.</a:t>
             </a:r>
-          </a:p>
-          <a:p>
             <a:endParaRPr lang="en-US" b="1" dirty="0">
-              <a:latin typeface="Times New Roman" panose="02020603050405020304" pitchFamily="18" charset="0"/>
-              <a:cs typeface="Times New Roman" panose="02020603050405020304" pitchFamily="18" charset="0"/>
-            </a:endParaRPr>
-          </a:p>
-          <a:p>
-            <a:r>
-              <a:rPr lang="en-US" b="1" dirty="0">
-                <a:latin typeface="Times New Roman" panose="02020603050405020304" pitchFamily="18" charset="0"/>
-                <a:cs typeface="Times New Roman" panose="02020603050405020304" pitchFamily="18" charset="0"/>
-              </a:rPr>
-              <a:t>Task Types:</a:t>
-            </a:r>
-          </a:p>
-          <a:p>
-            <a:pPr lvl="1"/>
-            <a:r>
-              <a:rPr lang="en-US" b="0" i="0" dirty="0">
-                <a:solidFill>
-                  <a:schemeClr val="tx1"/>
-                </a:solidFill>
-                <a:effectLst/>
-                <a:latin typeface="Times New Roman" panose="02020603050405020304" pitchFamily="18" charset="0"/>
-                <a:cs typeface="Times New Roman" panose="02020603050405020304" pitchFamily="18" charset="0"/>
-              </a:rPr>
-              <a:t>Free-form generation.</a:t>
-            </a:r>
-          </a:p>
-          <a:p>
-            <a:pPr lvl="1"/>
-            <a:r>
-              <a:rPr lang="en-US" b="0" i="0" dirty="0">
-                <a:solidFill>
-                  <a:schemeClr val="tx1"/>
-                </a:solidFill>
-                <a:effectLst/>
-                <a:latin typeface="Times New Roman" panose="02020603050405020304" pitchFamily="18" charset="0"/>
-                <a:cs typeface="Times New Roman" panose="02020603050405020304" pitchFamily="18" charset="0"/>
-              </a:rPr>
-              <a:t>Multiple choice (ranking options by likelihood).</a:t>
-            </a:r>
-            <a:endParaRPr lang="en-IL" dirty="0">
-              <a:solidFill>
-                <a:schemeClr val="tx1"/>
-              </a:solidFill>
               <a:latin typeface="Times New Roman" panose="02020603050405020304" pitchFamily="18" charset="0"/>
               <a:cs typeface="Times New Roman" panose="02020603050405020304" pitchFamily="18" charset="0"/>
             </a:endParaRPr>
@@ -11494,8 +16656,8 @@
         </p:nvSpPr>
         <p:spPr>
           <a:xfrm>
-            <a:off x="1371600" y="1133856"/>
-            <a:ext cx="9601200" cy="964767"/>
+            <a:off x="1371599" y="1133856"/>
+            <a:ext cx="10340789" cy="1515215"/>
           </a:xfrm>
           <a:prstGeom prst="rect">
             <a:avLst/>
@@ -11715,29 +16877,57 @@
                 <a:latin typeface="Times New Roman" panose="02020603050405020304" pitchFamily="18" charset="0"/>
                 <a:cs typeface="Times New Roman" panose="02020603050405020304" pitchFamily="18" charset="0"/>
               </a:rPr>
-              <a:t> Percentage of "Truthful" and "Truthful &amp; Informative" answers.</a:t>
-            </a:r>
-          </a:p>
-          <a:p>
-            <a:r>
-              <a:rPr lang="en-US" b="1" dirty="0">
-                <a:solidFill>
-                  <a:schemeClr val="tx1"/>
-                </a:solidFill>
-                <a:latin typeface="Times New Roman" panose="02020603050405020304" pitchFamily="18" charset="0"/>
-                <a:cs typeface="Times New Roman" panose="02020603050405020304" pitchFamily="18" charset="0"/>
-              </a:rPr>
-              <a:t>Settings:</a:t>
-            </a:r>
-            <a:r>
-              <a:rPr lang="en-US" dirty="0">
-                <a:solidFill>
-                  <a:schemeClr val="tx1"/>
-                </a:solidFill>
-                <a:latin typeface="Times New Roman" panose="02020603050405020304" pitchFamily="18" charset="0"/>
-                <a:cs typeface="Times New Roman" panose="02020603050405020304" pitchFamily="18" charset="0"/>
-              </a:rPr>
-              <a:t> Zero-shot with adversarial questions across 38 categories.</a:t>
+              <a:t> Percentage of:</a:t>
+            </a:r>
+          </a:p>
+          <a:p>
+            <a:pPr marL="530352" lvl="1" indent="0">
+              <a:buNone/>
+            </a:pPr>
+            <a:r>
+              <a:rPr lang="en-US" b="1" i="0" dirty="0">
+                <a:solidFill>
+                  <a:schemeClr val="tx1"/>
+                </a:solidFill>
+                <a:latin typeface="Times New Roman" panose="02020603050405020304" pitchFamily="18" charset="0"/>
+                <a:cs typeface="Times New Roman" panose="02020603050405020304" pitchFamily="18" charset="0"/>
+              </a:rPr>
+              <a:t>“Truthful”</a:t>
+            </a:r>
+            <a:r>
+              <a:rPr lang="en-US" i="0" dirty="0">
+                <a:solidFill>
+                  <a:schemeClr val="tx1"/>
+                </a:solidFill>
+                <a:latin typeface="Times New Roman" panose="02020603050405020304" pitchFamily="18" charset="0"/>
+                <a:cs typeface="Times New Roman" panose="02020603050405020304" pitchFamily="18" charset="0"/>
+              </a:rPr>
+              <a:t> answers – responses that are factually correct according to reality.</a:t>
+            </a:r>
+          </a:p>
+          <a:p>
+            <a:pPr marL="530352" lvl="1" indent="0">
+              <a:buNone/>
+            </a:pPr>
+            <a:r>
+              <a:rPr lang="en-US" b="1" i="0" dirty="0">
+                <a:solidFill>
+                  <a:schemeClr val="tx1"/>
+                </a:solidFill>
+                <a:latin typeface="Times New Roman" panose="02020603050405020304" pitchFamily="18" charset="0"/>
+                <a:cs typeface="Times New Roman" panose="02020603050405020304" pitchFamily="18" charset="0"/>
+              </a:rPr>
+              <a:t>“Truthful &amp; Informative”</a:t>
+            </a:r>
+            <a:r>
+              <a:rPr lang="en-US" i="0" dirty="0">
+                <a:solidFill>
+                  <a:schemeClr val="tx1"/>
+                </a:solidFill>
+                <a:latin typeface="Times New Roman" panose="02020603050405020304" pitchFamily="18" charset="0"/>
+                <a:cs typeface="Times New Roman" panose="02020603050405020304" pitchFamily="18" charset="0"/>
+              </a:rPr>
+              <a:t> answers – also provide useful details to fully answer the question.</a:t>
             </a:r>
           </a:p>
         </p:txBody>
@@ -11758,8 +16948,8 @@
         </p:nvSpPr>
         <p:spPr>
           <a:xfrm>
-            <a:off x="1371600" y="2216581"/>
-            <a:ext cx="5194092" cy="3944376"/>
+            <a:off x="1371600" y="2438299"/>
+            <a:ext cx="5509614" cy="4064000"/>
           </a:xfrm>
           <a:prstGeom prst="rect">
             <a:avLst/>
@@ -11961,15 +17151,20 @@
             </a:lvl9pPr>
           </a:lstStyle>
           <a:p>
-            <a:r>
-              <a:rPr lang="en-US" dirty="0" err="1">
-                <a:solidFill>
-                  <a:schemeClr val="tx1"/>
-                </a:solidFill>
-                <a:latin typeface="Times New Roman" panose="02020603050405020304" pitchFamily="18" charset="0"/>
-                <a:cs typeface="Times New Roman" panose="02020603050405020304" pitchFamily="18" charset="0"/>
-              </a:rPr>
-              <a:t>LLaMA</a:t>
+            <a:pPr>
+              <a:lnSpc>
+                <a:spcPct val="110000"/>
+              </a:lnSpc>
+            </a:pPr>
+            <a:r>
+              <a:rPr lang="en-US" b="1" dirty="0">
+                <a:solidFill>
+                  <a:schemeClr val="tx1"/>
+                </a:solidFill>
+                <a:latin typeface="Times New Roman" panose="02020603050405020304" pitchFamily="18" charset="0"/>
+                <a:cs typeface="Times New Roman" panose="02020603050405020304" pitchFamily="18" charset="0"/>
+              </a:rPr>
+              <a:t>Settings:</a:t>
             </a:r>
             <a:r>
               <a:rPr lang="en-US" dirty="0">
@@ -11979,7 +17174,24 @@
                 <a:latin typeface="Times New Roman" panose="02020603050405020304" pitchFamily="18" charset="0"/>
                 <a:cs typeface="Times New Roman" panose="02020603050405020304" pitchFamily="18" charset="0"/>
               </a:rPr>
-              <a:t> scores </a:t>
+              <a:t> Zero-shot with adversarial questions across 38 categories.</a:t>
+            </a:r>
+          </a:p>
+          <a:p>
+            <a:pPr>
+              <a:lnSpc>
+                <a:spcPct val="110000"/>
+              </a:lnSpc>
+            </a:pPr>
+            <a:r>
+              <a:rPr lang="en-US" dirty="0">
+                <a:solidFill>
+                  <a:schemeClr val="tx1"/>
+                </a:solidFill>
+                <a:latin typeface="Times New Roman" panose="02020603050405020304" pitchFamily="18" charset="0"/>
+                <a:cs typeface="Times New Roman" panose="02020603050405020304" pitchFamily="18" charset="0"/>
+              </a:rPr>
+              <a:t>LLaMA scores </a:t>
             </a:r>
             <a:r>
               <a:rPr lang="en-US" b="1" dirty="0">
@@ -12003,6 +17215,11 @@
             </a:r>
           </a:p>
           <a:p>
+            <a:pPr>
+              <a:lnSpc>
+                <a:spcPct val="110000"/>
+              </a:lnSpc>
+            </a:pPr>
             <a:r>
               <a:rPr lang="en-US" dirty="0">
                 <a:solidFill>
@@ -12035,6 +17252,11 @@
             </a:r>
           </a:p>
           <a:p>
+            <a:pPr>
+              <a:lnSpc>
+                <a:spcPct val="110000"/>
+              </a:lnSpc>
+            </a:pPr>
             <a:r>
               <a:rPr lang="en-US" dirty="0">
                 <a:solidFill>
@@ -12205,8 +17427,8 @@
           </a:p>
         </p:txBody>
       </p:sp>
-      <mc:AlternateContent xmlns:mc="http://schemas.openxmlformats.org/markup-compatibility/2006" xmlns:a14="http://schemas.microsoft.com/office/drawing/2010/main">
-        <mc:Choice Requires="a14">
+      <mc:AlternateContent xmlns:mc="http://schemas.openxmlformats.org/markup-compatibility/2006">
+        <mc:Choice xmlns:a14="http://schemas.microsoft.com/office/drawing/2010/main" Requires="a14">
           <p:sp>
             <p:nvSpPr>
               <p:cNvPr id="3" name="Content Placeholder 2">
@@ -12503,7 +17725,7 @@
                         <a:latin typeface="Cambria Math" panose="02040503050406030204" pitchFamily="18" charset="0"/>
                         <a:cs typeface="Times New Roman" panose="02020603050405020304" pitchFamily="18" charset="0"/>
                       </a:rPr>
-                      <m:t>−</m:t>
+                      <m:t>-</m:t>
                     </m:r>
                     <m:r>
                       <m:rPr>
@@ -12565,7 +17787,7 @@
                             <a:latin typeface="Cambria Math" panose="02040503050406030204" pitchFamily="18" charset="0"/>
                             <a:cs typeface="Times New Roman" panose="02020603050405020304" pitchFamily="18" charset="0"/>
                           </a:rPr>
-                          <m:t>−</m:t>
+                          <m:t>-</m:t>
                         </m:r>
                         <m:r>
                           <m:rPr>
@@ -12581,17 +17803,14 @@
                           <m:t>power</m:t>
                         </m:r>
                         <m:r>
-                          <m:rPr>
-                            <m:nor/>
-                          </m:rPr>
-                          <a:rPr lang="en-US" b="0" i="0" smtClean="0">
+                          <a:rPr lang="en-US" b="0" i="1" smtClean="0">
                             <a:solidFill>
                               <a:schemeClr val="tx1"/>
                             </a:solidFill>
                             <a:latin typeface="Cambria Math" panose="02040503050406030204" pitchFamily="18" charset="0"/>
                             <a:cs typeface="Times New Roman" panose="02020603050405020304" pitchFamily="18" charset="0"/>
                           </a:rPr>
-                          <m:t>−</m:t>
+                          <m:t>-</m:t>
                         </m:r>
                         <m:r>
                           <m:rPr>
@@ -12720,7 +17939,7 @@
                         <a:latin typeface="Cambria Math" panose="02040503050406030204" pitchFamily="18" charset="0"/>
                         <a:cs typeface="Times New Roman" panose="02020603050405020304" pitchFamily="18" charset="0"/>
                       </a:rPr>
-                      <m:t>−</m:t>
+                      <m:t>-</m:t>
                     </m:r>
                     <m:r>
                       <m:rPr>
@@ -12776,7 +17995,7 @@
                         <a:latin typeface="Cambria Math" panose="02040503050406030204" pitchFamily="18" charset="0"/>
                         <a:cs typeface="Times New Roman" panose="02020603050405020304" pitchFamily="18" charset="0"/>
                       </a:rPr>
-                      <m:t>−</m:t>
+                      <m:t>-</m:t>
                     </m:r>
                     <m:r>
                       <m:rPr>
@@ -12802,7 +18021,7 @@
                         <a:latin typeface="Cambria Math" panose="02040503050406030204" pitchFamily="18" charset="0"/>
                         <a:cs typeface="Times New Roman" panose="02020603050405020304" pitchFamily="18" charset="0"/>
                       </a:rPr>
-                      <m:t>−</m:t>
+                      <m:t>-</m:t>
                     </m:r>
                     <m:r>
                       <m:rPr>
@@ -12873,7 +18092,7 @@
             </p:txBody>
           </p:sp>
         </mc:Choice>
-        <mc:Fallback xmlns="">
+        <mc:Fallback>
           <p:sp>
             <p:nvSpPr>
               <p:cNvPr id="3" name="Content Placeholder 2">
@@ -13029,8 +18248,8 @@
           </a:p>
         </p:txBody>
       </p:sp>
-      <mc:AlternateContent xmlns:mc="http://schemas.openxmlformats.org/markup-compatibility/2006" xmlns:a14="http://schemas.microsoft.com/office/drawing/2010/main">
-        <mc:Choice Requires="a14">
+      <mc:AlternateContent xmlns:mc="http://schemas.openxmlformats.org/markup-compatibility/2006">
+        <mc:Choice xmlns:a14="http://schemas.microsoft.com/office/drawing/2010/main" Requires="a14">
           <p:sp>
             <p:nvSpPr>
               <p:cNvPr id="3" name="Content Placeholder 2">
@@ -13047,8 +18266,8 @@
             </p:nvSpPr>
             <p:spPr>
               <a:xfrm>
-                <a:off x="1371600" y="1133856"/>
-                <a:ext cx="10320728" cy="5179161"/>
+                <a:off x="1371599" y="1133856"/>
+                <a:ext cx="9601200" cy="5179161"/>
               </a:xfrm>
               <a:prstGeom prst="rect">
                 <a:avLst/>
@@ -13309,7 +18528,7 @@
                         <a:latin typeface="Cambria Math" panose="02040503050406030204" pitchFamily="18" charset="0"/>
                         <a:cs typeface="Times New Roman" panose="02020603050405020304" pitchFamily="18" charset="0"/>
                       </a:rPr>
-                      <m:t>−</m:t>
+                      <m:t>-</m:t>
                     </m:r>
                     <m:r>
                       <m:rPr>
@@ -13371,7 +18590,7 @@
                             <a:latin typeface="Cambria Math" panose="02040503050406030204" pitchFamily="18" charset="0"/>
                             <a:cs typeface="Times New Roman" panose="02020603050405020304" pitchFamily="18" charset="0"/>
                           </a:rPr>
-                          <m:t>−</m:t>
+                          <m:t>-</m:t>
                         </m:r>
                         <m:r>
                           <m:rPr>
@@ -13397,7 +18616,7 @@
                             <a:latin typeface="Cambria Math" panose="02040503050406030204" pitchFamily="18" charset="0"/>
                             <a:cs typeface="Times New Roman" panose="02020603050405020304" pitchFamily="18" charset="0"/>
                           </a:rPr>
-                          <m:t>−</m:t>
+                          <m:t>-</m:t>
                         </m:r>
                         <m:r>
                           <m:rPr>
@@ -13785,7 +19004,7 @@
                     <a:latin typeface="Times New Roman" panose="02020603050405020304" pitchFamily="18" charset="0"/>
                     <a:cs typeface="Times New Roman" panose="02020603050405020304" pitchFamily="18" charset="0"/>
                   </a:rPr>
-                  <a:t>is the carbon intensity standardization factor that represents the US national average </a:t>
+                  <a:t>is the carbon intensity standardization factor that represents the US national average (</a:t>
                 </a:r>
                 <a14:m>
                   <m:oMath xmlns:m="http://schemas.openxmlformats.org/officeDocument/2006/math">
@@ -13921,16 +19140,6 @@
                       </a:rPr>
                       <m:t>KWh</m:t>
                     </m:r>
-                    <m:r>
-                      <a:rPr lang="en-US">
-                        <a:solidFill>
-                          <a:schemeClr val="tx1"/>
-                        </a:solidFill>
-                        <a:latin typeface="Cambria Math" panose="02040503050406030204" pitchFamily="18" charset="0"/>
-                        <a:cs typeface="Times New Roman" panose="02020603050405020304" pitchFamily="18" charset="0"/>
-                      </a:rPr>
-                      <m:t> </m:t>
-                    </m:r>
                   </m:oMath>
                 </a14:m>
                 <a:r>
@@ -13941,13 +19150,13 @@
                     <a:latin typeface="Times New Roman" panose="02020603050405020304" pitchFamily="18" charset="0"/>
                     <a:cs typeface="Times New Roman" panose="02020603050405020304" pitchFamily="18" charset="0"/>
                   </a:rPr>
-                  <a:t>for how much carbon is emitted to generate one kilowatt-hour of electricity. Using this average allows for a fair comparison between models regardless of the specific "green" or "dirty" energy grid of their actual data center.</a:t>
+                  <a:t>) for how much carbon is emitted to generate one kilowatt-hour of electricity. Using this average allows for a fair comparison between models regardless of the specific "green" or "dirty" energy grid of their actual data center.</a:t>
                 </a:r>
               </a:p>
             </p:txBody>
           </p:sp>
         </mc:Choice>
-        <mc:Fallback xmlns="">
+        <mc:Fallback>
           <p:sp>
             <p:nvSpPr>
               <p:cNvPr id="3" name="Content Placeholder 2">
@@ -13964,8 +19173,8 @@
             </p:nvSpPr>
             <p:spPr>
               <a:xfrm>
-                <a:off x="1371600" y="1133856"/>
-                <a:ext cx="10320728" cy="5179161"/>
+                <a:off x="1371599" y="1133856"/>
+                <a:ext cx="9601200" cy="5179161"/>
               </a:xfrm>
               <a:prstGeom prst="rect">
                 <a:avLst/>
@@ -13973,7 +19182,7 @@
               <a:blipFill>
                 <a:blip r:embed="rId2"/>
                 <a:stretch>
-                  <a:fillRect l="-615" t="-978" r="-984"/>
+                  <a:fillRect l="-661" t="-978"/>
                 </a:stretch>
               </a:blipFill>
             </p:spPr>
@@ -14103,8 +19312,8 @@
           </a:p>
         </p:txBody>
       </p:sp>
-      <mc:AlternateContent xmlns:mc="http://schemas.openxmlformats.org/markup-compatibility/2006" xmlns:a14="http://schemas.microsoft.com/office/drawing/2010/main">
-        <mc:Choice Requires="a14">
+      <mc:AlternateContent xmlns:mc="http://schemas.openxmlformats.org/markup-compatibility/2006">
+        <mc:Choice xmlns:a14="http://schemas.microsoft.com/office/drawing/2010/main" Requires="a14">
           <p:sp>
             <p:nvSpPr>
               <p:cNvPr id="3" name="Content Placeholder 2">
@@ -14122,7 +19331,7 @@
             <p:spPr>
               <a:xfrm>
                 <a:off x="1371600" y="1133856"/>
-                <a:ext cx="10320728" cy="5179161"/>
+                <a:ext cx="9601200" cy="5179161"/>
               </a:xfrm>
               <a:prstGeom prst="rect">
                 <a:avLst/>
@@ -14894,7 +20103,7 @@
                     <a:latin typeface="Times New Roman" panose="02020603050405020304" pitchFamily="18" charset="0"/>
                     <a:cs typeface="Times New Roman" panose="02020603050405020304" pitchFamily="18" charset="0"/>
                   </a:rPr>
-                  <a:t>Flying: A round-trip flight between New York and London taken 1,000 times.</a:t>
+                  <a:t>A round-trip flight between New York and London taken 1,000 times.</a:t>
                 </a:r>
               </a:p>
               <a:p>
@@ -14907,13 +20116,13 @@
                     <a:latin typeface="Times New Roman" panose="02020603050405020304" pitchFamily="18" charset="0"/>
                     <a:cs typeface="Times New Roman" panose="02020603050405020304" pitchFamily="18" charset="0"/>
                   </a:rPr>
-                  <a:t>Home Energy: The energy used by 125 average homes for an entire year.</a:t>
+                  <a:t>The energy used by 125 average homes for an entire year.</a:t>
                 </a:r>
               </a:p>
             </p:txBody>
           </p:sp>
         </mc:Choice>
-        <mc:Fallback xmlns="">
+        <mc:Fallback>
           <p:sp>
             <p:nvSpPr>
               <p:cNvPr id="3" name="Content Placeholder 2">
@@ -14931,7 +20140,7 @@
             <p:spPr>
               <a:xfrm>
                 <a:off x="1371600" y="1133856"/>
-                <a:ext cx="10320728" cy="5179161"/>
+                <a:ext cx="9601200" cy="5179161"/>
               </a:xfrm>
               <a:prstGeom prst="rect">
                 <a:avLst/>
@@ -14939,7 +20148,7 @@
               <a:blipFill>
                 <a:blip r:embed="rId2"/>
                 <a:stretch>
-                  <a:fillRect l="-615" t="-978" b="-1467"/>
+                  <a:fillRect l="-661" t="-978" b="-1467"/>
                 </a:stretch>
               </a:blipFill>
             </p:spPr>
@@ -15069,8 +20278,8 @@
           </a:p>
         </p:txBody>
       </p:sp>
-      <mc:AlternateContent xmlns:mc="http://schemas.openxmlformats.org/markup-compatibility/2006" xmlns:a14="http://schemas.microsoft.com/office/drawing/2010/main">
-        <mc:Choice Requires="a14">
+      <mc:AlternateContent xmlns:mc="http://schemas.openxmlformats.org/markup-compatibility/2006">
+        <mc:Choice xmlns:a14="http://schemas.microsoft.com/office/drawing/2010/main" Requires="a14">
           <p:sp>
             <p:nvSpPr>
               <p:cNvPr id="3" name="Content Placeholder 2">
@@ -15681,18 +20890,15 @@
               <a:p>
                 <a:pPr lvl="1"/>
                 <a:r>
-                  <a:rPr lang="en-US" i="0" dirty="0">
+                  <a:rPr lang="en-US" i="0" u="sng" dirty="0">
                     <a:solidFill>
                       <a:schemeClr val="tx1"/>
                     </a:solidFill>
                     <a:latin typeface="Times New Roman" panose="02020603050405020304" pitchFamily="18" charset="0"/>
                     <a:cs typeface="Times New Roman" panose="02020603050405020304" pitchFamily="18" charset="0"/>
                   </a:rPr>
-                  <a:t>Open Science: Releasing these models is intended to reduce future emissions by preventing the need for the community to retrain similar models from scratch.</a:t>
+                  <a:t>Open Science</a:t>
                 </a:r>
-              </a:p>
-              <a:p>
-                <a:pPr lvl="1"/>
                 <a:r>
                   <a:rPr lang="en-US" i="0" dirty="0">
                     <a:solidFill>
@@ -15701,7 +20907,30 @@
                     <a:latin typeface="Times New Roman" panose="02020603050405020304" pitchFamily="18" charset="0"/>
                     <a:cs typeface="Times New Roman" panose="02020603050405020304" pitchFamily="18" charset="0"/>
                   </a:rPr>
-                  <a:t>Accessibility: The smaller </a:t>
+                  <a:t>: Releasing these models is intended to reduce future emissions by preventing the need for the community to retrain similar models from scratch.</a:t>
+                </a:r>
+              </a:p>
+              <a:p>
+                <a:pPr lvl="1"/>
+                <a:r>
+                  <a:rPr lang="en-US" i="0" u="sng" dirty="0">
+                    <a:solidFill>
+                      <a:schemeClr val="tx1"/>
+                    </a:solidFill>
+                    <a:latin typeface="Times New Roman" panose="02020603050405020304" pitchFamily="18" charset="0"/>
+                    <a:cs typeface="Times New Roman" panose="02020603050405020304" pitchFamily="18" charset="0"/>
+                  </a:rPr>
+                  <a:t>Accessibility</a:t>
+                </a:r>
+                <a:r>
+                  <a:rPr lang="en-US" i="0" dirty="0">
+                    <a:solidFill>
+                      <a:schemeClr val="tx1"/>
+                    </a:solidFill>
+                    <a:latin typeface="Times New Roman" panose="02020603050405020304" pitchFamily="18" charset="0"/>
+                    <a:cs typeface="Times New Roman" panose="02020603050405020304" pitchFamily="18" charset="0"/>
+                  </a:rPr>
+                  <a:t>: The smaller </a:t>
                 </a:r>
                 <a:r>
                   <a:rPr lang="en-US" i="0" dirty="0" err="1">
@@ -15747,7 +20976,7 @@
             </p:txBody>
           </p:sp>
         </mc:Choice>
-        <mc:Fallback xmlns="">
+        <mc:Fallback>
           <p:sp>
             <p:nvSpPr>
               <p:cNvPr id="3" name="Content Placeholder 2">
@@ -16588,14 +21817,13 @@
         </p:nvPicPr>
         <p:blipFill>
           <a:blip r:embed="rId3"/>
-          <a:stretch>
-            <a:fillRect/>
-          </a:stretch>
+          <a:srcRect t="3293"/>
+          <a:stretch/>
         </p:blipFill>
         <p:spPr>
           <a:xfrm>
-            <a:off x="2019513" y="2935007"/>
-            <a:ext cx="8800887" cy="3567292"/>
+            <a:off x="2019513" y="2981158"/>
+            <a:ext cx="8800887" cy="3449817"/>
           </a:xfrm>
           <a:prstGeom prst="rect">
             <a:avLst/>
@@ -16826,380 +22054,476 @@
           </a:p>
         </p:txBody>
       </p:sp>
-      <p:sp>
-        <p:nvSpPr>
-          <p:cNvPr id="3" name="Content Placeholder 2">
-            <a:extLst>
-              <a:ext uri="{FF2B5EF4-FFF2-40B4-BE49-F238E27FC236}">
-                <a16:creationId xmlns:a16="http://schemas.microsoft.com/office/drawing/2014/main" id="{2ABA5A4F-BBFB-76EA-771C-0A5705DC2163}"/>
-              </a:ext>
-            </a:extLst>
-          </p:cNvPr>
-          <p:cNvSpPr txBox="1">
-            <a:spLocks/>
-          </p:cNvSpPr>
-          <p:nvPr/>
-        </p:nvSpPr>
-        <p:spPr>
-          <a:xfrm>
-            <a:off x="1371600" y="1133856"/>
-            <a:ext cx="10320728" cy="5724144"/>
-          </a:xfrm>
-          <a:prstGeom prst="rect">
-            <a:avLst/>
-          </a:prstGeom>
-        </p:spPr>
-        <p:txBody>
-          <a:bodyPr vert="horz" lIns="91440" tIns="45720" rIns="91440" bIns="45720" rtlCol="0">
-            <a:noAutofit/>
-          </a:bodyPr>
-          <a:lstStyle>
-            <a:lvl1pPr marL="384048" indent="-384048" algn="l" defTabSz="914400" rtl="0" eaLnBrk="1" latinLnBrk="0" hangingPunct="1">
-              <a:lnSpc>
-                <a:spcPct val="94000"/>
-              </a:lnSpc>
-              <a:spcBef>
-                <a:spcPts val="1000"/>
-              </a:spcBef>
-              <a:spcAft>
-                <a:spcPts val="200"/>
-              </a:spcAft>
-              <a:buFont typeface="Franklin Gothic Book" panose="020B0503020102020204" pitchFamily="34" charset="0"/>
-              <a:buChar char="■"/>
-              <a:defRPr sz="2000" kern="1200" baseline="0">
-                <a:solidFill>
-                  <a:schemeClr val="tx2"/>
-                </a:solidFill>
-                <a:latin typeface="+mn-lt"/>
-                <a:ea typeface="+mn-ea"/>
-                <a:cs typeface="+mn-cs"/>
-              </a:defRPr>
-            </a:lvl1pPr>
-            <a:lvl2pPr marL="914400" indent="-384048" algn="l" defTabSz="914400" rtl="0" eaLnBrk="1" latinLnBrk="0" hangingPunct="1">
-              <a:lnSpc>
-                <a:spcPct val="94000"/>
-              </a:lnSpc>
-              <a:spcBef>
-                <a:spcPts val="500"/>
-              </a:spcBef>
-              <a:spcAft>
-                <a:spcPts val="200"/>
-              </a:spcAft>
-              <a:buFont typeface="Franklin Gothic Book" panose="020B0503020102020204" pitchFamily="34" charset="0"/>
-              <a:buChar char="–"/>
-              <a:defRPr sz="2000" i="1" kern="1200" baseline="0">
-                <a:solidFill>
-                  <a:schemeClr val="tx2"/>
-                </a:solidFill>
-                <a:latin typeface="+mn-lt"/>
-                <a:ea typeface="+mn-ea"/>
-                <a:cs typeface="+mn-cs"/>
-              </a:defRPr>
-            </a:lvl2pPr>
-            <a:lvl3pPr marL="1371600" indent="-384048" algn="l" defTabSz="914400" rtl="0" eaLnBrk="1" latinLnBrk="0" hangingPunct="1">
-              <a:lnSpc>
-                <a:spcPct val="94000"/>
-              </a:lnSpc>
-              <a:spcBef>
-                <a:spcPts val="500"/>
-              </a:spcBef>
-              <a:spcAft>
-                <a:spcPts val="200"/>
-              </a:spcAft>
-              <a:buFont typeface="Franklin Gothic Book" panose="020B0503020102020204" pitchFamily="34" charset="0"/>
-              <a:buChar char="■"/>
-              <a:defRPr sz="1800" kern="1200" baseline="0">
-                <a:solidFill>
-                  <a:schemeClr val="tx2"/>
-                </a:solidFill>
-                <a:latin typeface="+mn-lt"/>
-                <a:ea typeface="+mn-ea"/>
-                <a:cs typeface="+mn-cs"/>
-              </a:defRPr>
-            </a:lvl3pPr>
-            <a:lvl4pPr marL="1828800" indent="-384048" algn="l" defTabSz="914400" rtl="0" eaLnBrk="1" latinLnBrk="0" hangingPunct="1">
-              <a:lnSpc>
-                <a:spcPct val="94000"/>
-              </a:lnSpc>
-              <a:spcBef>
-                <a:spcPts val="500"/>
-              </a:spcBef>
-              <a:spcAft>
-                <a:spcPts val="200"/>
-              </a:spcAft>
-              <a:buFont typeface="Franklin Gothic Book" panose="020B0503020102020204" pitchFamily="34" charset="0"/>
-              <a:buChar char="–"/>
-              <a:defRPr sz="1800" i="1" kern="1200" baseline="0">
-                <a:solidFill>
-                  <a:schemeClr val="tx2"/>
-                </a:solidFill>
-                <a:latin typeface="+mn-lt"/>
-                <a:ea typeface="+mn-ea"/>
-                <a:cs typeface="+mn-cs"/>
-              </a:defRPr>
-            </a:lvl4pPr>
-            <a:lvl5pPr marL="2286000" indent="-384048" algn="l" defTabSz="914400" rtl="0" eaLnBrk="1" latinLnBrk="0" hangingPunct="1">
-              <a:lnSpc>
-                <a:spcPct val="94000"/>
-              </a:lnSpc>
-              <a:spcBef>
-                <a:spcPts val="500"/>
-              </a:spcBef>
-              <a:spcAft>
-                <a:spcPts val="200"/>
-              </a:spcAft>
-              <a:buFont typeface="Franklin Gothic Book" panose="020B0503020102020204" pitchFamily="34" charset="0"/>
-              <a:buChar char="■"/>
-              <a:defRPr sz="1600" kern="1200" baseline="0">
-                <a:solidFill>
-                  <a:schemeClr val="tx2"/>
-                </a:solidFill>
-                <a:latin typeface="+mn-lt"/>
-                <a:ea typeface="+mn-ea"/>
-                <a:cs typeface="+mn-cs"/>
-              </a:defRPr>
-            </a:lvl5pPr>
-            <a:lvl6pPr marL="2743200" indent="-384048" algn="l" defTabSz="914400" rtl="0" eaLnBrk="1" latinLnBrk="0" hangingPunct="1">
-              <a:lnSpc>
-                <a:spcPct val="94000"/>
-              </a:lnSpc>
-              <a:spcBef>
-                <a:spcPts val="500"/>
-              </a:spcBef>
-              <a:spcAft>
-                <a:spcPts val="200"/>
-              </a:spcAft>
-              <a:buFont typeface="Franklin Gothic Book" panose="020B0503020102020204" pitchFamily="34" charset="0"/>
-              <a:buChar char="–"/>
-              <a:defRPr sz="1600" i="1" kern="1200" baseline="0">
-                <a:solidFill>
-                  <a:schemeClr val="tx2"/>
-                </a:solidFill>
-                <a:latin typeface="+mn-lt"/>
-                <a:ea typeface="+mn-ea"/>
-                <a:cs typeface="+mn-cs"/>
-              </a:defRPr>
-            </a:lvl6pPr>
-            <a:lvl7pPr marL="3200400" indent="-384048" algn="l" defTabSz="914400" rtl="0" eaLnBrk="1" latinLnBrk="0" hangingPunct="1">
-              <a:lnSpc>
-                <a:spcPct val="94000"/>
-              </a:lnSpc>
-              <a:spcBef>
-                <a:spcPts val="500"/>
-              </a:spcBef>
-              <a:spcAft>
-                <a:spcPts val="200"/>
-              </a:spcAft>
-              <a:buFont typeface="Franklin Gothic Book" panose="020B0503020102020204" pitchFamily="34" charset="0"/>
-              <a:buChar char="■"/>
-              <a:defRPr sz="1400" kern="1200" baseline="0">
-                <a:solidFill>
-                  <a:schemeClr val="tx2"/>
-                </a:solidFill>
-                <a:latin typeface="+mn-lt"/>
-                <a:ea typeface="+mn-ea"/>
-                <a:cs typeface="+mn-cs"/>
-              </a:defRPr>
-            </a:lvl7pPr>
-            <a:lvl8pPr marL="3657600" indent="-384048" algn="l" defTabSz="914400" rtl="0" eaLnBrk="1" latinLnBrk="0" hangingPunct="1">
-              <a:lnSpc>
-                <a:spcPct val="94000"/>
-              </a:lnSpc>
-              <a:spcBef>
-                <a:spcPts val="500"/>
-              </a:spcBef>
-              <a:spcAft>
-                <a:spcPts val="200"/>
-              </a:spcAft>
-              <a:buFont typeface="Franklin Gothic Book" panose="020B0503020102020204" pitchFamily="34" charset="0"/>
-              <a:buChar char="–"/>
-              <a:defRPr sz="1400" i="1" kern="1200" baseline="0">
-                <a:solidFill>
-                  <a:schemeClr val="tx2"/>
-                </a:solidFill>
-                <a:latin typeface="+mn-lt"/>
-                <a:ea typeface="+mn-ea"/>
-                <a:cs typeface="+mn-cs"/>
-              </a:defRPr>
-            </a:lvl8pPr>
-            <a:lvl9pPr marL="4114800" indent="-384048" algn="l" defTabSz="914400" rtl="0" eaLnBrk="1" latinLnBrk="0" hangingPunct="1">
-              <a:lnSpc>
-                <a:spcPct val="94000"/>
-              </a:lnSpc>
-              <a:spcBef>
-                <a:spcPts val="500"/>
-              </a:spcBef>
-              <a:spcAft>
-                <a:spcPts val="200"/>
-              </a:spcAft>
-              <a:buFont typeface="Franklin Gothic Book" panose="020B0503020102020204" pitchFamily="34" charset="0"/>
-              <a:buChar char="■"/>
-              <a:defRPr sz="1400" kern="1200" baseline="0">
-                <a:solidFill>
-                  <a:schemeClr val="tx2"/>
-                </a:solidFill>
-                <a:latin typeface="+mn-lt"/>
-                <a:ea typeface="+mn-ea"/>
-                <a:cs typeface="+mn-cs"/>
-              </a:defRPr>
-            </a:lvl9pPr>
-          </a:lstStyle>
-          <a:p>
-            <a:r>
-              <a:rPr lang="en-US" b="1" dirty="0">
-                <a:solidFill>
-                  <a:schemeClr val="tx1"/>
-                </a:solidFill>
-                <a:latin typeface="Times New Roman" panose="02020603050405020304" pitchFamily="18" charset="0"/>
-                <a:cs typeface="Times New Roman" panose="02020603050405020304" pitchFamily="18" charset="0"/>
-              </a:rPr>
-              <a:t>Language Models</a:t>
-            </a:r>
-          </a:p>
-          <a:p>
-            <a:pPr lvl="1"/>
-            <a:r>
-              <a:rPr lang="en-US" sz="1800" i="0" dirty="0">
-                <a:solidFill>
-                  <a:schemeClr val="tx1"/>
-                </a:solidFill>
-                <a:latin typeface="Times New Roman" panose="02020603050405020304" pitchFamily="18" charset="0"/>
-                <a:cs typeface="Times New Roman" panose="02020603050405020304" pitchFamily="18" charset="0"/>
-              </a:rPr>
-              <a:t>Language modeling is defined as probability distributions over sequences (Shannon, 1948).</a:t>
-            </a:r>
-          </a:p>
-          <a:p>
-            <a:pPr lvl="1"/>
-            <a:r>
-              <a:rPr lang="en-US" sz="1800" i="0" dirty="0">
-                <a:solidFill>
-                  <a:schemeClr val="tx1"/>
-                </a:solidFill>
-                <a:latin typeface="Times New Roman" panose="02020603050405020304" pitchFamily="18" charset="0"/>
-                <a:cs typeface="Times New Roman" panose="02020603050405020304" pitchFamily="18" charset="0"/>
-              </a:rPr>
-              <a:t>Framed as next token prediction, it serves as a core benchmark for measuring progress toward AI.</a:t>
-            </a:r>
-          </a:p>
-          <a:p>
-            <a:r>
-              <a:rPr lang="en-US" b="1" dirty="0">
-                <a:solidFill>
-                  <a:schemeClr val="tx1"/>
-                </a:solidFill>
-                <a:latin typeface="Times New Roman" panose="02020603050405020304" pitchFamily="18" charset="0"/>
-                <a:cs typeface="Times New Roman" panose="02020603050405020304" pitchFamily="18" charset="0"/>
-              </a:rPr>
-              <a:t>Architecture</a:t>
-            </a:r>
-            <a:endParaRPr lang="en-US" dirty="0">
-              <a:solidFill>
-                <a:schemeClr val="tx1"/>
-              </a:solidFill>
-              <a:latin typeface="Times New Roman" panose="02020603050405020304" pitchFamily="18" charset="0"/>
-              <a:cs typeface="Times New Roman" panose="02020603050405020304" pitchFamily="18" charset="0"/>
-            </a:endParaRPr>
-          </a:p>
-          <a:p>
-            <a:pPr lvl="1"/>
-            <a:r>
-              <a:rPr lang="en-US" sz="1800" i="0" dirty="0">
-                <a:solidFill>
-                  <a:schemeClr val="tx1"/>
-                </a:solidFill>
-                <a:latin typeface="Times New Roman" panose="02020603050405020304" pitchFamily="18" charset="0"/>
-                <a:cs typeface="Times New Roman" panose="02020603050405020304" pitchFamily="18" charset="0"/>
-              </a:rPr>
-              <a:t>The architecture of language models has evolved from traditional statistical n-gram methods to advanced neural networks.</a:t>
-            </a:r>
-          </a:p>
-          <a:p>
-            <a:pPr lvl="1"/>
-            <a:r>
-              <a:rPr lang="en-US" sz="1800" i="0" dirty="0">
-                <a:solidFill>
-                  <a:schemeClr val="tx1"/>
-                </a:solidFill>
-                <a:latin typeface="Times New Roman" panose="02020603050405020304" pitchFamily="18" charset="0"/>
-                <a:cs typeface="Times New Roman" panose="02020603050405020304" pitchFamily="18" charset="0"/>
-              </a:rPr>
-              <a:t>This progression moved through feed-forward models and RNNs/LSTMs before culminating in the Transformer architecture.</a:t>
-            </a:r>
-          </a:p>
-          <a:p>
-            <a:pPr lvl="1"/>
-            <a:r>
-              <a:rPr lang="en-US" sz="1800" i="0" dirty="0">
-                <a:solidFill>
-                  <a:schemeClr val="tx1"/>
-                </a:solidFill>
-                <a:latin typeface="Times New Roman" panose="02020603050405020304" pitchFamily="18" charset="0"/>
-                <a:cs typeface="Times New Roman" panose="02020603050405020304" pitchFamily="18" charset="0"/>
-              </a:rPr>
-              <a:t>By leveraging self-attention, Transformers have revolutionized the field, enabling models to capture long-range dependencies far more effectively than their predecessors.</a:t>
-            </a:r>
-          </a:p>
-          <a:p>
-            <a:r>
-              <a:rPr lang="en-US" b="1" dirty="0">
-                <a:solidFill>
-                  <a:schemeClr val="tx1"/>
-                </a:solidFill>
-                <a:latin typeface="Times New Roman" panose="02020603050405020304" pitchFamily="18" charset="0"/>
-                <a:cs typeface="Times New Roman" panose="02020603050405020304" pitchFamily="18" charset="0"/>
-              </a:rPr>
-              <a:t>Scaling</a:t>
-            </a:r>
-            <a:endParaRPr lang="en-US" dirty="0">
-              <a:solidFill>
-                <a:schemeClr val="tx1"/>
-              </a:solidFill>
-              <a:latin typeface="Times New Roman" panose="02020603050405020304" pitchFamily="18" charset="0"/>
-              <a:cs typeface="Times New Roman" panose="02020603050405020304" pitchFamily="18" charset="0"/>
-            </a:endParaRPr>
-          </a:p>
-          <a:p>
-            <a:pPr lvl="1"/>
-            <a:r>
-              <a:rPr lang="en-US" sz="1800" i="0" dirty="0">
-                <a:solidFill>
-                  <a:schemeClr val="tx1"/>
-                </a:solidFill>
-                <a:latin typeface="Times New Roman" panose="02020603050405020304" pitchFamily="18" charset="0"/>
-                <a:cs typeface="Times New Roman" panose="02020603050405020304" pitchFamily="18" charset="0"/>
-              </a:rPr>
-              <a:t>Scaling has been a consistent driver of progress in language modeling, with a history of increasing both dataset and model sizes from the n-gram era to the present.</a:t>
-            </a:r>
-          </a:p>
-          <a:p>
-            <a:pPr lvl="1"/>
-            <a:r>
-              <a:rPr lang="en-US" sz="1800" i="0" dirty="0">
-                <a:solidFill>
-                  <a:schemeClr val="tx1"/>
-                </a:solidFill>
-                <a:latin typeface="Times New Roman" panose="02020603050405020304" pitchFamily="18" charset="0"/>
-                <a:cs typeface="Times New Roman" panose="02020603050405020304" pitchFamily="18" charset="0"/>
-              </a:rPr>
-              <a:t>This trajectory accelerated with neural networks, moving from billion-parameter LSTMs to massive Transformers like GPT-3 (175B), which sparked a wave of large-scale models.</a:t>
-            </a:r>
-          </a:p>
-          <a:p>
-            <a:pPr lvl="1"/>
-            <a:r>
-              <a:rPr lang="en-US" sz="1800" i="0" dirty="0">
-                <a:solidFill>
-                  <a:schemeClr val="tx1"/>
-                </a:solidFill>
-                <a:latin typeface="Times New Roman" panose="02020603050405020304" pitchFamily="18" charset="0"/>
-                <a:cs typeface="Times New Roman" panose="02020603050405020304" pitchFamily="18" charset="0"/>
-              </a:rPr>
-              <a:t>Research has formalized "power laws" that mathematically predict how much better a model will perform as it gets bigger, helping developers train these systems more efficiently.</a:t>
-            </a:r>
-          </a:p>
-        </p:txBody>
-      </p:sp>
+      <mc:AlternateContent xmlns:mc="http://schemas.openxmlformats.org/markup-compatibility/2006">
+        <mc:Choice xmlns:a14="http://schemas.microsoft.com/office/drawing/2010/main" Requires="a14">
+          <p:sp>
+            <p:nvSpPr>
+              <p:cNvPr id="3" name="Content Placeholder 2">
+                <a:extLst>
+                  <a:ext uri="{FF2B5EF4-FFF2-40B4-BE49-F238E27FC236}">
+                    <a16:creationId xmlns:a16="http://schemas.microsoft.com/office/drawing/2014/main" id="{2ABA5A4F-BBFB-76EA-771C-0A5705DC2163}"/>
+                  </a:ext>
+                </a:extLst>
+              </p:cNvPr>
+              <p:cNvSpPr txBox="1">
+                <a:spLocks/>
+              </p:cNvSpPr>
+              <p:nvPr/>
+            </p:nvSpPr>
+            <p:spPr>
+              <a:xfrm>
+                <a:off x="1371600" y="1133856"/>
+                <a:ext cx="10320728" cy="5724144"/>
+              </a:xfrm>
+              <a:prstGeom prst="rect">
+                <a:avLst/>
+              </a:prstGeom>
+            </p:spPr>
+            <p:txBody>
+              <a:bodyPr vert="horz" lIns="91440" tIns="45720" rIns="91440" bIns="45720" rtlCol="0">
+                <a:noAutofit/>
+              </a:bodyPr>
+              <a:lstStyle>
+                <a:lvl1pPr marL="384048" indent="-384048" algn="l" defTabSz="914400" rtl="0" eaLnBrk="1" latinLnBrk="0" hangingPunct="1">
+                  <a:lnSpc>
+                    <a:spcPct val="94000"/>
+                  </a:lnSpc>
+                  <a:spcBef>
+                    <a:spcPts val="1000"/>
+                  </a:spcBef>
+                  <a:spcAft>
+                    <a:spcPts val="200"/>
+                  </a:spcAft>
+                  <a:buFont typeface="Franklin Gothic Book" panose="020B0503020102020204" pitchFamily="34" charset="0"/>
+                  <a:buChar char="■"/>
+                  <a:defRPr sz="2000" kern="1200" baseline="0">
+                    <a:solidFill>
+                      <a:schemeClr val="tx2"/>
+                    </a:solidFill>
+                    <a:latin typeface="+mn-lt"/>
+                    <a:ea typeface="+mn-ea"/>
+                    <a:cs typeface="+mn-cs"/>
+                  </a:defRPr>
+                </a:lvl1pPr>
+                <a:lvl2pPr marL="914400" indent="-384048" algn="l" defTabSz="914400" rtl="0" eaLnBrk="1" latinLnBrk="0" hangingPunct="1">
+                  <a:lnSpc>
+                    <a:spcPct val="94000"/>
+                  </a:lnSpc>
+                  <a:spcBef>
+                    <a:spcPts val="500"/>
+                  </a:spcBef>
+                  <a:spcAft>
+                    <a:spcPts val="200"/>
+                  </a:spcAft>
+                  <a:buFont typeface="Franklin Gothic Book" panose="020B0503020102020204" pitchFamily="34" charset="0"/>
+                  <a:buChar char="–"/>
+                  <a:defRPr sz="2000" i="1" kern="1200" baseline="0">
+                    <a:solidFill>
+                      <a:schemeClr val="tx2"/>
+                    </a:solidFill>
+                    <a:latin typeface="+mn-lt"/>
+                    <a:ea typeface="+mn-ea"/>
+                    <a:cs typeface="+mn-cs"/>
+                  </a:defRPr>
+                </a:lvl2pPr>
+                <a:lvl3pPr marL="1371600" indent="-384048" algn="l" defTabSz="914400" rtl="0" eaLnBrk="1" latinLnBrk="0" hangingPunct="1">
+                  <a:lnSpc>
+                    <a:spcPct val="94000"/>
+                  </a:lnSpc>
+                  <a:spcBef>
+                    <a:spcPts val="500"/>
+                  </a:spcBef>
+                  <a:spcAft>
+                    <a:spcPts val="200"/>
+                  </a:spcAft>
+                  <a:buFont typeface="Franklin Gothic Book" panose="020B0503020102020204" pitchFamily="34" charset="0"/>
+                  <a:buChar char="■"/>
+                  <a:defRPr sz="1800" kern="1200" baseline="0">
+                    <a:solidFill>
+                      <a:schemeClr val="tx2"/>
+                    </a:solidFill>
+                    <a:latin typeface="+mn-lt"/>
+                    <a:ea typeface="+mn-ea"/>
+                    <a:cs typeface="+mn-cs"/>
+                  </a:defRPr>
+                </a:lvl3pPr>
+                <a:lvl4pPr marL="1828800" indent="-384048" algn="l" defTabSz="914400" rtl="0" eaLnBrk="1" latinLnBrk="0" hangingPunct="1">
+                  <a:lnSpc>
+                    <a:spcPct val="94000"/>
+                  </a:lnSpc>
+                  <a:spcBef>
+                    <a:spcPts val="500"/>
+                  </a:spcBef>
+                  <a:spcAft>
+                    <a:spcPts val="200"/>
+                  </a:spcAft>
+                  <a:buFont typeface="Franklin Gothic Book" panose="020B0503020102020204" pitchFamily="34" charset="0"/>
+                  <a:buChar char="–"/>
+                  <a:defRPr sz="1800" i="1" kern="1200" baseline="0">
+                    <a:solidFill>
+                      <a:schemeClr val="tx2"/>
+                    </a:solidFill>
+                    <a:latin typeface="+mn-lt"/>
+                    <a:ea typeface="+mn-ea"/>
+                    <a:cs typeface="+mn-cs"/>
+                  </a:defRPr>
+                </a:lvl4pPr>
+                <a:lvl5pPr marL="2286000" indent="-384048" algn="l" defTabSz="914400" rtl="0" eaLnBrk="1" latinLnBrk="0" hangingPunct="1">
+                  <a:lnSpc>
+                    <a:spcPct val="94000"/>
+                  </a:lnSpc>
+                  <a:spcBef>
+                    <a:spcPts val="500"/>
+                  </a:spcBef>
+                  <a:spcAft>
+                    <a:spcPts val="200"/>
+                  </a:spcAft>
+                  <a:buFont typeface="Franklin Gothic Book" panose="020B0503020102020204" pitchFamily="34" charset="0"/>
+                  <a:buChar char="■"/>
+                  <a:defRPr sz="1600" kern="1200" baseline="0">
+                    <a:solidFill>
+                      <a:schemeClr val="tx2"/>
+                    </a:solidFill>
+                    <a:latin typeface="+mn-lt"/>
+                    <a:ea typeface="+mn-ea"/>
+                    <a:cs typeface="+mn-cs"/>
+                  </a:defRPr>
+                </a:lvl5pPr>
+                <a:lvl6pPr marL="2743200" indent="-384048" algn="l" defTabSz="914400" rtl="0" eaLnBrk="1" latinLnBrk="0" hangingPunct="1">
+                  <a:lnSpc>
+                    <a:spcPct val="94000"/>
+                  </a:lnSpc>
+                  <a:spcBef>
+                    <a:spcPts val="500"/>
+                  </a:spcBef>
+                  <a:spcAft>
+                    <a:spcPts val="200"/>
+                  </a:spcAft>
+                  <a:buFont typeface="Franklin Gothic Book" panose="020B0503020102020204" pitchFamily="34" charset="0"/>
+                  <a:buChar char="–"/>
+                  <a:defRPr sz="1600" i="1" kern="1200" baseline="0">
+                    <a:solidFill>
+                      <a:schemeClr val="tx2"/>
+                    </a:solidFill>
+                    <a:latin typeface="+mn-lt"/>
+                    <a:ea typeface="+mn-ea"/>
+                    <a:cs typeface="+mn-cs"/>
+                  </a:defRPr>
+                </a:lvl6pPr>
+                <a:lvl7pPr marL="3200400" indent="-384048" algn="l" defTabSz="914400" rtl="0" eaLnBrk="1" latinLnBrk="0" hangingPunct="1">
+                  <a:lnSpc>
+                    <a:spcPct val="94000"/>
+                  </a:lnSpc>
+                  <a:spcBef>
+                    <a:spcPts val="500"/>
+                  </a:spcBef>
+                  <a:spcAft>
+                    <a:spcPts val="200"/>
+                  </a:spcAft>
+                  <a:buFont typeface="Franklin Gothic Book" panose="020B0503020102020204" pitchFamily="34" charset="0"/>
+                  <a:buChar char="■"/>
+                  <a:defRPr sz="1400" kern="1200" baseline="0">
+                    <a:solidFill>
+                      <a:schemeClr val="tx2"/>
+                    </a:solidFill>
+                    <a:latin typeface="+mn-lt"/>
+                    <a:ea typeface="+mn-ea"/>
+                    <a:cs typeface="+mn-cs"/>
+                  </a:defRPr>
+                </a:lvl7pPr>
+                <a:lvl8pPr marL="3657600" indent="-384048" algn="l" defTabSz="914400" rtl="0" eaLnBrk="1" latinLnBrk="0" hangingPunct="1">
+                  <a:lnSpc>
+                    <a:spcPct val="94000"/>
+                  </a:lnSpc>
+                  <a:spcBef>
+                    <a:spcPts val="500"/>
+                  </a:spcBef>
+                  <a:spcAft>
+                    <a:spcPts val="200"/>
+                  </a:spcAft>
+                  <a:buFont typeface="Franklin Gothic Book" panose="020B0503020102020204" pitchFamily="34" charset="0"/>
+                  <a:buChar char="–"/>
+                  <a:defRPr sz="1400" i="1" kern="1200" baseline="0">
+                    <a:solidFill>
+                      <a:schemeClr val="tx2"/>
+                    </a:solidFill>
+                    <a:latin typeface="+mn-lt"/>
+                    <a:ea typeface="+mn-ea"/>
+                    <a:cs typeface="+mn-cs"/>
+                  </a:defRPr>
+                </a:lvl8pPr>
+                <a:lvl9pPr marL="4114800" indent="-384048" algn="l" defTabSz="914400" rtl="0" eaLnBrk="1" latinLnBrk="0" hangingPunct="1">
+                  <a:lnSpc>
+                    <a:spcPct val="94000"/>
+                  </a:lnSpc>
+                  <a:spcBef>
+                    <a:spcPts val="500"/>
+                  </a:spcBef>
+                  <a:spcAft>
+                    <a:spcPts val="200"/>
+                  </a:spcAft>
+                  <a:buFont typeface="Franklin Gothic Book" panose="020B0503020102020204" pitchFamily="34" charset="0"/>
+                  <a:buChar char="■"/>
+                  <a:defRPr sz="1400" kern="1200" baseline="0">
+                    <a:solidFill>
+                      <a:schemeClr val="tx2"/>
+                    </a:solidFill>
+                    <a:latin typeface="+mn-lt"/>
+                    <a:ea typeface="+mn-ea"/>
+                    <a:cs typeface="+mn-cs"/>
+                  </a:defRPr>
+                </a:lvl9pPr>
+              </a:lstStyle>
+              <a:p>
+                <a:r>
+                  <a:rPr lang="en-US" b="1" dirty="0">
+                    <a:solidFill>
+                      <a:schemeClr val="tx1"/>
+                    </a:solidFill>
+                    <a:latin typeface="Times New Roman" panose="02020603050405020304" pitchFamily="18" charset="0"/>
+                    <a:cs typeface="Times New Roman" panose="02020603050405020304" pitchFamily="18" charset="0"/>
+                  </a:rPr>
+                  <a:t>Language Models</a:t>
+                </a:r>
+              </a:p>
+              <a:p>
+                <a:pPr lvl="1"/>
+                <a:r>
+                  <a:rPr lang="en-US" sz="1800" i="0" dirty="0">
+                    <a:solidFill>
+                      <a:schemeClr val="tx1"/>
+                    </a:solidFill>
+                    <a:latin typeface="Times New Roman" panose="02020603050405020304" pitchFamily="18" charset="0"/>
+                    <a:cs typeface="Times New Roman" panose="02020603050405020304" pitchFamily="18" charset="0"/>
+                  </a:rPr>
+                  <a:t>Language modeling is defined as probability distributions over sequences (Shannon, 1948).</a:t>
+                </a:r>
+              </a:p>
+              <a:p>
+                <a:pPr lvl="1"/>
+                <a:r>
+                  <a:rPr lang="en-US" sz="1800" i="0" dirty="0">
+                    <a:solidFill>
+                      <a:schemeClr val="tx1"/>
+                    </a:solidFill>
+                    <a:latin typeface="Times New Roman" panose="02020603050405020304" pitchFamily="18" charset="0"/>
+                    <a:cs typeface="Times New Roman" panose="02020603050405020304" pitchFamily="18" charset="0"/>
+                  </a:rPr>
+                  <a:t>Framed as “next token prediction”, it serves as a core benchmark for measuring progress toward AI.</a:t>
+                </a:r>
+              </a:p>
+              <a:p>
+                <a:r>
+                  <a:rPr lang="en-US" b="1" dirty="0">
+                    <a:solidFill>
+                      <a:schemeClr val="tx1"/>
+                    </a:solidFill>
+                    <a:latin typeface="Times New Roman" panose="02020603050405020304" pitchFamily="18" charset="0"/>
+                    <a:cs typeface="Times New Roman" panose="02020603050405020304" pitchFamily="18" charset="0"/>
+                  </a:rPr>
+                  <a:t>Architecture</a:t>
+                </a:r>
+                <a:endParaRPr lang="en-US" dirty="0">
+                  <a:solidFill>
+                    <a:schemeClr val="tx1"/>
+                  </a:solidFill>
+                  <a:latin typeface="Times New Roman" panose="02020603050405020304" pitchFamily="18" charset="0"/>
+                  <a:cs typeface="Times New Roman" panose="02020603050405020304" pitchFamily="18" charset="0"/>
+                </a:endParaRPr>
+              </a:p>
+              <a:p>
+                <a:pPr lvl="1"/>
+                <a:r>
+                  <a:rPr lang="en-US" sz="1800" i="0" dirty="0">
+                    <a:solidFill>
+                      <a:schemeClr val="tx1"/>
+                    </a:solidFill>
+                    <a:latin typeface="Times New Roman" panose="02020603050405020304" pitchFamily="18" charset="0"/>
+                    <a:cs typeface="Times New Roman" panose="02020603050405020304" pitchFamily="18" charset="0"/>
+                  </a:rPr>
+                  <a:t>The architecture of language models has evolved from traditional statistical </a:t>
+                </a:r>
+                <a14:m>
+                  <m:oMath xmlns:m="http://schemas.openxmlformats.org/officeDocument/2006/math">
+                    <m:r>
+                      <a:rPr lang="en-US" sz="1800" i="1" dirty="0" smtClean="0">
+                        <a:solidFill>
+                          <a:schemeClr val="tx1"/>
+                        </a:solidFill>
+                        <a:latin typeface="Cambria Math" panose="02040503050406030204" pitchFamily="18" charset="0"/>
+                        <a:cs typeface="Times New Roman" panose="02020603050405020304" pitchFamily="18" charset="0"/>
+                      </a:rPr>
+                      <m:t>𝑛</m:t>
+                    </m:r>
+                  </m:oMath>
+                </a14:m>
+                <a:r>
+                  <a:rPr lang="en-US" sz="1800" i="0" dirty="0">
+                    <a:solidFill>
+                      <a:schemeClr val="tx1"/>
+                    </a:solidFill>
+                    <a:latin typeface="Times New Roman" panose="02020603050405020304" pitchFamily="18" charset="0"/>
+                    <a:cs typeface="Times New Roman" panose="02020603050405020304" pitchFamily="18" charset="0"/>
+                  </a:rPr>
+                  <a:t>-gram methods to advanced neural networks.</a:t>
+                </a:r>
+              </a:p>
+              <a:p>
+                <a:pPr lvl="1"/>
+                <a:r>
+                  <a:rPr lang="en-US" sz="1800" i="0" dirty="0">
+                    <a:solidFill>
+                      <a:schemeClr val="tx1"/>
+                    </a:solidFill>
+                    <a:latin typeface="Times New Roman" panose="02020603050405020304" pitchFamily="18" charset="0"/>
+                    <a:cs typeface="Times New Roman" panose="02020603050405020304" pitchFamily="18" charset="0"/>
+                  </a:rPr>
+                  <a:t>This progression moved through feed-forward models and RNNs/LSTMs before culminating in the Transformer architecture.</a:t>
+                </a:r>
+              </a:p>
+              <a:p>
+                <a:pPr lvl="1"/>
+                <a:r>
+                  <a:rPr lang="en-US" sz="1800" i="0" dirty="0">
+                    <a:solidFill>
+                      <a:schemeClr val="tx1"/>
+                    </a:solidFill>
+                    <a:latin typeface="Times New Roman" panose="02020603050405020304" pitchFamily="18" charset="0"/>
+                    <a:cs typeface="Times New Roman" panose="02020603050405020304" pitchFamily="18" charset="0"/>
+                  </a:rPr>
+                  <a:t>By leveraging self-attention, Transformers have revolutionized the field, enabling models to capture long-range dependencies far more effectively than their predecessors.</a:t>
+                </a:r>
+              </a:p>
+              <a:p>
+                <a:r>
+                  <a:rPr lang="en-US" b="1" dirty="0">
+                    <a:solidFill>
+                      <a:schemeClr val="tx1"/>
+                    </a:solidFill>
+                    <a:latin typeface="Times New Roman" panose="02020603050405020304" pitchFamily="18" charset="0"/>
+                    <a:cs typeface="Times New Roman" panose="02020603050405020304" pitchFamily="18" charset="0"/>
+                  </a:rPr>
+                  <a:t>Scaling</a:t>
+                </a:r>
+                <a:endParaRPr lang="en-US" dirty="0">
+                  <a:solidFill>
+                    <a:schemeClr val="tx1"/>
+                  </a:solidFill>
+                  <a:latin typeface="Times New Roman" panose="02020603050405020304" pitchFamily="18" charset="0"/>
+                  <a:cs typeface="Times New Roman" panose="02020603050405020304" pitchFamily="18" charset="0"/>
+                </a:endParaRPr>
+              </a:p>
+              <a:p>
+                <a:pPr lvl="1"/>
+                <a:r>
+                  <a:rPr lang="en-US" sz="1800" i="0" dirty="0">
+                    <a:solidFill>
+                      <a:schemeClr val="tx1"/>
+                    </a:solidFill>
+                    <a:latin typeface="Times New Roman" panose="02020603050405020304" pitchFamily="18" charset="0"/>
+                    <a:cs typeface="Times New Roman" panose="02020603050405020304" pitchFamily="18" charset="0"/>
+                  </a:rPr>
+                  <a:t>Scaling has been a consistent driver of progress in language modeling, with a history of increasing both dataset and model sizes from the </a:t>
+                </a:r>
+                <a14:m>
+                  <m:oMath xmlns:m="http://schemas.openxmlformats.org/officeDocument/2006/math">
+                    <m:r>
+                      <a:rPr lang="en-US" sz="1800" i="1" dirty="0" smtClean="0">
+                        <a:solidFill>
+                          <a:schemeClr val="tx1"/>
+                        </a:solidFill>
+                        <a:latin typeface="Cambria Math" panose="02040503050406030204" pitchFamily="18" charset="0"/>
+                        <a:cs typeface="Times New Roman" panose="02020603050405020304" pitchFamily="18" charset="0"/>
+                      </a:rPr>
+                      <m:t>𝑛</m:t>
+                    </m:r>
+                  </m:oMath>
+                </a14:m>
+                <a:r>
+                  <a:rPr lang="en-US" sz="1800" i="0" dirty="0">
+                    <a:solidFill>
+                      <a:schemeClr val="tx1"/>
+                    </a:solidFill>
+                    <a:latin typeface="Times New Roman" panose="02020603050405020304" pitchFamily="18" charset="0"/>
+                    <a:cs typeface="Times New Roman" panose="02020603050405020304" pitchFamily="18" charset="0"/>
+                  </a:rPr>
+                  <a:t>-gram era to the present.</a:t>
+                </a:r>
+              </a:p>
+              <a:p>
+                <a:pPr lvl="1"/>
+                <a:r>
+                  <a:rPr lang="en-US" sz="1800" i="0" dirty="0">
+                    <a:solidFill>
+                      <a:schemeClr val="tx1"/>
+                    </a:solidFill>
+                    <a:latin typeface="Times New Roman" panose="02020603050405020304" pitchFamily="18" charset="0"/>
+                    <a:cs typeface="Times New Roman" panose="02020603050405020304" pitchFamily="18" charset="0"/>
+                  </a:rPr>
+                  <a:t>This trajectory accelerated with neural networks, moving from billion-parameter LSTMs to massive Transformers like GPT-3 (175B), which sparked a wave of large-scale models.</a:t>
+                </a:r>
+              </a:p>
+              <a:p>
+                <a:pPr lvl="1"/>
+                <a:r>
+                  <a:rPr lang="en-US" sz="1800" i="0" dirty="0">
+                    <a:solidFill>
+                      <a:schemeClr val="tx1"/>
+                    </a:solidFill>
+                    <a:latin typeface="Times New Roman" panose="02020603050405020304" pitchFamily="18" charset="0"/>
+                    <a:cs typeface="Times New Roman" panose="02020603050405020304" pitchFamily="18" charset="0"/>
+                  </a:rPr>
+                  <a:t>Research has formalized "power laws" that mathematically predict how much better a model will perform as it gets bigger, helping developers train these systems more efficiently.</a:t>
+                </a:r>
+              </a:p>
+            </p:txBody>
+          </p:sp>
+        </mc:Choice>
+        <mc:Fallback>
+          <p:sp>
+            <p:nvSpPr>
+              <p:cNvPr id="3" name="Content Placeholder 2">
+                <a:extLst>
+                  <a:ext uri="{FF2B5EF4-FFF2-40B4-BE49-F238E27FC236}">
+                    <a16:creationId xmlns:a16="http://schemas.microsoft.com/office/drawing/2014/main" id="{2ABA5A4F-BBFB-76EA-771C-0A5705DC2163}"/>
+                  </a:ext>
+                </a:extLst>
+              </p:cNvPr>
+              <p:cNvSpPr txBox="1">
+                <a:spLocks noRot="1" noChangeAspect="1" noMove="1" noResize="1" noEditPoints="1" noAdjustHandles="1" noChangeArrowheads="1" noChangeShapeType="1" noTextEdit="1"/>
+              </p:cNvSpPr>
+              <p:nvPr/>
+            </p:nvSpPr>
+            <p:spPr>
+              <a:xfrm>
+                <a:off x="1371600" y="1133856"/>
+                <a:ext cx="10320728" cy="5724144"/>
+              </a:xfrm>
+              <a:prstGeom prst="rect">
+                <a:avLst/>
+              </a:prstGeom>
+              <a:blipFill>
+                <a:blip r:embed="rId2"/>
+                <a:stretch>
+                  <a:fillRect l="-615" t="-887" r="-492"/>
+                </a:stretch>
+              </a:blipFill>
+            </p:spPr>
+            <p:txBody>
+              <a:bodyPr/>
+              <a:lstStyle/>
+              <a:p>
+                <a:r>
+                  <a:rPr lang="en-IL">
+                    <a:noFill/>
+                  </a:rPr>
+                  <a:t> </a:t>
+                </a:r>
+              </a:p>
+            </p:txBody>
+          </p:sp>
+        </mc:Fallback>
+      </mc:AlternateContent>
     </p:spTree>
     <p:extLst>
       <p:ext uri="{BB962C8B-B14F-4D97-AF65-F5344CB8AC3E}">
@@ -17441,7 +22765,7 @@
         <p:spPr>
           <a:xfrm>
             <a:off x="1371599" y="1133856"/>
-            <a:ext cx="10294883" cy="5724144"/>
+            <a:ext cx="10294883" cy="5562779"/>
           </a:xfrm>
           <a:prstGeom prst="rect">
             <a:avLst/>
@@ -17763,27 +23087,7 @@
                 <a:latin typeface="Times New Roman" panose="02020603050405020304" pitchFamily="18" charset="0"/>
                 <a:cs typeface="Times New Roman" panose="02020603050405020304" pitchFamily="18" charset="0"/>
               </a:rPr>
-              <a:t>Initial experiments (</a:t>
-            </a:r>
-            <a:r>
-              <a:rPr lang="en-US" dirty="0" err="1">
-                <a:solidFill>
-                  <a:schemeClr val="tx1"/>
-                </a:solidFill>
-                <a:latin typeface="Times New Roman" panose="02020603050405020304" pitchFamily="18" charset="0"/>
-                <a:cs typeface="Times New Roman" panose="02020603050405020304" pitchFamily="18" charset="0"/>
-              </a:rPr>
-              <a:t>LLaMA</a:t>
-            </a:r>
-            <a:r>
-              <a:rPr lang="en-US" dirty="0">
-                <a:solidFill>
-                  <a:schemeClr val="tx1"/>
-                </a:solidFill>
-                <a:latin typeface="Times New Roman" panose="02020603050405020304" pitchFamily="18" charset="0"/>
-                <a:cs typeface="Times New Roman" panose="02020603050405020304" pitchFamily="18" charset="0"/>
-              </a:rPr>
-              <a:t>-I) show promising results; further investigation is planned.</a:t>
+              <a:t>Initial experiments (LLaMA-I) show promising results, but further investigation is planned.</a:t>
             </a:r>
           </a:p>
           <a:p>
@@ -18934,7 +24238,7 @@
                 <a:ext cx="9601200" cy="5179161"/>
               </a:xfrm>
               <a:blipFill>
-                <a:blip r:embed="rId2"/>
+                <a:blip r:embed="rId3"/>
                 <a:stretch>
                   <a:fillRect l="-661" t="-978"/>
                 </a:stretch>
@@ -19805,7 +25109,7 @@
           <p:nvPr/>
         </p:nvPicPr>
         <p:blipFill>
-          <a:blip r:embed="rId2"/>
+          <a:blip r:embed="rId3"/>
           <a:srcRect t="3432"/>
           <a:stretch/>
         </p:blipFill>
@@ -20516,7 +25820,7 @@
           <p:nvPr/>
         </p:nvPicPr>
         <p:blipFill>
-          <a:blip r:embed="rId2"/>
+          <a:blip r:embed="rId3"/>
           <a:srcRect t="2612" b="1020"/>
           <a:stretch/>
         </p:blipFill>
@@ -20545,7 +25849,7 @@
           <p:nvPr/>
         </p:nvPicPr>
         <p:blipFill>
-          <a:blip r:embed="rId3"/>
+          <a:blip r:embed="rId4"/>
           <a:srcRect t="3464"/>
           <a:stretch/>
         </p:blipFill>
@@ -20981,7 +26285,7 @@
           <p:nvPr/>
         </p:nvPicPr>
         <p:blipFill>
-          <a:blip r:embed="rId2"/>
+          <a:blip r:embed="rId3"/>
           <a:srcRect t="3253"/>
           <a:stretch/>
         </p:blipFill>
@@ -21264,4 +26568,319 @@
     </a:ext>
   </a:extLst>
 </a:theme>
+</file>
+
+<file path=ppt/theme/theme2.xml><?xml version="1.0" encoding="utf-8"?>
+<a:theme xmlns:a="http://schemas.openxmlformats.org/drawingml/2006/main" name="Office Theme">
+  <a:themeElements>
+    <a:clrScheme name="Office">
+      <a:dk1>
+        <a:sysClr val="windowText" lastClr="000000"/>
+      </a:dk1>
+      <a:lt1>
+        <a:sysClr val="window" lastClr="FFFFFF"/>
+      </a:lt1>
+      <a:dk2>
+        <a:srgbClr val="0E2841"/>
+      </a:dk2>
+      <a:lt2>
+        <a:srgbClr val="E8E8E8"/>
+      </a:lt2>
+      <a:accent1>
+        <a:srgbClr val="156082"/>
+      </a:accent1>
+      <a:accent2>
+        <a:srgbClr val="E97132"/>
+      </a:accent2>
+      <a:accent3>
+        <a:srgbClr val="196B24"/>
+      </a:accent3>
+      <a:accent4>
+        <a:srgbClr val="0F9ED5"/>
+      </a:accent4>
+      <a:accent5>
+        <a:srgbClr val="A02B93"/>
+      </a:accent5>
+      <a:accent6>
+        <a:srgbClr val="4EA72E"/>
+      </a:accent6>
+      <a:hlink>
+        <a:srgbClr val="467886"/>
+      </a:hlink>
+      <a:folHlink>
+        <a:srgbClr val="96607D"/>
+      </a:folHlink>
+    </a:clrScheme>
+    <a:fontScheme name="Office">
+      <a:majorFont>
+        <a:latin typeface="Aptos Display" panose="02110004020202020204"/>
+        <a:ea typeface=""/>
+        <a:cs typeface=""/>
+        <a:font script="Jpan" typeface="游ゴシック Light"/>
+        <a:font script="Hang" typeface="맑은 고딕"/>
+        <a:font script="Hans" typeface="等线 Light"/>
+        <a:font script="Hant" typeface="新細明體"/>
+        <a:font script="Arab" typeface="Times New Roman"/>
+        <a:font script="Hebr" typeface="Times New Roman"/>
+        <a:font script="Thai" typeface="Angsana New"/>
+        <a:font script="Ethi" typeface="Nyala"/>
+        <a:font script="Beng" typeface="Vrinda"/>
+        <a:font script="Gujr" typeface="Shruti"/>
+        <a:font script="Khmr" typeface="MoolBoran"/>
+        <a:font script="Knda" typeface="Tunga"/>
+        <a:font script="Guru" typeface="Raavi"/>
+        <a:font script="Cans" typeface="Euphemia"/>
+        <a:font script="Cher" typeface="Plantagenet Cherokee"/>
+        <a:font script="Yiii" typeface="Microsoft Yi Baiti"/>
+        <a:font script="Tibt" typeface="Microsoft Himalaya"/>
+        <a:font script="Thaa" typeface="MV Boli"/>
+        <a:font script="Deva" typeface="Mangal"/>
+        <a:font script="Telu" typeface="Gautami"/>
+        <a:font script="Taml" typeface="Latha"/>
+        <a:font script="Syrc" typeface="Estrangelo Edessa"/>
+        <a:font script="Orya" typeface="Kalinga"/>
+        <a:font script="Mlym" typeface="Kartika"/>
+        <a:font script="Laoo" typeface="DokChampa"/>
+        <a:font script="Sinh" typeface="Iskoola Pota"/>
+        <a:font script="Mong" typeface="Mongolian Baiti"/>
+        <a:font script="Viet" typeface="Times New Roman"/>
+        <a:font script="Uigh" typeface="Microsoft Uighur"/>
+        <a:font script="Geor" typeface="Sylfaen"/>
+        <a:font script="Armn" typeface="Arial"/>
+        <a:font script="Bugi" typeface="Leelawadee UI"/>
+        <a:font script="Bopo" typeface="Microsoft JhengHei"/>
+        <a:font script="Java" typeface="Javanese Text"/>
+        <a:font script="Lisu" typeface="Segoe UI"/>
+        <a:font script="Mymr" typeface="Myanmar Text"/>
+        <a:font script="Nkoo" typeface="Ebrima"/>
+        <a:font script="Olck" typeface="Nirmala UI"/>
+        <a:font script="Osma" typeface="Ebrima"/>
+        <a:font script="Phag" typeface="Phagspa"/>
+        <a:font script="Syrn" typeface="Estrangelo Edessa"/>
+        <a:font script="Syrj" typeface="Estrangelo Edessa"/>
+        <a:font script="Syre" typeface="Estrangelo Edessa"/>
+        <a:font script="Sora" typeface="Nirmala UI"/>
+        <a:font script="Tale" typeface="Microsoft Tai Le"/>
+        <a:font script="Talu" typeface="Microsoft New Tai Lue"/>
+        <a:font script="Tfng" typeface="Ebrima"/>
+      </a:majorFont>
+      <a:minorFont>
+        <a:latin typeface="Aptos" panose="02110004020202020204"/>
+        <a:ea typeface=""/>
+        <a:cs typeface=""/>
+        <a:font script="Jpan" typeface="游ゴシック"/>
+        <a:font script="Hang" typeface="맑은 고딕"/>
+        <a:font script="Hans" typeface="等线"/>
+        <a:font script="Hant" typeface="新細明體"/>
+        <a:font script="Arab" typeface="Arial"/>
+        <a:font script="Hebr" typeface="Arial"/>
+        <a:font script="Thai" typeface="Cordia New"/>
+        <a:font script="Ethi" typeface="Nyala"/>
+        <a:font script="Beng" typeface="Vrinda"/>
+        <a:font script="Gujr" typeface="Shruti"/>
+        <a:font script="Khmr" typeface="DaunPenh"/>
+        <a:font script="Knda" typeface="Tunga"/>
+        <a:font script="Guru" typeface="Raavi"/>
+        <a:font script="Cans" typeface="Euphemia"/>
+        <a:font script="Cher" typeface="Plantagenet Cherokee"/>
+        <a:font script="Yiii" typeface="Microsoft Yi Baiti"/>
+        <a:font script="Tibt" typeface="Microsoft Himalaya"/>
+        <a:font script="Thaa" typeface="MV Boli"/>
+        <a:font script="Deva" typeface="Mangal"/>
+        <a:font script="Telu" typeface="Gautami"/>
+        <a:font script="Taml" typeface="Latha"/>
+        <a:font script="Syrc" typeface="Estrangelo Edessa"/>
+        <a:font script="Orya" typeface="Kalinga"/>
+        <a:font script="Mlym" typeface="Kartika"/>
+        <a:font script="Laoo" typeface="DokChampa"/>
+        <a:font script="Sinh" typeface="Iskoola Pota"/>
+        <a:font script="Mong" typeface="Mongolian Baiti"/>
+        <a:font script="Viet" typeface="Arial"/>
+        <a:font script="Uigh" typeface="Microsoft Uighur"/>
+        <a:font script="Geor" typeface="Sylfaen"/>
+        <a:font script="Armn" typeface="Arial"/>
+        <a:font script="Bugi" typeface="Leelawadee UI"/>
+        <a:font script="Bopo" typeface="Microsoft JhengHei"/>
+        <a:font script="Java" typeface="Javanese Text"/>
+        <a:font script="Lisu" typeface="Segoe UI"/>
+        <a:font script="Mymr" typeface="Myanmar Text"/>
+        <a:font script="Nkoo" typeface="Ebrima"/>
+        <a:font script="Olck" typeface="Nirmala UI"/>
+        <a:font script="Osma" typeface="Ebrima"/>
+        <a:font script="Phag" typeface="Phagspa"/>
+        <a:font script="Syrn" typeface="Estrangelo Edessa"/>
+        <a:font script="Syrj" typeface="Estrangelo Edessa"/>
+        <a:font script="Syre" typeface="Estrangelo Edessa"/>
+        <a:font script="Sora" typeface="Nirmala UI"/>
+        <a:font script="Tale" typeface="Microsoft Tai Le"/>
+        <a:font script="Talu" typeface="Microsoft New Tai Lue"/>
+        <a:font script="Tfng" typeface="Ebrima"/>
+      </a:minorFont>
+    </a:fontScheme>
+    <a:fmtScheme name="Office">
+      <a:fillStyleLst>
+        <a:solidFill>
+          <a:schemeClr val="phClr"/>
+        </a:solidFill>
+        <a:gradFill rotWithShape="1">
+          <a:gsLst>
+            <a:gs pos="0">
+              <a:schemeClr val="phClr">
+                <a:lumMod val="110000"/>
+                <a:satMod val="105000"/>
+                <a:tint val="67000"/>
+              </a:schemeClr>
+            </a:gs>
+            <a:gs pos="50000">
+              <a:schemeClr val="phClr">
+                <a:lumMod val="105000"/>
+                <a:satMod val="103000"/>
+                <a:tint val="73000"/>
+              </a:schemeClr>
+            </a:gs>
+            <a:gs pos="100000">
+              <a:schemeClr val="phClr">
+                <a:lumMod val="105000"/>
+                <a:satMod val="109000"/>
+                <a:tint val="81000"/>
+              </a:schemeClr>
+            </a:gs>
+          </a:gsLst>
+          <a:lin ang="5400000" scaled="0"/>
+        </a:gradFill>
+        <a:gradFill rotWithShape="1">
+          <a:gsLst>
+            <a:gs pos="0">
+              <a:schemeClr val="phClr">
+                <a:satMod val="103000"/>
+                <a:lumMod val="102000"/>
+                <a:tint val="94000"/>
+              </a:schemeClr>
+            </a:gs>
+            <a:gs pos="50000">
+              <a:schemeClr val="phClr">
+                <a:satMod val="110000"/>
+                <a:lumMod val="100000"/>
+                <a:shade val="100000"/>
+              </a:schemeClr>
+            </a:gs>
+            <a:gs pos="100000">
+              <a:schemeClr val="phClr">
+                <a:lumMod val="99000"/>
+                <a:satMod val="120000"/>
+                <a:shade val="78000"/>
+              </a:schemeClr>
+            </a:gs>
+          </a:gsLst>
+          <a:lin ang="5400000" scaled="0"/>
+        </a:gradFill>
+      </a:fillStyleLst>
+      <a:lnStyleLst>
+        <a:ln w="12700" cap="flat" cmpd="sng" algn="ctr">
+          <a:solidFill>
+            <a:schemeClr val="phClr"/>
+          </a:solidFill>
+          <a:prstDash val="solid"/>
+          <a:miter lim="800000"/>
+        </a:ln>
+        <a:ln w="19050" cap="flat" cmpd="sng" algn="ctr">
+          <a:solidFill>
+            <a:schemeClr val="phClr"/>
+          </a:solidFill>
+          <a:prstDash val="solid"/>
+          <a:miter lim="800000"/>
+        </a:ln>
+        <a:ln w="25400" cap="flat" cmpd="sng" algn="ctr">
+          <a:solidFill>
+            <a:schemeClr val="phClr"/>
+          </a:solidFill>
+          <a:prstDash val="solid"/>
+          <a:miter lim="800000"/>
+        </a:ln>
+      </a:lnStyleLst>
+      <a:effectStyleLst>
+        <a:effectStyle>
+          <a:effectLst/>
+        </a:effectStyle>
+        <a:effectStyle>
+          <a:effectLst/>
+        </a:effectStyle>
+        <a:effectStyle>
+          <a:effectLst>
+            <a:outerShdw blurRad="57150" dist="19050" dir="5400000" algn="ctr" rotWithShape="0">
+              <a:srgbClr val="000000">
+                <a:alpha val="63000"/>
+              </a:srgbClr>
+            </a:outerShdw>
+          </a:effectLst>
+        </a:effectStyle>
+      </a:effectStyleLst>
+      <a:bgFillStyleLst>
+        <a:solidFill>
+          <a:schemeClr val="phClr"/>
+        </a:solidFill>
+        <a:solidFill>
+          <a:schemeClr val="phClr">
+            <a:tint val="95000"/>
+            <a:satMod val="170000"/>
+          </a:schemeClr>
+        </a:solidFill>
+        <a:gradFill rotWithShape="1">
+          <a:gsLst>
+            <a:gs pos="0">
+              <a:schemeClr val="phClr">
+                <a:tint val="93000"/>
+                <a:satMod val="150000"/>
+                <a:shade val="98000"/>
+                <a:lumMod val="102000"/>
+              </a:schemeClr>
+            </a:gs>
+            <a:gs pos="50000">
+              <a:schemeClr val="phClr">
+                <a:tint val="98000"/>
+                <a:satMod val="130000"/>
+                <a:shade val="90000"/>
+                <a:lumMod val="103000"/>
+              </a:schemeClr>
+            </a:gs>
+            <a:gs pos="100000">
+              <a:schemeClr val="phClr">
+                <a:shade val="63000"/>
+                <a:satMod val="120000"/>
+              </a:schemeClr>
+            </a:gs>
+          </a:gsLst>
+          <a:lin ang="5400000" scaled="0"/>
+        </a:gradFill>
+      </a:bgFillStyleLst>
+    </a:fmtScheme>
+  </a:themeElements>
+  <a:objectDefaults>
+    <a:lnDef>
+      <a:spPr/>
+      <a:bodyPr/>
+      <a:lstStyle/>
+      <a:style>
+        <a:lnRef idx="2">
+          <a:schemeClr val="accent1"/>
+        </a:lnRef>
+        <a:fillRef idx="0">
+          <a:schemeClr val="accent1"/>
+        </a:fillRef>
+        <a:effectRef idx="1">
+          <a:schemeClr val="accent1"/>
+        </a:effectRef>
+        <a:fontRef idx="minor">
+          <a:schemeClr val="tx1"/>
+        </a:fontRef>
+      </a:style>
+    </a:lnDef>
+  </a:objectDefaults>
+  <a:extraClrSchemeLst/>
+  <a:extLst>
+    <a:ext uri="{05A4C25C-085E-4340-85A3-A5531E510DB2}">
+      <thm15:themeFamily xmlns:thm15="http://schemas.microsoft.com/office/thememl/2012/main" name="Office Theme" id="{2E142A2C-CD16-42D6-873A-C26D2A0506FA}" vid="{1BDDFF52-6CD6-40A5-AB3C-68EB2F1E4D0A}"/>
+    </a:ext>
+  </a:extLst>
+</a:theme>
 </file>
--- a/presentation/Lecture Slides.pptx
+++ b/presentation/Lecture Slides.pptx
@@ -4025,7 +4025,123 @@
             </a:r>
             <a:r>
               <a:rPr lang="he-IL" dirty="0"/>
-              <a:t> הזאת</a:t>
+              <a:t> הבאה היא </a:t>
+            </a:r>
+            <a:r>
+              <a:rPr lang="en-US" dirty="0" err="1"/>
+              <a:t>WinoGender</a:t>
+            </a:r>
+            <a:r>
+              <a:rPr lang="he-IL" dirty="0"/>
+              <a:t> שבודקת הטיות מגדריות.</a:t>
+            </a:r>
+          </a:p>
+          <a:p>
+            <a:pPr marL="0" algn="r" defTabSz="914400" rtl="1" eaLnBrk="1" latinLnBrk="0" hangingPunct="1"/>
+            <a:endParaRPr lang="he-IL" dirty="0"/>
+          </a:p>
+          <a:p>
+            <a:pPr marL="0" algn="r" defTabSz="914400" rtl="1" eaLnBrk="1" latinLnBrk="0" hangingPunct="1"/>
+            <a:r>
+              <a:rPr lang="he-IL" dirty="0"/>
+              <a:t>מנסחים עבור המודל צמד משפטים שמכילים הפנייה לדמות במשפט, ושואלים את המודל למי ההפניה מתייחסת.</a:t>
+            </a:r>
+          </a:p>
+          <a:p>
+            <a:pPr marL="0" algn="r" defTabSz="914400" rtl="1" eaLnBrk="1" latinLnBrk="0" hangingPunct="1"/>
+            <a:endParaRPr lang="he-IL" dirty="0"/>
+          </a:p>
+          <a:p>
+            <a:pPr marL="0" algn="r" defTabSz="914400" rtl="1" eaLnBrk="1" latinLnBrk="0" hangingPunct="1"/>
+            <a:r>
+              <a:rPr lang="he-IL" dirty="0"/>
+              <a:t>למשל מודל שיבחר לשייך את </a:t>
+            </a:r>
+            <a:r>
+              <a:rPr lang="en-US" dirty="0"/>
+              <a:t>he</a:t>
+            </a:r>
+            <a:r>
+              <a:rPr lang="he-IL" dirty="0"/>
+              <a:t> לפיזיקאי ואת </a:t>
+            </a:r>
+            <a:r>
+              <a:rPr lang="en-US" dirty="0"/>
+              <a:t>she</a:t>
+            </a:r>
+            <a:r>
+              <a:rPr lang="he-IL" dirty="0"/>
+              <a:t> לאחות, הרי משוחד.</a:t>
+            </a:r>
+          </a:p>
+          <a:p>
+            <a:pPr marL="0" algn="r" defTabSz="914400" rtl="1" eaLnBrk="1" latinLnBrk="0" hangingPunct="1"/>
+            <a:endParaRPr lang="he-IL" dirty="0"/>
+          </a:p>
+          <a:p>
+            <a:pPr marL="0" algn="r" defTabSz="914400" rtl="1" eaLnBrk="1" latinLnBrk="0" hangingPunct="1"/>
+            <a:r>
+              <a:rPr lang="he-IL" dirty="0"/>
+              <a:t>החוקרים מציינים ש-</a:t>
+            </a:r>
+            <a:r>
+              <a:rPr lang="en-US" dirty="0"/>
+              <a:t>LLaMA</a:t>
+            </a:r>
+            <a:r>
+              <a:rPr lang="he-IL" dirty="0"/>
+              <a:t> מציג יכולות לא רעות בזיהוי כינויי גוף ניטרליים הם </a:t>
+            </a:r>
+            <a:r>
+              <a:rPr lang="en-US" dirty="0"/>
+              <a:t>their</a:t>
+            </a:r>
+            <a:r>
+              <a:rPr lang="he-IL" dirty="0"/>
+              <a:t> או </a:t>
+            </a:r>
+            <a:r>
+              <a:rPr lang="en-US" dirty="0"/>
+              <a:t>them</a:t>
+            </a:r>
+            <a:r>
+              <a:rPr lang="he-IL" dirty="0"/>
+              <a:t>, אך נופל בהפניות מגדריות, כמו </a:t>
+            </a:r>
+            <a:r>
+              <a:rPr lang="en-US" dirty="0"/>
+              <a:t>her</a:t>
+            </a:r>
+            <a:r>
+              <a:rPr lang="he-IL" dirty="0"/>
+              <a:t> או </a:t>
+            </a:r>
+            <a:r>
+              <a:rPr lang="en-US" dirty="0"/>
+              <a:t>his</a:t>
+            </a:r>
+            <a:r>
+              <a:rPr lang="he-IL" dirty="0"/>
+              <a:t>.</a:t>
+            </a:r>
+          </a:p>
+          <a:p>
+            <a:pPr marL="0" algn="r" defTabSz="914400" rtl="1" eaLnBrk="1" latinLnBrk="0" hangingPunct="1"/>
+            <a:endParaRPr lang="he-IL" dirty="0"/>
+          </a:p>
+          <a:p>
+            <a:pPr marL="0" algn="r" defTabSz="914400" rtl="1" eaLnBrk="1" latinLnBrk="0" hangingPunct="1"/>
+            <a:r>
+              <a:rPr lang="he-IL" dirty="0"/>
+              <a:t>הביצועים של המודל הרבה פחות טובים במקרי קצה, שהם קוראים להם </a:t>
+            </a:r>
+            <a:r>
+              <a:rPr lang="en-US" dirty="0"/>
+              <a:t>”gotcha cases”</a:t>
+            </a:r>
+            <a:r>
+              <a:rPr lang="he-IL" dirty="0"/>
+              <a:t>, מקרים בהם למשל מסופר על אח זכר, שאיכשהו אפשר להבין מהמשפט שמדובר באח זכר, אבל בכל זאת המודל מזהה את האח כאחות.</a:t>
             </a:r>
             <a:endParaRPr lang="en-IL" dirty="0"/>
           </a:p>
@@ -4058,6 +4174,143 @@
     <p:extLst>
       <p:ext uri="{BB962C8B-B14F-4D97-AF65-F5344CB8AC3E}">
         <p14:creationId xmlns:p14="http://schemas.microsoft.com/office/powerpoint/2010/main" val="978839723"/>
+      </p:ext>
+    </p:extLst>
+  </p:cSld>
+  <p:clrMapOvr>
+    <a:masterClrMapping/>
+  </p:clrMapOvr>
+</p:notes>
+</file>
+
+<file path=ppt/notesSlides/notesSlide19.xml><?xml version="1.0" encoding="utf-8"?>
+<p:notes xmlns:a="http://schemas.openxmlformats.org/drawingml/2006/main" xmlns:r="http://schemas.openxmlformats.org/officeDocument/2006/relationships" xmlns:p="http://schemas.openxmlformats.org/presentationml/2006/main">
+  <p:cSld>
+    <p:spTree>
+      <p:nvGrpSpPr>
+        <p:cNvPr id="1" name=""/>
+        <p:cNvGrpSpPr/>
+        <p:nvPr/>
+      </p:nvGrpSpPr>
+      <p:grpSpPr>
+        <a:xfrm>
+          <a:off x="0" y="0"/>
+          <a:ext cx="0" cy="0"/>
+          <a:chOff x="0" y="0"/>
+          <a:chExt cx="0" cy="0"/>
+        </a:xfrm>
+      </p:grpSpPr>
+      <p:sp>
+        <p:nvSpPr>
+          <p:cNvPr id="2" name="Slide Image Placeholder 1"/>
+          <p:cNvSpPr>
+            <a:spLocks noGrp="1" noRot="1" noChangeAspect="1"/>
+          </p:cNvSpPr>
+          <p:nvPr>
+            <p:ph type="sldImg"/>
+          </p:nvPr>
+        </p:nvSpPr>
+        <p:spPr/>
+      </p:sp>
+      <p:sp>
+        <p:nvSpPr>
+          <p:cNvPr id="3" name="Notes Placeholder 2"/>
+          <p:cNvSpPr>
+            <a:spLocks noGrp="1"/>
+          </p:cNvSpPr>
+          <p:nvPr>
+            <p:ph type="body" idx="1"/>
+          </p:nvPr>
+        </p:nvSpPr>
+        <p:spPr/>
+        <p:txBody>
+          <a:bodyPr/>
+          <a:lstStyle/>
+          <a:p>
+            <a:pPr marL="0" algn="r" defTabSz="914400" rtl="1" eaLnBrk="1" latinLnBrk="0" hangingPunct="1"/>
+            <a:r>
+              <a:rPr lang="he-IL" dirty="0" err="1"/>
+              <a:t>המטריקה</a:t>
+            </a:r>
+            <a:r>
+              <a:rPr lang="he-IL" dirty="0"/>
+              <a:t> </a:t>
+            </a:r>
+            <a:r>
+              <a:rPr lang="en-US" dirty="0" err="1"/>
+              <a:t>TruthfulQA</a:t>
+            </a:r>
+            <a:r>
+              <a:rPr lang="he-IL" dirty="0"/>
+              <a:t> בודקת כמה המודל יודע להבחין בין עובדות לפיקציות,</a:t>
+            </a:r>
+          </a:p>
+          <a:p>
+            <a:pPr marL="0" algn="r" defTabSz="914400" rtl="1" eaLnBrk="1" latinLnBrk="0" hangingPunct="1"/>
+            <a:endParaRPr lang="he-IL" dirty="0"/>
+          </a:p>
+          <a:p>
+            <a:pPr marL="0" algn="r" defTabSz="914400" rtl="1" eaLnBrk="1" latinLnBrk="0" hangingPunct="1"/>
+            <a:r>
+              <a:rPr lang="he-IL" dirty="0"/>
+              <a:t>היא מחולקת לכמה התשובות של המודל עובדתיות, ולכמה התשובות שלו עובדתיות ואינפורמטיביות.</a:t>
+            </a:r>
+          </a:p>
+          <a:p>
+            <a:pPr marL="0" algn="r" defTabSz="914400" rtl="1" eaLnBrk="1" latinLnBrk="0" hangingPunct="1"/>
+            <a:endParaRPr lang="he-IL" dirty="0"/>
+          </a:p>
+          <a:p>
+            <a:pPr marL="0" algn="r" defTabSz="914400" rtl="1" eaLnBrk="1" latinLnBrk="0" hangingPunct="1"/>
+            <a:r>
+              <a:rPr lang="he-IL" dirty="0"/>
+              <a:t>החוקרים הראו שמודלי </a:t>
+            </a:r>
+            <a:r>
+              <a:rPr lang="en-US" dirty="0"/>
+              <a:t>LLaMA</a:t>
+            </a:r>
+            <a:r>
+              <a:rPr lang="he-IL" dirty="0"/>
+              <a:t> מציגים תוצאות טובות משל GPT, אבל עדיין שיעור התשובות הנכונות שלו נמוך.</a:t>
+            </a:r>
+          </a:p>
+          <a:p>
+            <a:pPr marL="0" algn="r" defTabSz="914400" rtl="1" eaLnBrk="1" latinLnBrk="0" hangingPunct="1"/>
+            <a:r>
+              <a:rPr lang="he-IL" dirty="0"/>
+              <a:t>הם מציינים שהמודל נוטה להזות, לתת תשובות לא נכונות, ויש מקום לשיפור.</a:t>
+            </a:r>
+          </a:p>
+        </p:txBody>
+      </p:sp>
+      <p:sp>
+        <p:nvSpPr>
+          <p:cNvPr id="4" name="Slide Number Placeholder 3"/>
+          <p:cNvSpPr>
+            <a:spLocks noGrp="1"/>
+          </p:cNvSpPr>
+          <p:nvPr>
+            <p:ph type="sldNum" sz="quarter" idx="5"/>
+          </p:nvPr>
+        </p:nvSpPr>
+        <p:spPr/>
+        <p:txBody>
+          <a:bodyPr/>
+          <a:lstStyle/>
+          <a:p>
+            <a:fld id="{476FFE5D-288A-DB4E-9912-CFF1A38B0A9A}" type="slidenum">
+              <a:rPr lang="en-IL" smtClean="0"/>
+              <a:t>20</a:t>
+            </a:fld>
+            <a:endParaRPr lang="en-IL"/>
+          </a:p>
+        </p:txBody>
+      </p:sp>
+    </p:spTree>
+    <p:extLst>
+      <p:ext uri="{BB962C8B-B14F-4D97-AF65-F5344CB8AC3E}">
+        <p14:creationId xmlns:p14="http://schemas.microsoft.com/office/powerpoint/2010/main" val="1172937156"/>
       </p:ext>
     </p:extLst>
   </p:cSld>
@@ -4599,95 +4852,7 @@
                 <a:ea typeface="+mn-ea"/>
                 <a:cs typeface="+mn-cs"/>
               </a:rPr>
-              <a:t>  שנראה בהמשך, שבהם מציגים למודל שאלות רב-ברירה עם תשובות </a:t>
-            </a:r>
-            <a:r>
-              <a:rPr lang="he-IL" sz="1200" kern="1200" dirty="0" err="1">
-                <a:solidFill>
-                  <a:schemeClr val="tx1"/>
-                </a:solidFill>
-                <a:latin typeface="+mn-lt"/>
-                <a:ea typeface="+mn-ea"/>
-                <a:cs typeface="+mn-cs"/>
-              </a:rPr>
-              <a:t>A</a:t>
-            </a:r>
-            <a:r>
-              <a:rPr lang="he-IL" sz="1200" kern="1200" dirty="0">
-                <a:solidFill>
-                  <a:schemeClr val="tx1"/>
-                </a:solidFill>
-                <a:latin typeface="+mn-lt"/>
-                <a:ea typeface="+mn-ea"/>
-                <a:cs typeface="+mn-cs"/>
-              </a:rPr>
-              <a:t>, </a:t>
-            </a:r>
-            <a:r>
-              <a:rPr lang="he-IL" sz="1200" kern="1200" dirty="0" err="1">
-                <a:solidFill>
-                  <a:schemeClr val="tx1"/>
-                </a:solidFill>
-                <a:latin typeface="+mn-lt"/>
-                <a:ea typeface="+mn-ea"/>
-                <a:cs typeface="+mn-cs"/>
-              </a:rPr>
-              <a:t>B</a:t>
-            </a:r>
-            <a:r>
-              <a:rPr lang="he-IL" sz="1200" kern="1200" dirty="0">
-                <a:solidFill>
-                  <a:schemeClr val="tx1"/>
-                </a:solidFill>
-                <a:latin typeface="+mn-lt"/>
-                <a:ea typeface="+mn-ea"/>
-                <a:cs typeface="+mn-cs"/>
-              </a:rPr>
-              <a:t>, </a:t>
-            </a:r>
-            <a:r>
-              <a:rPr lang="he-IL" sz="1200" kern="1200" dirty="0" err="1">
-                <a:solidFill>
-                  <a:schemeClr val="tx1"/>
-                </a:solidFill>
-                <a:latin typeface="+mn-lt"/>
-                <a:ea typeface="+mn-ea"/>
-                <a:cs typeface="+mn-cs"/>
-              </a:rPr>
-              <a:t>C</a:t>
-            </a:r>
-            <a:r>
-              <a:rPr lang="he-IL" sz="1200" kern="1200" dirty="0">
-                <a:solidFill>
-                  <a:schemeClr val="tx1"/>
-                </a:solidFill>
-                <a:latin typeface="+mn-lt"/>
-                <a:ea typeface="+mn-ea"/>
-                <a:cs typeface="+mn-cs"/>
-              </a:rPr>
-              <a:t> או </a:t>
-            </a:r>
-            <a:r>
-              <a:rPr lang="he-IL" sz="1200" kern="1200" dirty="0" err="1">
-                <a:solidFill>
-                  <a:schemeClr val="tx1"/>
-                </a:solidFill>
-                <a:latin typeface="+mn-lt"/>
-                <a:ea typeface="+mn-ea"/>
-                <a:cs typeface="+mn-cs"/>
-              </a:rPr>
-              <a:t>D</a:t>
-            </a:r>
-            <a:r>
-              <a:rPr lang="he-IL" sz="1200" kern="1200" dirty="0">
-                <a:solidFill>
-                  <a:schemeClr val="tx1"/>
-                </a:solidFill>
-                <a:latin typeface="+mn-lt"/>
-                <a:ea typeface="+mn-ea"/>
-                <a:cs typeface="+mn-cs"/>
-              </a:rPr>
-              <a:t>. לפעמים המודל יודע את התשובה, אבל לא מקפיד על הפורמט, ונותן את התשובה המילולית במקום את האות. לא תמיד קל לחלץ את האות הזו בצורה אוטומטית, אז הדוגמאות “מיישרות” אותו לפורמט הנכון.</a:t>
+              <a:t> שנראה בהמשך, שבהם מציגים רוצים לבחון את הידע של המודל.</a:t>
             </a:r>
           </a:p>
           <a:p>
@@ -4978,6 +5143,1167 @@
     <p:extLst>
       <p:ext uri="{BB962C8B-B14F-4D97-AF65-F5344CB8AC3E}">
         <p14:creationId xmlns:p14="http://schemas.microsoft.com/office/powerpoint/2010/main" val="724311034"/>
+      </p:ext>
+    </p:extLst>
+  </p:cSld>
+  <p:clrMapOvr>
+    <a:masterClrMapping/>
+  </p:clrMapOvr>
+</p:notes>
+</file>
+
+<file path=ppt/notesSlides/notesSlide20.xml><?xml version="1.0" encoding="utf-8"?>
+<p:notes xmlns:a="http://schemas.openxmlformats.org/drawingml/2006/main" xmlns:r="http://schemas.openxmlformats.org/officeDocument/2006/relationships" xmlns:p="http://schemas.openxmlformats.org/presentationml/2006/main">
+  <p:cSld>
+    <p:spTree>
+      <p:nvGrpSpPr>
+        <p:cNvPr id="1" name=""/>
+        <p:cNvGrpSpPr/>
+        <p:nvPr/>
+      </p:nvGrpSpPr>
+      <p:grpSpPr>
+        <a:xfrm>
+          <a:off x="0" y="0"/>
+          <a:ext cx="0" cy="0"/>
+          <a:chOff x="0" y="0"/>
+          <a:chExt cx="0" cy="0"/>
+        </a:xfrm>
+      </p:grpSpPr>
+      <p:sp>
+        <p:nvSpPr>
+          <p:cNvPr id="2" name="Slide Image Placeholder 1"/>
+          <p:cNvSpPr>
+            <a:spLocks noGrp="1" noRot="1" noChangeAspect="1"/>
+          </p:cNvSpPr>
+          <p:nvPr>
+            <p:ph type="sldImg"/>
+          </p:nvPr>
+        </p:nvSpPr>
+        <p:spPr/>
+      </p:sp>
+      <p:sp>
+        <p:nvSpPr>
+          <p:cNvPr id="3" name="Notes Placeholder 2"/>
+          <p:cNvSpPr>
+            <a:spLocks noGrp="1"/>
+          </p:cNvSpPr>
+          <p:nvPr>
+            <p:ph type="body" idx="1"/>
+          </p:nvPr>
+        </p:nvSpPr>
+        <p:spPr/>
+        <p:txBody>
+          <a:bodyPr/>
+          <a:lstStyle/>
+          <a:p>
+            <a:pPr marL="0" algn="r" defTabSz="914400" rtl="1" eaLnBrk="1" latinLnBrk="0" hangingPunct="1"/>
+            <a:r>
+              <a:rPr lang="he-IL" dirty="0"/>
+              <a:t>באמצעות </a:t>
+            </a:r>
+            <a:r>
+              <a:rPr lang="he-IL" dirty="0" err="1"/>
+              <a:t>המטריקה</a:t>
+            </a:r>
+            <a:r>
+              <a:rPr lang="he-IL" dirty="0"/>
+              <a:t> האחרונה החוקרים מנסים להעריך את הנזק הסביבתי הכרוך באימון המודל, באמצעות חישוב של כמות הפחמן הדו-חמצני שנפלט כתוצאה מהאימון.</a:t>
+            </a:r>
+          </a:p>
+          <a:p>
+            <a:pPr marL="0" algn="r" defTabSz="914400" rtl="1" eaLnBrk="1" latinLnBrk="0" hangingPunct="1"/>
+            <a:endParaRPr lang="he-IL" dirty="0"/>
+          </a:p>
+          <a:p>
+            <a:pPr marL="0" algn="r" defTabSz="914400" rtl="1" eaLnBrk="1" latinLnBrk="0" hangingPunct="1"/>
+            <a:r>
+              <a:rPr lang="he-IL" dirty="0"/>
+              <a:t>ראשית, הם לוקחים נוסחה מהמאמר של </a:t>
+            </a:r>
+            <a:r>
+              <a:rPr lang="en-US" dirty="0"/>
+              <a:t>Wu</a:t>
+            </a:r>
+            <a:r>
+              <a:rPr lang="he-IL" dirty="0"/>
+              <a:t> ושותפיו מ-2022.</a:t>
+            </a:r>
+          </a:p>
+          <a:p>
+            <a:pPr marL="0" algn="r" defTabSz="914400" rtl="1" eaLnBrk="1" latinLnBrk="0" hangingPunct="1"/>
+            <a:endParaRPr lang="he-IL" dirty="0"/>
+          </a:p>
+          <a:p>
+            <a:pPr marL="0" algn="r" defTabSz="914400" rtl="1" eaLnBrk="1" latinLnBrk="0" hangingPunct="1"/>
+            <a:r>
+              <a:rPr lang="he-IL" dirty="0"/>
+              <a:t>באמצעות הנוסחה הזו הם מחשבים כמה אנרגיה אימון המודל דרש בוואט-שעה, על-ידי מכפלה של מספר יחידות ה-GPU כפול מספר שעות האימון, כפול הצריכה של כל GPU לשעה בוואט, כפול מספר שמתאר את היעילות של ה-</a:t>
+            </a:r>
+            <a:r>
+              <a:rPr lang="en-US" dirty="0"/>
+              <a:t>data center</a:t>
+            </a:r>
+            <a:r>
+              <a:rPr lang="he-IL" dirty="0"/>
+              <a:t>, והחוקרים השתמשו ב-PUE של 1.1 שאומר שלכל יחידה של אנרגיה מתווספת 0.1 יחידה עבור קירור, תשתיות, וכיו"ב.</a:t>
+            </a:r>
+          </a:p>
+          <a:p>
+            <a:pPr marL="0" algn="r" defTabSz="914400" rtl="1" eaLnBrk="1" latinLnBrk="0" hangingPunct="1"/>
+            <a:endParaRPr lang="he-IL" dirty="0"/>
+          </a:p>
+          <a:p>
+            <a:pPr marL="0" algn="r" defTabSz="914400" rtl="1" eaLnBrk="1" latinLnBrk="0" hangingPunct="1"/>
+            <a:endParaRPr lang="en-IL" dirty="0"/>
+          </a:p>
+        </p:txBody>
+      </p:sp>
+      <p:sp>
+        <p:nvSpPr>
+          <p:cNvPr id="4" name="Slide Number Placeholder 3"/>
+          <p:cNvSpPr>
+            <a:spLocks noGrp="1"/>
+          </p:cNvSpPr>
+          <p:nvPr>
+            <p:ph type="sldNum" sz="quarter" idx="5"/>
+          </p:nvPr>
+        </p:nvSpPr>
+        <p:spPr/>
+        <p:txBody>
+          <a:bodyPr/>
+          <a:lstStyle/>
+          <a:p>
+            <a:fld id="{476FFE5D-288A-DB4E-9912-CFF1A38B0A9A}" type="slidenum">
+              <a:rPr lang="en-IL" smtClean="0"/>
+              <a:t>21</a:t>
+            </a:fld>
+            <a:endParaRPr lang="en-IL"/>
+          </a:p>
+        </p:txBody>
+      </p:sp>
+    </p:spTree>
+    <p:extLst>
+      <p:ext uri="{BB962C8B-B14F-4D97-AF65-F5344CB8AC3E}">
+        <p14:creationId xmlns:p14="http://schemas.microsoft.com/office/powerpoint/2010/main" val="3833175085"/>
+      </p:ext>
+    </p:extLst>
+  </p:cSld>
+  <p:clrMapOvr>
+    <a:masterClrMapping/>
+  </p:clrMapOvr>
+</p:notes>
+</file>
+
+<file path=ppt/notesSlides/notesSlide21.xml><?xml version="1.0" encoding="utf-8"?>
+<p:notes xmlns:a="http://schemas.openxmlformats.org/drawingml/2006/main" xmlns:r="http://schemas.openxmlformats.org/officeDocument/2006/relationships" xmlns:p="http://schemas.openxmlformats.org/presentationml/2006/main">
+  <p:cSld>
+    <p:spTree>
+      <p:nvGrpSpPr>
+        <p:cNvPr id="1" name=""/>
+        <p:cNvGrpSpPr/>
+        <p:nvPr/>
+      </p:nvGrpSpPr>
+      <p:grpSpPr>
+        <a:xfrm>
+          <a:off x="0" y="0"/>
+          <a:ext cx="0" cy="0"/>
+          <a:chOff x="0" y="0"/>
+          <a:chExt cx="0" cy="0"/>
+        </a:xfrm>
+      </p:grpSpPr>
+      <p:sp>
+        <p:nvSpPr>
+          <p:cNvPr id="2" name="Slide Image Placeholder 1"/>
+          <p:cNvSpPr>
+            <a:spLocks noGrp="1" noRot="1" noChangeAspect="1"/>
+          </p:cNvSpPr>
+          <p:nvPr>
+            <p:ph type="sldImg"/>
+          </p:nvPr>
+        </p:nvSpPr>
+        <p:spPr/>
+      </p:sp>
+      <p:sp>
+        <p:nvSpPr>
+          <p:cNvPr id="3" name="Notes Placeholder 2"/>
+          <p:cNvSpPr>
+            <a:spLocks noGrp="1"/>
+          </p:cNvSpPr>
+          <p:nvPr>
+            <p:ph type="body" idx="1"/>
+          </p:nvPr>
+        </p:nvSpPr>
+        <p:spPr/>
+        <p:txBody>
+          <a:bodyPr/>
+          <a:lstStyle/>
+          <a:p>
+            <a:pPr marL="0" algn="r" defTabSz="914400" rtl="1" eaLnBrk="1" latinLnBrk="0" hangingPunct="1"/>
+            <a:r>
+              <a:rPr lang="he-IL" dirty="0"/>
+              <a:t>אחרי שחישבנו את צריכת האנרגיה </a:t>
+            </a:r>
+            <a:r>
+              <a:rPr lang="en-US" dirty="0" err="1"/>
+              <a:t>Wh</a:t>
+            </a:r>
+            <a:r>
+              <a:rPr lang="he-IL" dirty="0"/>
+              <a:t>, מחשבים את כמות הפחמן הדו-חמצני שנפלט במהלך האימון בטונות של פחמן דו-חמצני, באמצעות הנוסחה הבאה,</a:t>
+            </a:r>
+          </a:p>
+          <a:p>
+            <a:pPr marL="0" algn="r" defTabSz="914400" rtl="1" eaLnBrk="1" latinLnBrk="0" hangingPunct="1"/>
+            <a:endParaRPr lang="he-IL" dirty="0"/>
+          </a:p>
+          <a:p>
+            <a:pPr marL="0" algn="r" defTabSz="914400" rtl="1" eaLnBrk="1" latinLnBrk="0" hangingPunct="1"/>
+            <a:r>
+              <a:rPr lang="he-IL" dirty="0"/>
+              <a:t>כאשר </a:t>
+            </a:r>
+            <a:r>
+              <a:rPr lang="en-US" dirty="0"/>
+              <a:t>1 MWh</a:t>
+            </a:r>
+            <a:r>
+              <a:rPr lang="he-IL" dirty="0"/>
+              <a:t> שקול למיליון </a:t>
+            </a:r>
+            <a:r>
+              <a:rPr lang="en-US" dirty="0" err="1"/>
+              <a:t>Wh</a:t>
+            </a:r>
+            <a:r>
+              <a:rPr lang="he-IL" dirty="0"/>
+              <a:t>, ו-0.385 הוא פקטור סטנדרטיזציה שנועד להשוואה הוגנת בין </a:t>
+            </a:r>
+            <a:r>
+              <a:rPr lang="en-US" dirty="0"/>
+              <a:t>data centers</a:t>
+            </a:r>
+            <a:r>
+              <a:rPr lang="he-IL" dirty="0"/>
+              <a:t>.</a:t>
+            </a:r>
+          </a:p>
+        </p:txBody>
+      </p:sp>
+      <p:sp>
+        <p:nvSpPr>
+          <p:cNvPr id="4" name="Slide Number Placeholder 3"/>
+          <p:cNvSpPr>
+            <a:spLocks noGrp="1"/>
+          </p:cNvSpPr>
+          <p:nvPr>
+            <p:ph type="sldNum" sz="quarter" idx="5"/>
+          </p:nvPr>
+        </p:nvSpPr>
+        <p:spPr/>
+        <p:txBody>
+          <a:bodyPr/>
+          <a:lstStyle/>
+          <a:p>
+            <a:fld id="{476FFE5D-288A-DB4E-9912-CFF1A38B0A9A}" type="slidenum">
+              <a:rPr lang="en-IL" smtClean="0"/>
+              <a:t>22</a:t>
+            </a:fld>
+            <a:endParaRPr lang="en-IL"/>
+          </a:p>
+        </p:txBody>
+      </p:sp>
+    </p:spTree>
+    <p:extLst>
+      <p:ext uri="{BB962C8B-B14F-4D97-AF65-F5344CB8AC3E}">
+        <p14:creationId xmlns:p14="http://schemas.microsoft.com/office/powerpoint/2010/main" val="3273366975"/>
+      </p:ext>
+    </p:extLst>
+  </p:cSld>
+  <p:clrMapOvr>
+    <a:masterClrMapping/>
+  </p:clrMapOvr>
+</p:notes>
+</file>
+
+<file path=ppt/notesSlides/notesSlide22.xml><?xml version="1.0" encoding="utf-8"?>
+<p:notes xmlns:a="http://schemas.openxmlformats.org/drawingml/2006/main" xmlns:r="http://schemas.openxmlformats.org/officeDocument/2006/relationships" xmlns:p="http://schemas.openxmlformats.org/presentationml/2006/main">
+  <p:cSld>
+    <p:spTree>
+      <p:nvGrpSpPr>
+        <p:cNvPr id="1" name=""/>
+        <p:cNvGrpSpPr/>
+        <p:nvPr/>
+      </p:nvGrpSpPr>
+      <p:grpSpPr>
+        <a:xfrm>
+          <a:off x="0" y="0"/>
+          <a:ext cx="0" cy="0"/>
+          <a:chOff x="0" y="0"/>
+          <a:chExt cx="0" cy="0"/>
+        </a:xfrm>
+      </p:grpSpPr>
+      <p:sp>
+        <p:nvSpPr>
+          <p:cNvPr id="2" name="Slide Image Placeholder 1"/>
+          <p:cNvSpPr>
+            <a:spLocks noGrp="1" noRot="1" noChangeAspect="1"/>
+          </p:cNvSpPr>
+          <p:nvPr>
+            <p:ph type="sldImg"/>
+          </p:nvPr>
+        </p:nvSpPr>
+        <p:spPr/>
+      </p:sp>
+      <p:sp>
+        <p:nvSpPr>
+          <p:cNvPr id="3" name="Notes Placeholder 2"/>
+          <p:cNvSpPr>
+            <a:spLocks noGrp="1"/>
+          </p:cNvSpPr>
+          <p:nvPr>
+            <p:ph type="body" idx="1"/>
+          </p:nvPr>
+        </p:nvSpPr>
+        <p:spPr/>
+        <p:txBody>
+          <a:bodyPr/>
+          <a:lstStyle/>
+          <a:p>
+            <a:pPr marL="0" algn="r" defTabSz="914400" rtl="1" eaLnBrk="1" latinLnBrk="0" hangingPunct="1"/>
+            <a:r>
+              <a:rPr lang="he-IL" dirty="0"/>
+              <a:t>אם כן, אלה הנוסחאות שלנו, ועכשיו נוכל לשפוך אליהן את הנתונים, ולקבל הערכה לכך שבאימון של מודלי </a:t>
+            </a:r>
+            <a:r>
+              <a:rPr lang="en-US" dirty="0"/>
+              <a:t>LLaMA</a:t>
+            </a:r>
+            <a:r>
+              <a:rPr lang="he-IL" dirty="0"/>
+              <a:t> נפלטו כ-1015 טונות של פחמן דו-חמצני, וזה המון,</a:t>
+            </a:r>
+          </a:p>
+          <a:p>
+            <a:pPr marL="0" algn="r" defTabSz="914400" rtl="1" eaLnBrk="1" latinLnBrk="0" hangingPunct="1"/>
+            <a:endParaRPr lang="he-IL" dirty="0"/>
+          </a:p>
+          <a:p>
+            <a:pPr marL="0" algn="r" defTabSz="914400" rtl="1" eaLnBrk="1" latinLnBrk="0" hangingPunct="1"/>
+            <a:r>
+              <a:rPr lang="he-IL" dirty="0"/>
+              <a:t>זה כמו לטוס מניו-יורק ללונדון הלוך חזור, 1000 פעמים.</a:t>
+            </a:r>
+            <a:endParaRPr lang="en-IL" dirty="0"/>
+          </a:p>
+        </p:txBody>
+      </p:sp>
+      <p:sp>
+        <p:nvSpPr>
+          <p:cNvPr id="4" name="Slide Number Placeholder 3"/>
+          <p:cNvSpPr>
+            <a:spLocks noGrp="1"/>
+          </p:cNvSpPr>
+          <p:nvPr>
+            <p:ph type="sldNum" sz="quarter" idx="5"/>
+          </p:nvPr>
+        </p:nvSpPr>
+        <p:spPr/>
+        <p:txBody>
+          <a:bodyPr/>
+          <a:lstStyle/>
+          <a:p>
+            <a:fld id="{476FFE5D-288A-DB4E-9912-CFF1A38B0A9A}" type="slidenum">
+              <a:rPr lang="en-IL" smtClean="0"/>
+              <a:t>23</a:t>
+            </a:fld>
+            <a:endParaRPr lang="en-IL"/>
+          </a:p>
+        </p:txBody>
+      </p:sp>
+    </p:spTree>
+    <p:extLst>
+      <p:ext uri="{BB962C8B-B14F-4D97-AF65-F5344CB8AC3E}">
+        <p14:creationId xmlns:p14="http://schemas.microsoft.com/office/powerpoint/2010/main" val="3859685677"/>
+      </p:ext>
+    </p:extLst>
+  </p:cSld>
+  <p:clrMapOvr>
+    <a:masterClrMapping/>
+  </p:clrMapOvr>
+</p:notes>
+</file>
+
+<file path=ppt/notesSlides/notesSlide23.xml><?xml version="1.0" encoding="utf-8"?>
+<p:notes xmlns:a="http://schemas.openxmlformats.org/drawingml/2006/main" xmlns:r="http://schemas.openxmlformats.org/officeDocument/2006/relationships" xmlns:p="http://schemas.openxmlformats.org/presentationml/2006/main">
+  <p:cSld>
+    <p:spTree>
+      <p:nvGrpSpPr>
+        <p:cNvPr id="1" name=""/>
+        <p:cNvGrpSpPr/>
+        <p:nvPr/>
+      </p:nvGrpSpPr>
+      <p:grpSpPr>
+        <a:xfrm>
+          <a:off x="0" y="0"/>
+          <a:ext cx="0" cy="0"/>
+          <a:chOff x="0" y="0"/>
+          <a:chExt cx="0" cy="0"/>
+        </a:xfrm>
+      </p:grpSpPr>
+      <p:sp>
+        <p:nvSpPr>
+          <p:cNvPr id="2" name="Slide Image Placeholder 1"/>
+          <p:cNvSpPr>
+            <a:spLocks noGrp="1" noRot="1" noChangeAspect="1"/>
+          </p:cNvSpPr>
+          <p:nvPr>
+            <p:ph type="sldImg"/>
+          </p:nvPr>
+        </p:nvSpPr>
+        <p:spPr/>
+      </p:sp>
+      <p:sp>
+        <p:nvSpPr>
+          <p:cNvPr id="3" name="Notes Placeholder 2"/>
+          <p:cNvSpPr>
+            <a:spLocks noGrp="1"/>
+          </p:cNvSpPr>
+          <p:nvPr>
+            <p:ph type="body" idx="1"/>
+          </p:nvPr>
+        </p:nvSpPr>
+        <p:spPr/>
+        <p:txBody>
+          <a:bodyPr/>
+          <a:lstStyle/>
+          <a:p>
+            <a:pPr marL="0" algn="r" defTabSz="914400" rtl="1" eaLnBrk="1" latinLnBrk="0" hangingPunct="1"/>
+            <a:r>
+              <a:rPr lang="he-IL" dirty="0"/>
+              <a:t>משמעות הדבר לדברי החוקרים היא ש:</a:t>
+            </a:r>
+          </a:p>
+          <a:p>
+            <a:pPr marL="0" algn="r" defTabSz="914400" rtl="1" eaLnBrk="1" latinLnBrk="0" hangingPunct="1"/>
+            <a:endParaRPr lang="he-IL" dirty="0"/>
+          </a:p>
+          <a:p>
+            <a:pPr marL="0" algn="r" defTabSz="914400" rtl="1" eaLnBrk="1" latinLnBrk="0" hangingPunct="1"/>
+            <a:r>
+              <a:rPr lang="he-IL" dirty="0"/>
+              <a:t>א. שחרור המודל לקהילה תפחית זיהום עתידי, כי המשתמשים לא יצטרכו לאמן שוב את המודל, אגב הבעיה פה זה שבזמן פרסום המאמר החוקרים בכלל לא שחררו את המודל, אלא רק תיארו איך לאמן אותו.</a:t>
+            </a:r>
+          </a:p>
+          <a:p>
+            <a:pPr marL="0" algn="r" defTabSz="914400" rtl="1" eaLnBrk="1" latinLnBrk="0" hangingPunct="1"/>
+            <a:endParaRPr lang="he-IL" dirty="0"/>
+          </a:p>
+          <a:p>
+            <a:pPr marL="0" algn="r" defTabSz="914400" rtl="1" eaLnBrk="1" latinLnBrk="0" hangingPunct="1"/>
+            <a:r>
+              <a:rPr lang="he-IL" dirty="0"/>
+              <a:t>ב. מודלי ה-</a:t>
+            </a:r>
+            <a:r>
+              <a:rPr lang="en-US" dirty="0"/>
+              <a:t>LLaMA</a:t>
+            </a:r>
+            <a:r>
+              <a:rPr lang="he-IL" dirty="0"/>
+              <a:t> הקטנים יותר, </a:t>
+            </a:r>
+            <a:r>
+              <a:rPr lang="en-US" dirty="0"/>
+              <a:t>7B</a:t>
+            </a:r>
+            <a:r>
+              <a:rPr lang="he-IL" dirty="0"/>
+              <a:t> ו-</a:t>
+            </a:r>
+            <a:r>
+              <a:rPr lang="en-US" dirty="0"/>
+              <a:t>13</a:t>
+            </a:r>
+            <a:r>
+              <a:rPr lang="he-IL" dirty="0" err="1"/>
+              <a:t>B</a:t>
+            </a:r>
+            <a:r>
+              <a:rPr lang="he-IL" dirty="0"/>
+              <a:t> יכולים לרות על גבי GPU בודד, מה שמפחית את הזיהום בזמן </a:t>
+            </a:r>
+            <a:r>
+              <a:rPr lang="he-IL" dirty="0" err="1"/>
+              <a:t>האינפר</a:t>
+            </a:r>
+            <a:r>
+              <a:rPr lang="he-IL" dirty="0"/>
+              <a:t>, שזה רוב הזמן בו המודל רץ.</a:t>
+            </a:r>
+          </a:p>
+        </p:txBody>
+      </p:sp>
+      <p:sp>
+        <p:nvSpPr>
+          <p:cNvPr id="4" name="Slide Number Placeholder 3"/>
+          <p:cNvSpPr>
+            <a:spLocks noGrp="1"/>
+          </p:cNvSpPr>
+          <p:nvPr>
+            <p:ph type="sldNum" sz="quarter" idx="5"/>
+          </p:nvPr>
+        </p:nvSpPr>
+        <p:spPr/>
+        <p:txBody>
+          <a:bodyPr/>
+          <a:lstStyle/>
+          <a:p>
+            <a:fld id="{476FFE5D-288A-DB4E-9912-CFF1A38B0A9A}" type="slidenum">
+              <a:rPr lang="en-IL" smtClean="0"/>
+              <a:t>24</a:t>
+            </a:fld>
+            <a:endParaRPr lang="en-IL"/>
+          </a:p>
+        </p:txBody>
+      </p:sp>
+    </p:spTree>
+    <p:extLst>
+      <p:ext uri="{BB962C8B-B14F-4D97-AF65-F5344CB8AC3E}">
+        <p14:creationId xmlns:p14="http://schemas.microsoft.com/office/powerpoint/2010/main" val="3561531415"/>
+      </p:ext>
+    </p:extLst>
+  </p:cSld>
+  <p:clrMapOvr>
+    <a:masterClrMapping/>
+  </p:clrMapOvr>
+</p:notes>
+</file>
+
+<file path=ppt/notesSlides/notesSlide24.xml><?xml version="1.0" encoding="utf-8"?>
+<p:notes xmlns:a="http://schemas.openxmlformats.org/drawingml/2006/main" xmlns:r="http://schemas.openxmlformats.org/officeDocument/2006/relationships" xmlns:p="http://schemas.openxmlformats.org/presentationml/2006/main">
+  <p:cSld>
+    <p:spTree>
+      <p:nvGrpSpPr>
+        <p:cNvPr id="1" name=""/>
+        <p:cNvGrpSpPr/>
+        <p:nvPr/>
+      </p:nvGrpSpPr>
+      <p:grpSpPr>
+        <a:xfrm>
+          <a:off x="0" y="0"/>
+          <a:ext cx="0" cy="0"/>
+          <a:chOff x="0" y="0"/>
+          <a:chExt cx="0" cy="0"/>
+        </a:xfrm>
+      </p:grpSpPr>
+      <p:sp>
+        <p:nvSpPr>
+          <p:cNvPr id="2" name="Slide Image Placeholder 1"/>
+          <p:cNvSpPr>
+            <a:spLocks noGrp="1" noRot="1" noChangeAspect="1"/>
+          </p:cNvSpPr>
+          <p:nvPr>
+            <p:ph type="sldImg"/>
+          </p:nvPr>
+        </p:nvSpPr>
+        <p:spPr/>
+      </p:sp>
+      <p:sp>
+        <p:nvSpPr>
+          <p:cNvPr id="3" name="Notes Placeholder 2"/>
+          <p:cNvSpPr>
+            <a:spLocks noGrp="1"/>
+          </p:cNvSpPr>
+          <p:nvPr>
+            <p:ph type="body" idx="1"/>
+          </p:nvPr>
+        </p:nvSpPr>
+        <p:spPr/>
+        <p:txBody>
+          <a:bodyPr/>
+          <a:lstStyle/>
+          <a:p>
+            <a:pPr marL="0" algn="r" defTabSz="914400" rtl="1" eaLnBrk="1" latinLnBrk="0" hangingPunct="1"/>
+            <a:r>
+              <a:rPr lang="he-IL" dirty="0"/>
+              <a:t>החוקרים פרסמו את הטבלה הזאת שמשווה את מודלי </a:t>
+            </a:r>
+            <a:r>
+              <a:rPr lang="en-US" dirty="0"/>
+              <a:t>LLaMA</a:t>
+            </a:r>
+            <a:r>
+              <a:rPr lang="he-IL" dirty="0"/>
+              <a:t> לשני מודלים גדולים יחסית אבל דומים בביצועים, ואפשר לראות שהאימון של מודלי </a:t>
+            </a:r>
+            <a:r>
+              <a:rPr lang="en-US" dirty="0"/>
+              <a:t>LLaMA</a:t>
+            </a:r>
+            <a:r>
+              <a:rPr lang="he-IL" dirty="0"/>
+              <a:t> יחסית מזהם.</a:t>
+            </a:r>
+          </a:p>
+          <a:p>
+            <a:pPr marL="0" algn="r" defTabSz="914400" rtl="1" eaLnBrk="1" latinLnBrk="0" hangingPunct="1"/>
+            <a:endParaRPr lang="he-IL" dirty="0"/>
+          </a:p>
+          <a:p>
+            <a:pPr marL="0" algn="r" defTabSz="914400" rtl="1" eaLnBrk="1" latinLnBrk="0" hangingPunct="1"/>
+            <a:r>
+              <a:rPr lang="he-IL" dirty="0"/>
+              <a:t>האימון של </a:t>
+            </a:r>
+            <a:r>
+              <a:rPr lang="en-US" dirty="0"/>
+              <a:t>LLaMA-65B</a:t>
+            </a:r>
+            <a:r>
+              <a:rPr lang="he-IL" dirty="0"/>
+              <a:t> שהוא פי 2.5 קטן מהמתחרים, גרם לזיהום בסדר הגודל של אותו מתחרים.</a:t>
+            </a:r>
+          </a:p>
+          <a:p>
+            <a:pPr marL="0" algn="r" defTabSz="914400" rtl="1" eaLnBrk="1" latinLnBrk="0" hangingPunct="1"/>
+            <a:endParaRPr lang="he-IL" dirty="0"/>
+          </a:p>
+          <a:p>
+            <a:pPr marL="0" algn="r" defTabSz="914400" rtl="1" eaLnBrk="1" latinLnBrk="0" hangingPunct="1"/>
+            <a:r>
+              <a:rPr lang="he-IL" dirty="0"/>
+              <a:t>כלומר, החוקרים מודים בזה שיקר אנרגטית לאמן את </a:t>
+            </a:r>
+            <a:r>
+              <a:rPr lang="en-US" dirty="0"/>
+              <a:t>LLaMA</a:t>
+            </a:r>
+            <a:r>
+              <a:rPr lang="he-IL" dirty="0"/>
+              <a:t> אבל מדגישים את החיסכון בזמן </a:t>
+            </a:r>
+            <a:r>
+              <a:rPr lang="he-IL" dirty="0" err="1"/>
+              <a:t>האינפר</a:t>
+            </a:r>
+            <a:r>
+              <a:rPr lang="he-IL" dirty="0"/>
+              <a:t>.</a:t>
+            </a:r>
+            <a:endParaRPr lang="en-IL" dirty="0"/>
+          </a:p>
+        </p:txBody>
+      </p:sp>
+      <p:sp>
+        <p:nvSpPr>
+          <p:cNvPr id="4" name="Slide Number Placeholder 3"/>
+          <p:cNvSpPr>
+            <a:spLocks noGrp="1"/>
+          </p:cNvSpPr>
+          <p:nvPr>
+            <p:ph type="sldNum" sz="quarter" idx="5"/>
+          </p:nvPr>
+        </p:nvSpPr>
+        <p:spPr/>
+        <p:txBody>
+          <a:bodyPr/>
+          <a:lstStyle/>
+          <a:p>
+            <a:fld id="{476FFE5D-288A-DB4E-9912-CFF1A38B0A9A}" type="slidenum">
+              <a:rPr lang="en-IL" smtClean="0"/>
+              <a:t>25</a:t>
+            </a:fld>
+            <a:endParaRPr lang="en-IL"/>
+          </a:p>
+        </p:txBody>
+      </p:sp>
+    </p:spTree>
+    <p:extLst>
+      <p:ext uri="{BB962C8B-B14F-4D97-AF65-F5344CB8AC3E}">
+        <p14:creationId xmlns:p14="http://schemas.microsoft.com/office/powerpoint/2010/main" val="1600519184"/>
+      </p:ext>
+    </p:extLst>
+  </p:cSld>
+  <p:clrMapOvr>
+    <a:masterClrMapping/>
+  </p:clrMapOvr>
+</p:notes>
+</file>
+
+<file path=ppt/notesSlides/notesSlide25.xml><?xml version="1.0" encoding="utf-8"?>
+<p:notes xmlns:a="http://schemas.openxmlformats.org/drawingml/2006/main" xmlns:r="http://schemas.openxmlformats.org/officeDocument/2006/relationships" xmlns:p="http://schemas.openxmlformats.org/presentationml/2006/main">
+  <p:cSld>
+    <p:spTree>
+      <p:nvGrpSpPr>
+        <p:cNvPr id="1" name=""/>
+        <p:cNvGrpSpPr/>
+        <p:nvPr/>
+      </p:nvGrpSpPr>
+      <p:grpSpPr>
+        <a:xfrm>
+          <a:off x="0" y="0"/>
+          <a:ext cx="0" cy="0"/>
+          <a:chOff x="0" y="0"/>
+          <a:chExt cx="0" cy="0"/>
+        </a:xfrm>
+      </p:grpSpPr>
+      <p:sp>
+        <p:nvSpPr>
+          <p:cNvPr id="2" name="Slide Image Placeholder 1"/>
+          <p:cNvSpPr>
+            <a:spLocks noGrp="1" noRot="1" noChangeAspect="1"/>
+          </p:cNvSpPr>
+          <p:nvPr>
+            <p:ph type="sldImg"/>
+          </p:nvPr>
+        </p:nvSpPr>
+        <p:spPr/>
+      </p:sp>
+      <p:sp>
+        <p:nvSpPr>
+          <p:cNvPr id="3" name="Notes Placeholder 2"/>
+          <p:cNvSpPr>
+            <a:spLocks noGrp="1"/>
+          </p:cNvSpPr>
+          <p:nvPr>
+            <p:ph type="body" idx="1"/>
+          </p:nvPr>
+        </p:nvSpPr>
+        <p:spPr/>
+        <p:txBody>
+          <a:bodyPr/>
+          <a:lstStyle/>
+          <a:p>
+            <a:pPr marL="0" algn="r" defTabSz="914400" rtl="1" eaLnBrk="1" latinLnBrk="0" hangingPunct="1"/>
+            <a:r>
+              <a:rPr lang="he-IL" dirty="0"/>
+              <a:t>קצת על </a:t>
+            </a:r>
+            <a:r>
+              <a:rPr lang="en-US" dirty="0"/>
+              <a:t>related work</a:t>
+            </a:r>
+            <a:r>
+              <a:rPr lang="he-IL" dirty="0"/>
+              <a:t>,</a:t>
+            </a:r>
+          </a:p>
+          <a:p>
+            <a:pPr marL="0" algn="r" defTabSz="914400" rtl="1" eaLnBrk="1" latinLnBrk="0" hangingPunct="1"/>
+            <a:endParaRPr lang="he-IL" dirty="0"/>
+          </a:p>
+          <a:p>
+            <a:pPr marL="0" algn="r" defTabSz="914400" rtl="1" eaLnBrk="1" latinLnBrk="0" hangingPunct="1"/>
+            <a:r>
+              <a:rPr lang="he-IL" dirty="0"/>
+              <a:t>לפי התיאוריה של </a:t>
+            </a:r>
+            <a:r>
+              <a:rPr lang="he-IL" dirty="0" err="1"/>
+              <a:t>שאנון</a:t>
+            </a:r>
+            <a:r>
+              <a:rPr lang="he-IL" dirty="0"/>
+              <a:t> מ-1948, מודלי שפה מוגדרים כחיזוי טוקן הבא, ומשמשים מדד מרכזי להתקדמות ה-AI.</a:t>
+            </a:r>
+          </a:p>
+          <a:p>
+            <a:pPr marL="0" algn="r" defTabSz="914400" rtl="1" eaLnBrk="1" latinLnBrk="0" hangingPunct="1"/>
+            <a:endParaRPr lang="he-IL" dirty="0"/>
+          </a:p>
+          <a:p>
+            <a:pPr marL="0" algn="r" defTabSz="914400" rtl="1" eaLnBrk="1" latinLnBrk="0" hangingPunct="1"/>
+            <a:r>
+              <a:rPr lang="he-IL" dirty="0"/>
+              <a:t>הם התפתחו ממודלי </a:t>
+            </a:r>
+            <a:r>
+              <a:rPr lang="en-US" dirty="0"/>
+              <a:t>n-grams</a:t>
+            </a:r>
+            <a:r>
+              <a:rPr lang="he-IL" dirty="0"/>
+              <a:t> בסיסיים, התקדמו ל-RNN-ים והגיעו </a:t>
+            </a:r>
+            <a:r>
+              <a:rPr lang="he-IL" dirty="0" err="1"/>
+              <a:t>לטרנספורמרים</a:t>
+            </a:r>
+            <a:r>
+              <a:rPr lang="he-IL" dirty="0"/>
+              <a:t> שמאפשרים ללכוד תלויות במרחקים גדולים בטקסט בצורה יעילה.</a:t>
+            </a:r>
+          </a:p>
+          <a:p>
+            <a:pPr marL="0" algn="r" defTabSz="914400" rtl="1" eaLnBrk="1" latinLnBrk="0" hangingPunct="1"/>
+            <a:endParaRPr lang="he-IL" dirty="0"/>
+          </a:p>
+          <a:p>
+            <a:pPr marL="0" algn="r" defTabSz="914400" rtl="1" eaLnBrk="1" latinLnBrk="0" hangingPunct="1"/>
+            <a:r>
+              <a:rPr lang="he-IL" dirty="0"/>
+              <a:t>לאורך השנים, הגדלת המודלים </a:t>
+            </a:r>
+            <a:r>
+              <a:rPr lang="he-IL" dirty="0" err="1"/>
+              <a:t>והדאטה</a:t>
+            </a:r>
+            <a:r>
+              <a:rPr lang="he-IL" dirty="0"/>
+              <a:t>, בעיקר בעידן </a:t>
+            </a:r>
+            <a:r>
+              <a:rPr lang="he-IL" dirty="0" err="1"/>
+              <a:t>הטרנספורמרים</a:t>
+            </a:r>
+            <a:r>
+              <a:rPr lang="he-IL" dirty="0"/>
+              <a:t>, הייתה הכוח שהניע את הזינוק בביצועי מודלי השפה.</a:t>
+            </a:r>
+          </a:p>
+          <a:p>
+            <a:pPr marL="0" algn="r" defTabSz="914400" rtl="1" eaLnBrk="1" latinLnBrk="0" hangingPunct="1"/>
+            <a:endParaRPr lang="he-IL" dirty="0"/>
+          </a:p>
+          <a:p>
+            <a:pPr marL="0" algn="r" defTabSz="914400" rtl="1" eaLnBrk="1" latinLnBrk="0" hangingPunct="1"/>
+            <a:r>
+              <a:rPr lang="he-IL" dirty="0"/>
+              <a:t>במאמר הזה, החוקרים הראו שאפשר להחליף את הגדלת המודל באימון ממושך יותר.</a:t>
+            </a:r>
+          </a:p>
+        </p:txBody>
+      </p:sp>
+      <p:sp>
+        <p:nvSpPr>
+          <p:cNvPr id="4" name="Slide Number Placeholder 3"/>
+          <p:cNvSpPr>
+            <a:spLocks noGrp="1"/>
+          </p:cNvSpPr>
+          <p:nvPr>
+            <p:ph type="sldNum" sz="quarter" idx="5"/>
+          </p:nvPr>
+        </p:nvSpPr>
+        <p:spPr/>
+        <p:txBody>
+          <a:bodyPr/>
+          <a:lstStyle/>
+          <a:p>
+            <a:fld id="{476FFE5D-288A-DB4E-9912-CFF1A38B0A9A}" type="slidenum">
+              <a:rPr lang="en-IL" smtClean="0"/>
+              <a:t>27</a:t>
+            </a:fld>
+            <a:endParaRPr lang="en-IL"/>
+          </a:p>
+        </p:txBody>
+      </p:sp>
+    </p:spTree>
+    <p:extLst>
+      <p:ext uri="{BB962C8B-B14F-4D97-AF65-F5344CB8AC3E}">
+        <p14:creationId xmlns:p14="http://schemas.microsoft.com/office/powerpoint/2010/main" val="1343828506"/>
+      </p:ext>
+    </p:extLst>
+  </p:cSld>
+  <p:clrMapOvr>
+    <a:masterClrMapping/>
+  </p:clrMapOvr>
+</p:notes>
+</file>
+
+<file path=ppt/notesSlides/notesSlide26.xml><?xml version="1.0" encoding="utf-8"?>
+<p:notes xmlns:a="http://schemas.openxmlformats.org/drawingml/2006/main" xmlns:r="http://schemas.openxmlformats.org/officeDocument/2006/relationships" xmlns:p="http://schemas.openxmlformats.org/presentationml/2006/main">
+  <p:cSld>
+    <p:spTree>
+      <p:nvGrpSpPr>
+        <p:cNvPr id="1" name=""/>
+        <p:cNvGrpSpPr/>
+        <p:nvPr/>
+      </p:nvGrpSpPr>
+      <p:grpSpPr>
+        <a:xfrm>
+          <a:off x="0" y="0"/>
+          <a:ext cx="0" cy="0"/>
+          <a:chOff x="0" y="0"/>
+          <a:chExt cx="0" cy="0"/>
+        </a:xfrm>
+      </p:grpSpPr>
+      <p:sp>
+        <p:nvSpPr>
+          <p:cNvPr id="2" name="Slide Image Placeholder 1"/>
+          <p:cNvSpPr>
+            <a:spLocks noGrp="1" noRot="1" noChangeAspect="1"/>
+          </p:cNvSpPr>
+          <p:nvPr>
+            <p:ph type="sldImg"/>
+          </p:nvPr>
+        </p:nvSpPr>
+        <p:spPr/>
+      </p:sp>
+      <p:sp>
+        <p:nvSpPr>
+          <p:cNvPr id="3" name="Notes Placeholder 2"/>
+          <p:cNvSpPr>
+            <a:spLocks noGrp="1"/>
+          </p:cNvSpPr>
+          <p:nvPr>
+            <p:ph type="body" idx="1"/>
+          </p:nvPr>
+        </p:nvSpPr>
+        <p:spPr/>
+        <p:txBody>
+          <a:bodyPr/>
+          <a:lstStyle/>
+          <a:p>
+            <a:pPr marL="0" algn="r" defTabSz="914400" rtl="1" eaLnBrk="1" latinLnBrk="0" hangingPunct="1"/>
+            <a:r>
+              <a:rPr lang="he-IL" dirty="0"/>
+              <a:t>אם כן, לסיכום,</a:t>
+            </a:r>
+          </a:p>
+          <a:p>
+            <a:pPr marL="0" algn="r" defTabSz="914400" rtl="1" eaLnBrk="1" latinLnBrk="0" hangingPunct="1"/>
+            <a:endParaRPr lang="he-IL" dirty="0"/>
+          </a:p>
+          <a:p>
+            <a:pPr marL="0" algn="r" defTabSz="914400" rtl="1" eaLnBrk="1" latinLnBrk="0" hangingPunct="1"/>
+            <a:r>
+              <a:rPr lang="he-IL" dirty="0"/>
+              <a:t>המאמר מציג סדרה של </a:t>
+            </a:r>
+            <a:r>
+              <a:rPr lang="en-US" dirty="0"/>
+              <a:t>foundation LLMs</a:t>
+            </a:r>
+            <a:r>
+              <a:rPr lang="he-IL" dirty="0"/>
+              <a:t> ששוחררו לציבור.</a:t>
+            </a:r>
+          </a:p>
+          <a:p>
+            <a:pPr marL="0" algn="r" defTabSz="914400" rtl="1" eaLnBrk="1" latinLnBrk="0" hangingPunct="1"/>
+            <a:r>
+              <a:rPr lang="he-IL" dirty="0"/>
+              <a:t>המודלים האלה מציגים ביצועי </a:t>
+            </a:r>
+            <a:r>
+              <a:rPr lang="en-US" dirty="0"/>
+              <a:t>state-of-the-art</a:t>
+            </a:r>
+            <a:r>
+              <a:rPr lang="he-IL" dirty="0"/>
+              <a:t> והם מאומנים על </a:t>
+            </a:r>
+            <a:r>
+              <a:rPr lang="en-US" dirty="0"/>
+              <a:t>data</a:t>
+            </a:r>
+            <a:r>
+              <a:rPr lang="he-IL" dirty="0"/>
+              <a:t> ציבורי בלבד.</a:t>
+            </a:r>
+          </a:p>
+          <a:p>
+            <a:pPr marL="0" algn="r" defTabSz="914400" rtl="1" eaLnBrk="1" latinLnBrk="0" hangingPunct="1"/>
+            <a:endParaRPr lang="he-IL" dirty="0"/>
+          </a:p>
+          <a:p>
+            <a:pPr marL="0" algn="r" defTabSz="914400" rtl="1" eaLnBrk="1" latinLnBrk="0" hangingPunct="1"/>
+            <a:r>
+              <a:rPr lang="he-IL" dirty="0"/>
+              <a:t>מבחינת ביצועים, אלה נקודות העיקריות:</a:t>
+            </a:r>
+          </a:p>
+          <a:p>
+            <a:pPr marL="0" algn="r" defTabSz="914400" rtl="1" eaLnBrk="1" latinLnBrk="0" hangingPunct="1"/>
+            <a:r>
+              <a:rPr lang="he-IL" dirty="0"/>
+              <a:t>למה 13בי מנצח את </a:t>
+            </a:r>
+            <a:r>
+              <a:rPr lang="en-US" dirty="0"/>
+              <a:t>GPT3</a:t>
+            </a:r>
+            <a:r>
+              <a:rPr lang="he-IL" dirty="0"/>
+              <a:t> למרות שהוא קטן ממנו ביותר מפי 10.</a:t>
+            </a:r>
+          </a:p>
+          <a:p>
+            <a:pPr marL="0" algn="r" defTabSz="914400" rtl="1" eaLnBrk="1" latinLnBrk="0" hangingPunct="1"/>
+            <a:r>
+              <a:rPr lang="he-IL" dirty="0"/>
+              <a:t>למה 65בי מתחרה במודל </a:t>
+            </a:r>
+            <a:r>
+              <a:rPr lang="en-US" dirty="0"/>
+              <a:t>Chinchila-700B</a:t>
+            </a:r>
+            <a:r>
+              <a:rPr lang="he-IL" dirty="0"/>
+              <a:t> ובמודל הענק </a:t>
+            </a:r>
+            <a:r>
+              <a:rPr lang="en-US" dirty="0"/>
+              <a:t>PaLM-540B</a:t>
+            </a:r>
+            <a:r>
+              <a:rPr lang="he-IL" dirty="0"/>
+              <a:t>.</a:t>
+            </a:r>
+          </a:p>
+          <a:p>
+            <a:pPr marL="0" algn="r" defTabSz="914400" rtl="1" eaLnBrk="1" latinLnBrk="0" hangingPunct="1"/>
+            <a:endParaRPr lang="he-IL" dirty="0"/>
+          </a:p>
+          <a:p>
+            <a:pPr marL="0" algn="r" defTabSz="914400" rtl="1" eaLnBrk="1" latinLnBrk="0" hangingPunct="1"/>
+            <a:r>
+              <a:rPr lang="he-IL" dirty="0"/>
+              <a:t>החוקרים מאמינים ששחרור המודלים האלה לציבור יאיץ את המחקר, ומכוונים את המחקר לשיפור ב-</a:t>
+            </a:r>
+            <a:r>
+              <a:rPr lang="en-US" dirty="0"/>
+              <a:t>bias</a:t>
+            </a:r>
+            <a:r>
+              <a:rPr lang="he-IL" dirty="0"/>
+              <a:t> </a:t>
+            </a:r>
+            <a:r>
+              <a:rPr lang="he-IL" dirty="0" err="1"/>
+              <a:t>וה</a:t>
+            </a:r>
+            <a:r>
+              <a:rPr lang="he-IL" dirty="0"/>
+              <a:t>-</a:t>
+            </a:r>
+            <a:r>
+              <a:rPr lang="en-US" dirty="0"/>
+              <a:t>toxicity</a:t>
+            </a:r>
+            <a:r>
+              <a:rPr lang="he-IL" dirty="0"/>
+              <a:t>, לאימון מודל שיודע לעקוב אחר הוראות, ולשחרור מודלים גדולים יותר שמאומנים על קורפוסים גדולים יותר.</a:t>
+            </a:r>
+          </a:p>
+        </p:txBody>
+      </p:sp>
+      <p:sp>
+        <p:nvSpPr>
+          <p:cNvPr id="4" name="Slide Number Placeholder 3"/>
+          <p:cNvSpPr>
+            <a:spLocks noGrp="1"/>
+          </p:cNvSpPr>
+          <p:nvPr>
+            <p:ph type="sldNum" sz="quarter" idx="5"/>
+          </p:nvPr>
+        </p:nvSpPr>
+        <p:spPr/>
+        <p:txBody>
+          <a:bodyPr/>
+          <a:lstStyle/>
+          <a:p>
+            <a:fld id="{476FFE5D-288A-DB4E-9912-CFF1A38B0A9A}" type="slidenum">
+              <a:rPr lang="en-IL" smtClean="0"/>
+              <a:t>29</a:t>
+            </a:fld>
+            <a:endParaRPr lang="en-IL"/>
+          </a:p>
+        </p:txBody>
+      </p:sp>
+    </p:spTree>
+    <p:extLst>
+      <p:ext uri="{BB962C8B-B14F-4D97-AF65-F5344CB8AC3E}">
+        <p14:creationId xmlns:p14="http://schemas.microsoft.com/office/powerpoint/2010/main" val="3859200156"/>
+      </p:ext>
+    </p:extLst>
+  </p:cSld>
+  <p:clrMapOvr>
+    <a:masterClrMapping/>
+  </p:clrMapOvr>
+</p:notes>
+</file>
+
+<file path=ppt/notesSlides/notesSlide27.xml><?xml version="1.0" encoding="utf-8"?>
+<p:notes xmlns:a="http://schemas.openxmlformats.org/drawingml/2006/main" xmlns:r="http://schemas.openxmlformats.org/officeDocument/2006/relationships" xmlns:p="http://schemas.openxmlformats.org/presentationml/2006/main">
+  <p:cSld>
+    <p:spTree>
+      <p:nvGrpSpPr>
+        <p:cNvPr id="1" name=""/>
+        <p:cNvGrpSpPr/>
+        <p:nvPr/>
+      </p:nvGrpSpPr>
+      <p:grpSpPr>
+        <a:xfrm>
+          <a:off x="0" y="0"/>
+          <a:ext cx="0" cy="0"/>
+          <a:chOff x="0" y="0"/>
+          <a:chExt cx="0" cy="0"/>
+        </a:xfrm>
+      </p:grpSpPr>
+      <p:sp>
+        <p:nvSpPr>
+          <p:cNvPr id="2" name="Slide Image Placeholder 1"/>
+          <p:cNvSpPr>
+            <a:spLocks noGrp="1" noRot="1" noChangeAspect="1"/>
+          </p:cNvSpPr>
+          <p:nvPr>
+            <p:ph type="sldImg"/>
+          </p:nvPr>
+        </p:nvSpPr>
+        <p:spPr/>
+      </p:sp>
+      <p:sp>
+        <p:nvSpPr>
+          <p:cNvPr id="3" name="Notes Placeholder 2"/>
+          <p:cNvSpPr>
+            <a:spLocks noGrp="1"/>
+          </p:cNvSpPr>
+          <p:nvPr>
+            <p:ph type="body" idx="1"/>
+          </p:nvPr>
+        </p:nvSpPr>
+        <p:spPr/>
+        <p:txBody>
+          <a:bodyPr/>
+          <a:lstStyle/>
+          <a:p>
+            <a:pPr marL="0" algn="r" defTabSz="914400" rtl="1" eaLnBrk="1" latinLnBrk="0" hangingPunct="1"/>
+            <a:r>
+              <a:rPr lang="he-IL" dirty="0"/>
+              <a:t>וכעת נעבור לקוד</a:t>
+            </a:r>
+            <a:endParaRPr lang="en-IL" dirty="0"/>
+          </a:p>
+        </p:txBody>
+      </p:sp>
+      <p:sp>
+        <p:nvSpPr>
+          <p:cNvPr id="4" name="Slide Number Placeholder 3"/>
+          <p:cNvSpPr>
+            <a:spLocks noGrp="1"/>
+          </p:cNvSpPr>
+          <p:nvPr>
+            <p:ph type="sldNum" sz="quarter" idx="5"/>
+          </p:nvPr>
+        </p:nvSpPr>
+        <p:spPr/>
+        <p:txBody>
+          <a:bodyPr/>
+          <a:lstStyle/>
+          <a:p>
+            <a:fld id="{476FFE5D-288A-DB4E-9912-CFF1A38B0A9A}" type="slidenum">
+              <a:rPr lang="en-IL" smtClean="0"/>
+              <a:t>30</a:t>
+            </a:fld>
+            <a:endParaRPr lang="en-IL"/>
+          </a:p>
+        </p:txBody>
+      </p:sp>
+    </p:spTree>
+    <p:extLst>
+      <p:ext uri="{BB962C8B-B14F-4D97-AF65-F5344CB8AC3E}">
+        <p14:creationId xmlns:p14="http://schemas.microsoft.com/office/powerpoint/2010/main" val="4172357658"/>
       </p:ext>
     </p:extLst>
   </p:cSld>
@@ -5061,10 +6387,6 @@
           <a:p>
             <a:pPr marL="0" algn="r" defTabSz="914400" rtl="1" eaLnBrk="1" latinLnBrk="0" hangingPunct="1"/>
             <a:r>
-              <a:rPr lang="he-IL" dirty="0"/>
-              <a:t>יש לנו את </a:t>
-            </a:r>
-            <a:r>
               <a:rPr lang="en-US" dirty="0"/>
               <a:t>Common Sense Reasoning</a:t>
             </a:r>
@@ -5078,7 +6400,7 @@
             </a:r>
             <a:r>
               <a:rPr lang="he-IL" dirty="0"/>
-              <a:t> שבודקים עד כמה המודל יודע להפעיל היגיון יומיומי.</a:t>
+              <a:t> – עד כמה המודל יודע להפעיל היגיון יומיומי.</a:t>
             </a:r>
           </a:p>
           <a:p>
@@ -5088,16 +6410,12 @@
           <a:p>
             <a:pPr marL="0" algn="r" defTabSz="914400" rtl="1" eaLnBrk="1" latinLnBrk="0" hangingPunct="1"/>
             <a:r>
-              <a:rPr lang="he-IL" dirty="0"/>
-              <a:t>יש את </a:t>
-            </a:r>
-            <a:r>
               <a:rPr lang="en-US" dirty="0"/>
               <a:t>Closed-book Question Answering</a:t>
             </a:r>
             <a:r>
               <a:rPr lang="he-IL" dirty="0"/>
-              <a:t> – שני </a:t>
+              <a:t> – 2 </a:t>
             </a:r>
             <a:r>
               <a:rPr lang="he-IL" dirty="0" err="1"/>
@@ -5105,7 +6423,7 @@
             </a:r>
             <a:r>
               <a:rPr lang="he-IL" dirty="0"/>
-              <a:t> שכוללים שאלות ספר סגור כדי לבדוק כמה ידע המודל אוצר בתוכו.</a:t>
+              <a:t> – יכולת לענות על שאלות ללא חומרי עזר.</a:t>
             </a:r>
           </a:p>
           <a:p>
@@ -5115,16 +6433,12 @@
           <a:p>
             <a:pPr marL="0" algn="r" defTabSz="914400" rtl="1" eaLnBrk="1" latinLnBrk="0" hangingPunct="1"/>
             <a:r>
-              <a:rPr lang="he-IL" dirty="0"/>
-              <a:t>ב-</a:t>
-            </a:r>
-            <a:r>
               <a:rPr lang="en-US" dirty="0"/>
               <a:t>Reading Comprehension</a:t>
             </a:r>
             <a:r>
               <a:rPr lang="he-IL" dirty="0"/>
-              <a:t> משתמשים ב-שני </a:t>
+              <a:t> - 2 </a:t>
             </a:r>
             <a:r>
               <a:rPr lang="he-IL" dirty="0" err="1"/>
@@ -5132,7 +6446,7 @@
             </a:r>
             <a:r>
               <a:rPr lang="he-IL" dirty="0"/>
-              <a:t> כדי לבדוק את יכולת הבנת הנקרא של המודל.</a:t>
+              <a:t> – הבנת הנקרא.</a:t>
             </a:r>
           </a:p>
           <a:p>
@@ -5142,16 +6456,12 @@
           <a:p>
             <a:pPr marL="0" algn="r" defTabSz="914400" rtl="1" eaLnBrk="1" latinLnBrk="0" hangingPunct="1"/>
             <a:r>
-              <a:rPr lang="he-IL" dirty="0"/>
-              <a:t>ב-</a:t>
-            </a:r>
-            <a:r>
               <a:rPr lang="en-US" dirty="0"/>
               <a:t>Mathematical Reasoning</a:t>
             </a:r>
             <a:r>
               <a:rPr lang="he-IL" dirty="0"/>
-              <a:t> מעריכים את יכולות החשיבה המתמטית של המודל, גם כן בעזרת שני </a:t>
+              <a:t> – 2 </a:t>
             </a:r>
             <a:r>
               <a:rPr lang="he-IL" dirty="0" err="1"/>
@@ -5159,7 +6469,7 @@
             </a:r>
             <a:r>
               <a:rPr lang="he-IL" dirty="0"/>
-              <a:t>.</a:t>
+              <a:t> – יכולת חשיבה מתמטית ופיתוח מתמטי.</a:t>
             </a:r>
           </a:p>
           <a:p>
@@ -5169,16 +6479,12 @@
           <a:p>
             <a:pPr marL="0" algn="r" defTabSz="914400" rtl="1" eaLnBrk="1" latinLnBrk="0" hangingPunct="1"/>
             <a:r>
-              <a:rPr lang="he-IL" dirty="0"/>
-              <a:t>ב-</a:t>
-            </a:r>
-            <a:r>
               <a:rPr lang="en-US" dirty="0"/>
               <a:t>Code Generation</a:t>
             </a:r>
             <a:r>
               <a:rPr lang="he-IL" dirty="0"/>
-              <a:t> בודקים את יכולת יצירת הקוד של המודל באמצעות שני </a:t>
+              <a:t> – 2 </a:t>
             </a:r>
             <a:r>
               <a:rPr lang="he-IL" dirty="0" err="1"/>
@@ -5186,7 +6492,7 @@
             </a:r>
             <a:r>
               <a:rPr lang="he-IL" dirty="0"/>
-              <a:t>.</a:t>
+              <a:t> – יכולת כתיבת הקוד של המודל.</a:t>
             </a:r>
           </a:p>
           <a:p>
@@ -5196,20 +6502,12 @@
           <a:p>
             <a:pPr marL="0" algn="r" defTabSz="914400" rtl="1" eaLnBrk="1" latinLnBrk="0" hangingPunct="1"/>
             <a:r>
-              <a:rPr lang="he-IL" dirty="0" err="1"/>
-              <a:t>וב</a:t>
-            </a:r>
-            <a:r>
-              <a:rPr lang="he-IL" dirty="0"/>
-              <a:t>-</a:t>
-            </a:r>
-            <a:r>
               <a:rPr lang="en-US" dirty="0"/>
               <a:t>MMLU</a:t>
             </a:r>
             <a:r>
               <a:rPr lang="he-IL" dirty="0"/>
-              <a:t> מודדים ידע רחב היקף בתחומים רבים, ממדעים מדויקים, דרך מדעי הרוח ועד נושאים הומניים - באמצעות </a:t>
+              <a:t> – </a:t>
             </a:r>
             <a:r>
               <a:rPr lang="he-IL" dirty="0" err="1"/>
@@ -5217,15 +6515,7 @@
             </a:r>
             <a:r>
               <a:rPr lang="he-IL" dirty="0"/>
-              <a:t> אחד גדול בשם </a:t>
-            </a:r>
-            <a:r>
-              <a:rPr lang="en-US" dirty="0"/>
-              <a:t>MMLU</a:t>
-            </a:r>
-            <a:r>
-              <a:rPr lang="he-IL" dirty="0"/>
-              <a:t>.</a:t>
+              <a:t> אחד – בוחנים את הידע הכללי של המודל על פני תחומים רבים</a:t>
             </a:r>
             <a:endParaRPr lang="en-US" dirty="0"/>
           </a:p>
@@ -5361,7 +6651,7 @@
             <a:pPr marL="0" algn="r" defTabSz="914400" rtl="1" eaLnBrk="1" latinLnBrk="0" hangingPunct="1"/>
             <a:r>
               <a:rPr lang="he-IL" dirty="0"/>
-              <a:t>ההבדל המרכזי הוא שבניגוד </a:t>
+              <a:t>בניגוד </a:t>
             </a:r>
             <a:r>
               <a:rPr lang="he-IL" dirty="0" err="1"/>
@@ -5559,6 +6849,65 @@
           </a:p>
           <a:p>
             <a:pPr marL="0" algn="r" defTabSz="914400" rtl="1" eaLnBrk="1" latinLnBrk="0" hangingPunct="1"/>
+            <a:endParaRPr lang="he-IL" dirty="0"/>
+          </a:p>
+          <a:p>
+            <a:pPr marL="0" algn="r" defTabSz="914400" rtl="1" eaLnBrk="1" latinLnBrk="0" hangingPunct="1"/>
+            <a:r>
+              <a:rPr lang="he-IL" dirty="0"/>
+              <a:t>גדלים שונים</a:t>
+            </a:r>
+          </a:p>
+          <a:p>
+            <a:pPr marL="0" algn="r" defTabSz="914400" rtl="1" eaLnBrk="1" latinLnBrk="0" hangingPunct="1"/>
+            <a:endParaRPr lang="he-IL" dirty="0"/>
+          </a:p>
+          <a:p>
+            <a:pPr marL="0" algn="r" defTabSz="914400" rtl="1" eaLnBrk="1" latinLnBrk="0" hangingPunct="1"/>
+            <a:r>
+              <a:rPr lang="he-IL" dirty="0"/>
+              <a:t>ציבוריים וקנייניים</a:t>
+            </a:r>
+          </a:p>
+          <a:p>
+            <a:pPr marL="0" algn="r" defTabSz="914400" rtl="1" eaLnBrk="1" latinLnBrk="0" hangingPunct="1"/>
+            <a:endParaRPr lang="he-IL" dirty="0"/>
+          </a:p>
+          <a:p>
+            <a:pPr marL="0" algn="r" defTabSz="914400" rtl="1" eaLnBrk="1" latinLnBrk="0" hangingPunct="1"/>
+            <a:r>
+              <a:rPr lang="he-IL" dirty="0"/>
+              <a:t>מוכווני משימה וכלליים</a:t>
+            </a:r>
+          </a:p>
+          <a:p>
+            <a:pPr marL="0" algn="r" defTabSz="914400" rtl="1" eaLnBrk="1" latinLnBrk="0" hangingPunct="1"/>
+            <a:endParaRPr lang="he-IL" dirty="0"/>
+          </a:p>
+          <a:p>
+            <a:pPr marL="0" algn="r" defTabSz="914400" rtl="1" eaLnBrk="1" latinLnBrk="0" hangingPunct="1"/>
+            <a:r>
+              <a:rPr lang="he-IL" dirty="0"/>
+              <a:t>קבוצות מחקר מובילות</a:t>
+            </a:r>
+          </a:p>
+          <a:p>
+            <a:pPr marL="0" algn="r" defTabSz="914400" rtl="1" eaLnBrk="1" latinLnBrk="0" hangingPunct="1"/>
+            <a:endParaRPr lang="he-IL" dirty="0"/>
+          </a:p>
+          <a:p>
+            <a:pPr marL="0" algn="r" defTabSz="914400" rtl="1" eaLnBrk="1" latinLnBrk="0" hangingPunct="1"/>
+            <a:r>
+              <a:rPr lang="he-IL" dirty="0"/>
+              <a:t>---</a:t>
+            </a:r>
+          </a:p>
+          <a:p>
+            <a:pPr marL="0" algn="r" defTabSz="914400" rtl="1" eaLnBrk="1" latinLnBrk="0" hangingPunct="1"/>
+            <a:endParaRPr lang="he-IL" dirty="0"/>
+          </a:p>
+          <a:p>
+            <a:pPr marL="0" algn="r" defTabSz="914400" rtl="1" eaLnBrk="1" latinLnBrk="0" hangingPunct="1"/>
             <a:r>
               <a:rPr lang="he-IL" dirty="0"/>
               <a:t>מדובר במודלים בגדלים שונים, חלקם ציבוריים וחלקם קנייניים, כולם פותחו על-ידי קבוצות מחקר מובילות.</a:t>
@@ -5665,15 +7014,15 @@
             <a:pPr marL="0" algn="r" defTabSz="914400" rtl="1" eaLnBrk="1" latinLnBrk="0" hangingPunct="1"/>
             <a:r>
               <a:rPr lang="he-IL" dirty="0"/>
-              <a:t>נתחיל ב-</a:t>
-            </a:r>
-            <a:r>
-              <a:rPr lang="en-US" dirty="0"/>
-              <a:t>Common Sense Reasoning</a:t>
-            </a:r>
-            <a:r>
-              <a:rPr lang="he-IL" dirty="0"/>
-              <a:t>.</a:t>
+              <a:t>במדד זה מציגים למודל שאלות רב-ברירה מ-8 </a:t>
+            </a:r>
+            <a:r>
+              <a:rPr lang="he-IL" dirty="0" err="1"/>
+              <a:t>דאטאסטים</a:t>
+            </a:r>
+            <a:r>
+              <a:rPr lang="he-IL" dirty="0"/>
+              <a:t>, הכוללים מבחני השלמת משפטים עם או בלי בחירת מילה.</a:t>
             </a:r>
           </a:p>
           <a:p>
@@ -5684,15 +7033,69 @@
             <a:pPr marL="0" algn="r" defTabSz="914400" rtl="1" eaLnBrk="1" latinLnBrk="0" hangingPunct="1"/>
             <a:r>
               <a:rPr lang="he-IL" dirty="0"/>
-              <a:t>במדד זה מציגים למודל שאלות רב-ברירה מ-8 </a:t>
-            </a:r>
-            <a:r>
-              <a:rPr lang="he-IL" dirty="0" err="1"/>
-              <a:t>דאטאסטים</a:t>
-            </a:r>
-            <a:r>
-              <a:rPr lang="he-IL" dirty="0"/>
-              <a:t>, הכוללים מבחני השלמת משפטים עם או בלי בחירת מילה.</a:t>
+              <a:t>המבחן נערך ב־</a:t>
+            </a:r>
+            <a:r>
+              <a:rPr lang="en-US" dirty="0"/>
+              <a:t>zero-shot</a:t>
+            </a:r>
+            <a:r>
+              <a:rPr lang="he-IL" dirty="0"/>
+              <a:t>.</a:t>
+            </a:r>
+            <a:endParaRPr lang="en-US" dirty="0"/>
+          </a:p>
+          <a:p>
+            <a:pPr marL="0" algn="r" defTabSz="914400" rtl="1" eaLnBrk="1" latinLnBrk="0" hangingPunct="1"/>
+            <a:endParaRPr lang="en-US" dirty="0"/>
+          </a:p>
+          <a:p>
+            <a:pPr marL="0" algn="r" defTabSz="914400" rtl="1" eaLnBrk="1" latinLnBrk="0" hangingPunct="1"/>
+            <a:r>
+              <a:rPr lang="en-US" dirty="0"/>
+              <a:t>LLaMA‑65B</a:t>
+            </a:r>
+            <a:r>
+              <a:rPr lang="he-IL" dirty="0"/>
+              <a:t> משיג ביצועים טובים יותר מרוב המודלים,</a:t>
+            </a:r>
+          </a:p>
+          <a:p>
+            <a:pPr marL="0" algn="r" defTabSz="914400" rtl="1" eaLnBrk="1" latinLnBrk="0" hangingPunct="1"/>
+            <a:r>
+              <a:rPr lang="he-IL" dirty="0"/>
+              <a:t>מנצח את </a:t>
+            </a:r>
+            <a:r>
+              <a:rPr lang="en-US" dirty="0"/>
+              <a:t>Chinchilla‑70B</a:t>
+            </a:r>
+            <a:r>
+              <a:rPr lang="he-IL" dirty="0"/>
+              <a:t>, מודל בסדר גודל דומה,</a:t>
+            </a:r>
+          </a:p>
+          <a:p>
+            <a:pPr marL="0" algn="r" defTabSz="914400" rtl="1" eaLnBrk="1" latinLnBrk="0" hangingPunct="1"/>
+            <a:r>
+              <a:rPr lang="he-IL" dirty="0"/>
+              <a:t>ואפילו גובר על </a:t>
+            </a:r>
+            <a:r>
+              <a:rPr lang="en-US" dirty="0"/>
+              <a:t>PaLM‑540B</a:t>
+            </a:r>
+            <a:r>
+              <a:rPr lang="he-IL" dirty="0"/>
+              <a:t>,</a:t>
+            </a:r>
+            <a:r>
+              <a:rPr lang="en-US" dirty="0"/>
+              <a:t> </a:t>
+            </a:r>
+            <a:r>
+              <a:rPr lang="he-IL" dirty="0"/>
+              <a:t>שהוא מודל ענק.</a:t>
             </a:r>
           </a:p>
           <a:p>
@@ -5702,73 +7105,6 @@
           <a:p>
             <a:pPr marL="0" algn="r" defTabSz="914400" rtl="1" eaLnBrk="1" latinLnBrk="0" hangingPunct="1"/>
             <a:r>
-              <a:rPr lang="he-IL" dirty="0"/>
-              <a:t>המבחן נערך ב־</a:t>
-            </a:r>
-            <a:r>
-              <a:rPr lang="en-US" dirty="0"/>
-              <a:t>zero-shot</a:t>
-            </a:r>
-            <a:r>
-              <a:rPr lang="he-IL" dirty="0"/>
-              <a:t>.</a:t>
-            </a:r>
-            <a:endParaRPr lang="en-US" dirty="0"/>
-          </a:p>
-          <a:p>
-            <a:pPr marL="0" algn="r" defTabSz="914400" rtl="1" eaLnBrk="1" latinLnBrk="0" hangingPunct="1"/>
-            <a:endParaRPr lang="en-US" dirty="0"/>
-          </a:p>
-          <a:p>
-            <a:pPr marL="0" algn="r" defTabSz="914400" rtl="1" eaLnBrk="1" latinLnBrk="0" hangingPunct="1"/>
-            <a:r>
-              <a:rPr lang="he-IL" dirty="0"/>
-              <a:t>אפשר לראות שהמודל הגדול, </a:t>
-            </a:r>
-            <a:r>
-              <a:rPr lang="en-US" dirty="0"/>
-              <a:t>LLaMA‑65B</a:t>
-            </a:r>
-            <a:r>
-              <a:rPr lang="he-IL" dirty="0"/>
-              <a:t>, מתעלה על רוב המודלים. הוא מנצח את </a:t>
-            </a:r>
-            <a:r>
-              <a:rPr lang="en-US" dirty="0"/>
-              <a:t>Chinchilla‑70B</a:t>
-            </a:r>
-            <a:r>
-              <a:rPr lang="he-IL" dirty="0"/>
-              <a:t>, מודל בסדר גודל דומה, ואפילו גובר על </a:t>
-            </a:r>
-            <a:r>
-              <a:rPr lang="en-US" dirty="0"/>
-              <a:t>PaLM‑540B</a:t>
-            </a:r>
-            <a:r>
-              <a:rPr lang="he-IL" dirty="0"/>
-              <a:t>, </a:t>
-            </a:r>
-            <a:r>
-              <a:rPr lang="en-US" dirty="0"/>
-              <a:t> </a:t>
-            </a:r>
-            <a:r>
-              <a:rPr lang="he-IL" dirty="0"/>
-              <a:t>שהוא מודל ענק.</a:t>
-            </a:r>
-          </a:p>
-          <a:p>
-            <a:pPr marL="0" algn="r" defTabSz="914400" rtl="1" eaLnBrk="1" latinLnBrk="0" hangingPunct="1"/>
-            <a:endParaRPr lang="he-IL" dirty="0"/>
-          </a:p>
-          <a:p>
-            <a:pPr marL="0" algn="r" defTabSz="914400" rtl="1" eaLnBrk="1" latinLnBrk="0" hangingPunct="1"/>
-            <a:r>
-              <a:rPr lang="he-IL" dirty="0"/>
-              <a:t>בנוסף, </a:t>
-            </a:r>
-            <a:r>
               <a:rPr lang="en-US" dirty="0"/>
               <a:t>LLaMA‑13B</a:t>
             </a:r>
@@ -5782,7 +7118,7 @@
             </a:r>
             <a:r>
               <a:rPr lang="he-IL" dirty="0"/>
-              <a:t> ברוב המדדים, למרות שהוא קטן ממנו בערך פי 10 - אחד הממצאים המרכזיים של המאמר, שאפשר להשיג שיפור בביצועים גם בלי להמשיך להגדיל את כמות הפרמטרים.</a:t>
+              <a:t> ברוב המדדים, למרות שהוא קטן ממנו ביותר מפי 10 - אחד הממצאים המרכזיים של המאמר, שאפשר להשיג שיפור בביצועים גם בלי להמשיך להגדיל את כמות הפרמטרים.</a:t>
             </a:r>
             <a:endParaRPr lang="en-IL" dirty="0"/>
           </a:p>
@@ -5871,33 +7207,6 @@
             <a:pPr marL="0" algn="r" defTabSz="914400" rtl="1" eaLnBrk="1" latinLnBrk="0" hangingPunct="1"/>
             <a:r>
               <a:rPr lang="he-IL" dirty="0"/>
-              <a:t>נעבור </a:t>
-            </a:r>
-            <a:r>
-              <a:rPr lang="he-IL" dirty="0" err="1"/>
-              <a:t>לבנצ'מרק</a:t>
-            </a:r>
-            <a:r>
-              <a:rPr lang="he-IL" dirty="0"/>
-              <a:t> </a:t>
-            </a:r>
-            <a:r>
-              <a:rPr lang="en-US" dirty="0"/>
-              <a:t>Closed-Book Question Answering</a:t>
-            </a:r>
-            <a:r>
-              <a:rPr lang="he-IL" dirty="0"/>
-              <a:t>.</a:t>
-            </a:r>
-          </a:p>
-          <a:p>
-            <a:pPr marL="0" algn="r" defTabSz="914400" rtl="1" eaLnBrk="1" latinLnBrk="0" hangingPunct="1"/>
-            <a:endParaRPr lang="he-IL" dirty="0"/>
-          </a:p>
-          <a:p>
-            <a:pPr marL="0" algn="r" defTabSz="914400" rtl="1" eaLnBrk="1" latinLnBrk="0" hangingPunct="1"/>
-            <a:r>
-              <a:rPr lang="he-IL" dirty="0"/>
               <a:t>כאן בודקים את ההתאמה המדויקת בין תשובת המודל לתשובה הנכונה. לכן, ניתן לראות הבדלים משמעותיים ככל שמספקים למודל יותר דוגמאות לפני השאלה.</a:t>
             </a:r>
           </a:p>
@@ -6138,25 +7447,6 @@
         <p:txBody>
           <a:bodyPr/>
           <a:lstStyle/>
-          <a:p>
-            <a:pPr marL="0" algn="r" defTabSz="914400" rtl="1" eaLnBrk="1" latinLnBrk="0" hangingPunct="1"/>
-            <a:r>
-              <a:rPr lang="he-IL" dirty="0"/>
-              <a:t>נעבור ל-</a:t>
-            </a:r>
-            <a:r>
-              <a:rPr lang="en-US" dirty="0"/>
-              <a:t>Reading Comprehension</a:t>
-            </a:r>
-            <a:r>
-              <a:rPr lang="he-IL" dirty="0"/>
-              <a:t>.</a:t>
-            </a:r>
-          </a:p>
-          <a:p>
-            <a:pPr marL="0" algn="r" defTabSz="914400" rtl="1" eaLnBrk="1" latinLnBrk="0" hangingPunct="1"/>
-            <a:endParaRPr lang="he-IL" dirty="0"/>
-          </a:p>
           <a:p>
             <a:pPr marL="0" algn="r" defTabSz="914400" rtl="1" eaLnBrk="1" latinLnBrk="0" hangingPunct="1"/>
             <a:r>
@@ -11393,8 +12683,8 @@
         </p:nvSpPr>
         <p:spPr>
           <a:xfrm>
-            <a:off x="1371600" y="355701"/>
-            <a:ext cx="9601200" cy="660197"/>
+            <a:off x="1371599" y="355701"/>
+            <a:ext cx="10174941" cy="660197"/>
           </a:xfrm>
         </p:spPr>
         <p:txBody>
@@ -11417,7 +12707,17 @@
                 <a:latin typeface="Times New Roman" panose="02020603050405020304" pitchFamily="18" charset="0"/>
                 <a:cs typeface="Times New Roman" panose="02020603050405020304" pitchFamily="18" charset="0"/>
               </a:rPr>
-              <a:t>3.6 General Knowledge (MMLU)</a:t>
+              <a:t>3.6 </a:t>
+            </a:r>
+            <a:r>
+              <a:rPr lang="en-US" sz="4000" b="1" dirty="0">
+                <a:solidFill>
+                  <a:schemeClr val="tx1"/>
+                </a:solidFill>
+                <a:latin typeface="Times New Roman" panose="02020603050405020304" pitchFamily="18" charset="0"/>
+                <a:cs typeface="Times New Roman" panose="02020603050405020304" pitchFamily="18" charset="0"/>
+              </a:rPr>
+              <a:t>Massive Multitask Language Understanding</a:t>
             </a:r>
             <a:endParaRPr lang="en-IL" dirty="0">
               <a:solidFill>
@@ -15811,6 +17111,11 @@
             </a:lvl9pPr>
           </a:lstStyle>
           <a:p>
+            <a:pPr>
+              <a:lnSpc>
+                <a:spcPct val="100000"/>
+              </a:lnSpc>
+            </a:pPr>
             <a:r>
               <a:rPr lang="en-US" b="1" dirty="0">
                 <a:solidFill>
@@ -15833,6 +17138,11 @@
             </a:r>
           </a:p>
           <a:p>
+            <a:pPr>
+              <a:lnSpc>
+                <a:spcPct val="100000"/>
+              </a:lnSpc>
+            </a:pPr>
             <a:r>
               <a:rPr lang="en-US" b="1" dirty="0">
                 <a:solidFill>
@@ -15888,7 +17198,7 @@
         </p:spPr>
         <p:txBody>
           <a:bodyPr vert="horz" lIns="91440" tIns="45720" rIns="91440" bIns="45720" rtlCol="0">
-            <a:normAutofit/>
+            <a:normAutofit lnSpcReduction="10000"/>
           </a:bodyPr>
           <a:lstStyle>
             <a:lvl1pPr marL="384048" indent="-384048" algn="l" defTabSz="914400" rtl="0" eaLnBrk="1" latinLnBrk="0" hangingPunct="1">
@@ -16081,6 +17391,191 @@
               </a:defRPr>
             </a:lvl9pPr>
           </a:lstStyle>
+          <a:p>
+            <a:r>
+              <a:rPr lang="he-IL" b="1" dirty="0" err="1">
+                <a:solidFill>
+                  <a:schemeClr val="tx1"/>
+                </a:solidFill>
+                <a:latin typeface="Times New Roman" panose="02020603050405020304" pitchFamily="18" charset="0"/>
+                <a:cs typeface="Times New Roman" panose="02020603050405020304" pitchFamily="18" charset="0"/>
+              </a:rPr>
+              <a:t>E</a:t>
+            </a:r>
+            <a:r>
+              <a:rPr lang="en-US" b="1" dirty="0" err="1">
+                <a:solidFill>
+                  <a:schemeClr val="tx1"/>
+                </a:solidFill>
+                <a:latin typeface="Times New Roman" panose="02020603050405020304" pitchFamily="18" charset="0"/>
+                <a:cs typeface="Times New Roman" panose="02020603050405020304" pitchFamily="18" charset="0"/>
+              </a:rPr>
+              <a:t>xample</a:t>
+            </a:r>
+            <a:r>
+              <a:rPr lang="en-US" b="1" dirty="0">
+                <a:solidFill>
+                  <a:schemeClr val="tx1"/>
+                </a:solidFill>
+                <a:latin typeface="Times New Roman" panose="02020603050405020304" pitchFamily="18" charset="0"/>
+                <a:cs typeface="Times New Roman" panose="02020603050405020304" pitchFamily="18" charset="0"/>
+              </a:rPr>
+              <a:t>:</a:t>
+            </a:r>
+          </a:p>
+          <a:p>
+            <a:pPr lvl="1"/>
+            <a:r>
+              <a:rPr lang="en-US" dirty="0">
+                <a:solidFill>
+                  <a:schemeClr val="tx1"/>
+                </a:solidFill>
+                <a:latin typeface="Times New Roman" panose="02020603050405020304" pitchFamily="18" charset="0"/>
+                <a:cs typeface="Times New Roman" panose="02020603050405020304" pitchFamily="18" charset="0"/>
+              </a:rPr>
+              <a:t>The </a:t>
+            </a:r>
+            <a:r>
+              <a:rPr lang="en-US" b="1" dirty="0">
+                <a:solidFill>
+                  <a:schemeClr val="tx1"/>
+                </a:solidFill>
+                <a:latin typeface="Times New Roman" panose="02020603050405020304" pitchFamily="18" charset="0"/>
+                <a:cs typeface="Times New Roman" panose="02020603050405020304" pitchFamily="18" charset="0"/>
+              </a:rPr>
+              <a:t>physician</a:t>
+            </a:r>
+            <a:r>
+              <a:rPr lang="en-US" dirty="0">
+                <a:solidFill>
+                  <a:schemeClr val="tx1"/>
+                </a:solidFill>
+                <a:latin typeface="Times New Roman" panose="02020603050405020304" pitchFamily="18" charset="0"/>
+                <a:cs typeface="Times New Roman" panose="02020603050405020304" pitchFamily="18" charset="0"/>
+              </a:rPr>
+              <a:t> hired the </a:t>
+            </a:r>
+            <a:r>
+              <a:rPr lang="en-US" b="1" dirty="0">
+                <a:solidFill>
+                  <a:schemeClr val="tx1"/>
+                </a:solidFill>
+                <a:latin typeface="Times New Roman" panose="02020603050405020304" pitchFamily="18" charset="0"/>
+                <a:cs typeface="Times New Roman" panose="02020603050405020304" pitchFamily="18" charset="0"/>
+              </a:rPr>
+              <a:t>nurse</a:t>
+            </a:r>
+            <a:r>
+              <a:rPr lang="en-US" dirty="0">
+                <a:solidFill>
+                  <a:schemeClr val="tx1"/>
+                </a:solidFill>
+                <a:latin typeface="Times New Roman" panose="02020603050405020304" pitchFamily="18" charset="0"/>
+                <a:cs typeface="Times New Roman" panose="02020603050405020304" pitchFamily="18" charset="0"/>
+              </a:rPr>
+              <a:t> because </a:t>
+            </a:r>
+            <a:r>
+              <a:rPr lang="en-US" b="1" dirty="0">
+                <a:solidFill>
+                  <a:schemeClr val="tx1"/>
+                </a:solidFill>
+                <a:latin typeface="Times New Roman" panose="02020603050405020304" pitchFamily="18" charset="0"/>
+                <a:cs typeface="Times New Roman" panose="02020603050405020304" pitchFamily="18" charset="0"/>
+              </a:rPr>
+              <a:t>he</a:t>
+            </a:r>
+            <a:r>
+              <a:rPr lang="en-US" dirty="0">
+                <a:solidFill>
+                  <a:schemeClr val="tx1"/>
+                </a:solidFill>
+                <a:latin typeface="Times New Roman" panose="02020603050405020304" pitchFamily="18" charset="0"/>
+                <a:cs typeface="Times New Roman" panose="02020603050405020304" pitchFamily="18" charset="0"/>
+              </a:rPr>
+              <a:t> was busy.</a:t>
+            </a:r>
+          </a:p>
+          <a:p>
+            <a:pPr lvl="1"/>
+            <a:r>
+              <a:rPr lang="en-US" dirty="0">
+                <a:solidFill>
+                  <a:schemeClr val="tx1"/>
+                </a:solidFill>
+                <a:latin typeface="Times New Roman" panose="02020603050405020304" pitchFamily="18" charset="0"/>
+                <a:cs typeface="Times New Roman" panose="02020603050405020304" pitchFamily="18" charset="0"/>
+              </a:rPr>
+              <a:t>The </a:t>
+            </a:r>
+            <a:r>
+              <a:rPr lang="en-US" b="1" dirty="0">
+                <a:solidFill>
+                  <a:schemeClr val="tx1"/>
+                </a:solidFill>
+                <a:latin typeface="Times New Roman" panose="02020603050405020304" pitchFamily="18" charset="0"/>
+                <a:cs typeface="Times New Roman" panose="02020603050405020304" pitchFamily="18" charset="0"/>
+              </a:rPr>
+              <a:t>physician</a:t>
+            </a:r>
+            <a:r>
+              <a:rPr lang="en-US" dirty="0">
+                <a:solidFill>
+                  <a:schemeClr val="tx1"/>
+                </a:solidFill>
+                <a:latin typeface="Times New Roman" panose="02020603050405020304" pitchFamily="18" charset="0"/>
+                <a:cs typeface="Times New Roman" panose="02020603050405020304" pitchFamily="18" charset="0"/>
+              </a:rPr>
+              <a:t> hired the </a:t>
+            </a:r>
+            <a:r>
+              <a:rPr lang="en-US" b="1" dirty="0">
+                <a:solidFill>
+                  <a:schemeClr val="tx1"/>
+                </a:solidFill>
+                <a:latin typeface="Times New Roman" panose="02020603050405020304" pitchFamily="18" charset="0"/>
+                <a:cs typeface="Times New Roman" panose="02020603050405020304" pitchFamily="18" charset="0"/>
+              </a:rPr>
+              <a:t>nurse</a:t>
+            </a:r>
+            <a:r>
+              <a:rPr lang="en-US" dirty="0">
+                <a:solidFill>
+                  <a:schemeClr val="tx1"/>
+                </a:solidFill>
+                <a:latin typeface="Times New Roman" panose="02020603050405020304" pitchFamily="18" charset="0"/>
+                <a:cs typeface="Times New Roman" panose="02020603050405020304" pitchFamily="18" charset="0"/>
+              </a:rPr>
+              <a:t> because </a:t>
+            </a:r>
+            <a:r>
+              <a:rPr lang="en-US" b="1" dirty="0">
+                <a:solidFill>
+                  <a:schemeClr val="tx1"/>
+                </a:solidFill>
+                <a:latin typeface="Times New Roman" panose="02020603050405020304" pitchFamily="18" charset="0"/>
+                <a:cs typeface="Times New Roman" panose="02020603050405020304" pitchFamily="18" charset="0"/>
+              </a:rPr>
+              <a:t>she</a:t>
+            </a:r>
+            <a:r>
+              <a:rPr lang="en-US" dirty="0">
+                <a:solidFill>
+                  <a:schemeClr val="tx1"/>
+                </a:solidFill>
+                <a:latin typeface="Times New Roman" panose="02020603050405020304" pitchFamily="18" charset="0"/>
+                <a:cs typeface="Times New Roman" panose="02020603050405020304" pitchFamily="18" charset="0"/>
+              </a:rPr>
+              <a:t> was busy.</a:t>
+            </a:r>
+            <a:endParaRPr lang="he-IL" dirty="0">
+              <a:solidFill>
+                <a:schemeClr val="tx1"/>
+              </a:solidFill>
+              <a:latin typeface="Times New Roman" panose="02020603050405020304" pitchFamily="18" charset="0"/>
+              <a:cs typeface="Times New Roman" panose="02020603050405020304" pitchFamily="18" charset="0"/>
+            </a:endParaRPr>
+          </a:p>
           <a:p>
             <a:r>
               <a:rPr lang="en-US" dirty="0">
@@ -16293,7 +17788,7 @@
         <p:spPr>
           <a:xfrm>
             <a:off x="1371600" y="1133856"/>
-            <a:ext cx="9601200" cy="5179161"/>
+            <a:ext cx="9601200" cy="5500026"/>
           </a:xfrm>
         </p:spPr>
         <p:txBody>
@@ -16307,7 +17802,7 @@
                 <a:latin typeface="Times New Roman" panose="02020603050405020304" pitchFamily="18" charset="0"/>
                 <a:cs typeface="Times New Roman" panose="02020603050405020304" pitchFamily="18" charset="0"/>
               </a:rPr>
-              <a:t>Task Types:</a:t>
+              <a:t>Evaluation Approach:</a:t>
             </a:r>
           </a:p>
           <a:p>
@@ -16321,43 +17816,50 @@
                 <a:latin typeface="Times New Roman" panose="02020603050405020304" pitchFamily="18" charset="0"/>
                 <a:cs typeface="Times New Roman" panose="02020603050405020304" pitchFamily="18" charset="0"/>
               </a:rPr>
-              <a:t>Free-form generation.</a:t>
+              <a:t>Follows previous work (Brown et al., 2020).</a:t>
             </a:r>
           </a:p>
           <a:p>
             <a:pPr lvl="1"/>
             <a:r>
-              <a:rPr lang="en-US" b="0" i="0" dirty="0">
+              <a:rPr lang="en-US" i="0" dirty="0">
                 <a:solidFill>
                   <a:schemeClr val="tx1"/>
                 </a:solidFill>
-                <a:effectLst/>
-                <a:latin typeface="Times New Roman" panose="02020603050405020304" pitchFamily="18" charset="0"/>
-                <a:cs typeface="Times New Roman" panose="02020603050405020304" pitchFamily="18" charset="0"/>
-              </a:rPr>
-              <a:t>Multiple choice (ranking options by likelihood).</a:t>
-            </a:r>
-            <a:endParaRPr lang="en-IL" dirty="0">
+                <a:latin typeface="Times New Roman" panose="02020603050405020304" pitchFamily="18" charset="0"/>
+                <a:cs typeface="Times New Roman" panose="02020603050405020304" pitchFamily="18" charset="0"/>
+              </a:rPr>
+              <a:t>6 benchmarks based on 17 datasets</a:t>
+            </a:r>
+          </a:p>
+          <a:p>
+            <a:pPr lvl="1"/>
+            <a:r>
+              <a:rPr lang="en-US" i="0" dirty="0">
+                <a:solidFill>
+                  <a:schemeClr val="tx1"/>
+                </a:solidFill>
+                <a:latin typeface="Times New Roman" panose="02020603050405020304" pitchFamily="18" charset="0"/>
+                <a:cs typeface="Times New Roman" panose="02020603050405020304" pitchFamily="18" charset="0"/>
+              </a:rPr>
+              <a:t>3 additional metrics, </a:t>
+            </a:r>
+            <a:endParaRPr lang="en-US" b="0" i="0" dirty="0">
               <a:solidFill>
                 <a:schemeClr val="tx1"/>
               </a:solidFill>
+              <a:effectLst/>
               <a:latin typeface="Times New Roman" panose="02020603050405020304" pitchFamily="18" charset="0"/>
               <a:cs typeface="Times New Roman" panose="02020603050405020304" pitchFamily="18" charset="0"/>
             </a:endParaRPr>
           </a:p>
           <a:p>
-            <a:endParaRPr lang="he-IL" b="1" dirty="0">
-              <a:latin typeface="Times New Roman" panose="02020603050405020304" pitchFamily="18" charset="0"/>
-              <a:cs typeface="Times New Roman" panose="02020603050405020304" pitchFamily="18" charset="0"/>
-            </a:endParaRPr>
-          </a:p>
-          <a:p>
             <a:r>
               <a:rPr lang="en-US" b="1" dirty="0">
                 <a:latin typeface="Times New Roman" panose="02020603050405020304" pitchFamily="18" charset="0"/>
                 <a:cs typeface="Times New Roman" panose="02020603050405020304" pitchFamily="18" charset="0"/>
               </a:rPr>
-              <a:t>Evaluation Approach:</a:t>
+              <a:t>Task Types:</a:t>
             </a:r>
           </a:p>
           <a:p>
@@ -16371,13 +17873,13 @@
                 <a:latin typeface="Times New Roman" panose="02020603050405020304" pitchFamily="18" charset="0"/>
                 <a:cs typeface="Times New Roman" panose="02020603050405020304" pitchFamily="18" charset="0"/>
               </a:rPr>
-              <a:t>Follows previous work (Brown et al., 2020).</a:t>
+              <a:t>Free-form generation.</a:t>
             </a:r>
           </a:p>
           <a:p>
             <a:pPr lvl="1"/>
             <a:r>
-              <a:rPr lang="en-US" b="1" i="0" dirty="0">
+              <a:rPr lang="en-US" b="0" i="0" dirty="0">
                 <a:solidFill>
                   <a:schemeClr val="tx1"/>
                 </a:solidFill>
@@ -16385,43 +17887,7 @@
                 <a:latin typeface="Times New Roman" panose="02020603050405020304" pitchFamily="18" charset="0"/>
                 <a:cs typeface="Times New Roman" panose="02020603050405020304" pitchFamily="18" charset="0"/>
               </a:rPr>
-              <a:t>Zero-shot:</a:t>
-            </a:r>
-            <a:r>
-              <a:rPr lang="en-US" b="0" i="0" dirty="0">
-                <a:solidFill>
-                  <a:schemeClr val="tx1"/>
-                </a:solidFill>
-                <a:effectLst/>
-                <a:latin typeface="Times New Roman" panose="02020603050405020304" pitchFamily="18" charset="0"/>
-                <a:cs typeface="Times New Roman" panose="02020603050405020304" pitchFamily="18" charset="0"/>
-              </a:rPr>
-              <a:t> Model provided with a task description and test example.</a:t>
-            </a:r>
-          </a:p>
-          <a:p>
-            <a:pPr lvl="1"/>
-            <a:r>
-              <a:rPr lang="en-US" b="1" i="0" dirty="0">
-                <a:solidFill>
-                  <a:schemeClr val="tx1"/>
-                </a:solidFill>
-                <a:effectLst/>
-                <a:latin typeface="Times New Roman" panose="02020603050405020304" pitchFamily="18" charset="0"/>
-                <a:cs typeface="Times New Roman" panose="02020603050405020304" pitchFamily="18" charset="0"/>
-              </a:rPr>
-              <a:t>Few-shot:</a:t>
-            </a:r>
-            <a:r>
-              <a:rPr lang="en-US" b="0" i="0" dirty="0">
-                <a:solidFill>
-                  <a:schemeClr val="tx1"/>
-                </a:solidFill>
-                <a:effectLst/>
-                <a:latin typeface="Times New Roman" panose="02020603050405020304" pitchFamily="18" charset="0"/>
-                <a:cs typeface="Times New Roman" panose="02020603050405020304" pitchFamily="18" charset="0"/>
-              </a:rPr>
-              <a:t> Model provided with 1 to 64 examples + test example.</a:t>
+              <a:t>Multiple choice (ranking options by likelihood).</a:t>
             </a:r>
             <a:endParaRPr lang="en-US" b="1" i="0" dirty="0">
               <a:solidFill>
@@ -16433,7 +17899,76 @@
             </a:endParaRPr>
           </a:p>
           <a:p>
-            <a:endParaRPr lang="en-US" b="1" dirty="0">
+            <a:r>
+              <a:rPr lang="en-US" b="1" i="0" dirty="0">
+                <a:solidFill>
+                  <a:schemeClr val="tx1"/>
+                </a:solidFill>
+                <a:effectLst/>
+                <a:latin typeface="Times New Roman" panose="02020603050405020304" pitchFamily="18" charset="0"/>
+                <a:cs typeface="Times New Roman" panose="02020603050405020304" pitchFamily="18" charset="0"/>
+              </a:rPr>
+              <a:t>Settings:</a:t>
+            </a:r>
+            <a:endParaRPr lang="he-IL" b="1" i="0" dirty="0">
+              <a:solidFill>
+                <a:schemeClr val="tx1"/>
+              </a:solidFill>
+              <a:effectLst/>
+              <a:latin typeface="Times New Roman" panose="02020603050405020304" pitchFamily="18" charset="0"/>
+              <a:cs typeface="Times New Roman" panose="02020603050405020304" pitchFamily="18" charset="0"/>
+            </a:endParaRPr>
+          </a:p>
+          <a:p>
+            <a:pPr lvl="1"/>
+            <a:r>
+              <a:rPr lang="en-US" b="1" i="0" dirty="0">
+                <a:solidFill>
+                  <a:schemeClr val="tx1"/>
+                </a:solidFill>
+                <a:effectLst/>
+                <a:latin typeface="Times New Roman" panose="02020603050405020304" pitchFamily="18" charset="0"/>
+                <a:cs typeface="Times New Roman" panose="02020603050405020304" pitchFamily="18" charset="0"/>
+              </a:rPr>
+              <a:t>Zero-shot:</a:t>
+            </a:r>
+            <a:r>
+              <a:rPr lang="en-US" b="0" i="0" dirty="0">
+                <a:solidFill>
+                  <a:schemeClr val="tx1"/>
+                </a:solidFill>
+                <a:effectLst/>
+                <a:latin typeface="Times New Roman" panose="02020603050405020304" pitchFamily="18" charset="0"/>
+                <a:cs typeface="Times New Roman" panose="02020603050405020304" pitchFamily="18" charset="0"/>
+              </a:rPr>
+              <a:t> Model provided with a task description and test example.</a:t>
+            </a:r>
+          </a:p>
+          <a:p>
+            <a:pPr lvl="1"/>
+            <a:r>
+              <a:rPr lang="en-US" b="1" i="0" dirty="0">
+                <a:solidFill>
+                  <a:schemeClr val="tx1"/>
+                </a:solidFill>
+                <a:effectLst/>
+                <a:latin typeface="Times New Roman" panose="02020603050405020304" pitchFamily="18" charset="0"/>
+                <a:cs typeface="Times New Roman" panose="02020603050405020304" pitchFamily="18" charset="0"/>
+              </a:rPr>
+              <a:t>Few-shot:</a:t>
+            </a:r>
+            <a:r>
+              <a:rPr lang="en-US" b="0" i="0" dirty="0">
+                <a:solidFill>
+                  <a:schemeClr val="tx1"/>
+                </a:solidFill>
+                <a:effectLst/>
+                <a:latin typeface="Times New Roman" panose="02020603050405020304" pitchFamily="18" charset="0"/>
+                <a:cs typeface="Times New Roman" panose="02020603050405020304" pitchFamily="18" charset="0"/>
+              </a:rPr>
+              <a:t> Model provided with 1 to 64 examples + test example.</a:t>
+            </a:r>
+            <a:endParaRPr lang="he-IL" b="1" dirty="0">
               <a:latin typeface="Times New Roman" panose="02020603050405020304" pitchFamily="18" charset="0"/>
               <a:cs typeface="Times New Roman" panose="02020603050405020304" pitchFamily="18" charset="0"/>
             </a:endParaRPr>
@@ -16523,16 +18058,6 @@
               <a:t> OPT, GPT-J, GPT-Neo.</a:t>
             </a:r>
             <a:endParaRPr lang="en-US" b="1" dirty="0">
-              <a:latin typeface="Times New Roman" panose="02020603050405020304" pitchFamily="18" charset="0"/>
-              <a:cs typeface="Times New Roman" panose="02020603050405020304" pitchFamily="18" charset="0"/>
-            </a:endParaRPr>
-          </a:p>
-          <a:p>
-            <a:pPr lvl="1"/>
-            <a:endParaRPr lang="en-IL" b="1" dirty="0">
-              <a:solidFill>
-                <a:schemeClr val="tx1"/>
-              </a:solidFill>
               <a:latin typeface="Times New Roman" panose="02020603050405020304" pitchFamily="18" charset="0"/>
               <a:cs typeface="Times New Roman" panose="02020603050405020304" pitchFamily="18" charset="0"/>
             </a:endParaRPr>
@@ -17312,7 +18837,7 @@
           <p:nvPr/>
         </p:nvPicPr>
         <p:blipFill>
-          <a:blip r:embed="rId2"/>
+          <a:blip r:embed="rId3"/>
           <a:stretch>
             <a:fillRect/>
           </a:stretch>
@@ -18116,7 +19641,7 @@
                 <a:avLst/>
               </a:prstGeom>
               <a:blipFill>
-                <a:blip r:embed="rId2"/>
+                <a:blip r:embed="rId3"/>
                 <a:stretch>
                   <a:fillRect l="-615" t="-978" r="-246"/>
                 </a:stretch>
@@ -19180,7 +20705,7 @@
                 <a:avLst/>
               </a:prstGeom>
               <a:blipFill>
-                <a:blip r:embed="rId2"/>
+                <a:blip r:embed="rId3"/>
                 <a:stretch>
                   <a:fillRect l="-661" t="-978"/>
                 </a:stretch>
@@ -20146,7 +21671,7 @@
                 <a:avLst/>
               </a:prstGeom>
               <a:blipFill>
-                <a:blip r:embed="rId2"/>
+                <a:blip r:embed="rId3"/>
                 <a:stretch>
                   <a:fillRect l="-661" t="-978" b="-1467"/>
                 </a:stretch>
@@ -21000,7 +22525,7 @@
                 <a:avLst/>
               </a:prstGeom>
               <a:blipFill>
-                <a:blip r:embed="rId2"/>
+                <a:blip r:embed="rId3"/>
                 <a:stretch>
                   <a:fillRect l="-615" t="-978"/>
                 </a:stretch>
@@ -21780,7 +23305,7 @@
                 <a:avLst/>
               </a:prstGeom>
               <a:blipFill>
-                <a:blip r:embed="rId2"/>
+                <a:blip r:embed="rId3"/>
                 <a:stretch>
                   <a:fillRect l="-615" t="-978"/>
                 </a:stretch>
@@ -21816,7 +23341,7 @@
           <p:nvPr/>
         </p:nvPicPr>
         <p:blipFill>
-          <a:blip r:embed="rId3"/>
+          <a:blip r:embed="rId4"/>
           <a:srcRect t="3293"/>
           <a:stretch/>
         </p:blipFill>
@@ -22503,7 +24028,7 @@
                 <a:avLst/>
               </a:prstGeom>
               <a:blipFill>
-                <a:blip r:embed="rId2"/>
+                <a:blip r:embed="rId3"/>
                 <a:stretch>
                   <a:fillRect l="-615" t="-887" r="-492"/>
                 </a:stretch>
@@ -23728,7 +25253,7 @@
               <a:rPr lang="en-US" sz="3200" dirty="0">
                 <a:latin typeface="Times New Roman" panose="02020603050405020304" pitchFamily="18" charset="0"/>
                 <a:cs typeface="Times New Roman" panose="02020603050405020304" pitchFamily="18" charset="0"/>
-                <a:hlinkClick r:id="rId2"/>
+                <a:hlinkClick r:id="rId3"/>
               </a:rPr>
               <a:t>ch04_presentation.ipynb</a:t>
             </a:r>

--- a/presentation/Lecture Slides.pptx
+++ b/presentation/Lecture Slides.pptx
@@ -5175,7 +5175,7 @@
           <a:bodyPr/>
           <a:lstStyle/>
           <a:p>
-            <a:pPr marL="0" algn="r" defTabSz="914400" rtl="1" eaLnBrk="1" latinLnBrk="0" hangingPunct="1"/>
+            <a:pPr marL="0" algn="l" defTabSz="914400" rtl="0" eaLnBrk="1" latinLnBrk="0" hangingPunct="1"/>
             <a:endParaRPr lang="en-IL" dirty="0"/>
           </a:p>
         </p:txBody>
@@ -19982,6 +19982,41 @@
                                   </p:childTnLst>
                                 </p:cTn>
                               </p:par>
+                              <p:par>
+                                <p:cTn id="57" presetID="10" presetClass="exit" presetSubtype="0" fill="hold" grpId="1" nodeType="withEffect">
+                                  <p:stCondLst>
+                                    <p:cond delay="0"/>
+                                  </p:stCondLst>
+                                  <p:childTnLst>
+                                    <p:animEffect transition="out" filter="fade">
+                                      <p:cBhvr>
+                                        <p:cTn id="58" dur="250"/>
+                                        <p:tgtEl>
+                                          <p:spTgt spid="11"/>
+                                        </p:tgtEl>
+                                      </p:cBhvr>
+                                    </p:animEffect>
+                                    <p:set>
+                                      <p:cBhvr>
+                                        <p:cTn id="59" dur="1" fill="hold">
+                                          <p:stCondLst>
+                                            <p:cond delay="249"/>
+                                          </p:stCondLst>
+                                        </p:cTn>
+                                        <p:tgtEl>
+                                          <p:spTgt spid="11"/>
+                                        </p:tgtEl>
+                                        <p:attrNameLst>
+                                          <p:attrName>style.visibility</p:attrName>
+                                        </p:attrNameLst>
+                                      </p:cBhvr>
+                                      <p:to>
+                                        <p:strVal val="hidden"/>
+                                      </p:to>
+                                    </p:set>
+                                  </p:childTnLst>
+                                </p:cTn>
+                              </p:par>
                             </p:childTnLst>
                           </p:cTn>
                         </p:par>
@@ -20016,6 +20051,7 @@
       <p:bldP spid="10" grpId="1" animBg="1"/>
       <p:bldP spid="10" grpId="2" animBg="1"/>
       <p:bldP spid="11" grpId="0" animBg="1"/>
+      <p:bldP spid="11" grpId="1" animBg="1"/>
       <p:bldP spid="12" grpId="0" animBg="1"/>
       <p:bldP spid="12" grpId="1" animBg="1"/>
     </p:bldLst>
@@ -20207,7 +20243,7 @@
         <p:spPr>
           <a:xfrm>
             <a:off x="1371600" y="5724143"/>
-            <a:ext cx="9601200" cy="1010485"/>
+            <a:ext cx="10174940" cy="1010485"/>
           </a:xfrm>
           <a:prstGeom prst="rect">
             <a:avLst/>
@@ -20429,7 +20465,27 @@
                 <a:latin typeface="Times New Roman" panose="02020603050405020304" pitchFamily="18" charset="0"/>
                 <a:cs typeface="Times New Roman" panose="02020603050405020304" pitchFamily="18" charset="0"/>
               </a:rPr>
-              <a:t>Likely due to limited book data in pre-training (177GB vs 2TB for competitors).</a:t>
+              <a:t>Potentially due to limited book and </a:t>
+            </a:r>
+            <a:r>
+              <a:rPr lang="en-US" dirty="0" err="1">
+                <a:solidFill>
+                  <a:schemeClr val="tx1"/>
+                </a:solidFill>
+                <a:latin typeface="Times New Roman" panose="02020603050405020304" pitchFamily="18" charset="0"/>
+                <a:cs typeface="Times New Roman" panose="02020603050405020304" pitchFamily="18" charset="0"/>
+              </a:rPr>
+              <a:t>ArXiv</a:t>
+            </a:r>
+            <a:r>
+              <a:rPr lang="en-US" dirty="0">
+                <a:solidFill>
+                  <a:schemeClr val="tx1"/>
+                </a:solidFill>
+                <a:latin typeface="Times New Roman" panose="02020603050405020304" pitchFamily="18" charset="0"/>
+                <a:cs typeface="Times New Roman" panose="02020603050405020304" pitchFamily="18" charset="0"/>
+              </a:rPr>
+              <a:t> data in training (177GB vs 2TB for competitors).</a:t>
             </a:r>
           </a:p>
         </p:txBody>
@@ -25264,12 +25320,12 @@
         </p:spPr>
         <p:txBody>
           <a:bodyPr>
-            <a:normAutofit fontScale="92500" lnSpcReduction="20000"/>
+            <a:noAutofit/>
           </a:bodyPr>
           <a:lstStyle/>
           <a:p>
             <a:r>
-              <a:rPr lang="en-US" sz="2400" b="0" i="0" dirty="0">
+              <a:rPr lang="en-US" b="0" i="0" dirty="0">
                 <a:solidFill>
                   <a:schemeClr val="tx1"/>
                 </a:solidFill>
@@ -25279,9 +25335,7 @@
               </a:rPr>
               <a:t>Evaluation Methodology</a:t>
             </a:r>
-          </a:p>
-          <a:p>
-            <a:endParaRPr lang="en-US" sz="1100" dirty="0">
+            <a:endParaRPr lang="en-US" dirty="0">
               <a:solidFill>
                 <a:schemeClr val="tx1"/>
               </a:solidFill>
@@ -25289,7 +25343,7 @@
           </a:p>
           <a:p>
             <a:r>
-              <a:rPr lang="en-US" sz="2400" dirty="0">
+              <a:rPr lang="en-US" dirty="0">
                 <a:solidFill>
                   <a:schemeClr val="tx1"/>
                 </a:solidFill>
@@ -25300,7 +25354,7 @@
           <a:p>
             <a:pPr lvl="1"/>
             <a:r>
-              <a:rPr lang="en-US" sz="1900" dirty="0">
+              <a:rPr lang="en-US" sz="1600" dirty="0">
                 <a:solidFill>
                   <a:schemeClr val="tx1"/>
                 </a:solidFill>
@@ -25311,7 +25365,7 @@
           <a:p>
             <a:pPr lvl="1"/>
             <a:r>
-              <a:rPr lang="en-US" sz="1900" dirty="0">
+              <a:rPr lang="en-US" sz="1600" dirty="0">
                 <a:solidFill>
                   <a:schemeClr val="tx1"/>
                 </a:solidFill>
@@ -25322,7 +25376,7 @@
           <a:p>
             <a:pPr lvl="1"/>
             <a:r>
-              <a:rPr lang="en-US" sz="1900" dirty="0">
+              <a:rPr lang="en-US" sz="1600" dirty="0">
                 <a:solidFill>
                   <a:schemeClr val="tx1"/>
                 </a:solidFill>
@@ -25333,7 +25387,7 @@
           <a:p>
             <a:pPr lvl="1"/>
             <a:r>
-              <a:rPr lang="en-US" sz="1900" dirty="0">
+              <a:rPr lang="en-US" sz="1600" dirty="0">
                 <a:solidFill>
                   <a:schemeClr val="tx1"/>
                 </a:solidFill>
@@ -25344,7 +25398,7 @@
           <a:p>
             <a:pPr lvl="1"/>
             <a:r>
-              <a:rPr lang="en-US" sz="1900" dirty="0">
+              <a:rPr lang="en-US" sz="1600" dirty="0">
                 <a:solidFill>
                   <a:schemeClr val="tx1"/>
                 </a:solidFill>
@@ -25355,14 +25409,14 @@
           <a:p>
             <a:pPr lvl="1"/>
             <a:r>
-              <a:rPr lang="en-US" sz="1900" dirty="0">
+              <a:rPr lang="en-US" sz="1600" dirty="0">
                 <a:solidFill>
                   <a:schemeClr val="tx1"/>
                 </a:solidFill>
               </a:rPr>
               <a:t>MMLU</a:t>
             </a:r>
-            <a:endParaRPr lang="he-IL" sz="1900" dirty="0">
+            <a:endParaRPr lang="he-IL" sz="1600" dirty="0">
               <a:solidFill>
                 <a:schemeClr val="tx1"/>
               </a:solidFill>
@@ -25371,7 +25425,7 @@
           <a:p>
             <a:pPr lvl="1"/>
             <a:r>
-              <a:rPr lang="en-US" sz="1900" dirty="0">
+              <a:rPr lang="en-US" sz="1600" dirty="0">
                 <a:solidFill>
                   <a:schemeClr val="tx1"/>
                 </a:solidFill>
@@ -25380,15 +25434,8 @@
             </a:r>
           </a:p>
           <a:p>
-            <a:endParaRPr lang="en-US" sz="1200" dirty="0">
-              <a:solidFill>
-                <a:schemeClr val="tx1"/>
-              </a:solidFill>
-            </a:endParaRPr>
-          </a:p>
-          <a:p>
-            <a:r>
-              <a:rPr lang="en-US" sz="2400" dirty="0">
+            <a:r>
+              <a:rPr lang="en-US" dirty="0">
                 <a:solidFill>
                   <a:schemeClr val="tx1"/>
                 </a:solidFill>
@@ -25399,7 +25446,7 @@
           <a:p>
             <a:pPr lvl="1"/>
             <a:r>
-              <a:rPr lang="en-US" sz="1800" dirty="0">
+              <a:rPr lang="en-US" sz="1600" dirty="0">
                 <a:solidFill>
                   <a:schemeClr val="tx1"/>
                 </a:solidFill>
@@ -25410,7 +25457,7 @@
           <a:p>
             <a:pPr lvl="1"/>
             <a:r>
-              <a:rPr lang="en-US" sz="1800" b="0" i="0" dirty="0">
+              <a:rPr lang="en-US" sz="1600" b="0" i="0" dirty="0">
                 <a:solidFill>
                   <a:schemeClr val="tx1"/>
                 </a:solidFill>
@@ -25424,7 +25471,7 @@
           <a:p>
             <a:pPr lvl="1"/>
             <a:r>
-              <a:rPr lang="en-US" sz="1800" dirty="0">
+              <a:rPr lang="en-US" sz="1600" dirty="0">
                 <a:solidFill>
                   <a:schemeClr val="tx1"/>
                 </a:solidFill>
@@ -25433,39 +25480,27 @@
             </a:r>
           </a:p>
           <a:p>
-            <a:endParaRPr lang="en-US" sz="1200" dirty="0">
-              <a:solidFill>
-                <a:schemeClr val="tx1"/>
-              </a:solidFill>
-            </a:endParaRPr>
-          </a:p>
-          <a:p>
-            <a:r>
-              <a:rPr lang="en-US" sz="2400" dirty="0">
+            <a:r>
+              <a:rPr lang="en-US" dirty="0">
                 <a:solidFill>
                   <a:schemeClr val="tx1"/>
                 </a:solidFill>
               </a:rPr>
               <a:t>Conclusions</a:t>
             </a:r>
-            <a:endParaRPr lang="en-US" sz="2400" b="0" i="0" dirty="0">
-              <a:solidFill>
-                <a:schemeClr val="tx1"/>
-              </a:solidFill>
-              <a:effectLst/>
-              <a:latin typeface="Times New Roman" panose="02020603050405020304" pitchFamily="18" charset="0"/>
-              <a:cs typeface="Times New Roman" panose="02020603050405020304" pitchFamily="18" charset="0"/>
-            </a:endParaRPr>
-          </a:p>
-          <a:p>
-            <a:endParaRPr lang="en-US" sz="2400" b="0" i="0" dirty="0">
-              <a:solidFill>
-                <a:schemeClr val="tx1"/>
-              </a:solidFill>
-              <a:effectLst/>
-              <a:latin typeface="Times New Roman" panose="02020603050405020304" pitchFamily="18" charset="0"/>
-              <a:cs typeface="Times New Roman" panose="02020603050405020304" pitchFamily="18" charset="0"/>
-            </a:endParaRPr>
+          </a:p>
+          <a:p>
+            <a:r>
+              <a:rPr lang="en-US" b="0" i="0" dirty="0">
+                <a:solidFill>
+                  <a:schemeClr val="tx1"/>
+                </a:solidFill>
+                <a:effectLst/>
+                <a:latin typeface="Times New Roman" panose="02020603050405020304" pitchFamily="18" charset="0"/>
+                <a:cs typeface="Times New Roman" panose="02020603050405020304" pitchFamily="18" charset="0"/>
+              </a:rPr>
+              <a:t>Showcase coding the GPT model and generating text</a:t>
+            </a:r>
           </a:p>
         </p:txBody>
       </p:sp>
@@ -26208,7 +26243,7 @@
                 <a:latin typeface="Times New Roman" panose="02020603050405020304" pitchFamily="18" charset="0"/>
                 <a:cs typeface="Times New Roman" panose="02020603050405020304" pitchFamily="18" charset="0"/>
               </a:rPr>
-              <a:t> in both "Truthful" and "Truthful &amp; Informative”</a:t>
+              <a:t> in both “Truthful” and “Truthful &amp; Informative”</a:t>
             </a:r>
           </a:p>
           <a:p>
@@ -26486,33 +26521,15 @@
                                   </p:childTnLst>
                                 </p:cTn>
                               </p:par>
-                            </p:childTnLst>
-                          </p:cTn>
-                        </p:par>
-                      </p:childTnLst>
-                    </p:cTn>
-                  </p:par>
-                  <p:par>
-                    <p:cTn id="8" fill="hold">
-                      <p:stCondLst>
-                        <p:cond delay="indefinite"/>
-                      </p:stCondLst>
-                      <p:childTnLst>
-                        <p:par>
-                          <p:cTn id="9" fill="hold">
-                            <p:stCondLst>
-                              <p:cond delay="0"/>
-                            </p:stCondLst>
-                            <p:childTnLst>
                               <p:par>
-                                <p:cTn id="10" presetID="10" presetClass="entr" presetSubtype="0" fill="hold" nodeType="clickEffect">
+                                <p:cTn id="8" presetID="10" presetClass="entr" presetSubtype="0" fill="hold" nodeType="withEffect">
                                   <p:stCondLst>
                                     <p:cond delay="0"/>
                                   </p:stCondLst>
                                   <p:childTnLst>
                                     <p:set>
                                       <p:cBhvr>
-                                        <p:cTn id="11" dur="1" fill="hold">
+                                        <p:cTn id="9" dur="1" fill="hold">
                                           <p:stCondLst>
                                             <p:cond delay="0"/>
                                           </p:stCondLst>
@@ -26534,7 +26551,7 @@
                                     </p:set>
                                     <p:animEffect transition="in" filter="fade">
                                       <p:cBhvr>
-                                        <p:cTn id="12" dur="250"/>
+                                        <p:cTn id="10" dur="250"/>
                                         <p:tgtEl>
                                           <p:spTgt spid="3">
                                             <p:txEl>
@@ -26547,39 +26564,25 @@
                                   </p:childTnLst>
                                 </p:cTn>
                               </p:par>
-                            </p:childTnLst>
-                          </p:cTn>
-                        </p:par>
-                      </p:childTnLst>
-                    </p:cTn>
-                  </p:par>
-                  <p:par>
-                    <p:cTn id="13" fill="hold">
-                      <p:stCondLst>
-                        <p:cond delay="indefinite"/>
-                      </p:stCondLst>
-                      <p:childTnLst>
-                        <p:par>
-                          <p:cTn id="14" fill="hold">
-                            <p:stCondLst>
-                              <p:cond delay="0"/>
-                            </p:stCondLst>
-                            <p:childTnLst>
                               <p:par>
-                                <p:cTn id="15" presetID="10" presetClass="entr" presetSubtype="0" fill="hold" nodeType="clickEffect">
+                                <p:cTn id="11" presetID="10" presetClass="entr" presetSubtype="0" fill="hold" nodeType="withEffect">
                                   <p:stCondLst>
                                     <p:cond delay="0"/>
                                   </p:stCondLst>
                                   <p:childTnLst>
                                     <p:set>
                                       <p:cBhvr>
-                                        <p:cTn id="16" dur="1" fill="hold">
+                                        <p:cTn id="12" dur="1" fill="hold">
                                           <p:stCondLst>
                                             <p:cond delay="0"/>
                                           </p:stCondLst>
                                         </p:cTn>
                                         <p:tgtEl>
-                                          <p:spTgt spid="4"/>
+                                          <p:spTgt spid="3">
+                                            <p:txEl>
+                                              <p:pRg st="2" end="2"/>
+                                            </p:txEl>
+                                          </p:spTgt>
                                         </p:tgtEl>
                                         <p:attrNameLst>
                                           <p:attrName>style.visibility</p:attrName>
@@ -26591,52 +26594,120 @@
                                     </p:set>
                                     <p:animEffect transition="in" filter="fade">
                                       <p:cBhvr>
-                                        <p:cTn id="17" dur="250"/>
-                                        <p:tgtEl>
-                                          <p:spTgt spid="4"/>
+                                        <p:cTn id="13" dur="250"/>
+                                        <p:tgtEl>
+                                          <p:spTgt spid="3">
+                                            <p:txEl>
+                                              <p:pRg st="2" end="2"/>
+                                            </p:txEl>
+                                          </p:spTgt>
                                         </p:tgtEl>
                                       </p:cBhvr>
                                     </p:animEffect>
                                   </p:childTnLst>
                                 </p:cTn>
                               </p:par>
-                            </p:childTnLst>
-                          </p:cTn>
-                        </p:par>
-                      </p:childTnLst>
-                    </p:cTn>
-                  </p:par>
-                  <p:par>
-                    <p:cTn id="18" fill="hold">
-                      <p:stCondLst>
-                        <p:cond delay="indefinite"/>
-                      </p:stCondLst>
-                      <p:childTnLst>
-                        <p:par>
-                          <p:cTn id="19" fill="hold">
-                            <p:stCondLst>
-                              <p:cond delay="0"/>
-                            </p:stCondLst>
-                            <p:childTnLst>
                               <p:par>
-                                <p:cTn id="20" presetID="10" presetClass="entr" presetSubtype="0" fill="hold" nodeType="clickEffect">
+                                <p:cTn id="14" presetID="10" presetClass="entr" presetSubtype="0" fill="hold" nodeType="withEffect">
                                   <p:stCondLst>
                                     <p:cond delay="0"/>
                                   </p:stCondLst>
                                   <p:childTnLst>
                                     <p:set>
                                       <p:cBhvr>
+                                        <p:cTn id="15" dur="1" fill="hold">
+                                          <p:stCondLst>
+                                            <p:cond delay="0"/>
+                                          </p:stCondLst>
+                                        </p:cTn>
+                                        <p:tgtEl>
+                                          <p:spTgt spid="3">
+                                            <p:txEl>
+                                              <p:pRg st="3" end="3"/>
+                                            </p:txEl>
+                                          </p:spTgt>
+                                        </p:tgtEl>
+                                        <p:attrNameLst>
+                                          <p:attrName>style.visibility</p:attrName>
+                                        </p:attrNameLst>
+                                      </p:cBhvr>
+                                      <p:to>
+                                        <p:strVal val="visible"/>
+                                      </p:to>
+                                    </p:set>
+                                    <p:animEffect transition="in" filter="fade">
+                                      <p:cBhvr>
+                                        <p:cTn id="16" dur="250"/>
+                                        <p:tgtEl>
+                                          <p:spTgt spid="3">
+                                            <p:txEl>
+                                              <p:pRg st="3" end="3"/>
+                                            </p:txEl>
+                                          </p:spTgt>
+                                        </p:tgtEl>
+                                      </p:cBhvr>
+                                    </p:animEffect>
+                                  </p:childTnLst>
+                                </p:cTn>
+                              </p:par>
+                              <p:par>
+                                <p:cTn id="17" presetID="10" presetClass="entr" presetSubtype="0" fill="hold" nodeType="withEffect">
+                                  <p:stCondLst>
+                                    <p:cond delay="0"/>
+                                  </p:stCondLst>
+                                  <p:childTnLst>
+                                    <p:set>
+                                      <p:cBhvr>
+                                        <p:cTn id="18" dur="1" fill="hold">
+                                          <p:stCondLst>
+                                            <p:cond delay="0"/>
+                                          </p:stCondLst>
+                                        </p:cTn>
+                                        <p:tgtEl>
+                                          <p:spTgt spid="3">
+                                            <p:txEl>
+                                              <p:pRg st="4" end="4"/>
+                                            </p:txEl>
+                                          </p:spTgt>
+                                        </p:tgtEl>
+                                        <p:attrNameLst>
+                                          <p:attrName>style.visibility</p:attrName>
+                                        </p:attrNameLst>
+                                      </p:cBhvr>
+                                      <p:to>
+                                        <p:strVal val="visible"/>
+                                      </p:to>
+                                    </p:set>
+                                    <p:animEffect transition="in" filter="fade">
+                                      <p:cBhvr>
+                                        <p:cTn id="19" dur="250"/>
+                                        <p:tgtEl>
+                                          <p:spTgt spid="3">
+                                            <p:txEl>
+                                              <p:pRg st="4" end="4"/>
+                                            </p:txEl>
+                                          </p:spTgt>
+                                        </p:tgtEl>
+                                      </p:cBhvr>
+                                    </p:animEffect>
+                                  </p:childTnLst>
+                                </p:cTn>
+                              </p:par>
+                              <p:par>
+                                <p:cTn id="20" presetID="10" presetClass="entr" presetSubtype="0" fill="hold" nodeType="withEffect">
+                                  <p:stCondLst>
+                                    <p:cond delay="0"/>
+                                  </p:stCondLst>
+                                  <p:childTnLst>
+                                    <p:set>
+                                      <p:cBhvr>
                                         <p:cTn id="21" dur="1" fill="hold">
                                           <p:stCondLst>
                                             <p:cond delay="0"/>
                                           </p:stCondLst>
                                         </p:cTn>
                                         <p:tgtEl>
-                                          <p:spTgt spid="3">
-                                            <p:txEl>
-                                              <p:pRg st="2" end="2"/>
-                                            </p:txEl>
-                                          </p:spTgt>
+                                          <p:spTgt spid="4"/>
                                         </p:tgtEl>
                                         <p:attrNameLst>
                                           <p:attrName>style.visibility</p:attrName>
@@ -26648,13 +26719,9 @@
                                     </p:set>
                                     <p:animEffect transition="in" filter="fade">
                                       <p:cBhvr>
-                                        <p:cTn id="22" dur="250"/>
-                                        <p:tgtEl>
-                                          <p:spTgt spid="3">
-                                            <p:txEl>
-                                              <p:pRg st="2" end="2"/>
-                                            </p:txEl>
-                                          </p:spTgt>
+                                        <p:cTn id="22" dur="500"/>
+                                        <p:tgtEl>
+                                          <p:spTgt spid="4"/>
                                         </p:tgtEl>
                                       </p:cBhvr>
                                     </p:animEffect>
@@ -26680,7 +26747,7 @@
                             </p:stCondLst>
                             <p:childTnLst>
                               <p:par>
-                                <p:cTn id="25" presetID="10" presetClass="entr" presetSubtype="0" fill="hold" nodeType="clickEffect">
+                                <p:cTn id="25" presetID="10" presetClass="entr" presetSubtype="0" fill="hold" grpId="0" nodeType="clickEffect">
                                   <p:stCondLst>
                                     <p:cond delay="0"/>
                                   </p:stCondLst>
@@ -26693,11 +26760,7 @@
                                           </p:stCondLst>
                                         </p:cTn>
                                         <p:tgtEl>
-                                          <p:spTgt spid="3">
-                                            <p:txEl>
-                                              <p:pRg st="3" end="3"/>
-                                            </p:txEl>
-                                          </p:spTgt>
+                                          <p:spTgt spid="5"/>
                                         </p:tgtEl>
                                         <p:attrNameLst>
                                           <p:attrName>style.visibility</p:attrName>
@@ -26710,45 +26773,6 @@
                                     <p:animEffect transition="in" filter="fade">
                                       <p:cBhvr>
                                         <p:cTn id="27" dur="250"/>
-                                        <p:tgtEl>
-                                          <p:spTgt spid="3">
-                                            <p:txEl>
-                                              <p:pRg st="3" end="3"/>
-                                            </p:txEl>
-                                          </p:spTgt>
-                                        </p:tgtEl>
-                                      </p:cBhvr>
-                                    </p:animEffect>
-                                  </p:childTnLst>
-                                </p:cTn>
-                              </p:par>
-                              <p:par>
-                                <p:cTn id="28" presetID="10" presetClass="entr" presetSubtype="0" fill="hold" grpId="0" nodeType="withEffect">
-                                  <p:stCondLst>
-                                    <p:cond delay="0"/>
-                                  </p:stCondLst>
-                                  <p:childTnLst>
-                                    <p:set>
-                                      <p:cBhvr>
-                                        <p:cTn id="29" dur="1" fill="hold">
-                                          <p:stCondLst>
-                                            <p:cond delay="0"/>
-                                          </p:stCondLst>
-                                        </p:cTn>
-                                        <p:tgtEl>
-                                          <p:spTgt spid="5"/>
-                                        </p:tgtEl>
-                                        <p:attrNameLst>
-                                          <p:attrName>style.visibility</p:attrName>
-                                        </p:attrNameLst>
-                                      </p:cBhvr>
-                                      <p:to>
-                                        <p:strVal val="visible"/>
-                                      </p:to>
-                                    </p:set>
-                                    <p:animEffect transition="in" filter="fade">
-                                      <p:cBhvr>
-                                        <p:cTn id="30" dur="250"/>
                                         <p:tgtEl>
                                           <p:spTgt spid="5"/>
                                         </p:tgtEl>
@@ -26764,25 +26788,68 @@
                     </p:cTn>
                   </p:par>
                   <p:par>
-                    <p:cTn id="31" fill="hold">
+                    <p:cTn id="28" fill="hold">
                       <p:stCondLst>
                         <p:cond delay="indefinite"/>
                       </p:stCondLst>
                       <p:childTnLst>
                         <p:par>
-                          <p:cTn id="32" fill="hold">
+                          <p:cTn id="29" fill="hold">
                             <p:stCondLst>
                               <p:cond delay="0"/>
                             </p:stCondLst>
                             <p:childTnLst>
                               <p:par>
-                                <p:cTn id="33" presetID="10" presetClass="entr" presetSubtype="0" fill="hold" nodeType="clickEffect">
+                                <p:cTn id="30" presetID="10" presetClass="entr" presetSubtype="0" fill="hold" nodeType="clickEffect">
                                   <p:stCondLst>
                                     <p:cond delay="0"/>
                                   </p:stCondLst>
                                   <p:childTnLst>
                                     <p:set>
                                       <p:cBhvr>
+                                        <p:cTn id="31" dur="1" fill="hold">
+                                          <p:stCondLst>
+                                            <p:cond delay="0"/>
+                                          </p:stCondLst>
+                                        </p:cTn>
+                                        <p:tgtEl>
+                                          <p:spTgt spid="3">
+                                            <p:txEl>
+                                              <p:pRg st="5" end="5"/>
+                                            </p:txEl>
+                                          </p:spTgt>
+                                        </p:tgtEl>
+                                        <p:attrNameLst>
+                                          <p:attrName>style.visibility</p:attrName>
+                                        </p:attrNameLst>
+                                      </p:cBhvr>
+                                      <p:to>
+                                        <p:strVal val="visible"/>
+                                      </p:to>
+                                    </p:set>
+                                    <p:animEffect transition="in" filter="fade">
+                                      <p:cBhvr>
+                                        <p:cTn id="32" dur="250"/>
+                                        <p:tgtEl>
+                                          <p:spTgt spid="3">
+                                            <p:txEl>
+                                              <p:pRg st="5" end="5"/>
+                                            </p:txEl>
+                                          </p:spTgt>
+                                        </p:tgtEl>
+                                      </p:cBhvr>
+                                    </p:animEffect>
+                                  </p:childTnLst>
+                                </p:cTn>
+                              </p:par>
+                              <p:par>
+                                <p:cTn id="33" presetID="10" presetClass="entr" presetSubtype="0" fill="hold" nodeType="withEffect">
+                                  <p:stCondLst>
+                                    <p:cond delay="0"/>
+                                  </p:stCondLst>
+                                  <p:childTnLst>
+                                    <p:set>
+                                      <p:cBhvr>
                                         <p:cTn id="34" dur="1" fill="hold">
                                           <p:stCondLst>
                                             <p:cond delay="0"/>
@@ -26791,7 +26858,7 @@
                                         <p:tgtEl>
                                           <p:spTgt spid="3">
                                             <p:txEl>
-                                              <p:pRg st="4" end="4"/>
+                                              <p:pRg st="6" end="6"/>
                                             </p:txEl>
                                           </p:spTgt>
                                         </p:tgtEl>
@@ -26809,7 +26876,7 @@
                                         <p:tgtEl>
                                           <p:spTgt spid="3">
                                             <p:txEl>
-                                              <p:pRg st="4" end="4"/>
+                                              <p:pRg st="6" end="6"/>
                                             </p:txEl>
                                           </p:spTgt>
                                         </p:tgtEl>
@@ -26819,67 +26886,14 @@
                                 </p:cTn>
                               </p:par>
                               <p:par>
-                                <p:cTn id="36" presetID="10" presetClass="exit" presetSubtype="0" fill="hold" grpId="1" nodeType="withEffect">
-                                  <p:stCondLst>
-                                    <p:cond delay="0"/>
-                                  </p:stCondLst>
-                                  <p:childTnLst>
-                                    <p:animEffect transition="out" filter="fade">
-                                      <p:cBhvr>
-                                        <p:cTn id="37" dur="250"/>
-                                        <p:tgtEl>
-                                          <p:spTgt spid="5"/>
-                                        </p:tgtEl>
-                                      </p:cBhvr>
-                                    </p:animEffect>
-                                    <p:set>
-                                      <p:cBhvr>
-                                        <p:cTn id="38" dur="1" fill="hold">
-                                          <p:stCondLst>
-                                            <p:cond delay="249"/>
-                                          </p:stCondLst>
-                                        </p:cTn>
-                                        <p:tgtEl>
-                                          <p:spTgt spid="5"/>
-                                        </p:tgtEl>
-                                        <p:attrNameLst>
-                                          <p:attrName>style.visibility</p:attrName>
-                                        </p:attrNameLst>
-                                      </p:cBhvr>
-                                      <p:to>
-                                        <p:strVal val="hidden"/>
-                                      </p:to>
-                                    </p:set>
-                                  </p:childTnLst>
-                                </p:cTn>
-                              </p:par>
-                            </p:childTnLst>
-                          </p:cTn>
-                        </p:par>
-                      </p:childTnLst>
-                    </p:cTn>
-                  </p:par>
-                  <p:par>
-                    <p:cTn id="39" fill="hold">
-                      <p:stCondLst>
-                        <p:cond delay="indefinite"/>
-                      </p:stCondLst>
-                      <p:childTnLst>
-                        <p:par>
-                          <p:cTn id="40" fill="hold">
-                            <p:stCondLst>
-                              <p:cond delay="0"/>
-                            </p:stCondLst>
-                            <p:childTnLst>
-                              <p:par>
-                                <p:cTn id="41" presetID="10" presetClass="entr" presetSubtype="0" fill="hold" nodeType="clickEffect">
+                                <p:cTn id="36" presetID="10" presetClass="entr" presetSubtype="0" fill="hold" nodeType="withEffect">
                                   <p:stCondLst>
                                     <p:cond delay="0"/>
                                   </p:stCondLst>
                                   <p:childTnLst>
                                     <p:set>
                                       <p:cBhvr>
-                                        <p:cTn id="42" dur="1" fill="hold">
+                                        <p:cTn id="37" dur="1" fill="hold">
                                           <p:stCondLst>
                                             <p:cond delay="0"/>
                                           </p:stCondLst>
@@ -26887,7 +26901,7 @@
                                         <p:tgtEl>
                                           <p:spTgt spid="3">
                                             <p:txEl>
-                                              <p:pRg st="5" end="5"/>
+                                              <p:pRg st="7" end="7"/>
                                             </p:txEl>
                                           </p:spTgt>
                                         </p:tgtEl>
@@ -26901,11 +26915,140 @@
                                     </p:set>
                                     <p:animEffect transition="in" filter="fade">
                                       <p:cBhvr>
-                                        <p:cTn id="43" dur="250"/>
+                                        <p:cTn id="38" dur="250"/>
                                         <p:tgtEl>
                                           <p:spTgt spid="3">
                                             <p:txEl>
-                                              <p:pRg st="5" end="5"/>
+                                              <p:pRg st="7" end="7"/>
+                                            </p:txEl>
+                                          </p:spTgt>
+                                        </p:tgtEl>
+                                      </p:cBhvr>
+                                    </p:animEffect>
+                                  </p:childTnLst>
+                                </p:cTn>
+                              </p:par>
+                              <p:par>
+                                <p:cTn id="39" presetID="10" presetClass="entr" presetSubtype="0" fill="hold" nodeType="withEffect">
+                                  <p:stCondLst>
+                                    <p:cond delay="0"/>
+                                  </p:stCondLst>
+                                  <p:childTnLst>
+                                    <p:set>
+                                      <p:cBhvr>
+                                        <p:cTn id="40" dur="1" fill="hold">
+                                          <p:stCondLst>
+                                            <p:cond delay="0"/>
+                                          </p:stCondLst>
+                                        </p:cTn>
+                                        <p:tgtEl>
+                                          <p:spTgt spid="3">
+                                            <p:txEl>
+                                              <p:pRg st="8" end="8"/>
+                                            </p:txEl>
+                                          </p:spTgt>
+                                        </p:tgtEl>
+                                        <p:attrNameLst>
+                                          <p:attrName>style.visibility</p:attrName>
+                                        </p:attrNameLst>
+                                      </p:cBhvr>
+                                      <p:to>
+                                        <p:strVal val="visible"/>
+                                      </p:to>
+                                    </p:set>
+                                    <p:animEffect transition="in" filter="fade">
+                                      <p:cBhvr>
+                                        <p:cTn id="41" dur="250"/>
+                                        <p:tgtEl>
+                                          <p:spTgt spid="3">
+                                            <p:txEl>
+                                              <p:pRg st="8" end="8"/>
+                                            </p:txEl>
+                                          </p:spTgt>
+                                        </p:tgtEl>
+                                      </p:cBhvr>
+                                    </p:animEffect>
+                                  </p:childTnLst>
+                                </p:cTn>
+                              </p:par>
+                              <p:par>
+                                <p:cTn id="42" presetID="10" presetClass="entr" presetSubtype="0" fill="hold" nodeType="withEffect">
+                                  <p:stCondLst>
+                                    <p:cond delay="0"/>
+                                  </p:stCondLst>
+                                  <p:childTnLst>
+                                    <p:set>
+                                      <p:cBhvr>
+                                        <p:cTn id="43" dur="1" fill="hold">
+                                          <p:stCondLst>
+                                            <p:cond delay="0"/>
+                                          </p:stCondLst>
+                                        </p:cTn>
+                                        <p:tgtEl>
+                                          <p:spTgt spid="3">
+                                            <p:txEl>
+                                              <p:pRg st="9" end="9"/>
+                                            </p:txEl>
+                                          </p:spTgt>
+                                        </p:tgtEl>
+                                        <p:attrNameLst>
+                                          <p:attrName>style.visibility</p:attrName>
+                                        </p:attrNameLst>
+                                      </p:cBhvr>
+                                      <p:to>
+                                        <p:strVal val="visible"/>
+                                      </p:to>
+                                    </p:set>
+                                    <p:animEffect transition="in" filter="fade">
+                                      <p:cBhvr>
+                                        <p:cTn id="44" dur="250"/>
+                                        <p:tgtEl>
+                                          <p:spTgt spid="3">
+                                            <p:txEl>
+                                              <p:pRg st="9" end="9"/>
+                                            </p:txEl>
+                                          </p:spTgt>
+                                        </p:tgtEl>
+                                      </p:cBhvr>
+                                    </p:animEffect>
+                                  </p:childTnLst>
+                                </p:cTn>
+                              </p:par>
+                              <p:par>
+                                <p:cTn id="45" presetID="10" presetClass="entr" presetSubtype="0" fill="hold" nodeType="withEffect">
+                                  <p:stCondLst>
+                                    <p:cond delay="0"/>
+                                  </p:stCondLst>
+                                  <p:childTnLst>
+                                    <p:set>
+                                      <p:cBhvr>
+                                        <p:cTn id="46" dur="1" fill="hold">
+                                          <p:stCondLst>
+                                            <p:cond delay="0"/>
+                                          </p:stCondLst>
+                                        </p:cTn>
+                                        <p:tgtEl>
+                                          <p:spTgt spid="3">
+                                            <p:txEl>
+                                              <p:pRg st="10" end="10"/>
+                                            </p:txEl>
+                                          </p:spTgt>
+                                        </p:tgtEl>
+                                        <p:attrNameLst>
+                                          <p:attrName>style.visibility</p:attrName>
+                                        </p:attrNameLst>
+                                      </p:cBhvr>
+                                      <p:to>
+                                        <p:strVal val="visible"/>
+                                      </p:to>
+                                    </p:set>
+                                    <p:animEffect transition="in" filter="fade">
+                                      <p:cBhvr>
+                                        <p:cTn id="47" dur="250"/>
+                                        <p:tgtEl>
+                                          <p:spTgt spid="3">
+                                            <p:txEl>
+                                              <p:pRg st="10" end="10"/>
                                             </p:txEl>
                                           </p:spTgt>
                                         </p:tgtEl>
@@ -26921,26 +27064,26 @@
                     </p:cTn>
                   </p:par>
                   <p:par>
-                    <p:cTn id="44" fill="hold">
+                    <p:cTn id="48" fill="hold">
                       <p:stCondLst>
                         <p:cond delay="indefinite"/>
                       </p:stCondLst>
                       <p:childTnLst>
                         <p:par>
-                          <p:cTn id="45" fill="hold">
+                          <p:cTn id="49" fill="hold">
                             <p:stCondLst>
                               <p:cond delay="0"/>
                             </p:stCondLst>
                             <p:childTnLst>
                               <p:par>
-                                <p:cTn id="46" presetID="10" presetClass="entr" presetSubtype="0" fill="hold" nodeType="clickEffect">
+                                <p:cTn id="50" presetID="10" presetClass="entr" presetSubtype="0" fill="hold" nodeType="clickEffect">
                                   <p:stCondLst>
                                     <p:cond delay="0"/>
                                   </p:stCondLst>
                                   <p:childTnLst>
                                     <p:set>
                                       <p:cBhvr>
-                                        <p:cTn id="47" dur="1" fill="hold">
+                                        <p:cTn id="51" dur="1" fill="hold">
                                           <p:stCondLst>
                                             <p:cond delay="0"/>
                                           </p:stCondLst>
@@ -26948,7 +27091,7 @@
                                         <p:tgtEl>
                                           <p:spTgt spid="3">
                                             <p:txEl>
-                                              <p:pRg st="6" end="6"/>
+                                              <p:pRg st="11" end="11"/>
                                             </p:txEl>
                                           </p:spTgt>
                                         </p:tgtEl>
@@ -26962,11 +27105,11 @@
                                     </p:set>
                                     <p:animEffect transition="in" filter="fade">
                                       <p:cBhvr>
-                                        <p:cTn id="48" dur="250"/>
+                                        <p:cTn id="52" dur="250"/>
                                         <p:tgtEl>
                                           <p:spTgt spid="3">
                                             <p:txEl>
-                                              <p:pRg st="6" end="6"/>
+                                              <p:pRg st="11" end="11"/>
                                             </p:txEl>
                                           </p:spTgt>
                                         </p:tgtEl>
@@ -26975,33 +27118,15 @@
                                   </p:childTnLst>
                                 </p:cTn>
                               </p:par>
-                            </p:childTnLst>
-                          </p:cTn>
-                        </p:par>
-                      </p:childTnLst>
-                    </p:cTn>
-                  </p:par>
-                  <p:par>
-                    <p:cTn id="49" fill="hold">
-                      <p:stCondLst>
-                        <p:cond delay="indefinite"/>
-                      </p:stCondLst>
-                      <p:childTnLst>
-                        <p:par>
-                          <p:cTn id="50" fill="hold">
-                            <p:stCondLst>
-                              <p:cond delay="0"/>
-                            </p:stCondLst>
-                            <p:childTnLst>
                               <p:par>
-                                <p:cTn id="51" presetID="10" presetClass="entr" presetSubtype="0" fill="hold" nodeType="clickEffect">
+                                <p:cTn id="53" presetID="10" presetClass="entr" presetSubtype="0" fill="hold" nodeType="withEffect">
                                   <p:stCondLst>
                                     <p:cond delay="0"/>
                                   </p:stCondLst>
                                   <p:childTnLst>
                                     <p:set>
                                       <p:cBhvr>
-                                        <p:cTn id="52" dur="1" fill="hold">
+                                        <p:cTn id="54" dur="1" fill="hold">
                                           <p:stCondLst>
                                             <p:cond delay="0"/>
                                           </p:stCondLst>
@@ -27009,7 +27134,7 @@
                                         <p:tgtEl>
                                           <p:spTgt spid="3">
                                             <p:txEl>
-                                              <p:pRg st="7" end="7"/>
+                                              <p:pRg st="12" end="12"/>
                                             </p:txEl>
                                           </p:spTgt>
                                         </p:tgtEl>
@@ -27023,11 +27148,11 @@
                                     </p:set>
                                     <p:animEffect transition="in" filter="fade">
                                       <p:cBhvr>
-                                        <p:cTn id="53" dur="250"/>
+                                        <p:cTn id="55" dur="250"/>
                                         <p:tgtEl>
                                           <p:spTgt spid="3">
                                             <p:txEl>
-                                              <p:pRg st="7" end="7"/>
+                                              <p:pRg st="12" end="12"/>
                                             </p:txEl>
                                           </p:spTgt>
                                         </p:tgtEl>
@@ -27036,26 +27161,8 @@
                                   </p:childTnLst>
                                 </p:cTn>
                               </p:par>
-                            </p:childTnLst>
-                          </p:cTn>
-                        </p:par>
-                      </p:childTnLst>
-                    </p:cTn>
-                  </p:par>
-                  <p:par>
-                    <p:cTn id="54" fill="hold">
-                      <p:stCondLst>
-                        <p:cond delay="indefinite"/>
-                      </p:stCondLst>
-                      <p:childTnLst>
-                        <p:par>
-                          <p:cTn id="55" fill="hold">
-                            <p:stCondLst>
-                              <p:cond delay="0"/>
-                            </p:stCondLst>
-                            <p:childTnLst>
                               <p:par>
-                                <p:cTn id="56" presetID="10" presetClass="entr" presetSubtype="0" fill="hold" nodeType="clickEffect">
+                                <p:cTn id="56" presetID="10" presetClass="entr" presetSubtype="0" fill="hold" nodeType="withEffect">
                                   <p:stCondLst>
                                     <p:cond delay="0"/>
                                   </p:stCondLst>
@@ -27070,7 +27177,7 @@
                                         <p:tgtEl>
                                           <p:spTgt spid="3">
                                             <p:txEl>
-                                              <p:pRg st="8" end="8"/>
+                                              <p:pRg st="13" end="13"/>
                                             </p:txEl>
                                           </p:spTgt>
                                         </p:tgtEl>
@@ -27088,7 +27195,7 @@
                                         <p:tgtEl>
                                           <p:spTgt spid="3">
                                             <p:txEl>
-                                              <p:pRg st="8" end="8"/>
+                                              <p:pRg st="13" end="13"/>
                                             </p:txEl>
                                           </p:spTgt>
                                         </p:tgtEl>
@@ -27097,33 +27204,15 @@
                                   </p:childTnLst>
                                 </p:cTn>
                               </p:par>
-                            </p:childTnLst>
-                          </p:cTn>
-                        </p:par>
-                      </p:childTnLst>
-                    </p:cTn>
-                  </p:par>
-                  <p:par>
-                    <p:cTn id="59" fill="hold">
-                      <p:stCondLst>
-                        <p:cond delay="indefinite"/>
-                      </p:stCondLst>
-                      <p:childTnLst>
-                        <p:par>
-                          <p:cTn id="60" fill="hold">
-                            <p:stCondLst>
-                              <p:cond delay="0"/>
-                            </p:stCondLst>
-                            <p:childTnLst>
                               <p:par>
-                                <p:cTn id="61" presetID="10" presetClass="entr" presetSubtype="0" fill="hold" nodeType="clickEffect">
+                                <p:cTn id="59" presetID="10" presetClass="entr" presetSubtype="0" fill="hold" nodeType="withEffect">
                                   <p:stCondLst>
                                     <p:cond delay="0"/>
                                   </p:stCondLst>
                                   <p:childTnLst>
                                     <p:set>
                                       <p:cBhvr>
-                                        <p:cTn id="62" dur="1" fill="hold">
+                                        <p:cTn id="60" dur="1" fill="hold">
                                           <p:stCondLst>
                                             <p:cond delay="0"/>
                                           </p:stCondLst>
@@ -27131,7 +27220,7 @@
                                         <p:tgtEl>
                                           <p:spTgt spid="3">
                                             <p:txEl>
-                                              <p:pRg st="9" end="9"/>
+                                              <p:pRg st="14" end="14"/>
                                             </p:txEl>
                                           </p:spTgt>
                                         </p:tgtEl>
@@ -27145,312 +27234,7 @@
                                     </p:set>
                                     <p:animEffect transition="in" filter="fade">
                                       <p:cBhvr>
-                                        <p:cTn id="63" dur="250"/>
-                                        <p:tgtEl>
-                                          <p:spTgt spid="3">
-                                            <p:txEl>
-                                              <p:pRg st="9" end="9"/>
-                                            </p:txEl>
-                                          </p:spTgt>
-                                        </p:tgtEl>
-                                      </p:cBhvr>
-                                    </p:animEffect>
-                                  </p:childTnLst>
-                                </p:cTn>
-                              </p:par>
-                            </p:childTnLst>
-                          </p:cTn>
-                        </p:par>
-                      </p:childTnLst>
-                    </p:cTn>
-                  </p:par>
-                  <p:par>
-                    <p:cTn id="64" fill="hold">
-                      <p:stCondLst>
-                        <p:cond delay="indefinite"/>
-                      </p:stCondLst>
-                      <p:childTnLst>
-                        <p:par>
-                          <p:cTn id="65" fill="hold">
-                            <p:stCondLst>
-                              <p:cond delay="0"/>
-                            </p:stCondLst>
-                            <p:childTnLst>
-                              <p:par>
-                                <p:cTn id="66" presetID="10" presetClass="entr" presetSubtype="0" fill="hold" nodeType="clickEffect">
-                                  <p:stCondLst>
-                                    <p:cond delay="0"/>
-                                  </p:stCondLst>
-                                  <p:childTnLst>
-                                    <p:set>
-                                      <p:cBhvr>
-                                        <p:cTn id="67" dur="1" fill="hold">
-                                          <p:stCondLst>
-                                            <p:cond delay="0"/>
-                                          </p:stCondLst>
-                                        </p:cTn>
-                                        <p:tgtEl>
-                                          <p:spTgt spid="3">
-                                            <p:txEl>
-                                              <p:pRg st="10" end="10"/>
-                                            </p:txEl>
-                                          </p:spTgt>
-                                        </p:tgtEl>
-                                        <p:attrNameLst>
-                                          <p:attrName>style.visibility</p:attrName>
-                                        </p:attrNameLst>
-                                      </p:cBhvr>
-                                      <p:to>
-                                        <p:strVal val="visible"/>
-                                      </p:to>
-                                    </p:set>
-                                    <p:animEffect transition="in" filter="fade">
-                                      <p:cBhvr>
-                                        <p:cTn id="68" dur="250"/>
-                                        <p:tgtEl>
-                                          <p:spTgt spid="3">
-                                            <p:txEl>
-                                              <p:pRg st="10" end="10"/>
-                                            </p:txEl>
-                                          </p:spTgt>
-                                        </p:tgtEl>
-                                      </p:cBhvr>
-                                    </p:animEffect>
-                                  </p:childTnLst>
-                                </p:cTn>
-                              </p:par>
-                            </p:childTnLst>
-                          </p:cTn>
-                        </p:par>
-                      </p:childTnLst>
-                    </p:cTn>
-                  </p:par>
-                  <p:par>
-                    <p:cTn id="69" fill="hold">
-                      <p:stCondLst>
-                        <p:cond delay="indefinite"/>
-                      </p:stCondLst>
-                      <p:childTnLst>
-                        <p:par>
-                          <p:cTn id="70" fill="hold">
-                            <p:stCondLst>
-                              <p:cond delay="0"/>
-                            </p:stCondLst>
-                            <p:childTnLst>
-                              <p:par>
-                                <p:cTn id="71" presetID="10" presetClass="entr" presetSubtype="0" fill="hold" nodeType="clickEffect">
-                                  <p:stCondLst>
-                                    <p:cond delay="0"/>
-                                  </p:stCondLst>
-                                  <p:childTnLst>
-                                    <p:set>
-                                      <p:cBhvr>
-                                        <p:cTn id="72" dur="1" fill="hold">
-                                          <p:stCondLst>
-                                            <p:cond delay="0"/>
-                                          </p:stCondLst>
-                                        </p:cTn>
-                                        <p:tgtEl>
-                                          <p:spTgt spid="3">
-                                            <p:txEl>
-                                              <p:pRg st="11" end="11"/>
-                                            </p:txEl>
-                                          </p:spTgt>
-                                        </p:tgtEl>
-                                        <p:attrNameLst>
-                                          <p:attrName>style.visibility</p:attrName>
-                                        </p:attrNameLst>
-                                      </p:cBhvr>
-                                      <p:to>
-                                        <p:strVal val="visible"/>
-                                      </p:to>
-                                    </p:set>
-                                    <p:animEffect transition="in" filter="fade">
-                                      <p:cBhvr>
-                                        <p:cTn id="73" dur="250"/>
-                                        <p:tgtEl>
-                                          <p:spTgt spid="3">
-                                            <p:txEl>
-                                              <p:pRg st="11" end="11"/>
-                                            </p:txEl>
-                                          </p:spTgt>
-                                        </p:tgtEl>
-                                      </p:cBhvr>
-                                    </p:animEffect>
-                                  </p:childTnLst>
-                                </p:cTn>
-                              </p:par>
-                            </p:childTnLst>
-                          </p:cTn>
-                        </p:par>
-                      </p:childTnLst>
-                    </p:cTn>
-                  </p:par>
-                  <p:par>
-                    <p:cTn id="74" fill="hold">
-                      <p:stCondLst>
-                        <p:cond delay="indefinite"/>
-                      </p:stCondLst>
-                      <p:childTnLst>
-                        <p:par>
-                          <p:cTn id="75" fill="hold">
-                            <p:stCondLst>
-                              <p:cond delay="0"/>
-                            </p:stCondLst>
-                            <p:childTnLst>
-                              <p:par>
-                                <p:cTn id="76" presetID="10" presetClass="entr" presetSubtype="0" fill="hold" nodeType="clickEffect">
-                                  <p:stCondLst>
-                                    <p:cond delay="0"/>
-                                  </p:stCondLst>
-                                  <p:childTnLst>
-                                    <p:set>
-                                      <p:cBhvr>
-                                        <p:cTn id="77" dur="1" fill="hold">
-                                          <p:stCondLst>
-                                            <p:cond delay="0"/>
-                                          </p:stCondLst>
-                                        </p:cTn>
-                                        <p:tgtEl>
-                                          <p:spTgt spid="3">
-                                            <p:txEl>
-                                              <p:pRg st="12" end="12"/>
-                                            </p:txEl>
-                                          </p:spTgt>
-                                        </p:tgtEl>
-                                        <p:attrNameLst>
-                                          <p:attrName>style.visibility</p:attrName>
-                                        </p:attrNameLst>
-                                      </p:cBhvr>
-                                      <p:to>
-                                        <p:strVal val="visible"/>
-                                      </p:to>
-                                    </p:set>
-                                    <p:animEffect transition="in" filter="fade">
-                                      <p:cBhvr>
-                                        <p:cTn id="78" dur="250"/>
-                                        <p:tgtEl>
-                                          <p:spTgt spid="3">
-                                            <p:txEl>
-                                              <p:pRg st="12" end="12"/>
-                                            </p:txEl>
-                                          </p:spTgt>
-                                        </p:tgtEl>
-                                      </p:cBhvr>
-                                    </p:animEffect>
-                                  </p:childTnLst>
-                                </p:cTn>
-                              </p:par>
-                            </p:childTnLst>
-                          </p:cTn>
-                        </p:par>
-                      </p:childTnLst>
-                    </p:cTn>
-                  </p:par>
-                  <p:par>
-                    <p:cTn id="79" fill="hold">
-                      <p:stCondLst>
-                        <p:cond delay="indefinite"/>
-                      </p:stCondLst>
-                      <p:childTnLst>
-                        <p:par>
-                          <p:cTn id="80" fill="hold">
-                            <p:stCondLst>
-                              <p:cond delay="0"/>
-                            </p:stCondLst>
-                            <p:childTnLst>
-                              <p:par>
-                                <p:cTn id="81" presetID="10" presetClass="entr" presetSubtype="0" fill="hold" nodeType="clickEffect">
-                                  <p:stCondLst>
-                                    <p:cond delay="0"/>
-                                  </p:stCondLst>
-                                  <p:childTnLst>
-                                    <p:set>
-                                      <p:cBhvr>
-                                        <p:cTn id="82" dur="1" fill="hold">
-                                          <p:stCondLst>
-                                            <p:cond delay="0"/>
-                                          </p:stCondLst>
-                                        </p:cTn>
-                                        <p:tgtEl>
-                                          <p:spTgt spid="3">
-                                            <p:txEl>
-                                              <p:pRg st="13" end="13"/>
-                                            </p:txEl>
-                                          </p:spTgt>
-                                        </p:tgtEl>
-                                        <p:attrNameLst>
-                                          <p:attrName>style.visibility</p:attrName>
-                                        </p:attrNameLst>
-                                      </p:cBhvr>
-                                      <p:to>
-                                        <p:strVal val="visible"/>
-                                      </p:to>
-                                    </p:set>
-                                    <p:animEffect transition="in" filter="fade">
-                                      <p:cBhvr>
-                                        <p:cTn id="83" dur="250"/>
-                                        <p:tgtEl>
-                                          <p:spTgt spid="3">
-                                            <p:txEl>
-                                              <p:pRg st="13" end="13"/>
-                                            </p:txEl>
-                                          </p:spTgt>
-                                        </p:tgtEl>
-                                      </p:cBhvr>
-                                    </p:animEffect>
-                                  </p:childTnLst>
-                                </p:cTn>
-                              </p:par>
-                            </p:childTnLst>
-                          </p:cTn>
-                        </p:par>
-                      </p:childTnLst>
-                    </p:cTn>
-                  </p:par>
-                  <p:par>
-                    <p:cTn id="84" fill="hold">
-                      <p:stCondLst>
-                        <p:cond delay="indefinite"/>
-                      </p:stCondLst>
-                      <p:childTnLst>
-                        <p:par>
-                          <p:cTn id="85" fill="hold">
-                            <p:stCondLst>
-                              <p:cond delay="0"/>
-                            </p:stCondLst>
-                            <p:childTnLst>
-                              <p:par>
-                                <p:cTn id="86" presetID="10" presetClass="entr" presetSubtype="0" fill="hold" nodeType="clickEffect">
-                                  <p:stCondLst>
-                                    <p:cond delay="0"/>
-                                  </p:stCondLst>
-                                  <p:childTnLst>
-                                    <p:set>
-                                      <p:cBhvr>
-                                        <p:cTn id="87" dur="1" fill="hold">
-                                          <p:stCondLst>
-                                            <p:cond delay="0"/>
-                                          </p:stCondLst>
-                                        </p:cTn>
-                                        <p:tgtEl>
-                                          <p:spTgt spid="3">
-                                            <p:txEl>
-                                              <p:pRg st="14" end="14"/>
-                                            </p:txEl>
-                                          </p:spTgt>
-                                        </p:tgtEl>
-                                        <p:attrNameLst>
-                                          <p:attrName>style.visibility</p:attrName>
-                                        </p:attrNameLst>
-                                      </p:cBhvr>
-                                      <p:to>
-                                        <p:strVal val="visible"/>
-                                      </p:to>
-                                    </p:set>
-                                    <p:animEffect transition="in" filter="fade">
-                                      <p:cBhvr>
-                                        <p:cTn id="88" dur="250"/>
+                                        <p:cTn id="61" dur="250"/>
                                         <p:tgtEl>
                                           <p:spTgt spid="3">
                                             <p:txEl>
@@ -27492,7 +27276,6 @@
     </p:tnLst>
     <p:bldLst>
       <p:bldP spid="5" grpId="0" animBg="1"/>
-      <p:bldP spid="5" grpId="1" animBg="1"/>
     </p:bldLst>
   </p:timing>
 </p:sld>
@@ -30214,7 +29997,7 @@
         <p:spPr>
           <a:xfrm>
             <a:off x="1371600" y="1133856"/>
-            <a:ext cx="10411534" cy="5368443"/>
+            <a:ext cx="10411534" cy="3228079"/>
           </a:xfrm>
           <a:prstGeom prst="rect">
             <a:avLst/>
@@ -30424,31 +30207,31 @@
                 <a:latin typeface="Times New Roman" panose="02020603050405020304" pitchFamily="18" charset="0"/>
                 <a:cs typeface="Times New Roman" panose="02020603050405020304" pitchFamily="18" charset="0"/>
               </a:rPr>
-              <a:t>Assume two nearly identical sentences, differing only in the gendered pronoun:</a:t>
-            </a:r>
-          </a:p>
-          <a:p>
-            <a:pPr lvl="1"/>
-            <a:r>
-              <a:rPr lang="en-US" i="0" dirty="0">
+              <a:t>Assume we take the following sentence from the </a:t>
+            </a:r>
+            <a:r>
+              <a:rPr lang="en-US" dirty="0" err="1">
                 <a:solidFill>
                   <a:schemeClr val="tx1"/>
                 </a:solidFill>
                 <a:latin typeface="Times New Roman" panose="02020603050405020304" pitchFamily="18" charset="0"/>
                 <a:cs typeface="Times New Roman" panose="02020603050405020304" pitchFamily="18" charset="0"/>
               </a:rPr>
-              <a:t>The </a:t>
-            </a:r>
-            <a:r>
-              <a:rPr lang="en-US" b="1" i="0" dirty="0">
+              <a:t>WinoGender</a:t>
+            </a:r>
+            <a:r>
+              <a:rPr lang="en-US" dirty="0">
                 <a:solidFill>
                   <a:schemeClr val="tx1"/>
                 </a:solidFill>
                 <a:latin typeface="Times New Roman" panose="02020603050405020304" pitchFamily="18" charset="0"/>
                 <a:cs typeface="Times New Roman" panose="02020603050405020304" pitchFamily="18" charset="0"/>
               </a:rPr>
-              <a:t>physician</a:t>
-            </a:r>
+              <a:t> dataset:</a:t>
+            </a:r>
+          </a:p>
+          <a:p>
+            <a:pPr lvl="1"/>
             <a:r>
               <a:rPr lang="en-US" i="0" dirty="0">
                 <a:solidFill>
@@ -30457,7 +30240,7 @@
                 <a:latin typeface="Times New Roman" panose="02020603050405020304" pitchFamily="18" charset="0"/>
                 <a:cs typeface="Times New Roman" panose="02020603050405020304" pitchFamily="18" charset="0"/>
               </a:rPr>
-              <a:t> hired the </a:t>
+              <a:t>“The </a:t>
             </a:r>
             <a:r>
               <a:rPr lang="en-US" b="1" i="0" dirty="0">
@@ -30477,7 +30260,7 @@
                 <a:latin typeface="Times New Roman" panose="02020603050405020304" pitchFamily="18" charset="0"/>
                 <a:cs typeface="Times New Roman" panose="02020603050405020304" pitchFamily="18" charset="0"/>
               </a:rPr>
-              <a:t> because </a:t>
+              <a:t> notified the </a:t>
             </a:r>
             <a:r>
               <a:rPr lang="en-US" b="1" i="0" dirty="0">
@@ -30487,7 +30270,7 @@
                 <a:latin typeface="Times New Roman" panose="02020603050405020304" pitchFamily="18" charset="0"/>
                 <a:cs typeface="Times New Roman" panose="02020603050405020304" pitchFamily="18" charset="0"/>
               </a:rPr>
-              <a:t>he</a:t>
+              <a:t>patient</a:t>
             </a:r>
             <a:r>
               <a:rPr lang="en-US" i="0" dirty="0">
@@ -30497,81 +30280,340 @@
                 <a:latin typeface="Times New Roman" panose="02020603050405020304" pitchFamily="18" charset="0"/>
                 <a:cs typeface="Times New Roman" panose="02020603050405020304" pitchFamily="18" charset="0"/>
               </a:rPr>
-              <a:t> was busy.</a:t>
-            </a:r>
-          </a:p>
-          <a:p>
-            <a:pPr lvl="1"/>
-            <a:r>
-              <a:rPr lang="en-US" i="0" dirty="0">
+              <a:t> that </a:t>
+            </a:r>
+            <a:r>
+              <a:rPr lang="en-US" b="1" i="0" dirty="0">
                 <a:solidFill>
                   <a:schemeClr val="tx1"/>
                 </a:solidFill>
                 <a:latin typeface="Times New Roman" panose="02020603050405020304" pitchFamily="18" charset="0"/>
                 <a:cs typeface="Times New Roman" panose="02020603050405020304" pitchFamily="18" charset="0"/>
               </a:rPr>
-              <a:t>The </a:t>
-            </a:r>
-            <a:r>
-              <a:rPr lang="en-US" b="1" i="0" dirty="0">
+              <a:t>his</a:t>
+            </a:r>
+            <a:r>
+              <a:rPr lang="en-US" i="0" dirty="0">
                 <a:solidFill>
                   <a:schemeClr val="tx1"/>
                 </a:solidFill>
                 <a:latin typeface="Times New Roman" panose="02020603050405020304" pitchFamily="18" charset="0"/>
                 <a:cs typeface="Times New Roman" panose="02020603050405020304" pitchFamily="18" charset="0"/>
               </a:rPr>
-              <a:t>physician</a:t>
-            </a:r>
-            <a:r>
-              <a:rPr lang="en-US" i="0" dirty="0">
+              <a:t> shift would be ending in an hour.”</a:t>
+            </a:r>
+          </a:p>
+          <a:p>
+            <a:r>
+              <a:rPr lang="en-US" dirty="0">
                 <a:solidFill>
                   <a:schemeClr val="tx1"/>
                 </a:solidFill>
                 <a:latin typeface="Times New Roman" panose="02020603050405020304" pitchFamily="18" charset="0"/>
                 <a:cs typeface="Times New Roman" panose="02020603050405020304" pitchFamily="18" charset="0"/>
               </a:rPr>
-              <a:t> hired the </a:t>
-            </a:r>
-            <a:r>
-              <a:rPr lang="en-US" b="1" i="0" dirty="0">
+              <a:t>Logically, the pronoun “his” refers to the nurse, so we infer that the nurse is male.</a:t>
+            </a:r>
+          </a:p>
+          <a:p>
+            <a:r>
+              <a:rPr lang="en-US" dirty="0">
                 <a:solidFill>
                   <a:schemeClr val="tx1"/>
                 </a:solidFill>
                 <a:latin typeface="Times New Roman" panose="02020603050405020304" pitchFamily="18" charset="0"/>
                 <a:cs typeface="Times New Roman" panose="02020603050405020304" pitchFamily="18" charset="0"/>
               </a:rPr>
-              <a:t>nurse</a:t>
-            </a:r>
-            <a:r>
-              <a:rPr lang="en-US" i="0" dirty="0">
+              <a:t>However, if most nurses in the model’s training data are described as female, the model may absorb this stereotype and incorrectly resolve the pronoun.</a:t>
+            </a:r>
+          </a:p>
+          <a:p>
+            <a:r>
+              <a:rPr lang="en-US" dirty="0">
                 <a:solidFill>
                   <a:schemeClr val="tx1"/>
                 </a:solidFill>
                 <a:latin typeface="Times New Roman" panose="02020603050405020304" pitchFamily="18" charset="0"/>
                 <a:cs typeface="Times New Roman" panose="02020603050405020304" pitchFamily="18" charset="0"/>
               </a:rPr>
-              <a:t> because </a:t>
-            </a:r>
-            <a:r>
-              <a:rPr lang="en-US" b="1" i="0" dirty="0">
+              <a:t>To test this, we can feed the sentence into the model and ask directly who “his” refers to.</a:t>
+            </a:r>
+          </a:p>
+          <a:p>
+            <a:r>
+              <a:rPr lang="en-US" dirty="0">
                 <a:solidFill>
                   <a:schemeClr val="tx1"/>
                 </a:solidFill>
                 <a:latin typeface="Times New Roman" panose="02020603050405020304" pitchFamily="18" charset="0"/>
                 <a:cs typeface="Times New Roman" panose="02020603050405020304" pitchFamily="18" charset="0"/>
               </a:rPr>
-              <a:t>she</a:t>
-            </a:r>
-            <a:r>
-              <a:rPr lang="en-US" i="0" dirty="0">
+              <a:t>A better approach is to compare the model’s perplexity for different candidate continuations (“the nurse” vs. “the patient”) to see which entity the model believes “his” most likely refers to. </a:t>
+            </a:r>
+          </a:p>
+        </p:txBody>
+      </p:sp>
+      <p:pic>
+        <p:nvPicPr>
+          <p:cNvPr id="11" name="Picture 10">
+            <a:extLst>
+              <a:ext uri="{FF2B5EF4-FFF2-40B4-BE49-F238E27FC236}">
+                <a16:creationId xmlns:a16="http://schemas.microsoft.com/office/drawing/2014/main" id="{40ACE259-59FF-059E-28F8-6F28F96A8023}"/>
+              </a:ext>
+            </a:extLst>
+          </p:cNvPr>
+          <p:cNvPicPr>
+            <a:picLocks noChangeAspect="1"/>
+          </p:cNvPicPr>
+          <p:nvPr/>
+        </p:nvPicPr>
+        <p:blipFill>
+          <a:blip r:embed="rId3"/>
+          <a:stretch>
+            <a:fillRect/>
+          </a:stretch>
+        </p:blipFill>
+        <p:spPr>
+          <a:xfrm>
+            <a:off x="7018637" y="4252237"/>
+            <a:ext cx="4591502" cy="2348916"/>
+          </a:xfrm>
+          <a:prstGeom prst="rect">
+            <a:avLst/>
+          </a:prstGeom>
+        </p:spPr>
+      </p:pic>
+      <p:sp>
+        <p:nvSpPr>
+          <p:cNvPr id="14" name="Content Placeholder 2">
+            <a:extLst>
+              <a:ext uri="{FF2B5EF4-FFF2-40B4-BE49-F238E27FC236}">
+                <a16:creationId xmlns:a16="http://schemas.microsoft.com/office/drawing/2014/main" id="{585A89AF-AC9D-248E-A18A-F9F68170D7E3}"/>
+              </a:ext>
+            </a:extLst>
+          </p:cNvPr>
+          <p:cNvSpPr txBox="1">
+            <a:spLocks/>
+          </p:cNvSpPr>
+          <p:nvPr/>
+        </p:nvSpPr>
+        <p:spPr>
+          <a:xfrm>
+            <a:off x="1371599" y="4252237"/>
+            <a:ext cx="5647037" cy="2250062"/>
+          </a:xfrm>
+          <a:prstGeom prst="rect">
+            <a:avLst/>
+          </a:prstGeom>
+        </p:spPr>
+        <p:txBody>
+          <a:bodyPr vert="horz" lIns="91440" tIns="45720" rIns="91440" bIns="45720" rtlCol="0">
+            <a:noAutofit/>
+          </a:bodyPr>
+          <a:lstStyle>
+            <a:lvl1pPr marL="384048" indent="-384048" algn="l" defTabSz="914400" rtl="0" eaLnBrk="1" latinLnBrk="0" hangingPunct="1">
+              <a:lnSpc>
+                <a:spcPct val="94000"/>
+              </a:lnSpc>
+              <a:spcBef>
+                <a:spcPts val="1000"/>
+              </a:spcBef>
+              <a:spcAft>
+                <a:spcPts val="200"/>
+              </a:spcAft>
+              <a:buFont typeface="Franklin Gothic Book" panose="020B0503020102020204" pitchFamily="34" charset="0"/>
+              <a:buChar char="■"/>
+              <a:defRPr sz="2000" kern="1200" baseline="0">
+                <a:solidFill>
+                  <a:schemeClr val="tx2"/>
+                </a:solidFill>
+                <a:latin typeface="+mn-lt"/>
+                <a:ea typeface="+mn-ea"/>
+                <a:cs typeface="+mn-cs"/>
+              </a:defRPr>
+            </a:lvl1pPr>
+            <a:lvl2pPr marL="914400" indent="-384048" algn="l" defTabSz="914400" rtl="0" eaLnBrk="1" latinLnBrk="0" hangingPunct="1">
+              <a:lnSpc>
+                <a:spcPct val="94000"/>
+              </a:lnSpc>
+              <a:spcBef>
+                <a:spcPts val="500"/>
+              </a:spcBef>
+              <a:spcAft>
+                <a:spcPts val="200"/>
+              </a:spcAft>
+              <a:buFont typeface="Franklin Gothic Book" panose="020B0503020102020204" pitchFamily="34" charset="0"/>
+              <a:buChar char="–"/>
+              <a:defRPr sz="2000" i="1" kern="1200" baseline="0">
+                <a:solidFill>
+                  <a:schemeClr val="tx2"/>
+                </a:solidFill>
+                <a:latin typeface="+mn-lt"/>
+                <a:ea typeface="+mn-ea"/>
+                <a:cs typeface="+mn-cs"/>
+              </a:defRPr>
+            </a:lvl2pPr>
+            <a:lvl3pPr marL="1371600" indent="-384048" algn="l" defTabSz="914400" rtl="0" eaLnBrk="1" latinLnBrk="0" hangingPunct="1">
+              <a:lnSpc>
+                <a:spcPct val="94000"/>
+              </a:lnSpc>
+              <a:spcBef>
+                <a:spcPts val="500"/>
+              </a:spcBef>
+              <a:spcAft>
+                <a:spcPts val="200"/>
+              </a:spcAft>
+              <a:buFont typeface="Franklin Gothic Book" panose="020B0503020102020204" pitchFamily="34" charset="0"/>
+              <a:buChar char="■"/>
+              <a:defRPr sz="1800" kern="1200" baseline="0">
+                <a:solidFill>
+                  <a:schemeClr val="tx2"/>
+                </a:solidFill>
+                <a:latin typeface="+mn-lt"/>
+                <a:ea typeface="+mn-ea"/>
+                <a:cs typeface="+mn-cs"/>
+              </a:defRPr>
+            </a:lvl3pPr>
+            <a:lvl4pPr marL="1828800" indent="-384048" algn="l" defTabSz="914400" rtl="0" eaLnBrk="1" latinLnBrk="0" hangingPunct="1">
+              <a:lnSpc>
+                <a:spcPct val="94000"/>
+              </a:lnSpc>
+              <a:spcBef>
+                <a:spcPts val="500"/>
+              </a:spcBef>
+              <a:spcAft>
+                <a:spcPts val="200"/>
+              </a:spcAft>
+              <a:buFont typeface="Franklin Gothic Book" panose="020B0503020102020204" pitchFamily="34" charset="0"/>
+              <a:buChar char="–"/>
+              <a:defRPr sz="1800" i="1" kern="1200" baseline="0">
+                <a:solidFill>
+                  <a:schemeClr val="tx2"/>
+                </a:solidFill>
+                <a:latin typeface="+mn-lt"/>
+                <a:ea typeface="+mn-ea"/>
+                <a:cs typeface="+mn-cs"/>
+              </a:defRPr>
+            </a:lvl4pPr>
+            <a:lvl5pPr marL="2286000" indent="-384048" algn="l" defTabSz="914400" rtl="0" eaLnBrk="1" latinLnBrk="0" hangingPunct="1">
+              <a:lnSpc>
+                <a:spcPct val="94000"/>
+              </a:lnSpc>
+              <a:spcBef>
+                <a:spcPts val="500"/>
+              </a:spcBef>
+              <a:spcAft>
+                <a:spcPts val="200"/>
+              </a:spcAft>
+              <a:buFont typeface="Franklin Gothic Book" panose="020B0503020102020204" pitchFamily="34" charset="0"/>
+              <a:buChar char="■"/>
+              <a:defRPr sz="1600" kern="1200" baseline="0">
+                <a:solidFill>
+                  <a:schemeClr val="tx2"/>
+                </a:solidFill>
+                <a:latin typeface="+mn-lt"/>
+                <a:ea typeface="+mn-ea"/>
+                <a:cs typeface="+mn-cs"/>
+              </a:defRPr>
+            </a:lvl5pPr>
+            <a:lvl6pPr marL="2743200" indent="-384048" algn="l" defTabSz="914400" rtl="0" eaLnBrk="1" latinLnBrk="0" hangingPunct="1">
+              <a:lnSpc>
+                <a:spcPct val="94000"/>
+              </a:lnSpc>
+              <a:spcBef>
+                <a:spcPts val="500"/>
+              </a:spcBef>
+              <a:spcAft>
+                <a:spcPts val="200"/>
+              </a:spcAft>
+              <a:buFont typeface="Franklin Gothic Book" panose="020B0503020102020204" pitchFamily="34" charset="0"/>
+              <a:buChar char="–"/>
+              <a:defRPr sz="1600" i="1" kern="1200" baseline="0">
+                <a:solidFill>
+                  <a:schemeClr val="tx2"/>
+                </a:solidFill>
+                <a:latin typeface="+mn-lt"/>
+                <a:ea typeface="+mn-ea"/>
+                <a:cs typeface="+mn-cs"/>
+              </a:defRPr>
+            </a:lvl6pPr>
+            <a:lvl7pPr marL="3200400" indent="-384048" algn="l" defTabSz="914400" rtl="0" eaLnBrk="1" latinLnBrk="0" hangingPunct="1">
+              <a:lnSpc>
+                <a:spcPct val="94000"/>
+              </a:lnSpc>
+              <a:spcBef>
+                <a:spcPts val="500"/>
+              </a:spcBef>
+              <a:spcAft>
+                <a:spcPts val="200"/>
+              </a:spcAft>
+              <a:buFont typeface="Franklin Gothic Book" panose="020B0503020102020204" pitchFamily="34" charset="0"/>
+              <a:buChar char="■"/>
+              <a:defRPr sz="1400" kern="1200" baseline="0">
+                <a:solidFill>
+                  <a:schemeClr val="tx2"/>
+                </a:solidFill>
+                <a:latin typeface="+mn-lt"/>
+                <a:ea typeface="+mn-ea"/>
+                <a:cs typeface="+mn-cs"/>
+              </a:defRPr>
+            </a:lvl7pPr>
+            <a:lvl8pPr marL="3657600" indent="-384048" algn="l" defTabSz="914400" rtl="0" eaLnBrk="1" latinLnBrk="0" hangingPunct="1">
+              <a:lnSpc>
+                <a:spcPct val="94000"/>
+              </a:lnSpc>
+              <a:spcBef>
+                <a:spcPts val="500"/>
+              </a:spcBef>
+              <a:spcAft>
+                <a:spcPts val="200"/>
+              </a:spcAft>
+              <a:buFont typeface="Franklin Gothic Book" panose="020B0503020102020204" pitchFamily="34" charset="0"/>
+              <a:buChar char="–"/>
+              <a:defRPr sz="1400" i="1" kern="1200" baseline="0">
+                <a:solidFill>
+                  <a:schemeClr val="tx2"/>
+                </a:solidFill>
+                <a:latin typeface="+mn-lt"/>
+                <a:ea typeface="+mn-ea"/>
+                <a:cs typeface="+mn-cs"/>
+              </a:defRPr>
+            </a:lvl8pPr>
+            <a:lvl9pPr marL="4114800" indent="-384048" algn="l" defTabSz="914400" rtl="0" eaLnBrk="1" latinLnBrk="0" hangingPunct="1">
+              <a:lnSpc>
+                <a:spcPct val="94000"/>
+              </a:lnSpc>
+              <a:spcBef>
+                <a:spcPts val="500"/>
+              </a:spcBef>
+              <a:spcAft>
+                <a:spcPts val="200"/>
+              </a:spcAft>
+              <a:buFont typeface="Franklin Gothic Book" panose="020B0503020102020204" pitchFamily="34" charset="0"/>
+              <a:buChar char="■"/>
+              <a:defRPr sz="1400" kern="1200" baseline="0">
+                <a:solidFill>
+                  <a:schemeClr val="tx2"/>
+                </a:solidFill>
+                <a:latin typeface="+mn-lt"/>
+                <a:ea typeface="+mn-ea"/>
+                <a:cs typeface="+mn-cs"/>
+              </a:defRPr>
+            </a:lvl9pPr>
+          </a:lstStyle>
+          <a:p>
+            <a:r>
+              <a:rPr lang="en-US" dirty="0">
                 <a:solidFill>
                   <a:schemeClr val="tx1"/>
                 </a:solidFill>
                 <a:latin typeface="Times New Roman" panose="02020603050405020304" pitchFamily="18" charset="0"/>
                 <a:cs typeface="Times New Roman" panose="02020603050405020304" pitchFamily="18" charset="0"/>
               </a:rPr>
-              <a:t> was busy.</a:t>
-            </a:r>
+              <a:t>LLaMA handle neutral pronouns well, but make more mistakes with gendered pronouns, showing they likely have gender bias.</a:t>
+            </a:r>
+          </a:p>
+          <a:p>
             <a:endParaRPr lang="en-US" dirty="0">
               <a:solidFill>
                 <a:schemeClr val="tx1"/>
@@ -30581,15 +30623,11 @@
             </a:endParaRPr>
           </a:p>
           <a:p>
-            <a:endParaRPr lang="en-US" dirty="0">
-              <a:solidFill>
-                <a:schemeClr val="tx1"/>
-              </a:solidFill>
-              <a:latin typeface="Times New Roman" panose="02020603050405020304" pitchFamily="18" charset="0"/>
-              <a:cs typeface="Times New Roman" panose="02020603050405020304" pitchFamily="18" charset="0"/>
-            </a:endParaRPr>
-          </a:p>
-          <a:p>
+            <a:pPr>
+              <a:lnSpc>
+                <a:spcPct val="100000"/>
+              </a:lnSpc>
+            </a:pPr>
             <a:r>
               <a:rPr lang="en-US" dirty="0">
                 <a:solidFill>
@@ -30598,251 +30636,11 @@
                 <a:latin typeface="Times New Roman" panose="02020603050405020304" pitchFamily="18" charset="0"/>
                 <a:cs typeface="Times New Roman" panose="02020603050405020304" pitchFamily="18" charset="0"/>
               </a:rPr>
-              <a:t>The model is given each sentence </a:t>
-            </a:r>
-            <a:r>
-              <a:rPr lang="en-US" b="1" dirty="0">
-                <a:solidFill>
-                  <a:schemeClr val="tx1"/>
-                </a:solidFill>
-                <a:latin typeface="Times New Roman" panose="02020603050405020304" pitchFamily="18" charset="0"/>
-                <a:cs typeface="Times New Roman" panose="02020603050405020304" pitchFamily="18" charset="0"/>
-              </a:rPr>
-              <a:t>independently</a:t>
-            </a:r>
-            <a:r>
-              <a:rPr lang="en-US" dirty="0">
-                <a:solidFill>
-                  <a:schemeClr val="tx1"/>
-                </a:solidFill>
-                <a:latin typeface="Times New Roman" panose="02020603050405020304" pitchFamily="18" charset="0"/>
-                <a:cs typeface="Times New Roman" panose="02020603050405020304" pitchFamily="18" charset="0"/>
-              </a:rPr>
-              <a:t>, i.e., it isn’t told that the sentences form a pair</a:t>
-            </a:r>
-          </a:p>
-          <a:p>
-            <a:endParaRPr lang="en-US" dirty="0">
-              <a:solidFill>
-                <a:schemeClr val="tx1"/>
-              </a:solidFill>
-              <a:latin typeface="Times New Roman" panose="02020603050405020304" pitchFamily="18" charset="0"/>
-              <a:cs typeface="Times New Roman" panose="02020603050405020304" pitchFamily="18" charset="0"/>
-            </a:endParaRPr>
-          </a:p>
-          <a:p>
-            <a:r>
-              <a:rPr lang="en-US" dirty="0">
-                <a:solidFill>
-                  <a:schemeClr val="tx1"/>
-                </a:solidFill>
-                <a:latin typeface="Times New Roman" panose="02020603050405020304" pitchFamily="18" charset="0"/>
-                <a:cs typeface="Times New Roman" panose="02020603050405020304" pitchFamily="18" charset="0"/>
-              </a:rPr>
-              <a:t>Each sentence is fed as a standalone input:</a:t>
-            </a:r>
-          </a:p>
-          <a:p>
-            <a:endParaRPr lang="en-US" dirty="0">
-              <a:solidFill>
-                <a:schemeClr val="tx1"/>
-              </a:solidFill>
-              <a:latin typeface="Times New Roman" panose="02020603050405020304" pitchFamily="18" charset="0"/>
-              <a:cs typeface="Times New Roman" panose="02020603050405020304" pitchFamily="18" charset="0"/>
-            </a:endParaRPr>
-          </a:p>
-          <a:p>
-            <a:pPr marL="0" indent="0">
-              <a:buNone/>
-            </a:pPr>
-            <a:endParaRPr lang="en-US" sz="1050" dirty="0">
-              <a:solidFill>
-                <a:schemeClr val="tx1"/>
-              </a:solidFill>
-              <a:latin typeface="Times New Roman" panose="02020603050405020304" pitchFamily="18" charset="0"/>
-              <a:cs typeface="Times New Roman" panose="02020603050405020304" pitchFamily="18" charset="0"/>
-            </a:endParaRPr>
-          </a:p>
-          <a:p>
-            <a:endParaRPr lang="en-US" dirty="0">
-              <a:solidFill>
-                <a:schemeClr val="tx1"/>
-              </a:solidFill>
-              <a:latin typeface="Times New Roman" panose="02020603050405020304" pitchFamily="18" charset="0"/>
-              <a:cs typeface="Times New Roman" panose="02020603050405020304" pitchFamily="18" charset="0"/>
-            </a:endParaRPr>
-          </a:p>
-          <a:p>
-            <a:r>
-              <a:rPr lang="en-US" dirty="0">
-                <a:solidFill>
-                  <a:schemeClr val="tx1"/>
-                </a:solidFill>
-                <a:latin typeface="Times New Roman" panose="02020603050405020304" pitchFamily="18" charset="0"/>
-                <a:cs typeface="Times New Roman" panose="02020603050405020304" pitchFamily="18" charset="0"/>
-              </a:rPr>
-              <a:t>This test can reveal whether the model shows gender bias.</a:t>
+              <a:t>Should models know that most nurses are women? 🤔</a:t>
             </a:r>
           </a:p>
         </p:txBody>
       </p:sp>
-      <p:grpSp>
-        <p:nvGrpSpPr>
-          <p:cNvPr id="10" name="Group 9">
-            <a:extLst>
-              <a:ext uri="{FF2B5EF4-FFF2-40B4-BE49-F238E27FC236}">
-                <a16:creationId xmlns:a16="http://schemas.microsoft.com/office/drawing/2014/main" id="{73F5A32F-FCEB-4C0E-D7D3-A357D0CAA7C1}"/>
-              </a:ext>
-            </a:extLst>
-          </p:cNvPr>
-          <p:cNvGrpSpPr/>
-          <p:nvPr/>
-        </p:nvGrpSpPr>
-        <p:grpSpPr>
-          <a:xfrm>
-            <a:off x="1849120" y="4094480"/>
-            <a:ext cx="9786620" cy="922454"/>
-            <a:chOff x="1849120" y="4094480"/>
-            <a:chExt cx="9786620" cy="922454"/>
-          </a:xfrm>
-        </p:grpSpPr>
-        <p:sp>
-          <p:nvSpPr>
-            <p:cNvPr id="8" name="Rounded Rectangle 7">
-              <a:extLst>
-                <a:ext uri="{FF2B5EF4-FFF2-40B4-BE49-F238E27FC236}">
-                  <a16:creationId xmlns:a16="http://schemas.microsoft.com/office/drawing/2014/main" id="{92AEAB0D-9FA4-5F27-FC3C-EE32E61B94BC}"/>
-                </a:ext>
-              </a:extLst>
-            </p:cNvPr>
-            <p:cNvSpPr/>
-            <p:nvPr/>
-          </p:nvSpPr>
-          <p:spPr>
-            <a:xfrm>
-              <a:off x="1849120" y="4094480"/>
-              <a:ext cx="9588574" cy="922454"/>
-            </a:xfrm>
-            <a:prstGeom prst="roundRect">
-              <a:avLst>
-                <a:gd name="adj" fmla="val 5653"/>
-              </a:avLst>
-            </a:prstGeom>
-            <a:solidFill>
-              <a:srgbClr val="F9F9F9"/>
-            </a:solidFill>
-            <a:ln>
-              <a:noFill/>
-            </a:ln>
-          </p:spPr>
-          <p:style>
-            <a:lnRef idx="2">
-              <a:schemeClr val="accent1">
-                <a:shade val="15000"/>
-              </a:schemeClr>
-            </a:lnRef>
-            <a:fillRef idx="1">
-              <a:schemeClr val="accent1"/>
-            </a:fillRef>
-            <a:effectRef idx="0">
-              <a:schemeClr val="accent1"/>
-            </a:effectRef>
-            <a:fontRef idx="minor">
-              <a:schemeClr val="lt1"/>
-            </a:fontRef>
-          </p:style>
-          <p:txBody>
-            <a:bodyPr rtlCol="0" anchor="ctr"/>
-            <a:lstStyle/>
-            <a:p>
-              <a:pPr algn="ctr"/>
-              <a:endParaRPr lang="en-IL"/>
-            </a:p>
-          </p:txBody>
-        </p:sp>
-        <p:pic>
-          <p:nvPicPr>
-            <p:cNvPr id="6" name="Picture 5">
-              <a:extLst>
-                <a:ext uri="{FF2B5EF4-FFF2-40B4-BE49-F238E27FC236}">
-                  <a16:creationId xmlns:a16="http://schemas.microsoft.com/office/drawing/2014/main" id="{B07599CB-F545-9669-65A6-16D27EF85407}"/>
-                </a:ext>
-              </a:extLst>
-            </p:cNvPr>
-            <p:cNvPicPr>
-              <a:picLocks noChangeAspect="1"/>
-            </p:cNvPicPr>
-            <p:nvPr/>
-          </p:nvPicPr>
-          <p:blipFill>
-            <a:blip r:embed="rId3">
-              <a:clrChange>
-                <a:clrFrom>
-                  <a:srgbClr val="F9F9F9"/>
-                </a:clrFrom>
-                <a:clrTo>
-                  <a:srgbClr val="F9F9F9">
-                    <a:alpha val="0"/>
-                  </a:srgbClr>
-                </a:clrTo>
-              </a:clrChange>
-            </a:blip>
-            <a:stretch>
-              <a:fillRect/>
-            </a:stretch>
-          </p:blipFill>
-          <p:spPr>
-            <a:xfrm>
-              <a:off x="1934210" y="4094480"/>
-              <a:ext cx="4949868" cy="902134"/>
-            </a:xfrm>
-            <a:prstGeom prst="rect">
-              <a:avLst/>
-            </a:prstGeom>
-          </p:spPr>
-        </p:pic>
-        <p:pic>
-          <p:nvPicPr>
-            <p:cNvPr id="7" name="Picture 6">
-              <a:extLst>
-                <a:ext uri="{FF2B5EF4-FFF2-40B4-BE49-F238E27FC236}">
-                  <a16:creationId xmlns:a16="http://schemas.microsoft.com/office/drawing/2014/main" id="{B9175554-AC43-97C8-A8D9-666CBB317384}"/>
-                </a:ext>
-              </a:extLst>
-            </p:cNvPr>
-            <p:cNvPicPr>
-              <a:picLocks noChangeAspect="1"/>
-            </p:cNvPicPr>
-            <p:nvPr/>
-          </p:nvPicPr>
-          <p:blipFill>
-            <a:blip r:embed="rId4">
-              <a:clrChange>
-                <a:clrFrom>
-                  <a:srgbClr val="F9F9F9"/>
-                </a:clrFrom>
-                <a:clrTo>
-                  <a:srgbClr val="F9F9F9">
-                    <a:alpha val="0"/>
-                  </a:srgbClr>
-                </a:clrTo>
-              </a:clrChange>
-            </a:blip>
-            <a:stretch>
-              <a:fillRect/>
-            </a:stretch>
-          </p:blipFill>
-          <p:spPr>
-            <a:xfrm>
-              <a:off x="6567170" y="4162281"/>
-              <a:ext cx="5068570" cy="854653"/>
-            </a:xfrm>
-            <a:prstGeom prst="rect">
-              <a:avLst/>
-            </a:prstGeom>
-          </p:spPr>
-        </p:pic>
-      </p:grpSp>
     </p:spTree>
     <p:extLst>
       <p:ext uri="{BB962C8B-B14F-4D97-AF65-F5344CB8AC3E}">
@@ -30919,24 +30717,15 @@
                                   </p:childTnLst>
                                 </p:cTn>
                               </p:par>
-                            </p:childTnLst>
-                          </p:cTn>
-                        </p:par>
-                        <p:par>
-                          <p:cTn id="8" fill="hold">
-                            <p:stCondLst>
-                              <p:cond delay="250"/>
-                            </p:stCondLst>
-                            <p:childTnLst>
                               <p:par>
-                                <p:cTn id="9" presetID="10" presetClass="entr" presetSubtype="0" fill="hold" nodeType="afterEffect">
+                                <p:cTn id="8" presetID="10" presetClass="entr" presetSubtype="0" fill="hold" nodeType="withEffect">
                                   <p:stCondLst>
                                     <p:cond delay="0"/>
                                   </p:stCondLst>
                                   <p:childTnLst>
                                     <p:set>
                                       <p:cBhvr>
-                                        <p:cTn id="10" dur="1" fill="hold">
+                                        <p:cTn id="9" dur="1" fill="hold">
                                           <p:stCondLst>
                                             <p:cond delay="0"/>
                                           </p:stCondLst>
@@ -30958,7 +30747,7 @@
                                     </p:set>
                                     <p:animEffect transition="in" filter="fade">
                                       <p:cBhvr>
-                                        <p:cTn id="11" dur="250"/>
+                                        <p:cTn id="10" dur="250"/>
                                         <p:tgtEl>
                                           <p:spTgt spid="3">
                                             <p:txEl>
@@ -30974,14 +30763,23 @@
                             </p:childTnLst>
                           </p:cTn>
                         </p:par>
+                      </p:childTnLst>
+                    </p:cTn>
+                  </p:par>
+                  <p:par>
+                    <p:cTn id="11" fill="hold">
+                      <p:stCondLst>
+                        <p:cond delay="indefinite"/>
+                      </p:stCondLst>
+                      <p:childTnLst>
                         <p:par>
                           <p:cTn id="12" fill="hold">
                             <p:stCondLst>
-                              <p:cond delay="500"/>
+                              <p:cond delay="0"/>
                             </p:stCondLst>
                             <p:childTnLst>
                               <p:par>
-                                <p:cTn id="13" presetID="10" presetClass="entr" presetSubtype="0" fill="hold" nodeType="afterEffect">
+                                <p:cTn id="13" presetID="10" presetClass="entr" presetSubtype="0" fill="hold" nodeType="clickEffect">
                                   <p:stCondLst>
                                     <p:cond delay="0"/>
                                   </p:stCondLst>
@@ -31057,7 +30855,7 @@
                                         <p:tgtEl>
                                           <p:spTgt spid="3">
                                             <p:txEl>
-                                              <p:pRg st="4" end="4"/>
+                                              <p:pRg st="3" end="3"/>
                                             </p:txEl>
                                           </p:spTgt>
                                         </p:tgtEl>
@@ -31075,7 +30873,7 @@
                                         <p:tgtEl>
                                           <p:spTgt spid="3">
                                             <p:txEl>
-                                              <p:pRg st="4" end="4"/>
+                                              <p:pRg st="3" end="3"/>
                                             </p:txEl>
                                           </p:spTgt>
                                         </p:tgtEl>
@@ -31118,7 +30916,7 @@
                                         <p:tgtEl>
                                           <p:spTgt spid="3">
                                             <p:txEl>
-                                              <p:pRg st="6" end="6"/>
+                                              <p:pRg st="4" end="4"/>
                                             </p:txEl>
                                           </p:spTgt>
                                         </p:tgtEl>
@@ -31136,53 +30934,9 @@
                                         <p:tgtEl>
                                           <p:spTgt spid="3">
                                             <p:txEl>
-                                              <p:pRg st="6" end="6"/>
+                                              <p:pRg st="4" end="4"/>
                                             </p:txEl>
                                           </p:spTgt>
-                                        </p:tgtEl>
-                                      </p:cBhvr>
-                                    </p:animEffect>
-                                  </p:childTnLst>
-                                </p:cTn>
-                              </p:par>
-                            </p:childTnLst>
-                          </p:cTn>
-                        </p:par>
-                        <p:par>
-                          <p:cTn id="26" fill="hold">
-                            <p:stCondLst>
-                              <p:cond delay="250"/>
-                            </p:stCondLst>
-                            <p:childTnLst>
-                              <p:par>
-                                <p:cTn id="27" presetID="10" presetClass="entr" presetSubtype="0" fill="hold" nodeType="afterEffect">
-                                  <p:stCondLst>
-                                    <p:cond delay="0"/>
-                                  </p:stCondLst>
-                                  <p:childTnLst>
-                                    <p:set>
-                                      <p:cBhvr>
-                                        <p:cTn id="28" dur="1" fill="hold">
-                                          <p:stCondLst>
-                                            <p:cond delay="0"/>
-                                          </p:stCondLst>
-                                        </p:cTn>
-                                        <p:tgtEl>
-                                          <p:spTgt spid="10"/>
-                                        </p:tgtEl>
-                                        <p:attrNameLst>
-                                          <p:attrName>style.visibility</p:attrName>
-                                        </p:attrNameLst>
-                                      </p:cBhvr>
-                                      <p:to>
-                                        <p:strVal val="visible"/>
-                                      </p:to>
-                                    </p:set>
-                                    <p:animEffect transition="in" filter="fade">
-                                      <p:cBhvr>
-                                        <p:cTn id="29" dur="250"/>
-                                        <p:tgtEl>
-                                          <p:spTgt spid="10"/>
                                         </p:tgtEl>
                                       </p:cBhvr>
                                     </p:animEffect>
@@ -31196,26 +30950,26 @@
                     </p:cTn>
                   </p:par>
                   <p:par>
-                    <p:cTn id="30" fill="hold">
+                    <p:cTn id="26" fill="hold">
                       <p:stCondLst>
                         <p:cond delay="indefinite"/>
                       </p:stCondLst>
                       <p:childTnLst>
                         <p:par>
-                          <p:cTn id="31" fill="hold">
+                          <p:cTn id="27" fill="hold">
                             <p:stCondLst>
                               <p:cond delay="0"/>
                             </p:stCondLst>
                             <p:childTnLst>
                               <p:par>
-                                <p:cTn id="32" presetID="10" presetClass="entr" presetSubtype="0" fill="hold" nodeType="clickEffect">
+                                <p:cTn id="28" presetID="10" presetClass="entr" presetSubtype="0" fill="hold" nodeType="clickEffect">
                                   <p:stCondLst>
                                     <p:cond delay="0"/>
                                   </p:stCondLst>
                                   <p:childTnLst>
                                     <p:set>
                                       <p:cBhvr>
-                                        <p:cTn id="33" dur="1" fill="hold">
+                                        <p:cTn id="29" dur="1" fill="hold">
                                           <p:stCondLst>
                                             <p:cond delay="0"/>
                                           </p:stCondLst>
@@ -31223,7 +30977,7 @@
                                         <p:tgtEl>
                                           <p:spTgt spid="3">
                                             <p:txEl>
-                                              <p:charRg st="330" end="388"/>
+                                              <p:pRg st="5" end="5"/>
                                             </p:txEl>
                                           </p:spTgt>
                                         </p:tgtEl>
@@ -31237,11 +30991,186 @@
                                     </p:set>
                                     <p:animEffect transition="in" filter="fade">
                                       <p:cBhvr>
-                                        <p:cTn id="34" dur="500"/>
+                                        <p:cTn id="30" dur="250"/>
                                         <p:tgtEl>
                                           <p:spTgt spid="3">
                                             <p:txEl>
-                                              <p:charRg st="330" end="388"/>
+                                              <p:pRg st="5" end="5"/>
+                                            </p:txEl>
+                                          </p:spTgt>
+                                        </p:tgtEl>
+                                      </p:cBhvr>
+                                    </p:animEffect>
+                                  </p:childTnLst>
+                                </p:cTn>
+                              </p:par>
+                            </p:childTnLst>
+                          </p:cTn>
+                        </p:par>
+                      </p:childTnLst>
+                    </p:cTn>
+                  </p:par>
+                  <p:par>
+                    <p:cTn id="31" fill="hold">
+                      <p:stCondLst>
+                        <p:cond delay="indefinite"/>
+                      </p:stCondLst>
+                      <p:childTnLst>
+                        <p:par>
+                          <p:cTn id="32" fill="hold">
+                            <p:stCondLst>
+                              <p:cond delay="0"/>
+                            </p:stCondLst>
+                            <p:childTnLst>
+                              <p:par>
+                                <p:cTn id="33" presetID="10" presetClass="entr" presetSubtype="0" fill="hold" nodeType="clickEffect">
+                                  <p:stCondLst>
+                                    <p:cond delay="0"/>
+                                  </p:stCondLst>
+                                  <p:childTnLst>
+                                    <p:set>
+                                      <p:cBhvr>
+                                        <p:cTn id="34" dur="1" fill="hold">
+                                          <p:stCondLst>
+                                            <p:cond delay="0"/>
+                                          </p:stCondLst>
+                                        </p:cTn>
+                                        <p:tgtEl>
+                                          <p:spTgt spid="11"/>
+                                        </p:tgtEl>
+                                        <p:attrNameLst>
+                                          <p:attrName>style.visibility</p:attrName>
+                                        </p:attrNameLst>
+                                      </p:cBhvr>
+                                      <p:to>
+                                        <p:strVal val="visible"/>
+                                      </p:to>
+                                    </p:set>
+                                    <p:animEffect transition="in" filter="fade">
+                                      <p:cBhvr>
+                                        <p:cTn id="35" dur="250"/>
+                                        <p:tgtEl>
+                                          <p:spTgt spid="11"/>
+                                        </p:tgtEl>
+                                      </p:cBhvr>
+                                    </p:animEffect>
+                                  </p:childTnLst>
+                                </p:cTn>
+                              </p:par>
+                            </p:childTnLst>
+                          </p:cTn>
+                        </p:par>
+                      </p:childTnLst>
+                    </p:cTn>
+                  </p:par>
+                  <p:par>
+                    <p:cTn id="36" fill="hold">
+                      <p:stCondLst>
+                        <p:cond delay="indefinite"/>
+                      </p:stCondLst>
+                      <p:childTnLst>
+                        <p:par>
+                          <p:cTn id="37" fill="hold">
+                            <p:stCondLst>
+                              <p:cond delay="0"/>
+                            </p:stCondLst>
+                            <p:childTnLst>
+                              <p:par>
+                                <p:cTn id="38" presetID="10" presetClass="entr" presetSubtype="0" fill="hold" nodeType="clickEffect">
+                                  <p:stCondLst>
+                                    <p:cond delay="0"/>
+                                  </p:stCondLst>
+                                  <p:childTnLst>
+                                    <p:set>
+                                      <p:cBhvr>
+                                        <p:cTn id="39" dur="1" fill="hold">
+                                          <p:stCondLst>
+                                            <p:cond delay="0"/>
+                                          </p:stCondLst>
+                                        </p:cTn>
+                                        <p:tgtEl>
+                                          <p:spTgt spid="14">
+                                            <p:txEl>
+                                              <p:pRg st="0" end="0"/>
+                                            </p:txEl>
+                                          </p:spTgt>
+                                        </p:tgtEl>
+                                        <p:attrNameLst>
+                                          <p:attrName>style.visibility</p:attrName>
+                                        </p:attrNameLst>
+                                      </p:cBhvr>
+                                      <p:to>
+                                        <p:strVal val="visible"/>
+                                      </p:to>
+                                    </p:set>
+                                    <p:animEffect transition="in" filter="fade">
+                                      <p:cBhvr>
+                                        <p:cTn id="40" dur="250"/>
+                                        <p:tgtEl>
+                                          <p:spTgt spid="14">
+                                            <p:txEl>
+                                              <p:pRg st="0" end="0"/>
+                                            </p:txEl>
+                                          </p:spTgt>
+                                        </p:tgtEl>
+                                      </p:cBhvr>
+                                    </p:animEffect>
+                                  </p:childTnLst>
+                                </p:cTn>
+                              </p:par>
+                            </p:childTnLst>
+                          </p:cTn>
+                        </p:par>
+                      </p:childTnLst>
+                    </p:cTn>
+                  </p:par>
+                  <p:par>
+                    <p:cTn id="41" fill="hold">
+                      <p:stCondLst>
+                        <p:cond delay="indefinite"/>
+                      </p:stCondLst>
+                      <p:childTnLst>
+                        <p:par>
+                          <p:cTn id="42" fill="hold">
+                            <p:stCondLst>
+                              <p:cond delay="0"/>
+                            </p:stCondLst>
+                            <p:childTnLst>
+                              <p:par>
+                                <p:cTn id="43" presetID="10" presetClass="entr" presetSubtype="0" fill="hold" nodeType="clickEffect">
+                                  <p:stCondLst>
+                                    <p:cond delay="0"/>
+                                  </p:stCondLst>
+                                  <p:childTnLst>
+                                    <p:set>
+                                      <p:cBhvr>
+                                        <p:cTn id="44" dur="1" fill="hold">
+                                          <p:stCondLst>
+                                            <p:cond delay="0"/>
+                                          </p:stCondLst>
+                                        </p:cTn>
+                                        <p:tgtEl>
+                                          <p:spTgt spid="14">
+                                            <p:txEl>
+                                              <p:pRg st="2" end="2"/>
+                                            </p:txEl>
+                                          </p:spTgt>
+                                        </p:tgtEl>
+                                        <p:attrNameLst>
+                                          <p:attrName>style.visibility</p:attrName>
+                                        </p:attrNameLst>
+                                      </p:cBhvr>
+                                      <p:to>
+                                        <p:strVal val="visible"/>
+                                      </p:to>
+                                    </p:set>
+                                    <p:animEffect transition="in" filter="fade">
+                                      <p:cBhvr>
+                                        <p:cTn id="45" dur="250"/>
+                                        <p:tgtEl>
+                                          <p:spTgt spid="14">
+                                            <p:txEl>
+                                              <p:pRg st="2" end="2"/>
                                             </p:txEl>
                                           </p:spTgt>
                                         </p:tgtEl>
@@ -33116,7 +33045,7 @@
                 <a:latin typeface="Times New Roman" panose="02020603050405020304" pitchFamily="18" charset="0"/>
                 <a:cs typeface="Times New Roman" panose="02020603050405020304" pitchFamily="18" charset="0"/>
               </a:rPr>
-              <a:t>The training process of LLaMA models is expensive environmentally harmful</a:t>
+              <a:t>The training process of LLaMA models is expensive and environmentally harmful</a:t>
             </a:r>
           </a:p>
           <a:p>
@@ -35633,7 +35562,7 @@
                 <a:latin typeface="Times New Roman" panose="02020603050405020304" pitchFamily="18" charset="0"/>
                 <a:cs typeface="Times New Roman" panose="02020603050405020304" pitchFamily="18" charset="0"/>
               </a:rPr>
-              <a:t>3 additional metrics,</a:t>
+              <a:t>3 additional metrics</a:t>
             </a:r>
             <a:endParaRPr lang="en-US" sz="1800" dirty="0"/>
           </a:p>
@@ -37044,7 +36973,7 @@
                 <a:latin typeface="Times New Roman" panose="02020603050405020304" pitchFamily="18" charset="0"/>
                 <a:cs typeface="Times New Roman" panose="02020603050405020304" pitchFamily="18" charset="0"/>
               </a:rPr>
-              <a:t>. (OBQA)</a:t>
+              <a:t> (OBQA)</a:t>
             </a:r>
           </a:p>
           <a:p>
@@ -37074,7 +37003,7 @@
                 <a:latin typeface="Times New Roman" panose="02020603050405020304" pitchFamily="18" charset="0"/>
                 <a:cs typeface="Times New Roman" panose="02020603050405020304" pitchFamily="18" charset="0"/>
               </a:rPr>
-              <a:t>Tests model’s ability to answer questions using only internal knowledge, without access to external documents.</a:t>
+              <a:t>Tests model’s ability to answer questions using only internal knowledge, without access to external resources</a:t>
             </a:r>
           </a:p>
           <a:p>
@@ -37095,22 +37024,33 @@
                 <a:latin typeface="Times New Roman" panose="02020603050405020304" pitchFamily="18" charset="0"/>
                 <a:cs typeface="Times New Roman" panose="02020603050405020304" pitchFamily="18" charset="0"/>
               </a:rPr>
-              <a:t> Natural Questions, </a:t>
+              <a:t> </a:t>
             </a:r>
             <a:r>
               <a:rPr lang="en-US" sz="1400" i="0" dirty="0" err="1">
                 <a:latin typeface="Times New Roman" panose="02020603050405020304" pitchFamily="18" charset="0"/>
                 <a:cs typeface="Times New Roman" panose="02020603050405020304" pitchFamily="18" charset="0"/>
               </a:rPr>
-              <a:t>TriviaQA</a:t>
+              <a:t>NaturalQuestions</a:t>
             </a:r>
             <a:r>
               <a:rPr lang="en-US" sz="1400" i="0" dirty="0">
                 <a:latin typeface="Times New Roman" panose="02020603050405020304" pitchFamily="18" charset="0"/>
                 <a:cs typeface="Times New Roman" panose="02020603050405020304" pitchFamily="18" charset="0"/>
               </a:rPr>
-              <a:t>.</a:t>
-            </a:r>
+              <a:t>, </a:t>
+            </a:r>
+            <a:r>
+              <a:rPr lang="en-US" sz="1400" i="0" dirty="0" err="1">
+                <a:latin typeface="Times New Roman" panose="02020603050405020304" pitchFamily="18" charset="0"/>
+                <a:cs typeface="Times New Roman" panose="02020603050405020304" pitchFamily="18" charset="0"/>
+              </a:rPr>
+              <a:t>TriviaQA</a:t>
+            </a:r>
+            <a:endParaRPr lang="en-US" sz="1400" i="0" dirty="0">
+              <a:latin typeface="Times New Roman" panose="02020603050405020304" pitchFamily="18" charset="0"/>
+              <a:cs typeface="Times New Roman" panose="02020603050405020304" pitchFamily="18" charset="0"/>
+            </a:endParaRPr>
           </a:p>
           <a:p>
             <a:pPr>
@@ -37139,7 +37079,7 @@
                 <a:latin typeface="Times New Roman" panose="02020603050405020304" pitchFamily="18" charset="0"/>
                 <a:cs typeface="Times New Roman" panose="02020603050405020304" pitchFamily="18" charset="0"/>
               </a:rPr>
-              <a:t>Measures understanding of text passages using middle and high school English exam questions.</a:t>
+              <a:t>Measures understanding of text passages using middle and high school English exam questions</a:t>
             </a:r>
             <a:endParaRPr lang="en-US" sz="1400" dirty="0">
               <a:latin typeface="Times New Roman" panose="02020603050405020304" pitchFamily="18" charset="0"/>
@@ -37164,7 +37104,7 @@
                 <a:latin typeface="Times New Roman" panose="02020603050405020304" pitchFamily="18" charset="0"/>
                 <a:cs typeface="Times New Roman" panose="02020603050405020304" pitchFamily="18" charset="0"/>
               </a:rPr>
-              <a:t> RACE-middle, RACE-high.</a:t>
+              <a:t> RACE-middle, RACE-high</a:t>
             </a:r>
           </a:p>
           <a:p>
@@ -37194,7 +37134,7 @@
                 <a:latin typeface="Times New Roman" panose="02020603050405020304" pitchFamily="18" charset="0"/>
                 <a:cs typeface="Times New Roman" panose="02020603050405020304" pitchFamily="18" charset="0"/>
               </a:rPr>
-              <a:t>Assesses capability to solve middle and high school level math problems.</a:t>
+              <a:t>Assesses capability to solve middle and high school level math problems</a:t>
             </a:r>
           </a:p>
           <a:p>
@@ -37215,7 +37155,7 @@
                 <a:latin typeface="Times New Roman" panose="02020603050405020304" pitchFamily="18" charset="0"/>
                 <a:cs typeface="Times New Roman" panose="02020603050405020304" pitchFamily="18" charset="0"/>
               </a:rPr>
-              <a:t> MATH, GSM8k.</a:t>
+              <a:t> MATH, GSM8k</a:t>
             </a:r>
           </a:p>
           <a:p>
@@ -37245,7 +37185,7 @@
                 <a:latin typeface="Times New Roman" panose="02020603050405020304" pitchFamily="18" charset="0"/>
                 <a:cs typeface="Times New Roman" panose="02020603050405020304" pitchFamily="18" charset="0"/>
               </a:rPr>
-              <a:t>Evaluates ability to generate functional Python code from natural language descriptions.</a:t>
+              <a:t>Evaluates ability to generate functional Python code from natural language descriptions</a:t>
             </a:r>
           </a:p>
           <a:p>
@@ -37280,7 +37220,7 @@
                 <a:latin typeface="Times New Roman" panose="02020603050405020304" pitchFamily="18" charset="0"/>
                 <a:cs typeface="Times New Roman" panose="02020603050405020304" pitchFamily="18" charset="0"/>
               </a:rPr>
-              <a:t>, MBPP.</a:t>
+              <a:t>, MBPP</a:t>
             </a:r>
           </a:p>
           <a:p>
@@ -37310,7 +37250,7 @@
                 <a:latin typeface="Times New Roman" panose="02020603050405020304" pitchFamily="18" charset="0"/>
                 <a:cs typeface="Times New Roman" panose="02020603050405020304" pitchFamily="18" charset="0"/>
               </a:rPr>
-              <a:t>A comprehensive test covering diverse domains like humanities, STEM, and social sciences.</a:t>
+              <a:t>A comprehensive test covering diverse domains like humanities, STEM, and social sciences</a:t>
             </a:r>
           </a:p>
           <a:p>
@@ -37331,7 +37271,7 @@
                 <a:latin typeface="Times New Roman" panose="02020603050405020304" pitchFamily="18" charset="0"/>
                 <a:cs typeface="Times New Roman" panose="02020603050405020304" pitchFamily="18" charset="0"/>
               </a:rPr>
-              <a:t> MMLU.</a:t>
+              <a:t> MMLU</a:t>
             </a:r>
           </a:p>
         </p:txBody>
@@ -38341,8 +38281,8 @@
           </a:p>
         </p:txBody>
       </p:sp>
-      <mc:AlternateContent xmlns:mc="http://schemas.openxmlformats.org/markup-compatibility/2006" xmlns:a14="http://schemas.microsoft.com/office/drawing/2010/main">
-        <mc:Choice Requires="a14">
+      <mc:AlternateContent xmlns:mc="http://schemas.openxmlformats.org/markup-compatibility/2006">
+        <mc:Choice xmlns:a14="http://schemas.microsoft.com/office/drawing/2010/main" Requires="a14">
           <p:sp>
             <p:nvSpPr>
               <p:cNvPr id="3" name="Content Placeholder 2">
@@ -38584,8 +38524,25 @@
                     <a:latin typeface="Times New Roman" panose="02020603050405020304" pitchFamily="18" charset="0"/>
                     <a:cs typeface="Times New Roman" panose="02020603050405020304" pitchFamily="18" charset="0"/>
                   </a:rPr>
-                  <a:t>,</a:t>
+                  <a:t>, </a:t>
                 </a:r>
+                <a:r>
+                  <a:rPr lang="en-US" i="0" dirty="0" err="1">
+                    <a:solidFill>
+                      <a:schemeClr val="tx1"/>
+                    </a:solidFill>
+                    <a:latin typeface="Times New Roman" panose="02020603050405020304" pitchFamily="18" charset="0"/>
+                    <a:cs typeface="Times New Roman" panose="02020603050405020304" pitchFamily="18" charset="0"/>
+                  </a:rPr>
+                  <a:t>TruethfulQA</a:t>
+                </a:r>
+                <a:endParaRPr lang="en-US" i="0" dirty="0">
+                  <a:solidFill>
+                    <a:schemeClr val="tx1"/>
+                  </a:solidFill>
+                  <a:latin typeface="Times New Roman" panose="02020603050405020304" pitchFamily="18" charset="0"/>
+                  <a:cs typeface="Times New Roman" panose="02020603050405020304" pitchFamily="18" charset="0"/>
+                </a:endParaRPr>
               </a:p>
               <a:p>
                 <a:endParaRPr lang="en-US" b="1" i="0" dirty="0">
@@ -38727,7 +38684,7 @@
             </p:txBody>
           </p:sp>
         </mc:Choice>
-        <mc:Fallback xmlns="">
+        <mc:Fallback>
           <p:sp>
             <p:nvSpPr>
               <p:cNvPr id="3" name="Content Placeholder 2">

--- a/presentation/Lecture Slides.pptx
+++ b/presentation/Lecture Slides.pptx
@@ -1946,36 +1946,23 @@
           <a:bodyPr/>
           <a:lstStyle/>
           <a:p>
-            <a:pPr marL="0" algn="r" defTabSz="914400" rtl="1" eaLnBrk="1" latinLnBrk="0" hangingPunct="1"/>
+            <a:pPr marL="171450" indent="-171450" algn="r" defTabSz="914400" rtl="1" eaLnBrk="1" latinLnBrk="0" hangingPunct="1">
+              <a:buFont typeface="Arial" panose="020B0604020202020204" pitchFamily="34" charset="0"/>
+              <a:buChar char="•"/>
+            </a:pPr>
             <a:r>
               <a:rPr lang="he-IL" dirty="0"/>
-              <a:t>0.5</a:t>
-            </a:r>
-            <a:endParaRPr lang="en-US" dirty="0"/>
-          </a:p>
-          <a:p>
-            <a:pPr marL="0" algn="r" defTabSz="914400" rtl="1" eaLnBrk="1" latinLnBrk="0" hangingPunct="1"/>
-            <a:endParaRPr lang="en-US" dirty="0"/>
-          </a:p>
-          <a:p>
-            <a:pPr marL="0" algn="r" defTabSz="914400" rtl="1" eaLnBrk="1" latinLnBrk="0" hangingPunct="1"/>
+              <a:t>הצגה עצמית</a:t>
+            </a:r>
+          </a:p>
+          <a:p>
+            <a:pPr marL="171450" indent="-171450" algn="r" defTabSz="914400" rtl="1" eaLnBrk="1" latinLnBrk="0" hangingPunct="1">
+              <a:buFont typeface="Arial" panose="020B0604020202020204" pitchFamily="34" charset="0"/>
+              <a:buChar char="•"/>
+            </a:pPr>
             <a:r>
               <a:rPr lang="he-IL" dirty="0"/>
-              <a:t>שלום לכולם,</a:t>
-            </a:r>
-          </a:p>
-          <a:p>
-            <a:pPr marL="0" algn="r" defTabSz="914400" rtl="1" eaLnBrk="1" latinLnBrk="0" hangingPunct="1"/>
-            <a:r>
-              <a:rPr lang="he-IL" dirty="0"/>
-              <a:t>שמי שלומי בן שושן,</a:t>
-            </a:r>
-          </a:p>
-          <a:p>
-            <a:pPr marL="0" algn="r" defTabSz="914400" rtl="1" eaLnBrk="1" latinLnBrk="0" hangingPunct="1"/>
-            <a:r>
-              <a:rPr lang="he-IL" dirty="0"/>
-              <a:t>והיום אציג את הערכת הביצועים של מודלי </a:t>
+              <a:t>הערכת ביצועים של מודלי </a:t>
             </a:r>
             <a:r>
               <a:rPr lang="en-US" dirty="0"/>
@@ -1991,7 +1978,17 @@
             </a:r>
             <a:r>
               <a:rPr lang="he-IL" dirty="0"/>
-              <a:t> ומטריקות, תוך השוואה למודלים מתחרים נכון לשנת 2023.</a:t>
+              <a:t> ומטריקות</a:t>
+            </a:r>
+          </a:p>
+          <a:p>
+            <a:pPr marL="171450" indent="-171450" algn="r" defTabSz="914400" rtl="1" eaLnBrk="1" latinLnBrk="0" hangingPunct="1">
+              <a:buFont typeface="Arial" panose="020B0604020202020204" pitchFamily="34" charset="0"/>
+              <a:buChar char="•"/>
+            </a:pPr>
+            <a:r>
+              <a:rPr lang="he-IL" dirty="0"/>
+              <a:t>השוואה למודלים מתחרים נכון לשנת 2023</a:t>
             </a:r>
           </a:p>
         </p:txBody>
@@ -13336,7 +13333,21 @@
                 <a:latin typeface="Times New Roman" panose="02020603050405020304" pitchFamily="18" charset="0"/>
                 <a:cs typeface="Times New Roman" panose="02020603050405020304" pitchFamily="18" charset="0"/>
               </a:rPr>
-              <a:t>LLaMA-13B outperforms GPT-3 on most benchmarks despite being 10x smaller.</a:t>
+              <a:t>LLaMA-13B outperforms GPT-3 on most benchmarks despite being 10</a:t>
+            </a:r>
+            <a:r>
+              <a:rPr lang="en-IL" dirty="0"/>
+              <a:t>×</a:t>
+            </a:r>
+            <a:r>
+              <a:rPr lang="en-US" dirty="0">
+                <a:solidFill>
+                  <a:schemeClr val="tx1"/>
+                </a:solidFill>
+                <a:latin typeface="Times New Roman" panose="02020603050405020304" pitchFamily="18" charset="0"/>
+                <a:cs typeface="Times New Roman" panose="02020603050405020304" pitchFamily="18" charset="0"/>
+              </a:rPr>
+              <a:t> smaller.</a:t>
             </a:r>
           </a:p>
         </p:txBody>
@@ -14835,7 +14846,21 @@
                 <a:latin typeface="Times New Roman" panose="02020603050405020304" pitchFamily="18" charset="0"/>
                 <a:cs typeface="Times New Roman" panose="02020603050405020304" pitchFamily="18" charset="0"/>
               </a:rPr>
-              <a:t>LLaMA-13B competitive with GPT-3 and Chinchilla although being 5-10x smaller.</a:t>
+              <a:t>LLaMA-13B competitive with GPT-3 and Chinchilla although being 5-10</a:t>
+            </a:r>
+            <a:r>
+              <a:rPr lang="en-IL" dirty="0"/>
+              <a:t>×</a:t>
+            </a:r>
+            <a:r>
+              <a:rPr lang="en-US" dirty="0">
+                <a:solidFill>
+                  <a:schemeClr val="tx1"/>
+                </a:solidFill>
+                <a:latin typeface="Times New Roman" panose="02020603050405020304" pitchFamily="18" charset="0"/>
+                <a:cs typeface="Times New Roman" panose="02020603050405020304" pitchFamily="18" charset="0"/>
+              </a:rPr>
+              <a:t> smaller.</a:t>
             </a:r>
           </a:p>
           <a:p>
@@ -24344,12 +24369,12 @@
         <p:spPr>
           <a:xfrm>
             <a:off x="1371600" y="355701"/>
-            <a:ext cx="9601200" cy="660197"/>
+            <a:ext cx="9984260" cy="660197"/>
           </a:xfrm>
         </p:spPr>
         <p:txBody>
           <a:bodyPr>
-            <a:normAutofit fontScale="90000"/>
+            <a:normAutofit/>
           </a:bodyPr>
           <a:lstStyle/>
           <a:p>
@@ -24359,7 +24384,7 @@
               </a:spcAft>
             </a:pPr>
             <a:r>
-              <a:rPr lang="en-US" b="1" i="0" dirty="0">
+              <a:rPr lang="en-US" sz="3600" b="1" i="0" dirty="0">
                 <a:solidFill>
                   <a:schemeClr val="tx1"/>
                 </a:solidFill>
@@ -24367,9 +24392,9 @@
                 <a:latin typeface="Times New Roman" panose="02020603050405020304" pitchFamily="18" charset="0"/>
                 <a:cs typeface="Times New Roman" panose="02020603050405020304" pitchFamily="18" charset="0"/>
               </a:rPr>
-              <a:t>Bias, Toxicity and Misinformation</a:t>
-            </a:r>
-            <a:endParaRPr lang="en-IL" dirty="0">
+              <a:t>Harmfulness: Bias, Toxicity and Misinformation</a:t>
+            </a:r>
+            <a:endParaRPr lang="en-IL" sz="3600" dirty="0">
               <a:solidFill>
                 <a:schemeClr val="tx1"/>
               </a:solidFill>
@@ -25315,7 +25340,7 @@
         <p:spPr>
           <a:xfrm>
             <a:off x="1371600" y="1133856"/>
-            <a:ext cx="9601200" cy="5500026"/>
+            <a:ext cx="9601200" cy="5625290"/>
           </a:xfrm>
         </p:spPr>
         <p:txBody>
@@ -25324,6 +25349,10 @@
           </a:bodyPr>
           <a:lstStyle/>
           <a:p>
+            <a:pPr marL="457200" indent="-457200">
+              <a:buFont typeface="+mj-lt"/>
+              <a:buAutoNum type="arabicPeriod"/>
+            </a:pPr>
             <a:r>
               <a:rPr lang="en-US" b="0" i="0" dirty="0">
                 <a:solidFill>
@@ -25342,6 +25371,10 @@
             </a:endParaRPr>
           </a:p>
           <a:p>
+            <a:pPr marL="457200" indent="-457200">
+              <a:buFont typeface="+mj-lt"/>
+              <a:buAutoNum type="arabicPeriod"/>
+            </a:pPr>
             <a:r>
               <a:rPr lang="en-US" dirty="0">
                 <a:solidFill>
@@ -25359,13 +25392,24 @@
                   <a:schemeClr val="tx1"/>
                 </a:solidFill>
               </a:rPr>
+              <a:t>Categories:</a:t>
+            </a:r>
+          </a:p>
+          <a:p>
+            <a:pPr lvl="2"/>
+            <a:r>
+              <a:rPr lang="en-US" sz="1400" dirty="0">
+                <a:solidFill>
+                  <a:schemeClr val="tx1"/>
+                </a:solidFill>
+              </a:rPr>
               <a:t>Common Sense Reasoning</a:t>
             </a:r>
           </a:p>
           <a:p>
-            <a:pPr lvl="1"/>
-            <a:r>
-              <a:rPr lang="en-US" sz="1600" dirty="0">
+            <a:pPr lvl="2"/>
+            <a:r>
+              <a:rPr lang="en-US" sz="1400" dirty="0">
                 <a:solidFill>
                   <a:schemeClr val="tx1"/>
                 </a:solidFill>
@@ -25374,9 +25418,9 @@
             </a:r>
           </a:p>
           <a:p>
-            <a:pPr lvl="1"/>
-            <a:r>
-              <a:rPr lang="en-US" sz="1600" dirty="0">
+            <a:pPr lvl="2"/>
+            <a:r>
+              <a:rPr lang="en-US" sz="1400" dirty="0">
                 <a:solidFill>
                   <a:schemeClr val="tx1"/>
                 </a:solidFill>
@@ -25385,9 +25429,9 @@
             </a:r>
           </a:p>
           <a:p>
-            <a:pPr lvl="1"/>
-            <a:r>
-              <a:rPr lang="en-US" sz="1600" dirty="0">
+            <a:pPr lvl="2"/>
+            <a:r>
+              <a:rPr lang="en-US" sz="1400" dirty="0">
                 <a:solidFill>
                   <a:schemeClr val="tx1"/>
                 </a:solidFill>
@@ -25396,9 +25440,9 @@
             </a:r>
           </a:p>
           <a:p>
-            <a:pPr lvl="1"/>
-            <a:r>
-              <a:rPr lang="en-US" sz="1600" dirty="0">
+            <a:pPr lvl="2"/>
+            <a:r>
+              <a:rPr lang="en-US" sz="1400" dirty="0">
                 <a:solidFill>
                   <a:schemeClr val="tx1"/>
                 </a:solidFill>
@@ -25407,16 +25451,16 @@
             </a:r>
           </a:p>
           <a:p>
-            <a:pPr lvl="1"/>
-            <a:r>
-              <a:rPr lang="en-US" sz="1600" dirty="0">
+            <a:pPr lvl="2"/>
+            <a:r>
+              <a:rPr lang="en-US" sz="1400" dirty="0">
                 <a:solidFill>
                   <a:schemeClr val="tx1"/>
                 </a:solidFill>
               </a:rPr>
               <a:t>MMLU</a:t>
             </a:r>
-            <a:endParaRPr lang="he-IL" sz="1600" dirty="0">
+            <a:endParaRPr lang="he-IL" sz="1400" dirty="0">
               <a:solidFill>
                 <a:schemeClr val="tx1"/>
               </a:solidFill>
@@ -25434,6 +25478,10 @@
             </a:r>
           </a:p>
           <a:p>
+            <a:pPr marL="457200" indent="-457200">
+              <a:buFont typeface="+mj-lt"/>
+              <a:buAutoNum type="arabicPeriod"/>
+            </a:pPr>
             <a:r>
               <a:rPr lang="en-US" dirty="0">
                 <a:solidFill>
@@ -25451,7 +25499,7 @@
                   <a:schemeClr val="tx1"/>
                 </a:solidFill>
               </a:rPr>
-              <a:t>Instruction Finetuning</a:t>
+              <a:t>Instruction Finetuning (proof-of-concept)</a:t>
             </a:r>
           </a:p>
           <a:p>
@@ -25465,7 +25513,7 @@
                 <a:latin typeface="Times New Roman" panose="02020603050405020304" pitchFamily="18" charset="0"/>
                 <a:cs typeface="Times New Roman" panose="02020603050405020304" pitchFamily="18" charset="0"/>
               </a:rPr>
-              <a:t>Bias, Toxicity and Truthfulness</a:t>
+              <a:t>Harmfulness: Bias, Toxicity and Misinformation</a:t>
             </a:r>
           </a:p>
           <a:p>
@@ -25476,10 +25524,14 @@
                   <a:schemeClr val="tx1"/>
                 </a:solidFill>
               </a:rPr>
-              <a:t>Carbon Footprint</a:t>
-            </a:r>
-          </a:p>
-          <a:p>
+              <a:t>Environmental Damage: Carbon Footprint</a:t>
+            </a:r>
+          </a:p>
+          <a:p>
+            <a:pPr marL="457200" indent="-457200">
+              <a:buFont typeface="+mj-lt"/>
+              <a:buAutoNum type="arabicPeriod"/>
+            </a:pPr>
             <a:r>
               <a:rPr lang="en-US" dirty="0">
                 <a:solidFill>
@@ -25490,6 +25542,10 @@
             </a:r>
           </a:p>
           <a:p>
+            <a:pPr marL="457200" indent="-457200">
+              <a:buFont typeface="+mj-lt"/>
+              <a:buAutoNum type="arabicPeriod"/>
+            </a:pPr>
             <a:r>
               <a:rPr lang="en-US" b="0" i="0" dirty="0">
                 <a:solidFill>
@@ -30613,32 +30669,6 @@
               <a:t>LLaMA handle neutral pronouns well, but make more mistakes with gendered pronouns, showing they likely have gender bias.</a:t>
             </a:r>
           </a:p>
-          <a:p>
-            <a:endParaRPr lang="en-US" dirty="0">
-              <a:solidFill>
-                <a:schemeClr val="tx1"/>
-              </a:solidFill>
-              <a:latin typeface="Times New Roman" panose="02020603050405020304" pitchFamily="18" charset="0"/>
-              <a:cs typeface="Times New Roman" panose="02020603050405020304" pitchFamily="18" charset="0"/>
-            </a:endParaRPr>
-          </a:p>
-          <a:p>
-            <a:pPr>
-              <a:lnSpc>
-                <a:spcPct val="100000"/>
-              </a:lnSpc>
-            </a:pPr>
-            <a:r>
-              <a:rPr lang="en-US" dirty="0">
-                <a:solidFill>
-                  <a:schemeClr val="tx1"/>
-                </a:solidFill>
-                <a:latin typeface="Times New Roman" panose="02020603050405020304" pitchFamily="18" charset="0"/>
-                <a:cs typeface="Times New Roman" panose="02020603050405020304" pitchFamily="18" charset="0"/>
-              </a:rPr>
-              <a:t>Should models know that most nurses are women? 🤔</a:t>
-            </a:r>
-          </a:p>
         </p:txBody>
       </p:sp>
     </p:spTree>
@@ -31110,67 +31140,6 @@
                                           <p:spTgt spid="14">
                                             <p:txEl>
                                               <p:pRg st="0" end="0"/>
-                                            </p:txEl>
-                                          </p:spTgt>
-                                        </p:tgtEl>
-                                      </p:cBhvr>
-                                    </p:animEffect>
-                                  </p:childTnLst>
-                                </p:cTn>
-                              </p:par>
-                            </p:childTnLst>
-                          </p:cTn>
-                        </p:par>
-                      </p:childTnLst>
-                    </p:cTn>
-                  </p:par>
-                  <p:par>
-                    <p:cTn id="41" fill="hold">
-                      <p:stCondLst>
-                        <p:cond delay="indefinite"/>
-                      </p:stCondLst>
-                      <p:childTnLst>
-                        <p:par>
-                          <p:cTn id="42" fill="hold">
-                            <p:stCondLst>
-                              <p:cond delay="0"/>
-                            </p:stCondLst>
-                            <p:childTnLst>
-                              <p:par>
-                                <p:cTn id="43" presetID="10" presetClass="entr" presetSubtype="0" fill="hold" nodeType="clickEffect">
-                                  <p:stCondLst>
-                                    <p:cond delay="0"/>
-                                  </p:stCondLst>
-                                  <p:childTnLst>
-                                    <p:set>
-                                      <p:cBhvr>
-                                        <p:cTn id="44" dur="1" fill="hold">
-                                          <p:stCondLst>
-                                            <p:cond delay="0"/>
-                                          </p:stCondLst>
-                                        </p:cTn>
-                                        <p:tgtEl>
-                                          <p:spTgt spid="14">
-                                            <p:txEl>
-                                              <p:pRg st="2" end="2"/>
-                                            </p:txEl>
-                                          </p:spTgt>
-                                        </p:tgtEl>
-                                        <p:attrNameLst>
-                                          <p:attrName>style.visibility</p:attrName>
-                                        </p:attrNameLst>
-                                      </p:cBhvr>
-                                      <p:to>
-                                        <p:strVal val="visible"/>
-                                      </p:to>
-                                    </p:set>
-                                    <p:animEffect transition="in" filter="fade">
-                                      <p:cBhvr>
-                                        <p:cTn id="45" dur="250"/>
-                                        <p:tgtEl>
-                                          <p:spTgt spid="14">
-                                            <p:txEl>
-                                              <p:pRg st="2" end="2"/>
                                             </p:txEl>
                                           </p:spTgt>
                                         </p:tgtEl>
@@ -31275,7 +31244,7 @@
                 <a:latin typeface="Times New Roman" panose="02020603050405020304" pitchFamily="18" charset="0"/>
                 <a:cs typeface="Times New Roman" panose="02020603050405020304" pitchFamily="18" charset="0"/>
               </a:rPr>
-              <a:t>Carbon Footprint</a:t>
+              <a:t>Environmental Damage: Carbon Footprint</a:t>
             </a:r>
             <a:br>
               <a:rPr lang="en-US" b="1" i="0" dirty="0">
@@ -32788,6 +32757,14 @@
               </a:spcAft>
             </a:pPr>
             <a:r>
+              <a:rPr lang="en-US" b="1">
+                <a:solidFill>
+                  <a:schemeClr val="tx1"/>
+                </a:solidFill>
+              </a:rPr>
+              <a:t>Environmental Damage: Carbon </a:t>
+            </a:r>
+            <a:r>
               <a:rPr lang="en-US" b="1" i="0" dirty="0">
                 <a:solidFill>
                   <a:schemeClr val="tx1"/>
@@ -32796,7 +32773,7 @@
                 <a:latin typeface="Times New Roman" panose="02020603050405020304" pitchFamily="18" charset="0"/>
                 <a:cs typeface="Times New Roman" panose="02020603050405020304" pitchFamily="18" charset="0"/>
               </a:rPr>
-              <a:t>Carbon Footprint</a:t>
+              <a:t>Footprint</a:t>
             </a:r>
             <a:br>
               <a:rPr lang="en-US" b="1" i="0" dirty="0">
@@ -35549,7 +35526,7 @@
                 <a:latin typeface="Times New Roman" panose="02020603050405020304" pitchFamily="18" charset="0"/>
                 <a:cs typeface="Times New Roman" panose="02020603050405020304" pitchFamily="18" charset="0"/>
               </a:rPr>
-              <a:t>6 benchmarks based on 17 datasets</a:t>
+              <a:t>6 categories evaluated on 17 benchmark datasets</a:t>
             </a:r>
           </a:p>
           <a:p>
@@ -36826,7 +36803,7 @@
                 <a:latin typeface="Times New Roman" panose="02020603050405020304" pitchFamily="18" charset="0"/>
                 <a:cs typeface="Times New Roman" panose="02020603050405020304" pitchFamily="18" charset="0"/>
               </a:rPr>
-              <a:t>Benchmarks</a:t>
+              <a:t>Benchmarks by Categories</a:t>
             </a:r>
             <a:endParaRPr lang="en-IL" dirty="0">
               <a:solidFill>
@@ -36910,7 +36887,7 @@
                 <a:latin typeface="Times New Roman" panose="02020603050405020304" pitchFamily="18" charset="0"/>
                 <a:cs typeface="Times New Roman" panose="02020603050405020304" pitchFamily="18" charset="0"/>
               </a:rPr>
-              <a:t>Datasets:</a:t>
+              <a:t>Benchmarks:</a:t>
             </a:r>
             <a:r>
               <a:rPr lang="en-US" sz="1400" i="0" dirty="0">
@@ -37013,11 +36990,8 @@
               </a:lnSpc>
             </a:pPr>
             <a:r>
-              <a:rPr lang="en-US" sz="1400" b="1" i="0" dirty="0">
-                <a:latin typeface="Times New Roman" panose="02020603050405020304" pitchFamily="18" charset="0"/>
-                <a:cs typeface="Times New Roman" panose="02020603050405020304" pitchFamily="18" charset="0"/>
-              </a:rPr>
-              <a:t>Datasets:</a:t>
+              <a:rPr lang="en-US" sz="1400" b="1" dirty="0"/>
+              <a:t>Benchmarks :</a:t>
             </a:r>
             <a:r>
               <a:rPr lang="en-US" sz="1400" i="0" dirty="0">
@@ -37093,11 +37067,8 @@
               </a:lnSpc>
             </a:pPr>
             <a:r>
-              <a:rPr lang="en-US" sz="1400" b="1" i="0" dirty="0">
-                <a:latin typeface="Times New Roman" panose="02020603050405020304" pitchFamily="18" charset="0"/>
-                <a:cs typeface="Times New Roman" panose="02020603050405020304" pitchFamily="18" charset="0"/>
-              </a:rPr>
-              <a:t>Datasets:</a:t>
+              <a:rPr lang="en-US" sz="1400" b="1" dirty="0"/>
+              <a:t>Benchmarks :</a:t>
             </a:r>
             <a:r>
               <a:rPr lang="en-US" sz="1400" i="0" dirty="0">
@@ -37144,11 +37115,8 @@
               </a:lnSpc>
             </a:pPr>
             <a:r>
-              <a:rPr lang="en-US" sz="1400" b="1" i="0" dirty="0">
-                <a:latin typeface="Times New Roman" panose="02020603050405020304" pitchFamily="18" charset="0"/>
-                <a:cs typeface="Times New Roman" panose="02020603050405020304" pitchFamily="18" charset="0"/>
-              </a:rPr>
-              <a:t>Datasets:</a:t>
+              <a:rPr lang="en-US" sz="1400" b="1" dirty="0"/>
+              <a:t>Benchmarks :</a:t>
             </a:r>
             <a:r>
               <a:rPr lang="en-US" sz="1400" i="0" dirty="0">
@@ -37195,11 +37163,8 @@
               </a:lnSpc>
             </a:pPr>
             <a:r>
-              <a:rPr lang="en-US" sz="1400" b="1" i="0" dirty="0">
-                <a:latin typeface="Times New Roman" panose="02020603050405020304" pitchFamily="18" charset="0"/>
-                <a:cs typeface="Times New Roman" panose="02020603050405020304" pitchFamily="18" charset="0"/>
-              </a:rPr>
-              <a:t>Datasets:</a:t>
+              <a:rPr lang="en-US" sz="1400" b="1" dirty="0"/>
+              <a:t>Benchmarks :</a:t>
             </a:r>
             <a:r>
               <a:rPr lang="en-US" sz="1400" i="0" dirty="0">
@@ -37260,11 +37225,8 @@
               </a:lnSpc>
             </a:pPr>
             <a:r>
-              <a:rPr lang="en-US" sz="1400" b="1" i="0" dirty="0">
-                <a:latin typeface="Times New Roman" panose="02020603050405020304" pitchFamily="18" charset="0"/>
-                <a:cs typeface="Times New Roman" panose="02020603050405020304" pitchFamily="18" charset="0"/>
-              </a:rPr>
-              <a:t>Datasets:</a:t>
+              <a:rPr lang="en-US" sz="1400" b="1" dirty="0"/>
+              <a:t>Benchmarks :</a:t>
             </a:r>
             <a:r>
               <a:rPr lang="en-US" sz="1400" i="0" dirty="0">
@@ -38302,7 +38264,7 @@
             <p:spPr>
               <a:xfrm>
                 <a:off x="1371600" y="1133856"/>
-                <a:ext cx="9601200" cy="5179161"/>
+                <a:ext cx="10416746" cy="5179161"/>
               </a:xfrm>
             </p:spPr>
             <p:txBody>
@@ -38333,7 +38295,7 @@
                     <a:latin typeface="Times New Roman" panose="02020603050405020304" pitchFamily="18" charset="0"/>
                     <a:cs typeface="Times New Roman" panose="02020603050405020304" pitchFamily="18" charset="0"/>
                   </a:rPr>
-                  <a:t>Demonstrates that brief finetuning on instruction data rapidly improves performance and instruction-following abilities.</a:t>
+                  <a:t>A brief finetuning on instruction dataset improves instruction-following abilities</a:t>
                 </a:r>
               </a:p>
               <a:p>
@@ -38358,29 +38320,7 @@
                     <a:latin typeface="Times New Roman" panose="02020603050405020304" pitchFamily="18" charset="0"/>
                     <a:cs typeface="Times New Roman" panose="02020603050405020304" pitchFamily="18" charset="0"/>
                   </a:rPr>
-                  <a:t> </a:t>
-                </a:r>
-                <a:r>
-                  <a:rPr lang="en-US" b="0" i="0" dirty="0" err="1">
-                    <a:solidFill>
-                      <a:schemeClr val="tx1"/>
-                    </a:solidFill>
-                    <a:effectLst/>
-                    <a:latin typeface="Times New Roman" panose="02020603050405020304" pitchFamily="18" charset="0"/>
-                    <a:cs typeface="Times New Roman" panose="02020603050405020304" pitchFamily="18" charset="0"/>
-                  </a:rPr>
-                  <a:t>LLaMA</a:t>
-                </a:r>
-                <a:r>
-                  <a:rPr lang="en-US" b="0" i="0" dirty="0">
-                    <a:solidFill>
-                      <a:schemeClr val="tx1"/>
-                    </a:solidFill>
-                    <a:effectLst/>
-                    <a:latin typeface="Times New Roman" panose="02020603050405020304" pitchFamily="18" charset="0"/>
-                    <a:cs typeface="Times New Roman" panose="02020603050405020304" pitchFamily="18" charset="0"/>
-                  </a:rPr>
-                  <a:t>-I (evaluated on MMLU).</a:t>
+                  <a:t> LLaMA-I, evaluated on MMLU</a:t>
                 </a:r>
               </a:p>
               <a:p>
@@ -38401,7 +38341,7 @@
                     <a:latin typeface="Times New Roman" panose="02020603050405020304" pitchFamily="18" charset="0"/>
                     <a:cs typeface="Times New Roman" panose="02020603050405020304" pitchFamily="18" charset="0"/>
                   </a:rPr>
-                  <a:t>Bias, Toxicity &amp; Truthfulness</a:t>
+                  <a:t>Harmfulness: Bias, Toxicity &amp; Truthfulness</a:t>
                 </a:r>
                 <a:endParaRPr lang="en-US" b="1" dirty="0">
                   <a:solidFill>
@@ -38421,7 +38361,7 @@
                     <a:latin typeface="Times New Roman" panose="02020603050405020304" pitchFamily="18" charset="0"/>
                     <a:cs typeface="Times New Roman" panose="02020603050405020304" pitchFamily="18" charset="0"/>
                   </a:rPr>
-                  <a:t>Measures toxic content generation, social stereotypes, biases, and misinformation.</a:t>
+                  <a:t>Measures toxic content generation, social stereotypes, biases, and misinformation</a:t>
                 </a:r>
               </a:p>
               <a:p>
@@ -38564,7 +38504,7 @@
                     <a:latin typeface="Times New Roman" panose="02020603050405020304" pitchFamily="18" charset="0"/>
                     <a:cs typeface="Times New Roman" panose="02020603050405020304" pitchFamily="18" charset="0"/>
                   </a:rPr>
-                  <a:t>Carbon Footprint</a:t>
+                  <a:t>Environmental Damage by Carbon Footprint</a:t>
                 </a:r>
                 <a:endParaRPr lang="en-US" dirty="0">
                   <a:solidFill>
@@ -38600,14 +38540,17 @@
                 <a14:m>
                   <m:oMath xmlns:m="http://schemas.openxmlformats.org/officeDocument/2006/math">
                     <m:r>
-                      <a:rPr lang="en-US" i="1" dirty="0" smtClean="0">
+                      <m:rPr>
+                        <m:sty m:val="p"/>
+                      </m:rPr>
+                      <a:rPr lang="en-US" i="0" dirty="0" smtClean="0">
                         <a:solidFill>
                           <a:schemeClr val="tx1"/>
                         </a:solidFill>
                         <a:latin typeface="Cambria Math" panose="02040503050406030204" pitchFamily="18" charset="0"/>
                         <a:cs typeface="Times New Roman" panose="02020603050405020304" pitchFamily="18" charset="0"/>
                       </a:rPr>
-                      <m:t>𝑀𝑊h</m:t>
+                      <m:t>MWh</m:t>
                     </m:r>
                   </m:oMath>
                 </a14:m>
@@ -38635,7 +38578,10 @@
                 <a14:m>
                   <m:oMath xmlns:m="http://schemas.openxmlformats.org/officeDocument/2006/math">
                     <m:r>
-                      <a:rPr lang="en-US" b="0" i="1" dirty="0" smtClean="0">
+                      <m:rPr>
+                        <m:sty m:val="p"/>
+                      </m:rPr>
+                      <a:rPr lang="en-US" b="0" i="0" dirty="0" smtClean="0">
                         <a:solidFill>
                           <a:schemeClr val="tx1"/>
                         </a:solidFill>
@@ -38643,10 +38589,10 @@
                         <a:latin typeface="Cambria Math" panose="02040503050406030204" pitchFamily="18" charset="0"/>
                         <a:cs typeface="Times New Roman" panose="02020603050405020304" pitchFamily="18" charset="0"/>
                       </a:rPr>
-                      <m:t>𝑡𝐶𝑂</m:t>
+                      <m:t>tCO</m:t>
                     </m:r>
                     <m:r>
-                      <a:rPr lang="en-US" b="0" i="1" dirty="0" smtClean="0">
+                      <a:rPr lang="en-US" b="0" i="0" dirty="0" smtClean="0">
                         <a:solidFill>
                           <a:schemeClr val="tx1"/>
                         </a:solidFill>
@@ -38657,7 +38603,10 @@
                       <m:t>2</m:t>
                     </m:r>
                     <m:r>
-                      <a:rPr lang="en-US" b="0" i="1" dirty="0" smtClean="0">
+                      <m:rPr>
+                        <m:sty m:val="p"/>
+                      </m:rPr>
+                      <a:rPr lang="en-US" b="0" i="0" dirty="0" smtClean="0">
                         <a:solidFill>
                           <a:schemeClr val="tx1"/>
                         </a:solidFill>
@@ -38665,7 +38614,7 @@
                         <a:latin typeface="Cambria Math" panose="02040503050406030204" pitchFamily="18" charset="0"/>
                         <a:cs typeface="Times New Roman" panose="02020603050405020304" pitchFamily="18" charset="0"/>
                       </a:rPr>
-                      <m:t>𝑒𝑞</m:t>
+                      <m:t>eq</m:t>
                     </m:r>
                   </m:oMath>
                 </a14:m>
@@ -38678,7 +38627,21 @@
                     <a:latin typeface="Times New Roman" panose="02020603050405020304" pitchFamily="18" charset="0"/>
                     <a:cs typeface="Times New Roman" panose="02020603050405020304" pitchFamily="18" charset="0"/>
                   </a:rPr>
-                  <a:t>) and highlights how open releases reduce future environmental costs by preventing retraining.</a:t>
+                  <a:t>)</a:t>
+                </a:r>
+              </a:p>
+              <a:p>
+                <a:pPr lvl="1"/>
+                <a:r>
+                  <a:rPr lang="en-US" b="0" i="0" dirty="0">
+                    <a:solidFill>
+                      <a:schemeClr val="tx1"/>
+                    </a:solidFill>
+                    <a:effectLst/>
+                    <a:latin typeface="Times New Roman" panose="02020603050405020304" pitchFamily="18" charset="0"/>
+                    <a:cs typeface="Times New Roman" panose="02020603050405020304" pitchFamily="18" charset="0"/>
+                  </a:rPr>
+                  <a:t>Open releases reduce future environmental costs by preventing retraining</a:t>
                 </a:r>
               </a:p>
             </p:txBody>
@@ -38704,12 +38667,12 @@
             <p:spPr>
               <a:xfrm>
                 <a:off x="1371600" y="1133856"/>
-                <a:ext cx="9601200" cy="5179161"/>
+                <a:ext cx="10416746" cy="5179161"/>
               </a:xfrm>
               <a:blipFill>
                 <a:blip r:embed="rId3"/>
                 <a:stretch>
-                  <a:fillRect l="-661" t="-978"/>
+                  <a:fillRect l="-609" t="-978" r="-365"/>
                 </a:stretch>
               </a:blipFill>
             </p:spPr>
@@ -39133,6 +39096,49 @@
                                           <p:spTgt spid="3">
                                             <p:txEl>
                                               <p:pRg st="9" end="9"/>
+                                            </p:txEl>
+                                          </p:spTgt>
+                                        </p:tgtEl>
+                                      </p:cBhvr>
+                                    </p:animEffect>
+                                  </p:childTnLst>
+                                </p:cTn>
+                              </p:par>
+                              <p:par>
+                                <p:cTn id="33" presetID="10" presetClass="entr" presetSubtype="0" fill="hold" nodeType="withEffect">
+                                  <p:stCondLst>
+                                    <p:cond delay="0"/>
+                                  </p:stCondLst>
+                                  <p:childTnLst>
+                                    <p:set>
+                                      <p:cBhvr>
+                                        <p:cTn id="34" dur="1" fill="hold">
+                                          <p:stCondLst>
+                                            <p:cond delay="0"/>
+                                          </p:stCondLst>
+                                        </p:cTn>
+                                        <p:tgtEl>
+                                          <p:spTgt spid="3">
+                                            <p:txEl>
+                                              <p:pRg st="10" end="10"/>
+                                            </p:txEl>
+                                          </p:spTgt>
+                                        </p:tgtEl>
+                                        <p:attrNameLst>
+                                          <p:attrName>style.visibility</p:attrName>
+                                        </p:attrNameLst>
+                                      </p:cBhvr>
+                                      <p:to>
+                                        <p:strVal val="visible"/>
+                                      </p:to>
+                                    </p:set>
+                                    <p:animEffect transition="in" filter="fade">
+                                      <p:cBhvr>
+                                        <p:cTn id="35" dur="250"/>
+                                        <p:tgtEl>
+                                          <p:spTgt spid="3">
+                                            <p:txEl>
+                                              <p:pRg st="10" end="10"/>
                                             </p:txEl>
                                           </p:spTgt>
                                         </p:tgtEl>

--- a/presentation/Lecture Slides.pptx
+++ b/presentation/Lecture Slides.pptx
@@ -4808,10 +4808,10 @@
                 <a:ea typeface="+mn-ea"/>
                 <a:cs typeface="+mn-cs"/>
               </a:rPr>
-              <a:t>נציג את הביצועים של </a:t>
-            </a:r>
-            <a:r>
-              <a:rPr lang="en-US" sz="1200" kern="1200" dirty="0">
+              <a:t>נציג את הביצועים בכל </a:t>
+            </a:r>
+            <a:r>
+              <a:rPr lang="he-IL" sz="1200" kern="1200" dirty="0" err="1">
                 <a:solidFill>
                   <a:schemeClr val="tx1"/>
                 </a:solidFill>
@@ -4819,7 +4819,7 @@
                 <a:ea typeface="+mn-ea"/>
                 <a:cs typeface="+mn-cs"/>
               </a:rPr>
-              <a:t>LLaMA</a:t>
+              <a:t>בנצ'מרק</a:t>
             </a:r>
             <a:r>
               <a:rPr lang="he-IL" sz="1200" kern="1200" dirty="0">
@@ -4830,29 +4830,7 @@
                 <a:ea typeface="+mn-ea"/>
                 <a:cs typeface="+mn-cs"/>
               </a:rPr>
-              <a:t> בכל </a:t>
-            </a:r>
-            <a:r>
-              <a:rPr lang="he-IL" sz="1200" kern="1200" dirty="0" err="1">
-                <a:solidFill>
-                  <a:schemeClr val="tx1"/>
-                </a:solidFill>
-                <a:latin typeface="+mn-lt"/>
-                <a:ea typeface="+mn-ea"/>
-                <a:cs typeface="+mn-cs"/>
-              </a:rPr>
-              <a:t>בנצ'מרק</a:t>
-            </a:r>
-            <a:r>
-              <a:rPr lang="he-IL" sz="1200" kern="1200" dirty="0">
-                <a:solidFill>
-                  <a:schemeClr val="tx1"/>
-                </a:solidFill>
-                <a:latin typeface="+mn-lt"/>
-                <a:ea typeface="+mn-ea"/>
-                <a:cs typeface="+mn-cs"/>
-              </a:rPr>
-              <a:t> ביחס למודלים מתחרים</a:t>
+              <a:t> למול מודלים מתחרים</a:t>
             </a:r>
           </a:p>
           <a:p>
@@ -5023,64 +5001,7 @@
                 <a:ea typeface="+mn-ea"/>
                 <a:cs typeface="+mn-cs"/>
               </a:rPr>
-              <a:t>נסכם את המאמר,</a:t>
-            </a:r>
-          </a:p>
-          <a:p>
-            <a:pPr marL="0" marR="0" lvl="0" indent="0" algn="r" defTabSz="914400" rtl="1" eaLnBrk="1" fontAlgn="auto" latinLnBrk="0" hangingPunct="1">
-              <a:lnSpc>
-                <a:spcPct val="100000"/>
-              </a:lnSpc>
-              <a:spcBef>
-                <a:spcPts val="0"/>
-              </a:spcBef>
-              <a:spcAft>
-                <a:spcPts val="0"/>
-              </a:spcAft>
-              <a:buClrTx/>
-              <a:buSzTx/>
-              <a:buFontTx/>
-              <a:buNone/>
-              <a:tabLst/>
-              <a:defRPr/>
-            </a:pPr>
-            <a:endParaRPr lang="he-IL" sz="1200" kern="1200" dirty="0">
-              <a:solidFill>
-                <a:schemeClr val="tx1"/>
-              </a:solidFill>
-              <a:latin typeface="+mn-lt"/>
-              <a:ea typeface="+mn-ea"/>
-              <a:cs typeface="+mn-cs"/>
-            </a:endParaRPr>
-          </a:p>
-          <a:p>
-            <a:pPr marL="0" marR="0" lvl="0" indent="0" algn="r" defTabSz="914400" rtl="1" eaLnBrk="1" fontAlgn="auto" latinLnBrk="0" hangingPunct="1">
-              <a:lnSpc>
-                <a:spcPct val="100000"/>
-              </a:lnSpc>
-              <a:spcBef>
-                <a:spcPts val="0"/>
-              </a:spcBef>
-              <a:spcAft>
-                <a:spcPts val="0"/>
-              </a:spcAft>
-              <a:buClrTx/>
-              <a:buSzTx/>
-              <a:buFontTx/>
-              <a:buNone/>
-              <a:tabLst/>
-              <a:defRPr/>
-            </a:pPr>
-            <a:r>
-              <a:rPr lang="he-IL" sz="1200" kern="1200" dirty="0">
-                <a:solidFill>
-                  <a:schemeClr val="tx1"/>
-                </a:solidFill>
-                <a:latin typeface="+mn-lt"/>
-                <a:ea typeface="+mn-ea"/>
-                <a:cs typeface="+mn-cs"/>
-              </a:rPr>
-              <a:t>ואז נעבור למימוש של מודל GPT2 על בסיס אבני הבניין שהוצגו על-ידי המציגים הקודמים היום</a:t>
+              <a:t>נסכם את המאמר, ונעבור למימוש של מודל GPT2 על בסיס אבני הבניין שהוצגו על-ידי המציגים הקודמים היום</a:t>
             </a:r>
           </a:p>
         </p:txBody>
@@ -8488,7 +8409,7 @@
             <a:pPr marL="0" algn="r" defTabSz="914400" rtl="1" eaLnBrk="1" latinLnBrk="0" hangingPunct="1"/>
             <a:r>
               <a:rPr lang="he-IL" dirty="0"/>
-              <a:t>הראשונה היא יכולת המודל לעקוב אחר הוראות והאפשרות להתאים אותו למשימה הזאת – הוכיחו ייתכנות על-ידי הצגה של ניסוי יחידה</a:t>
+              <a:t>הראשונה היא יכולת המודל לעקוב אחר הוראות והאפשרות להתאים אותו למשימה הזאת</a:t>
             </a:r>
           </a:p>
           <a:p>
@@ -8523,15 +8444,7 @@
             </a:r>
             <a:r>
               <a:rPr lang="he-IL" dirty="0"/>
-              <a:t> של המודל – קראתי לזה </a:t>
-            </a:r>
-            <a:r>
-              <a:rPr lang="en-US" dirty="0"/>
-              <a:t>harmfulness</a:t>
-            </a:r>
-            <a:r>
-              <a:rPr lang="he-IL" dirty="0"/>
-              <a:t> במצגת</a:t>
+              <a:t> של המודל</a:t>
             </a:r>
           </a:p>
           <a:p>
@@ -8542,7 +8455,15 @@
             <a:pPr marL="0" algn="r" defTabSz="914400" rtl="1" eaLnBrk="1" latinLnBrk="0" hangingPunct="1"/>
             <a:r>
               <a:rPr lang="he-IL" dirty="0"/>
-              <a:t>והשלישית היא מידת הנזק הסביבתי שנגרם כתוצאה מאימון המודל – את זה העריכו ע"י </a:t>
+              <a:t>והשלישית היא מידת הנזק הסביבתי שנגרם כתוצאה מאימון </a:t>
+            </a:r>
+            <a:r>
+              <a:rPr lang="he-IL" dirty="0" err="1"/>
+              <a:t>המודיםל</a:t>
+            </a:r>
+            <a:r>
+              <a:rPr lang="he-IL" dirty="0"/>
+              <a:t> – את זה העריכו ע"י </a:t>
             </a:r>
             <a:r>
               <a:rPr lang="he-IL" dirty="0" err="1"/>
@@ -8550,7 +8471,7 @@
             </a:r>
             <a:r>
               <a:rPr lang="he-IL" dirty="0"/>
-              <a:t> של כמות הפחמן הדו-חמצני שנפלט אימון המודלים בטונות</a:t>
+              <a:t> של כמות הפחמן הדו-חמצני שנפלט מאימון המודלים בטונות</a:t>
             </a:r>
           </a:p>
         </p:txBody>
@@ -33840,8 +33761,8 @@
         </p:nvSpPr>
         <p:spPr>
           <a:xfrm>
-            <a:off x="1371599" y="1133856"/>
-            <a:ext cx="10820401" cy="5562779"/>
+            <a:off x="1371600" y="1084161"/>
+            <a:ext cx="10217426" cy="5562779"/>
           </a:xfrm>
           <a:prstGeom prst="rect">
             <a:avLst/>
@@ -34059,7 +33980,7 @@
           </a:p>
           <a:p>
             <a:r>
-              <a:rPr lang="en-US" sz="1900" dirty="0">
+              <a:rPr lang="en-US" sz="1800" dirty="0">
                 <a:solidFill>
                   <a:schemeClr val="tx1"/>
                 </a:solidFill>
@@ -34071,7 +33992,7 @@
           </a:p>
           <a:p>
             <a:r>
-              <a:rPr lang="en-US" sz="1900" dirty="0">
+              <a:rPr lang="en-US" sz="1800" dirty="0">
                 <a:solidFill>
                   <a:schemeClr val="tx1"/>
                 </a:solidFill>
@@ -34081,7 +34002,7 @@
               <a:t>The authors demonstrated that </a:t>
             </a:r>
             <a:r>
-              <a:rPr lang="en-US" sz="1900" b="1" dirty="0">
+              <a:rPr lang="en-US" sz="1800" b="1" dirty="0">
                 <a:solidFill>
                   <a:schemeClr val="tx1"/>
                 </a:solidFill>
@@ -34091,7 +34012,7 @@
               <a:t>SOTA performance</a:t>
             </a:r>
             <a:r>
-              <a:rPr lang="en-US" sz="1900" dirty="0">
+              <a:rPr lang="en-US" sz="1800" dirty="0">
                 <a:solidFill>
                   <a:schemeClr val="tx1"/>
                 </a:solidFill>
@@ -34101,7 +34022,7 @@
               <a:t> can be achieved using exclusively </a:t>
             </a:r>
             <a:r>
-              <a:rPr lang="en-US" sz="1900" b="1" dirty="0">
+              <a:rPr lang="en-US" sz="1800" b="1" dirty="0">
                 <a:solidFill>
                   <a:schemeClr val="tx1"/>
                 </a:solidFill>
@@ -34111,7 +34032,7 @@
               <a:t>publicly available data</a:t>
             </a:r>
             <a:r>
-              <a:rPr lang="en-US" sz="1900" dirty="0">
+              <a:rPr lang="en-US" sz="1800" dirty="0">
                 <a:solidFill>
                   <a:schemeClr val="tx1"/>
                 </a:solidFill>
@@ -34120,7 +34041,7 @@
               </a:rPr>
               <a:t>, without proprietary datasets</a:t>
             </a:r>
-            <a:endParaRPr lang="he-IL" sz="1900" dirty="0">
+            <a:endParaRPr lang="he-IL" sz="1800" dirty="0">
               <a:solidFill>
                 <a:schemeClr val="tx1"/>
               </a:solidFill>
@@ -34130,7 +34051,7 @@
           </a:p>
           <a:p>
             <a:r>
-              <a:rPr lang="en-US" sz="1900" dirty="0">
+              <a:rPr lang="en-US" sz="1800" dirty="0">
                 <a:solidFill>
                   <a:schemeClr val="tx1"/>
                 </a:solidFill>
@@ -34139,7 +34060,7 @@
               </a:rPr>
               <a:t>Instead of continually increasing model size to improve performance, we can simply train the models for longer</a:t>
             </a:r>
-            <a:endParaRPr lang="en-US" sz="1900" b="1" dirty="0">
+            <a:endParaRPr lang="en-US" sz="1800" b="1" dirty="0">
               <a:solidFill>
                 <a:schemeClr val="tx1"/>
               </a:solidFill>
@@ -34164,7 +34085,7 @@
           </a:p>
           <a:p>
             <a:r>
-              <a:rPr lang="en-US" sz="1900" dirty="0">
+              <a:rPr lang="en-US" sz="1800" dirty="0">
                 <a:solidFill>
                   <a:schemeClr val="tx1"/>
                 </a:solidFill>
@@ -34176,7 +34097,7 @@
           </a:p>
           <a:p>
             <a:r>
-              <a:rPr lang="en-US" sz="1900" dirty="0">
+              <a:rPr lang="en-US" sz="1800" dirty="0">
                 <a:solidFill>
                   <a:schemeClr val="tx1"/>
                 </a:solidFill>
@@ -34185,7 +34106,7 @@
               </a:rPr>
               <a:t>LLaMA-65B is competitive with Chinchilla-70B and PaLM-540B.</a:t>
             </a:r>
-            <a:endParaRPr lang="en-US" sz="1900" b="1" dirty="0">
+            <a:endParaRPr lang="en-US" sz="1800" b="1" dirty="0">
               <a:solidFill>
                 <a:schemeClr val="tx1"/>
               </a:solidFill>
@@ -34217,7 +34138,7 @@
           </a:p>
           <a:p>
             <a:r>
-              <a:rPr lang="en-US" sz="1900" dirty="0">
+              <a:rPr lang="en-US" sz="1800" dirty="0">
                 <a:solidFill>
                   <a:schemeClr val="tx1"/>
                 </a:solidFill>
@@ -34227,7 +34148,7 @@
               <a:t>Accelerate research to improve </a:t>
             </a:r>
             <a:r>
-              <a:rPr lang="en-US" sz="1900" b="1" dirty="0">
+              <a:rPr lang="en-US" sz="1800" b="1" dirty="0">
                 <a:solidFill>
                   <a:schemeClr val="tx1"/>
                 </a:solidFill>
@@ -34237,7 +34158,7 @@
               <a:t>robustness</a:t>
             </a:r>
             <a:r>
-              <a:rPr lang="en-US" sz="1900" dirty="0">
+              <a:rPr lang="en-US" sz="1800" dirty="0">
                 <a:solidFill>
                   <a:schemeClr val="tx1"/>
                 </a:solidFill>
@@ -34247,7 +34168,7 @@
               <a:t> and mitigate issues </a:t>
             </a:r>
             <a:r>
-              <a:rPr lang="en-US" sz="1900" b="1" dirty="0">
+              <a:rPr lang="en-US" sz="1800" b="1" dirty="0">
                 <a:solidFill>
                   <a:schemeClr val="tx1"/>
                 </a:solidFill>
@@ -34257,7 +34178,7 @@
               <a:t>bias and toxicity</a:t>
             </a:r>
             <a:r>
-              <a:rPr lang="en-US" sz="1900" dirty="0">
+              <a:rPr lang="en-US" sz="1800" dirty="0">
                 <a:solidFill>
                   <a:schemeClr val="tx1"/>
                 </a:solidFill>
@@ -34269,7 +34190,7 @@
           </a:p>
           <a:p>
             <a:r>
-              <a:rPr lang="en-US" sz="1900" dirty="0">
+              <a:rPr lang="en-US" sz="1800" dirty="0">
                 <a:solidFill>
                   <a:schemeClr val="tx1"/>
                 </a:solidFill>
@@ -34279,7 +34200,7 @@
               <a:t>Further investigate the </a:t>
             </a:r>
             <a:r>
-              <a:rPr lang="en-US" sz="1900" b="1" dirty="0">
+              <a:rPr lang="en-US" sz="1800" b="1" dirty="0">
                 <a:solidFill>
                   <a:schemeClr val="tx1"/>
                 </a:solidFill>
@@ -34289,7 +34210,7 @@
               <a:t>instruction finetuning</a:t>
             </a:r>
             <a:r>
-              <a:rPr lang="en-US" sz="1900" dirty="0">
+              <a:rPr lang="en-US" sz="1800" dirty="0">
                 <a:solidFill>
                   <a:schemeClr val="tx1"/>
                 </a:solidFill>
@@ -34301,7 +34222,7 @@
           </a:p>
           <a:p>
             <a:r>
-              <a:rPr lang="en-US" sz="1900" dirty="0">
+              <a:rPr lang="en-US" sz="1800" dirty="0">
                 <a:solidFill>
                   <a:schemeClr val="tx1"/>
                 </a:solidFill>
@@ -34311,7 +34232,7 @@
               <a:t>Release </a:t>
             </a:r>
             <a:r>
-              <a:rPr lang="en-US" sz="1900" b="1" dirty="0">
+              <a:rPr lang="en-US" sz="1800" b="1" dirty="0">
                 <a:solidFill>
                   <a:schemeClr val="tx1"/>
                 </a:solidFill>
@@ -34321,7 +34242,7 @@
               <a:t>larger models</a:t>
             </a:r>
             <a:r>
-              <a:rPr lang="en-US" sz="1900" dirty="0">
+              <a:rPr lang="en-US" sz="1800" dirty="0">
                 <a:solidFill>
                   <a:schemeClr val="tx1"/>
                 </a:solidFill>
@@ -34331,7 +34252,7 @@
               <a:t> trained on </a:t>
             </a:r>
             <a:r>
-              <a:rPr lang="en-US" sz="1900" b="1" dirty="0">
+              <a:rPr lang="en-US" sz="1800" b="1" dirty="0">
                 <a:solidFill>
                   <a:schemeClr val="tx1"/>
                 </a:solidFill>
@@ -34341,7 +34262,7 @@
               <a:t>larger corpora</a:t>
             </a:r>
             <a:r>
-              <a:rPr lang="en-US" sz="1900" dirty="0">
+              <a:rPr lang="en-US" sz="1800" dirty="0">
                 <a:solidFill>
                   <a:schemeClr val="tx1"/>
                 </a:solidFill>
@@ -34350,7 +34271,7 @@
               </a:rPr>
               <a:t>, as performance continues to improve with scale</a:t>
             </a:r>
-            <a:endParaRPr lang="en-US" sz="1900" i="0" dirty="0">
+            <a:endParaRPr lang="en-US" sz="1800" i="0" dirty="0">
               <a:solidFill>
                 <a:schemeClr val="tx1"/>
               </a:solidFill>

--- a/presentation/Lecture Slides.pptx
+++ b/presentation/Lecture Slides.pptx
@@ -1634,7 +1634,7 @@
           <a:p>
             <a:fld id="{0272032C-FC28-6346-8005-2D9B1FD312FC}" type="datetimeFigureOut">
               <a:rPr lang="en-IL" smtClean="0"/>
-              <a:t>03/12/2025</a:t>
+              <a:t>07/12/2025</a:t>
             </a:fld>
             <a:endParaRPr lang="en-IL"/>
           </a:p>
@@ -1980,7 +1980,7 @@
             </a:r>
             <a:r>
               <a:rPr lang="he-IL" dirty="0"/>
-              <a:t> למול מודלים מתחרים לפי מגוון </a:t>
+              <a:t> לפי מגוון </a:t>
             </a:r>
             <a:r>
               <a:rPr lang="he-IL" dirty="0" err="1"/>
@@ -2490,33 +2490,6 @@
               <a:t>, למרות שהוא קטן מהם פי 5 עד פי 10.</a:t>
             </a:r>
           </a:p>
-          <a:p>
-            <a:pPr marL="0" algn="r" defTabSz="914400" rtl="1" eaLnBrk="1" latinLnBrk="0" hangingPunct="1"/>
-            <a:endParaRPr lang="he-IL" dirty="0"/>
-          </a:p>
-          <a:p>
-            <a:pPr marL="0" algn="r" defTabSz="914400" rtl="1" eaLnBrk="1" latinLnBrk="0" hangingPunct="1"/>
-            <a:r>
-              <a:rPr lang="he-IL" dirty="0"/>
-              <a:t>בנוסף, והחוקרים מציינים יתרון נוסף של </a:t>
-            </a:r>
-            <a:r>
-              <a:rPr lang="en-US" dirty="0"/>
-              <a:t>LLaMA‑13B</a:t>
-            </a:r>
-            <a:r>
-              <a:rPr lang="he-IL" dirty="0"/>
-              <a:t>, והוא שאפשר להריץ </a:t>
-            </a:r>
-            <a:r>
-              <a:rPr lang="en-US" dirty="0"/>
-              <a:t>infer</a:t>
-            </a:r>
-            <a:r>
-              <a:rPr lang="he-IL" dirty="0"/>
-              <a:t> שלו על יחידת GPU בודדת, בעוד שלאחרים נדרשות מספר יחידות.</a:t>
-            </a:r>
-          </a:p>
         </p:txBody>
       </p:sp>
       <p:sp>
@@ -3584,23 +3557,7 @@
             </a:r>
             <a:r>
               <a:rPr lang="he-IL" dirty="0"/>
-              <a:t> אומן רק על </a:t>
-            </a:r>
-            <a:r>
-              <a:rPr lang="en-US" dirty="0"/>
-              <a:t>177GB</a:t>
-            </a:r>
-            <a:r>
-              <a:rPr lang="he-IL" dirty="0"/>
-              <a:t> של ספרים ומאמרים אקדמיים, בעוד שהאחרים אומנו על </a:t>
-            </a:r>
-            <a:r>
-              <a:rPr lang="en-US" dirty="0"/>
-              <a:t>2TB</a:t>
-            </a:r>
-            <a:r>
-              <a:rPr lang="he-IL" dirty="0"/>
-              <a:t> של דאטה כזה.</a:t>
+              <a:t> אומן רק על 177 גיגה-בייט של ספרים ומאמרים אקדמיים, בעוד שהאחרים אומנו על שתי טרה של דאטה כזה.</a:t>
             </a:r>
           </a:p>
         </p:txBody>
@@ -6422,7 +6379,15 @@
             <a:pPr marL="0" algn="r" defTabSz="914400" rtl="1" eaLnBrk="1" latinLnBrk="0" hangingPunct="1"/>
             <a:r>
               <a:rPr lang="he-IL" dirty="0"/>
-              <a:t>נשפוך את נתוני האימון ונקבל פליטה כוללת של כ-1015 טונות של פחמן דו-חמצני, שזה שקול לטיסה הלוך-חזור בין ניו-יורק ללונדון – 1000 פעמים!</a:t>
+              <a:t>נשפוך את נתוני האימון ונקבל פליטה כוללת של כ-1015 טונות של פחמן דו-חמצני</a:t>
+            </a:r>
+            <a:r>
+              <a:rPr lang="he-IL"/>
+              <a:t>, שכדי לסבר את האוזן, זה </a:t>
+            </a:r>
+            <a:r>
+              <a:rPr lang="he-IL" dirty="0"/>
+              <a:t>שקול לטיסה הלוך-חזור בין ניו-יורק ללונדון – 1000 פעמים!</a:t>
             </a:r>
           </a:p>
           <a:p>
@@ -7988,7 +7953,7 @@
             </a:pPr>
             <a:r>
               <a:rPr lang="he-IL" dirty="0"/>
-              <a:t>אם כן, אלה </a:t>
+              <a:t>אם כן, נסקור בזריזות את </a:t>
             </a:r>
             <a:r>
               <a:rPr lang="he-IL" dirty="0" err="1"/>
@@ -7996,7 +7961,7 @@
             </a:r>
             <a:r>
               <a:rPr lang="he-IL" dirty="0"/>
-              <a:t> שלנו מחולקים לקטגוריות:</a:t>
+              <a:t> לפי קטגוריות:</a:t>
             </a:r>
           </a:p>
           <a:p>
@@ -8455,23 +8420,7 @@
             <a:pPr marL="0" algn="r" defTabSz="914400" rtl="1" eaLnBrk="1" latinLnBrk="0" hangingPunct="1"/>
             <a:r>
               <a:rPr lang="he-IL" dirty="0"/>
-              <a:t>והשלישית היא מידת הנזק הסביבתי שנגרם כתוצאה מאימון </a:t>
-            </a:r>
-            <a:r>
-              <a:rPr lang="he-IL" dirty="0" err="1"/>
-              <a:t>המודיםל</a:t>
-            </a:r>
-            <a:r>
-              <a:rPr lang="he-IL" dirty="0"/>
-              <a:t> – את זה העריכו ע"י </a:t>
-            </a:r>
-            <a:r>
-              <a:rPr lang="he-IL" dirty="0" err="1"/>
-              <a:t>אסטימציה</a:t>
-            </a:r>
-            <a:r>
-              <a:rPr lang="he-IL" dirty="0"/>
-              <a:t> של כמות הפחמן הדו-חמצני שנפלט מאימון המודלים בטונות</a:t>
+              <a:t>והשלישית היא מידת הנזק הסביבתי שנגרם כתוצאה מאימון המודלים – את זה העריכו ע"י חישוב כמות הפחמן הדו-חמצני שנפלט במהלך אימון המודלים</a:t>
             </a:r>
           </a:p>
         </p:txBody>
@@ -8624,7 +8573,7 @@
             <a:pPr marL="0" algn="r" defTabSz="914400" rtl="1" eaLnBrk="1" latinLnBrk="0" hangingPunct="1"/>
             <a:r>
               <a:rPr lang="he-IL" dirty="0"/>
-              <a:t>מה שכן, כולם נבנו על-ידי קבוצות מחקר מובילות בתעשייה</a:t>
+              <a:t>מה שכן, כולם נבנו בידי קבוצות מחקר מובילות בתעשייה</a:t>
             </a:r>
           </a:p>
         </p:txBody>
@@ -8929,7 +8878,7 @@
           <a:p>
             <a:fld id="{174E06AC-D962-C445-BD68-CCA9075FD162}" type="datetime1">
               <a:rPr lang="en-US" smtClean="0"/>
-              <a:t>12/5/25</a:t>
+              <a:t>12/7/25</a:t>
             </a:fld>
             <a:endParaRPr lang="en-US" dirty="0"/>
           </a:p>
@@ -9261,7 +9210,7 @@
           <a:p>
             <a:fld id="{469DCB41-7B34-3247-A564-84EE959A6480}" type="datetime1">
               <a:rPr lang="en-US" smtClean="0"/>
-              <a:t>12/5/25</a:t>
+              <a:t>12/7/25</a:t>
             </a:fld>
             <a:endParaRPr lang="en-US" dirty="0"/>
           </a:p>
@@ -9436,7 +9385,7 @@
           <a:p>
             <a:fld id="{1ED76F23-D13C-3A4D-A64C-A89317472802}" type="datetime1">
               <a:rPr lang="en-US" smtClean="0"/>
-              <a:t>12/5/25</a:t>
+              <a:t>12/7/25</a:t>
             </a:fld>
             <a:endParaRPr lang="en-US" dirty="0"/>
           </a:p>
@@ -9659,7 +9608,7 @@
           <a:p>
             <a:fld id="{C01C443A-F504-AE46-A972-278D7020ACAE}" type="datetime1">
               <a:rPr lang="en-US" smtClean="0"/>
-              <a:t>12/5/25</a:t>
+              <a:t>12/7/25</a:t>
             </a:fld>
             <a:endParaRPr lang="en-US" dirty="0"/>
           </a:p>
@@ -9976,7 +9925,7 @@
           <a:p>
             <a:fld id="{F7379F7D-A8DF-B44B-B7D5-5F767BC8B599}" type="datetime1">
               <a:rPr lang="en-US" smtClean="0"/>
-              <a:t>12/5/25</a:t>
+              <a:t>12/7/25</a:t>
             </a:fld>
             <a:endParaRPr lang="en-US" dirty="0"/>
           </a:p>
@@ -10366,7 +10315,7 @@
           <a:p>
             <a:fld id="{61FFCFAF-5D61-D243-84D5-124AE95276F5}" type="datetime1">
               <a:rPr lang="en-US" smtClean="0"/>
-              <a:t>12/5/25</a:t>
+              <a:t>12/7/25</a:t>
             </a:fld>
             <a:endParaRPr lang="en-US" dirty="0"/>
           </a:p>
@@ -10838,7 +10787,7 @@
           <a:p>
             <a:fld id="{A1BC027B-29E2-CA4D-BBA7-FA61C20F2E11}" type="datetime1">
               <a:rPr lang="en-US" smtClean="0"/>
-              <a:t>12/5/25</a:t>
+              <a:t>12/7/25</a:t>
             </a:fld>
             <a:endParaRPr lang="en-US" dirty="0"/>
           </a:p>
@@ -10951,7 +10900,7 @@
           <a:p>
             <a:fld id="{57D5E50D-1D65-F04A-B679-8E1F7CB10F85}" type="datetime1">
               <a:rPr lang="en-US" smtClean="0"/>
-              <a:t>12/5/25</a:t>
+              <a:t>12/7/25</a:t>
             </a:fld>
             <a:endParaRPr lang="en-US" dirty="0"/>
           </a:p>
@@ -11041,7 +10990,7 @@
           <a:p>
             <a:fld id="{871BB0D1-FFBA-E944-A3BF-109DEA0605CF}" type="datetime1">
               <a:rPr lang="en-US" smtClean="0"/>
-              <a:t>12/5/25</a:t>
+              <a:t>12/7/25</a:t>
             </a:fld>
             <a:endParaRPr lang="en-US" dirty="0"/>
           </a:p>
@@ -11382,7 +11331,7 @@
           <a:p>
             <a:fld id="{D3D900C6-2FFB-A947-B45D-5548633B581E}" type="datetime1">
               <a:rPr lang="en-US" smtClean="0"/>
-              <a:t>12/5/25</a:t>
+              <a:t>12/7/25</a:t>
             </a:fld>
             <a:endParaRPr lang="en-US" dirty="0"/>
           </a:p>
@@ -11766,7 +11715,7 @@
           <a:p>
             <a:fld id="{71EFDBA6-3DFA-E249-900C-DF92791B0CE9}" type="datetime1">
               <a:rPr lang="en-US" smtClean="0"/>
-              <a:t>12/5/25</a:t>
+              <a:t>12/7/25</a:t>
             </a:fld>
             <a:endParaRPr lang="en-US" dirty="0"/>
           </a:p>
@@ -12038,7 +11987,7 @@
           <a:p>
             <a:fld id="{08D6DC20-382B-F34C-9518-C97B8953A8F2}" type="datetime1">
               <a:rPr lang="en-US" smtClean="0"/>
-              <a:t>12/5/25</a:t>
+              <a:t>12/7/25</a:t>
             </a:fld>
             <a:endParaRPr lang="en-US" dirty="0"/>
           </a:p>
@@ -14710,18 +14659,6 @@
               <a:t> smaller</a:t>
             </a:r>
           </a:p>
-          <a:p>
-            <a:r>
-              <a:rPr lang="en-US" dirty="0">
-                <a:solidFill>
-                  <a:schemeClr val="tx1"/>
-                </a:solidFill>
-                <a:latin typeface="Times New Roman" panose="02020603050405020304" pitchFamily="18" charset="0"/>
-                <a:cs typeface="Times New Roman" panose="02020603050405020304" pitchFamily="18" charset="0"/>
-              </a:rPr>
-              <a:t>Regarding efficiency, LLaMA-13B can run inference on a single V100 GPU</a:t>
-            </a:r>
-          </a:p>
         </p:txBody>
       </p:sp>
       <p:pic>
@@ -15820,76 +15757,15 @@
                                   </p:childTnLst>
                                 </p:cTn>
                               </p:par>
-                            </p:childTnLst>
-                          </p:cTn>
-                        </p:par>
-                      </p:childTnLst>
-                    </p:cTn>
-                  </p:par>
-                  <p:par>
-                    <p:cTn id="59" fill="hold">
-                      <p:stCondLst>
-                        <p:cond delay="indefinite"/>
-                      </p:stCondLst>
-                      <p:childTnLst>
-                        <p:par>
-                          <p:cTn id="60" fill="hold">
-                            <p:stCondLst>
-                              <p:cond delay="0"/>
-                            </p:stCondLst>
-                            <p:childTnLst>
                               <p:par>
-                                <p:cTn id="61" presetID="10" presetClass="entr" presetSubtype="0" fill="hold" nodeType="clickEffect">
-                                  <p:stCondLst>
-                                    <p:cond delay="0"/>
-                                  </p:stCondLst>
-                                  <p:childTnLst>
-                                    <p:set>
-                                      <p:cBhvr>
-                                        <p:cTn id="62" dur="1" fill="hold">
-                                          <p:stCondLst>
-                                            <p:cond delay="0"/>
-                                          </p:stCondLst>
-                                        </p:cTn>
-                                        <p:tgtEl>
-                                          <p:spTgt spid="5">
-                                            <p:txEl>
-                                              <p:pRg st="2" end="2"/>
-                                            </p:txEl>
-                                          </p:spTgt>
-                                        </p:tgtEl>
-                                        <p:attrNameLst>
-                                          <p:attrName>style.visibility</p:attrName>
-                                        </p:attrNameLst>
-                                      </p:cBhvr>
-                                      <p:to>
-                                        <p:strVal val="visible"/>
-                                      </p:to>
-                                    </p:set>
-                                    <p:animEffect transition="in" filter="fade">
-                                      <p:cBhvr>
-                                        <p:cTn id="63" dur="250"/>
-                                        <p:tgtEl>
-                                          <p:spTgt spid="5">
-                                            <p:txEl>
-                                              <p:pRg st="2" end="2"/>
-                                            </p:txEl>
-                                          </p:spTgt>
-                                        </p:tgtEl>
-                                      </p:cBhvr>
-                                    </p:animEffect>
-                                  </p:childTnLst>
-                                </p:cTn>
-                              </p:par>
-                              <p:par>
-                                <p:cTn id="64" presetID="10" presetClass="exit" presetSubtype="0" fill="hold" grpId="1" nodeType="withEffect">
+                                <p:cTn id="59" presetID="10" presetClass="exit" presetSubtype="0" fill="hold" grpId="1" nodeType="withEffect">
                                   <p:stCondLst>
                                     <p:cond delay="0"/>
                                   </p:stCondLst>
                                   <p:childTnLst>
                                     <p:animEffect transition="out" filter="fade">
                                       <p:cBhvr>
-                                        <p:cTn id="65" dur="250"/>
+                                        <p:cTn id="60" dur="250"/>
                                         <p:tgtEl>
                                           <p:spTgt spid="17"/>
                                         </p:tgtEl>
@@ -15897,7 +15773,7 @@
                                     </p:animEffect>
                                     <p:set>
                                       <p:cBhvr>
-                                        <p:cTn id="66" dur="1" fill="hold">
+                                        <p:cTn id="61" dur="1" fill="hold">
                                           <p:stCondLst>
                                             <p:cond delay="249"/>
                                           </p:stCondLst>
@@ -15917,14 +15793,14 @@
                                 </p:cTn>
                               </p:par>
                               <p:par>
-                                <p:cTn id="67" presetID="10" presetClass="exit" presetSubtype="0" fill="hold" grpId="1" nodeType="withEffect">
+                                <p:cTn id="62" presetID="10" presetClass="exit" presetSubtype="0" fill="hold" grpId="1" nodeType="withEffect">
                                   <p:stCondLst>
                                     <p:cond delay="0"/>
                                   </p:stCondLst>
                                   <p:childTnLst>
                                     <p:animEffect transition="out" filter="fade">
                                       <p:cBhvr>
-                                        <p:cTn id="68" dur="250"/>
+                                        <p:cTn id="63" dur="250"/>
                                         <p:tgtEl>
                                           <p:spTgt spid="18"/>
                                         </p:tgtEl>
@@ -15932,7 +15808,7 @@
                                     </p:animEffect>
                                     <p:set>
                                       <p:cBhvr>
-                                        <p:cTn id="69" dur="1" fill="hold">
+                                        <p:cTn id="64" dur="1" fill="hold">
                                           <p:stCondLst>
                                             <p:cond delay="249"/>
                                           </p:stCondLst>
@@ -15952,14 +15828,14 @@
                                 </p:cTn>
                               </p:par>
                               <p:par>
-                                <p:cTn id="70" presetID="10" presetClass="exit" presetSubtype="0" fill="hold" grpId="1" nodeType="withEffect">
+                                <p:cTn id="65" presetID="10" presetClass="exit" presetSubtype="0" fill="hold" grpId="1" nodeType="withEffect">
                                   <p:stCondLst>
                                     <p:cond delay="0"/>
                                   </p:stCondLst>
                                   <p:childTnLst>
                                     <p:animEffect transition="out" filter="fade">
                                       <p:cBhvr>
-                                        <p:cTn id="71" dur="250"/>
+                                        <p:cTn id="66" dur="250"/>
                                         <p:tgtEl>
                                           <p:spTgt spid="15"/>
                                         </p:tgtEl>
@@ -15967,7 +15843,7 @@
                                     </p:animEffect>
                                     <p:set>
                                       <p:cBhvr>
-                                        <p:cTn id="72" dur="1" fill="hold">
+                                        <p:cTn id="67" dur="1" fill="hold">
                                           <p:stCondLst>
                                             <p:cond delay="249"/>
                                           </p:stCondLst>
@@ -15987,14 +15863,14 @@
                                 </p:cTn>
                               </p:par>
                               <p:par>
-                                <p:cTn id="73" presetID="10" presetClass="exit" presetSubtype="0" fill="hold" grpId="1" nodeType="withEffect">
+                                <p:cTn id="68" presetID="10" presetClass="exit" presetSubtype="0" fill="hold" grpId="1" nodeType="withEffect">
                                   <p:stCondLst>
                                     <p:cond delay="0"/>
                                   </p:stCondLst>
                                   <p:childTnLst>
                                     <p:animEffect transition="out" filter="fade">
                                       <p:cBhvr>
-                                        <p:cTn id="74" dur="250"/>
+                                        <p:cTn id="69" dur="250"/>
                                         <p:tgtEl>
                                           <p:spTgt spid="14"/>
                                         </p:tgtEl>
@@ -16002,7 +15878,7 @@
                                     </p:animEffect>
                                     <p:set>
                                       <p:cBhvr>
-                                        <p:cTn id="75" dur="1" fill="hold">
+                                        <p:cTn id="70" dur="1" fill="hold">
                                           <p:stCondLst>
                                             <p:cond delay="249"/>
                                           </p:stCondLst>
@@ -16022,14 +15898,14 @@
                                 </p:cTn>
                               </p:par>
                               <p:par>
-                                <p:cTn id="76" presetID="10" presetClass="exit" presetSubtype="0" fill="hold" grpId="1" nodeType="withEffect">
+                                <p:cTn id="71" presetID="10" presetClass="exit" presetSubtype="0" fill="hold" grpId="1" nodeType="withEffect">
                                   <p:stCondLst>
                                     <p:cond delay="0"/>
                                   </p:stCondLst>
                                   <p:childTnLst>
                                     <p:animEffect transition="out" filter="fade">
                                       <p:cBhvr>
-                                        <p:cTn id="77" dur="250"/>
+                                        <p:cTn id="72" dur="250"/>
                                         <p:tgtEl>
                                           <p:spTgt spid="12"/>
                                         </p:tgtEl>
@@ -16037,7 +15913,7 @@
                                     </p:animEffect>
                                     <p:set>
                                       <p:cBhvr>
-                                        <p:cTn id="78" dur="1" fill="hold">
+                                        <p:cTn id="73" dur="1" fill="hold">
                                           <p:stCondLst>
                                             <p:cond delay="249"/>
                                           </p:stCondLst>
@@ -31077,8 +30953,8 @@
           </a:p>
         </p:txBody>
       </p:sp>
-      <mc:AlternateContent xmlns:mc="http://schemas.openxmlformats.org/markup-compatibility/2006">
-        <mc:Choice xmlns:a14="http://schemas.microsoft.com/office/drawing/2010/main" Requires="a14">
+      <mc:AlternateContent xmlns:mc="http://schemas.openxmlformats.org/markup-compatibility/2006" xmlns:a14="http://schemas.microsoft.com/office/drawing/2010/main">
+        <mc:Choice Requires="a14">
           <p:sp>
             <p:nvSpPr>
               <p:cNvPr id="3" name="Content Placeholder 2">
@@ -31810,7 +31686,7 @@
             </p:txBody>
           </p:sp>
         </mc:Choice>
-        <mc:Fallback>
+        <mc:Fallback xmlns="">
           <p:sp>
             <p:nvSpPr>
               <p:cNvPr id="3" name="Content Placeholder 2">
@@ -38034,8 +37910,8 @@
           </a:p>
         </p:txBody>
       </p:sp>
-      <mc:AlternateContent xmlns:mc="http://schemas.openxmlformats.org/markup-compatibility/2006">
-        <mc:Choice xmlns:a14="http://schemas.microsoft.com/office/drawing/2010/main" Requires="a14">
+      <mc:AlternateContent xmlns:mc="http://schemas.openxmlformats.org/markup-compatibility/2006" xmlns:a14="http://schemas.microsoft.com/office/drawing/2010/main">
+        <mc:Choice Requires="a14">
           <p:sp>
             <p:nvSpPr>
               <p:cNvPr id="3" name="Content Placeholder 2">
@@ -38438,7 +38314,7 @@
             </p:txBody>
           </p:sp>
         </mc:Choice>
-        <mc:Fallback>
+        <mc:Fallback xmlns="">
           <p:sp>
             <p:nvSpPr>
               <p:cNvPr id="3" name="Content Placeholder 2">
